--- a/docs/deck/aoi-agent-journey.zh-TW.pptx
+++ b/docs/deck/aoi-agent-journey.zh-TW.pptx
@@ -30,6 +30,14 @@
     <p:sldId id="278" r:id="rId30"/>
     <p:sldId id="279" r:id="rId31"/>
     <p:sldId id="280" r:id="rId32"/>
+    <p:sldId id="281" r:id="rId33"/>
+    <p:sldId id="282" r:id="rId34"/>
+    <p:sldId id="283" r:id="rId35"/>
+    <p:sldId id="284" r:id="rId36"/>
+    <p:sldId id="285" r:id="rId37"/>
+    <p:sldId id="286" r:id="rId38"/>
+    <p:sldId id="287" r:id="rId39"/>
+    <p:sldId id="288" r:id="rId40"/>
   </p:sldIdLst>
   <p:sldSz cx="12191695" cy="6858000" type="screen4x3"/>
   <p:notesSz cx="6858000" cy="9144000"/>
@@ -2639,6 +2647,478 @@
 </p:notes>
 </file>
 
+<file path=ppt/notesSlides/notesSlide26.xml><?xml version="1.0" encoding="utf-8"?>
+<p:notes xmlns:a="http://schemas.openxmlformats.org/drawingml/2006/main" xmlns:p="http://schemas.openxmlformats.org/presentationml/2006/main" xmlns:r="http://schemas.openxmlformats.org/officeDocument/2006/relationships">
+  <p:cSld>
+    <p:spTree>
+      <p:nvGrpSpPr>
+        <p:cNvPr id="1" name=""/>
+        <p:cNvGrpSpPr/>
+        <p:nvPr/>
+      </p:nvGrpSpPr>
+      <p:grpSpPr>
+        <a:xfrm>
+          <a:off x="0" y="0"/>
+          <a:ext cx="0" cy="0"/>
+          <a:chOff x="0" y="0"/>
+          <a:chExt cx="0" cy="0"/>
+        </a:xfrm>
+      </p:grpSpPr>
+      <p:sp>
+        <p:nvSpPr>
+          <p:cNvPr id="2" name="Slide Image Placeholder 1"/>
+          <p:cNvSpPr>
+            <a:spLocks noGrp="1"/>
+          </p:cNvSpPr>
+          <p:nvPr>
+            <p:ph type="sldImg" idx="2"/>
+          </p:nvPr>
+        </p:nvSpPr>
+        <p:spPr/>
+      </p:sp>
+      <p:sp>
+        <p:nvSpPr>
+          <p:cNvPr id="3" name="Notes Placeholder 2"/>
+          <p:cNvSpPr>
+            <a:spLocks noGrp="1"/>
+          </p:cNvSpPr>
+          <p:nvPr>
+            <p:ph type="body" idx="3" sz="quarter"/>
+          </p:nvPr>
+        </p:nvSpPr>
+        <p:spPr/>
+        <p:txBody>
+          <a:bodyPr/>
+          <a:lstStyle/>
+          <a:p>
+            <a:r>
+              <a:t>白話：十個 epoch、四分鐘；看的不是準確率那條，是「在漏網預算下省掉多少」那條。</a:t>
+            </a:r>
+          </a:p>
+          <a:p/>
+          <a:p>
+            <a:r>
+              <a:t>講稿 1. 面試官問「你怎麼訓練的、有沒有過擬合」，翻這一頁。</a:t>
+            </a:r>
+          </a:p>
+          <a:p>
+            <a:r>
+              <a:t>講稿 2. 三條線：訓練 loss 一直降；驗證準確率兩個 epoch 就飽和；真正選模型用的是第三條——漏網預算下省掉的比例。</a:t>
+            </a:r>
+          </a:p>
+          <a:p>
+            <a:r>
+              <a:t>講稿 3. 準確率會騙人：它把漏一個缺陷和多看一個誤報算一樣。</a:t>
+            </a:r>
+          </a:p>
+          <a:p>
+            <a:r>
+              <a:t>講稿 4. loss 還在降、驗證指標不動，就是在背訓練集，所以十個 epoch 就停。</a:t>
+            </a:r>
+          </a:p>
+          <a:p/>
+          <a:p>
+            <a:r>
+              <a:t>面試官會問：</a:t>
+            </a:r>
+          </a:p>
+          <a:p>
+            <a:r>
+              <a:t>Q：為什麼不用 val_accuracy 選 checkpoint？</a:t>
+            </a:r>
+          </a:p>
+          <a:p>
+            <a:r>
+              <a:t>A：它第 2 個 epoch 就 97%，之後不動，而且它把漏網和誤報算一樣的錯。用的是驗證集上 ≤0.5% 漏網下省掉的比例，第 9 個 epoch 最高。</a:t>
+            </a:r>
+          </a:p>
+          <a:p/>
+          <a:p>
+            <a:r>
+              <a:t>Q：有沒有過擬合？</a:t>
+            </a:r>
+          </a:p>
+          <a:p>
+            <a:r>
+              <a:t>A：train_loss 降到 0.02 時驗證指標已經平了三個 epoch——是背訓練集的跡象，所以停在 10 個 epoch。驗證集按板子切，這個判斷才可信。</a:t>
+            </a:r>
+          </a:p>
+        </p:txBody>
+      </p:sp>
+      <p:sp>
+        <p:nvSpPr>
+          <p:cNvPr id="4" name="Slide Number Placeholder 3"/>
+          <p:cNvSpPr>
+            <a:spLocks noGrp="1"/>
+          </p:cNvSpPr>
+          <p:nvPr>
+            <p:ph type="sldNum" idx="5" sz="quarter"/>
+          </p:nvPr>
+        </p:nvSpPr>
+        <p:spPr/>
+      </p:sp>
+    </p:spTree>
+  </p:cSld>
+  <p:clrMapOvr>
+    <a:masterClrMapping/>
+  </p:clrMapOvr>
+</p:notes>
+</file>
+
+<file path=ppt/notesSlides/notesSlide27.xml><?xml version="1.0" encoding="utf-8"?>
+<p:notes xmlns:a="http://schemas.openxmlformats.org/drawingml/2006/main" xmlns:p="http://schemas.openxmlformats.org/presentationml/2006/main" xmlns:r="http://schemas.openxmlformats.org/officeDocument/2006/relationships">
+  <p:cSld>
+    <p:spTree>
+      <p:nvGrpSpPr>
+        <p:cNvPr id="1" name=""/>
+        <p:cNvGrpSpPr/>
+        <p:nvPr/>
+      </p:nvGrpSpPr>
+      <p:grpSpPr>
+        <a:xfrm>
+          <a:off x="0" y="0"/>
+          <a:ext cx="0" cy="0"/>
+          <a:chOff x="0" y="0"/>
+          <a:chExt cx="0" cy="0"/>
+        </a:xfrm>
+      </p:grpSpPr>
+      <p:sp>
+        <p:nvSpPr>
+          <p:cNvPr id="2" name="Slide Image Placeholder 1"/>
+          <p:cNvSpPr>
+            <a:spLocks noGrp="1"/>
+          </p:cNvSpPr>
+          <p:nvPr>
+            <p:ph type="sldImg" idx="2"/>
+          </p:nvPr>
+        </p:nvSpPr>
+        <p:spPr/>
+      </p:sp>
+      <p:sp>
+        <p:nvSpPr>
+          <p:cNvPr id="3" name="Notes Placeholder 2"/>
+          <p:cNvSpPr>
+            <a:spLocks noGrp="1"/>
+          </p:cNvSpPr>
+          <p:nvPr>
+            <p:ph type="body" idx="3" sz="quarter"/>
+          </p:nvPr>
+        </p:nvSpPr>
+        <p:spPr/>
+        <p:txBody>
+          <a:bodyPr/>
+          <a:lstStyle/>
+          <a:p>
+            <a:r>
+              <a:t>白話：同一把尺（≤0.5% 漏網下省掉多少）量四種做法，只有帶樣板通道的小 CNN 站得住。</a:t>
+            </a:r>
+          </a:p>
+          <a:p/>
+          <a:p>
+            <a:r>
+              <a:t>講稿 1. 「為什麼是 ResNet-18」的答案在這張表：同一把尺量四種做法。</a:t>
+            </a:r>
+          </a:p>
+          <a:p>
+            <a:r>
+              <a:t>講稿 2. 先看地板：不用模型、只算差異圖的統計，大約 1%。模型 52.8%，40 倍。</a:t>
+            </a:r>
+          </a:p>
+          <a:p>
+            <a:r>
+              <a:t>講稿 3. 再看兩個對照：拿掉樣板通道剩 2.8%，偵測器的信心 1.2%。所以關鍵不是網路多大，是輸入裡有沒有「本來該長怎樣」。</a:t>
+            </a:r>
+          </a:p>
+          <a:p>
+            <a:r>
+              <a:t>講稿 4. 沒試更大的模型，因為剩下的漏網是很有信心的錯，不是容量問題。</a:t>
+            </a:r>
+          </a:p>
+          <a:p/>
+          <a:p>
+            <a:r>
+              <a:t>面試官會問：</a:t>
+            </a:r>
+          </a:p>
+          <a:p>
+            <a:r>
+              <a:t>Q：為什麼不試 ResNet-50 或 ViT？</a:t>
+            </a:r>
+          </a:p>
+          <a:p>
+            <a:r>
+              <a:t>A：剩下的 15 個漏網是 confident errors——模型給它們的 P(open) 是 0.00007 到 0.00589，換大模型解決的是模糊地帶，不是這種。而且 CPU 2.5 ms 一個候選已經是週期的零頭。</a:t>
+            </a:r>
+          </a:p>
+          <a:p/>
+          <a:p>
+            <a:r>
+              <a:t>Q：地板是怎麼算的？</a:t>
+            </a:r>
+          </a:p>
+          <a:p>
+            <a:r>
+              <a:t>A：差異圖上不用模型就能算的分數：平均值、最大值、前 32/64/128 個像素的和、超過某亮度的像素數，各自當 P(false call) 掃同一條曲線，最好的在 ≤0.5% 下是 1.3%。</a:t>
+            </a:r>
+          </a:p>
+        </p:txBody>
+      </p:sp>
+      <p:sp>
+        <p:nvSpPr>
+          <p:cNvPr id="4" name="Slide Number Placeholder 3"/>
+          <p:cNvSpPr>
+            <a:spLocks noGrp="1"/>
+          </p:cNvSpPr>
+          <p:nvPr>
+            <p:ph type="sldNum" idx="5" sz="quarter"/>
+          </p:nvPr>
+        </p:nvSpPr>
+        <p:spPr/>
+      </p:sp>
+    </p:spTree>
+  </p:cSld>
+  <p:clrMapOvr>
+    <a:masterClrMapping/>
+  </p:clrMapOvr>
+</p:notes>
+</file>
+
+<file path=ppt/notesSlides/notesSlide28.xml><?xml version="1.0" encoding="utf-8"?>
+<p:notes xmlns:a="http://schemas.openxmlformats.org/drawingml/2006/main" xmlns:p="http://schemas.openxmlformats.org/presentationml/2006/main" xmlns:r="http://schemas.openxmlformats.org/officeDocument/2006/relationships">
+  <p:cSld>
+    <p:spTree>
+      <p:nvGrpSpPr>
+        <p:cNvPr id="1" name=""/>
+        <p:cNvGrpSpPr/>
+        <p:nvPr/>
+      </p:nvGrpSpPr>
+      <p:grpSpPr>
+        <a:xfrm>
+          <a:off x="0" y="0"/>
+          <a:ext cx="0" cy="0"/>
+          <a:chOff x="0" y="0"/>
+          <a:chExt cx="0" cy="0"/>
+        </a:xfrm>
+      </p:grpSpPr>
+      <p:sp>
+        <p:nvSpPr>
+          <p:cNvPr id="2" name="Slide Image Placeholder 1"/>
+          <p:cNvSpPr>
+            <a:spLocks noGrp="1"/>
+          </p:cNvSpPr>
+          <p:nvPr>
+            <p:ph type="sldImg" idx="2"/>
+          </p:nvPr>
+        </p:nvSpPr>
+        <p:spPr/>
+      </p:sp>
+      <p:sp>
+        <p:nvSpPr>
+          <p:cNvPr id="3" name="Notes Placeholder 2"/>
+          <p:cNvSpPr>
+            <a:spLocks noGrp="1"/>
+          </p:cNvSpPr>
+          <p:nvPr>
+            <p:ph type="body" idx="3" sz="quarter"/>
+          </p:nvPr>
+        </p:nvSpPr>
+        <p:spPr/>
+        <p:txBody>
+          <a:bodyPr/>
+          <a:lstStyle/>
+          <a:p>
+            <a:r>
+              <a:t>白話：兩種量化在漏網預算上幾乎一樣，差別在速度和校正方式；而且這個結論換權重就要重量。</a:t>
+            </a:r>
+          </a:p>
+          <a:p/>
+          <a:p>
+            <a:r>
+              <a:t>講稿 1. INT8 動態和靜態的差別，面試官問到就翻這張。</a:t>
+            </a:r>
+          </a:p>
+          <a:p>
+            <a:r>
+              <a:t>講稿 2. 在漏網預算上：動態 52.5、靜態 53.0，對 FP32 的 52.8，都在一點以內。類別一致 99.8%，不一致十幾個。</a:t>
+            </a:r>
+          </a:p>
+          <a:p>
+            <a:r>
+              <a:t>講稿 3. 靜態快 3.87 倍，但要校正集；校正集只用訓練 split，不碰 test。</a:t>
+            </a:r>
+          </a:p>
+          <a:p>
+            <a:r>
+              <a:t>講稿 4. 理由是記憶體，389 到 81 MB。而且這個結論在舊權重上是反的，所以量化進了重訓的檢查清單。</a:t>
+            </a:r>
+          </a:p>
+          <a:p/>
+          <a:p>
+            <a:r>
+              <a:t>面試官會問：</a:t>
+            </a:r>
+          </a:p>
+          <a:p>
+            <a:r>
+              <a:t>Q：動態和靜態的差別是什麼？</a:t>
+            </a:r>
+          </a:p>
+          <a:p>
+            <a:r>
+              <a:t>A：動態在推論時算 activation 的範圍，不用校正集，慢一點（1.31x）；靜態先用 512 個 trainval patch 校正好範圍，快 3.87x，但校正集選錯 split 就是作弊。兩者在 ≤0.5% 下是 52.5% 對 53.0%。</a:t>
+            </a:r>
+          </a:p>
+          <a:p/>
+          <a:p>
+            <a:r>
+              <a:t>Q：為什麼最後沒部署 INT8？</a:t>
+            </a:r>
+          </a:p>
+          <a:p>
+            <a:r>
+              <a:t>A：因為延遲不是問題：FP32 一個候選 2.53 ms，一片板 20 個候選 50 ms，週期 10 秒。記憶體 5 倍是真的好處，但站台目前沒有這個壓力，float32 加它掃出來的門檻更單純。</a:t>
+            </a:r>
+          </a:p>
+        </p:txBody>
+      </p:sp>
+      <p:sp>
+        <p:nvSpPr>
+          <p:cNvPr id="4" name="Slide Number Placeholder 3"/>
+          <p:cNvSpPr>
+            <a:spLocks noGrp="1"/>
+          </p:cNvSpPr>
+          <p:nvPr>
+            <p:ph type="sldNum" idx="5" sz="quarter"/>
+          </p:nvPr>
+        </p:nvSpPr>
+        <p:spPr/>
+      </p:sp>
+    </p:spTree>
+  </p:cSld>
+  <p:clrMapOvr>
+    <a:masterClrMapping/>
+  </p:clrMapOvr>
+</p:notes>
+</file>
+
+<file path=ppt/notesSlides/notesSlide29.xml><?xml version="1.0" encoding="utf-8"?>
+<p:notes xmlns:a="http://schemas.openxmlformats.org/drawingml/2006/main" xmlns:p="http://schemas.openxmlformats.org/presentationml/2006/main" xmlns:r="http://schemas.openxmlformats.org/officeDocument/2006/relationships">
+  <p:cSld>
+    <p:spTree>
+      <p:nvGrpSpPr>
+        <p:cNvPr id="1" name=""/>
+        <p:cNvGrpSpPr/>
+        <p:nvPr/>
+      </p:nvGrpSpPr>
+      <p:grpSpPr>
+        <a:xfrm>
+          <a:off x="0" y="0"/>
+          <a:ext cx="0" cy="0"/>
+          <a:chOff x="0" y="0"/>
+          <a:chExt cx="0" cy="0"/>
+        </a:xfrm>
+      </p:grpSpPr>
+      <p:sp>
+        <p:nvSpPr>
+          <p:cNvPr id="2" name="Slide Image Placeholder 1"/>
+          <p:cNvSpPr>
+            <a:spLocks noGrp="1"/>
+          </p:cNvSpPr>
+          <p:nvPr>
+            <p:ph type="sldImg" idx="2"/>
+          </p:nvPr>
+        </p:nvSpPr>
+        <p:spPr/>
+      </p:sp>
+      <p:sp>
+        <p:nvSpPr>
+          <p:cNvPr id="3" name="Notes Placeholder 2"/>
+          <p:cNvSpPr>
+            <a:spLocks noGrp="1"/>
+          </p:cNvSpPr>
+          <p:nvPr>
+            <p:ph type="body" idx="3" sz="quarter"/>
+          </p:nvPr>
+        </p:nvSpPr>
+        <p:spPr/>
+        <p:txBody>
+          <a:bodyPr/>
+          <a:lstStyle/>
+          <a:p>
+            <a:r>
+              <a:t>白話：這麼小的模型，一次一個的時候 GPU 派工的成本比算還貴；批到 8 個 GPU 才贏。</a:t>
+            </a:r>
+          </a:p>
+          <a:p/>
+          <a:p>
+            <a:r>
+              <a:t>講稿 1. 「複判站要不要 GPU」的答案：不用。一個候選 CPU 2.5 毫秒。</a:t>
+            </a:r>
+          </a:p>
+          <a:p>
+            <a:r>
+              <a:t>講稿 2. 反直覺的是 GPU 一次一個反而慢 2.9 倍，因為派工比算貴；批到 8 個才翻過來。</a:t>
+            </a:r>
+          </a:p>
+          <a:p>
+            <a:r>
+              <a:t>講稿 3. CPU 有個懸崖在 batch 16，所以批 8。</a:t>
+            </a:r>
+          </a:p>
+          <a:p>
+            <a:r>
+              <a:t>講稿 4. 這一頁還有一個教訓：ollama ps 不是 GPU 檢查，第一次量的數字是在旁邊有訓練跑的時候量的，作廢。</a:t>
+            </a:r>
+          </a:p>
+          <a:p/>
+          <a:p>
+            <a:r>
+              <a:t>面試官會問：</a:t>
+            </a:r>
+          </a:p>
+          <a:p>
+            <a:r>
+              <a:t>Q：複判站需要 GPU 嗎？</a:t>
+            </a:r>
+          </a:p>
+          <a:p>
+            <a:r>
+              <a:t>A：不需要。CPU p50 2.50 ms 一個候選，43 MB 的 checkpoint；GPU 在 batch 1 反而慢 2.9 倍，batch 8 才追過。</a:t>
+            </a:r>
+          </a:p>
+          <a:p/>
+          <a:p>
+            <a:r>
+              <a:t>Q：你怎麼確定延遲數字沒被別的工作污染？</a:t>
+            </a:r>
+          </a:p>
+          <a:p>
+            <a:r>
+              <a:t>A：腳本量之前和之後都掃 ollama ps 和 process table，有 torch/ffmpeg 在跑就拒絕發布。這條規則是被一次作廢的量測換來的。</a:t>
+            </a:r>
+          </a:p>
+        </p:txBody>
+      </p:sp>
+      <p:sp>
+        <p:nvSpPr>
+          <p:cNvPr id="4" name="Slide Number Placeholder 3"/>
+          <p:cNvSpPr>
+            <a:spLocks noGrp="1"/>
+          </p:cNvSpPr>
+          <p:nvPr>
+            <p:ph type="sldNum" idx="5" sz="quarter"/>
+          </p:nvPr>
+        </p:nvSpPr>
+        <p:spPr/>
+      </p:sp>
+    </p:spTree>
+  </p:cSld>
+  <p:clrMapOvr>
+    <a:masterClrMapping/>
+  </p:clrMapOvr>
+</p:notes>
+</file>
+
 <file path=ppt/notesSlides/notesSlide3.xml><?xml version="1.0" encoding="utf-8"?>
 <p:notes xmlns:a="http://schemas.openxmlformats.org/drawingml/2006/main" xmlns:p="http://schemas.openxmlformats.org/presentationml/2006/main" xmlns:r="http://schemas.openxmlformats.org/officeDocument/2006/relationships">
   <p:cSld>
@@ -2733,6 +3213,478 @@
           <a:p>
             <a:r>
               <a:t>A：它來自我自己寫的品質文件 QP-110——這個專案的驗收標準全是自撰的，不是 IPC-A-610，因為那是有版權的。預算是一個輸入，不是我調出來的。</a:t>
+            </a:r>
+          </a:p>
+        </p:txBody>
+      </p:sp>
+      <p:sp>
+        <p:nvSpPr>
+          <p:cNvPr id="4" name="Slide Number Placeholder 3"/>
+          <p:cNvSpPr>
+            <a:spLocks noGrp="1"/>
+          </p:cNvSpPr>
+          <p:nvPr>
+            <p:ph type="sldNum" idx="5" sz="quarter"/>
+          </p:nvPr>
+        </p:nvSpPr>
+        <p:spPr/>
+      </p:sp>
+    </p:spTree>
+  </p:cSld>
+  <p:clrMapOvr>
+    <a:masterClrMapping/>
+  </p:clrMapOvr>
+</p:notes>
+</file>
+
+<file path=ppt/notesSlides/notesSlide30.xml><?xml version="1.0" encoding="utf-8"?>
+<p:notes xmlns:a="http://schemas.openxmlformats.org/drawingml/2006/main" xmlns:p="http://schemas.openxmlformats.org/presentationml/2006/main" xmlns:r="http://schemas.openxmlformats.org/officeDocument/2006/relationships">
+  <p:cSld>
+    <p:spTree>
+      <p:nvGrpSpPr>
+        <p:cNvPr id="1" name=""/>
+        <p:cNvGrpSpPr/>
+        <p:nvPr/>
+      </p:nvGrpSpPr>
+      <p:grpSpPr>
+        <a:xfrm>
+          <a:off x="0" y="0"/>
+          <a:ext cx="0" cy="0"/>
+          <a:chOff x="0" y="0"/>
+          <a:chExt cx="0" cy="0"/>
+        </a:xfrm>
+      </p:grpSpPr>
+      <p:sp>
+        <p:nvSpPr>
+          <p:cNvPr id="2" name="Slide Image Placeholder 1"/>
+          <p:cNvSpPr>
+            <a:spLocks noGrp="1"/>
+          </p:cNvSpPr>
+          <p:nvPr>
+            <p:ph type="sldImg" idx="2"/>
+          </p:nvPr>
+        </p:nvSpPr>
+        <p:spPr/>
+      </p:sp>
+      <p:sp>
+        <p:nvSpPr>
+          <p:cNvPr id="3" name="Notes Placeholder 2"/>
+          <p:cNvSpPr>
+            <a:spLocks noGrp="1"/>
+          </p:cNvSpPr>
+          <p:nvPr>
+            <p:ph type="body" idx="3" sz="quarter"/>
+          </p:nvPr>
+        </p:nvSpPr>
+        <p:spPr/>
+        <p:txBody>
+          <a:bodyPr/>
+          <a:lstStyle/>
+          <a:p>
+            <a:r>
+              <a:t>白話：偵測器訓 56 分鐘找得到瑕疵；拿它的框訓同一個 ResNet、沒有樣板通道，曲線根本爬不起來。</a:t>
+            </a:r>
+          </a:p>
+          <a:p/>
+          <a:p>
+            <a:r>
+              <a:t>講稿 1. 偵測器那兩個實驗的訓練細節在這頁。</a:t>
+            </a:r>
+          </a:p>
+          <a:p>
+            <a:r>
+              <a:t>講稿 2. YOLO26n 六十個 epoch、56 分鐘，找得到 92% 的瑕疵。</a:t>
+            </a:r>
+          </a:p>
+          <a:p>
+            <a:r>
+              <a:t>講稿 3. 重點是下面這條曲線：拿它的框訓同一個 ResNet、沒有樣板通道，驗證集上省掉的比例十個 epoch 都在 1 到 3%，根本爬不起來。</a:t>
+            </a:r>
+          </a:p>
+          <a:p>
+            <a:r>
+              <a:t>講稿 4. 訓練條件的限制都寫了：CPU 上訓、一個 seed、偵測器看過訓練圖。</a:t>
+            </a:r>
+          </a:p>
+          <a:p/>
+          <a:p>
+            <a:r>
+              <a:t>面試官會問：</a:t>
+            </a:r>
+          </a:p>
+          <a:p>
+            <a:r>
+              <a:t>Q：imgsz 為什麼是 640？</a:t>
+            </a:r>
+          </a:p>
+          <a:p>
+            <a:r>
+              <a:t>A：YOLO 的預設，目標中位數 17 px 在 640 下大約 1% 的畫幅。1280 是唯一沒試、可能有用的方向，文件裡寫著沒試。</a:t>
+            </a:r>
+          </a:p>
+          <a:p/>
+          <a:p>
+            <a:r>
+              <a:t>Q：crop 複判器訓不起來，會不會是訓練有問題？</a:t>
+            </a:r>
+          </a:p>
+          <a:p>
+            <a:r>
+              <a:t>A：有可能，而且條目裡寫了限制：CPU 訓、一個 seed。但 train_loss 降到 0.03、val_accuracy 83%，模型有在學；它學不到的是在 ≤0.5% 漏網下把誤報排掉，那條線在 1–3%。</a:t>
+            </a:r>
+          </a:p>
+        </p:txBody>
+      </p:sp>
+      <p:sp>
+        <p:nvSpPr>
+          <p:cNvPr id="4" name="Slide Number Placeholder 3"/>
+          <p:cNvSpPr>
+            <a:spLocks noGrp="1"/>
+          </p:cNvSpPr>
+          <p:nvPr>
+            <p:ph type="sldNum" idx="5" sz="quarter"/>
+          </p:nvPr>
+        </p:nvSpPr>
+        <p:spPr/>
+      </p:sp>
+    </p:spTree>
+  </p:cSld>
+  <p:clrMapOvr>
+    <a:masterClrMapping/>
+  </p:clrMapOvr>
+</p:notes>
+</file>
+
+<file path=ppt/notesSlides/notesSlide31.xml><?xml version="1.0" encoding="utf-8"?>
+<p:notes xmlns:a="http://schemas.openxmlformats.org/drawingml/2006/main" xmlns:p="http://schemas.openxmlformats.org/presentationml/2006/main" xmlns:r="http://schemas.openxmlformats.org/officeDocument/2006/relationships">
+  <p:cSld>
+    <p:spTree>
+      <p:nvGrpSpPr>
+        <p:cNvPr id="1" name=""/>
+        <p:cNvGrpSpPr/>
+        <p:nvPr/>
+      </p:nvGrpSpPr>
+      <p:grpSpPr>
+        <a:xfrm>
+          <a:off x="0" y="0"/>
+          <a:ext cx="0" cy="0"/>
+          <a:chOff x="0" y="0"/>
+          <a:chExt cx="0" cy="0"/>
+        </a:xfrm>
+      </p:grpSpPr>
+      <p:sp>
+        <p:nvSpPr>
+          <p:cNvPr id="2" name="Slide Image Placeholder 1"/>
+          <p:cNvSpPr>
+            <a:spLocks noGrp="1"/>
+          </p:cNvSpPr>
+          <p:nvPr>
+            <p:ph type="sldImg" idx="2"/>
+          </p:nvPr>
+        </p:nvSpPr>
+        <p:spPr/>
+      </p:sp>
+      <p:sp>
+        <p:nvSpPr>
+          <p:cNvPr id="3" name="Notes Placeholder 2"/>
+          <p:cNvSpPr>
+            <a:spLocks noGrp="1"/>
+          </p:cNvSpPr>
+          <p:nvPr>
+            <p:ph type="body" idx="3" sz="quarter"/>
+          </p:nvPr>
+        </p:nvSpPr>
+        <p:spPr/>
+        <p:txBody>
+          <a:bodyPr/>
+          <a:lstStyle/>
+          <a:p>
+            <a:r>
+              <a:t>白話：同一個相減、同一組門檻掃過去：二值圖上 recall 96% 且誤報穩定；照片上要 recall 就要付 860 個誤報一張。</a:t>
+            </a:r>
+          </a:p>
+          <a:p/>
+          <a:p>
+            <a:r>
+              <a:t>講稿 1. 第 13 頁講 HRIPCB 第一關就壞，這裡是那三條曲線。</a:t>
+            </a:r>
+          </a:p>
+          <a:p>
+            <a:r>
+              <a:t>講稿 2. DeepPCB 的線是平的：門檻從 30 到 100 recall 都 95.7%，因為二值圖沒有灰階可以調，差異不是 0 就是 255。</a:t>
+            </a:r>
+          </a:p>
+          <a:p>
+            <a:r>
+              <a:t>講稿 3. HRIPCB 對齊的線陡降：門檻 10 還有 92%，到 60 只剩 14%。加擾動之後，門檻 10 每張 860 個誤報。</a:t>
+            </a:r>
+          </a:p>
+          <a:p>
+            <a:r>
+              <a:t>講稿 4. 沒有任何一點同時 recall 夠高、誤報夠低，這就是「任何設定都過不了」的意思。</a:t>
+            </a:r>
+          </a:p>
+          <a:p/>
+          <a:p>
+            <a:r>
+              <a:t>面試官會問：</a:t>
+            </a:r>
+          </a:p>
+          <a:p>
+            <a:r>
+              <a:t>Q：HRIPCB 的 short 類 recall 為什麼特別低？</a:t>
+            </a:r>
+          </a:p>
+          <a:p>
+            <a:r>
+              <a:t>A：對齊版門檻 10 時 short 只有 60.3%，其他類 97% 以上。short 是兩條線之間細細的一道橋，在照片上灰階差最淡，相減最先丟掉它。</a:t>
+            </a:r>
+          </a:p>
+          <a:p/>
+          <a:p>
+            <a:r>
+              <a:t>Q：DeepPCB 的門檻 60 是怎麼選的？</a:t>
+            </a:r>
+          </a:p>
+          <a:p>
+            <a:r>
+              <a:t>A：在二值圖上門檻 30 到 100 結果一樣（recall 95.7%、10.7 個誤報），所以 60 只是中間值。這也是為什麼它在照片上會失效：那個數字從來沒被真的灰階考驗過。</a:t>
+            </a:r>
+          </a:p>
+        </p:txBody>
+      </p:sp>
+      <p:sp>
+        <p:nvSpPr>
+          <p:cNvPr id="4" name="Slide Number Placeholder 3"/>
+          <p:cNvSpPr>
+            <a:spLocks noGrp="1"/>
+          </p:cNvSpPr>
+          <p:nvPr>
+            <p:ph type="sldNum" idx="5" sz="quarter"/>
+          </p:nvPr>
+        </p:nvSpPr>
+        <p:spPr/>
+      </p:sp>
+    </p:spTree>
+  </p:cSld>
+  <p:clrMapOvr>
+    <a:masterClrMapping/>
+  </p:clrMapOvr>
+</p:notes>
+</file>
+
+<file path=ppt/notesSlides/notesSlide32.xml><?xml version="1.0" encoding="utf-8"?>
+<p:notes xmlns:a="http://schemas.openxmlformats.org/drawingml/2006/main" xmlns:p="http://schemas.openxmlformats.org/presentationml/2006/main" xmlns:r="http://schemas.openxmlformats.org/officeDocument/2006/relationships">
+  <p:cSld>
+    <p:spTree>
+      <p:nvGrpSpPr>
+        <p:cNvPr id="1" name=""/>
+        <p:cNvGrpSpPr/>
+        <p:nvPr/>
+      </p:nvGrpSpPr>
+      <p:grpSpPr>
+        <a:xfrm>
+          <a:off x="0" y="0"/>
+          <a:ext cx="0" cy="0"/>
+          <a:chOff x="0" y="0"/>
+          <a:chExt cx="0" cy="0"/>
+        </a:xfrm>
+      </p:grpSpPr>
+      <p:sp>
+        <p:nvSpPr>
+          <p:cNvPr id="2" name="Slide Image Placeholder 1"/>
+          <p:cNvSpPr>
+            <a:spLocks noGrp="1"/>
+          </p:cNvSpPr>
+          <p:nvPr>
+            <p:ph type="sldImg" idx="2"/>
+          </p:nvPr>
+        </p:nvSpPr>
+        <p:spPr/>
+      </p:sp>
+      <p:sp>
+        <p:nvSpPr>
+          <p:cNvPr id="3" name="Notes Placeholder 2"/>
+          <p:cNvSpPr>
+            <a:spLocks noGrp="1"/>
+          </p:cNvSpPr>
+          <p:nvPr>
+            <p:ph type="body" idx="3" sz="quarter"/>
+          </p:nvPr>
+        </p:nvSpPr>
+        <p:spPr/>
+        <p:txBody>
+          <a:bodyPr/>
+          <a:lstStyle/>
+          <a:p>
+            <a:r>
+              <a:t>白話：一份訓練和量測、一份只給偵測器、一份只當考卷。</a:t>
+            </a:r>
+          </a:p>
+          <a:p/>
+          <a:p>
+            <a:r>
+              <a:t>講稿 1. 面試官問「你的資料哪來的」，這一頁。</a:t>
+            </a:r>
+          </a:p>
+          <a:p>
+            <a:r>
+              <a:t>講稿 2. 三份，各做一件事。DeepPCB 是主線。PCB-AoI 只給偵測器，因為它沒有樣板。HRIPCB 只當考卷。</a:t>
+            </a:r>
+          </a:p>
+          <a:p>
+            <a:r>
+              <a:t>講稿 3. 產線的機台、批號那些是種出來的，而且種的時候放了對照組，讓工具有機會答錯。</a:t>
+            </a:r>
+          </a:p>
+          <a:p>
+            <a:r>
+              <a:t>講稿 4. 驗收標準是自己寫的，不是 IPC，因為那有版權。</a:t>
+            </a:r>
+          </a:p>
+          <a:p/>
+          <a:p>
+            <a:r>
+              <a:t>面試官會問：</a:t>
+            </a:r>
+          </a:p>
+          <a:p>
+            <a:r>
+              <a:t>Q：模擬的產線資料會不會讓 /ask 的評測失真？</a:t>
+            </a:r>
+          </a:p>
+          <a:p>
+            <a:r>
+              <a:t>A：種的時候故意放了控制組：M22 和 M32 有真的效果，另外三台機有事件但沒效果，M11 承接鏡像。一個工具如果對「有沒有事件」而不是「有沒有影響」打分，會在控制組上露餡。</a:t>
+            </a:r>
+          </a:p>
+          <a:p/>
+          <a:p>
+            <a:r>
+              <a:t>Q：HRIPCB 為什麼不合併到 DeepPCB 的類別表？</a:t>
+            </a:r>
+          </a:p>
+          <a:p>
+            <a:r>
+              <a:t>A：它的 missing_hole 不是 DeepPCB 的 pin-hole，而且沒有對應的工作指示。硬合併等於替一個沒有驗收標準的類別發明標準。</a:t>
+            </a:r>
+          </a:p>
+        </p:txBody>
+      </p:sp>
+      <p:sp>
+        <p:nvSpPr>
+          <p:cNvPr id="4" name="Slide Number Placeholder 3"/>
+          <p:cNvSpPr>
+            <a:spLocks noGrp="1"/>
+          </p:cNvSpPr>
+          <p:nvPr>
+            <p:ph type="sldNum" idx="5" sz="quarter"/>
+          </p:nvPr>
+        </p:nvSpPr>
+        <p:spPr/>
+      </p:sp>
+    </p:spTree>
+  </p:cSld>
+  <p:clrMapOvr>
+    <a:masterClrMapping/>
+  </p:clrMapOvr>
+</p:notes>
+</file>
+
+<file path=ppt/notesSlides/notesSlide33.xml><?xml version="1.0" encoding="utf-8"?>
+<p:notes xmlns:a="http://schemas.openxmlformats.org/drawingml/2006/main" xmlns:p="http://schemas.openxmlformats.org/presentationml/2006/main" xmlns:r="http://schemas.openxmlformats.org/officeDocument/2006/relationships">
+  <p:cSld>
+    <p:spTree>
+      <p:nvGrpSpPr>
+        <p:cNvPr id="1" name=""/>
+        <p:cNvGrpSpPr/>
+        <p:nvPr/>
+      </p:nvGrpSpPr>
+      <p:grpSpPr>
+        <a:xfrm>
+          <a:off x="0" y="0"/>
+          <a:ext cx="0" cy="0"/>
+          <a:chOff x="0" y="0"/>
+          <a:chExt cx="0" cy="0"/>
+        </a:xfrm>
+      </p:grpSpPr>
+      <p:sp>
+        <p:nvSpPr>
+          <p:cNvPr id="2" name="Slide Image Placeholder 1"/>
+          <p:cNvSpPr>
+            <a:spLocks noGrp="1"/>
+          </p:cNvSpPr>
+          <p:nvPr>
+            <p:ph type="sldImg" idx="2"/>
+          </p:nvPr>
+        </p:nvSpPr>
+        <p:spPr/>
+      </p:sp>
+      <p:sp>
+        <p:nvSpPr>
+          <p:cNvPr id="3" name="Notes Placeholder 2"/>
+          <p:cNvSpPr>
+            <a:spLocks noGrp="1"/>
+          </p:cNvSpPr>
+          <p:nvPr>
+            <p:ph type="body" idx="3" sz="quarter"/>
+          </p:nvPr>
+        </p:nvSpPr>
+        <p:spPr/>
+        <p:txBody>
+          <a:bodyPr/>
+          <a:lstStyle/>
+          <a:p>
+            <a:r>
+              <a:t>白話：每個數字都有一個打得開的檔案；測試在數字和出處分開時會紅。</a:t>
+            </a:r>
+          </a:p>
+          <a:p/>
+          <a:p>
+            <a:r>
+              <a:t>講稿 1. 「你的門檻怎麼來的」——這一頁一次答完。</a:t>
+            </a:r>
+          </a:p>
+          <a:p>
+            <a:r>
+              <a:t>講稿 2. 兩個路由門檻是同一個數字，來自掃描，往上取整；一個是關係式。</a:t>
+            </a:r>
+          </a:p>
+          <a:p>
+            <a:r>
+              <a:t>講稿 3. 有測試盯著：數字和它的出處分開就紅，第 11 頁那個錯就是這樣被鎖住的。</a:t>
+            </a:r>
+          </a:p>
+          <a:p>
+            <a:r>
+              <a:t>講稿 4. 灰階門檻 60 在二值圖上 30 到 100 都一樣，這也是它在照片上失效的原因。</a:t>
+            </a:r>
+          </a:p>
+          <a:p/>
+          <a:p>
+            <a:r>
+              <a:t>面試官會問：</a:t>
+            </a:r>
+          </a:p>
+          <a:p>
+            <a:r>
+              <a:t>Q：如果換一批資料重訓，哪些數字要動？</a:t>
+            </a:r>
+          </a:p>
+          <a:p>
+            <a:r>
+              <a:t>A：0.961 重掃、ESCALATE_BELOW 自動跟、CONFIDENT 是關係式自動跟；EXPLAINED_BAND 要重看它買到多少說明；灰階 60 換資料集要重跑 gate。這整條寫成 skill，順序不能跳。</a:t>
+            </a:r>
+          </a:p>
+          <a:p/>
+          <a:p>
+            <a:r>
+              <a:t>Q：為什麼 CONFIDENT 不影響任何處置？</a:t>
+            </a:r>
+          </a:p>
+          <a:p>
+            <a:r>
+              <a:t>A：它只決定要不要叫 LLM 寫說明，不決定處置——掃到 0.999 改變 0 個處置。所以它是成本閘門，寫成 ESCALATE_BELOW + 0.035。</a:t>
             </a:r>
           </a:p>
         </p:txBody>
@@ -6632,7 +7584,7 @@
                 </a:solidFill>
                 <a:latin typeface="IBM Plex Mono"/>
               </a:rPr>
-              <a:t>1 / 25</a:t>
+              <a:t>1 / 33</a:t>
             </a:r>
           </a:p>
         </p:txBody>
@@ -6986,7 +7938,7 @@
                 </a:solidFill>
                 <a:latin typeface="IBM Plex Mono"/>
               </a:rPr>
-              <a:t>★ 主線 4/9 · 10 / 25</a:t>
+              <a:t>★ 主線 4/9 · 10 / 33</a:t>
             </a:r>
           </a:p>
         </p:txBody>
@@ -7519,7 +8471,7 @@
                 </a:solidFill>
                 <a:latin typeface="IBM Plex Mono"/>
               </a:rPr>
-              <a:t>11 / 25</a:t>
+              <a:t>11 / 33</a:t>
             </a:r>
           </a:p>
         </p:txBody>
@@ -8052,7 +9004,7 @@
                 </a:solidFill>
                 <a:latin typeface="IBM Plex Mono"/>
               </a:rPr>
-              <a:t>12 / 25</a:t>
+              <a:t>12 / 33</a:t>
             </a:r>
           </a:p>
         </p:txBody>
@@ -8585,7 +9537,7 @@
                 </a:solidFill>
                 <a:latin typeface="IBM Plex Mono"/>
               </a:rPr>
-              <a:t>13 / 25</a:t>
+              <a:t>13 / 33</a:t>
             </a:r>
           </a:p>
         </p:txBody>
@@ -9118,7 +10070,7 @@
                 </a:solidFill>
                 <a:latin typeface="IBM Plex Mono"/>
               </a:rPr>
-              <a:t>14 / 25</a:t>
+              <a:t>14 / 33</a:t>
             </a:r>
           </a:p>
         </p:txBody>
@@ -9651,7 +10603,7 @@
                 </a:solidFill>
                 <a:latin typeface="IBM Plex Mono"/>
               </a:rPr>
-              <a:t>★ 主線 8/9 · 15 / 25</a:t>
+              <a:t>★ 主線 8/9 · 15 / 33</a:t>
             </a:r>
           </a:p>
         </p:txBody>
@@ -10184,7 +11136,7 @@
                 </a:solidFill>
                 <a:latin typeface="IBM Plex Mono"/>
               </a:rPr>
-              <a:t>★ 主線 6/9 · 16 / 25</a:t>
+              <a:t>★ 主線 6/9 · 16 / 33</a:t>
             </a:r>
           </a:p>
         </p:txBody>
@@ -10717,7 +11669,7 @@
                 </a:solidFill>
                 <a:latin typeface="IBM Plex Mono"/>
               </a:rPr>
-              <a:t>★ 主線 7/9 · 17 / 25</a:t>
+              <a:t>★ 主線 7/9 · 17 / 33</a:t>
             </a:r>
           </a:p>
         </p:txBody>
@@ -11250,7 +12202,7 @@
                 </a:solidFill>
                 <a:latin typeface="IBM Plex Mono"/>
               </a:rPr>
-              <a:t>18 / 25</a:t>
+              <a:t>18 / 33</a:t>
             </a:r>
           </a:p>
         </p:txBody>
@@ -11783,7 +12735,7 @@
                 </a:solidFill>
                 <a:latin typeface="IBM Plex Mono"/>
               </a:rPr>
-              <a:t>19 / 25</a:t>
+              <a:t>19 / 33</a:t>
             </a:r>
           </a:p>
         </p:txBody>
@@ -11861,8 +12813,8 @@
         </p:nvSpPr>
         <p:spPr>
           <a:xfrm>
-            <a:off x="548640" y="1463040"/>
-            <a:ext cx="11064240" cy="4754880"/>
+            <a:off x="548640" y="1371600"/>
+            <a:ext cx="11064240" cy="4937760"/>
           </a:xfrm>
           <a:prstGeom prst="rect">
             <a:avLst/>
@@ -12074,7 +13026,7 @@
                 </a:solidFill>
                 <a:latin typeface="IBM Plex Mono"/>
               </a:rPr>
-              <a:t>★ 主線 1/9 · 2 / 25</a:t>
+              <a:t>★ 主線 1/9 · 2 / 33</a:t>
             </a:r>
           </a:p>
         </p:txBody>
@@ -12417,7 +13369,7 @@
                 </a:solidFill>
                 <a:latin typeface="IBM Plex Mono"/>
               </a:rPr>
-              <a:t>20 / 25</a:t>
+              <a:t>20 / 33</a:t>
             </a:r>
           </a:p>
         </p:txBody>
@@ -12950,7 +13902,7 @@
                 </a:solidFill>
                 <a:latin typeface="IBM Plex Mono"/>
               </a:rPr>
-              <a:t>21 / 25</a:t>
+              <a:t>21 / 33</a:t>
             </a:r>
           </a:p>
         </p:txBody>
@@ -13483,7 +14435,7 @@
                 </a:solidFill>
                 <a:latin typeface="IBM Plex Mono"/>
               </a:rPr>
-              <a:t>22 / 25</a:t>
+              <a:t>22 / 33</a:t>
             </a:r>
           </a:p>
         </p:txBody>
@@ -14016,7 +14968,7 @@
                 </a:solidFill>
                 <a:latin typeface="IBM Plex Mono"/>
               </a:rPr>
-              <a:t>23 / 25</a:t>
+              <a:t>23 / 33</a:t>
             </a:r>
           </a:p>
         </p:txBody>
@@ -14549,7 +15501,7 @@
                 </a:solidFill>
                 <a:latin typeface="IBM Plex Mono"/>
               </a:rPr>
-              <a:t>★ 主線 9/9 · 24 / 25</a:t>
+              <a:t>★ 主線 9/9 · 24 / 33</a:t>
             </a:r>
           </a:p>
         </p:txBody>
@@ -14627,8 +15579,8 @@
         </p:nvSpPr>
         <p:spPr>
           <a:xfrm>
-            <a:off x="548640" y="1463040"/>
-            <a:ext cx="11064240" cy="4754880"/>
+            <a:off x="548640" y="1371600"/>
+            <a:ext cx="11064240" cy="4937760"/>
           </a:xfrm>
           <a:prstGeom prst="rect">
             <a:avLst/>
@@ -14840,7 +15792,2611 @@
                 </a:solidFill>
                 <a:latin typeface="IBM Plex Mono"/>
               </a:rPr>
-              <a:t>25 / 25</a:t>
+              <a:t>25 / 33</a:t>
+            </a:r>
+          </a:p>
+        </p:txBody>
+      </p:sp>
+    </p:spTree>
+  </p:cSld>
+  <p:clrMapOvr>
+    <a:masterClrMapping/>
+  </p:clrMapOvr>
+</p:sld>
+</file>
+
+<file path=ppt/slides/slide26.xml><?xml version="1.0" encoding="utf-8"?>
+<p:sld xmlns:a="http://schemas.openxmlformats.org/drawingml/2006/main" xmlns:p="http://schemas.openxmlformats.org/presentationml/2006/main" xmlns:r="http://schemas.openxmlformats.org/officeDocument/2006/relationships">
+  <p:cSld>
+    <p:bg>
+      <p:bgPr>
+        <a:solidFill>
+          <a:srgbClr val="15171A"/>
+        </a:solidFill>
+        <a:effectLst/>
+      </p:bgPr>
+    </p:bg>
+    <p:spTree>
+      <p:nvGrpSpPr>
+        <p:cNvPr id="1" name=""/>
+        <p:cNvGrpSpPr/>
+        <p:nvPr/>
+      </p:nvGrpSpPr>
+      <p:grpSpPr/>
+      <p:sp>
+        <p:nvSpPr>
+          <p:cNvPr id="2" name="TextBox 1"/>
+          <p:cNvSpPr txBox="1"/>
+          <p:nvPr/>
+        </p:nvSpPr>
+        <p:spPr>
+          <a:xfrm>
+            <a:off x="457200" y="320040"/>
+            <a:ext cx="11247120" cy="914400"/>
+          </a:xfrm>
+          <a:prstGeom prst="rect">
+            <a:avLst/>
+          </a:prstGeom>
+          <a:noFill/>
+        </p:spPr>
+        <p:txBody>
+          <a:bodyPr wrap="square">
+            <a:spAutoFit/>
+          </a:bodyPr>
+          <a:lstStyle/>
+          <a:p>
+            <a:pPr>
+              <a:lnSpc>
+                <a:spcPct val="115000"/>
+              </a:lnSpc>
+            </a:pPr>
+            <a:r>
+              <a:rPr sz="2800" b="1">
+                <a:solidFill>
+                  <a:srgbClr val="E8E6E1"/>
+                </a:solidFill>
+                <a:latin typeface="Noto Sans TC"/>
+              </a:rPr>
+              <a:t>附錄 A · 主線複判模型的訓練曲線</a:t>
+            </a:r>
+          </a:p>
+        </p:txBody>
+      </p:sp>
+      <p:pic>
+        <p:nvPicPr>
+          <p:cNvPr id="3" name="Picture 2" descr="training_curves.png"/>
+          <p:cNvPicPr>
+            <a:picLocks noChangeAspect="1"/>
+          </p:cNvPicPr>
+          <p:nvPr/>
+        </p:nvPicPr>
+        <p:blipFill>
+          <a:blip r:embed="rId2"/>
+          <a:stretch>
+            <a:fillRect/>
+          </a:stretch>
+        </p:blipFill>
+        <p:spPr>
+          <a:xfrm>
+            <a:off x="548640" y="1280160"/>
+            <a:ext cx="6766560" cy="2142744"/>
+          </a:xfrm>
+          <a:prstGeom prst="rect">
+            <a:avLst/>
+          </a:prstGeom>
+        </p:spPr>
+      </p:pic>
+      <p:sp>
+        <p:nvSpPr>
+          <p:cNvPr id="4" name="TextBox 3"/>
+          <p:cNvSpPr txBox="1"/>
+          <p:nvPr/>
+        </p:nvSpPr>
+        <p:spPr>
+          <a:xfrm>
+            <a:off x="7589520" y="1280160"/>
+            <a:ext cx="4206240" cy="4389120"/>
+          </a:xfrm>
+          <a:prstGeom prst="rect">
+            <a:avLst/>
+          </a:prstGeom>
+          <a:noFill/>
+        </p:spPr>
+        <p:txBody>
+          <a:bodyPr wrap="square">
+            <a:spAutoFit/>
+          </a:bodyPr>
+          <a:lstStyle/>
+          <a:p>
+            <a:pPr>
+              <a:lnSpc>
+                <a:spcPct val="125000"/>
+              </a:lnSpc>
+            </a:pPr>
+            <a:r>
+              <a:rPr sz="1250" b="0">
+                <a:solidFill>
+                  <a:srgbClr val="6FC7CF"/>
+                </a:solidFill>
+                <a:latin typeface="Noto Sans TC"/>
+              </a:rPr>
+              <a:t>• </a:t>
+            </a:r>
+            <a:r>
+              <a:rPr sz="1250" b="0">
+                <a:solidFill>
+                  <a:srgbClr val="E8E6E1"/>
+                </a:solidFill>
+                <a:latin typeface="Noto Sans TC"/>
+              </a:rPr>
+              <a:t>ResNet-18，3×64×64 輸入，10 個 epoch，M5 Air 上約 4 分鐘（每 epoch 6 秒）</a:t>
+            </a:r>
+          </a:p>
+          <a:p>
+            <a:pPr>
+              <a:lnSpc>
+                <a:spcPct val="125000"/>
+              </a:lnSpc>
+            </a:pPr>
+            <a:r>
+              <a:rPr sz="1250" b="0">
+                <a:solidFill>
+                  <a:srgbClr val="6FC7CF"/>
+                </a:solidFill>
+                <a:latin typeface="Noto Sans TC"/>
+              </a:rPr>
+              <a:t>• </a:t>
+            </a:r>
+            <a:r>
+              <a:rPr sz="1250" b="0">
+                <a:solidFill>
+                  <a:srgbClr val="E8E6E1"/>
+                </a:solidFill>
+                <a:latin typeface="Noto Sans TC"/>
+              </a:rPr>
+              <a:t>val_accuracy 第 2 個 epoch 就過 97%，之後幾乎平——它不是選模型的指標</a:t>
+            </a:r>
+          </a:p>
+          <a:p>
+            <a:pPr>
+              <a:lnSpc>
+                <a:spcPct val="125000"/>
+              </a:lnSpc>
+            </a:pPr>
+            <a:r>
+              <a:rPr sz="1250" b="0">
+                <a:solidFill>
+                  <a:srgbClr val="6FC7CF"/>
+                </a:solidFill>
+                <a:latin typeface="Noto Sans TC"/>
+              </a:rPr>
+              <a:t>• </a:t>
+            </a:r>
+            <a:r>
+              <a:rPr sz="1250" b="0">
+                <a:solidFill>
+                  <a:srgbClr val="E8E6E1"/>
+                </a:solidFill>
+                <a:latin typeface="Noto Sans TC"/>
+              </a:rPr>
+              <a:t>val_review_reduction 從 0.40 爬到 0.45 上下，第 9 個 epoch 最高；選 checkpoint 看這條，因為頭條是它</a:t>
+            </a:r>
+          </a:p>
+          <a:p>
+            <a:pPr>
+              <a:lnSpc>
+                <a:spcPct val="125000"/>
+              </a:lnSpc>
+            </a:pPr>
+            <a:r>
+              <a:rPr sz="1250" b="0">
+                <a:solidFill>
+                  <a:srgbClr val="6FC7CF"/>
+                </a:solidFill>
+                <a:latin typeface="Noto Sans TC"/>
+              </a:rPr>
+              <a:t>• </a:t>
+            </a:r>
+            <a:r>
+              <a:rPr sz="1250" b="0">
+                <a:solidFill>
+                  <a:srgbClr val="E8E6E1"/>
+                </a:solidFill>
+                <a:latin typeface="Noto Sans TC"/>
+              </a:rPr>
+              <a:t>train_loss 一路降到 0.02 而驗證指標不再動：再訓是在背訓練集，不是在學</a:t>
+            </a:r>
+          </a:p>
+          <a:p>
+            <a:pPr>
+              <a:lnSpc>
+                <a:spcPct val="125000"/>
+              </a:lnSpc>
+            </a:pPr>
+            <a:r>
+              <a:rPr sz="1250" b="0">
+                <a:solidFill>
+                  <a:srgbClr val="6FC7CF"/>
+                </a:solidFill>
+                <a:latin typeface="Noto Sans TC"/>
+              </a:rPr>
+              <a:t>• </a:t>
+            </a:r>
+            <a:r>
+              <a:rPr sz="1250" b="0">
+                <a:solidFill>
+                  <a:srgbClr val="E8E6E1"/>
+                </a:solidFill>
+                <a:latin typeface="Noto Sans TC"/>
+              </a:rPr>
+              <a:t>驗證集按板子切，所以這條線是對「沒看過的板子」的估計，不是對 patch 的</a:t>
+            </a:r>
+          </a:p>
+        </p:txBody>
+      </p:sp>
+      <p:sp>
+        <p:nvSpPr>
+          <p:cNvPr id="5" name="TextBox 4"/>
+          <p:cNvSpPr txBox="1"/>
+          <p:nvPr/>
+        </p:nvSpPr>
+        <p:spPr>
+          <a:xfrm>
+            <a:off x="548640" y="5669280"/>
+            <a:ext cx="11155680" cy="457200"/>
+          </a:xfrm>
+          <a:prstGeom prst="rect">
+            <a:avLst/>
+          </a:prstGeom>
+          <a:noFill/>
+        </p:spPr>
+        <p:txBody>
+          <a:bodyPr wrap="square">
+            <a:spAutoFit/>
+          </a:bodyPr>
+          <a:lstStyle/>
+          <a:p>
+            <a:pPr>
+              <a:lnSpc>
+                <a:spcPct val="115000"/>
+              </a:lnSpc>
+            </a:pPr>
+            <a:r>
+              <a:rPr sz="1000" b="0">
+                <a:solidFill>
+                  <a:srgbClr val="9AA0A6"/>
+                </a:solidFill>
+                <a:latin typeface="IBM Plex Mono"/>
+              </a:rPr>
+              <a:t>models/history.json · train_loss / val_accuracy / val_review_reduction（≤0.5% 漏網下的驗證集省掉比例）</a:t>
+            </a:r>
+          </a:p>
+        </p:txBody>
+      </p:sp>
+      <p:sp>
+        <p:nvSpPr>
+          <p:cNvPr id="6" name="TextBox 5"/>
+          <p:cNvSpPr txBox="1"/>
+          <p:nvPr/>
+        </p:nvSpPr>
+        <p:spPr>
+          <a:xfrm>
+            <a:off x="457200" y="6400800"/>
+            <a:ext cx="5486400" cy="320040"/>
+          </a:xfrm>
+          <a:prstGeom prst="rect">
+            <a:avLst/>
+          </a:prstGeom>
+          <a:noFill/>
+        </p:spPr>
+        <p:txBody>
+          <a:bodyPr wrap="square">
+            <a:spAutoFit/>
+          </a:bodyPr>
+          <a:lstStyle/>
+          <a:p>
+            <a:pPr>
+              <a:lnSpc>
+                <a:spcPct val="115000"/>
+              </a:lnSpc>
+            </a:pPr>
+            <a:r>
+              <a:rPr sz="1000" b="0">
+                <a:solidFill>
+                  <a:srgbClr val="9AA0A6"/>
+                </a:solidFill>
+                <a:latin typeface="IBM Plex Mono"/>
+              </a:rPr>
+              <a:t>附錄 · 備查數字</a:t>
+            </a:r>
+          </a:p>
+        </p:txBody>
+      </p:sp>
+      <p:sp>
+        <p:nvSpPr>
+          <p:cNvPr id="7" name="TextBox 6"/>
+          <p:cNvSpPr txBox="1"/>
+          <p:nvPr/>
+        </p:nvSpPr>
+        <p:spPr>
+          <a:xfrm>
+            <a:off x="8046720" y="6400800"/>
+            <a:ext cx="3657600" cy="320040"/>
+          </a:xfrm>
+          <a:prstGeom prst="rect">
+            <a:avLst/>
+          </a:prstGeom>
+          <a:noFill/>
+        </p:spPr>
+        <p:txBody>
+          <a:bodyPr wrap="square">
+            <a:spAutoFit/>
+          </a:bodyPr>
+          <a:lstStyle/>
+          <a:p>
+            <a:pPr algn="r">
+              <a:lnSpc>
+                <a:spcPct val="115000"/>
+              </a:lnSpc>
+            </a:pPr>
+            <a:r>
+              <a:rPr sz="1000" b="0">
+                <a:solidFill>
+                  <a:srgbClr val="9AA0A6"/>
+                </a:solidFill>
+                <a:latin typeface="IBM Plex Mono"/>
+              </a:rPr>
+              <a:t>26 / 33</a:t>
+            </a:r>
+          </a:p>
+        </p:txBody>
+      </p:sp>
+    </p:spTree>
+  </p:cSld>
+  <p:clrMapOvr>
+    <a:masterClrMapping/>
+  </p:clrMapOvr>
+</p:sld>
+</file>
+
+<file path=ppt/slides/slide27.xml><?xml version="1.0" encoding="utf-8"?>
+<p:sld xmlns:a="http://schemas.openxmlformats.org/drawingml/2006/main" xmlns:p="http://schemas.openxmlformats.org/presentationml/2006/main" xmlns:r="http://schemas.openxmlformats.org/officeDocument/2006/relationships">
+  <p:cSld>
+    <p:bg>
+      <p:bgPr>
+        <a:solidFill>
+          <a:srgbClr val="15171A"/>
+        </a:solidFill>
+        <a:effectLst/>
+      </p:bgPr>
+    </p:bg>
+    <p:spTree>
+      <p:nvGrpSpPr>
+        <p:cNvPr id="1" name=""/>
+        <p:cNvGrpSpPr/>
+        <p:nvPr/>
+      </p:nvGrpSpPr>
+      <p:grpSpPr/>
+      <p:sp>
+        <p:nvSpPr>
+          <p:cNvPr id="2" name="TextBox 1"/>
+          <p:cNvSpPr txBox="1"/>
+          <p:nvPr/>
+        </p:nvSpPr>
+        <p:spPr>
+          <a:xfrm>
+            <a:off x="457200" y="320040"/>
+            <a:ext cx="11247120" cy="914400"/>
+          </a:xfrm>
+          <a:prstGeom prst="rect">
+            <a:avLst/>
+          </a:prstGeom>
+          <a:noFill/>
+        </p:spPr>
+        <p:txBody>
+          <a:bodyPr wrap="square">
+            <a:spAutoFit/>
+          </a:bodyPr>
+          <a:lstStyle/>
+          <a:p>
+            <a:pPr>
+              <a:lnSpc>
+                <a:spcPct val="115000"/>
+              </a:lnSpc>
+            </a:pPr>
+            <a:r>
+              <a:rPr sz="2800" b="1">
+                <a:solidFill>
+                  <a:srgbClr val="E8E6E1"/>
+                </a:solidFill>
+                <a:latin typeface="Noto Sans TC"/>
+              </a:rPr>
+              <a:t>附錄 B · 為什麼是這個模型：四個對照</a:t>
+            </a:r>
+          </a:p>
+        </p:txBody>
+      </p:sp>
+      <p:graphicFrame>
+        <p:nvGraphicFramePr>
+          <p:cNvPr id="3" name="Table 2"/>
+          <p:cNvGraphicFramePr>
+            <a:graphicFrameLocks noGrp="1"/>
+          </p:cNvGraphicFramePr>
+          <p:nvPr/>
+        </p:nvGraphicFramePr>
+        <p:xfrm>
+          <a:off x="548640" y="1371600"/>
+          <a:ext cx="11064240" cy="1920240"/>
+        </p:xfrm>
+        <a:graphic>
+          <a:graphicData uri="http://schemas.openxmlformats.org/drawingml/2006/table">
+            <a:tbl>
+              <a:tblPr firstRow="1" bandRow="1">
+                <a:tableStyleId>{5C22544A-7EE6-4342-B048-85BDC9FD1C3A}</a:tableStyleId>
+              </a:tblPr>
+              <a:tblGrid>
+                <a:gridCol w="3688080"/>
+                <a:gridCol w="3688080"/>
+                <a:gridCol w="3688080"/>
+              </a:tblGrid>
+              <a:tr h="384048">
+                <a:tc>
+                  <a:txBody>
+                    <a:bodyPr/>
+                    <a:lstStyle/>
+                    <a:p>
+                      <a:r>
+                        <a:rPr sz="1000" b="1">
+                          <a:solidFill>
+                            <a:srgbClr val="6FC7CF"/>
+                          </a:solidFill>
+                          <a:latin typeface="Noto Sans TC"/>
+                        </a:rPr>
+                        <a:t>做法</a:t>
+                      </a:r>
+                    </a:p>
+                  </a:txBody>
+                  <a:tcPr marT="36576" marB="36576">
+                    <a:solidFill>
+                      <a:srgbClr val="15171A"/>
+                    </a:solidFill>
+                  </a:tcPr>
+                </a:tc>
+                <a:tc>
+                  <a:txBody>
+                    <a:bodyPr/>
+                    <a:lstStyle/>
+                    <a:p>
+                      <a:r>
+                        <a:rPr sz="1000" b="1">
+                          <a:solidFill>
+                            <a:srgbClr val="6FC7CF"/>
+                          </a:solidFill>
+                          <a:latin typeface="Noto Sans TC"/>
+                        </a:rPr>
+                        <a:t>≤0.5% 漏網下省掉</a:t>
+                      </a:r>
+                    </a:p>
+                  </a:txBody>
+                  <a:tcPr marT="36576" marB="36576">
+                    <a:solidFill>
+                      <a:srgbClr val="15171A"/>
+                    </a:solidFill>
+                  </a:tcPr>
+                </a:tc>
+                <a:tc>
+                  <a:txBody>
+                    <a:bodyPr/>
+                    <a:lstStyle/>
+                    <a:p>
+                      <a:r>
+                        <a:rPr sz="1000" b="1">
+                          <a:solidFill>
+                            <a:srgbClr val="6FC7CF"/>
+                          </a:solidFill>
+                          <a:latin typeface="Noto Sans TC"/>
+                        </a:rPr>
+                        <a:t>說明</a:t>
+                      </a:r>
+                    </a:p>
+                  </a:txBody>
+                  <a:tcPr marT="36576" marB="36576">
+                    <a:solidFill>
+                      <a:srgbClr val="15171A"/>
+                    </a:solidFill>
+                  </a:tcPr>
+                </a:tc>
+              </a:tr>
+              <a:tr h="384048">
+                <a:tc>
+                  <a:txBody>
+                    <a:bodyPr/>
+                    <a:lstStyle/>
+                    <a:p>
+                      <a:r>
+                        <a:rPr sz="1050" b="0">
+                          <a:solidFill>
+                            <a:srgbClr val="E8E6E1"/>
+                          </a:solidFill>
+                          <a:latin typeface="Noto Sans TC"/>
+                        </a:rPr>
+                        <a:t>差異圖統計（平均、最大、前 32 像素和…）</a:t>
+                      </a:r>
+                    </a:p>
+                  </a:txBody>
+                  <a:tcPr marT="36576" marB="36576">
+                    <a:solidFill>
+                      <a:srgbClr val="1E2125"/>
+                    </a:solidFill>
+                  </a:tcPr>
+                </a:tc>
+                <a:tc>
+                  <a:txBody>
+                    <a:bodyPr/>
+                    <a:lstStyle/>
+                    <a:p>
+                      <a:r>
+                        <a:rPr sz="1050" b="0">
+                          <a:solidFill>
+                            <a:srgbClr val="E8E6E1"/>
+                          </a:solidFill>
+                          <a:latin typeface="Noto Sans TC"/>
+                        </a:rPr>
+                        <a:t>約 1%</a:t>
+                      </a:r>
+                    </a:p>
+                  </a:txBody>
+                  <a:tcPr marT="36576" marB="36576">
+                    <a:solidFill>
+                      <a:srgbClr val="1E2125"/>
+                    </a:solidFill>
+                  </a:tcPr>
+                </a:tc>
+                <a:tc>
+                  <a:txBody>
+                    <a:bodyPr/>
+                    <a:lstStyle/>
+                    <a:p>
+                      <a:r>
+                        <a:rPr sz="1050" b="0">
+                          <a:solidFill>
+                            <a:srgbClr val="E8E6E1"/>
+                          </a:solidFill>
+                          <a:latin typeface="Noto Sans TC"/>
+                        </a:rPr>
+                        <a:t>不用模型的地板：候選存在時就算得出的數字</a:t>
+                      </a:r>
+                    </a:p>
+                  </a:txBody>
+                  <a:tcPr marT="36576" marB="36576">
+                    <a:solidFill>
+                      <a:srgbClr val="1E2125"/>
+                    </a:solidFill>
+                  </a:tcPr>
+                </a:tc>
+              </a:tr>
+              <a:tr h="384048">
+                <a:tc>
+                  <a:txBody>
+                    <a:bodyPr/>
+                    <a:lstStyle/>
+                    <a:p>
+                      <a:r>
+                        <a:rPr sz="1050" b="0">
+                          <a:solidFill>
+                            <a:srgbClr val="E8E6E1"/>
+                          </a:solidFill>
+                          <a:latin typeface="Noto Sans TC"/>
+                        </a:rPr>
+                        <a:t>ResNet-18，三通道（樣板／待測／差異）</a:t>
+                      </a:r>
+                    </a:p>
+                  </a:txBody>
+                  <a:tcPr marT="36576" marB="36576">
+                    <a:solidFill>
+                      <a:srgbClr val="15171A"/>
+                    </a:solidFill>
+                  </a:tcPr>
+                </a:tc>
+                <a:tc>
+                  <a:txBody>
+                    <a:bodyPr/>
+                    <a:lstStyle/>
+                    <a:p>
+                      <a:r>
+                        <a:rPr sz="1050" b="0">
+                          <a:solidFill>
+                            <a:srgbClr val="E8E6E1"/>
+                          </a:solidFill>
+                          <a:latin typeface="Noto Sans TC"/>
+                        </a:rPr>
+                        <a:t>52.8%</a:t>
+                      </a:r>
+                    </a:p>
+                  </a:txBody>
+                  <a:tcPr marT="36576" marB="36576">
+                    <a:solidFill>
+                      <a:srgbClr val="15171A"/>
+                    </a:solidFill>
+                  </a:tcPr>
+                </a:tc>
+                <a:tc>
+                  <a:txBody>
+                    <a:bodyPr/>
+                    <a:lstStyle/>
+                    <a:p>
+                      <a:r>
+                        <a:rPr sz="1050" b="0">
+                          <a:solidFill>
+                            <a:srgbClr val="E8E6E1"/>
+                          </a:solidFill>
+                          <a:latin typeface="Noto Sans TC"/>
+                        </a:rPr>
+                        <a:t>主線；42.7 MB、11.2M 參數、CPU 2.5 ms</a:t>
+                      </a:r>
+                    </a:p>
+                  </a:txBody>
+                  <a:tcPr marT="36576" marB="36576">
+                    <a:solidFill>
+                      <a:srgbClr val="15171A"/>
+                    </a:solidFill>
+                  </a:tcPr>
+                </a:tc>
+              </a:tr>
+              <a:tr h="384048">
+                <a:tc>
+                  <a:txBody>
+                    <a:bodyPr/>
+                    <a:lstStyle/>
+                    <a:p>
+                      <a:r>
+                        <a:rPr sz="1050" b="0">
+                          <a:solidFill>
+                            <a:srgbClr val="E8E6E1"/>
+                          </a:solidFill>
+                          <a:latin typeface="Noto Sans TC"/>
+                        </a:rPr>
+                        <a:t>同一個 ResNet-18，沒有樣板通道（偵測器 crop）</a:t>
+                      </a:r>
+                    </a:p>
+                  </a:txBody>
+                  <a:tcPr marT="36576" marB="36576">
+                    <a:solidFill>
+                      <a:srgbClr val="1E2125"/>
+                    </a:solidFill>
+                  </a:tcPr>
+                </a:tc>
+                <a:tc>
+                  <a:txBody>
+                    <a:bodyPr/>
+                    <a:lstStyle/>
+                    <a:p>
+                      <a:r>
+                        <a:rPr sz="1050" b="0">
+                          <a:solidFill>
+                            <a:srgbClr val="E8E6E1"/>
+                          </a:solidFill>
+                          <a:latin typeface="Noto Sans TC"/>
+                        </a:rPr>
+                        <a:t>2.8%</a:t>
+                      </a:r>
+                    </a:p>
+                  </a:txBody>
+                  <a:tcPr marT="36576" marB="36576">
+                    <a:solidFill>
+                      <a:srgbClr val="1E2125"/>
+                    </a:solidFill>
+                  </a:tcPr>
+                </a:tc>
+                <a:tc>
+                  <a:txBody>
+                    <a:bodyPr/>
+                    <a:lstStyle/>
+                    <a:p>
+                      <a:r>
+                        <a:rPr sz="1050" b="0">
+                          <a:solidFill>
+                            <a:srgbClr val="E8E6E1"/>
+                          </a:solidFill>
+                          <a:latin typeface="Noto Sans TC"/>
+                        </a:rPr>
+                        <a:t>外觀本身分不開真假；樣板通道是必要不是方便</a:t>
+                      </a:r>
+                    </a:p>
+                  </a:txBody>
+                  <a:tcPr marT="36576" marB="36576">
+                    <a:solidFill>
+                      <a:srgbClr val="1E2125"/>
+                    </a:solidFill>
+                  </a:tcPr>
+                </a:tc>
+              </a:tr>
+              <a:tr h="384048">
+                <a:tc>
+                  <a:txBody>
+                    <a:bodyPr/>
+                    <a:lstStyle/>
+                    <a:p>
+                      <a:r>
+                        <a:rPr sz="1050" b="0">
+                          <a:solidFill>
+                            <a:srgbClr val="E8E6E1"/>
+                          </a:solidFill>
+                          <a:latin typeface="Noto Sans TC"/>
+                        </a:rPr>
+                        <a:t>YOLO26n 的 confidence 直接排序</a:t>
+                      </a:r>
+                    </a:p>
+                  </a:txBody>
+                  <a:tcPr marT="36576" marB="36576">
+                    <a:solidFill>
+                      <a:srgbClr val="15171A"/>
+                    </a:solidFill>
+                  </a:tcPr>
+                </a:tc>
+                <a:tc>
+                  <a:txBody>
+                    <a:bodyPr/>
+                    <a:lstStyle/>
+                    <a:p>
+                      <a:r>
+                        <a:rPr sz="1050" b="0">
+                          <a:solidFill>
+                            <a:srgbClr val="E8E6E1"/>
+                          </a:solidFill>
+                          <a:latin typeface="Noto Sans TC"/>
+                        </a:rPr>
+                        <a:t>1.2%</a:t>
+                      </a:r>
+                    </a:p>
+                  </a:txBody>
+                  <a:tcPr marT="36576" marB="36576">
+                    <a:solidFill>
+                      <a:srgbClr val="15171A"/>
+                    </a:solidFill>
+                  </a:tcPr>
+                </a:tc>
+                <a:tc>
+                  <a:txBody>
+                    <a:bodyPr/>
+                    <a:lstStyle/>
+                    <a:p>
+                      <a:r>
+                        <a:rPr sz="1050" b="0">
+                          <a:solidFill>
+                            <a:srgbClr val="E8E6E1"/>
+                          </a:solidFill>
+                          <a:latin typeface="Noto Sans TC"/>
+                        </a:rPr>
+                        <a:t>偵測器的信心是「這裡有東西」的分數，不是 P(false call)</a:t>
+                      </a:r>
+                    </a:p>
+                  </a:txBody>
+                  <a:tcPr marT="36576" marB="36576">
+                    <a:solidFill>
+                      <a:srgbClr val="15171A"/>
+                    </a:solidFill>
+                  </a:tcPr>
+                </a:tc>
+              </a:tr>
+            </a:tbl>
+          </a:graphicData>
+        </a:graphic>
+      </p:graphicFrame>
+      <p:sp>
+        <p:nvSpPr>
+          <p:cNvPr id="4" name="TextBox 3"/>
+          <p:cNvSpPr txBox="1"/>
+          <p:nvPr/>
+        </p:nvSpPr>
+        <p:spPr>
+          <a:xfrm>
+            <a:off x="548640" y="3520440"/>
+            <a:ext cx="11064240" cy="2788920"/>
+          </a:xfrm>
+          <a:prstGeom prst="rect">
+            <a:avLst/>
+          </a:prstGeom>
+          <a:noFill/>
+        </p:spPr>
+        <p:txBody>
+          <a:bodyPr wrap="square">
+            <a:spAutoFit/>
+          </a:bodyPr>
+          <a:lstStyle/>
+          <a:p>
+            <a:pPr>
+              <a:lnSpc>
+                <a:spcPct val="125000"/>
+              </a:lnSpc>
+            </a:pPr>
+            <a:r>
+              <a:rPr sz="1250" b="0">
+                <a:solidFill>
+                  <a:srgbClr val="6FC7CF"/>
+                </a:solidFill>
+                <a:latin typeface="Noto Sans TC"/>
+              </a:rPr>
+              <a:t>• </a:t>
+            </a:r>
+            <a:r>
+              <a:rPr sz="1250" b="0">
+                <a:solidFill>
+                  <a:srgbClr val="E8E6E1"/>
+                </a:solidFill>
+                <a:latin typeface="Noto Sans TC"/>
+              </a:rPr>
+              <a:t>模型比地板高約 40 倍，這是「模型有學到東西」的證據；沒有地板，52.8% 只是一個量，不是證據</a:t>
+            </a:r>
+          </a:p>
+          <a:p>
+            <a:pPr>
+              <a:lnSpc>
+                <a:spcPct val="125000"/>
+              </a:lnSpc>
+            </a:pPr>
+            <a:r>
+              <a:rPr sz="1250" b="0">
+                <a:solidFill>
+                  <a:srgbClr val="6FC7CF"/>
+                </a:solidFill>
+                <a:latin typeface="Noto Sans TC"/>
+              </a:rPr>
+              <a:t>• </a:t>
+            </a:r>
+            <a:r>
+              <a:rPr sz="1250" b="0">
+                <a:solidFill>
+                  <a:srgbClr val="E8E6E1"/>
+                </a:solidFill>
+                <a:latin typeface="Noto Sans TC"/>
+              </a:rPr>
+              <a:t>更大的模型沒有試，因為剩下的漏網是 confident errors（第 8 頁），容量不是它的解</a:t>
+            </a:r>
+          </a:p>
+        </p:txBody>
+      </p:sp>
+      <p:sp>
+        <p:nvSpPr>
+          <p:cNvPr id="5" name="TextBox 4"/>
+          <p:cNvSpPr txBox="1"/>
+          <p:nvPr/>
+        </p:nvSpPr>
+        <p:spPr>
+          <a:xfrm>
+            <a:off x="457200" y="6400800"/>
+            <a:ext cx="5486400" cy="320040"/>
+          </a:xfrm>
+          <a:prstGeom prst="rect">
+            <a:avLst/>
+          </a:prstGeom>
+          <a:noFill/>
+        </p:spPr>
+        <p:txBody>
+          <a:bodyPr wrap="square">
+            <a:spAutoFit/>
+          </a:bodyPr>
+          <a:lstStyle/>
+          <a:p>
+            <a:pPr>
+              <a:lnSpc>
+                <a:spcPct val="115000"/>
+              </a:lnSpc>
+            </a:pPr>
+            <a:r>
+              <a:rPr sz="1000" b="0">
+                <a:solidFill>
+                  <a:srgbClr val="9AA0A6"/>
+                </a:solidFill>
+                <a:latin typeface="IBM Plex Mono"/>
+              </a:rPr>
+              <a:t>附錄 · 備查數字</a:t>
+            </a:r>
+          </a:p>
+        </p:txBody>
+      </p:sp>
+      <p:sp>
+        <p:nvSpPr>
+          <p:cNvPr id="6" name="TextBox 5"/>
+          <p:cNvSpPr txBox="1"/>
+          <p:nvPr/>
+        </p:nvSpPr>
+        <p:spPr>
+          <a:xfrm>
+            <a:off x="8046720" y="6400800"/>
+            <a:ext cx="3657600" cy="320040"/>
+          </a:xfrm>
+          <a:prstGeom prst="rect">
+            <a:avLst/>
+          </a:prstGeom>
+          <a:noFill/>
+        </p:spPr>
+        <p:txBody>
+          <a:bodyPr wrap="square">
+            <a:spAutoFit/>
+          </a:bodyPr>
+          <a:lstStyle/>
+          <a:p>
+            <a:pPr algn="r">
+              <a:lnSpc>
+                <a:spcPct val="115000"/>
+              </a:lnSpc>
+            </a:pPr>
+            <a:r>
+              <a:rPr sz="1000" b="0">
+                <a:solidFill>
+                  <a:srgbClr val="9AA0A6"/>
+                </a:solidFill>
+                <a:latin typeface="IBM Plex Mono"/>
+              </a:rPr>
+              <a:t>27 / 33</a:t>
+            </a:r>
+          </a:p>
+        </p:txBody>
+      </p:sp>
+    </p:spTree>
+  </p:cSld>
+  <p:clrMapOvr>
+    <a:masterClrMapping/>
+  </p:clrMapOvr>
+</p:sld>
+</file>
+
+<file path=ppt/slides/slide28.xml><?xml version="1.0" encoding="utf-8"?>
+<p:sld xmlns:a="http://schemas.openxmlformats.org/drawingml/2006/main" xmlns:p="http://schemas.openxmlformats.org/presentationml/2006/main" xmlns:r="http://schemas.openxmlformats.org/officeDocument/2006/relationships">
+  <p:cSld>
+    <p:bg>
+      <p:bgPr>
+        <a:solidFill>
+          <a:srgbClr val="15171A"/>
+        </a:solidFill>
+        <a:effectLst/>
+      </p:bgPr>
+    </p:bg>
+    <p:spTree>
+      <p:nvGrpSpPr>
+        <p:cNvPr id="1" name=""/>
+        <p:cNvGrpSpPr/>
+        <p:nvPr/>
+      </p:nvGrpSpPr>
+      <p:grpSpPr/>
+      <p:sp>
+        <p:nvSpPr>
+          <p:cNvPr id="2" name="TextBox 1"/>
+          <p:cNvSpPr txBox="1"/>
+          <p:nvPr/>
+        </p:nvSpPr>
+        <p:spPr>
+          <a:xfrm>
+            <a:off x="457200" y="320040"/>
+            <a:ext cx="11247120" cy="914400"/>
+          </a:xfrm>
+          <a:prstGeom prst="rect">
+            <a:avLst/>
+          </a:prstGeom>
+          <a:noFill/>
+        </p:spPr>
+        <p:txBody>
+          <a:bodyPr wrap="square">
+            <a:spAutoFit/>
+          </a:bodyPr>
+          <a:lstStyle/>
+          <a:p>
+            <a:pPr>
+              <a:lnSpc>
+                <a:spcPct val="115000"/>
+              </a:lnSpc>
+            </a:pPr>
+            <a:r>
+              <a:rPr sz="2800" b="1">
+                <a:solidFill>
+                  <a:srgbClr val="E8E6E1"/>
+                </a:solidFill>
+                <a:latin typeface="Noto Sans TC"/>
+              </a:rPr>
+              <a:t>附錄 C · INT8 動態 vs 靜態：同一組權重、同一條曲線</a:t>
+            </a:r>
+          </a:p>
+        </p:txBody>
+      </p:sp>
+      <p:graphicFrame>
+        <p:nvGraphicFramePr>
+          <p:cNvPr id="3" name="Table 2"/>
+          <p:cNvGraphicFramePr>
+            <a:graphicFrameLocks noGrp="1"/>
+          </p:cNvGraphicFramePr>
+          <p:nvPr/>
+        </p:nvGraphicFramePr>
+        <p:xfrm>
+          <a:off x="548640" y="1371600"/>
+          <a:ext cx="11064240" cy="1920240"/>
+        </p:xfrm>
+        <a:graphic>
+          <a:graphicData uri="http://schemas.openxmlformats.org/drawingml/2006/table">
+            <a:tbl>
+              <a:tblPr firstRow="1" bandRow="1">
+                <a:tableStyleId>{5C22544A-7EE6-4342-B048-85BDC9FD1C3A}</a:tableStyleId>
+              </a:tblPr>
+              <a:tblGrid>
+                <a:gridCol w="1844040"/>
+                <a:gridCol w="1844040"/>
+                <a:gridCol w="1844040"/>
+                <a:gridCol w="1844040"/>
+                <a:gridCol w="1844040"/>
+                <a:gridCol w="1844040"/>
+              </a:tblGrid>
+              <a:tr h="384048">
+                <a:tc>
+                  <a:txBody>
+                    <a:bodyPr/>
+                    <a:lstStyle/>
+                    <a:p>
+                      <a:r>
+                        <a:rPr sz="1000" b="1">
+                          <a:solidFill>
+                            <a:srgbClr val="6FC7CF"/>
+                          </a:solidFill>
+                          <a:latin typeface="Noto Sans TC"/>
+                        </a:rPr>
+                        <a:t>引擎</a:t>
+                      </a:r>
+                    </a:p>
+                  </a:txBody>
+                  <a:tcPr marT="36576" marB="36576">
+                    <a:solidFill>
+                      <a:srgbClr val="15171A"/>
+                    </a:solidFill>
+                  </a:tcPr>
+                </a:tc>
+                <a:tc>
+                  <a:txBody>
+                    <a:bodyPr/>
+                    <a:lstStyle/>
+                    <a:p>
+                      <a:r>
+                        <a:rPr sz="1000" b="1">
+                          <a:solidFill>
+                            <a:srgbClr val="6FC7CF"/>
+                          </a:solidFill>
+                          <a:latin typeface="Noto Sans TC"/>
+                        </a:rPr>
+                        <a:t>≤0.50% 省掉</a:t>
+                      </a:r>
+                    </a:p>
+                  </a:txBody>
+                  <a:tcPr marT="36576" marB="36576">
+                    <a:solidFill>
+                      <a:srgbClr val="15171A"/>
+                    </a:solidFill>
+                  </a:tcPr>
+                </a:tc>
+                <a:tc>
+                  <a:txBody>
+                    <a:bodyPr/>
+                    <a:lstStyle/>
+                    <a:p>
+                      <a:r>
+                        <a:rPr sz="1000" b="1">
+                          <a:solidFill>
+                            <a:srgbClr val="6FC7CF"/>
+                          </a:solidFill>
+                          <a:latin typeface="Noto Sans TC"/>
+                        </a:rPr>
+                        <a:t>類別一致</a:t>
+                      </a:r>
+                    </a:p>
+                  </a:txBody>
+                  <a:tcPr marT="36576" marB="36576">
+                    <a:solidFill>
+                      <a:srgbClr val="15171A"/>
+                    </a:solidFill>
+                  </a:tcPr>
+                </a:tc>
+                <a:tc>
+                  <a:txBody>
+                    <a:bodyPr/>
+                    <a:lstStyle/>
+                    <a:p>
+                      <a:r>
+                        <a:rPr sz="1000" b="1">
+                          <a:solidFill>
+                            <a:srgbClr val="6FC7CF"/>
+                          </a:solidFill>
+                          <a:latin typeface="Noto Sans TC"/>
+                        </a:rPr>
+                        <a:t>不一致</a:t>
+                      </a:r>
+                    </a:p>
+                  </a:txBody>
+                  <a:tcPr marT="36576" marB="36576">
+                    <a:solidFill>
+                      <a:srgbClr val="15171A"/>
+                    </a:solidFill>
+                  </a:tcPr>
+                </a:tc>
+                <a:tc>
+                  <a:txBody>
+                    <a:bodyPr/>
+                    <a:lstStyle/>
+                    <a:p>
+                      <a:r>
+                        <a:rPr sz="1000" b="1">
+                          <a:solidFill>
+                            <a:srgbClr val="6FC7CF"/>
+                          </a:solidFill>
+                          <a:latin typeface="Noto Sans TC"/>
+                        </a:rPr>
+                        <a:t>p50 延遲</a:t>
+                      </a:r>
+                    </a:p>
+                  </a:txBody>
+                  <a:tcPr marT="36576" marB="36576">
+                    <a:solidFill>
+                      <a:srgbClr val="15171A"/>
+                    </a:solidFill>
+                  </a:tcPr>
+                </a:tc>
+                <a:tc>
+                  <a:txBody>
+                    <a:bodyPr/>
+                    <a:lstStyle/>
+                    <a:p>
+                      <a:r>
+                        <a:rPr sz="1000" b="1">
+                          <a:solidFill>
+                            <a:srgbClr val="6FC7CF"/>
+                          </a:solidFill>
+                          <a:latin typeface="Noto Sans TC"/>
+                        </a:rPr>
+                        <a:t>對 FP32 torch</a:t>
+                      </a:r>
+                    </a:p>
+                  </a:txBody>
+                  <a:tcPr marT="36576" marB="36576">
+                    <a:solidFill>
+                      <a:srgbClr val="15171A"/>
+                    </a:solidFill>
+                  </a:tcPr>
+                </a:tc>
+              </a:tr>
+              <a:tr h="384048">
+                <a:tc>
+                  <a:txBody>
+                    <a:bodyPr/>
+                    <a:lstStyle/>
+                    <a:p>
+                      <a:r>
+                        <a:rPr sz="1050" b="0">
+                          <a:solidFill>
+                            <a:srgbClr val="E8E6E1"/>
+                          </a:solidFill>
+                          <a:latin typeface="Noto Sans TC"/>
+                        </a:rPr>
+                        <a:t>FP32 torch</a:t>
+                      </a:r>
+                    </a:p>
+                  </a:txBody>
+                  <a:tcPr marT="36576" marB="36576">
+                    <a:solidFill>
+                      <a:srgbClr val="1E2125"/>
+                    </a:solidFill>
+                  </a:tcPr>
+                </a:tc>
+                <a:tc>
+                  <a:txBody>
+                    <a:bodyPr/>
+                    <a:lstStyle/>
+                    <a:p>
+                      <a:r>
+                        <a:rPr sz="1050" b="0">
+                          <a:solidFill>
+                            <a:srgbClr val="E8E6E1"/>
+                          </a:solidFill>
+                          <a:latin typeface="Noto Sans TC"/>
+                        </a:rPr>
+                        <a:t>52.8%</a:t>
+                      </a:r>
+                    </a:p>
+                  </a:txBody>
+                  <a:tcPr marT="36576" marB="36576">
+                    <a:solidFill>
+                      <a:srgbClr val="1E2125"/>
+                    </a:solidFill>
+                  </a:tcPr>
+                </a:tc>
+                <a:tc>
+                  <a:txBody>
+                    <a:bodyPr/>
+                    <a:lstStyle/>
+                    <a:p>
+                      <a:r>
+                        <a:rPr sz="1050" b="0">
+                          <a:solidFill>
+                            <a:srgbClr val="E8E6E1"/>
+                          </a:solidFill>
+                          <a:latin typeface="Noto Sans TC"/>
+                        </a:rPr>
+                        <a:t>—</a:t>
+                      </a:r>
+                    </a:p>
+                  </a:txBody>
+                  <a:tcPr marT="36576" marB="36576">
+                    <a:solidFill>
+                      <a:srgbClr val="1E2125"/>
+                    </a:solidFill>
+                  </a:tcPr>
+                </a:tc>
+                <a:tc>
+                  <a:txBody>
+                    <a:bodyPr/>
+                    <a:lstStyle/>
+                    <a:p>
+                      <a:r>
+                        <a:rPr sz="1050" b="0">
+                          <a:solidFill>
+                            <a:srgbClr val="E8E6E1"/>
+                          </a:solidFill>
+                          <a:latin typeface="Noto Sans TC"/>
+                        </a:rPr>
+                        <a:t>—</a:t>
+                      </a:r>
+                    </a:p>
+                  </a:txBody>
+                  <a:tcPr marT="36576" marB="36576">
+                    <a:solidFill>
+                      <a:srgbClr val="1E2125"/>
+                    </a:solidFill>
+                  </a:tcPr>
+                </a:tc>
+                <a:tc>
+                  <a:txBody>
+                    <a:bodyPr/>
+                    <a:lstStyle/>
+                    <a:p>
+                      <a:r>
+                        <a:rPr sz="1050" b="0">
+                          <a:solidFill>
+                            <a:srgbClr val="E8E6E1"/>
+                          </a:solidFill>
+                          <a:latin typeface="Noto Sans TC"/>
+                        </a:rPr>
+                        <a:t>2.53 ms</a:t>
+                      </a:r>
+                    </a:p>
+                  </a:txBody>
+                  <a:tcPr marT="36576" marB="36576">
+                    <a:solidFill>
+                      <a:srgbClr val="1E2125"/>
+                    </a:solidFill>
+                  </a:tcPr>
+                </a:tc>
+                <a:tc>
+                  <a:txBody>
+                    <a:bodyPr/>
+                    <a:lstStyle/>
+                    <a:p>
+                      <a:r>
+                        <a:rPr sz="1050" b="0">
+                          <a:solidFill>
+                            <a:srgbClr val="E8E6E1"/>
+                          </a:solidFill>
+                          <a:latin typeface="Noto Sans TC"/>
+                        </a:rPr>
+                        <a:t>1x</a:t>
+                      </a:r>
+                    </a:p>
+                  </a:txBody>
+                  <a:tcPr marT="36576" marB="36576">
+                    <a:solidFill>
+                      <a:srgbClr val="1E2125"/>
+                    </a:solidFill>
+                  </a:tcPr>
+                </a:tc>
+              </a:tr>
+              <a:tr h="384048">
+                <a:tc>
+                  <a:txBody>
+                    <a:bodyPr/>
+                    <a:lstStyle/>
+                    <a:p>
+                      <a:r>
+                        <a:rPr sz="1050" b="0">
+                          <a:solidFill>
+                            <a:srgbClr val="E8E6E1"/>
+                          </a:solidFill>
+                          <a:latin typeface="Noto Sans TC"/>
+                        </a:rPr>
+                        <a:t>FP32 ONNX</a:t>
+                      </a:r>
+                    </a:p>
+                  </a:txBody>
+                  <a:tcPr marT="36576" marB="36576">
+                    <a:solidFill>
+                      <a:srgbClr val="15171A"/>
+                    </a:solidFill>
+                  </a:tcPr>
+                </a:tc>
+                <a:tc>
+                  <a:txBody>
+                    <a:bodyPr/>
+                    <a:lstStyle/>
+                    <a:p>
+                      <a:r>
+                        <a:rPr sz="1050" b="0">
+                          <a:solidFill>
+                            <a:srgbClr val="E8E6E1"/>
+                          </a:solidFill>
+                          <a:latin typeface="Noto Sans TC"/>
+                        </a:rPr>
+                        <a:t>52.8%</a:t>
+                      </a:r>
+                    </a:p>
+                  </a:txBody>
+                  <a:tcPr marT="36576" marB="36576">
+                    <a:solidFill>
+                      <a:srgbClr val="15171A"/>
+                    </a:solidFill>
+                  </a:tcPr>
+                </a:tc>
+                <a:tc>
+                  <a:txBody>
+                    <a:bodyPr/>
+                    <a:lstStyle/>
+                    <a:p>
+                      <a:r>
+                        <a:rPr sz="1050" b="0">
+                          <a:solidFill>
+                            <a:srgbClr val="E8E6E1"/>
+                          </a:solidFill>
+                          <a:latin typeface="Noto Sans TC"/>
+                        </a:rPr>
+                        <a:t>100.000%</a:t>
+                      </a:r>
+                    </a:p>
+                  </a:txBody>
+                  <a:tcPr marT="36576" marB="36576">
+                    <a:solidFill>
+                      <a:srgbClr val="15171A"/>
+                    </a:solidFill>
+                  </a:tcPr>
+                </a:tc>
+                <a:tc>
+                  <a:txBody>
+                    <a:bodyPr/>
+                    <a:lstStyle/>
+                    <a:p>
+                      <a:r>
+                        <a:rPr sz="1050" b="0">
+                          <a:solidFill>
+                            <a:srgbClr val="E8E6E1"/>
+                          </a:solidFill>
+                          <a:latin typeface="Noto Sans TC"/>
+                        </a:rPr>
+                        <a:t>0/7322</a:t>
+                      </a:r>
+                    </a:p>
+                  </a:txBody>
+                  <a:tcPr marT="36576" marB="36576">
+                    <a:solidFill>
+                      <a:srgbClr val="15171A"/>
+                    </a:solidFill>
+                  </a:tcPr>
+                </a:tc>
+                <a:tc>
+                  <a:txBody>
+                    <a:bodyPr/>
+                    <a:lstStyle/>
+                    <a:p>
+                      <a:r>
+                        <a:rPr sz="1050" b="0">
+                          <a:solidFill>
+                            <a:srgbClr val="E8E6E1"/>
+                          </a:solidFill>
+                          <a:latin typeface="Noto Sans TC"/>
+                        </a:rPr>
+                        <a:t>1.84 ms</a:t>
+                      </a:r>
+                    </a:p>
+                  </a:txBody>
+                  <a:tcPr marT="36576" marB="36576">
+                    <a:solidFill>
+                      <a:srgbClr val="15171A"/>
+                    </a:solidFill>
+                  </a:tcPr>
+                </a:tc>
+                <a:tc>
+                  <a:txBody>
+                    <a:bodyPr/>
+                    <a:lstStyle/>
+                    <a:p>
+                      <a:r>
+                        <a:rPr sz="1050" b="0">
+                          <a:solidFill>
+                            <a:srgbClr val="E8E6E1"/>
+                          </a:solidFill>
+                          <a:latin typeface="Noto Sans TC"/>
+                        </a:rPr>
+                        <a:t>1.38x</a:t>
+                      </a:r>
+                    </a:p>
+                  </a:txBody>
+                  <a:tcPr marT="36576" marB="36576">
+                    <a:solidFill>
+                      <a:srgbClr val="15171A"/>
+                    </a:solidFill>
+                  </a:tcPr>
+                </a:tc>
+              </a:tr>
+              <a:tr h="384048">
+                <a:tc>
+                  <a:txBody>
+                    <a:bodyPr/>
+                    <a:lstStyle/>
+                    <a:p>
+                      <a:r>
+                        <a:rPr sz="1050" b="0">
+                          <a:solidFill>
+                            <a:srgbClr val="E8E6E1"/>
+                          </a:solidFill>
+                          <a:latin typeface="Noto Sans TC"/>
+                        </a:rPr>
+                        <a:t>INT8 dynamic</a:t>
+                      </a:r>
+                    </a:p>
+                  </a:txBody>
+                  <a:tcPr marT="36576" marB="36576">
+                    <a:solidFill>
+                      <a:srgbClr val="1E2125"/>
+                    </a:solidFill>
+                  </a:tcPr>
+                </a:tc>
+                <a:tc>
+                  <a:txBody>
+                    <a:bodyPr/>
+                    <a:lstStyle/>
+                    <a:p>
+                      <a:r>
+                        <a:rPr sz="1050" b="0">
+                          <a:solidFill>
+                            <a:srgbClr val="E8E6E1"/>
+                          </a:solidFill>
+                          <a:latin typeface="Noto Sans TC"/>
+                        </a:rPr>
+                        <a:t>52.5%</a:t>
+                      </a:r>
+                    </a:p>
+                  </a:txBody>
+                  <a:tcPr marT="36576" marB="36576">
+                    <a:solidFill>
+                      <a:srgbClr val="1E2125"/>
+                    </a:solidFill>
+                  </a:tcPr>
+                </a:tc>
+                <a:tc>
+                  <a:txBody>
+                    <a:bodyPr/>
+                    <a:lstStyle/>
+                    <a:p>
+                      <a:r>
+                        <a:rPr sz="1050" b="0">
+                          <a:solidFill>
+                            <a:srgbClr val="E8E6E1"/>
+                          </a:solidFill>
+                          <a:latin typeface="Noto Sans TC"/>
+                        </a:rPr>
+                        <a:t>99.795%</a:t>
+                      </a:r>
+                    </a:p>
+                  </a:txBody>
+                  <a:tcPr marT="36576" marB="36576">
+                    <a:solidFill>
+                      <a:srgbClr val="1E2125"/>
+                    </a:solidFill>
+                  </a:tcPr>
+                </a:tc>
+                <a:tc>
+                  <a:txBody>
+                    <a:bodyPr/>
+                    <a:lstStyle/>
+                    <a:p>
+                      <a:r>
+                        <a:rPr sz="1050" b="0">
+                          <a:solidFill>
+                            <a:srgbClr val="E8E6E1"/>
+                          </a:solidFill>
+                          <a:latin typeface="Noto Sans TC"/>
+                        </a:rPr>
+                        <a:t>15/7322</a:t>
+                      </a:r>
+                    </a:p>
+                  </a:txBody>
+                  <a:tcPr marT="36576" marB="36576">
+                    <a:solidFill>
+                      <a:srgbClr val="1E2125"/>
+                    </a:solidFill>
+                  </a:tcPr>
+                </a:tc>
+                <a:tc>
+                  <a:txBody>
+                    <a:bodyPr/>
+                    <a:lstStyle/>
+                    <a:p>
+                      <a:r>
+                        <a:rPr sz="1050" b="0">
+                          <a:solidFill>
+                            <a:srgbClr val="E8E6E1"/>
+                          </a:solidFill>
+                          <a:latin typeface="Noto Sans TC"/>
+                        </a:rPr>
+                        <a:t>1.93 ms</a:t>
+                      </a:r>
+                    </a:p>
+                  </a:txBody>
+                  <a:tcPr marT="36576" marB="36576">
+                    <a:solidFill>
+                      <a:srgbClr val="1E2125"/>
+                    </a:solidFill>
+                  </a:tcPr>
+                </a:tc>
+                <a:tc>
+                  <a:txBody>
+                    <a:bodyPr/>
+                    <a:lstStyle/>
+                    <a:p>
+                      <a:r>
+                        <a:rPr sz="1050" b="0">
+                          <a:solidFill>
+                            <a:srgbClr val="E8E6E1"/>
+                          </a:solidFill>
+                          <a:latin typeface="Noto Sans TC"/>
+                        </a:rPr>
+                        <a:t>1.31x</a:t>
+                      </a:r>
+                    </a:p>
+                  </a:txBody>
+                  <a:tcPr marT="36576" marB="36576">
+                    <a:solidFill>
+                      <a:srgbClr val="1E2125"/>
+                    </a:solidFill>
+                  </a:tcPr>
+                </a:tc>
+              </a:tr>
+              <a:tr h="384048">
+                <a:tc>
+                  <a:txBody>
+                    <a:bodyPr/>
+                    <a:lstStyle/>
+                    <a:p>
+                      <a:r>
+                        <a:rPr sz="1050" b="0">
+                          <a:solidFill>
+                            <a:srgbClr val="E8E6E1"/>
+                          </a:solidFill>
+                          <a:latin typeface="Noto Sans TC"/>
+                        </a:rPr>
+                        <a:t>INT8 static</a:t>
+                      </a:r>
+                    </a:p>
+                  </a:txBody>
+                  <a:tcPr marT="36576" marB="36576">
+                    <a:solidFill>
+                      <a:srgbClr val="15171A"/>
+                    </a:solidFill>
+                  </a:tcPr>
+                </a:tc>
+                <a:tc>
+                  <a:txBody>
+                    <a:bodyPr/>
+                    <a:lstStyle/>
+                    <a:p>
+                      <a:r>
+                        <a:rPr sz="1050" b="0">
+                          <a:solidFill>
+                            <a:srgbClr val="E8E6E1"/>
+                          </a:solidFill>
+                          <a:latin typeface="Noto Sans TC"/>
+                        </a:rPr>
+                        <a:t>53.0%</a:t>
+                      </a:r>
+                    </a:p>
+                  </a:txBody>
+                  <a:tcPr marT="36576" marB="36576">
+                    <a:solidFill>
+                      <a:srgbClr val="15171A"/>
+                    </a:solidFill>
+                  </a:tcPr>
+                </a:tc>
+                <a:tc>
+                  <a:txBody>
+                    <a:bodyPr/>
+                    <a:lstStyle/>
+                    <a:p>
+                      <a:r>
+                        <a:rPr sz="1050" b="0">
+                          <a:solidFill>
+                            <a:srgbClr val="E8E6E1"/>
+                          </a:solidFill>
+                          <a:latin typeface="Noto Sans TC"/>
+                        </a:rPr>
+                        <a:t>99.836%</a:t>
+                      </a:r>
+                    </a:p>
+                  </a:txBody>
+                  <a:tcPr marT="36576" marB="36576">
+                    <a:solidFill>
+                      <a:srgbClr val="15171A"/>
+                    </a:solidFill>
+                  </a:tcPr>
+                </a:tc>
+                <a:tc>
+                  <a:txBody>
+                    <a:bodyPr/>
+                    <a:lstStyle/>
+                    <a:p>
+                      <a:r>
+                        <a:rPr sz="1050" b="0">
+                          <a:solidFill>
+                            <a:srgbClr val="E8E6E1"/>
+                          </a:solidFill>
+                          <a:latin typeface="Noto Sans TC"/>
+                        </a:rPr>
+                        <a:t>12/7322</a:t>
+                      </a:r>
+                    </a:p>
+                  </a:txBody>
+                  <a:tcPr marT="36576" marB="36576">
+                    <a:solidFill>
+                      <a:srgbClr val="15171A"/>
+                    </a:solidFill>
+                  </a:tcPr>
+                </a:tc>
+                <a:tc>
+                  <a:txBody>
+                    <a:bodyPr/>
+                    <a:lstStyle/>
+                    <a:p>
+                      <a:r>
+                        <a:rPr sz="1050" b="0">
+                          <a:solidFill>
+                            <a:srgbClr val="E8E6E1"/>
+                          </a:solidFill>
+                          <a:latin typeface="Noto Sans TC"/>
+                        </a:rPr>
+                        <a:t>0.65 ms</a:t>
+                      </a:r>
+                    </a:p>
+                  </a:txBody>
+                  <a:tcPr marT="36576" marB="36576">
+                    <a:solidFill>
+                      <a:srgbClr val="15171A"/>
+                    </a:solidFill>
+                  </a:tcPr>
+                </a:tc>
+                <a:tc>
+                  <a:txBody>
+                    <a:bodyPr/>
+                    <a:lstStyle/>
+                    <a:p>
+                      <a:r>
+                        <a:rPr sz="1050" b="0">
+                          <a:solidFill>
+                            <a:srgbClr val="E8E6E1"/>
+                          </a:solidFill>
+                          <a:latin typeface="Noto Sans TC"/>
+                        </a:rPr>
+                        <a:t>3.87x</a:t>
+                      </a:r>
+                    </a:p>
+                  </a:txBody>
+                  <a:tcPr marT="36576" marB="36576">
+                    <a:solidFill>
+                      <a:srgbClr val="15171A"/>
+                    </a:solidFill>
+                  </a:tcPr>
+                </a:tc>
+              </a:tr>
+            </a:tbl>
+          </a:graphicData>
+        </a:graphic>
+      </p:graphicFrame>
+      <p:sp>
+        <p:nvSpPr>
+          <p:cNvPr id="4" name="TextBox 3"/>
+          <p:cNvSpPr txBox="1"/>
+          <p:nvPr/>
+        </p:nvSpPr>
+        <p:spPr>
+          <a:xfrm>
+            <a:off x="548640" y="3520440"/>
+            <a:ext cx="11064240" cy="2788920"/>
+          </a:xfrm>
+          <a:prstGeom prst="rect">
+            <a:avLst/>
+          </a:prstGeom>
+          <a:noFill/>
+        </p:spPr>
+        <p:txBody>
+          <a:bodyPr wrap="square">
+            <a:spAutoFit/>
+          </a:bodyPr>
+          <a:lstStyle/>
+          <a:p>
+            <a:pPr>
+              <a:lnSpc>
+                <a:spcPct val="125000"/>
+              </a:lnSpc>
+            </a:pPr>
+            <a:r>
+              <a:rPr sz="1250" b="0">
+                <a:solidFill>
+                  <a:srgbClr val="6FC7CF"/>
+                </a:solidFill>
+                <a:latin typeface="Noto Sans TC"/>
+              </a:rPr>
+              <a:t>• </a:t>
+            </a:r>
+            <a:r>
+              <a:rPr sz="1250" b="0">
+                <a:solidFill>
+                  <a:srgbClr val="E8E6E1"/>
+                </a:solidFill>
+                <a:latin typeface="Noto Sans TC"/>
+              </a:rPr>
+              <a:t>靜態的校正集是 trainval 的 512 個 patch（seed 固定），永遠不碰 test——在要報告的 split 上校正等於多一步的 test-set tuning</a:t>
+            </a:r>
+          </a:p>
+          <a:p>
+            <a:pPr>
+              <a:lnSpc>
+                <a:spcPct val="125000"/>
+              </a:lnSpc>
+            </a:pPr>
+            <a:r>
+              <a:rPr sz="1250" b="0">
+                <a:solidFill>
+                  <a:srgbClr val="6FC7CF"/>
+                </a:solidFill>
+                <a:latin typeface="Noto Sans TC"/>
+              </a:rPr>
+              <a:t>• </a:t>
+            </a:r>
+            <a:r>
+              <a:rPr sz="1250" b="0">
+                <a:solidFill>
+                  <a:srgbClr val="E8E6E1"/>
+                </a:solidFill>
+                <a:latin typeface="Noto Sans TC"/>
+              </a:rPr>
+              <a:t>記憶體 389 MB → 81 MB（約 5x），大半是 torch runtime 不是權重；這才是量化的理由，延遲從來不是</a:t>
+            </a:r>
+          </a:p>
+          <a:p>
+            <a:pPr>
+              <a:lnSpc>
+                <a:spcPct val="125000"/>
+              </a:lnSpc>
+            </a:pPr>
+            <a:r>
+              <a:rPr sz="1250" b="0">
+                <a:solidFill>
+                  <a:srgbClr val="6FC7CF"/>
+                </a:solidFill>
+                <a:latin typeface="Noto Sans TC"/>
+              </a:rPr>
+              <a:t>• </a:t>
+            </a:r>
+            <a:r>
+              <a:rPr sz="1250" b="0">
+                <a:solidFill>
+                  <a:srgbClr val="E8E6E1"/>
+                </a:solidFill>
+                <a:latin typeface="Noto Sans TC"/>
+              </a:rPr>
+              <a:t>08-23 在舊權重上動態 INT8 掉 1.3 點、判不值得；08-26 新權重上 −0.3 點。量化結論屬於一組權重</a:t>
+            </a:r>
+          </a:p>
+          <a:p>
+            <a:pPr>
+              <a:lnSpc>
+                <a:spcPct val="125000"/>
+              </a:lnSpc>
+            </a:pPr>
+            <a:r>
+              <a:rPr sz="1250" b="0">
+                <a:solidFill>
+                  <a:srgbClr val="6FC7CF"/>
+                </a:solidFill>
+                <a:latin typeface="Noto Sans TC"/>
+              </a:rPr>
+              <a:t>• </a:t>
+            </a:r>
+            <a:r>
+              <a:rPr sz="1250" b="0">
+                <a:solidFill>
+                  <a:srgbClr val="E8E6E1"/>
+                </a:solidFill>
+                <a:latin typeface="Noto Sans TC"/>
+              </a:rPr>
+              <a:t>沒有部署：站台跑 float32。報告的規則選省最多磁碟的（動態，差 0.1 MB）——是丟銅板</a:t>
+            </a:r>
+          </a:p>
+        </p:txBody>
+      </p:sp>
+      <p:sp>
+        <p:nvSpPr>
+          <p:cNvPr id="5" name="TextBox 4"/>
+          <p:cNvSpPr txBox="1"/>
+          <p:nvPr/>
+        </p:nvSpPr>
+        <p:spPr>
+          <a:xfrm>
+            <a:off x="457200" y="6400800"/>
+            <a:ext cx="5486400" cy="320040"/>
+          </a:xfrm>
+          <a:prstGeom prst="rect">
+            <a:avLst/>
+          </a:prstGeom>
+          <a:noFill/>
+        </p:spPr>
+        <p:txBody>
+          <a:bodyPr wrap="square">
+            <a:spAutoFit/>
+          </a:bodyPr>
+          <a:lstStyle/>
+          <a:p>
+            <a:pPr>
+              <a:lnSpc>
+                <a:spcPct val="115000"/>
+              </a:lnSpc>
+            </a:pPr>
+            <a:r>
+              <a:rPr sz="1000" b="0">
+                <a:solidFill>
+                  <a:srgbClr val="9AA0A6"/>
+                </a:solidFill>
+                <a:latin typeface="IBM Plex Mono"/>
+              </a:rPr>
+              <a:t>附錄 · 備查數字</a:t>
+            </a:r>
+          </a:p>
+        </p:txBody>
+      </p:sp>
+      <p:sp>
+        <p:nvSpPr>
+          <p:cNvPr id="6" name="TextBox 5"/>
+          <p:cNvSpPr txBox="1"/>
+          <p:nvPr/>
+        </p:nvSpPr>
+        <p:spPr>
+          <a:xfrm>
+            <a:off x="8046720" y="6400800"/>
+            <a:ext cx="3657600" cy="320040"/>
+          </a:xfrm>
+          <a:prstGeom prst="rect">
+            <a:avLst/>
+          </a:prstGeom>
+          <a:noFill/>
+        </p:spPr>
+        <p:txBody>
+          <a:bodyPr wrap="square">
+            <a:spAutoFit/>
+          </a:bodyPr>
+          <a:lstStyle/>
+          <a:p>
+            <a:pPr algn="r">
+              <a:lnSpc>
+                <a:spcPct val="115000"/>
+              </a:lnSpc>
+            </a:pPr>
+            <a:r>
+              <a:rPr sz="1000" b="0">
+                <a:solidFill>
+                  <a:srgbClr val="9AA0A6"/>
+                </a:solidFill>
+                <a:latin typeface="IBM Plex Mono"/>
+              </a:rPr>
+              <a:t>28 / 33</a:t>
+            </a:r>
+          </a:p>
+        </p:txBody>
+      </p:sp>
+    </p:spTree>
+  </p:cSld>
+  <p:clrMapOvr>
+    <a:masterClrMapping/>
+  </p:clrMapOvr>
+</p:sld>
+</file>
+
+<file path=ppt/slides/slide29.xml><?xml version="1.0" encoding="utf-8"?>
+<p:sld xmlns:a="http://schemas.openxmlformats.org/drawingml/2006/main" xmlns:p="http://schemas.openxmlformats.org/presentationml/2006/main" xmlns:r="http://schemas.openxmlformats.org/officeDocument/2006/relationships">
+  <p:cSld>
+    <p:bg>
+      <p:bgPr>
+        <a:solidFill>
+          <a:srgbClr val="15171A"/>
+        </a:solidFill>
+        <a:effectLst/>
+      </p:bgPr>
+    </p:bg>
+    <p:spTree>
+      <p:nvGrpSpPr>
+        <p:cNvPr id="1" name=""/>
+        <p:cNvGrpSpPr/>
+        <p:nvPr/>
+      </p:nvGrpSpPr>
+      <p:grpSpPr/>
+      <p:sp>
+        <p:nvSpPr>
+          <p:cNvPr id="2" name="TextBox 1"/>
+          <p:cNvSpPr txBox="1"/>
+          <p:nvPr/>
+        </p:nvSpPr>
+        <p:spPr>
+          <a:xfrm>
+            <a:off x="457200" y="320040"/>
+            <a:ext cx="11247120" cy="914400"/>
+          </a:xfrm>
+          <a:prstGeom prst="rect">
+            <a:avLst/>
+          </a:prstGeom>
+          <a:noFill/>
+        </p:spPr>
+        <p:txBody>
+          <a:bodyPr wrap="square">
+            <a:spAutoFit/>
+          </a:bodyPr>
+          <a:lstStyle/>
+          <a:p>
+            <a:pPr>
+              <a:lnSpc>
+                <a:spcPct val="115000"/>
+              </a:lnSpc>
+            </a:pPr>
+            <a:r>
+              <a:rPr sz="2800" b="1">
+                <a:solidFill>
+                  <a:srgbClr val="E8E6E1"/>
+                </a:solidFill>
+                <a:latin typeface="Noto Sans TC"/>
+              </a:rPr>
+              <a:t>附錄 D · 推論延遲：CPU 比 GPU 快，直到 batch 8</a:t>
+            </a:r>
+          </a:p>
+        </p:txBody>
+      </p:sp>
+      <p:graphicFrame>
+        <p:nvGraphicFramePr>
+          <p:cNvPr id="3" name="Table 2"/>
+          <p:cNvGraphicFramePr>
+            <a:graphicFrameLocks noGrp="1"/>
+          </p:cNvGraphicFramePr>
+          <p:nvPr/>
+        </p:nvGraphicFramePr>
+        <p:xfrm>
+          <a:off x="548640" y="1371600"/>
+          <a:ext cx="11064240" cy="2304288"/>
+        </p:xfrm>
+        <a:graphic>
+          <a:graphicData uri="http://schemas.openxmlformats.org/drawingml/2006/table">
+            <a:tbl>
+              <a:tblPr firstRow="1" bandRow="1">
+                <a:tableStyleId>{5C22544A-7EE6-4342-B048-85BDC9FD1C3A}</a:tableStyleId>
+              </a:tblPr>
+              <a:tblGrid>
+                <a:gridCol w="3688080"/>
+                <a:gridCol w="3688080"/>
+                <a:gridCol w="3688080"/>
+              </a:tblGrid>
+              <a:tr h="384048">
+                <a:tc>
+                  <a:txBody>
+                    <a:bodyPr/>
+                    <a:lstStyle/>
+                    <a:p>
+                      <a:r>
+                        <a:rPr sz="1000" b="1">
+                          <a:solidFill>
+                            <a:srgbClr val="6FC7CF"/>
+                          </a:solidFill>
+                          <a:latin typeface="Noto Sans TC"/>
+                        </a:rPr>
+                        <a:t>batch</a:t>
+                      </a:r>
+                    </a:p>
+                  </a:txBody>
+                  <a:tcPr marT="36576" marB="36576">
+                    <a:solidFill>
+                      <a:srgbClr val="15171A"/>
+                    </a:solidFill>
+                  </a:tcPr>
+                </a:tc>
+                <a:tc>
+                  <a:txBody>
+                    <a:bodyPr/>
+                    <a:lstStyle/>
+                    <a:p>
+                      <a:r>
+                        <a:rPr sz="1000" b="1">
+                          <a:solidFill>
+                            <a:srgbClr val="6FC7CF"/>
+                          </a:solidFill>
+                          <a:latin typeface="Noto Sans TC"/>
+                        </a:rPr>
+                        <a:t>MPS（GPU）</a:t>
+                      </a:r>
+                    </a:p>
+                  </a:txBody>
+                  <a:tcPr marT="36576" marB="36576">
+                    <a:solidFill>
+                      <a:srgbClr val="15171A"/>
+                    </a:solidFill>
+                  </a:tcPr>
+                </a:tc>
+                <a:tc>
+                  <a:txBody>
+                    <a:bodyPr/>
+                    <a:lstStyle/>
+                    <a:p>
+                      <a:r>
+                        <a:rPr sz="1000" b="1">
+                          <a:solidFill>
+                            <a:srgbClr val="6FC7CF"/>
+                          </a:solidFill>
+                          <a:latin typeface="Noto Sans TC"/>
+                        </a:rPr>
+                        <a:t>CPU</a:t>
+                      </a:r>
+                    </a:p>
+                  </a:txBody>
+                  <a:tcPr marT="36576" marB="36576">
+                    <a:solidFill>
+                      <a:srgbClr val="15171A"/>
+                    </a:solidFill>
+                  </a:tcPr>
+                </a:tc>
+              </a:tr>
+              <a:tr h="384048">
+                <a:tc>
+                  <a:txBody>
+                    <a:bodyPr/>
+                    <a:lstStyle/>
+                    <a:p>
+                      <a:r>
+                        <a:rPr sz="1050" b="0">
+                          <a:solidFill>
+                            <a:srgbClr val="E8E6E1"/>
+                          </a:solidFill>
+                          <a:latin typeface="Noto Sans TC"/>
+                        </a:rPr>
+                        <a:t>1</a:t>
+                      </a:r>
+                    </a:p>
+                  </a:txBody>
+                  <a:tcPr marT="36576" marB="36576">
+                    <a:solidFill>
+                      <a:srgbClr val="1E2125"/>
+                    </a:solidFill>
+                  </a:tcPr>
+                </a:tc>
+                <a:tc>
+                  <a:txBody>
+                    <a:bodyPr/>
+                    <a:lstStyle/>
+                    <a:p>
+                      <a:r>
+                        <a:rPr sz="1050" b="0">
+                          <a:solidFill>
+                            <a:srgbClr val="E8E6E1"/>
+                          </a:solidFill>
+                          <a:latin typeface="Noto Sans TC"/>
+                        </a:rPr>
+                        <a:t>6.65 ms/候選</a:t>
+                      </a:r>
+                    </a:p>
+                  </a:txBody>
+                  <a:tcPr marT="36576" marB="36576">
+                    <a:solidFill>
+                      <a:srgbClr val="1E2125"/>
+                    </a:solidFill>
+                  </a:tcPr>
+                </a:tc>
+                <a:tc>
+                  <a:txBody>
+                    <a:bodyPr/>
+                    <a:lstStyle/>
+                    <a:p>
+                      <a:r>
+                        <a:rPr sz="1050" b="0">
+                          <a:solidFill>
+                            <a:srgbClr val="E8E6E1"/>
+                          </a:solidFill>
+                          <a:latin typeface="Noto Sans TC"/>
+                        </a:rPr>
+                        <a:t>2.50 ms/候選</a:t>
+                      </a:r>
+                    </a:p>
+                  </a:txBody>
+                  <a:tcPr marT="36576" marB="36576">
+                    <a:solidFill>
+                      <a:srgbClr val="1E2125"/>
+                    </a:solidFill>
+                  </a:tcPr>
+                </a:tc>
+              </a:tr>
+              <a:tr h="384048">
+                <a:tc>
+                  <a:txBody>
+                    <a:bodyPr/>
+                    <a:lstStyle/>
+                    <a:p>
+                      <a:r>
+                        <a:rPr sz="1050" b="0">
+                          <a:solidFill>
+                            <a:srgbClr val="E8E6E1"/>
+                          </a:solidFill>
+                          <a:latin typeface="Noto Sans TC"/>
+                        </a:rPr>
+                        <a:t>4</a:t>
+                      </a:r>
+                    </a:p>
+                  </a:txBody>
+                  <a:tcPr marT="36576" marB="36576">
+                    <a:solidFill>
+                      <a:srgbClr val="15171A"/>
+                    </a:solidFill>
+                  </a:tcPr>
+                </a:tc>
+                <a:tc>
+                  <a:txBody>
+                    <a:bodyPr/>
+                    <a:lstStyle/>
+                    <a:p>
+                      <a:r>
+                        <a:rPr sz="1050" b="0">
+                          <a:solidFill>
+                            <a:srgbClr val="E8E6E1"/>
+                          </a:solidFill>
+                          <a:latin typeface="Noto Sans TC"/>
+                        </a:rPr>
+                        <a:t>1.67 ms</a:t>
+                      </a:r>
+                    </a:p>
+                  </a:txBody>
+                  <a:tcPr marT="36576" marB="36576">
+                    <a:solidFill>
+                      <a:srgbClr val="15171A"/>
+                    </a:solidFill>
+                  </a:tcPr>
+                </a:tc>
+                <a:tc>
+                  <a:txBody>
+                    <a:bodyPr/>
+                    <a:lstStyle/>
+                    <a:p>
+                      <a:r>
+                        <a:rPr sz="1050" b="0">
+                          <a:solidFill>
+                            <a:srgbClr val="E8E6E1"/>
+                          </a:solidFill>
+                          <a:latin typeface="Noto Sans TC"/>
+                        </a:rPr>
+                        <a:t>1.16 ms</a:t>
+                      </a:r>
+                    </a:p>
+                  </a:txBody>
+                  <a:tcPr marT="36576" marB="36576">
+                    <a:solidFill>
+                      <a:srgbClr val="15171A"/>
+                    </a:solidFill>
+                  </a:tcPr>
+                </a:tc>
+              </a:tr>
+              <a:tr h="384048">
+                <a:tc>
+                  <a:txBody>
+                    <a:bodyPr/>
+                    <a:lstStyle/>
+                    <a:p>
+                      <a:r>
+                        <a:rPr sz="1050" b="0">
+                          <a:solidFill>
+                            <a:srgbClr val="E8E6E1"/>
+                          </a:solidFill>
+                          <a:latin typeface="Noto Sans TC"/>
+                        </a:rPr>
+                        <a:t>8</a:t>
+                      </a:r>
+                    </a:p>
+                  </a:txBody>
+                  <a:tcPr marT="36576" marB="36576">
+                    <a:solidFill>
+                      <a:srgbClr val="1E2125"/>
+                    </a:solidFill>
+                  </a:tcPr>
+                </a:tc>
+                <a:tc>
+                  <a:txBody>
+                    <a:bodyPr/>
+                    <a:lstStyle/>
+                    <a:p>
+                      <a:r>
+                        <a:rPr sz="1050" b="0">
+                          <a:solidFill>
+                            <a:srgbClr val="E8E6E1"/>
+                          </a:solidFill>
+                          <a:latin typeface="Noto Sans TC"/>
+                        </a:rPr>
+                        <a:t>0.31 ms</a:t>
+                      </a:r>
+                    </a:p>
+                  </a:txBody>
+                  <a:tcPr marT="36576" marB="36576">
+                    <a:solidFill>
+                      <a:srgbClr val="1E2125"/>
+                    </a:solidFill>
+                  </a:tcPr>
+                </a:tc>
+                <a:tc>
+                  <a:txBody>
+                    <a:bodyPr/>
+                    <a:lstStyle/>
+                    <a:p>
+                      <a:r>
+                        <a:rPr sz="1050" b="0">
+                          <a:solidFill>
+                            <a:srgbClr val="E8E6E1"/>
+                          </a:solidFill>
+                          <a:latin typeface="Noto Sans TC"/>
+                        </a:rPr>
+                        <a:t>1.00 ms</a:t>
+                      </a:r>
+                    </a:p>
+                  </a:txBody>
+                  <a:tcPr marT="36576" marB="36576">
+                    <a:solidFill>
+                      <a:srgbClr val="1E2125"/>
+                    </a:solidFill>
+                  </a:tcPr>
+                </a:tc>
+              </a:tr>
+              <a:tr h="384048">
+                <a:tc>
+                  <a:txBody>
+                    <a:bodyPr/>
+                    <a:lstStyle/>
+                    <a:p>
+                      <a:r>
+                        <a:rPr sz="1050" b="0">
+                          <a:solidFill>
+                            <a:srgbClr val="E8E6E1"/>
+                          </a:solidFill>
+                          <a:latin typeface="Noto Sans TC"/>
+                        </a:rPr>
+                        <a:t>16</a:t>
+                      </a:r>
+                    </a:p>
+                  </a:txBody>
+                  <a:tcPr marT="36576" marB="36576">
+                    <a:solidFill>
+                      <a:srgbClr val="15171A"/>
+                    </a:solidFill>
+                  </a:tcPr>
+                </a:tc>
+                <a:tc>
+                  <a:txBody>
+                    <a:bodyPr/>
+                    <a:lstStyle/>
+                    <a:p>
+                      <a:r>
+                        <a:rPr sz="1050" b="0">
+                          <a:solidFill>
+                            <a:srgbClr val="E8E6E1"/>
+                          </a:solidFill>
+                          <a:latin typeface="Noto Sans TC"/>
+                        </a:rPr>
+                        <a:t>0.21 ms</a:t>
+                      </a:r>
+                    </a:p>
+                  </a:txBody>
+                  <a:tcPr marT="36576" marB="36576">
+                    <a:solidFill>
+                      <a:srgbClr val="15171A"/>
+                    </a:solidFill>
+                  </a:tcPr>
+                </a:tc>
+                <a:tc>
+                  <a:txBody>
+                    <a:bodyPr/>
+                    <a:lstStyle/>
+                    <a:p>
+                      <a:r>
+                        <a:rPr sz="1050" b="0">
+                          <a:solidFill>
+                            <a:srgbClr val="E8E6E1"/>
+                          </a:solidFill>
+                          <a:latin typeface="Noto Sans TC"/>
+                        </a:rPr>
+                        <a:t>4.18 ms（CPU 懸崖）</a:t>
+                      </a:r>
+                    </a:p>
+                  </a:txBody>
+                  <a:tcPr marT="36576" marB="36576">
+                    <a:solidFill>
+                      <a:srgbClr val="15171A"/>
+                    </a:solidFill>
+                  </a:tcPr>
+                </a:tc>
+              </a:tr>
+              <a:tr h="384048">
+                <a:tc>
+                  <a:txBody>
+                    <a:bodyPr/>
+                    <a:lstStyle/>
+                    <a:p>
+                      <a:r>
+                        <a:rPr sz="1050" b="0">
+                          <a:solidFill>
+                            <a:srgbClr val="E8E6E1"/>
+                          </a:solidFill>
+                          <a:latin typeface="Noto Sans TC"/>
+                        </a:rPr>
+                        <a:t>128</a:t>
+                      </a:r>
+                    </a:p>
+                  </a:txBody>
+                  <a:tcPr marT="36576" marB="36576">
+                    <a:solidFill>
+                      <a:srgbClr val="1E2125"/>
+                    </a:solidFill>
+                  </a:tcPr>
+                </a:tc>
+                <a:tc>
+                  <a:txBody>
+                    <a:bodyPr/>
+                    <a:lstStyle/>
+                    <a:p>
+                      <a:r>
+                        <a:rPr sz="1050" b="0">
+                          <a:solidFill>
+                            <a:srgbClr val="E8E6E1"/>
+                          </a:solidFill>
+                          <a:latin typeface="Noto Sans TC"/>
+                        </a:rPr>
+                        <a:t>0.14 ms</a:t>
+                      </a:r>
+                    </a:p>
+                  </a:txBody>
+                  <a:tcPr marT="36576" marB="36576">
+                    <a:solidFill>
+                      <a:srgbClr val="1E2125"/>
+                    </a:solidFill>
+                  </a:tcPr>
+                </a:tc>
+                <a:tc>
+                  <a:txBody>
+                    <a:bodyPr/>
+                    <a:lstStyle/>
+                    <a:p>
+                      <a:r>
+                        <a:rPr sz="1050" b="0">
+                          <a:solidFill>
+                            <a:srgbClr val="E8E6E1"/>
+                          </a:solidFill>
+                          <a:latin typeface="Noto Sans TC"/>
+                        </a:rPr>
+                        <a:t>2.77 ms</a:t>
+                      </a:r>
+                    </a:p>
+                  </a:txBody>
+                  <a:tcPr marT="36576" marB="36576">
+                    <a:solidFill>
+                      <a:srgbClr val="1E2125"/>
+                    </a:solidFill>
+                  </a:tcPr>
+                </a:tc>
+              </a:tr>
+            </a:tbl>
+          </a:graphicData>
+        </a:graphic>
+      </p:graphicFrame>
+      <p:sp>
+        <p:nvSpPr>
+          <p:cNvPr id="4" name="TextBox 3"/>
+          <p:cNvSpPr txBox="1"/>
+          <p:nvPr/>
+        </p:nvSpPr>
+        <p:spPr>
+          <a:xfrm>
+            <a:off x="548640" y="3904488"/>
+            <a:ext cx="11064240" cy="2404872"/>
+          </a:xfrm>
+          <a:prstGeom prst="rect">
+            <a:avLst/>
+          </a:prstGeom>
+          <a:noFill/>
+        </p:spPr>
+        <p:txBody>
+          <a:bodyPr wrap="square">
+            <a:spAutoFit/>
+          </a:bodyPr>
+          <a:lstStyle/>
+          <a:p>
+            <a:pPr>
+              <a:lnSpc>
+                <a:spcPct val="125000"/>
+              </a:lnSpc>
+            </a:pPr>
+            <a:r>
+              <a:rPr sz="1250" b="0">
+                <a:solidFill>
+                  <a:srgbClr val="6FC7CF"/>
+                </a:solidFill>
+                <a:latin typeface="Noto Sans TC"/>
+              </a:rPr>
+              <a:t>• </a:t>
+            </a:r>
+            <a:r>
+              <a:rPr sz="1250" b="0">
+                <a:solidFill>
+                  <a:srgbClr val="E8E6E1"/>
+                </a:solidFill>
+                <a:latin typeface="Noto Sans TC"/>
+              </a:rPr>
+              <a:t>單張 p50：CPU 2.50 ms、MPS 7.34 ms——GPU 慢 2.9 倍，因為派工比 forward 貴；冷啟動 MPS 罰 11 倍</a:t>
+            </a:r>
+          </a:p>
+          <a:p>
+            <a:pPr>
+              <a:lnSpc>
+                <a:spcPct val="125000"/>
+              </a:lnSpc>
+            </a:pPr>
+            <a:r>
+              <a:rPr sz="1250" b="0">
+                <a:solidFill>
+                  <a:srgbClr val="6FC7CF"/>
+                </a:solidFill>
+                <a:latin typeface="Noto Sans TC"/>
+              </a:rPr>
+              <a:t>• </a:t>
+            </a:r>
+            <a:r>
+              <a:rPr sz="1250" b="0">
+                <a:solidFill>
+                  <a:srgbClr val="E8E6E1"/>
+                </a:solidFill>
+                <a:latin typeface="Noto Sans TC"/>
+              </a:rPr>
+              <a:t>CPU 在 batch 8 到 16 之間有懸崖（1.00 → 4.18 ms/候選），1/2/4/8 個 thread 都一樣；所以 CPU 批 8</a:t>
+            </a:r>
+          </a:p>
+          <a:p>
+            <a:pPr>
+              <a:lnSpc>
+                <a:spcPct val="125000"/>
+              </a:lnSpc>
+            </a:pPr>
+            <a:r>
+              <a:rPr sz="1250" b="0">
+                <a:solidFill>
+                  <a:srgbClr val="6FC7CF"/>
+                </a:solidFill>
+                <a:latin typeface="Noto Sans TC"/>
+              </a:rPr>
+              <a:t>• </a:t>
+            </a:r>
+            <a:r>
+              <a:rPr sz="1250" b="0">
+                <a:solidFill>
+                  <a:srgbClr val="E8E6E1"/>
+                </a:solidFill>
+                <a:latin typeface="Noto Sans TC"/>
+              </a:rPr>
+              <a:t>無風扇機殼：CPU 持續跑 60 秒後慢 20%；報「前 60 秒」和「穩態」兩個數字</a:t>
+            </a:r>
+          </a:p>
+          <a:p>
+            <a:pPr>
+              <a:lnSpc>
+                <a:spcPct val="125000"/>
+              </a:lnSpc>
+            </a:pPr>
+            <a:r>
+              <a:rPr sz="1250" b="0">
+                <a:solidFill>
+                  <a:srgbClr val="6FC7CF"/>
+                </a:solidFill>
+                <a:latin typeface="Noto Sans TC"/>
+              </a:rPr>
+              <a:t>• </a:t>
+            </a:r>
+            <a:r>
+              <a:rPr sz="1250" b="0">
+                <a:solidFill>
+                  <a:srgbClr val="E8E6E1"/>
+                </a:solidFill>
+                <a:latin typeface="Noto Sans TC"/>
+              </a:rPr>
+              <a:t>量這個的時候發現 ollama ps 不是 GPU 檢查：旁邊有 torch 訓練在跑它照樣是乾淨的，那次的數字作廢重量</a:t>
+            </a:r>
+          </a:p>
+        </p:txBody>
+      </p:sp>
+      <p:sp>
+        <p:nvSpPr>
+          <p:cNvPr id="5" name="TextBox 4"/>
+          <p:cNvSpPr txBox="1"/>
+          <p:nvPr/>
+        </p:nvSpPr>
+        <p:spPr>
+          <a:xfrm>
+            <a:off x="457200" y="6400800"/>
+            <a:ext cx="5486400" cy="320040"/>
+          </a:xfrm>
+          <a:prstGeom prst="rect">
+            <a:avLst/>
+          </a:prstGeom>
+          <a:noFill/>
+        </p:spPr>
+        <p:txBody>
+          <a:bodyPr wrap="square">
+            <a:spAutoFit/>
+          </a:bodyPr>
+          <a:lstStyle/>
+          <a:p>
+            <a:pPr>
+              <a:lnSpc>
+                <a:spcPct val="115000"/>
+              </a:lnSpc>
+            </a:pPr>
+            <a:r>
+              <a:rPr sz="1000" b="0">
+                <a:solidFill>
+                  <a:srgbClr val="9AA0A6"/>
+                </a:solidFill>
+                <a:latin typeface="IBM Plex Mono"/>
+              </a:rPr>
+              <a:t>附錄 · 備查數字</a:t>
+            </a:r>
+          </a:p>
+        </p:txBody>
+      </p:sp>
+      <p:sp>
+        <p:nvSpPr>
+          <p:cNvPr id="6" name="TextBox 5"/>
+          <p:cNvSpPr txBox="1"/>
+          <p:nvPr/>
+        </p:nvSpPr>
+        <p:spPr>
+          <a:xfrm>
+            <a:off x="8046720" y="6400800"/>
+            <a:ext cx="3657600" cy="320040"/>
+          </a:xfrm>
+          <a:prstGeom prst="rect">
+            <a:avLst/>
+          </a:prstGeom>
+          <a:noFill/>
+        </p:spPr>
+        <p:txBody>
+          <a:bodyPr wrap="square">
+            <a:spAutoFit/>
+          </a:bodyPr>
+          <a:lstStyle/>
+          <a:p>
+            <a:pPr algn="r">
+              <a:lnSpc>
+                <a:spcPct val="115000"/>
+              </a:lnSpc>
+            </a:pPr>
+            <a:r>
+              <a:rPr sz="1000" b="0">
+                <a:solidFill>
+                  <a:srgbClr val="9AA0A6"/>
+                </a:solidFill>
+                <a:latin typeface="IBM Plex Mono"/>
+              </a:rPr>
+              <a:t>29 / 33</a:t>
             </a:r>
           </a:p>
         </p:txBody>
@@ -14918,8 +18474,8 @@
         </p:nvSpPr>
         <p:spPr>
           <a:xfrm>
-            <a:off x="548640" y="1463040"/>
-            <a:ext cx="11064240" cy="4754880"/>
+            <a:off x="548640" y="1371600"/>
+            <a:ext cx="11064240" cy="4937760"/>
           </a:xfrm>
           <a:prstGeom prst="rect">
             <a:avLst/>
@@ -15106,7 +18662,2184 @@
                 </a:solidFill>
                 <a:latin typeface="IBM Plex Mono"/>
               </a:rPr>
-              <a:t>★ 主線 2/9 · 3 / 25</a:t>
+              <a:t>★ 主線 2/9 · 3 / 33</a:t>
+            </a:r>
+          </a:p>
+        </p:txBody>
+      </p:sp>
+    </p:spTree>
+  </p:cSld>
+  <p:clrMapOvr>
+    <a:masterClrMapping/>
+  </p:clrMapOvr>
+</p:sld>
+</file>
+
+<file path=ppt/slides/slide30.xml><?xml version="1.0" encoding="utf-8"?>
+<p:sld xmlns:a="http://schemas.openxmlformats.org/drawingml/2006/main" xmlns:p="http://schemas.openxmlformats.org/presentationml/2006/main" xmlns:r="http://schemas.openxmlformats.org/officeDocument/2006/relationships">
+  <p:cSld>
+    <p:bg>
+      <p:bgPr>
+        <a:solidFill>
+          <a:srgbClr val="15171A"/>
+        </a:solidFill>
+        <a:effectLst/>
+      </p:bgPr>
+    </p:bg>
+    <p:spTree>
+      <p:nvGrpSpPr>
+        <p:cNvPr id="1" name=""/>
+        <p:cNvGrpSpPr/>
+        <p:nvPr/>
+      </p:nvGrpSpPr>
+      <p:grpSpPr/>
+      <p:sp>
+        <p:nvSpPr>
+          <p:cNvPr id="2" name="TextBox 1"/>
+          <p:cNvSpPr txBox="1"/>
+          <p:nvPr/>
+        </p:nvSpPr>
+        <p:spPr>
+          <a:xfrm>
+            <a:off x="457200" y="320040"/>
+            <a:ext cx="11247120" cy="914400"/>
+          </a:xfrm>
+          <a:prstGeom prst="rect">
+            <a:avLst/>
+          </a:prstGeom>
+          <a:noFill/>
+        </p:spPr>
+        <p:txBody>
+          <a:bodyPr wrap="square">
+            <a:spAutoFit/>
+          </a:bodyPr>
+          <a:lstStyle/>
+          <a:p>
+            <a:pPr>
+              <a:lnSpc>
+                <a:spcPct val="115000"/>
+              </a:lnSpc>
+            </a:pPr>
+            <a:r>
+              <a:rPr sz="2800" b="1">
+                <a:solidFill>
+                  <a:srgbClr val="E8E6E1"/>
+                </a:solidFill>
+                <a:latin typeface="Noto Sans TC"/>
+              </a:rPr>
+              <a:t>附錄 E · 偵測器與無樣板複判器的訓練</a:t>
+            </a:r>
+          </a:p>
+        </p:txBody>
+      </p:sp>
+      <p:pic>
+        <p:nvPicPr>
+          <p:cNvPr id="3" name="Picture 2" descr="crop_curves.png"/>
+          <p:cNvPicPr>
+            <a:picLocks noChangeAspect="1"/>
+          </p:cNvPicPr>
+          <p:nvPr/>
+        </p:nvPicPr>
+        <p:blipFill>
+          <a:blip r:embed="rId2"/>
+          <a:stretch>
+            <a:fillRect/>
+          </a:stretch>
+        </p:blipFill>
+        <p:spPr>
+          <a:xfrm>
+            <a:off x="548640" y="1280160"/>
+            <a:ext cx="6766560" cy="2142744"/>
+          </a:xfrm>
+          <a:prstGeom prst="rect">
+            <a:avLst/>
+          </a:prstGeom>
+        </p:spPr>
+      </p:pic>
+      <p:sp>
+        <p:nvSpPr>
+          <p:cNvPr id="4" name="TextBox 3"/>
+          <p:cNvSpPr txBox="1"/>
+          <p:nvPr/>
+        </p:nvSpPr>
+        <p:spPr>
+          <a:xfrm>
+            <a:off x="7589520" y="1280160"/>
+            <a:ext cx="4206240" cy="4389120"/>
+          </a:xfrm>
+          <a:prstGeom prst="rect">
+            <a:avLst/>
+          </a:prstGeom>
+          <a:noFill/>
+        </p:spPr>
+        <p:txBody>
+          <a:bodyPr wrap="square">
+            <a:spAutoFit/>
+          </a:bodyPr>
+          <a:lstStyle/>
+          <a:p>
+            <a:pPr>
+              <a:lnSpc>
+                <a:spcPct val="125000"/>
+              </a:lnSpc>
+            </a:pPr>
+            <a:r>
+              <a:rPr sz="1250" b="0">
+                <a:solidFill>
+                  <a:srgbClr val="6FC7CF"/>
+                </a:solidFill>
+                <a:latin typeface="Noto Sans TC"/>
+              </a:rPr>
+              <a:t>• </a:t>
+            </a:r>
+            <a:r>
+              <a:rPr sz="1250" b="0">
+                <a:solidFill>
+                  <a:srgbClr val="E8E6E1"/>
+                </a:solidFill>
+                <a:latin typeface="Noto Sans TC"/>
+              </a:rPr>
+              <a:t>YOLO26n：PCB-AoI 966 張訓練／245 張驗證（35 片板）、60 epoch、imgsz 640、batch 16、MPS 56 分鐘、seed 固定</a:t>
+            </a:r>
+          </a:p>
+          <a:p>
+            <a:pPr>
+              <a:lnSpc>
+                <a:spcPct val="125000"/>
+              </a:lnSpc>
+            </a:pPr>
+            <a:r>
+              <a:rPr sz="1250" b="0">
+                <a:solidFill>
+                  <a:srgbClr val="6FC7CF"/>
+                </a:solidFill>
+                <a:latin typeface="Noto Sans TC"/>
+              </a:rPr>
+              <a:t>• </a:t>
+            </a:r>
+            <a:r>
+              <a:rPr sz="1250" b="0">
+                <a:solidFill>
+                  <a:srgbClr val="E8E6E1"/>
+                </a:solidFill>
+                <a:latin typeface="Noto Sans TC"/>
+              </a:rPr>
+              <a:t>驗證 mAP50 0.658（目標中位數 17 px）、91.6% 的瑕疵被框住；≤0.5% 漏網下 confidence 只省 1.2%</a:t>
+            </a:r>
+          </a:p>
+          <a:p>
+            <a:pPr>
+              <a:lnSpc>
+                <a:spcPct val="125000"/>
+              </a:lnSpc>
+            </a:pPr>
+            <a:r>
+              <a:rPr sz="1250" b="0">
+                <a:solidFill>
+                  <a:srgbClr val="6FC7CF"/>
+                </a:solidFill>
+                <a:latin typeface="Noto Sans TC"/>
+              </a:rPr>
+              <a:t>• </a:t>
+            </a:r>
+            <a:r>
+              <a:rPr sz="1250" b="0">
+                <a:solidFill>
+                  <a:srgbClr val="E8E6E1"/>
+                </a:solidFill>
+                <a:latin typeface="Noto Sans TC"/>
+              </a:rPr>
+              <a:t>crop 複判器：同一個 ResNet-18、64 px RGB、按 base stem 切 split 防增強圖洩漏；val_review_reduction 十個 epoch 在 1–3% 之間</a:t>
+            </a:r>
+          </a:p>
+          <a:p>
+            <a:pPr>
+              <a:lnSpc>
+                <a:spcPct val="125000"/>
+              </a:lnSpc>
+            </a:pPr>
+            <a:r>
+              <a:rPr sz="1250" b="0">
+                <a:solidFill>
+                  <a:srgbClr val="6FC7CF"/>
+                </a:solidFill>
+                <a:latin typeface="Noto Sans TC"/>
+              </a:rPr>
+              <a:t>• </a:t>
+            </a:r>
+            <a:r>
+              <a:rPr sz="1250" b="0">
+                <a:solidFill>
+                  <a:srgbClr val="E8E6E1"/>
+                </a:solidFill>
+                <a:latin typeface="Noto Sans TC"/>
+              </a:rPr>
+              <a:t>訓練時 GPU 被翻譯工作佔著，在 CPU 上訓；一個 seed；候選來自看過訓練圖的偵測器——都寫在 benchmarks 的條目裡</a:t>
+            </a:r>
+          </a:p>
+        </p:txBody>
+      </p:sp>
+      <p:sp>
+        <p:nvSpPr>
+          <p:cNvPr id="5" name="TextBox 4"/>
+          <p:cNvSpPr txBox="1"/>
+          <p:nvPr/>
+        </p:nvSpPr>
+        <p:spPr>
+          <a:xfrm>
+            <a:off x="548640" y="5669280"/>
+            <a:ext cx="11155680" cy="457200"/>
+          </a:xfrm>
+          <a:prstGeom prst="rect">
+            <a:avLst/>
+          </a:prstGeom>
+          <a:noFill/>
+        </p:spPr>
+        <p:txBody>
+          <a:bodyPr wrap="square">
+            <a:spAutoFit/>
+          </a:bodyPr>
+          <a:lstStyle/>
+          <a:p>
+            <a:pPr>
+              <a:lnSpc>
+                <a:spcPct val="115000"/>
+              </a:lnSpc>
+            </a:pPr>
+            <a:r>
+              <a:rPr sz="1000" b="0">
+                <a:solidFill>
+                  <a:srgbClr val="9AA0A6"/>
+                </a:solidFill>
+                <a:latin typeface="IBM Plex Mono"/>
+              </a:rPr>
+              <a:t>models/pcbaoi_reverifier/history.json · 無樣板 crop 複判器的 val_review_reduction 十個 epoch 停在 1–3%</a:t>
+            </a:r>
+          </a:p>
+        </p:txBody>
+      </p:sp>
+      <p:sp>
+        <p:nvSpPr>
+          <p:cNvPr id="6" name="TextBox 5"/>
+          <p:cNvSpPr txBox="1"/>
+          <p:nvPr/>
+        </p:nvSpPr>
+        <p:spPr>
+          <a:xfrm>
+            <a:off x="457200" y="6400800"/>
+            <a:ext cx="5486400" cy="320040"/>
+          </a:xfrm>
+          <a:prstGeom prst="rect">
+            <a:avLst/>
+          </a:prstGeom>
+          <a:noFill/>
+        </p:spPr>
+        <p:txBody>
+          <a:bodyPr wrap="square">
+            <a:spAutoFit/>
+          </a:bodyPr>
+          <a:lstStyle/>
+          <a:p>
+            <a:pPr>
+              <a:lnSpc>
+                <a:spcPct val="115000"/>
+              </a:lnSpc>
+            </a:pPr>
+            <a:r>
+              <a:rPr sz="1000" b="0">
+                <a:solidFill>
+                  <a:srgbClr val="9AA0A6"/>
+                </a:solidFill>
+                <a:latin typeface="IBM Plex Mono"/>
+              </a:rPr>
+              <a:t>附錄 · 備查數字</a:t>
+            </a:r>
+          </a:p>
+        </p:txBody>
+      </p:sp>
+      <p:sp>
+        <p:nvSpPr>
+          <p:cNvPr id="7" name="TextBox 6"/>
+          <p:cNvSpPr txBox="1"/>
+          <p:nvPr/>
+        </p:nvSpPr>
+        <p:spPr>
+          <a:xfrm>
+            <a:off x="8046720" y="6400800"/>
+            <a:ext cx="3657600" cy="320040"/>
+          </a:xfrm>
+          <a:prstGeom prst="rect">
+            <a:avLst/>
+          </a:prstGeom>
+          <a:noFill/>
+        </p:spPr>
+        <p:txBody>
+          <a:bodyPr wrap="square">
+            <a:spAutoFit/>
+          </a:bodyPr>
+          <a:lstStyle/>
+          <a:p>
+            <a:pPr algn="r">
+              <a:lnSpc>
+                <a:spcPct val="115000"/>
+              </a:lnSpc>
+            </a:pPr>
+            <a:r>
+              <a:rPr sz="1000" b="0">
+                <a:solidFill>
+                  <a:srgbClr val="9AA0A6"/>
+                </a:solidFill>
+                <a:latin typeface="IBM Plex Mono"/>
+              </a:rPr>
+              <a:t>30 / 33</a:t>
+            </a:r>
+          </a:p>
+        </p:txBody>
+      </p:sp>
+    </p:spTree>
+  </p:cSld>
+  <p:clrMapOvr>
+    <a:masterClrMapping/>
+  </p:clrMapOvr>
+</p:sld>
+</file>
+
+<file path=ppt/slides/slide31.xml><?xml version="1.0" encoding="utf-8"?>
+<p:sld xmlns:a="http://schemas.openxmlformats.org/drawingml/2006/main" xmlns:p="http://schemas.openxmlformats.org/presentationml/2006/main" xmlns:r="http://schemas.openxmlformats.org/officeDocument/2006/relationships">
+  <p:cSld>
+    <p:bg>
+      <p:bgPr>
+        <a:solidFill>
+          <a:srgbClr val="15171A"/>
+        </a:solidFill>
+        <a:effectLst/>
+      </p:bgPr>
+    </p:bg>
+    <p:spTree>
+      <p:nvGrpSpPr>
+        <p:cNvPr id="1" name=""/>
+        <p:cNvGrpSpPr/>
+        <p:nvPr/>
+      </p:nvGrpSpPr>
+      <p:grpSpPr/>
+      <p:sp>
+        <p:nvSpPr>
+          <p:cNvPr id="2" name="TextBox 1"/>
+          <p:cNvSpPr txBox="1"/>
+          <p:nvPr/>
+        </p:nvSpPr>
+        <p:spPr>
+          <a:xfrm>
+            <a:off x="457200" y="320040"/>
+            <a:ext cx="11247120" cy="914400"/>
+          </a:xfrm>
+          <a:prstGeom prst="rect">
+            <a:avLst/>
+          </a:prstGeom>
+          <a:noFill/>
+        </p:spPr>
+        <p:txBody>
+          <a:bodyPr wrap="square">
+            <a:spAutoFit/>
+          </a:bodyPr>
+          <a:lstStyle/>
+          <a:p>
+            <a:pPr>
+              <a:lnSpc>
+                <a:spcPct val="115000"/>
+              </a:lnSpc>
+            </a:pPr>
+            <a:r>
+              <a:rPr sz="2800" b="1">
+                <a:solidFill>
+                  <a:srgbClr val="E8E6E1"/>
+                </a:solidFill>
+                <a:latin typeface="Noto Sans TC"/>
+              </a:rPr>
+              <a:t>附錄 F · S0 gate 的三條曲線：DeepPCB 過、HRIPCB 不過</a:t>
+            </a:r>
+          </a:p>
+        </p:txBody>
+      </p:sp>
+      <p:pic>
+        <p:nvPicPr>
+          <p:cNvPr id="3" name="Picture 2" descr="gate_curves.png"/>
+          <p:cNvPicPr>
+            <a:picLocks noChangeAspect="1"/>
+          </p:cNvPicPr>
+          <p:nvPr/>
+        </p:nvPicPr>
+        <p:blipFill>
+          <a:blip r:embed="rId2"/>
+          <a:stretch>
+            <a:fillRect/>
+          </a:stretch>
+        </p:blipFill>
+        <p:spPr>
+          <a:xfrm>
+            <a:off x="548640" y="1280160"/>
+            <a:ext cx="6766560" cy="2368296"/>
+          </a:xfrm>
+          <a:prstGeom prst="rect">
+            <a:avLst/>
+          </a:prstGeom>
+        </p:spPr>
+      </p:pic>
+      <p:sp>
+        <p:nvSpPr>
+          <p:cNvPr id="4" name="TextBox 3"/>
+          <p:cNvSpPr txBox="1"/>
+          <p:nvPr/>
+        </p:nvSpPr>
+        <p:spPr>
+          <a:xfrm>
+            <a:off x="7589520" y="1280160"/>
+            <a:ext cx="4206240" cy="4389120"/>
+          </a:xfrm>
+          <a:prstGeom prst="rect">
+            <a:avLst/>
+          </a:prstGeom>
+          <a:noFill/>
+        </p:spPr>
+        <p:txBody>
+          <a:bodyPr wrap="square">
+            <a:spAutoFit/>
+          </a:bodyPr>
+          <a:lstStyle/>
+          <a:p>
+            <a:pPr>
+              <a:lnSpc>
+                <a:spcPct val="125000"/>
+              </a:lnSpc>
+            </a:pPr>
+            <a:r>
+              <a:rPr sz="1250" b="0">
+                <a:solidFill>
+                  <a:srgbClr val="6FC7CF"/>
+                </a:solidFill>
+                <a:latin typeface="Noto Sans TC"/>
+              </a:rPr>
+              <a:t>• </a:t>
+            </a:r>
+            <a:r>
+              <a:rPr sz="1250" b="0">
+                <a:solidFill>
+                  <a:srgbClr val="E8E6E1"/>
+                </a:solidFill>
+                <a:latin typeface="Noto Sans TC"/>
+              </a:rPr>
+              <a:t>DeepPCB（trainval 200 對）：門檻 30–100 recall 都是 95.7%、每張 10.7 個誤報——門檻怎麼設都一樣，二值圖沒有灰階可調</a:t>
+            </a:r>
+          </a:p>
+          <a:p>
+            <a:pPr>
+              <a:lnSpc>
+                <a:spcPct val="125000"/>
+              </a:lnSpc>
+            </a:pPr>
+            <a:r>
+              <a:rPr sz="1250" b="0">
+                <a:solidFill>
+                  <a:srgbClr val="6FC7CF"/>
+                </a:solidFill>
+                <a:latin typeface="Noto Sans TC"/>
+              </a:rPr>
+              <a:t>• </a:t>
+            </a:r>
+            <a:r>
+              <a:rPr sz="1250" b="0">
+                <a:solidFill>
+                  <a:srgbClr val="E8E6E1"/>
+                </a:solidFill>
+                <a:latin typeface="Noto Sans TC"/>
+              </a:rPr>
+              <a:t>HRIPCB 對齊：門檻 10 才有 92.3% recall（1.8 個誤報）；門檻 60 只剩 14.3%</a:t>
+            </a:r>
+          </a:p>
+          <a:p>
+            <a:pPr>
+              <a:lnSpc>
+                <a:spcPct val="125000"/>
+              </a:lnSpc>
+            </a:pPr>
+            <a:r>
+              <a:rPr sz="1250" b="0">
+                <a:solidFill>
+                  <a:srgbClr val="6FC7CF"/>
+                </a:solidFill>
+                <a:latin typeface="Noto Sans TC"/>
+              </a:rPr>
+              <a:t>• </a:t>
+            </a:r>
+            <a:r>
+              <a:rPr sz="1250" b="0">
+                <a:solidFill>
+                  <a:srgbClr val="E8E6E1"/>
+                </a:solidFill>
+                <a:latin typeface="Noto Sans TC"/>
+              </a:rPr>
+              <a:t>HRIPCB 對齊＋擾動：門檻 10 recall 90.5% 但每張 860 個誤報；門檻 60 誤報 24.7 個但 recall 14.2%——沒有一點同時過兩關</a:t>
+            </a:r>
+          </a:p>
+          <a:p>
+            <a:pPr>
+              <a:lnSpc>
+                <a:spcPct val="125000"/>
+              </a:lnSpc>
+            </a:pPr>
+            <a:r>
+              <a:rPr sz="1250" b="0">
+                <a:solidFill>
+                  <a:srgbClr val="6FC7CF"/>
+                </a:solidFill>
+                <a:latin typeface="Noto Sans TC"/>
+              </a:rPr>
+              <a:t>• </a:t>
+            </a:r>
+            <a:r>
+              <a:rPr sz="1250" b="0">
+                <a:solidFill>
+                  <a:srgbClr val="E8E6E1"/>
+                </a:solidFill>
+                <a:latin typeface="Noto Sans TC"/>
+              </a:rPr>
+              <a:t>HRIPCB 旋轉：對位拒絕 563/693 對，最好 recall 49.4%、每張 282 個誤報</a:t>
+            </a:r>
+          </a:p>
+        </p:txBody>
+      </p:sp>
+      <p:sp>
+        <p:nvSpPr>
+          <p:cNvPr id="5" name="TextBox 4"/>
+          <p:cNvSpPr txBox="1"/>
+          <p:nvPr/>
+        </p:nvSpPr>
+        <p:spPr>
+          <a:xfrm>
+            <a:off x="548640" y="5669280"/>
+            <a:ext cx="11155680" cy="457200"/>
+          </a:xfrm>
+          <a:prstGeom prst="rect">
+            <a:avLst/>
+          </a:prstGeom>
+          <a:noFill/>
+        </p:spPr>
+        <p:txBody>
+          <a:bodyPr wrap="square">
+            <a:spAutoFit/>
+          </a:bodyPr>
+          <a:lstStyle/>
+          <a:p>
+            <a:pPr>
+              <a:lnSpc>
+                <a:spcPct val="115000"/>
+              </a:lnSpc>
+            </a:pPr>
+            <a:r>
+              <a:rPr sz="1000" b="0">
+                <a:solidFill>
+                  <a:srgbClr val="9AA0A6"/>
+                </a:solidFill>
+                <a:latin typeface="IBM Plex Mono"/>
+              </a:rPr>
+              <a:t>eval/results/gate_check*.json · 每個灰階門檻的 recall 與每張圖的平均誤報數</a:t>
+            </a:r>
+          </a:p>
+        </p:txBody>
+      </p:sp>
+      <p:sp>
+        <p:nvSpPr>
+          <p:cNvPr id="6" name="TextBox 5"/>
+          <p:cNvSpPr txBox="1"/>
+          <p:nvPr/>
+        </p:nvSpPr>
+        <p:spPr>
+          <a:xfrm>
+            <a:off x="457200" y="6400800"/>
+            <a:ext cx="5486400" cy="320040"/>
+          </a:xfrm>
+          <a:prstGeom prst="rect">
+            <a:avLst/>
+          </a:prstGeom>
+          <a:noFill/>
+        </p:spPr>
+        <p:txBody>
+          <a:bodyPr wrap="square">
+            <a:spAutoFit/>
+          </a:bodyPr>
+          <a:lstStyle/>
+          <a:p>
+            <a:pPr>
+              <a:lnSpc>
+                <a:spcPct val="115000"/>
+              </a:lnSpc>
+            </a:pPr>
+            <a:r>
+              <a:rPr sz="1000" b="0">
+                <a:solidFill>
+                  <a:srgbClr val="9AA0A6"/>
+                </a:solidFill>
+                <a:latin typeface="IBM Plex Mono"/>
+              </a:rPr>
+              <a:t>附錄 · 備查數字</a:t>
+            </a:r>
+          </a:p>
+        </p:txBody>
+      </p:sp>
+      <p:sp>
+        <p:nvSpPr>
+          <p:cNvPr id="7" name="TextBox 6"/>
+          <p:cNvSpPr txBox="1"/>
+          <p:nvPr/>
+        </p:nvSpPr>
+        <p:spPr>
+          <a:xfrm>
+            <a:off x="8046720" y="6400800"/>
+            <a:ext cx="3657600" cy="320040"/>
+          </a:xfrm>
+          <a:prstGeom prst="rect">
+            <a:avLst/>
+          </a:prstGeom>
+          <a:noFill/>
+        </p:spPr>
+        <p:txBody>
+          <a:bodyPr wrap="square">
+            <a:spAutoFit/>
+          </a:bodyPr>
+          <a:lstStyle/>
+          <a:p>
+            <a:pPr algn="r">
+              <a:lnSpc>
+                <a:spcPct val="115000"/>
+              </a:lnSpc>
+            </a:pPr>
+            <a:r>
+              <a:rPr sz="1000" b="0">
+                <a:solidFill>
+                  <a:srgbClr val="9AA0A6"/>
+                </a:solidFill>
+                <a:latin typeface="IBM Plex Mono"/>
+              </a:rPr>
+              <a:t>31 / 33</a:t>
+            </a:r>
+          </a:p>
+        </p:txBody>
+      </p:sp>
+    </p:spTree>
+  </p:cSld>
+  <p:clrMapOvr>
+    <a:masterClrMapping/>
+  </p:clrMapOvr>
+</p:sld>
+</file>
+
+<file path=ppt/slides/slide32.xml><?xml version="1.0" encoding="utf-8"?>
+<p:sld xmlns:a="http://schemas.openxmlformats.org/drawingml/2006/main" xmlns:p="http://schemas.openxmlformats.org/presentationml/2006/main" xmlns:r="http://schemas.openxmlformats.org/officeDocument/2006/relationships">
+  <p:cSld>
+    <p:bg>
+      <p:bgPr>
+        <a:solidFill>
+          <a:srgbClr val="15171A"/>
+        </a:solidFill>
+        <a:effectLst/>
+      </p:bgPr>
+    </p:bg>
+    <p:spTree>
+      <p:nvGrpSpPr>
+        <p:cNvPr id="1" name=""/>
+        <p:cNvGrpSpPr/>
+        <p:nvPr/>
+      </p:nvGrpSpPr>
+      <p:grpSpPr/>
+      <p:sp>
+        <p:nvSpPr>
+          <p:cNvPr id="2" name="TextBox 1"/>
+          <p:cNvSpPr txBox="1"/>
+          <p:nvPr/>
+        </p:nvSpPr>
+        <p:spPr>
+          <a:xfrm>
+            <a:off x="457200" y="320040"/>
+            <a:ext cx="11247120" cy="914400"/>
+          </a:xfrm>
+          <a:prstGeom prst="rect">
+            <a:avLst/>
+          </a:prstGeom>
+          <a:noFill/>
+        </p:spPr>
+        <p:txBody>
+          <a:bodyPr wrap="square">
+            <a:spAutoFit/>
+          </a:bodyPr>
+          <a:lstStyle/>
+          <a:p>
+            <a:pPr>
+              <a:lnSpc>
+                <a:spcPct val="115000"/>
+              </a:lnSpc>
+            </a:pPr>
+            <a:r>
+              <a:rPr sz="2800" b="1">
+                <a:solidFill>
+                  <a:srgbClr val="E8E6E1"/>
+                </a:solidFill>
+                <a:latin typeface="Noto Sans TC"/>
+              </a:rPr>
+              <a:t>附錄 G · 三份資料集，各做一件事</a:t>
+            </a:r>
+          </a:p>
+        </p:txBody>
+      </p:sp>
+      <p:graphicFrame>
+        <p:nvGraphicFramePr>
+          <p:cNvPr id="3" name="Table 2"/>
+          <p:cNvGraphicFramePr>
+            <a:graphicFrameLocks noGrp="1"/>
+          </p:cNvGraphicFramePr>
+          <p:nvPr/>
+        </p:nvGraphicFramePr>
+        <p:xfrm>
+          <a:off x="548640" y="1371600"/>
+          <a:ext cx="11064240" cy="1536192"/>
+        </p:xfrm>
+        <a:graphic>
+          <a:graphicData uri="http://schemas.openxmlformats.org/drawingml/2006/table">
+            <a:tbl>
+              <a:tblPr firstRow="1" bandRow="1">
+                <a:tableStyleId>{5C22544A-7EE6-4342-B048-85BDC9FD1C3A}</a:tableStyleId>
+              </a:tblPr>
+              <a:tblGrid>
+                <a:gridCol w="2766060"/>
+                <a:gridCol w="2766060"/>
+                <a:gridCol w="2766060"/>
+                <a:gridCol w="2766060"/>
+              </a:tblGrid>
+              <a:tr h="384048">
+                <a:tc>
+                  <a:txBody>
+                    <a:bodyPr/>
+                    <a:lstStyle/>
+                    <a:p>
+                      <a:r>
+                        <a:rPr sz="1000" b="1">
+                          <a:solidFill>
+                            <a:srgbClr val="6FC7CF"/>
+                          </a:solidFill>
+                          <a:latin typeface="Noto Sans TC"/>
+                        </a:rPr>
+                        <a:t>資料集</a:t>
+                      </a:r>
+                    </a:p>
+                  </a:txBody>
+                  <a:tcPr marT="36576" marB="36576">
+                    <a:solidFill>
+                      <a:srgbClr val="15171A"/>
+                    </a:solidFill>
+                  </a:tcPr>
+                </a:tc>
+                <a:tc>
+                  <a:txBody>
+                    <a:bodyPr/>
+                    <a:lstStyle/>
+                    <a:p>
+                      <a:r>
+                        <a:rPr sz="1000" b="1">
+                          <a:solidFill>
+                            <a:srgbClr val="6FC7CF"/>
+                          </a:solidFill>
+                          <a:latin typeface="Noto Sans TC"/>
+                        </a:rPr>
+                        <a:t>長什麼樣</a:t>
+                      </a:r>
+                    </a:p>
+                  </a:txBody>
+                  <a:tcPr marT="36576" marB="36576">
+                    <a:solidFill>
+                      <a:srgbClr val="15171A"/>
+                    </a:solidFill>
+                  </a:tcPr>
+                </a:tc>
+                <a:tc>
+                  <a:txBody>
+                    <a:bodyPr/>
+                    <a:lstStyle/>
+                    <a:p>
+                      <a:r>
+                        <a:rPr sz="1000" b="1">
+                          <a:solidFill>
+                            <a:srgbClr val="6FC7CF"/>
+                          </a:solidFill>
+                          <a:latin typeface="Noto Sans TC"/>
+                        </a:rPr>
+                        <a:t>在系統裡的角色</a:t>
+                      </a:r>
+                    </a:p>
+                  </a:txBody>
+                  <a:tcPr marT="36576" marB="36576">
+                    <a:solidFill>
+                      <a:srgbClr val="15171A"/>
+                    </a:solidFill>
+                  </a:tcPr>
+                </a:tc>
+                <a:tc>
+                  <a:txBody>
+                    <a:bodyPr/>
+                    <a:lstStyle/>
+                    <a:p>
+                      <a:r>
+                        <a:rPr sz="1000" b="1">
+                          <a:solidFill>
+                            <a:srgbClr val="6FC7CF"/>
+                          </a:solidFill>
+                          <a:latin typeface="Noto Sans TC"/>
+                        </a:rPr>
+                        <a:t>沒拿它做什麼</a:t>
+                      </a:r>
+                    </a:p>
+                  </a:txBody>
+                  <a:tcPr marT="36576" marB="36576">
+                    <a:solidFill>
+                      <a:srgbClr val="15171A"/>
+                    </a:solidFill>
+                  </a:tcPr>
+                </a:tc>
+              </a:tr>
+              <a:tr h="384048">
+                <a:tc>
+                  <a:txBody>
+                    <a:bodyPr/>
+                    <a:lstStyle/>
+                    <a:p>
+                      <a:r>
+                        <a:rPr sz="1050" b="0">
+                          <a:solidFill>
+                            <a:srgbClr val="E8E6E1"/>
+                          </a:solidFill>
+                          <a:latin typeface="Noto Sans TC"/>
+                        </a:rPr>
+                        <a:t>DeepPCB</a:t>
+                      </a:r>
+                    </a:p>
+                  </a:txBody>
+                  <a:tcPr marT="36576" marB="36576">
+                    <a:solidFill>
+                      <a:srgbClr val="1E2125"/>
+                    </a:solidFill>
+                  </a:tcPr>
+                </a:tc>
+                <a:tc>
+                  <a:txBody>
+                    <a:bodyPr/>
+                    <a:lstStyle/>
+                    <a:p>
+                      <a:r>
+                        <a:rPr sz="1050" b="0">
+                          <a:solidFill>
+                            <a:srgbClr val="E8E6E1"/>
+                          </a:solidFill>
+                          <a:latin typeface="Noto Sans TC"/>
+                        </a:rPr>
+                        <a:t>1,500 對樣板／待測，二值圖，六類瑕疵有框；官方 split，測試集 7,322 個候選</a:t>
+                      </a:r>
+                    </a:p>
+                  </a:txBody>
+                  <a:tcPr marT="36576" marB="36576">
+                    <a:solidFill>
+                      <a:srgbClr val="1E2125"/>
+                    </a:solidFill>
+                  </a:tcPr>
+                </a:tc>
+                <a:tc>
+                  <a:txBody>
+                    <a:bodyPr/>
+                    <a:lstStyle/>
+                    <a:p>
+                      <a:r>
+                        <a:rPr sz="1050" b="0">
+                          <a:solidFill>
+                            <a:srgbClr val="E8E6E1"/>
+                          </a:solidFill>
+                          <a:latin typeface="Noto Sans TC"/>
+                        </a:rPr>
+                        <a:t>主線：模擬 AOI 產生候選、複判模型訓練與量測、52.8% 來自它</a:t>
+                      </a:r>
+                    </a:p>
+                  </a:txBody>
+                  <a:tcPr marT="36576" marB="36576">
+                    <a:solidFill>
+                      <a:srgbClr val="1E2125"/>
+                    </a:solidFill>
+                  </a:tcPr>
+                </a:tc>
+                <a:tc>
+                  <a:txBody>
+                    <a:bodyPr/>
+                    <a:lstStyle/>
+                    <a:p>
+                      <a:r>
+                        <a:rPr sz="1050" b="0">
+                          <a:solidFill>
+                            <a:srgbClr val="E8E6E1"/>
+                          </a:solidFill>
+                          <a:latin typeface="Noto Sans TC"/>
+                        </a:rPr>
+                        <a:t>沒重切 split（可比性）</a:t>
+                      </a:r>
+                    </a:p>
+                  </a:txBody>
+                  <a:tcPr marT="36576" marB="36576">
+                    <a:solidFill>
+                      <a:srgbClr val="1E2125"/>
+                    </a:solidFill>
+                  </a:tcPr>
+                </a:tc>
+              </a:tr>
+              <a:tr h="384048">
+                <a:tc>
+                  <a:txBody>
+                    <a:bodyPr/>
+                    <a:lstStyle/>
+                    <a:p>
+                      <a:r>
+                        <a:rPr sz="1050" b="0">
+                          <a:solidFill>
+                            <a:srgbClr val="E8E6E1"/>
+                          </a:solidFill>
+                          <a:latin typeface="Noto Sans TC"/>
+                        </a:rPr>
+                        <a:t>PCB-AoI</a:t>
+                      </a:r>
+                    </a:p>
+                  </a:txBody>
+                  <a:tcPr marT="36576" marB="36576">
+                    <a:solidFill>
+                      <a:srgbClr val="15171A"/>
+                    </a:solidFill>
+                  </a:tcPr>
+                </a:tc>
+                <a:tc>
+                  <a:txBody>
+                    <a:bodyPr/>
+                    <a:lstStyle/>
+                    <a:p>
+                      <a:r>
+                        <a:rPr sz="1050" b="0">
+                          <a:solidFill>
+                            <a:srgbClr val="E8E6E1"/>
+                          </a:solidFill>
+                          <a:latin typeface="Noto Sans TC"/>
+                        </a:rPr>
+                        <a:t>真的錫膏照片，有標框，沒有樣板</a:t>
+                      </a:r>
+                    </a:p>
+                  </a:txBody>
+                  <a:tcPr marT="36576" marB="36576">
+                    <a:solidFill>
+                      <a:srgbClr val="15171A"/>
+                    </a:solidFill>
+                  </a:tcPr>
+                </a:tc>
+                <a:tc>
+                  <a:txBody>
+                    <a:bodyPr/>
+                    <a:lstStyle/>
+                    <a:p>
+                      <a:r>
+                        <a:rPr sz="1050" b="0">
+                          <a:solidFill>
+                            <a:srgbClr val="E8E6E1"/>
+                          </a:solidFill>
+                          <a:latin typeface="Noto Sans TC"/>
+                        </a:rPr>
+                        <a:t>只給 YOLO 偵測器；證明相減前端在 SMT 不存在</a:t>
+                      </a:r>
+                    </a:p>
+                  </a:txBody>
+                  <a:tcPr marT="36576" marB="36576">
+                    <a:solidFill>
+                      <a:srgbClr val="15171A"/>
+                    </a:solidFill>
+                  </a:tcPr>
+                </a:tc>
+                <a:tc>
+                  <a:txBody>
+                    <a:bodyPr/>
+                    <a:lstStyle/>
+                    <a:p>
+                      <a:r>
+                        <a:rPr sz="1050" b="0">
+                          <a:solidFill>
+                            <a:srgbClr val="E8E6E1"/>
+                          </a:solidFill>
+                          <a:latin typeface="Noto Sans TC"/>
+                        </a:rPr>
+                        <a:t>沒拿來訓主線模型（沒有樣板通道）</a:t>
+                      </a:r>
+                    </a:p>
+                  </a:txBody>
+                  <a:tcPr marT="36576" marB="36576">
+                    <a:solidFill>
+                      <a:srgbClr val="15171A"/>
+                    </a:solidFill>
+                  </a:tcPr>
+                </a:tc>
+              </a:tr>
+              <a:tr h="384048">
+                <a:tc>
+                  <a:txBody>
+                    <a:bodyPr/>
+                    <a:lstStyle/>
+                    <a:p>
+                      <a:r>
+                        <a:rPr sz="1050" b="0">
+                          <a:solidFill>
+                            <a:srgbClr val="E8E6E1"/>
+                          </a:solidFill>
+                          <a:latin typeface="Noto Sans TC"/>
+                        </a:rPr>
+                        <a:t>HRIPCB</a:t>
+                      </a:r>
+                    </a:p>
+                  </a:txBody>
+                  <a:tcPr marT="36576" marB="36576">
+                    <a:solidFill>
+                      <a:srgbClr val="1E2125"/>
+                    </a:solidFill>
+                  </a:tcPr>
+                </a:tc>
+                <a:tc>
+                  <a:txBody>
+                    <a:bodyPr/>
+                    <a:lstStyle/>
+                    <a:p>
+                      <a:r>
+                        <a:rPr sz="1050" b="0">
+                          <a:solidFill>
+                            <a:srgbClr val="E8E6E1"/>
+                          </a:solidFill>
+                          <a:latin typeface="Noto Sans TC"/>
+                        </a:rPr>
+                        <a:t>10 片板的照片，693 張畫上瑕疵，另 693 張旋轉 ±10°</a:t>
+                      </a:r>
+                    </a:p>
+                  </a:txBody>
+                  <a:tcPr marT="36576" marB="36576">
+                    <a:solidFill>
+                      <a:srgbClr val="1E2125"/>
+                    </a:solidFill>
+                  </a:tcPr>
+                </a:tc>
+                <a:tc>
+                  <a:txBody>
+                    <a:bodyPr/>
+                    <a:lstStyle/>
+                    <a:p>
+                      <a:r>
+                        <a:rPr sz="1050" b="0">
+                          <a:solidFill>
+                            <a:srgbClr val="E8E6E1"/>
+                          </a:solidFill>
+                          <a:latin typeface="Noto Sans TC"/>
+                        </a:rPr>
+                        <a:t>只當考卷：原封不動跑主線流程，看在哪一層壞</a:t>
+                      </a:r>
+                    </a:p>
+                  </a:txBody>
+                  <a:tcPr marT="36576" marB="36576">
+                    <a:solidFill>
+                      <a:srgbClr val="1E2125"/>
+                    </a:solidFill>
+                  </a:tcPr>
+                </a:tc>
+                <a:tc>
+                  <a:txBody>
+                    <a:bodyPr/>
+                    <a:lstStyle/>
+                    <a:p>
+                      <a:r>
+                        <a:rPr sz="1050" b="0">
+                          <a:solidFill>
+                            <a:srgbClr val="E8E6E1"/>
+                          </a:solidFill>
+                          <a:latin typeface="Noto Sans TC"/>
+                        </a:rPr>
+                        <a:t>沒訓練、沒調門檻、類別表沒合併（missing_hole 沒有工作指示）</a:t>
+                      </a:r>
+                    </a:p>
+                  </a:txBody>
+                  <a:tcPr marT="36576" marB="36576">
+                    <a:solidFill>
+                      <a:srgbClr val="1E2125"/>
+                    </a:solidFill>
+                  </a:tcPr>
+                </a:tc>
+              </a:tr>
+            </a:tbl>
+          </a:graphicData>
+        </a:graphic>
+      </p:graphicFrame>
+      <p:sp>
+        <p:nvSpPr>
+          <p:cNvPr id="4" name="TextBox 3"/>
+          <p:cNvSpPr txBox="1"/>
+          <p:nvPr/>
+        </p:nvSpPr>
+        <p:spPr>
+          <a:xfrm>
+            <a:off x="548640" y="3136392"/>
+            <a:ext cx="11064240" cy="3172968"/>
+          </a:xfrm>
+          <a:prstGeom prst="rect">
+            <a:avLst/>
+          </a:prstGeom>
+          <a:noFill/>
+        </p:spPr>
+        <p:txBody>
+          <a:bodyPr wrap="square">
+            <a:spAutoFit/>
+          </a:bodyPr>
+          <a:lstStyle/>
+          <a:p>
+            <a:pPr>
+              <a:lnSpc>
+                <a:spcPct val="125000"/>
+              </a:lnSpc>
+            </a:pPr>
+            <a:r>
+              <a:rPr sz="1250" b="0">
+                <a:solidFill>
+                  <a:srgbClr val="6FC7CF"/>
+                </a:solidFill>
+                <a:latin typeface="Noto Sans TC"/>
+              </a:rPr>
+              <a:t>• </a:t>
+            </a:r>
+            <a:r>
+              <a:rPr sz="1250" b="0">
+                <a:solidFill>
+                  <a:srgbClr val="E8E6E1"/>
+                </a:solidFill>
+                <a:latin typeface="Noto Sans TC"/>
+              </a:rPr>
+              <a:t>產線資料（機台、批號、班別、事件）是種出來的，不是資料集：它只決定哪片 DeepPCB 板分配給哪台機，M22 拿到 open 最多的五分之一、M32 有一次參數變更前後的分配差；三台機有事件但沒效果當對照組</a:t>
+            </a:r>
+          </a:p>
+          <a:p>
+            <a:pPr>
+              <a:lnSpc>
+                <a:spcPct val="125000"/>
+              </a:lnSpc>
+            </a:pPr>
+            <a:r>
+              <a:rPr sz="1250" b="0">
+                <a:solidFill>
+                  <a:srgbClr val="6FC7CF"/>
+                </a:solidFill>
+                <a:latin typeface="Noto Sans TC"/>
+              </a:rPr>
+              <a:t>• </a:t>
+            </a:r>
+            <a:r>
+              <a:rPr sz="1250" b="0">
+                <a:solidFill>
+                  <a:srgbClr val="E8E6E1"/>
+                </a:solidFill>
+                <a:latin typeface="Noto Sans TC"/>
+              </a:rPr>
+              <a:t>驗收標準文件是本專案自撰，不是 IPC-A-610</a:t>
+            </a:r>
+          </a:p>
+        </p:txBody>
+      </p:sp>
+      <p:sp>
+        <p:nvSpPr>
+          <p:cNvPr id="5" name="TextBox 4"/>
+          <p:cNvSpPr txBox="1"/>
+          <p:nvPr/>
+        </p:nvSpPr>
+        <p:spPr>
+          <a:xfrm>
+            <a:off x="457200" y="6400800"/>
+            <a:ext cx="5486400" cy="320040"/>
+          </a:xfrm>
+          <a:prstGeom prst="rect">
+            <a:avLst/>
+          </a:prstGeom>
+          <a:noFill/>
+        </p:spPr>
+        <p:txBody>
+          <a:bodyPr wrap="square">
+            <a:spAutoFit/>
+          </a:bodyPr>
+          <a:lstStyle/>
+          <a:p>
+            <a:pPr>
+              <a:lnSpc>
+                <a:spcPct val="115000"/>
+              </a:lnSpc>
+            </a:pPr>
+            <a:r>
+              <a:rPr sz="1000" b="0">
+                <a:solidFill>
+                  <a:srgbClr val="9AA0A6"/>
+                </a:solidFill>
+                <a:latin typeface="IBM Plex Mono"/>
+              </a:rPr>
+              <a:t>附錄 · 備查數字</a:t>
+            </a:r>
+          </a:p>
+        </p:txBody>
+      </p:sp>
+      <p:sp>
+        <p:nvSpPr>
+          <p:cNvPr id="6" name="TextBox 5"/>
+          <p:cNvSpPr txBox="1"/>
+          <p:nvPr/>
+        </p:nvSpPr>
+        <p:spPr>
+          <a:xfrm>
+            <a:off x="8046720" y="6400800"/>
+            <a:ext cx="3657600" cy="320040"/>
+          </a:xfrm>
+          <a:prstGeom prst="rect">
+            <a:avLst/>
+          </a:prstGeom>
+          <a:noFill/>
+        </p:spPr>
+        <p:txBody>
+          <a:bodyPr wrap="square">
+            <a:spAutoFit/>
+          </a:bodyPr>
+          <a:lstStyle/>
+          <a:p>
+            <a:pPr algn="r">
+              <a:lnSpc>
+                <a:spcPct val="115000"/>
+              </a:lnSpc>
+            </a:pPr>
+            <a:r>
+              <a:rPr sz="1000" b="0">
+                <a:solidFill>
+                  <a:srgbClr val="9AA0A6"/>
+                </a:solidFill>
+                <a:latin typeface="IBM Plex Mono"/>
+              </a:rPr>
+              <a:t>32 / 33</a:t>
+            </a:r>
+          </a:p>
+        </p:txBody>
+      </p:sp>
+    </p:spTree>
+  </p:cSld>
+  <p:clrMapOvr>
+    <a:masterClrMapping/>
+  </p:clrMapOvr>
+</p:sld>
+</file>
+
+<file path=ppt/slides/slide33.xml><?xml version="1.0" encoding="utf-8"?>
+<p:sld xmlns:a="http://schemas.openxmlformats.org/drawingml/2006/main" xmlns:p="http://schemas.openxmlformats.org/presentationml/2006/main" xmlns:r="http://schemas.openxmlformats.org/officeDocument/2006/relationships">
+  <p:cSld>
+    <p:bg>
+      <p:bgPr>
+        <a:solidFill>
+          <a:srgbClr val="15171A"/>
+        </a:solidFill>
+        <a:effectLst/>
+      </p:bgPr>
+    </p:bg>
+    <p:spTree>
+      <p:nvGrpSpPr>
+        <p:cNvPr id="1" name=""/>
+        <p:cNvGrpSpPr/>
+        <p:nvPr/>
+      </p:nvGrpSpPr>
+      <p:grpSpPr/>
+      <p:sp>
+        <p:nvSpPr>
+          <p:cNvPr id="2" name="TextBox 1"/>
+          <p:cNvSpPr txBox="1"/>
+          <p:nvPr/>
+        </p:nvSpPr>
+        <p:spPr>
+          <a:xfrm>
+            <a:off x="457200" y="320040"/>
+            <a:ext cx="11247120" cy="914400"/>
+          </a:xfrm>
+          <a:prstGeom prst="rect">
+            <a:avLst/>
+          </a:prstGeom>
+          <a:noFill/>
+        </p:spPr>
+        <p:txBody>
+          <a:bodyPr wrap="square">
+            <a:spAutoFit/>
+          </a:bodyPr>
+          <a:lstStyle/>
+          <a:p>
+            <a:pPr>
+              <a:lnSpc>
+                <a:spcPct val="115000"/>
+              </a:lnSpc>
+            </a:pPr>
+            <a:r>
+              <a:rPr sz="2800" b="1">
+                <a:solidFill>
+                  <a:srgbClr val="E8E6E1"/>
+                </a:solidFill>
+                <a:latin typeface="Noto Sans TC"/>
+              </a:rPr>
+              <a:t>附錄 H · 程式裡每一個門檻，和它的出處</a:t>
+            </a:r>
+          </a:p>
+        </p:txBody>
+      </p:sp>
+      <p:graphicFrame>
+        <p:nvGraphicFramePr>
+          <p:cNvPr id="3" name="Table 2"/>
+          <p:cNvGraphicFramePr>
+            <a:graphicFrameLocks noGrp="1"/>
+          </p:cNvGraphicFramePr>
+          <p:nvPr/>
+        </p:nvGraphicFramePr>
+        <p:xfrm>
+          <a:off x="548640" y="1371600"/>
+          <a:ext cx="11064240" cy="3072384"/>
+        </p:xfrm>
+        <a:graphic>
+          <a:graphicData uri="http://schemas.openxmlformats.org/drawingml/2006/table">
+            <a:tbl>
+              <a:tblPr firstRow="1" bandRow="1">
+                <a:tableStyleId>{5C22544A-7EE6-4342-B048-85BDC9FD1C3A}</a:tableStyleId>
+              </a:tblPr>
+              <a:tblGrid>
+                <a:gridCol w="2766060"/>
+                <a:gridCol w="2766060"/>
+                <a:gridCol w="2766060"/>
+                <a:gridCol w="2766060"/>
+              </a:tblGrid>
+              <a:tr h="384048">
+                <a:tc>
+                  <a:txBody>
+                    <a:bodyPr/>
+                    <a:lstStyle/>
+                    <a:p>
+                      <a:r>
+                        <a:rPr sz="1000" b="1">
+                          <a:solidFill>
+                            <a:srgbClr val="6FC7CF"/>
+                          </a:solidFill>
+                          <a:latin typeface="Noto Sans TC"/>
+                        </a:rPr>
+                        <a:t>常數</a:t>
+                      </a:r>
+                    </a:p>
+                  </a:txBody>
+                  <a:tcPr marT="36576" marB="36576">
+                    <a:solidFill>
+                      <a:srgbClr val="15171A"/>
+                    </a:solidFill>
+                  </a:tcPr>
+                </a:tc>
+                <a:tc>
+                  <a:txBody>
+                    <a:bodyPr/>
+                    <a:lstStyle/>
+                    <a:p>
+                      <a:r>
+                        <a:rPr sz="1000" b="1">
+                          <a:solidFill>
+                            <a:srgbClr val="6FC7CF"/>
+                          </a:solidFill>
+                          <a:latin typeface="Noto Sans TC"/>
+                        </a:rPr>
+                        <a:t>值</a:t>
+                      </a:r>
+                    </a:p>
+                  </a:txBody>
+                  <a:tcPr marT="36576" marB="36576">
+                    <a:solidFill>
+                      <a:srgbClr val="15171A"/>
+                    </a:solidFill>
+                  </a:tcPr>
+                </a:tc>
+                <a:tc>
+                  <a:txBody>
+                    <a:bodyPr/>
+                    <a:lstStyle/>
+                    <a:p>
+                      <a:r>
+                        <a:rPr sz="1000" b="1">
+                          <a:solidFill>
+                            <a:srgbClr val="6FC7CF"/>
+                          </a:solidFill>
+                          <a:latin typeface="Noto Sans TC"/>
+                        </a:rPr>
+                        <a:t>來自</a:t>
+                      </a:r>
+                    </a:p>
+                  </a:txBody>
+                  <a:tcPr marT="36576" marB="36576">
+                    <a:solidFill>
+                      <a:srgbClr val="15171A"/>
+                    </a:solidFill>
+                  </a:tcPr>
+                </a:tc>
+                <a:tc>
+                  <a:txBody>
+                    <a:bodyPr/>
+                    <a:lstStyle/>
+                    <a:p>
+                      <a:r>
+                        <a:rPr sz="1000" b="1">
+                          <a:solidFill>
+                            <a:srgbClr val="6FC7CF"/>
+                          </a:solidFill>
+                          <a:latin typeface="Noto Sans TC"/>
+                        </a:rPr>
+                        <a:t>改的時候要做什麼</a:t>
+                      </a:r>
+                    </a:p>
+                  </a:txBody>
+                  <a:tcPr marT="36576" marB="36576">
+                    <a:solidFill>
+                      <a:srgbClr val="15171A"/>
+                    </a:solidFill>
+                  </a:tcPr>
+                </a:tc>
+              </a:tr>
+              <a:tr h="384048">
+                <a:tc>
+                  <a:txBody>
+                    <a:bodyPr/>
+                    <a:lstStyle/>
+                    <a:p>
+                      <a:r>
+                        <a:rPr sz="1050" b="0">
+                          <a:solidFill>
+                            <a:srgbClr val="E8E6E1"/>
+                          </a:solidFill>
+                          <a:latin typeface="Noto Sans TC"/>
+                        </a:rPr>
+                        <a:t>DEFAULT_DISMISS_THRESHOLD</a:t>
+                      </a:r>
+                    </a:p>
+                  </a:txBody>
+                  <a:tcPr marT="36576" marB="36576">
+                    <a:solidFill>
+                      <a:srgbClr val="1E2125"/>
+                    </a:solidFill>
+                  </a:tcPr>
+                </a:tc>
+                <a:tc>
+                  <a:txBody>
+                    <a:bodyPr/>
+                    <a:lstStyle/>
+                    <a:p>
+                      <a:r>
+                        <a:rPr sz="1050" b="0">
+                          <a:solidFill>
+                            <a:srgbClr val="E8E6E1"/>
+                          </a:solidFill>
+                          <a:latin typeface="Noto Sans TC"/>
+                        </a:rPr>
+                        <a:t>0.961</a:t>
+                      </a:r>
+                    </a:p>
+                  </a:txBody>
+                  <a:tcPr marT="36576" marB="36576">
+                    <a:solidFill>
+                      <a:srgbClr val="1E2125"/>
+                    </a:solidFill>
+                  </a:tcPr>
+                </a:tc>
+                <a:tc>
+                  <a:txBody>
+                    <a:bodyPr/>
+                    <a:lstStyle/>
+                    <a:p>
+                      <a:r>
+                        <a:rPr sz="1050" b="0">
+                          <a:solidFill>
+                            <a:srgbClr val="E8E6E1"/>
+                          </a:solidFill>
+                          <a:latin typeface="Noto Sans TC"/>
+                        </a:rPr>
+                        <a:t>操作點掃描，≤0.5% 漏網下省最多，往上取整（scripts/report.py）</a:t>
+                      </a:r>
+                    </a:p>
+                  </a:txBody>
+                  <a:tcPr marT="36576" marB="36576">
+                    <a:solidFill>
+                      <a:srgbClr val="1E2125"/>
+                    </a:solidFill>
+                  </a:tcPr>
+                </a:tc>
+                <a:tc>
+                  <a:txBody>
+                    <a:bodyPr/>
+                    <a:lstStyle/>
+                    <a:p>
+                      <a:r>
+                        <a:rPr sz="1050" b="0">
+                          <a:solidFill>
+                            <a:srgbClr val="E8E6E1"/>
+                          </a:solidFill>
+                          <a:latin typeface="Noto Sans TC"/>
+                        </a:rPr>
+                        <a:t>每次重訓重掃</a:t>
+                      </a:r>
+                    </a:p>
+                  </a:txBody>
+                  <a:tcPr marT="36576" marB="36576">
+                    <a:solidFill>
+                      <a:srgbClr val="1E2125"/>
+                    </a:solidFill>
+                  </a:tcPr>
+                </a:tc>
+              </a:tr>
+              <a:tr h="384048">
+                <a:tc>
+                  <a:txBody>
+                    <a:bodyPr/>
+                    <a:lstStyle/>
+                    <a:p>
+                      <a:r>
+                        <a:rPr sz="1050" b="0">
+                          <a:solidFill>
+                            <a:srgbClr val="E8E6E1"/>
+                          </a:solidFill>
+                          <a:latin typeface="Noto Sans TC"/>
+                        </a:rPr>
+                        <a:t>ESCALATE_BELOW</a:t>
+                      </a:r>
+                    </a:p>
+                  </a:txBody>
+                  <a:tcPr marT="36576" marB="36576">
+                    <a:solidFill>
+                      <a:srgbClr val="15171A"/>
+                    </a:solidFill>
+                  </a:tcPr>
+                </a:tc>
+                <a:tc>
+                  <a:txBody>
+                    <a:bodyPr/>
+                    <a:lstStyle/>
+                    <a:p>
+                      <a:r>
+                        <a:rPr sz="1050" b="0">
+                          <a:solidFill>
+                            <a:srgbClr val="E8E6E1"/>
+                          </a:solidFill>
+                          <a:latin typeface="Noto Sans TC"/>
+                        </a:rPr>
+                        <a:t>0.961</a:t>
+                      </a:r>
+                    </a:p>
+                  </a:txBody>
+                  <a:tcPr marT="36576" marB="36576">
+                    <a:solidFill>
+                      <a:srgbClr val="15171A"/>
+                    </a:solidFill>
+                  </a:tcPr>
+                </a:tc>
+                <a:tc>
+                  <a:txBody>
+                    <a:bodyPr/>
+                    <a:lstStyle/>
+                    <a:p>
+                      <a:r>
+                        <a:rPr sz="1050" b="0">
+                          <a:solidFill>
+                            <a:srgbClr val="E8E6E1"/>
+                          </a:solidFill>
+                          <a:latin typeface="Noto Sans TC"/>
+                        </a:rPr>
+                        <a:t>= DEFAULT_DISMISS_THRESHOLD；讓 agent 那一支永遠不能排除</a:t>
+                      </a:r>
+                    </a:p>
+                  </a:txBody>
+                  <a:tcPr marT="36576" marB="36576">
+                    <a:solidFill>
+                      <a:srgbClr val="15171A"/>
+                    </a:solidFill>
+                  </a:tcPr>
+                </a:tc>
+                <a:tc>
+                  <a:txBody>
+                    <a:bodyPr/>
+                    <a:lstStyle/>
+                    <a:p>
+                      <a:r>
+                        <a:rPr sz="1050" b="0">
+                          <a:solidFill>
+                            <a:srgbClr val="E8E6E1"/>
+                          </a:solidFill>
+                          <a:latin typeface="Noto Sans TC"/>
+                        </a:rPr>
+                        <a:t>跟著上一個走</a:t>
+                      </a:r>
+                    </a:p>
+                  </a:txBody>
+                  <a:tcPr marT="36576" marB="36576">
+                    <a:solidFill>
+                      <a:srgbClr val="15171A"/>
+                    </a:solidFill>
+                  </a:tcPr>
+                </a:tc>
+              </a:tr>
+              <a:tr h="384048">
+                <a:tc>
+                  <a:txBody>
+                    <a:bodyPr/>
+                    <a:lstStyle/>
+                    <a:p>
+                      <a:r>
+                        <a:rPr sz="1050" b="0">
+                          <a:solidFill>
+                            <a:srgbClr val="E8E6E1"/>
+                          </a:solidFill>
+                          <a:latin typeface="Noto Sans TC"/>
+                        </a:rPr>
+                        <a:t>EXPLAINED_BAND</a:t>
+                      </a:r>
+                    </a:p>
+                  </a:txBody>
+                  <a:tcPr marT="36576" marB="36576">
+                    <a:solidFill>
+                      <a:srgbClr val="1E2125"/>
+                    </a:solidFill>
+                  </a:tcPr>
+                </a:tc>
+                <a:tc>
+                  <a:txBody>
+                    <a:bodyPr/>
+                    <a:lstStyle/>
+                    <a:p>
+                      <a:r>
+                        <a:rPr sz="1050" b="0">
+                          <a:solidFill>
+                            <a:srgbClr val="E8E6E1"/>
+                          </a:solidFill>
+                          <a:latin typeface="Noto Sans TC"/>
+                        </a:rPr>
+                        <a:t>0.035</a:t>
+                      </a:r>
+                    </a:p>
+                  </a:txBody>
+                  <a:tcPr marT="36576" marB="36576">
+                    <a:solidFill>
+                      <a:srgbClr val="1E2125"/>
+                    </a:solidFill>
+                  </a:tcPr>
+                </a:tc>
+                <a:tc>
+                  <a:txBody>
+                    <a:bodyPr/>
+                    <a:lstStyle/>
+                    <a:p>
+                      <a:r>
+                        <a:rPr sz="1050" b="0">
+                          <a:solidFill>
+                            <a:srgbClr val="E8E6E1"/>
+                          </a:solidFill>
+                          <a:latin typeface="Noto Sans TC"/>
+                        </a:rPr>
+                        <a:t>掃描：這個寬度讓 6,736 個自動處置裡 1,460 個有書面說明</a:t>
+                      </a:r>
+                    </a:p>
+                  </a:txBody>
+                  <a:tcPr marT="36576" marB="36576">
+                    <a:solidFill>
+                      <a:srgbClr val="1E2125"/>
+                    </a:solidFill>
+                  </a:tcPr>
+                </a:tc>
+                <a:tc>
+                  <a:txBody>
+                    <a:bodyPr/>
+                    <a:lstStyle/>
+                    <a:p>
+                      <a:r>
+                        <a:rPr sz="1050" b="0">
+                          <a:solidFill>
+                            <a:srgbClr val="E8E6E1"/>
+                          </a:solidFill>
+                          <a:latin typeface="Noto Sans TC"/>
+                        </a:rPr>
+                        <a:t>docs/architecture.md 的表</a:t>
+                      </a:r>
+                    </a:p>
+                  </a:txBody>
+                  <a:tcPr marT="36576" marB="36576">
+                    <a:solidFill>
+                      <a:srgbClr val="1E2125"/>
+                    </a:solidFill>
+                  </a:tcPr>
+                </a:tc>
+              </a:tr>
+              <a:tr h="384048">
+                <a:tc>
+                  <a:txBody>
+                    <a:bodyPr/>
+                    <a:lstStyle/>
+                    <a:p>
+                      <a:r>
+                        <a:rPr sz="1050" b="0">
+                          <a:solidFill>
+                            <a:srgbClr val="E8E6E1"/>
+                          </a:solidFill>
+                          <a:latin typeface="Noto Sans TC"/>
+                        </a:rPr>
+                        <a:t>CONFIDENT</a:t>
+                      </a:r>
+                    </a:p>
+                  </a:txBody>
+                  <a:tcPr marT="36576" marB="36576">
+                    <a:solidFill>
+                      <a:srgbClr val="15171A"/>
+                    </a:solidFill>
+                  </a:tcPr>
+                </a:tc>
+                <a:tc>
+                  <a:txBody>
+                    <a:bodyPr/>
+                    <a:lstStyle/>
+                    <a:p>
+                      <a:r>
+                        <a:rPr sz="1050" b="0">
+                          <a:solidFill>
+                            <a:srgbClr val="E8E6E1"/>
+                          </a:solidFill>
+                          <a:latin typeface="Noto Sans TC"/>
+                        </a:rPr>
+                        <a:t>0.996</a:t>
+                      </a:r>
+                    </a:p>
+                  </a:txBody>
+                  <a:tcPr marT="36576" marB="36576">
+                    <a:solidFill>
+                      <a:srgbClr val="15171A"/>
+                    </a:solidFill>
+                  </a:tcPr>
+                </a:tc>
+                <a:tc>
+                  <a:txBody>
+                    <a:bodyPr/>
+                    <a:lstStyle/>
+                    <a:p>
+                      <a:r>
+                        <a:rPr sz="1050" b="0">
+                          <a:solidFill>
+                            <a:srgbClr val="E8E6E1"/>
+                          </a:solidFill>
+                          <a:latin typeface="Noto Sans TC"/>
+                        </a:rPr>
+                        <a:t>= ESCALATE_BELOW + EXPLAINED_BAND；只是成本閘門，不改任何處置</a:t>
+                      </a:r>
+                    </a:p>
+                  </a:txBody>
+                  <a:tcPr marT="36576" marB="36576">
+                    <a:solidFill>
+                      <a:srgbClr val="15171A"/>
+                    </a:solidFill>
+                  </a:tcPr>
+                </a:tc>
+                <a:tc>
+                  <a:txBody>
+                    <a:bodyPr/>
+                    <a:lstStyle/>
+                    <a:p>
+                      <a:r>
+                        <a:rPr sz="1050" b="0">
+                          <a:solidFill>
+                            <a:srgbClr val="E8E6E1"/>
+                          </a:solidFill>
+                          <a:latin typeface="Noto Sans TC"/>
+                        </a:rPr>
+                        <a:t>關係式，不手動改</a:t>
+                      </a:r>
+                    </a:p>
+                  </a:txBody>
+                  <a:tcPr marT="36576" marB="36576">
+                    <a:solidFill>
+                      <a:srgbClr val="15171A"/>
+                    </a:solidFill>
+                  </a:tcPr>
+                </a:tc>
+              </a:tr>
+              <a:tr h="384048">
+                <a:tc>
+                  <a:txBody>
+                    <a:bodyPr/>
+                    <a:lstStyle/>
+                    <a:p>
+                      <a:r>
+                        <a:rPr sz="1050" b="0">
+                          <a:solidFill>
+                            <a:srgbClr val="E8E6E1"/>
+                          </a:solidFill>
+                          <a:latin typeface="Noto Sans TC"/>
+                        </a:rPr>
+                        <a:t>IOU_THRESHOLD</a:t>
+                      </a:r>
+                    </a:p>
+                  </a:txBody>
+                  <a:tcPr marT="36576" marB="36576">
+                    <a:solidFill>
+                      <a:srgbClr val="1E2125"/>
+                    </a:solidFill>
+                  </a:tcPr>
+                </a:tc>
+                <a:tc>
+                  <a:txBody>
+                    <a:bodyPr/>
+                    <a:lstStyle/>
+                    <a:p>
+                      <a:r>
+                        <a:rPr sz="1050" b="0">
+                          <a:solidFill>
+                            <a:srgbClr val="E8E6E1"/>
+                          </a:solidFill>
+                          <a:latin typeface="Noto Sans TC"/>
+                        </a:rPr>
+                        <a:t>0.33</a:t>
+                      </a:r>
+                    </a:p>
+                  </a:txBody>
+                  <a:tcPr marT="36576" marB="36576">
+                    <a:solidFill>
+                      <a:srgbClr val="1E2125"/>
+                    </a:solidFill>
+                  </a:tcPr>
+                </a:tc>
+                <a:tc>
+                  <a:txBody>
+                    <a:bodyPr/>
+                    <a:lstStyle/>
+                    <a:p>
+                      <a:r>
+                        <a:rPr sz="1050" b="0">
+                          <a:solidFill>
+                            <a:srgbClr val="E8E6E1"/>
+                          </a:solidFill>
+                          <a:latin typeface="Noto Sans TC"/>
+                        </a:rPr>
+                        <a:t>DeepPCB 自己的 benchmark 慣例</a:t>
+                      </a:r>
+                    </a:p>
+                  </a:txBody>
+                  <a:tcPr marT="36576" marB="36576">
+                    <a:solidFill>
+                      <a:srgbClr val="1E2125"/>
+                    </a:solidFill>
+                  </a:tcPr>
+                </a:tc>
+                <a:tc>
+                  <a:txBody>
+                    <a:bodyPr/>
+                    <a:lstStyle/>
+                    <a:p>
+                      <a:r>
+                        <a:rPr sz="1050" b="0">
+                          <a:solidFill>
+                            <a:srgbClr val="E8E6E1"/>
+                          </a:solidFill>
+                          <a:latin typeface="Noto Sans TC"/>
+                        </a:rPr>
+                        <a:t>不改，為了可比</a:t>
+                      </a:r>
+                    </a:p>
+                  </a:txBody>
+                  <a:tcPr marT="36576" marB="36576">
+                    <a:solidFill>
+                      <a:srgbClr val="1E2125"/>
+                    </a:solidFill>
+                  </a:tcPr>
+                </a:tc>
+              </a:tr>
+              <a:tr h="384048">
+                <a:tc>
+                  <a:txBody>
+                    <a:bodyPr/>
+                    <a:lstStyle/>
+                    <a:p>
+                      <a:r>
+                        <a:rPr sz="1050" b="0">
+                          <a:solidFill>
+                            <a:srgbClr val="E8E6E1"/>
+                          </a:solidFill>
+                          <a:latin typeface="Noto Sans TC"/>
+                        </a:rPr>
+                        <a:t>灰階門檻</a:t>
+                      </a:r>
+                    </a:p>
+                  </a:txBody>
+                  <a:tcPr marT="36576" marB="36576">
+                    <a:solidFill>
+                      <a:srgbClr val="15171A"/>
+                    </a:solidFill>
+                  </a:tcPr>
+                </a:tc>
+                <a:tc>
+                  <a:txBody>
+                    <a:bodyPr/>
+                    <a:lstStyle/>
+                    <a:p>
+                      <a:r>
+                        <a:rPr sz="1050" b="0">
+                          <a:solidFill>
+                            <a:srgbClr val="E8E6E1"/>
+                          </a:solidFill>
+                          <a:latin typeface="Noto Sans TC"/>
+                        </a:rPr>
+                        <a:t>60</a:t>
+                      </a:r>
+                    </a:p>
+                  </a:txBody>
+                  <a:tcPr marT="36576" marB="36576">
+                    <a:solidFill>
+                      <a:srgbClr val="15171A"/>
+                    </a:solidFill>
+                  </a:tcPr>
+                </a:tc>
+                <a:tc>
+                  <a:txBody>
+                    <a:bodyPr/>
+                    <a:lstStyle/>
+                    <a:p>
+                      <a:r>
+                        <a:rPr sz="1050" b="0">
+                          <a:solidFill>
+                            <a:srgbClr val="E8E6E1"/>
+                          </a:solidFill>
+                          <a:latin typeface="Noto Sans TC"/>
+                        </a:rPr>
+                        <a:t>S0 gate；在二值圖上 30–100 都一樣</a:t>
+                      </a:r>
+                    </a:p>
+                  </a:txBody>
+                  <a:tcPr marT="36576" marB="36576">
+                    <a:solidFill>
+                      <a:srgbClr val="15171A"/>
+                    </a:solidFill>
+                  </a:tcPr>
+                </a:tc>
+                <a:tc>
+                  <a:txBody>
+                    <a:bodyPr/>
+                    <a:lstStyle/>
+                    <a:p>
+                      <a:r>
+                        <a:rPr sz="1050" b="0">
+                          <a:solidFill>
+                            <a:srgbClr val="E8E6E1"/>
+                          </a:solidFill>
+                          <a:latin typeface="Noto Sans TC"/>
+                        </a:rPr>
+                        <a:t>換資料集要重跑 gate_check</a:t>
+                      </a:r>
+                    </a:p>
+                  </a:txBody>
+                  <a:tcPr marT="36576" marB="36576">
+                    <a:solidFill>
+                      <a:srgbClr val="15171A"/>
+                    </a:solidFill>
+                  </a:tcPr>
+                </a:tc>
+              </a:tr>
+              <a:tr h="384048">
+                <a:tc>
+                  <a:txBody>
+                    <a:bodyPr/>
+                    <a:lstStyle/>
+                    <a:p>
+                      <a:r>
+                        <a:rPr sz="1050" b="0">
+                          <a:solidFill>
+                            <a:srgbClr val="E8E6E1"/>
+                          </a:solidFill>
+                          <a:latin typeface="Noto Sans TC"/>
+                        </a:rPr>
+                        <a:t>RESPONSE_BUDGET_S / EXPLANATION_DEADLINE_S</a:t>
+                      </a:r>
+                    </a:p>
+                  </a:txBody>
+                  <a:tcPr marT="36576" marB="36576">
+                    <a:solidFill>
+                      <a:srgbClr val="1E2125"/>
+                    </a:solidFill>
+                  </a:tcPr>
+                </a:tc>
+                <a:tc>
+                  <a:txBody>
+                    <a:bodyPr/>
+                    <a:lstStyle/>
+                    <a:p>
+                      <a:r>
+                        <a:rPr sz="1050" b="0">
+                          <a:solidFill>
+                            <a:srgbClr val="E8E6E1"/>
+                          </a:solidFill>
+                          <a:latin typeface="Noto Sans TC"/>
+                        </a:rPr>
+                        <a:t>10 s / 60 s</a:t>
+                      </a:r>
+                    </a:p>
+                  </a:txBody>
+                  <a:tcPr marT="36576" marB="36576">
+                    <a:solidFill>
+                      <a:srgbClr val="1E2125"/>
+                    </a:solidFill>
+                  </a:tcPr>
+                </a:tc>
+                <a:tc>
+                  <a:txBody>
+                    <a:bodyPr/>
+                    <a:lstStyle/>
+                    <a:p>
+                      <a:r>
+                        <a:rPr sz="1050" b="0">
+                          <a:solidFill>
+                            <a:srgbClr val="E8E6E1"/>
+                          </a:solidFill>
+                          <a:latin typeface="Noto Sans TC"/>
+                        </a:rPr>
+                        <a:t>WI-300 的承諾 / 量測到的說明時間上限</a:t>
+                      </a:r>
+                    </a:p>
+                  </a:txBody>
+                  <a:tcPr marT="36576" marB="36576">
+                    <a:solidFill>
+                      <a:srgbClr val="1E2125"/>
+                    </a:solidFill>
+                  </a:tcPr>
+                </a:tc>
+                <a:tc>
+                  <a:txBody>
+                    <a:bodyPr/>
+                    <a:lstStyle/>
+                    <a:p>
+                      <a:r>
+                        <a:rPr sz="1050" b="0">
+                          <a:solidFill>
+                            <a:srgbClr val="E8E6E1"/>
+                          </a:solidFill>
+                          <a:latin typeface="Noto Sans TC"/>
+                        </a:rPr>
+                        <a:t>前者不跟模型走，後者跟量測走</a:t>
+                      </a:r>
+                    </a:p>
+                  </a:txBody>
+                  <a:tcPr marT="36576" marB="36576">
+                    <a:solidFill>
+                      <a:srgbClr val="1E2125"/>
+                    </a:solidFill>
+                  </a:tcPr>
+                </a:tc>
+              </a:tr>
+            </a:tbl>
+          </a:graphicData>
+        </a:graphic>
+      </p:graphicFrame>
+      <p:sp>
+        <p:nvSpPr>
+          <p:cNvPr id="4" name="TextBox 3"/>
+          <p:cNvSpPr txBox="1"/>
+          <p:nvPr/>
+        </p:nvSpPr>
+        <p:spPr>
+          <a:xfrm>
+            <a:off x="548640" y="4672584"/>
+            <a:ext cx="11064240" cy="1636776"/>
+          </a:xfrm>
+          <a:prstGeom prst="rect">
+            <a:avLst/>
+          </a:prstGeom>
+          <a:noFill/>
+        </p:spPr>
+        <p:txBody>
+          <a:bodyPr wrap="square">
+            <a:spAutoFit/>
+          </a:bodyPr>
+          <a:lstStyle/>
+          <a:p/>
+        </p:txBody>
+      </p:sp>
+      <p:sp>
+        <p:nvSpPr>
+          <p:cNvPr id="5" name="TextBox 4"/>
+          <p:cNvSpPr txBox="1"/>
+          <p:nvPr/>
+        </p:nvSpPr>
+        <p:spPr>
+          <a:xfrm>
+            <a:off x="457200" y="6400800"/>
+            <a:ext cx="5486400" cy="320040"/>
+          </a:xfrm>
+          <a:prstGeom prst="rect">
+            <a:avLst/>
+          </a:prstGeom>
+          <a:noFill/>
+        </p:spPr>
+        <p:txBody>
+          <a:bodyPr wrap="square">
+            <a:spAutoFit/>
+          </a:bodyPr>
+          <a:lstStyle/>
+          <a:p>
+            <a:pPr>
+              <a:lnSpc>
+                <a:spcPct val="115000"/>
+              </a:lnSpc>
+            </a:pPr>
+            <a:r>
+              <a:rPr sz="1000" b="0">
+                <a:solidFill>
+                  <a:srgbClr val="9AA0A6"/>
+                </a:solidFill>
+                <a:latin typeface="IBM Plex Mono"/>
+              </a:rPr>
+              <a:t>附錄 · 備查數字</a:t>
+            </a:r>
+          </a:p>
+        </p:txBody>
+      </p:sp>
+      <p:sp>
+        <p:nvSpPr>
+          <p:cNvPr id="6" name="TextBox 5"/>
+          <p:cNvSpPr txBox="1"/>
+          <p:nvPr/>
+        </p:nvSpPr>
+        <p:spPr>
+          <a:xfrm>
+            <a:off x="8046720" y="6400800"/>
+            <a:ext cx="3657600" cy="320040"/>
+          </a:xfrm>
+          <a:prstGeom prst="rect">
+            <a:avLst/>
+          </a:prstGeom>
+          <a:noFill/>
+        </p:spPr>
+        <p:txBody>
+          <a:bodyPr wrap="square">
+            <a:spAutoFit/>
+          </a:bodyPr>
+          <a:lstStyle/>
+          <a:p>
+            <a:pPr algn="r">
+              <a:lnSpc>
+                <a:spcPct val="115000"/>
+              </a:lnSpc>
+            </a:pPr>
+            <a:r>
+              <a:rPr sz="1000" b="0">
+                <a:solidFill>
+                  <a:srgbClr val="9AA0A6"/>
+                </a:solidFill>
+                <a:latin typeface="IBM Plex Mono"/>
+              </a:rPr>
+              <a:t>33 / 33</a:t>
             </a:r>
           </a:p>
         </p:txBody>
@@ -15460,7 +21193,7 @@
                 </a:solidFill>
                 <a:latin typeface="IBM Plex Mono"/>
               </a:rPr>
-              <a:t>★ 主線 3/9 · 4 / 25</a:t>
+              <a:t>★ 主線 3/9 · 4 / 33</a:t>
             </a:r>
           </a:p>
         </p:txBody>
@@ -15764,7 +21497,7 @@
                 </a:solidFill>
                 <a:latin typeface="IBM Plex Mono"/>
               </a:rPr>
-              <a:t>5 / 25</a:t>
+              <a:t>5 / 33</a:t>
             </a:r>
           </a:p>
         </p:txBody>
@@ -16297,7 +22030,7 @@
                 </a:solidFill>
                 <a:latin typeface="IBM Plex Mono"/>
               </a:rPr>
-              <a:t>6 / 25</a:t>
+              <a:t>6 / 33</a:t>
             </a:r>
           </a:p>
         </p:txBody>
@@ -16830,7 +22563,7 @@
                 </a:solidFill>
                 <a:latin typeface="IBM Plex Mono"/>
               </a:rPr>
-              <a:t>★ 主線 5/9 · 7 / 25</a:t>
+              <a:t>★ 主線 5/9 · 7 / 33</a:t>
             </a:r>
           </a:p>
         </p:txBody>
@@ -17363,7 +23096,7 @@
                 </a:solidFill>
                 <a:latin typeface="IBM Plex Mono"/>
               </a:rPr>
-              <a:t>8 / 25</a:t>
+              <a:t>8 / 33</a:t>
             </a:r>
           </a:p>
         </p:txBody>
@@ -17896,7 +23629,7 @@
                 </a:solidFill>
                 <a:latin typeface="IBM Plex Mono"/>
               </a:rPr>
-              <a:t>9 / 25</a:t>
+              <a:t>9 / 33</a:t>
             </a:r>
           </a:p>
         </p:txBody>

--- a/docs/deck/aoi-agent-journey.zh-TW.pptx
+++ b/docs/deck/aoi-agent-journey.zh-TW.pptx
@@ -3890,6 +3890,37 @@
           <a:p/>
           <a:p>
             <a:r>
+              <a:t>頁面上只有圖；要點：</a:t>
+            </a:r>
+          </a:p>
+          <a:p>
+            <a:r>
+              <a:t>• 相減前端：樣板減待測，產生候選（也就是「AOI」）</a:t>
+            </a:r>
+          </a:p>
+          <a:p>
+            <a:r>
+              <a:t>• 複判模型：ResNet-18 看每個候選，給 P(false call) 和六類機率</a:t>
+            </a:r>
+          </a:p>
+          <a:p>
+            <a:r>
+              <a:t>• 門檻與路由：兩個數字決定誰直接處置、誰交給人</a:t>
+            </a:r>
+          </a:p>
+          <a:p>
+            <a:r>
+              <a:t>• Agent 與站台：LLM 寫說明、人做判定、每個判定記名字和模型版本</a:t>
+            </a:r>
+          </a:p>
+          <a:p>
+            <a:r>
+              <a:t>• /ask：主管問一句話，系統規劃查詢、驗證、查完畫圖寫答案</a:t>
+            </a:r>
+          </a:p>
+          <a:p/>
+          <a:p>
+            <a:r>
               <a:t>講稿 1. 五層，由左往右。前兩層是視覺，中間是兩個門檻，後兩層是語言模型和人。</a:t>
             </a:r>
           </a:p>
@@ -4008,6 +4039,27 @@
           <a:p/>
           <a:p>
             <a:r>
+              <a:t>頁面上只有圖；要點：</a:t>
+            </a:r>
+          </a:p>
+          <a:p>
+            <a:r>
+              <a:t>• classify → 依信心分路：P(誤判) ≥ 0.961 排除、缺陷 ≥ 0.996 且非 open 確認——82.2% 在這裡結束</a:t>
+            </a:r>
+          </a:p>
+          <a:p>
+            <a:r>
+              <a:t>• 其餘：取得脈絡（3 個 MCP 工具，標準依類別限定）→ LLM 寫說明（僅說明，60 秒上限）→ 信心 ≥ 0.961 決定，否則交給人</a:t>
+            </a:r>
+          </a:p>
+          <a:p>
+            <a:r>
+              <a:t>• 交給人 = LangGraph interrupt()，checkpoint 存 SQLite；作業員兩天後回來續跑，不重跑工具</a:t>
+            </a:r>
+          </a:p>
+          <a:p/>
+          <a:p>
+            <a:r>
               <a:t>講稿 1. 這張是處置路徑，程式自己畫的。</a:t>
             </a:r>
           </a:p>
@@ -4121,6 +4173,27 @@
           <a:p>
             <a:r>
               <a:t>白話：模型只做兩件事——決定查什麼、把結果寫成話；中間的驗證、平行查詢、畫圖、存檔都是程式。</a:t>
+            </a:r>
+          </a:p>
+          <a:p/>
+          <a:p>
+            <a:r>
+              <a:t>頁面上只有圖；要點：</a:t>
+            </a:r>
+          </a:p>
+          <a:p>
+            <a:r>
+              <a:t>• 規劃（LLM #1）→ 驗證：工具名、參數名、參數值都對照真實簽名與值域，L4 這種不存在的產線直接拒絕、不重試</a:t>
+            </a:r>
+          </a:p>
+          <a:p>
+            <a:r>
+              <a:t>• Send 平行展開——因為那幾個事實彼此獨立，不是為了快；工具幾毫秒，模型呼叫二十幾秒</a:t>
+            </a:r>
+          </a:p>
+          <a:p>
+            <a:r>
+              <a:t>• 收集 → 圖從結果的形狀推（模型不能選圓餅圖）→ 撰寫（LLM #2）→ 存 analysis_runs，圖從存的資料重畫、不重跑計畫</a:t>
             </a:r>
           </a:p>
           <a:p/>
@@ -22118,8 +22191,8 @@
         </p:blipFill>
         <p:spPr>
           <a:xfrm>
-            <a:off x="548640" y="1188720"/>
-            <a:ext cx="5996065" cy="4572000"/>
+            <a:off x="2544394" y="1005840"/>
+            <a:ext cx="7102907" cy="4846320"/>
           </a:xfrm>
           <a:prstGeom prst="rect">
             <a:avLst/>
@@ -22129,154 +22202,6 @@
       <p:sp>
         <p:nvSpPr>
           <p:cNvPr id="4" name="TextBox 3"/>
-          <p:cNvSpPr txBox="1"/>
-          <p:nvPr/>
-        </p:nvSpPr>
-        <p:spPr>
-          <a:xfrm>
-            <a:off x="8412480" y="1188720"/>
-            <a:ext cx="3383280" cy="4754880"/>
-          </a:xfrm>
-          <a:prstGeom prst="rect">
-            <a:avLst/>
-          </a:prstGeom>
-          <a:noFill/>
-        </p:spPr>
-        <p:txBody>
-          <a:bodyPr wrap="square">
-            <a:spAutoFit/>
-          </a:bodyPr>
-          <a:lstStyle/>
-          <a:p>
-            <a:pPr>
-              <a:lnSpc>
-                <a:spcPct val="125000"/>
-              </a:lnSpc>
-            </a:pPr>
-            <a:r>
-              <a:rPr sz="1300" b="0">
-                <a:solidFill>
-                  <a:srgbClr val="6FC7CF"/>
-                </a:solidFill>
-                <a:latin typeface="Noto Sans TC"/>
-              </a:rPr>
-              <a:t>• </a:t>
-            </a:r>
-            <a:r>
-              <a:rPr sz="1300" b="0">
-                <a:solidFill>
-                  <a:srgbClr val="E8E6E1"/>
-                </a:solidFill>
-                <a:latin typeface="Noto Sans TC"/>
-              </a:rPr>
-              <a:t>相減前端：樣板減待測，產生候選（也就是「AOI」）</a:t>
-            </a:r>
-          </a:p>
-          <a:p>
-            <a:pPr>
-              <a:lnSpc>
-                <a:spcPct val="125000"/>
-              </a:lnSpc>
-            </a:pPr>
-            <a:r>
-              <a:rPr sz="1300" b="0">
-                <a:solidFill>
-                  <a:srgbClr val="6FC7CF"/>
-                </a:solidFill>
-                <a:latin typeface="Noto Sans TC"/>
-              </a:rPr>
-              <a:t>• </a:t>
-            </a:r>
-            <a:r>
-              <a:rPr sz="1300" b="0">
-                <a:solidFill>
-                  <a:srgbClr val="E8E6E1"/>
-                </a:solidFill>
-                <a:latin typeface="Noto Sans TC"/>
-              </a:rPr>
-              <a:t>複判模型：ResNet-18 看每個候選，給 P(false call) 和六類機率</a:t>
-            </a:r>
-          </a:p>
-          <a:p>
-            <a:pPr>
-              <a:lnSpc>
-                <a:spcPct val="125000"/>
-              </a:lnSpc>
-            </a:pPr>
-            <a:r>
-              <a:rPr sz="1300" b="0">
-                <a:solidFill>
-                  <a:srgbClr val="6FC7CF"/>
-                </a:solidFill>
-                <a:latin typeface="Noto Sans TC"/>
-              </a:rPr>
-              <a:t>• </a:t>
-            </a:r>
-            <a:r>
-              <a:rPr sz="1300" b="0">
-                <a:solidFill>
-                  <a:srgbClr val="E8E6E1"/>
-                </a:solidFill>
-                <a:latin typeface="Noto Sans TC"/>
-              </a:rPr>
-              <a:t>門檻與路由：兩個數字決定誰直接處置、誰交給人</a:t>
-            </a:r>
-          </a:p>
-          <a:p>
-            <a:pPr>
-              <a:lnSpc>
-                <a:spcPct val="125000"/>
-              </a:lnSpc>
-            </a:pPr>
-            <a:r>
-              <a:rPr sz="1300" b="0">
-                <a:solidFill>
-                  <a:srgbClr val="6FC7CF"/>
-                </a:solidFill>
-                <a:latin typeface="Noto Sans TC"/>
-              </a:rPr>
-              <a:t>• </a:t>
-            </a:r>
-            <a:r>
-              <a:rPr sz="1300" b="0">
-                <a:solidFill>
-                  <a:srgbClr val="E8E6E1"/>
-                </a:solidFill>
-                <a:latin typeface="Noto Sans TC"/>
-              </a:rPr>
-              <a:t>Agent 與站台：LLM 寫說明、人做判定、每個判定記名字和模型版本</a:t>
-            </a:r>
-          </a:p>
-          <a:p>
-            <a:pPr>
-              <a:lnSpc>
-                <a:spcPct val="125000"/>
-              </a:lnSpc>
-            </a:pPr>
-            <a:r>
-              <a:rPr sz="1300" b="0">
-                <a:solidFill>
-                  <a:srgbClr val="6FC7CF"/>
-                </a:solidFill>
-                <a:latin typeface="Noto Sans TC"/>
-              </a:rPr>
-              <a:t>• </a:t>
-            </a:r>
-            <a:r>
-              <a:rPr sz="1300" b="0">
-                <a:solidFill>
-                  <a:srgbClr val="E8E6E1"/>
-                </a:solidFill>
-                <a:latin typeface="Noto Sans TC"/>
-              </a:rPr>
-              <a:t>/ask：主管問一句話，系統規劃查詢、驗證、查完畫圖寫答案</a:t>
-            </a:r>
-          </a:p>
-        </p:txBody>
-      </p:sp>
-      <p:sp>
-        <p:nvSpPr>
-          <p:cNvPr id="5" name="TextBox 4"/>
           <p:cNvSpPr txBox="1"/>
           <p:nvPr/>
         </p:nvSpPr>
@@ -22315,7 +22240,7 @@
       </p:sp>
       <p:sp>
         <p:nvSpPr>
-          <p:cNvPr id="6" name="TextBox 5"/>
+          <p:cNvPr id="5" name="TextBox 4"/>
           <p:cNvSpPr txBox="1"/>
           <p:nvPr/>
         </p:nvSpPr>
@@ -22354,7 +22279,7 @@
       </p:sp>
       <p:sp>
         <p:nvSpPr>
-          <p:cNvPr id="7" name="TextBox 6"/>
+          <p:cNvPr id="6" name="TextBox 5"/>
           <p:cNvSpPr txBox="1"/>
           <p:nvPr/>
         </p:nvSpPr>
@@ -22472,8 +22397,8 @@
         </p:blipFill>
         <p:spPr>
           <a:xfrm>
-            <a:off x="548640" y="1188720"/>
-            <a:ext cx="5656082" cy="4572000"/>
+            <a:off x="3115490" y="1005840"/>
+            <a:ext cx="5960714" cy="4846320"/>
           </a:xfrm>
           <a:prstGeom prst="rect">
             <a:avLst/>
@@ -22483,104 +22408,6 @@
       <p:sp>
         <p:nvSpPr>
           <p:cNvPr id="4" name="TextBox 3"/>
-          <p:cNvSpPr txBox="1"/>
-          <p:nvPr/>
-        </p:nvSpPr>
-        <p:spPr>
-          <a:xfrm>
-            <a:off x="8412480" y="1188720"/>
-            <a:ext cx="3383280" cy="4754880"/>
-          </a:xfrm>
-          <a:prstGeom prst="rect">
-            <a:avLst/>
-          </a:prstGeom>
-          <a:noFill/>
-        </p:spPr>
-        <p:txBody>
-          <a:bodyPr wrap="square">
-            <a:spAutoFit/>
-          </a:bodyPr>
-          <a:lstStyle/>
-          <a:p>
-            <a:pPr>
-              <a:lnSpc>
-                <a:spcPct val="125000"/>
-              </a:lnSpc>
-            </a:pPr>
-            <a:r>
-              <a:rPr sz="1300" b="0">
-                <a:solidFill>
-                  <a:srgbClr val="6FC7CF"/>
-                </a:solidFill>
-                <a:latin typeface="Noto Sans TC"/>
-              </a:rPr>
-              <a:t>• </a:t>
-            </a:r>
-            <a:r>
-              <a:rPr sz="1300" b="0">
-                <a:solidFill>
-                  <a:srgbClr val="E8E6E1"/>
-                </a:solidFill>
-                <a:latin typeface="Noto Sans TC"/>
-              </a:rPr>
-              <a:t>classify → 依信心分路：P(誤判) ≥ 0.961 排除、缺陷 ≥ 0.996 且非 open 確認——82.2% 在這裡結束</a:t>
-            </a:r>
-          </a:p>
-          <a:p>
-            <a:pPr>
-              <a:lnSpc>
-                <a:spcPct val="125000"/>
-              </a:lnSpc>
-            </a:pPr>
-            <a:r>
-              <a:rPr sz="1300" b="0">
-                <a:solidFill>
-                  <a:srgbClr val="6FC7CF"/>
-                </a:solidFill>
-                <a:latin typeface="Noto Sans TC"/>
-              </a:rPr>
-              <a:t>• </a:t>
-            </a:r>
-            <a:r>
-              <a:rPr sz="1300" b="0">
-                <a:solidFill>
-                  <a:srgbClr val="E8E6E1"/>
-                </a:solidFill>
-                <a:latin typeface="Noto Sans TC"/>
-              </a:rPr>
-              <a:t>其餘：取得脈絡（3 個 MCP 工具，標準依類別限定）→ LLM 寫說明（僅說明，60 秒上限）→ 信心 ≥ 0.961 決定，否則交給人</a:t>
-            </a:r>
-          </a:p>
-          <a:p>
-            <a:pPr>
-              <a:lnSpc>
-                <a:spcPct val="125000"/>
-              </a:lnSpc>
-            </a:pPr>
-            <a:r>
-              <a:rPr sz="1300" b="0">
-                <a:solidFill>
-                  <a:srgbClr val="6FC7CF"/>
-                </a:solidFill>
-                <a:latin typeface="Noto Sans TC"/>
-              </a:rPr>
-              <a:t>• </a:t>
-            </a:r>
-            <a:r>
-              <a:rPr sz="1300" b="0">
-                <a:solidFill>
-                  <a:srgbClr val="E8E6E1"/>
-                </a:solidFill>
-                <a:latin typeface="Noto Sans TC"/>
-              </a:rPr>
-              <a:t>交給人 = LangGraph interrupt()，checkpoint 存 SQLite；作業員兩天後回來續跑，不重跑工具</a:t>
-            </a:r>
-          </a:p>
-        </p:txBody>
-      </p:sp>
-      <p:sp>
-        <p:nvSpPr>
-          <p:cNvPr id="5" name="TextBox 4"/>
           <p:cNvSpPr txBox="1"/>
           <p:nvPr/>
         </p:nvSpPr>
@@ -22619,7 +22446,7 @@
       </p:sp>
       <p:sp>
         <p:nvSpPr>
-          <p:cNvPr id="6" name="TextBox 5"/>
+          <p:cNvPr id="5" name="TextBox 4"/>
           <p:cNvSpPr txBox="1"/>
           <p:nvPr/>
         </p:nvSpPr>
@@ -22658,7 +22485,7 @@
       </p:sp>
       <p:sp>
         <p:nvSpPr>
-          <p:cNvPr id="7" name="TextBox 6"/>
+          <p:cNvPr id="6" name="TextBox 5"/>
           <p:cNvSpPr txBox="1"/>
           <p:nvPr/>
         </p:nvSpPr>
@@ -22776,8 +22603,8 @@
         </p:blipFill>
         <p:spPr>
           <a:xfrm>
-            <a:off x="2471226" y="1188720"/>
-            <a:ext cx="7249243" cy="3566160"/>
+            <a:off x="929487" y="1005840"/>
+            <a:ext cx="10332720" cy="4846320"/>
           </a:xfrm>
           <a:prstGeom prst="rect">
             <a:avLst/>
@@ -22787,127 +22614,6 @@
       <p:sp>
         <p:nvSpPr>
           <p:cNvPr id="4" name="TextBox 3"/>
-          <p:cNvSpPr txBox="1"/>
-          <p:nvPr/>
-        </p:nvSpPr>
-        <p:spPr>
-          <a:xfrm>
-            <a:off x="548640" y="4892040"/>
-            <a:ext cx="5440680" cy="914400"/>
-          </a:xfrm>
-          <a:prstGeom prst="rect">
-            <a:avLst/>
-          </a:prstGeom>
-          <a:noFill/>
-        </p:spPr>
-        <p:txBody>
-          <a:bodyPr wrap="square">
-            <a:spAutoFit/>
-          </a:bodyPr>
-          <a:lstStyle/>
-          <a:p>
-            <a:pPr>
-              <a:lnSpc>
-                <a:spcPct val="125000"/>
-              </a:lnSpc>
-            </a:pPr>
-            <a:r>
-              <a:rPr sz="1200" b="0">
-                <a:solidFill>
-                  <a:srgbClr val="6FC7CF"/>
-                </a:solidFill>
-                <a:latin typeface="Noto Sans TC"/>
-              </a:rPr>
-              <a:t>• </a:t>
-            </a:r>
-            <a:r>
-              <a:rPr sz="1200" b="0">
-                <a:solidFill>
-                  <a:srgbClr val="E8E6E1"/>
-                </a:solidFill>
-                <a:latin typeface="Noto Sans TC"/>
-              </a:rPr>
-              <a:t>規劃（LLM #1）→ 驗證：工具名、參數名、參數值都對照真實簽名與值域，L4 這種不存在的產線直接拒絕、不重試</a:t>
-            </a:r>
-          </a:p>
-          <a:p>
-            <a:pPr>
-              <a:lnSpc>
-                <a:spcPct val="125000"/>
-              </a:lnSpc>
-            </a:pPr>
-            <a:r>
-              <a:rPr sz="1200" b="0">
-                <a:solidFill>
-                  <a:srgbClr val="6FC7CF"/>
-                </a:solidFill>
-                <a:latin typeface="Noto Sans TC"/>
-              </a:rPr>
-              <a:t>• </a:t>
-            </a:r>
-            <a:r>
-              <a:rPr sz="1200" b="0">
-                <a:solidFill>
-                  <a:srgbClr val="E8E6E1"/>
-                </a:solidFill>
-                <a:latin typeface="Noto Sans TC"/>
-              </a:rPr>
-              <a:t>Send 平行展開——因為那幾個事實彼此獨立，不是為了快；工具幾毫秒，模型呼叫二十幾秒</a:t>
-            </a:r>
-          </a:p>
-        </p:txBody>
-      </p:sp>
-      <p:sp>
-        <p:nvSpPr>
-          <p:cNvPr id="5" name="TextBox 4"/>
-          <p:cNvSpPr txBox="1"/>
-          <p:nvPr/>
-        </p:nvSpPr>
-        <p:spPr>
-          <a:xfrm>
-            <a:off x="6172200" y="4892040"/>
-            <a:ext cx="5440680" cy="914400"/>
-          </a:xfrm>
-          <a:prstGeom prst="rect">
-            <a:avLst/>
-          </a:prstGeom>
-          <a:noFill/>
-        </p:spPr>
-        <p:txBody>
-          <a:bodyPr wrap="square">
-            <a:spAutoFit/>
-          </a:bodyPr>
-          <a:lstStyle/>
-          <a:p>
-            <a:pPr>
-              <a:lnSpc>
-                <a:spcPct val="125000"/>
-              </a:lnSpc>
-            </a:pPr>
-            <a:r>
-              <a:rPr sz="1200" b="0">
-                <a:solidFill>
-                  <a:srgbClr val="6FC7CF"/>
-                </a:solidFill>
-                <a:latin typeface="Noto Sans TC"/>
-              </a:rPr>
-              <a:t>• </a:t>
-            </a:r>
-            <a:r>
-              <a:rPr sz="1200" b="0">
-                <a:solidFill>
-                  <a:srgbClr val="E8E6E1"/>
-                </a:solidFill>
-                <a:latin typeface="Noto Sans TC"/>
-              </a:rPr>
-              <a:t>收集 → 圖從結果的形狀推（模型不能選圓餅圖）→ 撰寫（LLM #2）→ 存 analysis_runs，圖從存的資料重畫、不重跑計畫</a:t>
-            </a:r>
-          </a:p>
-        </p:txBody>
-      </p:sp>
-      <p:sp>
-        <p:nvSpPr>
-          <p:cNvPr id="6" name="TextBox 5"/>
           <p:cNvSpPr txBox="1"/>
           <p:nvPr/>
         </p:nvSpPr>
@@ -22946,7 +22652,7 @@
       </p:sp>
       <p:sp>
         <p:nvSpPr>
-          <p:cNvPr id="7" name="TextBox 6"/>
+          <p:cNvPr id="5" name="TextBox 4"/>
           <p:cNvSpPr txBox="1"/>
           <p:nvPr/>
         </p:nvSpPr>
@@ -22985,7 +22691,7 @@
       </p:sp>
       <p:sp>
         <p:nvSpPr>
-          <p:cNvPr id="8" name="TextBox 7"/>
+          <p:cNvPr id="6" name="TextBox 5"/>
           <p:cNvSpPr txBox="1"/>
           <p:nvPr/>
         </p:nvSpPr>

--- a/docs/deck/aoi-agent-journey.zh-TW.pptx
+++ b/docs/deck/aoi-agent-journey.zh-TW.pptx
@@ -9083,7 +9083,51 @@
       </p:sp>
       <p:sp>
         <p:nvSpPr>
-          <p:cNvPr id="19" name="TextBox 18"/>
+          <p:cNvPr id="19" name="Rectangle 18"/>
+          <p:cNvSpPr/>
+          <p:nvPr/>
+        </p:nvSpPr>
+        <p:spPr>
+          <a:xfrm>
+            <a:off x="320040" y="4517134"/>
+            <a:ext cx="11521440" cy="676655"/>
+          </a:xfrm>
+          <a:prstGeom prst="rect">
+            <a:avLst/>
+          </a:prstGeom>
+          <a:solidFill>
+            <a:srgbClr val="2B2416"/>
+          </a:solidFill>
+          <a:ln>
+            <a:noFill/>
+          </a:ln>
+          <a:effectLst/>
+        </p:spPr>
+        <p:style>
+          <a:lnRef idx="1">
+            <a:schemeClr val="accent1"/>
+          </a:lnRef>
+          <a:fillRef idx="3">
+            <a:schemeClr val="accent1"/>
+          </a:fillRef>
+          <a:effectRef idx="2">
+            <a:schemeClr val="accent1"/>
+          </a:effectRef>
+          <a:fontRef idx="minor">
+            <a:schemeClr val="lt1"/>
+          </a:fontRef>
+        </p:style>
+        <p:txBody>
+          <a:bodyPr rtlCol="0" anchor="ctr"/>
+          <a:lstStyle/>
+          <a:p>
+            <a:pPr algn="ctr"/>
+          </a:p>
+        </p:txBody>
+      </p:sp>
+      <p:sp>
+        <p:nvSpPr>
+          <p:cNvPr id="20" name="TextBox 19"/>
           <p:cNvSpPr txBox="1"/>
           <p:nvPr/>
         </p:nvSpPr>
@@ -9122,7 +9166,7 @@
       </p:sp>
       <p:sp>
         <p:nvSpPr>
-          <p:cNvPr id="20" name="TextBox 19"/>
+          <p:cNvPr id="21" name="TextBox 20"/>
           <p:cNvSpPr txBox="1"/>
           <p:nvPr/>
         </p:nvSpPr>
@@ -9197,7 +9241,51 @@
       </p:sp>
       <p:sp>
         <p:nvSpPr>
-          <p:cNvPr id="21" name="TextBox 20"/>
+          <p:cNvPr id="22" name="Rectangle 21"/>
+          <p:cNvSpPr/>
+          <p:nvPr/>
+        </p:nvSpPr>
+        <p:spPr>
+          <a:xfrm>
+            <a:off x="320040" y="5248653"/>
+            <a:ext cx="11521440" cy="676655"/>
+          </a:xfrm>
+          <a:prstGeom prst="rect">
+            <a:avLst/>
+          </a:prstGeom>
+          <a:solidFill>
+            <a:srgbClr val="16292B"/>
+          </a:solidFill>
+          <a:ln>
+            <a:noFill/>
+          </a:ln>
+          <a:effectLst/>
+        </p:spPr>
+        <p:style>
+          <a:lnRef idx="1">
+            <a:schemeClr val="accent1"/>
+          </a:lnRef>
+          <a:fillRef idx="3">
+            <a:schemeClr val="accent1"/>
+          </a:fillRef>
+          <a:effectRef idx="2">
+            <a:schemeClr val="accent1"/>
+          </a:effectRef>
+          <a:fontRef idx="minor">
+            <a:schemeClr val="lt1"/>
+          </a:fontRef>
+        </p:style>
+        <p:txBody>
+          <a:bodyPr rtlCol="0" anchor="ctr"/>
+          <a:lstStyle/>
+          <a:p>
+            <a:pPr algn="ctr"/>
+          </a:p>
+        </p:txBody>
+      </p:sp>
+      <p:sp>
+        <p:nvSpPr>
+          <p:cNvPr id="23" name="TextBox 22"/>
           <p:cNvSpPr txBox="1"/>
           <p:nvPr/>
         </p:nvSpPr>
@@ -9236,7 +9324,7 @@
       </p:sp>
       <p:sp>
         <p:nvSpPr>
-          <p:cNvPr id="22" name="TextBox 21"/>
+          <p:cNvPr id="24" name="TextBox 23"/>
           <p:cNvSpPr txBox="1"/>
           <p:nvPr/>
         </p:nvSpPr>
@@ -9275,7 +9363,7 @@
       </p:sp>
       <p:sp>
         <p:nvSpPr>
-          <p:cNvPr id="23" name="TextBox 22"/>
+          <p:cNvPr id="25" name="TextBox 24"/>
           <p:cNvSpPr txBox="1"/>
           <p:nvPr/>
         </p:nvSpPr>
@@ -9314,7 +9402,7 @@
       </p:sp>
       <p:sp>
         <p:nvSpPr>
-          <p:cNvPr id="24" name="TextBox 23"/>
+          <p:cNvPr id="26" name="TextBox 25"/>
           <p:cNvSpPr txBox="1"/>
           <p:nvPr/>
         </p:nvSpPr>
@@ -11005,7 +11093,51 @@
       </p:sp>
       <p:sp>
         <p:nvSpPr>
-          <p:cNvPr id="19" name="TextBox 18"/>
+          <p:cNvPr id="19" name="Rectangle 18"/>
+          <p:cNvSpPr/>
+          <p:nvPr/>
+        </p:nvSpPr>
+        <p:spPr>
+          <a:xfrm>
+            <a:off x="320040" y="4901184"/>
+            <a:ext cx="11521440" cy="640080"/>
+          </a:xfrm>
+          <a:prstGeom prst="rect">
+            <a:avLst/>
+          </a:prstGeom>
+          <a:solidFill>
+            <a:srgbClr val="2B2416"/>
+          </a:solidFill>
+          <a:ln>
+            <a:noFill/>
+          </a:ln>
+          <a:effectLst/>
+        </p:spPr>
+        <p:style>
+          <a:lnRef idx="1">
+            <a:schemeClr val="accent1"/>
+          </a:lnRef>
+          <a:fillRef idx="3">
+            <a:schemeClr val="accent1"/>
+          </a:fillRef>
+          <a:effectRef idx="2">
+            <a:schemeClr val="accent1"/>
+          </a:effectRef>
+          <a:fontRef idx="minor">
+            <a:schemeClr val="lt1"/>
+          </a:fontRef>
+        </p:style>
+        <p:txBody>
+          <a:bodyPr rtlCol="0" anchor="ctr"/>
+          <a:lstStyle/>
+          <a:p>
+            <a:pPr algn="ctr"/>
+          </a:p>
+        </p:txBody>
+      </p:sp>
+      <p:sp>
+        <p:nvSpPr>
+          <p:cNvPr id="20" name="TextBox 19"/>
           <p:cNvSpPr txBox="1"/>
           <p:nvPr/>
         </p:nvSpPr>
@@ -11044,7 +11176,7 @@
       </p:sp>
       <p:sp>
         <p:nvSpPr>
-          <p:cNvPr id="20" name="TextBox 19"/>
+          <p:cNvPr id="21" name="TextBox 20"/>
           <p:cNvSpPr txBox="1"/>
           <p:nvPr/>
         </p:nvSpPr>
@@ -11110,7 +11242,51 @@
       </p:sp>
       <p:sp>
         <p:nvSpPr>
-          <p:cNvPr id="21" name="TextBox 20"/>
+          <p:cNvPr id="22" name="Rectangle 21"/>
+          <p:cNvSpPr/>
+          <p:nvPr/>
+        </p:nvSpPr>
+        <p:spPr>
+          <a:xfrm>
+            <a:off x="320040" y="5596128"/>
+            <a:ext cx="11521440" cy="640080"/>
+          </a:xfrm>
+          <a:prstGeom prst="rect">
+            <a:avLst/>
+          </a:prstGeom>
+          <a:solidFill>
+            <a:srgbClr val="16292B"/>
+          </a:solidFill>
+          <a:ln>
+            <a:noFill/>
+          </a:ln>
+          <a:effectLst/>
+        </p:spPr>
+        <p:style>
+          <a:lnRef idx="1">
+            <a:schemeClr val="accent1"/>
+          </a:lnRef>
+          <a:fillRef idx="3">
+            <a:schemeClr val="accent1"/>
+          </a:fillRef>
+          <a:effectRef idx="2">
+            <a:schemeClr val="accent1"/>
+          </a:effectRef>
+          <a:fontRef idx="minor">
+            <a:schemeClr val="lt1"/>
+          </a:fontRef>
+        </p:style>
+        <p:txBody>
+          <a:bodyPr rtlCol="0" anchor="ctr"/>
+          <a:lstStyle/>
+          <a:p>
+            <a:pPr algn="ctr"/>
+          </a:p>
+        </p:txBody>
+      </p:sp>
+      <p:sp>
+        <p:nvSpPr>
+          <p:cNvPr id="23" name="TextBox 22"/>
           <p:cNvSpPr txBox="1"/>
           <p:nvPr/>
         </p:nvSpPr>
@@ -11149,7 +11325,7 @@
       </p:sp>
       <p:sp>
         <p:nvSpPr>
-          <p:cNvPr id="22" name="TextBox 21"/>
+          <p:cNvPr id="24" name="TextBox 23"/>
           <p:cNvSpPr txBox="1"/>
           <p:nvPr/>
         </p:nvSpPr>
@@ -11224,7 +11400,7 @@
       </p:sp>
       <p:sp>
         <p:nvSpPr>
-          <p:cNvPr id="23" name="TextBox 22"/>
+          <p:cNvPr id="25" name="TextBox 24"/>
           <p:cNvSpPr txBox="1"/>
           <p:nvPr/>
         </p:nvSpPr>
@@ -11263,7 +11439,7 @@
       </p:sp>
       <p:sp>
         <p:nvSpPr>
-          <p:cNvPr id="24" name="TextBox 23"/>
+          <p:cNvPr id="26" name="TextBox 25"/>
           <p:cNvSpPr txBox="1"/>
           <p:nvPr/>
         </p:nvSpPr>
@@ -12117,7 +12293,51 @@
       </p:sp>
       <p:sp>
         <p:nvSpPr>
-          <p:cNvPr id="18" name="TextBox 17"/>
+          <p:cNvPr id="18" name="Rectangle 17"/>
+          <p:cNvSpPr/>
+          <p:nvPr/>
+        </p:nvSpPr>
+        <p:spPr>
+          <a:xfrm>
+            <a:off x="320040" y="4727448"/>
+            <a:ext cx="11521440" cy="713232"/>
+          </a:xfrm>
+          <a:prstGeom prst="rect">
+            <a:avLst/>
+          </a:prstGeom>
+          <a:solidFill>
+            <a:srgbClr val="2B2416"/>
+          </a:solidFill>
+          <a:ln>
+            <a:noFill/>
+          </a:ln>
+          <a:effectLst/>
+        </p:spPr>
+        <p:style>
+          <a:lnRef idx="1">
+            <a:schemeClr val="accent1"/>
+          </a:lnRef>
+          <a:fillRef idx="3">
+            <a:schemeClr val="accent1"/>
+          </a:fillRef>
+          <a:effectRef idx="2">
+            <a:schemeClr val="accent1"/>
+          </a:effectRef>
+          <a:fontRef idx="minor">
+            <a:schemeClr val="lt1"/>
+          </a:fontRef>
+        </p:style>
+        <p:txBody>
+          <a:bodyPr rtlCol="0" anchor="ctr"/>
+          <a:lstStyle/>
+          <a:p>
+            <a:pPr algn="ctr"/>
+          </a:p>
+        </p:txBody>
+      </p:sp>
+      <p:sp>
+        <p:nvSpPr>
+          <p:cNvPr id="19" name="TextBox 18"/>
           <p:cNvSpPr txBox="1"/>
           <p:nvPr/>
         </p:nvSpPr>
@@ -12156,7 +12376,7 @@
       </p:sp>
       <p:sp>
         <p:nvSpPr>
-          <p:cNvPr id="19" name="TextBox 18"/>
+          <p:cNvPr id="20" name="TextBox 19"/>
           <p:cNvSpPr txBox="1"/>
           <p:nvPr/>
         </p:nvSpPr>
@@ -12195,7 +12415,51 @@
       </p:sp>
       <p:sp>
         <p:nvSpPr>
-          <p:cNvPr id="20" name="TextBox 19"/>
+          <p:cNvPr id="21" name="Rectangle 20"/>
+          <p:cNvSpPr/>
+          <p:nvPr/>
+        </p:nvSpPr>
+        <p:spPr>
+          <a:xfrm>
+            <a:off x="320040" y="5495544"/>
+            <a:ext cx="11521440" cy="713232"/>
+          </a:xfrm>
+          <a:prstGeom prst="rect">
+            <a:avLst/>
+          </a:prstGeom>
+          <a:solidFill>
+            <a:srgbClr val="16292B"/>
+          </a:solidFill>
+          <a:ln>
+            <a:noFill/>
+          </a:ln>
+          <a:effectLst/>
+        </p:spPr>
+        <p:style>
+          <a:lnRef idx="1">
+            <a:schemeClr val="accent1"/>
+          </a:lnRef>
+          <a:fillRef idx="3">
+            <a:schemeClr val="accent1"/>
+          </a:fillRef>
+          <a:effectRef idx="2">
+            <a:schemeClr val="accent1"/>
+          </a:effectRef>
+          <a:fontRef idx="minor">
+            <a:schemeClr val="lt1"/>
+          </a:fontRef>
+        </p:style>
+        <p:txBody>
+          <a:bodyPr rtlCol="0" anchor="ctr"/>
+          <a:lstStyle/>
+          <a:p>
+            <a:pPr algn="ctr"/>
+          </a:p>
+        </p:txBody>
+      </p:sp>
+      <p:sp>
+        <p:nvSpPr>
+          <p:cNvPr id="22" name="TextBox 21"/>
           <p:cNvSpPr txBox="1"/>
           <p:nvPr/>
         </p:nvSpPr>
@@ -12234,7 +12498,7 @@
       </p:sp>
       <p:sp>
         <p:nvSpPr>
-          <p:cNvPr id="21" name="TextBox 20"/>
+          <p:cNvPr id="23" name="TextBox 22"/>
           <p:cNvSpPr txBox="1"/>
           <p:nvPr/>
         </p:nvSpPr>
@@ -12291,7 +12555,7 @@
       </p:sp>
       <p:sp>
         <p:nvSpPr>
-          <p:cNvPr id="22" name="TextBox 21"/>
+          <p:cNvPr id="24" name="TextBox 23"/>
           <p:cNvSpPr txBox="1"/>
           <p:nvPr/>
         </p:nvSpPr>
@@ -12330,7 +12594,7 @@
       </p:sp>
       <p:sp>
         <p:nvSpPr>
-          <p:cNvPr id="23" name="TextBox 22"/>
+          <p:cNvPr id="25" name="TextBox 24"/>
           <p:cNvSpPr txBox="1"/>
           <p:nvPr/>
         </p:nvSpPr>
@@ -13184,7 +13448,51 @@
       </p:sp>
       <p:sp>
         <p:nvSpPr>
-          <p:cNvPr id="18" name="TextBox 17"/>
+          <p:cNvPr id="18" name="Rectangle 17"/>
+          <p:cNvSpPr/>
+          <p:nvPr/>
+        </p:nvSpPr>
+        <p:spPr>
+          <a:xfrm>
+            <a:off x="320040" y="4599429"/>
+            <a:ext cx="11521440" cy="676655"/>
+          </a:xfrm>
+          <a:prstGeom prst="rect">
+            <a:avLst/>
+          </a:prstGeom>
+          <a:solidFill>
+            <a:srgbClr val="2B2416"/>
+          </a:solidFill>
+          <a:ln>
+            <a:noFill/>
+          </a:ln>
+          <a:effectLst/>
+        </p:spPr>
+        <p:style>
+          <a:lnRef idx="1">
+            <a:schemeClr val="accent1"/>
+          </a:lnRef>
+          <a:fillRef idx="3">
+            <a:schemeClr val="accent1"/>
+          </a:fillRef>
+          <a:effectRef idx="2">
+            <a:schemeClr val="accent1"/>
+          </a:effectRef>
+          <a:fontRef idx="minor">
+            <a:schemeClr val="lt1"/>
+          </a:fontRef>
+        </p:style>
+        <p:txBody>
+          <a:bodyPr rtlCol="0" anchor="ctr"/>
+          <a:lstStyle/>
+          <a:p>
+            <a:pPr algn="ctr"/>
+          </a:p>
+        </p:txBody>
+      </p:sp>
+      <p:sp>
+        <p:nvSpPr>
+          <p:cNvPr id="19" name="TextBox 18"/>
           <p:cNvSpPr txBox="1"/>
           <p:nvPr/>
         </p:nvSpPr>
@@ -13223,7 +13531,7 @@
       </p:sp>
       <p:sp>
         <p:nvSpPr>
-          <p:cNvPr id="19" name="TextBox 18"/>
+          <p:cNvPr id="20" name="TextBox 19"/>
           <p:cNvSpPr txBox="1"/>
           <p:nvPr/>
         </p:nvSpPr>
@@ -13280,7 +13588,51 @@
       </p:sp>
       <p:sp>
         <p:nvSpPr>
-          <p:cNvPr id="20" name="TextBox 19"/>
+          <p:cNvPr id="21" name="Rectangle 20"/>
+          <p:cNvSpPr/>
+          <p:nvPr/>
+        </p:nvSpPr>
+        <p:spPr>
+          <a:xfrm>
+            <a:off x="320040" y="5330948"/>
+            <a:ext cx="11521440" cy="941831"/>
+          </a:xfrm>
+          <a:prstGeom prst="rect">
+            <a:avLst/>
+          </a:prstGeom>
+          <a:solidFill>
+            <a:srgbClr val="16292B"/>
+          </a:solidFill>
+          <a:ln>
+            <a:noFill/>
+          </a:ln>
+          <a:effectLst/>
+        </p:spPr>
+        <p:style>
+          <a:lnRef idx="1">
+            <a:schemeClr val="accent1"/>
+          </a:lnRef>
+          <a:fillRef idx="3">
+            <a:schemeClr val="accent1"/>
+          </a:fillRef>
+          <a:effectRef idx="2">
+            <a:schemeClr val="accent1"/>
+          </a:effectRef>
+          <a:fontRef idx="minor">
+            <a:schemeClr val="lt1"/>
+          </a:fontRef>
+        </p:style>
+        <p:txBody>
+          <a:bodyPr rtlCol="0" anchor="ctr"/>
+          <a:lstStyle/>
+          <a:p>
+            <a:pPr algn="ctr"/>
+          </a:p>
+        </p:txBody>
+      </p:sp>
+      <p:sp>
+        <p:nvSpPr>
+          <p:cNvPr id="22" name="TextBox 21"/>
           <p:cNvSpPr txBox="1"/>
           <p:nvPr/>
         </p:nvSpPr>
@@ -13319,7 +13671,7 @@
       </p:sp>
       <p:sp>
         <p:nvSpPr>
-          <p:cNvPr id="21" name="TextBox 20"/>
+          <p:cNvPr id="23" name="TextBox 22"/>
           <p:cNvSpPr txBox="1"/>
           <p:nvPr/>
         </p:nvSpPr>
@@ -13358,7 +13710,7 @@
       </p:sp>
       <p:sp>
         <p:nvSpPr>
-          <p:cNvPr id="22" name="TextBox 21"/>
+          <p:cNvPr id="24" name="TextBox 23"/>
           <p:cNvSpPr txBox="1"/>
           <p:nvPr/>
         </p:nvSpPr>
@@ -13397,7 +13749,7 @@
       </p:sp>
       <p:sp>
         <p:nvSpPr>
-          <p:cNvPr id="23" name="TextBox 22"/>
+          <p:cNvPr id="25" name="TextBox 24"/>
           <p:cNvSpPr txBox="1"/>
           <p:nvPr/>
         </p:nvSpPr>
@@ -14209,7 +14561,51 @@
       </p:sp>
       <p:sp>
         <p:nvSpPr>
-          <p:cNvPr id="19" name="TextBox 18"/>
+          <p:cNvPr id="19" name="Rectangle 18"/>
+          <p:cNvSpPr/>
+          <p:nvPr/>
+        </p:nvSpPr>
+        <p:spPr>
+          <a:xfrm>
+            <a:off x="320040" y="4407408"/>
+            <a:ext cx="11521440" cy="393192"/>
+          </a:xfrm>
+          <a:prstGeom prst="rect">
+            <a:avLst/>
+          </a:prstGeom>
+          <a:solidFill>
+            <a:srgbClr val="2B2416"/>
+          </a:solidFill>
+          <a:ln>
+            <a:noFill/>
+          </a:ln>
+          <a:effectLst/>
+        </p:spPr>
+        <p:style>
+          <a:lnRef idx="1">
+            <a:schemeClr val="accent1"/>
+          </a:lnRef>
+          <a:fillRef idx="3">
+            <a:schemeClr val="accent1"/>
+          </a:fillRef>
+          <a:effectRef idx="2">
+            <a:schemeClr val="accent1"/>
+          </a:effectRef>
+          <a:fontRef idx="minor">
+            <a:schemeClr val="lt1"/>
+          </a:fontRef>
+        </p:style>
+        <p:txBody>
+          <a:bodyPr rtlCol="0" anchor="ctr"/>
+          <a:lstStyle/>
+          <a:p>
+            <a:pPr algn="ctr"/>
+          </a:p>
+        </p:txBody>
+      </p:sp>
+      <p:sp>
+        <p:nvSpPr>
+          <p:cNvPr id="20" name="TextBox 19"/>
           <p:cNvSpPr txBox="1"/>
           <p:nvPr/>
         </p:nvSpPr>
@@ -14248,7 +14644,7 @@
       </p:sp>
       <p:sp>
         <p:nvSpPr>
-          <p:cNvPr id="20" name="TextBox 19"/>
+          <p:cNvPr id="21" name="TextBox 20"/>
           <p:cNvSpPr txBox="1"/>
           <p:nvPr/>
         </p:nvSpPr>
@@ -14287,7 +14683,51 @@
       </p:sp>
       <p:sp>
         <p:nvSpPr>
-          <p:cNvPr id="21" name="TextBox 20"/>
+          <p:cNvPr id="22" name="Rectangle 21"/>
+          <p:cNvSpPr/>
+          <p:nvPr/>
+        </p:nvSpPr>
+        <p:spPr>
+          <a:xfrm>
+            <a:off x="320040" y="4855464"/>
+            <a:ext cx="11521440" cy="1133856"/>
+          </a:xfrm>
+          <a:prstGeom prst="rect">
+            <a:avLst/>
+          </a:prstGeom>
+          <a:solidFill>
+            <a:srgbClr val="16292B"/>
+          </a:solidFill>
+          <a:ln>
+            <a:noFill/>
+          </a:ln>
+          <a:effectLst/>
+        </p:spPr>
+        <p:style>
+          <a:lnRef idx="1">
+            <a:schemeClr val="accent1"/>
+          </a:lnRef>
+          <a:fillRef idx="3">
+            <a:schemeClr val="accent1"/>
+          </a:fillRef>
+          <a:effectRef idx="2">
+            <a:schemeClr val="accent1"/>
+          </a:effectRef>
+          <a:fontRef idx="minor">
+            <a:schemeClr val="lt1"/>
+          </a:fontRef>
+        </p:style>
+        <p:txBody>
+          <a:bodyPr rtlCol="0" anchor="ctr"/>
+          <a:lstStyle/>
+          <a:p>
+            <a:pPr algn="ctr"/>
+          </a:p>
+        </p:txBody>
+      </p:sp>
+      <p:sp>
+        <p:nvSpPr>
+          <p:cNvPr id="23" name="TextBox 22"/>
           <p:cNvSpPr txBox="1"/>
           <p:nvPr/>
         </p:nvSpPr>
@@ -14326,7 +14766,7 @@
       </p:sp>
       <p:sp>
         <p:nvSpPr>
-          <p:cNvPr id="22" name="TextBox 21"/>
+          <p:cNvPr id="24" name="TextBox 23"/>
           <p:cNvSpPr txBox="1"/>
           <p:nvPr/>
         </p:nvSpPr>
@@ -14419,7 +14859,7 @@
       </p:sp>
       <p:sp>
         <p:nvSpPr>
-          <p:cNvPr id="23" name="TextBox 22"/>
+          <p:cNvPr id="25" name="TextBox 24"/>
           <p:cNvSpPr txBox="1"/>
           <p:nvPr/>
         </p:nvSpPr>
@@ -14458,7 +14898,7 @@
       </p:sp>
       <p:sp>
         <p:nvSpPr>
-          <p:cNvPr id="24" name="TextBox 23"/>
+          <p:cNvPr id="26" name="TextBox 25"/>
           <p:cNvSpPr txBox="1"/>
           <p:nvPr/>
         </p:nvSpPr>
@@ -15513,7 +15953,51 @@
       </p:sp>
       <p:sp>
         <p:nvSpPr>
-          <p:cNvPr id="19" name="TextBox 18"/>
+          <p:cNvPr id="19" name="Rectangle 18"/>
+          <p:cNvSpPr/>
+          <p:nvPr/>
+        </p:nvSpPr>
+        <p:spPr>
+          <a:xfrm>
+            <a:off x="320040" y="4901184"/>
+            <a:ext cx="11521440" cy="640080"/>
+          </a:xfrm>
+          <a:prstGeom prst="rect">
+            <a:avLst/>
+          </a:prstGeom>
+          <a:solidFill>
+            <a:srgbClr val="2B2416"/>
+          </a:solidFill>
+          <a:ln>
+            <a:noFill/>
+          </a:ln>
+          <a:effectLst/>
+        </p:spPr>
+        <p:style>
+          <a:lnRef idx="1">
+            <a:schemeClr val="accent1"/>
+          </a:lnRef>
+          <a:fillRef idx="3">
+            <a:schemeClr val="accent1"/>
+          </a:fillRef>
+          <a:effectRef idx="2">
+            <a:schemeClr val="accent1"/>
+          </a:effectRef>
+          <a:fontRef idx="minor">
+            <a:schemeClr val="lt1"/>
+          </a:fontRef>
+        </p:style>
+        <p:txBody>
+          <a:bodyPr rtlCol="0" anchor="ctr"/>
+          <a:lstStyle/>
+          <a:p>
+            <a:pPr algn="ctr"/>
+          </a:p>
+        </p:txBody>
+      </p:sp>
+      <p:sp>
+        <p:nvSpPr>
+          <p:cNvPr id="20" name="TextBox 19"/>
           <p:cNvSpPr txBox="1"/>
           <p:nvPr/>
         </p:nvSpPr>
@@ -15552,7 +16036,7 @@
       </p:sp>
       <p:sp>
         <p:nvSpPr>
-          <p:cNvPr id="20" name="TextBox 19"/>
+          <p:cNvPr id="21" name="TextBox 20"/>
           <p:cNvSpPr txBox="1"/>
           <p:nvPr/>
         </p:nvSpPr>
@@ -15627,7 +16111,51 @@
       </p:sp>
       <p:sp>
         <p:nvSpPr>
-          <p:cNvPr id="21" name="TextBox 20"/>
+          <p:cNvPr id="22" name="Rectangle 21"/>
+          <p:cNvSpPr/>
+          <p:nvPr/>
+        </p:nvSpPr>
+        <p:spPr>
+          <a:xfrm>
+            <a:off x="320040" y="5596128"/>
+            <a:ext cx="11521440" cy="640080"/>
+          </a:xfrm>
+          <a:prstGeom prst="rect">
+            <a:avLst/>
+          </a:prstGeom>
+          <a:solidFill>
+            <a:srgbClr val="16292B"/>
+          </a:solidFill>
+          <a:ln>
+            <a:noFill/>
+          </a:ln>
+          <a:effectLst/>
+        </p:spPr>
+        <p:style>
+          <a:lnRef idx="1">
+            <a:schemeClr val="accent1"/>
+          </a:lnRef>
+          <a:fillRef idx="3">
+            <a:schemeClr val="accent1"/>
+          </a:fillRef>
+          <a:effectRef idx="2">
+            <a:schemeClr val="accent1"/>
+          </a:effectRef>
+          <a:fontRef idx="minor">
+            <a:schemeClr val="lt1"/>
+          </a:fontRef>
+        </p:style>
+        <p:txBody>
+          <a:bodyPr rtlCol="0" anchor="ctr"/>
+          <a:lstStyle/>
+          <a:p>
+            <a:pPr algn="ctr"/>
+          </a:p>
+        </p:txBody>
+      </p:sp>
+      <p:sp>
+        <p:nvSpPr>
+          <p:cNvPr id="23" name="TextBox 22"/>
           <p:cNvSpPr txBox="1"/>
           <p:nvPr/>
         </p:nvSpPr>
@@ -15666,7 +16194,7 @@
       </p:sp>
       <p:sp>
         <p:nvSpPr>
-          <p:cNvPr id="22" name="TextBox 21"/>
+          <p:cNvPr id="24" name="TextBox 23"/>
           <p:cNvSpPr txBox="1"/>
           <p:nvPr/>
         </p:nvSpPr>
@@ -15723,7 +16251,7 @@
       </p:sp>
       <p:sp>
         <p:nvSpPr>
-          <p:cNvPr id="23" name="TextBox 22"/>
+          <p:cNvPr id="25" name="TextBox 24"/>
           <p:cNvSpPr txBox="1"/>
           <p:nvPr/>
         </p:nvSpPr>
@@ -15762,7 +16290,7 @@
       </p:sp>
       <p:sp>
         <p:nvSpPr>
-          <p:cNvPr id="24" name="TextBox 23"/>
+          <p:cNvPr id="26" name="TextBox 25"/>
           <p:cNvSpPr txBox="1"/>
           <p:nvPr/>
         </p:nvSpPr>
@@ -16673,7 +17201,51 @@
       </p:sp>
       <p:sp>
         <p:nvSpPr>
-          <p:cNvPr id="19" name="TextBox 18"/>
+          <p:cNvPr id="19" name="Rectangle 18"/>
+          <p:cNvSpPr/>
+          <p:nvPr/>
+        </p:nvSpPr>
+        <p:spPr>
+          <a:xfrm>
+            <a:off x="320040" y="4407408"/>
+            <a:ext cx="11521440" cy="393192"/>
+          </a:xfrm>
+          <a:prstGeom prst="rect">
+            <a:avLst/>
+          </a:prstGeom>
+          <a:solidFill>
+            <a:srgbClr val="2B2416"/>
+          </a:solidFill>
+          <a:ln>
+            <a:noFill/>
+          </a:ln>
+          <a:effectLst/>
+        </p:spPr>
+        <p:style>
+          <a:lnRef idx="1">
+            <a:schemeClr val="accent1"/>
+          </a:lnRef>
+          <a:fillRef idx="3">
+            <a:schemeClr val="accent1"/>
+          </a:fillRef>
+          <a:effectRef idx="2">
+            <a:schemeClr val="accent1"/>
+          </a:effectRef>
+          <a:fontRef idx="minor">
+            <a:schemeClr val="lt1"/>
+          </a:fontRef>
+        </p:style>
+        <p:txBody>
+          <a:bodyPr rtlCol="0" anchor="ctr"/>
+          <a:lstStyle/>
+          <a:p>
+            <a:pPr algn="ctr"/>
+          </a:p>
+        </p:txBody>
+      </p:sp>
+      <p:sp>
+        <p:nvSpPr>
+          <p:cNvPr id="20" name="TextBox 19"/>
           <p:cNvSpPr txBox="1"/>
           <p:nvPr/>
         </p:nvSpPr>
@@ -16712,7 +17284,7 @@
       </p:sp>
       <p:sp>
         <p:nvSpPr>
-          <p:cNvPr id="20" name="TextBox 19"/>
+          <p:cNvPr id="21" name="TextBox 20"/>
           <p:cNvSpPr txBox="1"/>
           <p:nvPr/>
         </p:nvSpPr>
@@ -16751,7 +17323,51 @@
       </p:sp>
       <p:sp>
         <p:nvSpPr>
-          <p:cNvPr id="21" name="TextBox 20"/>
+          <p:cNvPr id="22" name="Rectangle 21"/>
+          <p:cNvSpPr/>
+          <p:nvPr/>
+        </p:nvSpPr>
+        <p:spPr>
+          <a:xfrm>
+            <a:off x="320040" y="4855464"/>
+            <a:ext cx="11521440" cy="886968"/>
+          </a:xfrm>
+          <a:prstGeom prst="rect">
+            <a:avLst/>
+          </a:prstGeom>
+          <a:solidFill>
+            <a:srgbClr val="16292B"/>
+          </a:solidFill>
+          <a:ln>
+            <a:noFill/>
+          </a:ln>
+          <a:effectLst/>
+        </p:spPr>
+        <p:style>
+          <a:lnRef idx="1">
+            <a:schemeClr val="accent1"/>
+          </a:lnRef>
+          <a:fillRef idx="3">
+            <a:schemeClr val="accent1"/>
+          </a:fillRef>
+          <a:effectRef idx="2">
+            <a:schemeClr val="accent1"/>
+          </a:effectRef>
+          <a:fontRef idx="minor">
+            <a:schemeClr val="lt1"/>
+          </a:fontRef>
+        </p:style>
+        <p:txBody>
+          <a:bodyPr rtlCol="0" anchor="ctr"/>
+          <a:lstStyle/>
+          <a:p>
+            <a:pPr algn="ctr"/>
+          </a:p>
+        </p:txBody>
+      </p:sp>
+      <p:sp>
+        <p:nvSpPr>
+          <p:cNvPr id="23" name="TextBox 22"/>
           <p:cNvSpPr txBox="1"/>
           <p:nvPr/>
         </p:nvSpPr>
@@ -16790,7 +17406,7 @@
       </p:sp>
       <p:sp>
         <p:nvSpPr>
-          <p:cNvPr id="22" name="TextBox 21"/>
+          <p:cNvPr id="24" name="TextBox 23"/>
           <p:cNvSpPr txBox="1"/>
           <p:nvPr/>
         </p:nvSpPr>
@@ -16829,7 +17445,7 @@
       </p:sp>
       <p:sp>
         <p:nvSpPr>
-          <p:cNvPr id="23" name="TextBox 22"/>
+          <p:cNvPr id="25" name="TextBox 24"/>
           <p:cNvSpPr txBox="1"/>
           <p:nvPr/>
         </p:nvSpPr>
@@ -16868,7 +17484,7 @@
       </p:sp>
       <p:sp>
         <p:nvSpPr>
-          <p:cNvPr id="24" name="TextBox 23"/>
+          <p:cNvPr id="26" name="TextBox 25"/>
           <p:cNvSpPr txBox="1"/>
           <p:nvPr/>
         </p:nvSpPr>
@@ -17770,7 +18386,51 @@
       </p:sp>
       <p:sp>
         <p:nvSpPr>
-          <p:cNvPr id="19" name="TextBox 18"/>
+          <p:cNvPr id="19" name="Rectangle 18"/>
+          <p:cNvSpPr/>
+          <p:nvPr/>
+        </p:nvSpPr>
+        <p:spPr>
+          <a:xfrm>
+            <a:off x="320040" y="4654296"/>
+            <a:ext cx="11521440" cy="640080"/>
+          </a:xfrm>
+          <a:prstGeom prst="rect">
+            <a:avLst/>
+          </a:prstGeom>
+          <a:solidFill>
+            <a:srgbClr val="2B2416"/>
+          </a:solidFill>
+          <a:ln>
+            <a:noFill/>
+          </a:ln>
+          <a:effectLst/>
+        </p:spPr>
+        <p:style>
+          <a:lnRef idx="1">
+            <a:schemeClr val="accent1"/>
+          </a:lnRef>
+          <a:fillRef idx="3">
+            <a:schemeClr val="accent1"/>
+          </a:fillRef>
+          <a:effectRef idx="2">
+            <a:schemeClr val="accent1"/>
+          </a:effectRef>
+          <a:fontRef idx="minor">
+            <a:schemeClr val="lt1"/>
+          </a:fontRef>
+        </p:style>
+        <p:txBody>
+          <a:bodyPr rtlCol="0" anchor="ctr"/>
+          <a:lstStyle/>
+          <a:p>
+            <a:pPr algn="ctr"/>
+          </a:p>
+        </p:txBody>
+      </p:sp>
+      <p:sp>
+        <p:nvSpPr>
+          <p:cNvPr id="20" name="TextBox 19"/>
           <p:cNvSpPr txBox="1"/>
           <p:nvPr/>
         </p:nvSpPr>
@@ -17809,7 +18469,7 @@
       </p:sp>
       <p:sp>
         <p:nvSpPr>
-          <p:cNvPr id="20" name="TextBox 19"/>
+          <p:cNvPr id="21" name="TextBox 20"/>
           <p:cNvSpPr txBox="1"/>
           <p:nvPr/>
         </p:nvSpPr>
@@ -17848,7 +18508,51 @@
       </p:sp>
       <p:sp>
         <p:nvSpPr>
-          <p:cNvPr id="21" name="TextBox 20"/>
+          <p:cNvPr id="22" name="Rectangle 21"/>
+          <p:cNvSpPr/>
+          <p:nvPr/>
+        </p:nvSpPr>
+        <p:spPr>
+          <a:xfrm>
+            <a:off x="320040" y="5349240"/>
+            <a:ext cx="11521440" cy="886968"/>
+          </a:xfrm>
+          <a:prstGeom prst="rect">
+            <a:avLst/>
+          </a:prstGeom>
+          <a:solidFill>
+            <a:srgbClr val="16292B"/>
+          </a:solidFill>
+          <a:ln>
+            <a:noFill/>
+          </a:ln>
+          <a:effectLst/>
+        </p:spPr>
+        <p:style>
+          <a:lnRef idx="1">
+            <a:schemeClr val="accent1"/>
+          </a:lnRef>
+          <a:fillRef idx="3">
+            <a:schemeClr val="accent1"/>
+          </a:fillRef>
+          <a:effectRef idx="2">
+            <a:schemeClr val="accent1"/>
+          </a:effectRef>
+          <a:fontRef idx="minor">
+            <a:schemeClr val="lt1"/>
+          </a:fontRef>
+        </p:style>
+        <p:txBody>
+          <a:bodyPr rtlCol="0" anchor="ctr"/>
+          <a:lstStyle/>
+          <a:p>
+            <a:pPr algn="ctr"/>
+          </a:p>
+        </p:txBody>
+      </p:sp>
+      <p:sp>
+        <p:nvSpPr>
+          <p:cNvPr id="23" name="TextBox 22"/>
           <p:cNvSpPr txBox="1"/>
           <p:nvPr/>
         </p:nvSpPr>
@@ -17887,7 +18591,7 @@
       </p:sp>
       <p:sp>
         <p:nvSpPr>
-          <p:cNvPr id="22" name="TextBox 21"/>
+          <p:cNvPr id="24" name="TextBox 23"/>
           <p:cNvSpPr txBox="1"/>
           <p:nvPr/>
         </p:nvSpPr>
@@ -17926,7 +18630,7 @@
       </p:sp>
       <p:sp>
         <p:nvSpPr>
-          <p:cNvPr id="23" name="TextBox 22"/>
+          <p:cNvPr id="25" name="TextBox 24"/>
           <p:cNvSpPr txBox="1"/>
           <p:nvPr/>
         </p:nvSpPr>
@@ -17965,7 +18669,7 @@
       </p:sp>
       <p:sp>
         <p:nvSpPr>
-          <p:cNvPr id="24" name="TextBox 23"/>
+          <p:cNvPr id="26" name="TextBox 25"/>
           <p:cNvSpPr txBox="1"/>
           <p:nvPr/>
         </p:nvSpPr>
@@ -18981,7 +19685,51 @@
       </p:sp>
       <p:sp>
         <p:nvSpPr>
-          <p:cNvPr id="18" name="TextBox 17"/>
+          <p:cNvPr id="18" name="Rectangle 17"/>
+          <p:cNvSpPr/>
+          <p:nvPr/>
+        </p:nvSpPr>
+        <p:spPr>
+          <a:xfrm>
+            <a:off x="320040" y="4800600"/>
+            <a:ext cx="11521440" cy="603504"/>
+          </a:xfrm>
+          <a:prstGeom prst="rect">
+            <a:avLst/>
+          </a:prstGeom>
+          <a:solidFill>
+            <a:srgbClr val="2B2416"/>
+          </a:solidFill>
+          <a:ln>
+            <a:noFill/>
+          </a:ln>
+          <a:effectLst/>
+        </p:spPr>
+        <p:style>
+          <a:lnRef idx="1">
+            <a:schemeClr val="accent1"/>
+          </a:lnRef>
+          <a:fillRef idx="3">
+            <a:schemeClr val="accent1"/>
+          </a:fillRef>
+          <a:effectRef idx="2">
+            <a:schemeClr val="accent1"/>
+          </a:effectRef>
+          <a:fontRef idx="minor">
+            <a:schemeClr val="lt1"/>
+          </a:fontRef>
+        </p:style>
+        <p:txBody>
+          <a:bodyPr rtlCol="0" anchor="ctr"/>
+          <a:lstStyle/>
+          <a:p>
+            <a:pPr algn="ctr"/>
+          </a:p>
+        </p:txBody>
+      </p:sp>
+      <p:sp>
+        <p:nvSpPr>
+          <p:cNvPr id="19" name="TextBox 18"/>
           <p:cNvSpPr txBox="1"/>
           <p:nvPr/>
         </p:nvSpPr>
@@ -19020,7 +19768,7 @@
       </p:sp>
       <p:sp>
         <p:nvSpPr>
-          <p:cNvPr id="19" name="TextBox 18"/>
+          <p:cNvPr id="20" name="TextBox 19"/>
           <p:cNvSpPr txBox="1"/>
           <p:nvPr/>
         </p:nvSpPr>
@@ -19077,7 +19825,51 @@
       </p:sp>
       <p:sp>
         <p:nvSpPr>
-          <p:cNvPr id="20" name="TextBox 19"/>
+          <p:cNvPr id="21" name="Rectangle 20"/>
+          <p:cNvSpPr/>
+          <p:nvPr/>
+        </p:nvSpPr>
+        <p:spPr>
+          <a:xfrm>
+            <a:off x="320040" y="5458968"/>
+            <a:ext cx="11521440" cy="832104"/>
+          </a:xfrm>
+          <a:prstGeom prst="rect">
+            <a:avLst/>
+          </a:prstGeom>
+          <a:solidFill>
+            <a:srgbClr val="16292B"/>
+          </a:solidFill>
+          <a:ln>
+            <a:noFill/>
+          </a:ln>
+          <a:effectLst/>
+        </p:spPr>
+        <p:style>
+          <a:lnRef idx="1">
+            <a:schemeClr val="accent1"/>
+          </a:lnRef>
+          <a:fillRef idx="3">
+            <a:schemeClr val="accent1"/>
+          </a:fillRef>
+          <a:effectRef idx="2">
+            <a:schemeClr val="accent1"/>
+          </a:effectRef>
+          <a:fontRef idx="minor">
+            <a:schemeClr val="lt1"/>
+          </a:fontRef>
+        </p:style>
+        <p:txBody>
+          <a:bodyPr rtlCol="0" anchor="ctr"/>
+          <a:lstStyle/>
+          <a:p>
+            <a:pPr algn="ctr"/>
+          </a:p>
+        </p:txBody>
+      </p:sp>
+      <p:sp>
+        <p:nvSpPr>
+          <p:cNvPr id="22" name="TextBox 21"/>
           <p:cNvSpPr txBox="1"/>
           <p:nvPr/>
         </p:nvSpPr>
@@ -19116,7 +19908,7 @@
       </p:sp>
       <p:sp>
         <p:nvSpPr>
-          <p:cNvPr id="21" name="TextBox 20"/>
+          <p:cNvPr id="23" name="TextBox 22"/>
           <p:cNvSpPr txBox="1"/>
           <p:nvPr/>
         </p:nvSpPr>
@@ -19227,7 +20019,7 @@
       </p:sp>
       <p:sp>
         <p:nvSpPr>
-          <p:cNvPr id="22" name="TextBox 21"/>
+          <p:cNvPr id="24" name="TextBox 23"/>
           <p:cNvSpPr txBox="1"/>
           <p:nvPr/>
         </p:nvSpPr>
@@ -19266,7 +20058,7 @@
       </p:sp>
       <p:sp>
         <p:nvSpPr>
-          <p:cNvPr id="23" name="TextBox 22"/>
+          <p:cNvPr id="25" name="TextBox 24"/>
           <p:cNvSpPr txBox="1"/>
           <p:nvPr/>
         </p:nvSpPr>
@@ -20126,7 +20918,7 @@
                 </a:solidFill>
                 <a:latin typeface="Noto Sans TC"/>
               </a:rPr>
-              <a:t>站台長這樣：待複判清單</a:t>
+              <a:t>待複判清單：作業員的第一頁</a:t>
             </a:r>
           </a:p>
         </p:txBody>
@@ -20332,7 +21124,7 @@
                 </a:solidFill>
                 <a:latin typeface="Noto Sans TC"/>
               </a:rPr>
-              <a:t>站台長這樣：一個區域怎麼判</a:t>
+              <a:t>區域頁：一個判定的全部證據</a:t>
             </a:r>
           </a:p>
         </p:txBody>
@@ -21187,7 +21979,51 @@
       </p:sp>
       <p:sp>
         <p:nvSpPr>
-          <p:cNvPr id="18" name="TextBox 17"/>
+          <p:cNvPr id="18" name="Rectangle 17"/>
+          <p:cNvSpPr/>
+          <p:nvPr/>
+        </p:nvSpPr>
+        <p:spPr>
+          <a:xfrm>
+            <a:off x="320040" y="4471416"/>
+            <a:ext cx="11521440" cy="640080"/>
+          </a:xfrm>
+          <a:prstGeom prst="rect">
+            <a:avLst/>
+          </a:prstGeom>
+          <a:solidFill>
+            <a:srgbClr val="2B2416"/>
+          </a:solidFill>
+          <a:ln>
+            <a:noFill/>
+          </a:ln>
+          <a:effectLst/>
+        </p:spPr>
+        <p:style>
+          <a:lnRef idx="1">
+            <a:schemeClr val="accent1"/>
+          </a:lnRef>
+          <a:fillRef idx="3">
+            <a:schemeClr val="accent1"/>
+          </a:fillRef>
+          <a:effectRef idx="2">
+            <a:schemeClr val="accent1"/>
+          </a:effectRef>
+          <a:fontRef idx="minor">
+            <a:schemeClr val="lt1"/>
+          </a:fontRef>
+        </p:style>
+        <p:txBody>
+          <a:bodyPr rtlCol="0" anchor="ctr"/>
+          <a:lstStyle/>
+          <a:p>
+            <a:pPr algn="ctr"/>
+          </a:p>
+        </p:txBody>
+      </p:sp>
+      <p:sp>
+        <p:nvSpPr>
+          <p:cNvPr id="19" name="TextBox 18"/>
           <p:cNvSpPr txBox="1"/>
           <p:nvPr/>
         </p:nvSpPr>
@@ -21226,7 +22062,7 @@
       </p:sp>
       <p:sp>
         <p:nvSpPr>
-          <p:cNvPr id="19" name="TextBox 18"/>
+          <p:cNvPr id="20" name="TextBox 19"/>
           <p:cNvSpPr txBox="1"/>
           <p:nvPr/>
         </p:nvSpPr>
@@ -21265,7 +22101,51 @@
       </p:sp>
       <p:sp>
         <p:nvSpPr>
-          <p:cNvPr id="20" name="TextBox 19"/>
+          <p:cNvPr id="21" name="Rectangle 20"/>
+          <p:cNvSpPr/>
+          <p:nvPr/>
+        </p:nvSpPr>
+        <p:spPr>
+          <a:xfrm>
+            <a:off x="320040" y="5166360"/>
+            <a:ext cx="11521440" cy="886968"/>
+          </a:xfrm>
+          <a:prstGeom prst="rect">
+            <a:avLst/>
+          </a:prstGeom>
+          <a:solidFill>
+            <a:srgbClr val="16292B"/>
+          </a:solidFill>
+          <a:ln>
+            <a:noFill/>
+          </a:ln>
+          <a:effectLst/>
+        </p:spPr>
+        <p:style>
+          <a:lnRef idx="1">
+            <a:schemeClr val="accent1"/>
+          </a:lnRef>
+          <a:fillRef idx="3">
+            <a:schemeClr val="accent1"/>
+          </a:fillRef>
+          <a:effectRef idx="2">
+            <a:schemeClr val="accent1"/>
+          </a:effectRef>
+          <a:fontRef idx="minor">
+            <a:schemeClr val="lt1"/>
+          </a:fontRef>
+        </p:style>
+        <p:txBody>
+          <a:bodyPr rtlCol="0" anchor="ctr"/>
+          <a:lstStyle/>
+          <a:p>
+            <a:pPr algn="ctr"/>
+          </a:p>
+        </p:txBody>
+      </p:sp>
+      <p:sp>
+        <p:nvSpPr>
+          <p:cNvPr id="22" name="TextBox 21"/>
           <p:cNvSpPr txBox="1"/>
           <p:nvPr/>
         </p:nvSpPr>
@@ -21304,7 +22184,7 @@
       </p:sp>
       <p:sp>
         <p:nvSpPr>
-          <p:cNvPr id="21" name="TextBox 20"/>
+          <p:cNvPr id="23" name="TextBox 22"/>
           <p:cNvSpPr txBox="1"/>
           <p:nvPr/>
         </p:nvSpPr>
@@ -21361,7 +22241,7 @@
       </p:sp>
       <p:sp>
         <p:nvSpPr>
-          <p:cNvPr id="22" name="TextBox 21"/>
+          <p:cNvPr id="24" name="TextBox 23"/>
           <p:cNvSpPr txBox="1"/>
           <p:nvPr/>
         </p:nvSpPr>
@@ -21400,7 +22280,7 @@
       </p:sp>
       <p:sp>
         <p:nvSpPr>
-          <p:cNvPr id="23" name="TextBox 22"/>
+          <p:cNvPr id="25" name="TextBox 24"/>
           <p:cNvSpPr txBox="1"/>
           <p:nvPr/>
         </p:nvSpPr>
@@ -21876,7 +22756,7 @@
                 </a:solidFill>
                 <a:latin typeface="Noto Sans TC"/>
               </a:rPr>
-              <a:t>站台長這樣：主管問一句話</a:t>
+              <a:t>產線查詢：一句話到一張有區間的圖</a:t>
             </a:r>
           </a:p>
         </p:txBody>
@@ -22965,7 +23845,51 @@
       </p:sp>
       <p:sp>
         <p:nvSpPr>
-          <p:cNvPr id="18" name="TextBox 17"/>
+          <p:cNvPr id="18" name="Rectangle 17"/>
+          <p:cNvSpPr/>
+          <p:nvPr/>
+        </p:nvSpPr>
+        <p:spPr>
+          <a:xfrm>
+            <a:off x="320040" y="4718304"/>
+            <a:ext cx="11521440" cy="393192"/>
+          </a:xfrm>
+          <a:prstGeom prst="rect">
+            <a:avLst/>
+          </a:prstGeom>
+          <a:solidFill>
+            <a:srgbClr val="2B2416"/>
+          </a:solidFill>
+          <a:ln>
+            <a:noFill/>
+          </a:ln>
+          <a:effectLst/>
+        </p:spPr>
+        <p:style>
+          <a:lnRef idx="1">
+            <a:schemeClr val="accent1"/>
+          </a:lnRef>
+          <a:fillRef idx="3">
+            <a:schemeClr val="accent1"/>
+          </a:fillRef>
+          <a:effectRef idx="2">
+            <a:schemeClr val="accent1"/>
+          </a:effectRef>
+          <a:fontRef idx="minor">
+            <a:schemeClr val="lt1"/>
+          </a:fontRef>
+        </p:style>
+        <p:txBody>
+          <a:bodyPr rtlCol="0" anchor="ctr"/>
+          <a:lstStyle/>
+          <a:p>
+            <a:pPr algn="ctr"/>
+          </a:p>
+        </p:txBody>
+      </p:sp>
+      <p:sp>
+        <p:nvSpPr>
+          <p:cNvPr id="19" name="TextBox 18"/>
           <p:cNvSpPr txBox="1"/>
           <p:nvPr/>
         </p:nvSpPr>
@@ -23004,7 +23928,7 @@
       </p:sp>
       <p:sp>
         <p:nvSpPr>
-          <p:cNvPr id="19" name="TextBox 18"/>
+          <p:cNvPr id="20" name="TextBox 19"/>
           <p:cNvSpPr txBox="1"/>
           <p:nvPr/>
         </p:nvSpPr>
@@ -23061,7 +23985,51 @@
       </p:sp>
       <p:sp>
         <p:nvSpPr>
-          <p:cNvPr id="20" name="TextBox 19"/>
+          <p:cNvPr id="21" name="Rectangle 20"/>
+          <p:cNvSpPr/>
+          <p:nvPr/>
+        </p:nvSpPr>
+        <p:spPr>
+          <a:xfrm>
+            <a:off x="320040" y="5166360"/>
+            <a:ext cx="11521440" cy="640080"/>
+          </a:xfrm>
+          <a:prstGeom prst="rect">
+            <a:avLst/>
+          </a:prstGeom>
+          <a:solidFill>
+            <a:srgbClr val="16292B"/>
+          </a:solidFill>
+          <a:ln>
+            <a:noFill/>
+          </a:ln>
+          <a:effectLst/>
+        </p:spPr>
+        <p:style>
+          <a:lnRef idx="1">
+            <a:schemeClr val="accent1"/>
+          </a:lnRef>
+          <a:fillRef idx="3">
+            <a:schemeClr val="accent1"/>
+          </a:fillRef>
+          <a:effectRef idx="2">
+            <a:schemeClr val="accent1"/>
+          </a:effectRef>
+          <a:fontRef idx="minor">
+            <a:schemeClr val="lt1"/>
+          </a:fontRef>
+        </p:style>
+        <p:txBody>
+          <a:bodyPr rtlCol="0" anchor="ctr"/>
+          <a:lstStyle/>
+          <a:p>
+            <a:pPr algn="ctr"/>
+          </a:p>
+        </p:txBody>
+      </p:sp>
+      <p:sp>
+        <p:nvSpPr>
+          <p:cNvPr id="22" name="TextBox 21"/>
           <p:cNvSpPr txBox="1"/>
           <p:nvPr/>
         </p:nvSpPr>
@@ -23100,7 +24068,7 @@
       </p:sp>
       <p:sp>
         <p:nvSpPr>
-          <p:cNvPr id="21" name="TextBox 20"/>
+          <p:cNvPr id="23" name="TextBox 22"/>
           <p:cNvSpPr txBox="1"/>
           <p:nvPr/>
         </p:nvSpPr>
@@ -23193,7 +24161,7 @@
       </p:sp>
       <p:sp>
         <p:nvSpPr>
-          <p:cNvPr id="22" name="TextBox 21"/>
+          <p:cNvPr id="24" name="TextBox 23"/>
           <p:cNvSpPr txBox="1"/>
           <p:nvPr/>
         </p:nvSpPr>
@@ -23232,7 +24200,7 @@
       </p:sp>
       <p:sp>
         <p:nvSpPr>
-          <p:cNvPr id="23" name="TextBox 22"/>
+          <p:cNvPr id="25" name="TextBox 24"/>
           <p:cNvSpPr txBox="1"/>
           <p:nvPr/>
         </p:nvSpPr>
@@ -24158,7 +25126,51 @@
       </p:sp>
       <p:sp>
         <p:nvSpPr>
-          <p:cNvPr id="18" name="TextBox 17"/>
+          <p:cNvPr id="18" name="Rectangle 17"/>
+          <p:cNvSpPr/>
+          <p:nvPr/>
+        </p:nvSpPr>
+        <p:spPr>
+          <a:xfrm>
+            <a:off x="320040" y="4572000"/>
+            <a:ext cx="11521440" cy="832104"/>
+          </a:xfrm>
+          <a:prstGeom prst="rect">
+            <a:avLst/>
+          </a:prstGeom>
+          <a:solidFill>
+            <a:srgbClr val="2B2416"/>
+          </a:solidFill>
+          <a:ln>
+            <a:noFill/>
+          </a:ln>
+          <a:effectLst/>
+        </p:spPr>
+        <p:style>
+          <a:lnRef idx="1">
+            <a:schemeClr val="accent1"/>
+          </a:lnRef>
+          <a:fillRef idx="3">
+            <a:schemeClr val="accent1"/>
+          </a:fillRef>
+          <a:effectRef idx="2">
+            <a:schemeClr val="accent1"/>
+          </a:effectRef>
+          <a:fontRef idx="minor">
+            <a:schemeClr val="lt1"/>
+          </a:fontRef>
+        </p:style>
+        <p:txBody>
+          <a:bodyPr rtlCol="0" anchor="ctr"/>
+          <a:lstStyle/>
+          <a:p>
+            <a:pPr algn="ctr"/>
+          </a:p>
+        </p:txBody>
+      </p:sp>
+      <p:sp>
+        <p:nvSpPr>
+          <p:cNvPr id="19" name="TextBox 18"/>
           <p:cNvSpPr txBox="1"/>
           <p:nvPr/>
         </p:nvSpPr>
@@ -24197,7 +25209,7 @@
       </p:sp>
       <p:sp>
         <p:nvSpPr>
-          <p:cNvPr id="19" name="TextBox 18"/>
+          <p:cNvPr id="20" name="TextBox 19"/>
           <p:cNvSpPr txBox="1"/>
           <p:nvPr/>
         </p:nvSpPr>
@@ -24236,7 +25248,51 @@
       </p:sp>
       <p:sp>
         <p:nvSpPr>
-          <p:cNvPr id="20" name="TextBox 19"/>
+          <p:cNvPr id="21" name="Rectangle 20"/>
+          <p:cNvSpPr/>
+          <p:nvPr/>
+        </p:nvSpPr>
+        <p:spPr>
+          <a:xfrm>
+            <a:off x="320040" y="5458968"/>
+            <a:ext cx="11521440" cy="832104"/>
+          </a:xfrm>
+          <a:prstGeom prst="rect">
+            <a:avLst/>
+          </a:prstGeom>
+          <a:solidFill>
+            <a:srgbClr val="16292B"/>
+          </a:solidFill>
+          <a:ln>
+            <a:noFill/>
+          </a:ln>
+          <a:effectLst/>
+        </p:spPr>
+        <p:style>
+          <a:lnRef idx="1">
+            <a:schemeClr val="accent1"/>
+          </a:lnRef>
+          <a:fillRef idx="3">
+            <a:schemeClr val="accent1"/>
+          </a:fillRef>
+          <a:effectRef idx="2">
+            <a:schemeClr val="accent1"/>
+          </a:effectRef>
+          <a:fontRef idx="minor">
+            <a:schemeClr val="lt1"/>
+          </a:fontRef>
+        </p:style>
+        <p:txBody>
+          <a:bodyPr rtlCol="0" anchor="ctr"/>
+          <a:lstStyle/>
+          <a:p>
+            <a:pPr algn="ctr"/>
+          </a:p>
+        </p:txBody>
+      </p:sp>
+      <p:sp>
+        <p:nvSpPr>
+          <p:cNvPr id="22" name="TextBox 21"/>
           <p:cNvSpPr txBox="1"/>
           <p:nvPr/>
         </p:nvSpPr>
@@ -24275,7 +25331,7 @@
       </p:sp>
       <p:sp>
         <p:nvSpPr>
-          <p:cNvPr id="21" name="TextBox 20"/>
+          <p:cNvPr id="23" name="TextBox 22"/>
           <p:cNvSpPr txBox="1"/>
           <p:nvPr/>
         </p:nvSpPr>
@@ -24332,7 +25388,7 @@
       </p:sp>
       <p:sp>
         <p:nvSpPr>
-          <p:cNvPr id="22" name="TextBox 21"/>
+          <p:cNvPr id="24" name="TextBox 23"/>
           <p:cNvSpPr txBox="1"/>
           <p:nvPr/>
         </p:nvSpPr>
@@ -24371,7 +25427,7 @@
       </p:sp>
       <p:sp>
         <p:nvSpPr>
-          <p:cNvPr id="23" name="TextBox 22"/>
+          <p:cNvPr id="25" name="TextBox 24"/>
           <p:cNvSpPr txBox="1"/>
           <p:nvPr/>
         </p:nvSpPr>
@@ -25318,7 +26374,51 @@
       </p:sp>
       <p:sp>
         <p:nvSpPr>
-          <p:cNvPr id="19" name="TextBox 18"/>
+          <p:cNvPr id="19" name="Rectangle 18"/>
+          <p:cNvSpPr/>
+          <p:nvPr/>
+        </p:nvSpPr>
+        <p:spPr>
+          <a:xfrm>
+            <a:off x="320040" y="4654296"/>
+            <a:ext cx="11521440" cy="640080"/>
+          </a:xfrm>
+          <a:prstGeom prst="rect">
+            <a:avLst/>
+          </a:prstGeom>
+          <a:solidFill>
+            <a:srgbClr val="2B2416"/>
+          </a:solidFill>
+          <a:ln>
+            <a:noFill/>
+          </a:ln>
+          <a:effectLst/>
+        </p:spPr>
+        <p:style>
+          <a:lnRef idx="1">
+            <a:schemeClr val="accent1"/>
+          </a:lnRef>
+          <a:fillRef idx="3">
+            <a:schemeClr val="accent1"/>
+          </a:fillRef>
+          <a:effectRef idx="2">
+            <a:schemeClr val="accent1"/>
+          </a:effectRef>
+          <a:fontRef idx="minor">
+            <a:schemeClr val="lt1"/>
+          </a:fontRef>
+        </p:style>
+        <p:txBody>
+          <a:bodyPr rtlCol="0" anchor="ctr"/>
+          <a:lstStyle/>
+          <a:p>
+            <a:pPr algn="ctr"/>
+          </a:p>
+        </p:txBody>
+      </p:sp>
+      <p:sp>
+        <p:nvSpPr>
+          <p:cNvPr id="20" name="TextBox 19"/>
           <p:cNvSpPr txBox="1"/>
           <p:nvPr/>
         </p:nvSpPr>
@@ -25357,7 +26457,7 @@
       </p:sp>
       <p:sp>
         <p:nvSpPr>
-          <p:cNvPr id="20" name="TextBox 19"/>
+          <p:cNvPr id="21" name="TextBox 20"/>
           <p:cNvSpPr txBox="1"/>
           <p:nvPr/>
         </p:nvSpPr>
@@ -25396,7 +26496,51 @@
       </p:sp>
       <p:sp>
         <p:nvSpPr>
-          <p:cNvPr id="21" name="TextBox 20"/>
+          <p:cNvPr id="22" name="Rectangle 21"/>
+          <p:cNvSpPr/>
+          <p:nvPr/>
+        </p:nvSpPr>
+        <p:spPr>
+          <a:xfrm>
+            <a:off x="320040" y="5349240"/>
+            <a:ext cx="11521440" cy="886968"/>
+          </a:xfrm>
+          <a:prstGeom prst="rect">
+            <a:avLst/>
+          </a:prstGeom>
+          <a:solidFill>
+            <a:srgbClr val="16292B"/>
+          </a:solidFill>
+          <a:ln>
+            <a:noFill/>
+          </a:ln>
+          <a:effectLst/>
+        </p:spPr>
+        <p:style>
+          <a:lnRef idx="1">
+            <a:schemeClr val="accent1"/>
+          </a:lnRef>
+          <a:fillRef idx="3">
+            <a:schemeClr val="accent1"/>
+          </a:fillRef>
+          <a:effectRef idx="2">
+            <a:schemeClr val="accent1"/>
+          </a:effectRef>
+          <a:fontRef idx="minor">
+            <a:schemeClr val="lt1"/>
+          </a:fontRef>
+        </p:style>
+        <p:txBody>
+          <a:bodyPr rtlCol="0" anchor="ctr"/>
+          <a:lstStyle/>
+          <a:p>
+            <a:pPr algn="ctr"/>
+          </a:p>
+        </p:txBody>
+      </p:sp>
+      <p:sp>
+        <p:nvSpPr>
+          <p:cNvPr id="23" name="TextBox 22"/>
           <p:cNvSpPr txBox="1"/>
           <p:nvPr/>
         </p:nvSpPr>
@@ -25435,7 +26579,7 @@
       </p:sp>
       <p:sp>
         <p:nvSpPr>
-          <p:cNvPr id="22" name="TextBox 21"/>
+          <p:cNvPr id="24" name="TextBox 23"/>
           <p:cNvSpPr txBox="1"/>
           <p:nvPr/>
         </p:nvSpPr>
@@ -25474,7 +26618,7 @@
       </p:sp>
       <p:sp>
         <p:nvSpPr>
-          <p:cNvPr id="23" name="TextBox 22"/>
+          <p:cNvPr id="25" name="TextBox 24"/>
           <p:cNvSpPr txBox="1"/>
           <p:nvPr/>
         </p:nvSpPr>
@@ -25513,7 +26657,7 @@
       </p:sp>
       <p:sp>
         <p:nvSpPr>
-          <p:cNvPr id="24" name="TextBox 23"/>
+          <p:cNvPr id="26" name="TextBox 25"/>
           <p:cNvSpPr txBox="1"/>
           <p:nvPr/>
         </p:nvSpPr>
@@ -26352,7 +27496,51 @@
       </p:sp>
       <p:sp>
         <p:nvSpPr>
-          <p:cNvPr id="19" name="TextBox 18"/>
+          <p:cNvPr id="19" name="Rectangle 18"/>
+          <p:cNvSpPr/>
+          <p:nvPr/>
+        </p:nvSpPr>
+        <p:spPr>
+          <a:xfrm>
+            <a:off x="320040" y="5148072"/>
+            <a:ext cx="11521440" cy="393192"/>
+          </a:xfrm>
+          <a:prstGeom prst="rect">
+            <a:avLst/>
+          </a:prstGeom>
+          <a:solidFill>
+            <a:srgbClr val="2B2416"/>
+          </a:solidFill>
+          <a:ln>
+            <a:noFill/>
+          </a:ln>
+          <a:effectLst/>
+        </p:spPr>
+        <p:style>
+          <a:lnRef idx="1">
+            <a:schemeClr val="accent1"/>
+          </a:lnRef>
+          <a:fillRef idx="3">
+            <a:schemeClr val="accent1"/>
+          </a:fillRef>
+          <a:effectRef idx="2">
+            <a:schemeClr val="accent1"/>
+          </a:effectRef>
+          <a:fontRef idx="minor">
+            <a:schemeClr val="lt1"/>
+          </a:fontRef>
+        </p:style>
+        <p:txBody>
+          <a:bodyPr rtlCol="0" anchor="ctr"/>
+          <a:lstStyle/>
+          <a:p>
+            <a:pPr algn="ctr"/>
+          </a:p>
+        </p:txBody>
+      </p:sp>
+      <p:sp>
+        <p:nvSpPr>
+          <p:cNvPr id="20" name="TextBox 19"/>
           <p:cNvSpPr txBox="1"/>
           <p:nvPr/>
         </p:nvSpPr>
@@ -26391,7 +27579,7 @@
       </p:sp>
       <p:sp>
         <p:nvSpPr>
-          <p:cNvPr id="20" name="TextBox 19"/>
+          <p:cNvPr id="21" name="TextBox 20"/>
           <p:cNvSpPr txBox="1"/>
           <p:nvPr/>
         </p:nvSpPr>
@@ -26430,7 +27618,51 @@
       </p:sp>
       <p:sp>
         <p:nvSpPr>
-          <p:cNvPr id="21" name="TextBox 20"/>
+          <p:cNvPr id="22" name="Rectangle 21"/>
+          <p:cNvSpPr/>
+          <p:nvPr/>
+        </p:nvSpPr>
+        <p:spPr>
+          <a:xfrm>
+            <a:off x="320040" y="5596128"/>
+            <a:ext cx="11521440" cy="640080"/>
+          </a:xfrm>
+          <a:prstGeom prst="rect">
+            <a:avLst/>
+          </a:prstGeom>
+          <a:solidFill>
+            <a:srgbClr val="16292B"/>
+          </a:solidFill>
+          <a:ln>
+            <a:noFill/>
+          </a:ln>
+          <a:effectLst/>
+        </p:spPr>
+        <p:style>
+          <a:lnRef idx="1">
+            <a:schemeClr val="accent1"/>
+          </a:lnRef>
+          <a:fillRef idx="3">
+            <a:schemeClr val="accent1"/>
+          </a:fillRef>
+          <a:effectRef idx="2">
+            <a:schemeClr val="accent1"/>
+          </a:effectRef>
+          <a:fontRef idx="minor">
+            <a:schemeClr val="lt1"/>
+          </a:fontRef>
+        </p:style>
+        <p:txBody>
+          <a:bodyPr rtlCol="0" anchor="ctr"/>
+          <a:lstStyle/>
+          <a:p>
+            <a:pPr algn="ctr"/>
+          </a:p>
+        </p:txBody>
+      </p:sp>
+      <p:sp>
+        <p:nvSpPr>
+          <p:cNvPr id="23" name="TextBox 22"/>
           <p:cNvSpPr txBox="1"/>
           <p:nvPr/>
         </p:nvSpPr>
@@ -26469,7 +27701,7 @@
       </p:sp>
       <p:sp>
         <p:nvSpPr>
-          <p:cNvPr id="22" name="TextBox 21"/>
+          <p:cNvPr id="24" name="TextBox 23"/>
           <p:cNvSpPr txBox="1"/>
           <p:nvPr/>
         </p:nvSpPr>
@@ -26562,7 +27794,7 @@
       </p:sp>
       <p:sp>
         <p:nvSpPr>
-          <p:cNvPr id="23" name="TextBox 22"/>
+          <p:cNvPr id="25" name="TextBox 24"/>
           <p:cNvSpPr txBox="1"/>
           <p:nvPr/>
         </p:nvSpPr>
@@ -26601,7 +27833,7 @@
       </p:sp>
       <p:sp>
         <p:nvSpPr>
-          <p:cNvPr id="24" name="TextBox 23"/>
+          <p:cNvPr id="26" name="TextBox 25"/>
           <p:cNvSpPr txBox="1"/>
           <p:nvPr/>
         </p:nvSpPr>
@@ -34842,7 +36074,51 @@
       </p:sp>
       <p:sp>
         <p:nvSpPr>
-          <p:cNvPr id="18" name="TextBox 17"/>
+          <p:cNvPr id="18" name="Rectangle 17"/>
+          <p:cNvSpPr/>
+          <p:nvPr/>
+        </p:nvSpPr>
+        <p:spPr>
+          <a:xfrm>
+            <a:off x="320040" y="4443984"/>
+            <a:ext cx="11521440" cy="713232"/>
+          </a:xfrm>
+          <a:prstGeom prst="rect">
+            <a:avLst/>
+          </a:prstGeom>
+          <a:solidFill>
+            <a:srgbClr val="2B2416"/>
+          </a:solidFill>
+          <a:ln>
+            <a:noFill/>
+          </a:ln>
+          <a:effectLst/>
+        </p:spPr>
+        <p:style>
+          <a:lnRef idx="1">
+            <a:schemeClr val="accent1"/>
+          </a:lnRef>
+          <a:fillRef idx="3">
+            <a:schemeClr val="accent1"/>
+          </a:fillRef>
+          <a:effectRef idx="2">
+            <a:schemeClr val="accent1"/>
+          </a:effectRef>
+          <a:fontRef idx="minor">
+            <a:schemeClr val="lt1"/>
+          </a:fontRef>
+        </p:style>
+        <p:txBody>
+          <a:bodyPr rtlCol="0" anchor="ctr"/>
+          <a:lstStyle/>
+          <a:p>
+            <a:pPr algn="ctr"/>
+          </a:p>
+        </p:txBody>
+      </p:sp>
+      <p:sp>
+        <p:nvSpPr>
+          <p:cNvPr id="19" name="TextBox 18"/>
           <p:cNvSpPr txBox="1"/>
           <p:nvPr/>
         </p:nvSpPr>
@@ -34881,7 +36157,7 @@
       </p:sp>
       <p:sp>
         <p:nvSpPr>
-          <p:cNvPr id="19" name="TextBox 18"/>
+          <p:cNvPr id="20" name="TextBox 19"/>
           <p:cNvSpPr txBox="1"/>
           <p:nvPr/>
         </p:nvSpPr>
@@ -34974,7 +36250,51 @@
       </p:sp>
       <p:sp>
         <p:nvSpPr>
-          <p:cNvPr id="20" name="TextBox 19"/>
+          <p:cNvPr id="21" name="Rectangle 20"/>
+          <p:cNvSpPr/>
+          <p:nvPr/>
+        </p:nvSpPr>
+        <p:spPr>
+          <a:xfrm>
+            <a:off x="320040" y="5212080"/>
+            <a:ext cx="11521440" cy="429768"/>
+          </a:xfrm>
+          <a:prstGeom prst="rect">
+            <a:avLst/>
+          </a:prstGeom>
+          <a:solidFill>
+            <a:srgbClr val="16292B"/>
+          </a:solidFill>
+          <a:ln>
+            <a:noFill/>
+          </a:ln>
+          <a:effectLst/>
+        </p:spPr>
+        <p:style>
+          <a:lnRef idx="1">
+            <a:schemeClr val="accent1"/>
+          </a:lnRef>
+          <a:fillRef idx="3">
+            <a:schemeClr val="accent1"/>
+          </a:fillRef>
+          <a:effectRef idx="2">
+            <a:schemeClr val="accent1"/>
+          </a:effectRef>
+          <a:fontRef idx="minor">
+            <a:schemeClr val="lt1"/>
+          </a:fontRef>
+        </p:style>
+        <p:txBody>
+          <a:bodyPr rtlCol="0" anchor="ctr"/>
+          <a:lstStyle/>
+          <a:p>
+            <a:pPr algn="ctr"/>
+          </a:p>
+        </p:txBody>
+      </p:sp>
+      <p:sp>
+        <p:nvSpPr>
+          <p:cNvPr id="22" name="TextBox 21"/>
           <p:cNvSpPr txBox="1"/>
           <p:nvPr/>
         </p:nvSpPr>
@@ -35013,7 +36333,7 @@
       </p:sp>
       <p:sp>
         <p:nvSpPr>
-          <p:cNvPr id="21" name="TextBox 20"/>
+          <p:cNvPr id="23" name="TextBox 22"/>
           <p:cNvSpPr txBox="1"/>
           <p:nvPr/>
         </p:nvSpPr>
@@ -35052,7 +36372,7 @@
       </p:sp>
       <p:sp>
         <p:nvSpPr>
-          <p:cNvPr id="22" name="TextBox 21"/>
+          <p:cNvPr id="24" name="TextBox 23"/>
           <p:cNvSpPr txBox="1"/>
           <p:nvPr/>
         </p:nvSpPr>
@@ -35091,7 +36411,7 @@
       </p:sp>
       <p:sp>
         <p:nvSpPr>
-          <p:cNvPr id="23" name="TextBox 22"/>
+          <p:cNvPr id="25" name="TextBox 24"/>
           <p:cNvSpPr txBox="1"/>
           <p:nvPr/>
         </p:nvSpPr>
@@ -36056,7 +37376,51 @@
       </p:sp>
       <p:sp>
         <p:nvSpPr>
-          <p:cNvPr id="19" name="TextBox 18"/>
+          <p:cNvPr id="19" name="Rectangle 18"/>
+          <p:cNvSpPr/>
+          <p:nvPr/>
+        </p:nvSpPr>
+        <p:spPr>
+          <a:xfrm>
+            <a:off x="320040" y="4517133"/>
+            <a:ext cx="11521440" cy="411480"/>
+          </a:xfrm>
+          <a:prstGeom prst="rect">
+            <a:avLst/>
+          </a:prstGeom>
+          <a:solidFill>
+            <a:srgbClr val="2B2416"/>
+          </a:solidFill>
+          <a:ln>
+            <a:noFill/>
+          </a:ln>
+          <a:effectLst/>
+        </p:spPr>
+        <p:style>
+          <a:lnRef idx="1">
+            <a:schemeClr val="accent1"/>
+          </a:lnRef>
+          <a:fillRef idx="3">
+            <a:schemeClr val="accent1"/>
+          </a:fillRef>
+          <a:effectRef idx="2">
+            <a:schemeClr val="accent1"/>
+          </a:effectRef>
+          <a:fontRef idx="minor">
+            <a:schemeClr val="lt1"/>
+          </a:fontRef>
+        </p:style>
+        <p:txBody>
+          <a:bodyPr rtlCol="0" anchor="ctr"/>
+          <a:lstStyle/>
+          <a:p>
+            <a:pPr algn="ctr"/>
+          </a:p>
+        </p:txBody>
+      </p:sp>
+      <p:sp>
+        <p:nvSpPr>
+          <p:cNvPr id="20" name="TextBox 19"/>
           <p:cNvSpPr txBox="1"/>
           <p:nvPr/>
         </p:nvSpPr>
@@ -36095,7 +37459,7 @@
       </p:sp>
       <p:sp>
         <p:nvSpPr>
-          <p:cNvPr id="20" name="TextBox 19"/>
+          <p:cNvPr id="21" name="TextBox 20"/>
           <p:cNvSpPr txBox="1"/>
           <p:nvPr/>
         </p:nvSpPr>
@@ -36134,7 +37498,51 @@
       </p:sp>
       <p:sp>
         <p:nvSpPr>
-          <p:cNvPr id="21" name="TextBox 20"/>
+          <p:cNvPr id="22" name="Rectangle 21"/>
+          <p:cNvSpPr/>
+          <p:nvPr/>
+        </p:nvSpPr>
+        <p:spPr>
+          <a:xfrm>
+            <a:off x="320040" y="4983477"/>
+            <a:ext cx="11521440" cy="941831"/>
+          </a:xfrm>
+          <a:prstGeom prst="rect">
+            <a:avLst/>
+          </a:prstGeom>
+          <a:solidFill>
+            <a:srgbClr val="16292B"/>
+          </a:solidFill>
+          <a:ln>
+            <a:noFill/>
+          </a:ln>
+          <a:effectLst/>
+        </p:spPr>
+        <p:style>
+          <a:lnRef idx="1">
+            <a:schemeClr val="accent1"/>
+          </a:lnRef>
+          <a:fillRef idx="3">
+            <a:schemeClr val="accent1"/>
+          </a:fillRef>
+          <a:effectRef idx="2">
+            <a:schemeClr val="accent1"/>
+          </a:effectRef>
+          <a:fontRef idx="minor">
+            <a:schemeClr val="lt1"/>
+          </a:fontRef>
+        </p:style>
+        <p:txBody>
+          <a:bodyPr rtlCol="0" anchor="ctr"/>
+          <a:lstStyle/>
+          <a:p>
+            <a:pPr algn="ctr"/>
+          </a:p>
+        </p:txBody>
+      </p:sp>
+      <p:sp>
+        <p:nvSpPr>
+          <p:cNvPr id="23" name="TextBox 22"/>
           <p:cNvSpPr txBox="1"/>
           <p:nvPr/>
         </p:nvSpPr>
@@ -36173,7 +37581,7 @@
       </p:sp>
       <p:sp>
         <p:nvSpPr>
-          <p:cNvPr id="22" name="TextBox 21"/>
+          <p:cNvPr id="24" name="TextBox 23"/>
           <p:cNvSpPr txBox="1"/>
           <p:nvPr/>
         </p:nvSpPr>
@@ -36248,7 +37656,7 @@
       </p:sp>
       <p:sp>
         <p:nvSpPr>
-          <p:cNvPr id="23" name="TextBox 22"/>
+          <p:cNvPr id="25" name="TextBox 24"/>
           <p:cNvSpPr txBox="1"/>
           <p:nvPr/>
         </p:nvSpPr>
@@ -36287,7 +37695,7 @@
       </p:sp>
       <p:sp>
         <p:nvSpPr>
-          <p:cNvPr id="24" name="TextBox 23"/>
+          <p:cNvPr id="26" name="TextBox 25"/>
           <p:cNvSpPr txBox="1"/>
           <p:nvPr/>
         </p:nvSpPr>
@@ -37141,7 +38549,51 @@
       </p:sp>
       <p:sp>
         <p:nvSpPr>
-          <p:cNvPr id="18" name="TextBox 17"/>
+          <p:cNvPr id="18" name="Rectangle 17"/>
+          <p:cNvSpPr/>
+          <p:nvPr/>
+        </p:nvSpPr>
+        <p:spPr>
+          <a:xfrm>
+            <a:off x="320040" y="4471416"/>
+            <a:ext cx="11521440" cy="886968"/>
+          </a:xfrm>
+          <a:prstGeom prst="rect">
+            <a:avLst/>
+          </a:prstGeom>
+          <a:solidFill>
+            <a:srgbClr val="2B2416"/>
+          </a:solidFill>
+          <a:ln>
+            <a:noFill/>
+          </a:ln>
+          <a:effectLst/>
+        </p:spPr>
+        <p:style>
+          <a:lnRef idx="1">
+            <a:schemeClr val="accent1"/>
+          </a:lnRef>
+          <a:fillRef idx="3">
+            <a:schemeClr val="accent1"/>
+          </a:fillRef>
+          <a:effectRef idx="2">
+            <a:schemeClr val="accent1"/>
+          </a:effectRef>
+          <a:fontRef idx="minor">
+            <a:schemeClr val="lt1"/>
+          </a:fontRef>
+        </p:style>
+        <p:txBody>
+          <a:bodyPr rtlCol="0" anchor="ctr"/>
+          <a:lstStyle/>
+          <a:p>
+            <a:pPr algn="ctr"/>
+          </a:p>
+        </p:txBody>
+      </p:sp>
+      <p:sp>
+        <p:nvSpPr>
+          <p:cNvPr id="19" name="TextBox 18"/>
           <p:cNvSpPr txBox="1"/>
           <p:nvPr/>
         </p:nvSpPr>
@@ -37180,7 +38632,7 @@
       </p:sp>
       <p:sp>
         <p:nvSpPr>
-          <p:cNvPr id="19" name="TextBox 18"/>
+          <p:cNvPr id="20" name="TextBox 19"/>
           <p:cNvSpPr txBox="1"/>
           <p:nvPr/>
         </p:nvSpPr>
@@ -37309,7 +38761,51 @@
       </p:sp>
       <p:sp>
         <p:nvSpPr>
-          <p:cNvPr id="20" name="TextBox 19"/>
+          <p:cNvPr id="21" name="Rectangle 20"/>
+          <p:cNvSpPr/>
+          <p:nvPr/>
+        </p:nvSpPr>
+        <p:spPr>
+          <a:xfrm>
+            <a:off x="320040" y="5413248"/>
+            <a:ext cx="11521440" cy="640080"/>
+          </a:xfrm>
+          <a:prstGeom prst="rect">
+            <a:avLst/>
+          </a:prstGeom>
+          <a:solidFill>
+            <a:srgbClr val="16292B"/>
+          </a:solidFill>
+          <a:ln>
+            <a:noFill/>
+          </a:ln>
+          <a:effectLst/>
+        </p:spPr>
+        <p:style>
+          <a:lnRef idx="1">
+            <a:schemeClr val="accent1"/>
+          </a:lnRef>
+          <a:fillRef idx="3">
+            <a:schemeClr val="accent1"/>
+          </a:fillRef>
+          <a:effectRef idx="2">
+            <a:schemeClr val="accent1"/>
+          </a:effectRef>
+          <a:fontRef idx="minor">
+            <a:schemeClr val="lt1"/>
+          </a:fontRef>
+        </p:style>
+        <p:txBody>
+          <a:bodyPr rtlCol="0" anchor="ctr"/>
+          <a:lstStyle/>
+          <a:p>
+            <a:pPr algn="ctr"/>
+          </a:p>
+        </p:txBody>
+      </p:sp>
+      <p:sp>
+        <p:nvSpPr>
+          <p:cNvPr id="22" name="TextBox 21"/>
           <p:cNvSpPr txBox="1"/>
           <p:nvPr/>
         </p:nvSpPr>
@@ -37348,7 +38844,7 @@
       </p:sp>
       <p:sp>
         <p:nvSpPr>
-          <p:cNvPr id="21" name="TextBox 20"/>
+          <p:cNvPr id="23" name="TextBox 22"/>
           <p:cNvSpPr txBox="1"/>
           <p:nvPr/>
         </p:nvSpPr>
@@ -37405,7 +38901,7 @@
       </p:sp>
       <p:sp>
         <p:nvSpPr>
-          <p:cNvPr id="22" name="TextBox 21"/>
+          <p:cNvPr id="24" name="TextBox 23"/>
           <p:cNvSpPr txBox="1"/>
           <p:nvPr/>
         </p:nvSpPr>
@@ -37444,7 +38940,7 @@
       </p:sp>
       <p:sp>
         <p:nvSpPr>
-          <p:cNvPr id="23" name="TextBox 22"/>
+          <p:cNvPr id="25" name="TextBox 24"/>
           <p:cNvSpPr txBox="1"/>
           <p:nvPr/>
         </p:nvSpPr>

--- a/docs/deck/aoi-agent-journey.zh-TW.pptx
+++ b/docs/deck/aoi-agent-journey.zh-TW.pptx
@@ -20939,8 +20939,8 @@
         </p:blipFill>
         <p:spPr>
           <a:xfrm>
-            <a:off x="2218791" y="1005840"/>
-            <a:ext cx="7754112" cy="4846320"/>
+            <a:off x="1265628" y="1005840"/>
+            <a:ext cx="9660438" cy="4846320"/>
           </a:xfrm>
           <a:prstGeom prst="rect">
             <a:avLst/>
@@ -21145,8 +21145,8 @@
         </p:blipFill>
         <p:spPr>
           <a:xfrm>
-            <a:off x="2218791" y="1005840"/>
-            <a:ext cx="7754112" cy="4846320"/>
+            <a:off x="380847" y="1005840"/>
+            <a:ext cx="11430000" cy="4216797"/>
           </a:xfrm>
           <a:prstGeom prst="rect">
             <a:avLst/>
@@ -22777,8 +22777,8 @@
         </p:blipFill>
         <p:spPr>
           <a:xfrm>
-            <a:off x="2218791" y="1005840"/>
-            <a:ext cx="7754112" cy="4846320"/>
+            <a:off x="380847" y="1005840"/>
+            <a:ext cx="11430000" cy="4667423"/>
           </a:xfrm>
           <a:prstGeom prst="rect">
             <a:avLst/>

--- a/docs/deck/aoi-agent-journey.zh-TW.pptx
+++ b/docs/deck/aoi-agent-journey.zh-TW.pptx
@@ -42,6 +42,7 @@
     <p:sldId id="290" r:id="rId42"/>
     <p:sldId id="291" r:id="rId43"/>
     <p:sldId id="292" r:id="rId44"/>
+    <p:sldId id="293" r:id="rId45"/>
   </p:sldIdLst>
   <p:sldSz cx="12191695" cy="6858000" type="screen4x3"/>
   <p:notesSz cx="6858000" cy="9144000"/>
@@ -2996,55 +2997,59 @@
           <a:lstStyle/>
           <a:p>
             <a:r>
-              <a:t>白話：程式一直是對的，只有寫在最顯眼地方的那個數字是舊的——所以文件也要有測試。</a:t>
+              <a:t>白話：一張圖看完 /ask 這一層：以前沒指名就拒答或亂猜，現在會把整個集合掃一遍，還做不到的是「第二步要用第一步的答案」。</a:t>
             </a:r>
           </a:p>
           <a:p/>
           <a:p>
             <a:r>
-              <a:t>講稿 1. 最後一個錯是關於文件的：README 第一行的 56.2%，是一份沒有 commit 的表產生的，實際是 52.8%。</a:t>
-            </a:r>
-          </a:p>
-          <a:p>
-            <a:r>
-              <a:t>講稿 2. 程式一直是對的：對位開了、重訓了、門檻重掃了，全照流程。只有文字留在原地。</a:t>
-            </a:r>
-          </a:p>
-          <a:p>
-            <a:r>
-              <a:t>講稿 3. 所以文件也有測試：四份文件裡的數字必須屬於 benchmarks 裡的某個 run，舊數字只能出現在標日期的段落裡。</a:t>
-            </a:r>
-          </a:p>
-          <a:p>
-            <a:r>
-              <a:t>講稿 4. 這一頁我想講的是：這個專案裡每個數字都能被追到它的 run，包括投影片上的這些——這份投影片本身也過那個測試。</a:t>
+              <a:t>頁面上只有圖；要點：</a:t>
+            </a:r>
+          </a:p>
+          <a:p>
+            <a:r>
+              <a:t>• 以前：沒指名任何一台，規劃器要嘛拒答、要嘛自己挑一台——15/28 該拒的有拒、58/70 三遍一致</a:t>
+            </a:r>
+          </a:p>
+          <a:p>
+            <a:r>
+              <a:t>• 現在：機台、線別、班別、事件種類都列在 prompt 裡，規則是排序一次加每個成員各查一次——28/42 不變、17/28、64/70</a:t>
+            </a:r>
+          </a:p>
+          <a:p>
+            <a:r>
+              <a:t>• 還做不到：計畫在第一個查詢跑之前就寫完，第一步的結果沒有通道流回計畫，模型只能寫佔位符或拒答</a:t>
+            </a:r>
+          </a:p>
+          <a:p>
+            <a:r>
+              <a:t>• 下一個機制叫依賴參數：程式在第一步回來之後填真值，規劃還是一次——不是 agent 迴圈，刻意還沒做</a:t>
             </a:r>
           </a:p>
           <a:p/>
           <a:p>
             <a:r>
-              <a:t>面試官會問：</a:t>
-            </a:r>
-          </a:p>
-          <a:p>
-            <a:r>
-              <a:t>Q：為什麼 benchmarks.md 只增不改？</a:t>
-            </a:r>
-          </a:p>
-          <a:p>
-            <a:r>
-              <a:t>A：因為改了就看不出結論什麼時候翻過。INT8 那次 08-23 說不值得、08-26 說成立，兩筆都在，讀者看得到是權重換了。</a:t>
-            </a:r>
-          </a:p>
-          <a:p/>
-          <a:p>
-            <a:r>
-              <a:t>Q：投影片上的數字怎麼保證是對的？</a:t>
-            </a:r>
-          </a:p>
-          <a:p>
-            <a:r>
-              <a:t>A：tests/test_deck.py：每一頁引用的數字必須出現在 benchmarks.md 或那四份被盯著的文件裡。這份投影片是從 scripts/deck_content.py 產的，內容和 pptx、網頁、講義三份一個來源。</a:t>
+              <a:t>講稿 1. 這張圖是上一頁的三欄版本，我用它來講 /ask 到底能問到多遠。</a:t>
+            </a:r>
+          </a:p>
+          <a:p>
+            <a:r>
+              <a:t>講稿 2. 左邊是以前：問「哪一台機台誤判最多」，沒指名，它要嘛拒答要嘛自己挑一台——後者比較危險，因為答案看起來是真的。</a:t>
+            </a:r>
+          </a:p>
+          <a:p>
+            <a:r>
+              <a:t>講稿 3. 中間是現在：機台這種集合很小又列在 prompt 裡，所以規則是排序一次、再對每個成員各查一次，一次規劃同時展開；該答的沒退步，該拒的和穩定度都變好。</a:t>
+            </a:r>
+          </a:p>
+          <a:p>
+            <a:r>
+              <a:t>講稿 4. 右邊是這一層的邊界：第二步要用第一步的答案，而計畫是在任何查詢跑之前就寫完的，架構裡沒有這條回流的通道。</a:t>
+            </a:r>
+          </a:p>
+          <a:p>
+            <a:r>
+              <a:t>講稿 5. 那條通道我知道長什麼樣，叫依賴參數，程式填值不是模型邊看邊想——刻意沒做，因為七十題裡還沒有人真的問出這種題。</a:t>
             </a:r>
           </a:p>
         </p:txBody>
@@ -3114,28 +3119,28 @@
           <a:lstStyle/>
           <a:p>
             <a:r>
-              <a:t>白話：四件事沒做，每一件都有一個寫下來的理由，而不是沒時間。</a:t>
+              <a:t>白話：程式一直是對的，只有寫在最顯眼地方的那個數字是舊的——所以文件也要有測試。</a:t>
             </a:r>
           </a:p>
           <a:p/>
           <a:p>
             <a:r>
-              <a:t>講稿 1. 最後講沒做的，因為面試官一定會問。</a:t>
-            </a:r>
-          </a:p>
-          <a:p>
-            <a:r>
-              <a:t>講稿 2. Shadow mode 是對的下一步，但需要一條真的產線；在這裡建，量出來的是種出來的資料，那正是偵測器專案當年被砍的形狀。</a:t>
-            </a:r>
-          </a:p>
-          <a:p>
-            <a:r>
-              <a:t>講稿 3. 依賴參數等真題；重訓等真標籤；電測不在這個系統裡。</a:t>
-            </a:r>
-          </a:p>
-          <a:p>
-            <a:r>
-              <a:t>講稿 4. 收尾一句：每個門檻引得到檔案、每個數字在 benchmarks 裡、每個錯有它產生的測試。</a:t>
+              <a:t>講稿 1. 最後一個錯是關於文件的：README 第一行的 56.2%，是一份沒有 commit 的表產生的，實際是 52.8%。</a:t>
+            </a:r>
+          </a:p>
+          <a:p>
+            <a:r>
+              <a:t>講稿 2. 程式一直是對的：對位開了、重訓了、門檻重掃了，全照流程。只有文字留在原地。</a:t>
+            </a:r>
+          </a:p>
+          <a:p>
+            <a:r>
+              <a:t>講稿 3. 所以文件也有測試：四份文件裡的數字必須屬於 benchmarks 裡的某個 run，舊數字只能出現在標日期的段落裡。</a:t>
+            </a:r>
+          </a:p>
+          <a:p>
+            <a:r>
+              <a:t>講稿 4. 這一頁我想講的是：這個專案裡每個數字都能被追到它的 run，包括投影片上的這些——這份投影片本身也過那個測試。</a:t>
             </a:r>
           </a:p>
           <a:p/>
@@ -3146,23 +3151,23 @@
           </a:p>
           <a:p>
             <a:r>
-              <a:t>Q：如果明天給你一條真的產線，第一件事做什麼？</a:t>
-            </a:r>
-          </a:p>
-          <a:p>
-            <a:r>
-              <a:t>A：Shadow mode：模型跟著現有流程跑，只記錄它會怎麼判。資料庫已經支援——決定只累加不覆蓋，模型一筆、人一筆並排。目的是重建漏網率的證據，因為一個看 100 個缺陷的試跑證明不了 0.5% 的預算。</a:t>
+              <a:t>Q：為什麼 benchmarks.md 只增不改？</a:t>
+            </a:r>
+          </a:p>
+          <a:p>
+            <a:r>
+              <a:t>A：因為改了就看不出結論什麼時候翻過。INT8 那次 08-23 說不值得、08-26 說成立，兩筆都在，讀者看得到是權重換了。</a:t>
             </a:r>
           </a:p>
           <a:p/>
           <a:p>
             <a:r>
-              <a:t>Q：這個專案最大的限制是什麼？</a:t>
-            </a:r>
-          </a:p>
-          <a:p>
-            <a:r>
-              <a:t>A：資料是二值化的 DeepPCB，相減前端的適用範圍就是這種影像；真的照片要換前端，而偵測器前端的 confidence 排不掉誤報，1.2%。這兩個結論從兩邊碰頭，都量過。</a:t>
+              <a:t>Q：投影片上的數字怎麼保證是對的？</a:t>
+            </a:r>
+          </a:p>
+          <a:p>
+            <a:r>
+              <a:t>A：tests/test_deck.py：每一頁引用的數字必須出現在 benchmarks.md 或那四份被盯著的文件裡。這份投影片是從 scripts/deck_content.py 產的，內容和 pptx、網頁、講義三份一個來源。</a:t>
             </a:r>
           </a:p>
         </p:txBody>
@@ -3350,28 +3355,28 @@
           <a:lstStyle/>
           <a:p>
             <a:r>
-              <a:t>白話：十個 epoch、四分鐘；看的不是準確率那條，是「在漏網預算下省掉多少」那條。</a:t>
+              <a:t>白話：四件事沒做，每一件都有一個寫下來的理由，而不是沒時間。</a:t>
             </a:r>
           </a:p>
           <a:p/>
           <a:p>
             <a:r>
-              <a:t>講稿 1. 面試官問「你怎麼訓練的、有沒有過擬合」，翻這一頁。</a:t>
-            </a:r>
-          </a:p>
-          <a:p>
-            <a:r>
-              <a:t>講稿 2. 三條線：訓練 loss 一直降；驗證準確率兩個 epoch 就飽和；真正選模型用的是第三條——漏網預算下省掉的比例。</a:t>
-            </a:r>
-          </a:p>
-          <a:p>
-            <a:r>
-              <a:t>講稿 3. 準確率會騙人：它把漏一個缺陷和多看一個誤報算一樣。</a:t>
-            </a:r>
-          </a:p>
-          <a:p>
-            <a:r>
-              <a:t>講稿 4. loss 還在降、驗證指標不動，就是在背訓練集，所以十個 epoch 就停。</a:t>
+              <a:t>講稿 1. 最後講沒做的，因為面試官一定會問。</a:t>
+            </a:r>
+          </a:p>
+          <a:p>
+            <a:r>
+              <a:t>講稿 2. Shadow mode 是對的下一步，但需要一條真的產線；在這裡建，量出來的是種出來的資料，那正是偵測器專案當年被砍的形狀。</a:t>
+            </a:r>
+          </a:p>
+          <a:p>
+            <a:r>
+              <a:t>講稿 3. 依賴參數等真題；重訓等真標籤；電測不在這個系統裡。</a:t>
+            </a:r>
+          </a:p>
+          <a:p>
+            <a:r>
+              <a:t>講稿 4. 收尾一句：每個門檻引得到檔案、每個數字在 benchmarks 裡、每個錯有它產生的測試。</a:t>
             </a:r>
           </a:p>
           <a:p/>
@@ -3382,23 +3387,23 @@
           </a:p>
           <a:p>
             <a:r>
-              <a:t>Q：為什麼不用 val_accuracy 選 checkpoint？</a:t>
-            </a:r>
-          </a:p>
-          <a:p>
-            <a:r>
-              <a:t>A：它第 2 個 epoch 就 97%，之後不動，而且它把漏網和誤報算一樣的錯。用的是驗證集上 ≤0.5% 漏網下省掉的比例，第 9 個 epoch 最高。</a:t>
+              <a:t>Q：如果明天給你一條真的產線，第一件事做什麼？</a:t>
+            </a:r>
+          </a:p>
+          <a:p>
+            <a:r>
+              <a:t>A：Shadow mode：模型跟著現有流程跑，只記錄它會怎麼判。資料庫已經支援——決定只累加不覆蓋，模型一筆、人一筆並排。目的是重建漏網率的證據，因為一個看 100 個缺陷的試跑證明不了 0.5% 的預算。</a:t>
             </a:r>
           </a:p>
           <a:p/>
           <a:p>
             <a:r>
-              <a:t>Q：有沒有過擬合？</a:t>
-            </a:r>
-          </a:p>
-          <a:p>
-            <a:r>
-              <a:t>A：train_loss 降到 0.02 時驗證指標已經平了三個 epoch——是背訓練集的跡象，所以停在 10 個 epoch。驗證集按板子切，這個判斷才可信。</a:t>
+              <a:t>Q：這個專案最大的限制是什麼？</a:t>
+            </a:r>
+          </a:p>
+          <a:p>
+            <a:r>
+              <a:t>A：資料是二值化的 DeepPCB，相減前端的適用範圍就是這種影像；真的照片要換前端，而偵測器前端的 confidence 排不掉誤報，1.2%。這兩個結論從兩邊碰頭，都量過。</a:t>
             </a:r>
           </a:p>
         </p:txBody>
@@ -3468,28 +3473,28 @@
           <a:lstStyle/>
           <a:p>
             <a:r>
-              <a:t>白話：同一把尺（≤0.5% 漏網下省掉多少）量四種做法，只有帶樣板通道的小 CNN 站得住。</a:t>
+              <a:t>白話：十個 epoch、四分鐘；看的不是準確率那條，是「在漏網預算下省掉多少」那條。</a:t>
             </a:r>
           </a:p>
           <a:p/>
           <a:p>
             <a:r>
-              <a:t>講稿 1. 「為什麼是 ResNet-18」的答案在這張表：同一把尺量四種做法。</a:t>
-            </a:r>
-          </a:p>
-          <a:p>
-            <a:r>
-              <a:t>講稿 2. 先看地板：不用模型、只算差異圖的統計，大約 1%。模型 52.8%，40 倍。</a:t>
-            </a:r>
-          </a:p>
-          <a:p>
-            <a:r>
-              <a:t>講稿 3. 再看兩個對照：拿掉樣板通道剩 2.8%，偵測器的信心 1.2%。所以關鍵不是網路多大，是輸入裡有沒有「本來該長怎樣」。</a:t>
-            </a:r>
-          </a:p>
-          <a:p>
-            <a:r>
-              <a:t>講稿 4. 沒試更大的模型，因為剩下的漏網是很有信心的錯，不是容量問題。</a:t>
+              <a:t>講稿 1. 面試官問「你怎麼訓練的、有沒有過擬合」，翻這一頁。</a:t>
+            </a:r>
+          </a:p>
+          <a:p>
+            <a:r>
+              <a:t>講稿 2. 三條線：訓練 loss 一直降；驗證準確率兩個 epoch 就飽和；真正選模型用的是第三條——漏網預算下省掉的比例。</a:t>
+            </a:r>
+          </a:p>
+          <a:p>
+            <a:r>
+              <a:t>講稿 3. 準確率會騙人：它把漏一個缺陷和多看一個誤報算一樣。</a:t>
+            </a:r>
+          </a:p>
+          <a:p>
+            <a:r>
+              <a:t>講稿 4. loss 還在降、驗證指標不動，就是在背訓練集，所以十個 epoch 就停。</a:t>
             </a:r>
           </a:p>
           <a:p/>
@@ -3500,23 +3505,23 @@
           </a:p>
           <a:p>
             <a:r>
-              <a:t>Q：為什麼不試 ResNet-50 或 ViT？</a:t>
-            </a:r>
-          </a:p>
-          <a:p>
-            <a:r>
-              <a:t>A：剩下的 15 個漏網是 confident errors——模型給它們的 P(open) 是 0.00007 到 0.00589，換大模型解決的是模糊地帶，不是這種。而且 CPU 2.5 ms 一個候選已經是週期的零頭。</a:t>
+              <a:t>Q：為什麼不用 val_accuracy 選 checkpoint？</a:t>
+            </a:r>
+          </a:p>
+          <a:p>
+            <a:r>
+              <a:t>A：它第 2 個 epoch 就 97%，之後不動，而且它把漏網和誤報算一樣的錯。用的是驗證集上 ≤0.5% 漏網下省掉的比例，第 9 個 epoch 最高。</a:t>
             </a:r>
           </a:p>
           <a:p/>
           <a:p>
             <a:r>
-              <a:t>Q：地板是怎麼算的？</a:t>
-            </a:r>
-          </a:p>
-          <a:p>
-            <a:r>
-              <a:t>A：差異圖上不用模型就能算的分數：平均值、最大值、前 32/64/128 個像素的和、超過某亮度的像素數，各自當 P(false call) 掃同一條曲線，最好的在 ≤0.5% 下是 1.3%。</a:t>
+              <a:t>Q：有沒有過擬合？</a:t>
+            </a:r>
+          </a:p>
+          <a:p>
+            <a:r>
+              <a:t>A：train_loss 降到 0.02 時驗證指標已經平了三個 epoch——是背訓練集的跡象，所以停在 10 個 epoch。驗證集按板子切，這個判斷才可信。</a:t>
             </a:r>
           </a:p>
         </p:txBody>
@@ -3586,28 +3591,28 @@
           <a:lstStyle/>
           <a:p>
             <a:r>
-              <a:t>白話：兩種量化在漏網預算上幾乎一樣，差別在速度和校正方式；而且這個結論換權重就要重量。</a:t>
+              <a:t>白話：同一把尺（≤0.5% 漏網下省掉多少）量四種做法，只有帶樣板通道的小 CNN 站得住。</a:t>
             </a:r>
           </a:p>
           <a:p/>
           <a:p>
             <a:r>
-              <a:t>講稿 1. INT8 動態和靜態的差別，面試官問到就翻這張。</a:t>
-            </a:r>
-          </a:p>
-          <a:p>
-            <a:r>
-              <a:t>講稿 2. 在漏網預算上：動態 52.5、靜態 53.0，對 FP32 的 52.8，都在一點以內。類別一致 99.8%，不一致十幾個。</a:t>
-            </a:r>
-          </a:p>
-          <a:p>
-            <a:r>
-              <a:t>講稿 3. 靜態快 3.87 倍，但要校正集；校正集只用訓練 split，不碰 test。</a:t>
-            </a:r>
-          </a:p>
-          <a:p>
-            <a:r>
-              <a:t>講稿 4. 理由是記憶體，389 到 81 MB。而且這個結論在舊權重上是反的，所以量化進了重訓的檢查清單。</a:t>
+              <a:t>講稿 1. 「為什麼是 ResNet-18」的答案在這張表：同一把尺量四種做法。</a:t>
+            </a:r>
+          </a:p>
+          <a:p>
+            <a:r>
+              <a:t>講稿 2. 先看地板：不用模型、只算差異圖的統計，大約 1%。模型 52.8%，40 倍。</a:t>
+            </a:r>
+          </a:p>
+          <a:p>
+            <a:r>
+              <a:t>講稿 3. 再看兩個對照：拿掉樣板通道剩 2.8%，偵測器的信心 1.2%。所以關鍵不是網路多大，是輸入裡有沒有「本來該長怎樣」。</a:t>
+            </a:r>
+          </a:p>
+          <a:p>
+            <a:r>
+              <a:t>講稿 4. 沒試更大的模型，因為剩下的漏網是很有信心的錯，不是容量問題。</a:t>
             </a:r>
           </a:p>
           <a:p/>
@@ -3618,23 +3623,23 @@
           </a:p>
           <a:p>
             <a:r>
-              <a:t>Q：動態和靜態的差別是什麼？</a:t>
-            </a:r>
-          </a:p>
-          <a:p>
-            <a:r>
-              <a:t>A：動態在推論時算 activation 的範圍，不用校正集，慢一點（1.31x）；靜態先用 512 個 trainval patch 校正好範圍，快 3.87x，但校正集選錯 split 就是作弊。兩者在 ≤0.5% 下是 52.5% 對 53.0%。</a:t>
+              <a:t>Q：為什麼不試 ResNet-50 或 ViT？</a:t>
+            </a:r>
+          </a:p>
+          <a:p>
+            <a:r>
+              <a:t>A：剩下的 15 個漏網是 confident errors——模型給它們的 P(open) 是 0.00007 到 0.00589，換大模型解決的是模糊地帶，不是這種。而且 CPU 2.5 ms 一個候選已經是週期的零頭。</a:t>
             </a:r>
           </a:p>
           <a:p/>
           <a:p>
             <a:r>
-              <a:t>Q：為什麼最後沒部署 INT8？</a:t>
-            </a:r>
-          </a:p>
-          <a:p>
-            <a:r>
-              <a:t>A：因為延遲不是問題：FP32 一個候選 2.53 ms，一片板 20 個候選 50 ms，週期 10 秒。記憶體 5 倍是真的好處，但站台目前沒有這個壓力，float32 加它掃出來的門檻更單純。</a:t>
+              <a:t>Q：地板是怎麼算的？</a:t>
+            </a:r>
+          </a:p>
+          <a:p>
+            <a:r>
+              <a:t>A：差異圖上不用模型就能算的分數：平均值、最大值、前 32/64/128 個像素的和、超過某亮度的像素數，各自當 P(false call) 掃同一條曲線，最好的在 ≤0.5% 下是 1.3%。</a:t>
             </a:r>
           </a:p>
         </p:txBody>
@@ -3704,28 +3709,28 @@
           <a:lstStyle/>
           <a:p>
             <a:r>
-              <a:t>白話：這麼小的模型，一次一個的時候 GPU 派工的成本比算還貴；批到 8 個 GPU 才贏。</a:t>
+              <a:t>白話：兩種量化在漏網預算上幾乎一樣，差別在速度和校正方式；而且這個結論換權重就要重量。</a:t>
             </a:r>
           </a:p>
           <a:p/>
           <a:p>
             <a:r>
-              <a:t>講稿 1. 「複判站要不要 GPU」的答案：不用。一個候選 CPU 2.5 毫秒。</a:t>
-            </a:r>
-          </a:p>
-          <a:p>
-            <a:r>
-              <a:t>講稿 2. 反直覺的是 GPU 一次一個反而慢 2.9 倍，因為派工比算貴；批到 8 個才翻過來。</a:t>
-            </a:r>
-          </a:p>
-          <a:p>
-            <a:r>
-              <a:t>講稿 3. CPU 有個懸崖在 batch 16，所以批 8。</a:t>
-            </a:r>
-          </a:p>
-          <a:p>
-            <a:r>
-              <a:t>講稿 4. 這一頁還有一個教訓：ollama ps 不是 GPU 檢查，第一次量的數字是在旁邊有訓練跑的時候量的，作廢。</a:t>
+              <a:t>講稿 1. INT8 動態和靜態的差別，面試官問到就翻這張。</a:t>
+            </a:r>
+          </a:p>
+          <a:p>
+            <a:r>
+              <a:t>講稿 2. 在漏網預算上：動態 52.5、靜態 53.0，對 FP32 的 52.8，都在一點以內。類別一致 99.8%，不一致十幾個。</a:t>
+            </a:r>
+          </a:p>
+          <a:p>
+            <a:r>
+              <a:t>講稿 3. 靜態快 3.87 倍，但要校正集；校正集只用訓練 split，不碰 test。</a:t>
+            </a:r>
+          </a:p>
+          <a:p>
+            <a:r>
+              <a:t>講稿 4. 理由是記憶體，389 到 81 MB。而且這個結論在舊權重上是反的，所以量化進了重訓的檢查清單。</a:t>
             </a:r>
           </a:p>
           <a:p/>
@@ -3736,23 +3741,23 @@
           </a:p>
           <a:p>
             <a:r>
-              <a:t>Q：複判站需要 GPU 嗎？</a:t>
-            </a:r>
-          </a:p>
-          <a:p>
-            <a:r>
-              <a:t>A：不需要。CPU p50 2.50 ms 一個候選，43 MB 的 checkpoint；GPU 在 batch 1 反而慢 2.9 倍，batch 8 才追過。</a:t>
+              <a:t>Q：動態和靜態的差別是什麼？</a:t>
+            </a:r>
+          </a:p>
+          <a:p>
+            <a:r>
+              <a:t>A：動態在推論時算 activation 的範圍，不用校正集，慢一點（1.31x）；靜態先用 512 個 trainval patch 校正好範圍，快 3.87x，但校正集選錯 split 就是作弊。兩者在 ≤0.5% 下是 52.5% 對 53.0%。</a:t>
             </a:r>
           </a:p>
           <a:p/>
           <a:p>
             <a:r>
-              <a:t>Q：你怎麼確定延遲數字沒被別的工作污染？</a:t>
-            </a:r>
-          </a:p>
-          <a:p>
-            <a:r>
-              <a:t>A：腳本量之前和之後都掃 ollama ps 和 process table，有 torch/ffmpeg 在跑就拒絕發布。這條規則是被一次作廢的量測換來的。</a:t>
+              <a:t>Q：為什麼最後沒部署 INT8？</a:t>
+            </a:r>
+          </a:p>
+          <a:p>
+            <a:r>
+              <a:t>A：因為延遲不是問題：FP32 一個候選 2.53 ms，一片板 20 個候選 50 ms，週期 10 秒。記憶體 5 倍是真的好處，但站台目前沒有這個壓力，float32 加它掃出來的門檻更單純。</a:t>
             </a:r>
           </a:p>
         </p:txBody>
@@ -3822,28 +3827,28 @@
           <a:lstStyle/>
           <a:p>
             <a:r>
-              <a:t>白話：偵測器訓 56 分鐘找得到瑕疵；拿它的框訓同一個 ResNet、沒有樣板通道，曲線根本爬不起來。</a:t>
+              <a:t>白話：這麼小的模型，一次一個的時候 GPU 派工的成本比算還貴；批到 8 個 GPU 才贏。</a:t>
             </a:r>
           </a:p>
           <a:p/>
           <a:p>
             <a:r>
-              <a:t>講稿 1. 偵測器那兩個實驗的訓練細節在這頁。</a:t>
-            </a:r>
-          </a:p>
-          <a:p>
-            <a:r>
-              <a:t>講稿 2. YOLO26n 六十個 epoch、56 分鐘，找得到 92% 的瑕疵。</a:t>
-            </a:r>
-          </a:p>
-          <a:p>
-            <a:r>
-              <a:t>講稿 3. 重點是下面這條曲線：拿它的框訓同一個 ResNet、沒有樣板通道，驗證集上省掉的比例十個 epoch 都在 1 到 3%，根本爬不起來。</a:t>
-            </a:r>
-          </a:p>
-          <a:p>
-            <a:r>
-              <a:t>講稿 4. 訓練條件的限制都寫了：CPU 上訓、一個 seed、偵測器看過訓練圖。</a:t>
+              <a:t>講稿 1. 「複判站要不要 GPU」的答案：不用。一個候選 CPU 2.5 毫秒。</a:t>
+            </a:r>
+          </a:p>
+          <a:p>
+            <a:r>
+              <a:t>講稿 2. 反直覺的是 GPU 一次一個反而慢 2.9 倍，因為派工比算貴；批到 8 個才翻過來。</a:t>
+            </a:r>
+          </a:p>
+          <a:p>
+            <a:r>
+              <a:t>講稿 3. CPU 有個懸崖在 batch 16，所以批 8。</a:t>
+            </a:r>
+          </a:p>
+          <a:p>
+            <a:r>
+              <a:t>講稿 4. 這一頁還有一個教訓：ollama ps 不是 GPU 檢查，第一次量的數字是在旁邊有訓練跑的時候量的，作廢。</a:t>
             </a:r>
           </a:p>
           <a:p/>
@@ -3854,23 +3859,23 @@
           </a:p>
           <a:p>
             <a:r>
-              <a:t>Q：imgsz 為什麼是 640？</a:t>
-            </a:r>
-          </a:p>
-          <a:p>
-            <a:r>
-              <a:t>A：YOLO 的預設，目標中位數 17 px 在 640 下大約 1% 的畫幅。1280 是唯一沒試、可能有用的方向，文件裡寫著沒試。</a:t>
+              <a:t>Q：複判站需要 GPU 嗎？</a:t>
+            </a:r>
+          </a:p>
+          <a:p>
+            <a:r>
+              <a:t>A：不需要。CPU p50 2.50 ms 一個候選，43 MB 的 checkpoint；GPU 在 batch 1 反而慢 2.9 倍，batch 8 才追過。</a:t>
             </a:r>
           </a:p>
           <a:p/>
           <a:p>
             <a:r>
-              <a:t>Q：crop 複判器訓不起來，會不會是訓練有問題？</a:t>
-            </a:r>
-          </a:p>
-          <a:p>
-            <a:r>
-              <a:t>A：有可能，而且條目裡寫了限制：CPU 訓、一個 seed。但 train_loss 降到 0.03、val_accuracy 83%，模型有在學；它學不到的是在 ≤0.5% 漏網下把誤報排掉，那條線在 1–3%。</a:t>
+              <a:t>Q：你怎麼確定延遲數字沒被別的工作污染？</a:t>
+            </a:r>
+          </a:p>
+          <a:p>
+            <a:r>
+              <a:t>A：腳本量之前和之後都掃 ollama ps 和 process table，有 torch/ffmpeg 在跑就拒絕發布。這條規則是被一次作廢的量測換來的。</a:t>
             </a:r>
           </a:p>
         </p:txBody>
@@ -3940,28 +3945,28 @@
           <a:lstStyle/>
           <a:p>
             <a:r>
-              <a:t>白話：同一個相減、同一組門檻掃過去：二值圖上 recall 96% 且誤報穩定；照片上要 recall 就要付 860 個誤報一張。</a:t>
+              <a:t>白話：偵測器訓 56 分鐘找得到瑕疵；拿它的框訓同一個 ResNet、沒有樣板通道，曲線根本爬不起來。</a:t>
             </a:r>
           </a:p>
           <a:p/>
           <a:p>
             <a:r>
-              <a:t>講稿 1. 第 13 頁講 HRIPCB 第一關就壞，這裡是那三條曲線。</a:t>
-            </a:r>
-          </a:p>
-          <a:p>
-            <a:r>
-              <a:t>講稿 2. DeepPCB 的線是平的：門檻從 30 到 100 recall 都 95.7%，因為二值圖沒有灰階可以調，差異不是 0 就是 255。</a:t>
-            </a:r>
-          </a:p>
-          <a:p>
-            <a:r>
-              <a:t>講稿 3. HRIPCB 對齊的線陡降：門檻 10 還有 92%，到 60 只剩 14%。加擾動之後，門檻 10 每張 860 個誤報。</a:t>
-            </a:r>
-          </a:p>
-          <a:p>
-            <a:r>
-              <a:t>講稿 4. 沒有任何一點同時 recall 夠高、誤報夠低，這就是「任何設定都過不了」的意思。</a:t>
+              <a:t>講稿 1. 偵測器那兩個實驗的訓練細節在這頁。</a:t>
+            </a:r>
+          </a:p>
+          <a:p>
+            <a:r>
+              <a:t>講稿 2. YOLO26n 六十個 epoch、56 分鐘，找得到 92% 的瑕疵。</a:t>
+            </a:r>
+          </a:p>
+          <a:p>
+            <a:r>
+              <a:t>講稿 3. 重點是下面這條曲線：拿它的框訓同一個 ResNet、沒有樣板通道，驗證集上省掉的比例十個 epoch 都在 1 到 3%，根本爬不起來。</a:t>
+            </a:r>
+          </a:p>
+          <a:p>
+            <a:r>
+              <a:t>講稿 4. 訓練條件的限制都寫了：CPU 上訓、一個 seed、偵測器看過訓練圖。</a:t>
             </a:r>
           </a:p>
           <a:p/>
@@ -3972,23 +3977,23 @@
           </a:p>
           <a:p>
             <a:r>
-              <a:t>Q：HRIPCB 的 short 類 recall 為什麼特別低？</a:t>
-            </a:r>
-          </a:p>
-          <a:p>
-            <a:r>
-              <a:t>A：對齊版門檻 10 時 short 只有 60.3%，其他類 97% 以上。short 是兩條線之間細細的一道橋，在照片上灰階差最淡，相減最先丟掉它。</a:t>
+              <a:t>Q：imgsz 為什麼是 640？</a:t>
+            </a:r>
+          </a:p>
+          <a:p>
+            <a:r>
+              <a:t>A：YOLO 的預設，目標中位數 17 px 在 640 下大約 1% 的畫幅。1280 是唯一沒試、可能有用的方向，文件裡寫著沒試。</a:t>
             </a:r>
           </a:p>
           <a:p/>
           <a:p>
             <a:r>
-              <a:t>Q：DeepPCB 的門檻 60 是怎麼選的？</a:t>
-            </a:r>
-          </a:p>
-          <a:p>
-            <a:r>
-              <a:t>A：在二值圖上門檻 30 到 100 結果一樣（recall 95.7%、10.7 個誤報），所以 60 只是中間值。這也是為什麼它在照片上會失效：那個數字從來沒被真的灰階考驗過。</a:t>
+              <a:t>Q：crop 複判器訓不起來，會不會是訓練有問題？</a:t>
+            </a:r>
+          </a:p>
+          <a:p>
+            <a:r>
+              <a:t>A：有可能，而且條目裡寫了限制：CPU 訓、一個 seed。但 train_loss 降到 0.03、val_accuracy 83%，模型有在學；它學不到的是在 ≤0.5% 漏網下把誤報排掉，那條線在 1–3%。</a:t>
             </a:r>
           </a:p>
         </p:txBody>
@@ -4058,28 +4063,28 @@
           <a:lstStyle/>
           <a:p>
             <a:r>
-              <a:t>白話：一份訓練和量測、一份只給偵測器、一份只當考卷。</a:t>
+              <a:t>白話：同一個相減、同一組門檻掃過去：二值圖上 recall 96% 且誤報穩定；照片上要 recall 就要付 860 個誤報一張。</a:t>
             </a:r>
           </a:p>
           <a:p/>
           <a:p>
             <a:r>
-              <a:t>講稿 1. 面試官問「你的資料哪來的」，這一頁。</a:t>
-            </a:r>
-          </a:p>
-          <a:p>
-            <a:r>
-              <a:t>講稿 2. 三份，各做一件事。DeepPCB 是主線。PCB-AoI 只給偵測器，因為它沒有樣板。HRIPCB 只當考卷。</a:t>
-            </a:r>
-          </a:p>
-          <a:p>
-            <a:r>
-              <a:t>講稿 3. 產線的機台、批號那些是種出來的，而且種的時候放了對照組，讓工具有機會答錯。</a:t>
-            </a:r>
-          </a:p>
-          <a:p>
-            <a:r>
-              <a:t>講稿 4. 驗收標準是自己寫的，不是 IPC，因為那有版權。</a:t>
+              <a:t>講稿 1. 第 13 頁講 HRIPCB 第一關就壞，這裡是那三條曲線。</a:t>
+            </a:r>
+          </a:p>
+          <a:p>
+            <a:r>
+              <a:t>講稿 2. DeepPCB 的線是平的：門檻從 30 到 100 recall 都 95.7%，因為二值圖沒有灰階可以調，差異不是 0 就是 255。</a:t>
+            </a:r>
+          </a:p>
+          <a:p>
+            <a:r>
+              <a:t>講稿 3. HRIPCB 對齊的線陡降：門檻 10 還有 92%，到 60 只剩 14%。加擾動之後，門檻 10 每張 860 個誤報。</a:t>
+            </a:r>
+          </a:p>
+          <a:p>
+            <a:r>
+              <a:t>講稿 4. 沒有任何一點同時 recall 夠高、誤報夠低，這就是「任何設定都過不了」的意思。</a:t>
             </a:r>
           </a:p>
           <a:p/>
@@ -4090,23 +4095,23 @@
           </a:p>
           <a:p>
             <a:r>
-              <a:t>Q：模擬的產線資料會不會讓 /ask 的評測失真？</a:t>
-            </a:r>
-          </a:p>
-          <a:p>
-            <a:r>
-              <a:t>A：種的時候故意放了控制組：M22 和 M32 有真的效果，另外三台機有事件但沒效果，M11 承接鏡像。一個工具如果對「有沒有事件」而不是「有沒有影響」打分，會在控制組上露餡。</a:t>
+              <a:t>Q：HRIPCB 的 short 類 recall 為什麼特別低？</a:t>
+            </a:r>
+          </a:p>
+          <a:p>
+            <a:r>
+              <a:t>A：對齊版門檻 10 時 short 只有 60.3%，其他類 97% 以上。short 是兩條線之間細細的一道橋，在照片上灰階差最淡，相減最先丟掉它。</a:t>
             </a:r>
           </a:p>
           <a:p/>
           <a:p>
             <a:r>
-              <a:t>Q：HRIPCB 為什麼不合併到 DeepPCB 的類別表？</a:t>
-            </a:r>
-          </a:p>
-          <a:p>
-            <a:r>
-              <a:t>A：它的 missing_hole 不是 DeepPCB 的 pin-hole，而且沒有對應的工作指示。硬合併等於替一個沒有驗收標準的類別發明標準。</a:t>
+              <a:t>Q：DeepPCB 的門檻 60 是怎麼選的？</a:t>
+            </a:r>
+          </a:p>
+          <a:p>
+            <a:r>
+              <a:t>A：在二值圖上門檻 30 到 100 結果一樣（recall 95.7%、10.7 個誤報），所以 60 只是中間值。這也是為什麼它在照片上會失效：那個數字從來沒被真的灰階考驗過。</a:t>
             </a:r>
           </a:p>
         </p:txBody>
@@ -4132,6 +4137,124 @@
 </file>
 
 <file path=ppt/notesSlides/notesSlide37.xml><?xml version="1.0" encoding="utf-8"?>
+<p:notes xmlns:a="http://schemas.openxmlformats.org/drawingml/2006/main" xmlns:p="http://schemas.openxmlformats.org/presentationml/2006/main" xmlns:r="http://schemas.openxmlformats.org/officeDocument/2006/relationships">
+  <p:cSld>
+    <p:spTree>
+      <p:nvGrpSpPr>
+        <p:cNvPr id="1" name=""/>
+        <p:cNvGrpSpPr/>
+        <p:nvPr/>
+      </p:nvGrpSpPr>
+      <p:grpSpPr>
+        <a:xfrm>
+          <a:off x="0" y="0"/>
+          <a:ext cx="0" cy="0"/>
+          <a:chOff x="0" y="0"/>
+          <a:chExt cx="0" cy="0"/>
+        </a:xfrm>
+      </p:grpSpPr>
+      <p:sp>
+        <p:nvSpPr>
+          <p:cNvPr id="2" name="Slide Image Placeholder 1"/>
+          <p:cNvSpPr>
+            <a:spLocks noGrp="1"/>
+          </p:cNvSpPr>
+          <p:nvPr>
+            <p:ph type="sldImg" idx="2"/>
+          </p:nvPr>
+        </p:nvSpPr>
+        <p:spPr/>
+      </p:sp>
+      <p:sp>
+        <p:nvSpPr>
+          <p:cNvPr id="3" name="Notes Placeholder 2"/>
+          <p:cNvSpPr>
+            <a:spLocks noGrp="1"/>
+          </p:cNvSpPr>
+          <p:nvPr>
+            <p:ph type="body" idx="3" sz="quarter"/>
+          </p:nvPr>
+        </p:nvSpPr>
+        <p:spPr/>
+        <p:txBody>
+          <a:bodyPr/>
+          <a:lstStyle/>
+          <a:p>
+            <a:r>
+              <a:t>白話：一份訓練和量測、一份只給偵測器、一份只當考卷。</a:t>
+            </a:r>
+          </a:p>
+          <a:p/>
+          <a:p>
+            <a:r>
+              <a:t>講稿 1. 面試官問「你的資料哪來的」，這一頁。</a:t>
+            </a:r>
+          </a:p>
+          <a:p>
+            <a:r>
+              <a:t>講稿 2. 三份，各做一件事。DeepPCB 是主線。PCB-AoI 只給偵測器，因為它沒有樣板。HRIPCB 只當考卷。</a:t>
+            </a:r>
+          </a:p>
+          <a:p>
+            <a:r>
+              <a:t>講稿 3. 產線的機台、批號那些是種出來的，而且種的時候放了對照組，讓工具有機會答錯。</a:t>
+            </a:r>
+          </a:p>
+          <a:p>
+            <a:r>
+              <a:t>講稿 4. 驗收標準是自己寫的，不是 IPC，因為那有版權。</a:t>
+            </a:r>
+          </a:p>
+          <a:p/>
+          <a:p>
+            <a:r>
+              <a:t>面試官會問：</a:t>
+            </a:r>
+          </a:p>
+          <a:p>
+            <a:r>
+              <a:t>Q：模擬的產線資料會不會讓 /ask 的評測失真？</a:t>
+            </a:r>
+          </a:p>
+          <a:p>
+            <a:r>
+              <a:t>A：種的時候故意放了控制組：M22 和 M32 有真的效果，另外三台機有事件但沒效果，M11 承接鏡像。一個工具如果對「有沒有事件」而不是「有沒有影響」打分，會在控制組上露餡。</a:t>
+            </a:r>
+          </a:p>
+          <a:p/>
+          <a:p>
+            <a:r>
+              <a:t>Q：HRIPCB 為什麼不合併到 DeepPCB 的類別表？</a:t>
+            </a:r>
+          </a:p>
+          <a:p>
+            <a:r>
+              <a:t>A：它的 missing_hole 不是 DeepPCB 的 pin-hole，而且沒有對應的工作指示。硬合併等於替一個沒有驗收標準的類別發明標準。</a:t>
+            </a:r>
+          </a:p>
+        </p:txBody>
+      </p:sp>
+      <p:sp>
+        <p:nvSpPr>
+          <p:cNvPr id="4" name="Slide Number Placeholder 3"/>
+          <p:cNvSpPr>
+            <a:spLocks noGrp="1"/>
+          </p:cNvSpPr>
+          <p:nvPr>
+            <p:ph type="sldNum" idx="5" sz="quarter"/>
+          </p:nvPr>
+        </p:nvSpPr>
+        <p:spPr/>
+      </p:sp>
+    </p:spTree>
+  </p:cSld>
+  <p:clrMapOvr>
+    <a:masterClrMapping/>
+  </p:clrMapOvr>
+</p:notes>
+</file>
+
+<file path=ppt/notesSlides/notesSlide38.xml><?xml version="1.0" encoding="utf-8"?>
 <p:notes xmlns:a="http://schemas.openxmlformats.org/drawingml/2006/main" xmlns:p="http://schemas.openxmlformats.org/presentationml/2006/main" xmlns:r="http://schemas.openxmlformats.org/officeDocument/2006/relationships">
   <p:cSld>
     <p:spTree>
@@ -8186,7 +8309,7 @@
                 </a:solidFill>
                 <a:latin typeface="IBM Plex Mono"/>
               </a:rPr>
-              <a:t>1 / 37</a:t>
+              <a:t>1 / 38</a:t>
             </a:r>
           </a:p>
         </p:txBody>
@@ -9434,7 +9557,7 @@
                 </a:solidFill>
                 <a:latin typeface="IBM Plex Mono"/>
               </a:rPr>
-              <a:t>10 / 37</a:t>
+              <a:t>10 / 38</a:t>
             </a:r>
           </a:p>
         </p:txBody>
@@ -10052,7 +10175,7 @@
                 </a:solidFill>
                 <a:latin typeface="IBM Plex Mono"/>
               </a:rPr>
-              <a:t>★ 主線 4/9 · 11 / 37</a:t>
+              <a:t>★ 主線 4/9 · 11 / 38</a:t>
             </a:r>
           </a:p>
         </p:txBody>
@@ -11471,7 +11594,7 @@
                 </a:solidFill>
                 <a:latin typeface="IBM Plex Mono"/>
               </a:rPr>
-              <a:t>12 / 37</a:t>
+              <a:t>12 / 38</a:t>
             </a:r>
           </a:p>
         </p:txBody>
@@ -12626,7 +12749,7 @@
                 </a:solidFill>
                 <a:latin typeface="IBM Plex Mono"/>
               </a:rPr>
-              <a:t>13 / 37</a:t>
+              <a:t>13 / 38</a:t>
             </a:r>
           </a:p>
         </p:txBody>
@@ -13781,7 +13904,7 @@
                 </a:solidFill>
                 <a:latin typeface="IBM Plex Mono"/>
               </a:rPr>
-              <a:t>14 / 37</a:t>
+              <a:t>14 / 38</a:t>
             </a:r>
           </a:p>
         </p:txBody>
@@ -14930,7 +15053,7 @@
                 </a:solidFill>
                 <a:latin typeface="IBM Plex Mono"/>
               </a:rPr>
-              <a:t>15 / 37</a:t>
+              <a:t>15 / 38</a:t>
             </a:r>
           </a:p>
         </p:txBody>
@@ -16322,7 +16445,7 @@
                 </a:solidFill>
                 <a:latin typeface="IBM Plex Mono"/>
               </a:rPr>
-              <a:t>★ 主線 8/9 · 16 / 37</a:t>
+              <a:t>★ 主線 8/9 · 16 / 38</a:t>
             </a:r>
           </a:p>
         </p:txBody>
@@ -17516,7 +17639,7 @@
                 </a:solidFill>
                 <a:latin typeface="IBM Plex Mono"/>
               </a:rPr>
-              <a:t>★ 主線 6/9 · 17 / 37</a:t>
+              <a:t>★ 主線 6/9 · 17 / 38</a:t>
             </a:r>
           </a:p>
         </p:txBody>
@@ -18701,7 +18824,7 @@
                 </a:solidFill>
                 <a:latin typeface="IBM Plex Mono"/>
               </a:rPr>
-              <a:t>★ 主線 7/9 · 18 / 37</a:t>
+              <a:t>★ 主線 7/9 · 18 / 38</a:t>
             </a:r>
           </a:p>
         </p:txBody>
@@ -20090,7 +20213,7 @@
                 </a:solidFill>
                 <a:latin typeface="IBM Plex Mono"/>
               </a:rPr>
-              <a:t>19 / 37</a:t>
+              <a:t>19 / 38</a:t>
             </a:r>
           </a:p>
         </p:txBody>
@@ -20853,7 +20976,7 @@
                 </a:solidFill>
                 <a:latin typeface="IBM Plex Mono"/>
               </a:rPr>
-              <a:t>★ 主線 1/9 · 2 / 37</a:t>
+              <a:t>★ 主線 1/9 · 2 / 38</a:t>
             </a:r>
           </a:p>
         </p:txBody>
@@ -21059,7 +21182,7 @@
                 </a:solidFill>
                 <a:latin typeface="IBM Plex Mono"/>
               </a:rPr>
-              <a:t>20 / 37</a:t>
+              <a:t>20 / 38</a:t>
             </a:r>
           </a:p>
         </p:txBody>
@@ -21265,7 +21388,7 @@
                 </a:solidFill>
                 <a:latin typeface="IBM Plex Mono"/>
               </a:rPr>
-              <a:t>21 / 37</a:t>
+              <a:t>21 / 38</a:t>
             </a:r>
           </a:p>
         </p:txBody>
@@ -22312,7 +22435,7 @@
                 </a:solidFill>
                 <a:latin typeface="IBM Plex Mono"/>
               </a:rPr>
-              <a:t>22 / 37</a:t>
+              <a:t>22 / 38</a:t>
             </a:r>
           </a:p>
         </p:txBody>
@@ -22691,7 +22814,7 @@
                 </a:solidFill>
                 <a:latin typeface="IBM Plex Mono"/>
               </a:rPr>
-              <a:t>23 / 37</a:t>
+              <a:t>23 / 38</a:t>
             </a:r>
           </a:p>
         </p:txBody>
@@ -22897,7 +23020,7 @@
                 </a:solidFill>
                 <a:latin typeface="IBM Plex Mono"/>
               </a:rPr>
-              <a:t>24 / 37</a:t>
+              <a:t>24 / 38</a:t>
             </a:r>
           </a:p>
         </p:txBody>
@@ -24232,7 +24355,7 @@
                 </a:solidFill>
                 <a:latin typeface="IBM Plex Mono"/>
               </a:rPr>
-              <a:t>25 / 37</a:t>
+              <a:t>25 / 38</a:t>
             </a:r>
           </a:p>
         </p:txBody>
@@ -25459,7 +25582,7 @@
                 </a:solidFill>
                 <a:latin typeface="IBM Plex Mono"/>
               </a:rPr>
-              <a:t>26 / 37</a:t>
+              <a:t>26 / 38</a:t>
             </a:r>
           </a:p>
         </p:txBody>
@@ -26689,7 +26812,7 @@
                 </a:solidFill>
                 <a:latin typeface="IBM Plex Mono"/>
               </a:rPr>
-              <a:t>27 / 37</a:t>
+              <a:t>27 / 38</a:t>
             </a:r>
           </a:p>
         </p:txBody>
@@ -26748,27 +26871,51 @@
               </a:lnSpc>
             </a:pPr>
             <a:r>
-              <a:rPr sz="2400" b="1">
-                <a:solidFill>
-                  <a:srgbClr val="E8E6E1"/>
-                </a:solidFill>
-                <a:latin typeface="Noto Sans TC"/>
-              </a:rPr>
-              <a:t>文件也要測：README 開頭那個數字</a:t>
-            </a:r>
-          </a:p>
-        </p:txBody>
-      </p:sp>
-      <p:sp>
-        <p:nvSpPr>
-          <p:cNvPr id="3" name="TextBox 2"/>
-          <p:cNvSpPr txBox="1"/>
-          <p:nvPr/>
-        </p:nvSpPr>
-        <p:spPr>
-          <a:xfrm>
-            <a:off x="457200" y="868680"/>
-            <a:ext cx="11247120" cy="411480"/>
+              <a:rPr sz="2800" b="1">
+                <a:solidFill>
+                  <a:srgbClr val="E8E6E1"/>
+                </a:solidFill>
+                <a:latin typeface="Noto Sans TC"/>
+              </a:rPr>
+              <a:t>規劃器的射程：以前 / 現在 / 還做不到</a:t>
+            </a:r>
+          </a:p>
+        </p:txBody>
+      </p:sp>
+      <p:pic>
+        <p:nvPicPr>
+          <p:cNvPr id="3" name="Picture 2" descr="planner_reach.png"/>
+          <p:cNvPicPr>
+            <a:picLocks noChangeAspect="1"/>
+          </p:cNvPicPr>
+          <p:nvPr/>
+        </p:nvPicPr>
+        <p:blipFill>
+          <a:blip r:embed="rId2"/>
+          <a:stretch>
+            <a:fillRect/>
+          </a:stretch>
+        </p:blipFill>
+        <p:spPr>
+          <a:xfrm>
+            <a:off x="380847" y="1005840"/>
+            <a:ext cx="11430000" cy="4782553"/>
+          </a:xfrm>
+          <a:prstGeom prst="rect">
+            <a:avLst/>
+          </a:prstGeom>
+        </p:spPr>
+      </p:pic>
+      <p:sp>
+        <p:nvSpPr>
+          <p:cNvPr id="4" name="TextBox 3"/>
+          <p:cNvSpPr txBox="1"/>
+          <p:nvPr/>
+        </p:nvSpPr>
+        <p:spPr>
+          <a:xfrm>
+            <a:off x="548640" y="5897880"/>
+            <a:ext cx="11155680" cy="365760"/>
           </a:xfrm>
           <a:prstGeom prst="rect">
             <a:avLst/>
@@ -26787,1014 +26934,20 @@
               </a:lnSpc>
             </a:pPr>
             <a:r>
-              <a:rPr sz="1500" b="0">
+              <a:rPr sz="950" b="0">
                 <a:solidFill>
                   <a:srgbClr val="9AA0A6"/>
                 </a:solidFill>
-                <a:latin typeface="Noto Sans TC"/>
-              </a:rPr>
-              <a:t>是一份「commit uncommitted」的表</a:t>
-            </a:r>
-          </a:p>
-        </p:txBody>
-      </p:sp>
-      <p:sp>
-        <p:nvSpPr>
-          <p:cNvPr id="4" name="Rectangle 3"/>
-          <p:cNvSpPr/>
-          <p:nvPr/>
-        </p:nvSpPr>
-        <p:spPr>
-          <a:xfrm>
-            <a:off x="457200" y="1325880"/>
-            <a:ext cx="3606698" cy="868680"/>
-          </a:xfrm>
-          <a:prstGeom prst="rect">
-            <a:avLst/>
-          </a:prstGeom>
-          <a:solidFill>
-            <a:srgbClr val="1E2125"/>
-          </a:solidFill>
-          <a:ln>
-            <a:solidFill>
-              <a:srgbClr val="33383D"/>
-            </a:solidFill>
-          </a:ln>
-          <a:effectLst/>
-        </p:spPr>
-        <p:style>
-          <a:lnRef idx="1">
-            <a:schemeClr val="accent1"/>
-          </a:lnRef>
-          <a:fillRef idx="3">
-            <a:schemeClr val="accent1"/>
-          </a:fillRef>
-          <a:effectRef idx="2">
-            <a:schemeClr val="accent1"/>
-          </a:effectRef>
-          <a:fontRef idx="minor">
-            <a:schemeClr val="lt1"/>
-          </a:fontRef>
-        </p:style>
-        <p:txBody>
-          <a:bodyPr rtlCol="0" anchor="ctr"/>
-          <a:lstStyle/>
-          <a:p>
-            <a:pPr algn="ctr"/>
+                <a:latin typeface="IBM Plex Mono"/>
+              </a:rPr>
+              <a:t>同一種問句，三個階段。計畫是在任何查詢跑之前一次寫完的。</a:t>
+            </a:r>
           </a:p>
         </p:txBody>
       </p:sp>
       <p:sp>
         <p:nvSpPr>
           <p:cNvPr id="5" name="TextBox 4"/>
-          <p:cNvSpPr txBox="1"/>
-          <p:nvPr/>
-        </p:nvSpPr>
-        <p:spPr>
-          <a:xfrm>
-            <a:off x="640080" y="1399032"/>
-            <a:ext cx="3240938" cy="457200"/>
-          </a:xfrm>
-          <a:prstGeom prst="rect">
-            <a:avLst/>
-          </a:prstGeom>
-          <a:noFill/>
-        </p:spPr>
-        <p:txBody>
-          <a:bodyPr wrap="square">
-            <a:spAutoFit/>
-          </a:bodyPr>
-          <a:lstStyle/>
-          <a:p>
-            <a:pPr>
-              <a:lnSpc>
-                <a:spcPct val="115000"/>
-              </a:lnSpc>
-            </a:pPr>
-            <a:r>
-              <a:rPr sz="1800" b="1">
-                <a:solidFill>
-                  <a:srgbClr val="6FC7CF"/>
-                </a:solidFill>
-                <a:latin typeface="IBM Plex Mono"/>
-              </a:rPr>
-              <a:t>56.2% vs 52.8%</a:t>
-            </a:r>
-          </a:p>
-        </p:txBody>
-      </p:sp>
-      <p:sp>
-        <p:nvSpPr>
-          <p:cNvPr id="6" name="TextBox 5"/>
-          <p:cNvSpPr txBox="1"/>
-          <p:nvPr/>
-        </p:nvSpPr>
-        <p:spPr>
-          <a:xfrm>
-            <a:off x="640080" y="1828800"/>
-            <a:ext cx="3240938" cy="320040"/>
-          </a:xfrm>
-          <a:prstGeom prst="rect">
-            <a:avLst/>
-          </a:prstGeom>
-          <a:noFill/>
-        </p:spPr>
-        <p:txBody>
-          <a:bodyPr wrap="square">
-            <a:spAutoFit/>
-          </a:bodyPr>
-          <a:lstStyle/>
-          <a:p>
-            <a:pPr>
-              <a:lnSpc>
-                <a:spcPct val="115000"/>
-              </a:lnSpc>
-            </a:pPr>
-            <a:r>
-              <a:rPr sz="1050" b="0">
-                <a:solidFill>
-                  <a:srgbClr val="9AA0A6"/>
-                </a:solidFill>
-                <a:latin typeface="Noto Sans TC"/>
-              </a:rPr>
-              <a:t>README 第一行 vs 實際</a:t>
-            </a:r>
-          </a:p>
-        </p:txBody>
-      </p:sp>
-      <p:sp>
-        <p:nvSpPr>
-          <p:cNvPr id="7" name="Rectangle 6"/>
-          <p:cNvSpPr/>
-          <p:nvPr/>
-        </p:nvSpPr>
-        <p:spPr>
-          <a:xfrm>
-            <a:off x="4292498" y="1325880"/>
-            <a:ext cx="3606698" cy="868680"/>
-          </a:xfrm>
-          <a:prstGeom prst="rect">
-            <a:avLst/>
-          </a:prstGeom>
-          <a:solidFill>
-            <a:srgbClr val="1E2125"/>
-          </a:solidFill>
-          <a:ln>
-            <a:solidFill>
-              <a:srgbClr val="33383D"/>
-            </a:solidFill>
-          </a:ln>
-          <a:effectLst/>
-        </p:spPr>
-        <p:style>
-          <a:lnRef idx="1">
-            <a:schemeClr val="accent1"/>
-          </a:lnRef>
-          <a:fillRef idx="3">
-            <a:schemeClr val="accent1"/>
-          </a:fillRef>
-          <a:effectRef idx="2">
-            <a:schemeClr val="accent1"/>
-          </a:effectRef>
-          <a:fontRef idx="minor">
-            <a:schemeClr val="lt1"/>
-          </a:fontRef>
-        </p:style>
-        <p:txBody>
-          <a:bodyPr rtlCol="0" anchor="ctr"/>
-          <a:lstStyle/>
-          <a:p>
-            <a:pPr algn="ctr"/>
-          </a:p>
-        </p:txBody>
-      </p:sp>
-      <p:sp>
-        <p:nvSpPr>
-          <p:cNvPr id="8" name="TextBox 7"/>
-          <p:cNvSpPr txBox="1"/>
-          <p:nvPr/>
-        </p:nvSpPr>
-        <p:spPr>
-          <a:xfrm>
-            <a:off x="4475378" y="1399032"/>
-            <a:ext cx="3240938" cy="457200"/>
-          </a:xfrm>
-          <a:prstGeom prst="rect">
-            <a:avLst/>
-          </a:prstGeom>
-          <a:noFill/>
-        </p:spPr>
-        <p:txBody>
-          <a:bodyPr wrap="square">
-            <a:spAutoFit/>
-          </a:bodyPr>
-          <a:lstStyle/>
-          <a:p>
-            <a:pPr>
-              <a:lnSpc>
-                <a:spcPct val="115000"/>
-              </a:lnSpc>
-            </a:pPr>
-            <a:r>
-              <a:rPr sz="1500" b="1">
-                <a:solidFill>
-                  <a:srgbClr val="6FC7CF"/>
-                </a:solidFill>
-                <a:latin typeface="IBM Plex Mono"/>
-              </a:rPr>
-              <a:t>commit uncommitted</a:t>
-            </a:r>
-          </a:p>
-        </p:txBody>
-      </p:sp>
-      <p:sp>
-        <p:nvSpPr>
-          <p:cNvPr id="9" name="TextBox 8"/>
-          <p:cNvSpPr txBox="1"/>
-          <p:nvPr/>
-        </p:nvSpPr>
-        <p:spPr>
-          <a:xfrm>
-            <a:off x="4475378" y="1828800"/>
-            <a:ext cx="3240938" cy="320040"/>
-          </a:xfrm>
-          <a:prstGeom prst="rect">
-            <a:avLst/>
-          </a:prstGeom>
-          <a:noFill/>
-        </p:spPr>
-        <p:txBody>
-          <a:bodyPr wrap="square">
-            <a:spAutoFit/>
-          </a:bodyPr>
-          <a:lstStyle/>
-          <a:p>
-            <a:pPr>
-              <a:lnSpc>
-                <a:spcPct val="115000"/>
-              </a:lnSpc>
-            </a:pPr>
-            <a:r>
-              <a:rPr sz="1050" b="0">
-                <a:solidFill>
-                  <a:srgbClr val="9AA0A6"/>
-                </a:solidFill>
-                <a:latin typeface="Noto Sans TC"/>
-              </a:rPr>
-              <a:t>那張表的來源</a:t>
-            </a:r>
-          </a:p>
-        </p:txBody>
-      </p:sp>
-      <p:sp>
-        <p:nvSpPr>
-          <p:cNvPr id="10" name="Rectangle 9"/>
-          <p:cNvSpPr/>
-          <p:nvPr/>
-        </p:nvSpPr>
-        <p:spPr>
-          <a:xfrm>
-            <a:off x="8127796" y="1325880"/>
-            <a:ext cx="3606698" cy="868680"/>
-          </a:xfrm>
-          <a:prstGeom prst="rect">
-            <a:avLst/>
-          </a:prstGeom>
-          <a:solidFill>
-            <a:srgbClr val="1E2125"/>
-          </a:solidFill>
-          <a:ln>
-            <a:solidFill>
-              <a:srgbClr val="33383D"/>
-            </a:solidFill>
-          </a:ln>
-          <a:effectLst/>
-        </p:spPr>
-        <p:style>
-          <a:lnRef idx="1">
-            <a:schemeClr val="accent1"/>
-          </a:lnRef>
-          <a:fillRef idx="3">
-            <a:schemeClr val="accent1"/>
-          </a:fillRef>
-          <a:effectRef idx="2">
-            <a:schemeClr val="accent1"/>
-          </a:effectRef>
-          <a:fontRef idx="minor">
-            <a:schemeClr val="lt1"/>
-          </a:fontRef>
-        </p:style>
-        <p:txBody>
-          <a:bodyPr rtlCol="0" anchor="ctr"/>
-          <a:lstStyle/>
-          <a:p>
-            <a:pPr algn="ctr"/>
-          </a:p>
-        </p:txBody>
-      </p:sp>
-      <p:sp>
-        <p:nvSpPr>
-          <p:cNvPr id="11" name="TextBox 10"/>
-          <p:cNvSpPr txBox="1"/>
-          <p:nvPr/>
-        </p:nvSpPr>
-        <p:spPr>
-          <a:xfrm>
-            <a:off x="8310676" y="1399032"/>
-            <a:ext cx="3240938" cy="457200"/>
-          </a:xfrm>
-          <a:prstGeom prst="rect">
-            <a:avLst/>
-          </a:prstGeom>
-          <a:noFill/>
-        </p:spPr>
-        <p:txBody>
-          <a:bodyPr wrap="square">
-            <a:spAutoFit/>
-          </a:bodyPr>
-          <a:lstStyle/>
-          <a:p>
-            <a:pPr>
-              <a:lnSpc>
-                <a:spcPct val="115000"/>
-              </a:lnSpc>
-            </a:pPr>
-            <a:r>
-              <a:rPr sz="2200" b="1">
-                <a:solidFill>
-                  <a:srgbClr val="6FC7CF"/>
-                </a:solidFill>
-                <a:latin typeface="IBM Plex Mono"/>
-              </a:rPr>
-              <a:t>19</a:t>
-            </a:r>
-          </a:p>
-        </p:txBody>
-      </p:sp>
-      <p:sp>
-        <p:nvSpPr>
-          <p:cNvPr id="12" name="TextBox 11"/>
-          <p:cNvSpPr txBox="1"/>
-          <p:nvPr/>
-        </p:nvSpPr>
-        <p:spPr>
-          <a:xfrm>
-            <a:off x="8310676" y="1828800"/>
-            <a:ext cx="3240938" cy="320040"/>
-          </a:xfrm>
-          <a:prstGeom prst="rect">
-            <a:avLst/>
-          </a:prstGeom>
-          <a:noFill/>
-        </p:spPr>
-        <p:txBody>
-          <a:bodyPr wrap="square">
-            <a:spAutoFit/>
-          </a:bodyPr>
-          <a:lstStyle/>
-          <a:p>
-            <a:pPr>
-              <a:lnSpc>
-                <a:spcPct val="115000"/>
-              </a:lnSpc>
-            </a:pPr>
-            <a:r>
-              <a:rPr sz="1050" b="0">
-                <a:solidFill>
-                  <a:srgbClr val="9AA0A6"/>
-                </a:solidFill>
-                <a:latin typeface="Noto Sans TC"/>
-              </a:rPr>
-              <a:t>第 19 條 invariant</a:t>
-            </a:r>
-          </a:p>
-        </p:txBody>
-      </p:sp>
-      <p:sp>
-        <p:nvSpPr>
-          <p:cNvPr id="13" name="TextBox 12"/>
-          <p:cNvSpPr txBox="1"/>
-          <p:nvPr/>
-        </p:nvSpPr>
-        <p:spPr>
-          <a:xfrm>
-            <a:off x="457200" y="2359152"/>
-            <a:ext cx="1325880" cy="813816"/>
-          </a:xfrm>
-          <a:prstGeom prst="rect">
-            <a:avLst/>
-          </a:prstGeom>
-          <a:noFill/>
-        </p:spPr>
-        <p:txBody>
-          <a:bodyPr wrap="square">
-            <a:spAutoFit/>
-          </a:bodyPr>
-          <a:lstStyle/>
-          <a:p>
-            <a:pPr>
-              <a:lnSpc>
-                <a:spcPct val="115000"/>
-              </a:lnSpc>
-            </a:pPr>
-            <a:r>
-              <a:rPr sz="1300" b="1">
-                <a:solidFill>
-                  <a:srgbClr val="6FC7CF"/>
-                </a:solidFill>
-                <a:latin typeface="Noto Sans TC"/>
-              </a:rPr>
-              <a:t>為什麼做</a:t>
-            </a:r>
-          </a:p>
-        </p:txBody>
-      </p:sp>
-      <p:sp>
-        <p:nvSpPr>
-          <p:cNvPr id="14" name="TextBox 13"/>
-          <p:cNvSpPr txBox="1"/>
-          <p:nvPr/>
-        </p:nvSpPr>
-        <p:spPr>
-          <a:xfrm>
-            <a:off x="1828800" y="2359152"/>
-            <a:ext cx="9875520" cy="813816"/>
-          </a:xfrm>
-          <a:prstGeom prst="rect">
-            <a:avLst/>
-          </a:prstGeom>
-          <a:noFill/>
-        </p:spPr>
-        <p:txBody>
-          <a:bodyPr wrap="square">
-            <a:spAutoFit/>
-          </a:bodyPr>
-          <a:lstStyle/>
-          <a:p>
-            <a:pPr>
-              <a:lnSpc>
-                <a:spcPct val="112000"/>
-              </a:lnSpc>
-            </a:pPr>
-            <a:r>
-              <a:rPr sz="1300" b="0">
-                <a:solidFill>
-                  <a:srgbClr val="E8E6E1"/>
-                </a:solidFill>
-                <a:latin typeface="Noto Sans TC"/>
-              </a:rPr>
-              <a:t>當時要回答的問題是：benchmarks.md 只增不改、最新的在最後，那引用它的文件有沒有跟上？我把 README、CLAUDE.md、architecture.md 裡每個頭條數字對回 benchmarks 的 run；對不上就算文件錯。</a:t>
-            </a:r>
-          </a:p>
-        </p:txBody>
-      </p:sp>
-      <p:sp>
-        <p:nvSpPr>
-          <p:cNvPr id="15" name="TextBox 14"/>
-          <p:cNvSpPr txBox="1"/>
-          <p:nvPr/>
-        </p:nvSpPr>
-        <p:spPr>
-          <a:xfrm>
-            <a:off x="457200" y="3300984"/>
-            <a:ext cx="1325880" cy="566928"/>
-          </a:xfrm>
-          <a:prstGeom prst="rect">
-            <a:avLst/>
-          </a:prstGeom>
-          <a:noFill/>
-        </p:spPr>
-        <p:txBody>
-          <a:bodyPr wrap="square">
-            <a:spAutoFit/>
-          </a:bodyPr>
-          <a:lstStyle/>
-          <a:p>
-            <a:pPr>
-              <a:lnSpc>
-                <a:spcPct val="115000"/>
-              </a:lnSpc>
-            </a:pPr>
-            <a:r>
-              <a:rPr sz="1300" b="1">
-                <a:solidFill>
-                  <a:srgbClr val="6FC7CF"/>
-                </a:solidFill>
-                <a:latin typeface="Noto Sans TC"/>
-              </a:rPr>
-              <a:t>怎麼設計</a:t>
-            </a:r>
-          </a:p>
-        </p:txBody>
-      </p:sp>
-      <p:sp>
-        <p:nvSpPr>
-          <p:cNvPr id="16" name="TextBox 15"/>
-          <p:cNvSpPr txBox="1"/>
-          <p:nvPr/>
-        </p:nvSpPr>
-        <p:spPr>
-          <a:xfrm>
-            <a:off x="1828800" y="3300984"/>
-            <a:ext cx="9875520" cy="566928"/>
-          </a:xfrm>
-          <a:prstGeom prst="rect">
-            <a:avLst/>
-          </a:prstGeom>
-          <a:noFill/>
-        </p:spPr>
-        <p:txBody>
-          <a:bodyPr wrap="square">
-            <a:spAutoFit/>
-          </a:bodyPr>
-          <a:lstStyle/>
-          <a:p>
-            <a:pPr>
-              <a:lnSpc>
-                <a:spcPct val="112000"/>
-              </a:lnSpc>
-            </a:pPr>
-            <a:r>
-              <a:rPr sz="1300" b="0">
-                <a:solidFill>
-                  <a:srgbClr val="E8E6E1"/>
-                </a:solidFill>
-                <a:latin typeface="Noto Sans TC"/>
-              </a:rPr>
-              <a:t>test_published_figures.py：從 benchmarks.md 抓每次 run 的 split（候選數／缺陷數／誤報數），四份文件裡出現的數字必須屬於某個 run，而且舊的數字只能出現在標了日期的段落裡。</a:t>
-            </a:r>
-          </a:p>
-        </p:txBody>
-      </p:sp>
-      <p:sp>
-        <p:nvSpPr>
-          <p:cNvPr id="17" name="TextBox 16"/>
-          <p:cNvSpPr txBox="1"/>
-          <p:nvPr/>
-        </p:nvSpPr>
-        <p:spPr>
-          <a:xfrm>
-            <a:off x="457200" y="3995928"/>
-            <a:ext cx="1325880" cy="1060704"/>
-          </a:xfrm>
-          <a:prstGeom prst="rect">
-            <a:avLst/>
-          </a:prstGeom>
-          <a:noFill/>
-        </p:spPr>
-        <p:txBody>
-          <a:bodyPr wrap="square">
-            <a:spAutoFit/>
-          </a:bodyPr>
-          <a:lstStyle/>
-          <a:p>
-            <a:pPr>
-              <a:lnSpc>
-                <a:spcPct val="115000"/>
-              </a:lnSpc>
-            </a:pPr>
-            <a:r>
-              <a:rPr sz="1300" b="1">
-                <a:solidFill>
-                  <a:srgbClr val="6FC7CF"/>
-                </a:solidFill>
-                <a:latin typeface="Noto Sans TC"/>
-              </a:rPr>
-              <a:t>量到什麼</a:t>
-            </a:r>
-          </a:p>
-        </p:txBody>
-      </p:sp>
-      <p:sp>
-        <p:nvSpPr>
-          <p:cNvPr id="18" name="TextBox 17"/>
-          <p:cNvSpPr txBox="1"/>
-          <p:nvPr/>
-        </p:nvSpPr>
-        <p:spPr>
-          <a:xfrm>
-            <a:off x="1828800" y="3995928"/>
-            <a:ext cx="9875520" cy="1060704"/>
-          </a:xfrm>
-          <a:prstGeom prst="rect">
-            <a:avLst/>
-          </a:prstGeom>
-          <a:noFill/>
-        </p:spPr>
-        <p:txBody>
-          <a:bodyPr wrap="square">
-            <a:spAutoFit/>
-          </a:bodyPr>
-          <a:lstStyle/>
-          <a:p>
-            <a:pPr>
-              <a:lnSpc>
-                <a:spcPct val="112000"/>
-              </a:lnSpc>
-            </a:pPr>
-            <a:r>
-              <a:rPr sz="1300" b="0">
-                <a:solidFill>
-                  <a:srgbClr val="E8E6E1"/>
-                </a:solidFill>
-                <a:latin typeface="Noto Sans TC"/>
-              </a:rPr>
-              <a:t>README 開頭寫 </a:t>
-            </a:r>
-            <a:r>
-              <a:rPr sz="1300" b="1">
-                <a:solidFill>
-                  <a:srgbClr val="6FC7CF"/>
-                </a:solidFill>
-                <a:latin typeface="Noto Sans TC"/>
-              </a:rPr>
-              <a:t>56.2%</a:t>
-            </a:r>
-            <a:r>
-              <a:rPr sz="1300" b="0">
-                <a:solidFill>
-                  <a:srgbClr val="E8E6E1"/>
-                </a:solidFill>
-                <a:latin typeface="Noto Sans TC"/>
-              </a:rPr>
-              <a:t> over </a:t>
-            </a:r>
-            <a:r>
-              <a:rPr sz="1300" b="1">
-                <a:solidFill>
-                  <a:srgbClr val="6FC7CF"/>
-                </a:solidFill>
-                <a:latin typeface="Noto Sans TC"/>
-              </a:rPr>
-              <a:t>8,143</a:t>
-            </a:r>
-            <a:r>
-              <a:rPr sz="1300" b="0">
-                <a:solidFill>
-                  <a:srgbClr val="E8E6E1"/>
-                </a:solidFill>
-                <a:latin typeface="Noto Sans TC"/>
-              </a:rPr>
-              <a:t>——那張表是 </a:t>
-            </a:r>
-            <a:r>
-              <a:rPr sz="1300" b="1">
-                <a:solidFill>
-                  <a:srgbClr val="6FC7CF"/>
-                </a:solidFill>
-                <a:latin typeface="Noto Sans TC"/>
-              </a:rPr>
-              <a:t>08-22</a:t>
-            </a:r>
-            <a:r>
-              <a:rPr sz="1300" b="0">
-                <a:solidFill>
-                  <a:srgbClr val="E8E6E1"/>
-                </a:solidFill>
-                <a:latin typeface="Noto Sans TC"/>
-              </a:rPr>
-              <a:t> 一個 header 寫著 commit uncommitted 的 tree 產的，原則上不可重現；實際 checkpoint 是 </a:t>
-            </a:r>
-            <a:r>
-              <a:rPr sz="1300" b="1">
-                <a:solidFill>
-                  <a:srgbClr val="6FC7CF"/>
-                </a:solidFill>
-                <a:latin typeface="Noto Sans TC"/>
-              </a:rPr>
-              <a:t>52.8%</a:t>
-            </a:r>
-            <a:r>
-              <a:rPr sz="1300" b="0">
-                <a:solidFill>
-                  <a:srgbClr val="E8E6E1"/>
-                </a:solidFill>
-                <a:latin typeface="Noto Sans TC"/>
-              </a:rPr>
-              <a:t> over </a:t>
-            </a:r>
-            <a:r>
-              <a:rPr sz="1300" b="1">
-                <a:solidFill>
-                  <a:srgbClr val="6FC7CF"/>
-                </a:solidFill>
-                <a:latin typeface="Noto Sans TC"/>
-              </a:rPr>
-              <a:t>7,322</a:t>
-            </a:r>
-            <a:r>
-              <a:rPr sz="1300" b="0">
-                <a:solidFill>
-                  <a:srgbClr val="E8E6E1"/>
-                </a:solidFill>
-                <a:latin typeface="Noto Sans TC"/>
-              </a:rPr>
-              <a:t>。同一天發現 models/onnx/ 是重訓前的權重匯出，model-free floor 的比較是用舊權重打新 patch。</a:t>
-            </a:r>
-          </a:p>
-        </p:txBody>
-      </p:sp>
-      <p:sp>
-        <p:nvSpPr>
-          <p:cNvPr id="19" name="Rectangle 18"/>
-          <p:cNvSpPr/>
-          <p:nvPr/>
-        </p:nvSpPr>
-        <p:spPr>
-          <a:xfrm>
-            <a:off x="320040" y="5148072"/>
-            <a:ext cx="11521440" cy="393192"/>
-          </a:xfrm>
-          <a:prstGeom prst="rect">
-            <a:avLst/>
-          </a:prstGeom>
-          <a:solidFill>
-            <a:srgbClr val="2B2416"/>
-          </a:solidFill>
-          <a:ln>
-            <a:noFill/>
-          </a:ln>
-          <a:effectLst/>
-        </p:spPr>
-        <p:style>
-          <a:lnRef idx="1">
-            <a:schemeClr val="accent1"/>
-          </a:lnRef>
-          <a:fillRef idx="3">
-            <a:schemeClr val="accent1"/>
-          </a:fillRef>
-          <a:effectRef idx="2">
-            <a:schemeClr val="accent1"/>
-          </a:effectRef>
-          <a:fontRef idx="minor">
-            <a:schemeClr val="lt1"/>
-          </a:fontRef>
-        </p:style>
-        <p:txBody>
-          <a:bodyPr rtlCol="0" anchor="ctr"/>
-          <a:lstStyle/>
-          <a:p>
-            <a:pPr algn="ctr"/>
-          </a:p>
-        </p:txBody>
-      </p:sp>
-      <p:sp>
-        <p:nvSpPr>
-          <p:cNvPr id="20" name="TextBox 19"/>
-          <p:cNvSpPr txBox="1"/>
-          <p:nvPr/>
-        </p:nvSpPr>
-        <p:spPr>
-          <a:xfrm>
-            <a:off x="457200" y="5184648"/>
-            <a:ext cx="1325880" cy="320040"/>
-          </a:xfrm>
-          <a:prstGeom prst="rect">
-            <a:avLst/>
-          </a:prstGeom>
-          <a:noFill/>
-        </p:spPr>
-        <p:txBody>
-          <a:bodyPr wrap="square">
-            <a:spAutoFit/>
-          </a:bodyPr>
-          <a:lstStyle/>
-          <a:p>
-            <a:pPr>
-              <a:lnSpc>
-                <a:spcPct val="115000"/>
-              </a:lnSpc>
-            </a:pPr>
-            <a:r>
-              <a:rPr sz="1300" b="1">
-                <a:solidFill>
-                  <a:srgbClr val="E2B45F"/>
-                </a:solidFill>
-                <a:latin typeface="Noto Sans TC"/>
-              </a:rPr>
-              <a:t>錯在哪</a:t>
-            </a:r>
-          </a:p>
-        </p:txBody>
-      </p:sp>
-      <p:sp>
-        <p:nvSpPr>
-          <p:cNvPr id="21" name="TextBox 20"/>
-          <p:cNvSpPr txBox="1"/>
-          <p:nvPr/>
-        </p:nvSpPr>
-        <p:spPr>
-          <a:xfrm>
-            <a:off x="1828800" y="5184648"/>
-            <a:ext cx="9875520" cy="320040"/>
-          </a:xfrm>
-          <a:prstGeom prst="rect">
-            <a:avLst/>
-          </a:prstGeom>
-          <a:noFill/>
-        </p:spPr>
-        <p:txBody>
-          <a:bodyPr wrap="square">
-            <a:spAutoFit/>
-          </a:bodyPr>
-          <a:lstStyle/>
-          <a:p>
-            <a:pPr>
-              <a:lnSpc>
-                <a:spcPct val="112000"/>
-              </a:lnSpc>
-            </a:pPr>
-            <a:r>
-              <a:rPr sz="1300" b="0">
-                <a:solidFill>
-                  <a:srgbClr val="E8E6E1"/>
-                </a:solidFill>
-                <a:latin typeface="Noto Sans TC"/>
-              </a:rPr>
-              <a:t>程式對、流程對（對位開了、資料變了、重訓了、門檻重掃了），只有文字被留在原地——在讀者第一眼看的地方。</a:t>
-            </a:r>
-          </a:p>
-        </p:txBody>
-      </p:sp>
-      <p:sp>
-        <p:nvSpPr>
-          <p:cNvPr id="22" name="Rectangle 21"/>
-          <p:cNvSpPr/>
-          <p:nvPr/>
-        </p:nvSpPr>
-        <p:spPr>
-          <a:xfrm>
-            <a:off x="320040" y="5596128"/>
-            <a:ext cx="11521440" cy="640080"/>
-          </a:xfrm>
-          <a:prstGeom prst="rect">
-            <a:avLst/>
-          </a:prstGeom>
-          <a:solidFill>
-            <a:srgbClr val="16292B"/>
-          </a:solidFill>
-          <a:ln>
-            <a:noFill/>
-          </a:ln>
-          <a:effectLst/>
-        </p:spPr>
-        <p:style>
-          <a:lnRef idx="1">
-            <a:schemeClr val="accent1"/>
-          </a:lnRef>
-          <a:fillRef idx="3">
-            <a:schemeClr val="accent1"/>
-          </a:fillRef>
-          <a:effectRef idx="2">
-            <a:schemeClr val="accent1"/>
-          </a:effectRef>
-          <a:fontRef idx="minor">
-            <a:schemeClr val="lt1"/>
-          </a:fontRef>
-        </p:style>
-        <p:txBody>
-          <a:bodyPr rtlCol="0" anchor="ctr"/>
-          <a:lstStyle/>
-          <a:p>
-            <a:pPr algn="ctr"/>
-          </a:p>
-        </p:txBody>
-      </p:sp>
-      <p:sp>
-        <p:nvSpPr>
-          <p:cNvPr id="23" name="TextBox 22"/>
-          <p:cNvSpPr txBox="1"/>
-          <p:nvPr/>
-        </p:nvSpPr>
-        <p:spPr>
-          <a:xfrm>
-            <a:off x="457200" y="5632704"/>
-            <a:ext cx="1325880" cy="566928"/>
-          </a:xfrm>
-          <a:prstGeom prst="rect">
-            <a:avLst/>
-          </a:prstGeom>
-          <a:noFill/>
-        </p:spPr>
-        <p:txBody>
-          <a:bodyPr wrap="square">
-            <a:spAutoFit/>
-          </a:bodyPr>
-          <a:lstStyle/>
-          <a:p>
-            <a:pPr>
-              <a:lnSpc>
-                <a:spcPct val="115000"/>
-              </a:lnSpc>
-            </a:pPr>
-            <a:r>
-              <a:rPr sz="1300" b="1">
-                <a:solidFill>
-                  <a:srgbClr val="6FC7CF"/>
-                </a:solidFill>
-                <a:latin typeface="Noto Sans TC"/>
-              </a:rPr>
-              <a:t>產生的規則</a:t>
-            </a:r>
-          </a:p>
-        </p:txBody>
-      </p:sp>
-      <p:sp>
-        <p:nvSpPr>
-          <p:cNvPr id="24" name="TextBox 23"/>
-          <p:cNvSpPr txBox="1"/>
-          <p:nvPr/>
-        </p:nvSpPr>
-        <p:spPr>
-          <a:xfrm>
-            <a:off x="1828800" y="5632704"/>
-            <a:ext cx="9875520" cy="566928"/>
-          </a:xfrm>
-          <a:prstGeom prst="rect">
-            <a:avLst/>
-          </a:prstGeom>
-          <a:noFill/>
-        </p:spPr>
-        <p:txBody>
-          <a:bodyPr wrap="square">
-            <a:spAutoFit/>
-          </a:bodyPr>
-          <a:lstStyle/>
-          <a:p>
-            <a:pPr>
-              <a:lnSpc>
-                <a:spcPct val="112000"/>
-              </a:lnSpc>
-            </a:pPr>
-            <a:r>
-              <a:rPr sz="1300" b="0">
-                <a:solidFill>
-                  <a:srgbClr val="E8E6E1"/>
-                </a:solidFill>
-                <a:latin typeface="Noto Sans TC"/>
-              </a:rPr>
-              <a:t>第 </a:t>
-            </a:r>
-            <a:r>
-              <a:rPr sz="1300" b="1">
-                <a:solidFill>
-                  <a:srgbClr val="6FC7CF"/>
-                </a:solidFill>
-                <a:latin typeface="Noto Sans TC"/>
-              </a:rPr>
-              <a:t>19</a:t>
-            </a:r>
-            <a:r>
-              <a:rPr sz="1300" b="0">
-                <a:solidFill>
-                  <a:srgbClr val="E8E6E1"/>
-                </a:solidFill>
-                <a:latin typeface="Noto Sans TC"/>
-              </a:rPr>
-              <a:t> 條 invariant：發表的數字要指名它來自哪個 run；舊數字可以出現，但只能在一段標日期的文字裡（「這裡在 </a:t>
-            </a:r>
-            <a:r>
-              <a:rPr sz="1300" b="1">
-                <a:solidFill>
-                  <a:srgbClr val="6FC7CF"/>
-                </a:solidFill>
-                <a:latin typeface="Noto Sans TC"/>
-              </a:rPr>
-              <a:t>08-24</a:t>
-            </a:r>
-            <a:r>
-              <a:rPr sz="1300" b="0">
-                <a:solidFill>
-                  <a:srgbClr val="E8E6E1"/>
-                </a:solidFill>
-                <a:latin typeface="Noto Sans TC"/>
-              </a:rPr>
-              <a:t> 之前寫 </a:t>
-            </a:r>
-            <a:r>
-              <a:rPr sz="1300" b="1">
-                <a:solidFill>
-                  <a:srgbClr val="6FC7CF"/>
-                </a:solidFill>
-                <a:latin typeface="Noto Sans TC"/>
-              </a:rPr>
-              <a:t>56.2%</a:t>
-            </a:r>
-            <a:r>
-              <a:rPr sz="1300" b="0">
-                <a:solidFill>
-                  <a:srgbClr val="E8E6E1"/>
-                </a:solidFill>
-                <a:latin typeface="Noto Sans TC"/>
-              </a:rPr>
-              <a:t>」是讀者需要的那句）。重新匯出進 retrain chain。</a:t>
-            </a:r>
-          </a:p>
-        </p:txBody>
-      </p:sp>
-      <p:sp>
-        <p:nvSpPr>
-          <p:cNvPr id="25" name="TextBox 24"/>
           <p:cNvSpPr txBox="1"/>
           <p:nvPr/>
         </p:nvSpPr>
@@ -27826,14 +26979,14 @@
                 </a:solidFill>
                 <a:latin typeface="IBM Plex Mono"/>
               </a:rPr>
-              <a:t>收尾</a:t>
-            </a:r>
-          </a:p>
-        </p:txBody>
-      </p:sp>
-      <p:sp>
-        <p:nvSpPr>
-          <p:cNvPr id="26" name="TextBox 25"/>
+              <a:t>第五層 · /ask 產線查詢</a:t>
+            </a:r>
+          </a:p>
+        </p:txBody>
+      </p:sp>
+      <p:sp>
+        <p:nvSpPr>
+          <p:cNvPr id="6" name="TextBox 5"/>
           <p:cNvSpPr txBox="1"/>
           <p:nvPr/>
         </p:nvSpPr>
@@ -27861,11 +27014,11 @@
             <a:r>
               <a:rPr sz="1000" b="0">
                 <a:solidFill>
-                  <a:srgbClr val="6FC7CF"/>
+                  <a:srgbClr val="9AA0A6"/>
                 </a:solidFill>
                 <a:latin typeface="IBM Plex Mono"/>
               </a:rPr>
-              <a:t>★ 主線 9/9 · 28 / 37</a:t>
+              <a:t>28 / 38</a:t>
             </a:r>
           </a:p>
         </p:txBody>
@@ -27924,13 +27077,13 @@
               </a:lnSpc>
             </a:pPr>
             <a:r>
-              <a:rPr sz="2800" b="1">
-                <a:solidFill>
-                  <a:srgbClr val="E8E6E1"/>
-                </a:solidFill>
-                <a:latin typeface="Noto Sans TC"/>
-              </a:rPr>
-              <a:t>還沒做的，和為什麼沒做</a:t>
+              <a:rPr sz="2400" b="1">
+                <a:solidFill>
+                  <a:srgbClr val="E8E6E1"/>
+                </a:solidFill>
+                <a:latin typeface="Noto Sans TC"/>
+              </a:rPr>
+              <a:t>文件也要測：README 開頭那個數字</a:t>
             </a:r>
           </a:p>
         </p:txBody>
@@ -27943,185 +27096,1034 @@
         </p:nvSpPr>
         <p:spPr>
           <a:xfrm>
-            <a:off x="548640" y="1280160"/>
-            <a:ext cx="11064240" cy="5029200"/>
-          </a:xfrm>
-          <a:prstGeom prst="rect">
-            <a:avLst/>
-          </a:prstGeom>
-          <a:noFill/>
-        </p:spPr>
-        <p:txBody>
-          <a:bodyPr wrap="square">
-            <a:spAutoFit/>
-          </a:bodyPr>
-          <a:lstStyle/>
-          <a:p>
-            <a:pPr>
-              <a:lnSpc>
-                <a:spcPct val="125000"/>
-              </a:lnSpc>
-            </a:pPr>
-            <a:r>
-              <a:rPr sz="1800" b="0">
-                <a:solidFill>
-                  <a:srgbClr val="6FC7CF"/>
-                </a:solidFill>
-                <a:latin typeface="Noto Sans TC"/>
-              </a:rPr>
-              <a:t>• </a:t>
-            </a:r>
-            <a:r>
-              <a:rPr sz="1800" b="0">
-                <a:solidFill>
-                  <a:srgbClr val="E8E6E1"/>
-                </a:solidFill>
-                <a:latin typeface="Noto Sans TC"/>
-              </a:rPr>
-              <a:t>Shadow mode（模型跟著現有流程跑、只記錄不決定）：正確的下一步，但沒有產線——在這裡建等於拿種出來的資料跟自己比。拒絕，不是忘記。</a:t>
-            </a:r>
-          </a:p>
-          <a:p>
-            <a:pPr>
-              <a:lnSpc>
-                <a:spcPct val="125000"/>
-              </a:lnSpc>
-            </a:pPr>
-            <a:r>
-              <a:rPr sz="1800" b="0">
-                <a:solidFill>
-                  <a:srgbClr val="6FC7CF"/>
-                </a:solidFill>
-                <a:latin typeface="Noto Sans TC"/>
-              </a:rPr>
-              <a:t>• </a:t>
-            </a:r>
-            <a:r>
-              <a:rPr sz="1800" b="0">
-                <a:solidFill>
-                  <a:srgbClr val="E8E6E1"/>
-                </a:solidFill>
-                <a:latin typeface="Noto Sans TC"/>
-              </a:rPr>
-              <a:t>依賴參數（第一步的結果餵第二步）：知道長什麼樣，等真的有人問出那種題。</a:t>
-            </a:r>
-          </a:p>
-          <a:p>
-            <a:pPr>
-              <a:lnSpc>
-                <a:spcPct val="125000"/>
-              </a:lnSpc>
-            </a:pPr>
-            <a:r>
-              <a:rPr sz="1800" b="0">
-                <a:solidFill>
-                  <a:srgbClr val="6FC7CF"/>
-                </a:solidFill>
-                <a:latin typeface="Noto Sans TC"/>
-              </a:rPr>
-              <a:t>• </a:t>
-            </a:r>
-            <a:r>
-              <a:rPr sz="1800" b="0">
-                <a:solidFill>
-                  <a:srgbClr val="E8E6E1"/>
-                </a:solidFill>
-                <a:latin typeface="Noto Sans TC"/>
-              </a:rPr>
-              <a:t>用作業員的更正重訓：資料庫裡真的人判過的只有五筆，四筆已刪；種出來的資料重訓是自己教自己。</a:t>
-            </a:r>
-          </a:p>
-          <a:p>
-            <a:pPr>
-              <a:lnSpc>
-                <a:spcPct val="125000"/>
-              </a:lnSpc>
-            </a:pPr>
-            <a:r>
-              <a:rPr sz="1800" b="0">
-                <a:solidFill>
-                  <a:srgbClr val="6FC7CF"/>
-                </a:solidFill>
-                <a:latin typeface="Noto Sans TC"/>
-              </a:rPr>
-              <a:t>• </a:t>
-            </a:r>
-            <a:r>
-              <a:rPr sz="1800" b="0">
-                <a:solidFill>
-                  <a:srgbClr val="E8E6E1"/>
-                </a:solidFill>
-                <a:latin typeface="Noto Sans TC"/>
-              </a:rPr>
-              <a:t>電測：關掉 short 那 </a:t>
-            </a:r>
+            <a:off x="457200" y="868680"/>
+            <a:ext cx="11247120" cy="411480"/>
+          </a:xfrm>
+          <a:prstGeom prst="rect">
+            <a:avLst/>
+          </a:prstGeom>
+          <a:noFill/>
+        </p:spPr>
+        <p:txBody>
+          <a:bodyPr wrap="square">
+            <a:spAutoFit/>
+          </a:bodyPr>
+          <a:lstStyle/>
+          <a:p>
+            <a:pPr>
+              <a:lnSpc>
+                <a:spcPct val="115000"/>
+              </a:lnSpc>
+            </a:pPr>
+            <a:r>
+              <a:rPr sz="1500" b="0">
+                <a:solidFill>
+                  <a:srgbClr val="9AA0A6"/>
+                </a:solidFill>
+                <a:latin typeface="Noto Sans TC"/>
+              </a:rPr>
+              <a:t>是一份「commit uncommitted」的表</a:t>
+            </a:r>
+          </a:p>
+        </p:txBody>
+      </p:sp>
+      <p:sp>
+        <p:nvSpPr>
+          <p:cNvPr id="4" name="Rectangle 3"/>
+          <p:cNvSpPr/>
+          <p:nvPr/>
+        </p:nvSpPr>
+        <p:spPr>
+          <a:xfrm>
+            <a:off x="457200" y="1325880"/>
+            <a:ext cx="3606698" cy="868680"/>
+          </a:xfrm>
+          <a:prstGeom prst="rect">
+            <a:avLst/>
+          </a:prstGeom>
+          <a:solidFill>
+            <a:srgbClr val="1E2125"/>
+          </a:solidFill>
+          <a:ln>
+            <a:solidFill>
+              <a:srgbClr val="33383D"/>
+            </a:solidFill>
+          </a:ln>
+          <a:effectLst/>
+        </p:spPr>
+        <p:style>
+          <a:lnRef idx="1">
+            <a:schemeClr val="accent1"/>
+          </a:lnRef>
+          <a:fillRef idx="3">
+            <a:schemeClr val="accent1"/>
+          </a:fillRef>
+          <a:effectRef idx="2">
+            <a:schemeClr val="accent1"/>
+          </a:effectRef>
+          <a:fontRef idx="minor">
+            <a:schemeClr val="lt1"/>
+          </a:fontRef>
+        </p:style>
+        <p:txBody>
+          <a:bodyPr rtlCol="0" anchor="ctr"/>
+          <a:lstStyle/>
+          <a:p>
+            <a:pPr algn="ctr"/>
+          </a:p>
+        </p:txBody>
+      </p:sp>
+      <p:sp>
+        <p:nvSpPr>
+          <p:cNvPr id="5" name="TextBox 4"/>
+          <p:cNvSpPr txBox="1"/>
+          <p:nvPr/>
+        </p:nvSpPr>
+        <p:spPr>
+          <a:xfrm>
+            <a:off x="640080" y="1399032"/>
+            <a:ext cx="3240938" cy="457200"/>
+          </a:xfrm>
+          <a:prstGeom prst="rect">
+            <a:avLst/>
+          </a:prstGeom>
+          <a:noFill/>
+        </p:spPr>
+        <p:txBody>
+          <a:bodyPr wrap="square">
+            <a:spAutoFit/>
+          </a:bodyPr>
+          <a:lstStyle/>
+          <a:p>
+            <a:pPr>
+              <a:lnSpc>
+                <a:spcPct val="115000"/>
+              </a:lnSpc>
+            </a:pPr>
             <a:r>
               <a:rPr sz="1800" b="1">
                 <a:solidFill>
                   <a:srgbClr val="6FC7CF"/>
                 </a:solidFill>
-                <a:latin typeface="Noto Sans TC"/>
-              </a:rPr>
-              <a:t>1.55%</a:t>
-            </a:r>
-            <a:r>
-              <a:rPr sz="1800" b="0">
-                <a:solidFill>
-                  <a:srgbClr val="E8E6E1"/>
-                </a:solidFill>
-                <a:latin typeface="Noto Sans TC"/>
-              </a:rPr>
-              <a:t> 漏網的唯一方法，不在這個系統裡，WI-</a:t>
-            </a:r>
-            <a:r>
-              <a:rPr sz="1800" b="1">
-                <a:solidFill>
-                  <a:srgbClr val="6FC7CF"/>
-                </a:solidFill>
-                <a:latin typeface="Noto Sans TC"/>
-              </a:rPr>
-              <a:t>201</a:t>
-            </a:r>
-            <a:r>
-              <a:rPr sz="1800" b="0">
-                <a:solidFill>
-                  <a:srgbClr val="E8E6E1"/>
-                </a:solidFill>
-                <a:latin typeface="Noto Sans TC"/>
-              </a:rPr>
-              <a:t> 本來就寫了。</a:t>
-            </a:r>
-          </a:p>
-          <a:p>
-            <a:pPr>
-              <a:lnSpc>
-                <a:spcPct val="125000"/>
-              </a:lnSpc>
-            </a:pPr>
-            <a:r>
-              <a:rPr sz="1800" b="0">
-                <a:solidFill>
-                  <a:srgbClr val="6FC7CF"/>
-                </a:solidFill>
-                <a:latin typeface="Noto Sans TC"/>
-              </a:rPr>
-              <a:t>• </a:t>
-            </a:r>
-            <a:r>
-              <a:rPr sz="1800" b="0">
-                <a:solidFill>
-                  <a:srgbClr val="E8E6E1"/>
-                </a:solidFill>
-                <a:latin typeface="Noto Sans TC"/>
-              </a:rPr>
-              <a:t>一句收尾：每個門檻引得到檔案、每個數字在 benchmarks 裡、每個錯有它產生的測試。</a:t>
-            </a:r>
-          </a:p>
-        </p:txBody>
-      </p:sp>
-      <p:sp>
-        <p:nvSpPr>
-          <p:cNvPr id="4" name="TextBox 3"/>
+                <a:latin typeface="IBM Plex Mono"/>
+              </a:rPr>
+              <a:t>56.2% vs 52.8%</a:t>
+            </a:r>
+          </a:p>
+        </p:txBody>
+      </p:sp>
+      <p:sp>
+        <p:nvSpPr>
+          <p:cNvPr id="6" name="TextBox 5"/>
+          <p:cNvSpPr txBox="1"/>
+          <p:nvPr/>
+        </p:nvSpPr>
+        <p:spPr>
+          <a:xfrm>
+            <a:off x="640080" y="1828800"/>
+            <a:ext cx="3240938" cy="320040"/>
+          </a:xfrm>
+          <a:prstGeom prst="rect">
+            <a:avLst/>
+          </a:prstGeom>
+          <a:noFill/>
+        </p:spPr>
+        <p:txBody>
+          <a:bodyPr wrap="square">
+            <a:spAutoFit/>
+          </a:bodyPr>
+          <a:lstStyle/>
+          <a:p>
+            <a:pPr>
+              <a:lnSpc>
+                <a:spcPct val="115000"/>
+              </a:lnSpc>
+            </a:pPr>
+            <a:r>
+              <a:rPr sz="1050" b="0">
+                <a:solidFill>
+                  <a:srgbClr val="9AA0A6"/>
+                </a:solidFill>
+                <a:latin typeface="Noto Sans TC"/>
+              </a:rPr>
+              <a:t>README 第一行 vs 實際</a:t>
+            </a:r>
+          </a:p>
+        </p:txBody>
+      </p:sp>
+      <p:sp>
+        <p:nvSpPr>
+          <p:cNvPr id="7" name="Rectangle 6"/>
+          <p:cNvSpPr/>
+          <p:nvPr/>
+        </p:nvSpPr>
+        <p:spPr>
+          <a:xfrm>
+            <a:off x="4292498" y="1325880"/>
+            <a:ext cx="3606698" cy="868680"/>
+          </a:xfrm>
+          <a:prstGeom prst="rect">
+            <a:avLst/>
+          </a:prstGeom>
+          <a:solidFill>
+            <a:srgbClr val="1E2125"/>
+          </a:solidFill>
+          <a:ln>
+            <a:solidFill>
+              <a:srgbClr val="33383D"/>
+            </a:solidFill>
+          </a:ln>
+          <a:effectLst/>
+        </p:spPr>
+        <p:style>
+          <a:lnRef idx="1">
+            <a:schemeClr val="accent1"/>
+          </a:lnRef>
+          <a:fillRef idx="3">
+            <a:schemeClr val="accent1"/>
+          </a:fillRef>
+          <a:effectRef idx="2">
+            <a:schemeClr val="accent1"/>
+          </a:effectRef>
+          <a:fontRef idx="minor">
+            <a:schemeClr val="lt1"/>
+          </a:fontRef>
+        </p:style>
+        <p:txBody>
+          <a:bodyPr rtlCol="0" anchor="ctr"/>
+          <a:lstStyle/>
+          <a:p>
+            <a:pPr algn="ctr"/>
+          </a:p>
+        </p:txBody>
+      </p:sp>
+      <p:sp>
+        <p:nvSpPr>
+          <p:cNvPr id="8" name="TextBox 7"/>
+          <p:cNvSpPr txBox="1"/>
+          <p:nvPr/>
+        </p:nvSpPr>
+        <p:spPr>
+          <a:xfrm>
+            <a:off x="4475378" y="1399032"/>
+            <a:ext cx="3240938" cy="457200"/>
+          </a:xfrm>
+          <a:prstGeom prst="rect">
+            <a:avLst/>
+          </a:prstGeom>
+          <a:noFill/>
+        </p:spPr>
+        <p:txBody>
+          <a:bodyPr wrap="square">
+            <a:spAutoFit/>
+          </a:bodyPr>
+          <a:lstStyle/>
+          <a:p>
+            <a:pPr>
+              <a:lnSpc>
+                <a:spcPct val="115000"/>
+              </a:lnSpc>
+            </a:pPr>
+            <a:r>
+              <a:rPr sz="1500" b="1">
+                <a:solidFill>
+                  <a:srgbClr val="6FC7CF"/>
+                </a:solidFill>
+                <a:latin typeface="IBM Plex Mono"/>
+              </a:rPr>
+              <a:t>commit uncommitted</a:t>
+            </a:r>
+          </a:p>
+        </p:txBody>
+      </p:sp>
+      <p:sp>
+        <p:nvSpPr>
+          <p:cNvPr id="9" name="TextBox 8"/>
+          <p:cNvSpPr txBox="1"/>
+          <p:nvPr/>
+        </p:nvSpPr>
+        <p:spPr>
+          <a:xfrm>
+            <a:off x="4475378" y="1828800"/>
+            <a:ext cx="3240938" cy="320040"/>
+          </a:xfrm>
+          <a:prstGeom prst="rect">
+            <a:avLst/>
+          </a:prstGeom>
+          <a:noFill/>
+        </p:spPr>
+        <p:txBody>
+          <a:bodyPr wrap="square">
+            <a:spAutoFit/>
+          </a:bodyPr>
+          <a:lstStyle/>
+          <a:p>
+            <a:pPr>
+              <a:lnSpc>
+                <a:spcPct val="115000"/>
+              </a:lnSpc>
+            </a:pPr>
+            <a:r>
+              <a:rPr sz="1050" b="0">
+                <a:solidFill>
+                  <a:srgbClr val="9AA0A6"/>
+                </a:solidFill>
+                <a:latin typeface="Noto Sans TC"/>
+              </a:rPr>
+              <a:t>那張表的來源</a:t>
+            </a:r>
+          </a:p>
+        </p:txBody>
+      </p:sp>
+      <p:sp>
+        <p:nvSpPr>
+          <p:cNvPr id="10" name="Rectangle 9"/>
+          <p:cNvSpPr/>
+          <p:nvPr/>
+        </p:nvSpPr>
+        <p:spPr>
+          <a:xfrm>
+            <a:off x="8127796" y="1325880"/>
+            <a:ext cx="3606698" cy="868680"/>
+          </a:xfrm>
+          <a:prstGeom prst="rect">
+            <a:avLst/>
+          </a:prstGeom>
+          <a:solidFill>
+            <a:srgbClr val="1E2125"/>
+          </a:solidFill>
+          <a:ln>
+            <a:solidFill>
+              <a:srgbClr val="33383D"/>
+            </a:solidFill>
+          </a:ln>
+          <a:effectLst/>
+        </p:spPr>
+        <p:style>
+          <a:lnRef idx="1">
+            <a:schemeClr val="accent1"/>
+          </a:lnRef>
+          <a:fillRef idx="3">
+            <a:schemeClr val="accent1"/>
+          </a:fillRef>
+          <a:effectRef idx="2">
+            <a:schemeClr val="accent1"/>
+          </a:effectRef>
+          <a:fontRef idx="minor">
+            <a:schemeClr val="lt1"/>
+          </a:fontRef>
+        </p:style>
+        <p:txBody>
+          <a:bodyPr rtlCol="0" anchor="ctr"/>
+          <a:lstStyle/>
+          <a:p>
+            <a:pPr algn="ctr"/>
+          </a:p>
+        </p:txBody>
+      </p:sp>
+      <p:sp>
+        <p:nvSpPr>
+          <p:cNvPr id="11" name="TextBox 10"/>
+          <p:cNvSpPr txBox="1"/>
+          <p:nvPr/>
+        </p:nvSpPr>
+        <p:spPr>
+          <a:xfrm>
+            <a:off x="8310676" y="1399032"/>
+            <a:ext cx="3240938" cy="457200"/>
+          </a:xfrm>
+          <a:prstGeom prst="rect">
+            <a:avLst/>
+          </a:prstGeom>
+          <a:noFill/>
+        </p:spPr>
+        <p:txBody>
+          <a:bodyPr wrap="square">
+            <a:spAutoFit/>
+          </a:bodyPr>
+          <a:lstStyle/>
+          <a:p>
+            <a:pPr>
+              <a:lnSpc>
+                <a:spcPct val="115000"/>
+              </a:lnSpc>
+            </a:pPr>
+            <a:r>
+              <a:rPr sz="2200" b="1">
+                <a:solidFill>
+                  <a:srgbClr val="6FC7CF"/>
+                </a:solidFill>
+                <a:latin typeface="IBM Plex Mono"/>
+              </a:rPr>
+              <a:t>19</a:t>
+            </a:r>
+          </a:p>
+        </p:txBody>
+      </p:sp>
+      <p:sp>
+        <p:nvSpPr>
+          <p:cNvPr id="12" name="TextBox 11"/>
+          <p:cNvSpPr txBox="1"/>
+          <p:nvPr/>
+        </p:nvSpPr>
+        <p:spPr>
+          <a:xfrm>
+            <a:off x="8310676" y="1828800"/>
+            <a:ext cx="3240938" cy="320040"/>
+          </a:xfrm>
+          <a:prstGeom prst="rect">
+            <a:avLst/>
+          </a:prstGeom>
+          <a:noFill/>
+        </p:spPr>
+        <p:txBody>
+          <a:bodyPr wrap="square">
+            <a:spAutoFit/>
+          </a:bodyPr>
+          <a:lstStyle/>
+          <a:p>
+            <a:pPr>
+              <a:lnSpc>
+                <a:spcPct val="115000"/>
+              </a:lnSpc>
+            </a:pPr>
+            <a:r>
+              <a:rPr sz="1050" b="0">
+                <a:solidFill>
+                  <a:srgbClr val="9AA0A6"/>
+                </a:solidFill>
+                <a:latin typeface="Noto Sans TC"/>
+              </a:rPr>
+              <a:t>第 19 條 invariant</a:t>
+            </a:r>
+          </a:p>
+        </p:txBody>
+      </p:sp>
+      <p:sp>
+        <p:nvSpPr>
+          <p:cNvPr id="13" name="TextBox 12"/>
+          <p:cNvSpPr txBox="1"/>
+          <p:nvPr/>
+        </p:nvSpPr>
+        <p:spPr>
+          <a:xfrm>
+            <a:off x="457200" y="2359152"/>
+            <a:ext cx="1325880" cy="813816"/>
+          </a:xfrm>
+          <a:prstGeom prst="rect">
+            <a:avLst/>
+          </a:prstGeom>
+          <a:noFill/>
+        </p:spPr>
+        <p:txBody>
+          <a:bodyPr wrap="square">
+            <a:spAutoFit/>
+          </a:bodyPr>
+          <a:lstStyle/>
+          <a:p>
+            <a:pPr>
+              <a:lnSpc>
+                <a:spcPct val="115000"/>
+              </a:lnSpc>
+            </a:pPr>
+            <a:r>
+              <a:rPr sz="1300" b="1">
+                <a:solidFill>
+                  <a:srgbClr val="6FC7CF"/>
+                </a:solidFill>
+                <a:latin typeface="Noto Sans TC"/>
+              </a:rPr>
+              <a:t>為什麼做</a:t>
+            </a:r>
+          </a:p>
+        </p:txBody>
+      </p:sp>
+      <p:sp>
+        <p:nvSpPr>
+          <p:cNvPr id="14" name="TextBox 13"/>
+          <p:cNvSpPr txBox="1"/>
+          <p:nvPr/>
+        </p:nvSpPr>
+        <p:spPr>
+          <a:xfrm>
+            <a:off x="1828800" y="2359152"/>
+            <a:ext cx="9875520" cy="813816"/>
+          </a:xfrm>
+          <a:prstGeom prst="rect">
+            <a:avLst/>
+          </a:prstGeom>
+          <a:noFill/>
+        </p:spPr>
+        <p:txBody>
+          <a:bodyPr wrap="square">
+            <a:spAutoFit/>
+          </a:bodyPr>
+          <a:lstStyle/>
+          <a:p>
+            <a:pPr>
+              <a:lnSpc>
+                <a:spcPct val="112000"/>
+              </a:lnSpc>
+            </a:pPr>
+            <a:r>
+              <a:rPr sz="1300" b="0">
+                <a:solidFill>
+                  <a:srgbClr val="E8E6E1"/>
+                </a:solidFill>
+                <a:latin typeface="Noto Sans TC"/>
+              </a:rPr>
+              <a:t>當時要回答的問題是：benchmarks.md 只增不改、最新的在最後，那引用它的文件有沒有跟上？我把 README、CLAUDE.md、architecture.md 裡每個頭條數字對回 benchmarks 的 run；對不上就算文件錯。</a:t>
+            </a:r>
+          </a:p>
+        </p:txBody>
+      </p:sp>
+      <p:sp>
+        <p:nvSpPr>
+          <p:cNvPr id="15" name="TextBox 14"/>
+          <p:cNvSpPr txBox="1"/>
+          <p:nvPr/>
+        </p:nvSpPr>
+        <p:spPr>
+          <a:xfrm>
+            <a:off x="457200" y="3300984"/>
+            <a:ext cx="1325880" cy="566928"/>
+          </a:xfrm>
+          <a:prstGeom prst="rect">
+            <a:avLst/>
+          </a:prstGeom>
+          <a:noFill/>
+        </p:spPr>
+        <p:txBody>
+          <a:bodyPr wrap="square">
+            <a:spAutoFit/>
+          </a:bodyPr>
+          <a:lstStyle/>
+          <a:p>
+            <a:pPr>
+              <a:lnSpc>
+                <a:spcPct val="115000"/>
+              </a:lnSpc>
+            </a:pPr>
+            <a:r>
+              <a:rPr sz="1300" b="1">
+                <a:solidFill>
+                  <a:srgbClr val="6FC7CF"/>
+                </a:solidFill>
+                <a:latin typeface="Noto Sans TC"/>
+              </a:rPr>
+              <a:t>怎麼設計</a:t>
+            </a:r>
+          </a:p>
+        </p:txBody>
+      </p:sp>
+      <p:sp>
+        <p:nvSpPr>
+          <p:cNvPr id="16" name="TextBox 15"/>
+          <p:cNvSpPr txBox="1"/>
+          <p:nvPr/>
+        </p:nvSpPr>
+        <p:spPr>
+          <a:xfrm>
+            <a:off x="1828800" y="3300984"/>
+            <a:ext cx="9875520" cy="566928"/>
+          </a:xfrm>
+          <a:prstGeom prst="rect">
+            <a:avLst/>
+          </a:prstGeom>
+          <a:noFill/>
+        </p:spPr>
+        <p:txBody>
+          <a:bodyPr wrap="square">
+            <a:spAutoFit/>
+          </a:bodyPr>
+          <a:lstStyle/>
+          <a:p>
+            <a:pPr>
+              <a:lnSpc>
+                <a:spcPct val="112000"/>
+              </a:lnSpc>
+            </a:pPr>
+            <a:r>
+              <a:rPr sz="1300" b="0">
+                <a:solidFill>
+                  <a:srgbClr val="E8E6E1"/>
+                </a:solidFill>
+                <a:latin typeface="Noto Sans TC"/>
+              </a:rPr>
+              <a:t>test_published_figures.py：從 benchmarks.md 抓每次 run 的 split（候選數／缺陷數／誤報數），四份文件裡出現的數字必須屬於某個 run，而且舊的數字只能出現在標了日期的段落裡。</a:t>
+            </a:r>
+          </a:p>
+        </p:txBody>
+      </p:sp>
+      <p:sp>
+        <p:nvSpPr>
+          <p:cNvPr id="17" name="TextBox 16"/>
+          <p:cNvSpPr txBox="1"/>
+          <p:nvPr/>
+        </p:nvSpPr>
+        <p:spPr>
+          <a:xfrm>
+            <a:off x="457200" y="3995928"/>
+            <a:ext cx="1325880" cy="1060704"/>
+          </a:xfrm>
+          <a:prstGeom prst="rect">
+            <a:avLst/>
+          </a:prstGeom>
+          <a:noFill/>
+        </p:spPr>
+        <p:txBody>
+          <a:bodyPr wrap="square">
+            <a:spAutoFit/>
+          </a:bodyPr>
+          <a:lstStyle/>
+          <a:p>
+            <a:pPr>
+              <a:lnSpc>
+                <a:spcPct val="115000"/>
+              </a:lnSpc>
+            </a:pPr>
+            <a:r>
+              <a:rPr sz="1300" b="1">
+                <a:solidFill>
+                  <a:srgbClr val="6FC7CF"/>
+                </a:solidFill>
+                <a:latin typeface="Noto Sans TC"/>
+              </a:rPr>
+              <a:t>量到什麼</a:t>
+            </a:r>
+          </a:p>
+        </p:txBody>
+      </p:sp>
+      <p:sp>
+        <p:nvSpPr>
+          <p:cNvPr id="18" name="TextBox 17"/>
+          <p:cNvSpPr txBox="1"/>
+          <p:nvPr/>
+        </p:nvSpPr>
+        <p:spPr>
+          <a:xfrm>
+            <a:off x="1828800" y="3995928"/>
+            <a:ext cx="9875520" cy="1060704"/>
+          </a:xfrm>
+          <a:prstGeom prst="rect">
+            <a:avLst/>
+          </a:prstGeom>
+          <a:noFill/>
+        </p:spPr>
+        <p:txBody>
+          <a:bodyPr wrap="square">
+            <a:spAutoFit/>
+          </a:bodyPr>
+          <a:lstStyle/>
+          <a:p>
+            <a:pPr>
+              <a:lnSpc>
+                <a:spcPct val="112000"/>
+              </a:lnSpc>
+            </a:pPr>
+            <a:r>
+              <a:rPr sz="1300" b="0">
+                <a:solidFill>
+                  <a:srgbClr val="E8E6E1"/>
+                </a:solidFill>
+                <a:latin typeface="Noto Sans TC"/>
+              </a:rPr>
+              <a:t>README 開頭寫 </a:t>
+            </a:r>
+            <a:r>
+              <a:rPr sz="1300" b="1">
+                <a:solidFill>
+                  <a:srgbClr val="6FC7CF"/>
+                </a:solidFill>
+                <a:latin typeface="Noto Sans TC"/>
+              </a:rPr>
+              <a:t>56.2%</a:t>
+            </a:r>
+            <a:r>
+              <a:rPr sz="1300" b="0">
+                <a:solidFill>
+                  <a:srgbClr val="E8E6E1"/>
+                </a:solidFill>
+                <a:latin typeface="Noto Sans TC"/>
+              </a:rPr>
+              <a:t> over </a:t>
+            </a:r>
+            <a:r>
+              <a:rPr sz="1300" b="1">
+                <a:solidFill>
+                  <a:srgbClr val="6FC7CF"/>
+                </a:solidFill>
+                <a:latin typeface="Noto Sans TC"/>
+              </a:rPr>
+              <a:t>8,143</a:t>
+            </a:r>
+            <a:r>
+              <a:rPr sz="1300" b="0">
+                <a:solidFill>
+                  <a:srgbClr val="E8E6E1"/>
+                </a:solidFill>
+                <a:latin typeface="Noto Sans TC"/>
+              </a:rPr>
+              <a:t>——那張表是 </a:t>
+            </a:r>
+            <a:r>
+              <a:rPr sz="1300" b="1">
+                <a:solidFill>
+                  <a:srgbClr val="6FC7CF"/>
+                </a:solidFill>
+                <a:latin typeface="Noto Sans TC"/>
+              </a:rPr>
+              <a:t>08-22</a:t>
+            </a:r>
+            <a:r>
+              <a:rPr sz="1300" b="0">
+                <a:solidFill>
+                  <a:srgbClr val="E8E6E1"/>
+                </a:solidFill>
+                <a:latin typeface="Noto Sans TC"/>
+              </a:rPr>
+              <a:t> 一個 header 寫著 commit uncommitted 的 tree 產的，原則上不可重現；實際 checkpoint 是 </a:t>
+            </a:r>
+            <a:r>
+              <a:rPr sz="1300" b="1">
+                <a:solidFill>
+                  <a:srgbClr val="6FC7CF"/>
+                </a:solidFill>
+                <a:latin typeface="Noto Sans TC"/>
+              </a:rPr>
+              <a:t>52.8%</a:t>
+            </a:r>
+            <a:r>
+              <a:rPr sz="1300" b="0">
+                <a:solidFill>
+                  <a:srgbClr val="E8E6E1"/>
+                </a:solidFill>
+                <a:latin typeface="Noto Sans TC"/>
+              </a:rPr>
+              <a:t> over </a:t>
+            </a:r>
+            <a:r>
+              <a:rPr sz="1300" b="1">
+                <a:solidFill>
+                  <a:srgbClr val="6FC7CF"/>
+                </a:solidFill>
+                <a:latin typeface="Noto Sans TC"/>
+              </a:rPr>
+              <a:t>7,322</a:t>
+            </a:r>
+            <a:r>
+              <a:rPr sz="1300" b="0">
+                <a:solidFill>
+                  <a:srgbClr val="E8E6E1"/>
+                </a:solidFill>
+                <a:latin typeface="Noto Sans TC"/>
+              </a:rPr>
+              <a:t>。同一天發現 models/onnx/ 是重訓前的權重匯出，model-free floor 的比較是用舊權重打新 patch。</a:t>
+            </a:r>
+          </a:p>
+        </p:txBody>
+      </p:sp>
+      <p:sp>
+        <p:nvSpPr>
+          <p:cNvPr id="19" name="Rectangle 18"/>
+          <p:cNvSpPr/>
+          <p:nvPr/>
+        </p:nvSpPr>
+        <p:spPr>
+          <a:xfrm>
+            <a:off x="320040" y="5148072"/>
+            <a:ext cx="11521440" cy="393192"/>
+          </a:xfrm>
+          <a:prstGeom prst="rect">
+            <a:avLst/>
+          </a:prstGeom>
+          <a:solidFill>
+            <a:srgbClr val="2B2416"/>
+          </a:solidFill>
+          <a:ln>
+            <a:noFill/>
+          </a:ln>
+          <a:effectLst/>
+        </p:spPr>
+        <p:style>
+          <a:lnRef idx="1">
+            <a:schemeClr val="accent1"/>
+          </a:lnRef>
+          <a:fillRef idx="3">
+            <a:schemeClr val="accent1"/>
+          </a:fillRef>
+          <a:effectRef idx="2">
+            <a:schemeClr val="accent1"/>
+          </a:effectRef>
+          <a:fontRef idx="minor">
+            <a:schemeClr val="lt1"/>
+          </a:fontRef>
+        </p:style>
+        <p:txBody>
+          <a:bodyPr rtlCol="0" anchor="ctr"/>
+          <a:lstStyle/>
+          <a:p>
+            <a:pPr algn="ctr"/>
+          </a:p>
+        </p:txBody>
+      </p:sp>
+      <p:sp>
+        <p:nvSpPr>
+          <p:cNvPr id="20" name="TextBox 19"/>
+          <p:cNvSpPr txBox="1"/>
+          <p:nvPr/>
+        </p:nvSpPr>
+        <p:spPr>
+          <a:xfrm>
+            <a:off x="457200" y="5184648"/>
+            <a:ext cx="1325880" cy="320040"/>
+          </a:xfrm>
+          <a:prstGeom prst="rect">
+            <a:avLst/>
+          </a:prstGeom>
+          <a:noFill/>
+        </p:spPr>
+        <p:txBody>
+          <a:bodyPr wrap="square">
+            <a:spAutoFit/>
+          </a:bodyPr>
+          <a:lstStyle/>
+          <a:p>
+            <a:pPr>
+              <a:lnSpc>
+                <a:spcPct val="115000"/>
+              </a:lnSpc>
+            </a:pPr>
+            <a:r>
+              <a:rPr sz="1300" b="1">
+                <a:solidFill>
+                  <a:srgbClr val="E2B45F"/>
+                </a:solidFill>
+                <a:latin typeface="Noto Sans TC"/>
+              </a:rPr>
+              <a:t>錯在哪</a:t>
+            </a:r>
+          </a:p>
+        </p:txBody>
+      </p:sp>
+      <p:sp>
+        <p:nvSpPr>
+          <p:cNvPr id="21" name="TextBox 20"/>
+          <p:cNvSpPr txBox="1"/>
+          <p:nvPr/>
+        </p:nvSpPr>
+        <p:spPr>
+          <a:xfrm>
+            <a:off x="1828800" y="5184648"/>
+            <a:ext cx="9875520" cy="320040"/>
+          </a:xfrm>
+          <a:prstGeom prst="rect">
+            <a:avLst/>
+          </a:prstGeom>
+          <a:noFill/>
+        </p:spPr>
+        <p:txBody>
+          <a:bodyPr wrap="square">
+            <a:spAutoFit/>
+          </a:bodyPr>
+          <a:lstStyle/>
+          <a:p>
+            <a:pPr>
+              <a:lnSpc>
+                <a:spcPct val="112000"/>
+              </a:lnSpc>
+            </a:pPr>
+            <a:r>
+              <a:rPr sz="1300" b="0">
+                <a:solidFill>
+                  <a:srgbClr val="E8E6E1"/>
+                </a:solidFill>
+                <a:latin typeface="Noto Sans TC"/>
+              </a:rPr>
+              <a:t>程式對、流程對（對位開了、資料變了、重訓了、門檻重掃了），只有文字被留在原地——在讀者第一眼看的地方。</a:t>
+            </a:r>
+          </a:p>
+        </p:txBody>
+      </p:sp>
+      <p:sp>
+        <p:nvSpPr>
+          <p:cNvPr id="22" name="Rectangle 21"/>
+          <p:cNvSpPr/>
+          <p:nvPr/>
+        </p:nvSpPr>
+        <p:spPr>
+          <a:xfrm>
+            <a:off x="320040" y="5596128"/>
+            <a:ext cx="11521440" cy="640080"/>
+          </a:xfrm>
+          <a:prstGeom prst="rect">
+            <a:avLst/>
+          </a:prstGeom>
+          <a:solidFill>
+            <a:srgbClr val="16292B"/>
+          </a:solidFill>
+          <a:ln>
+            <a:noFill/>
+          </a:ln>
+          <a:effectLst/>
+        </p:spPr>
+        <p:style>
+          <a:lnRef idx="1">
+            <a:schemeClr val="accent1"/>
+          </a:lnRef>
+          <a:fillRef idx="3">
+            <a:schemeClr val="accent1"/>
+          </a:fillRef>
+          <a:effectRef idx="2">
+            <a:schemeClr val="accent1"/>
+          </a:effectRef>
+          <a:fontRef idx="minor">
+            <a:schemeClr val="lt1"/>
+          </a:fontRef>
+        </p:style>
+        <p:txBody>
+          <a:bodyPr rtlCol="0" anchor="ctr"/>
+          <a:lstStyle/>
+          <a:p>
+            <a:pPr algn="ctr"/>
+          </a:p>
+        </p:txBody>
+      </p:sp>
+      <p:sp>
+        <p:nvSpPr>
+          <p:cNvPr id="23" name="TextBox 22"/>
+          <p:cNvSpPr txBox="1"/>
+          <p:nvPr/>
+        </p:nvSpPr>
+        <p:spPr>
+          <a:xfrm>
+            <a:off x="457200" y="5632704"/>
+            <a:ext cx="1325880" cy="566928"/>
+          </a:xfrm>
+          <a:prstGeom prst="rect">
+            <a:avLst/>
+          </a:prstGeom>
+          <a:noFill/>
+        </p:spPr>
+        <p:txBody>
+          <a:bodyPr wrap="square">
+            <a:spAutoFit/>
+          </a:bodyPr>
+          <a:lstStyle/>
+          <a:p>
+            <a:pPr>
+              <a:lnSpc>
+                <a:spcPct val="115000"/>
+              </a:lnSpc>
+            </a:pPr>
+            <a:r>
+              <a:rPr sz="1300" b="1">
+                <a:solidFill>
+                  <a:srgbClr val="6FC7CF"/>
+                </a:solidFill>
+                <a:latin typeface="Noto Sans TC"/>
+              </a:rPr>
+              <a:t>產生的規則</a:t>
+            </a:r>
+          </a:p>
+        </p:txBody>
+      </p:sp>
+      <p:sp>
+        <p:nvSpPr>
+          <p:cNvPr id="24" name="TextBox 23"/>
+          <p:cNvSpPr txBox="1"/>
+          <p:nvPr/>
+        </p:nvSpPr>
+        <p:spPr>
+          <a:xfrm>
+            <a:off x="1828800" y="5632704"/>
+            <a:ext cx="9875520" cy="566928"/>
+          </a:xfrm>
+          <a:prstGeom prst="rect">
+            <a:avLst/>
+          </a:prstGeom>
+          <a:noFill/>
+        </p:spPr>
+        <p:txBody>
+          <a:bodyPr wrap="square">
+            <a:spAutoFit/>
+          </a:bodyPr>
+          <a:lstStyle/>
+          <a:p>
+            <a:pPr>
+              <a:lnSpc>
+                <a:spcPct val="112000"/>
+              </a:lnSpc>
+            </a:pPr>
+            <a:r>
+              <a:rPr sz="1300" b="0">
+                <a:solidFill>
+                  <a:srgbClr val="E8E6E1"/>
+                </a:solidFill>
+                <a:latin typeface="Noto Sans TC"/>
+              </a:rPr>
+              <a:t>第 </a:t>
+            </a:r>
+            <a:r>
+              <a:rPr sz="1300" b="1">
+                <a:solidFill>
+                  <a:srgbClr val="6FC7CF"/>
+                </a:solidFill>
+                <a:latin typeface="Noto Sans TC"/>
+              </a:rPr>
+              <a:t>19</a:t>
+            </a:r>
+            <a:r>
+              <a:rPr sz="1300" b="0">
+                <a:solidFill>
+                  <a:srgbClr val="E8E6E1"/>
+                </a:solidFill>
+                <a:latin typeface="Noto Sans TC"/>
+              </a:rPr>
+              <a:t> 條 invariant：發表的數字要指名它來自哪個 run；舊數字可以出現，但只能在一段標日期的文字裡（「這裡在 </a:t>
+            </a:r>
+            <a:r>
+              <a:rPr sz="1300" b="1">
+                <a:solidFill>
+                  <a:srgbClr val="6FC7CF"/>
+                </a:solidFill>
+                <a:latin typeface="Noto Sans TC"/>
+              </a:rPr>
+              <a:t>08-24</a:t>
+            </a:r>
+            <a:r>
+              <a:rPr sz="1300" b="0">
+                <a:solidFill>
+                  <a:srgbClr val="E8E6E1"/>
+                </a:solidFill>
+                <a:latin typeface="Noto Sans TC"/>
+              </a:rPr>
+              <a:t> 之前寫 </a:t>
+            </a:r>
+            <a:r>
+              <a:rPr sz="1300" b="1">
+                <a:solidFill>
+                  <a:srgbClr val="6FC7CF"/>
+                </a:solidFill>
+                <a:latin typeface="Noto Sans TC"/>
+              </a:rPr>
+              <a:t>56.2%</a:t>
+            </a:r>
+            <a:r>
+              <a:rPr sz="1300" b="0">
+                <a:solidFill>
+                  <a:srgbClr val="E8E6E1"/>
+                </a:solidFill>
+                <a:latin typeface="Noto Sans TC"/>
+              </a:rPr>
+              <a:t>」是讀者需要的那句）。重新匯出進 retrain chain。</a:t>
+            </a:r>
+          </a:p>
+        </p:txBody>
+      </p:sp>
+      <p:sp>
+        <p:nvSpPr>
+          <p:cNvPr id="25" name="TextBox 24"/>
           <p:cNvSpPr txBox="1"/>
           <p:nvPr/>
         </p:nvSpPr>
@@ -28160,7 +28162,7 @@
       </p:sp>
       <p:sp>
         <p:nvSpPr>
-          <p:cNvPr id="5" name="TextBox 4"/>
+          <p:cNvPr id="26" name="TextBox 25"/>
           <p:cNvSpPr txBox="1"/>
           <p:nvPr/>
         </p:nvSpPr>
@@ -28188,11 +28190,11 @@
             <a:r>
               <a:rPr sz="1000" b="0">
                 <a:solidFill>
-                  <a:srgbClr val="9AA0A6"/>
+                  <a:srgbClr val="6FC7CF"/>
                 </a:solidFill>
                 <a:latin typeface="IBM Plex Mono"/>
               </a:rPr>
-              <a:t>29 / 37</a:t>
+              <a:t>★ 主線 9/9 · 29 / 38</a:t>
             </a:r>
           </a:p>
         </p:txBody>
@@ -28476,7 +28478,7 @@
                 </a:solidFill>
                 <a:latin typeface="IBM Plex Mono"/>
               </a:rPr>
-              <a:t>★ 主線 2/9 · 3 / 37</a:t>
+              <a:t>★ 主線 2/9 · 3 / 38</a:t>
             </a:r>
           </a:p>
         </p:txBody>
@@ -28541,464 +28543,198 @@
                 </a:solidFill>
                 <a:latin typeface="Noto Sans TC"/>
               </a:rPr>
-              <a:t>附錄 A · 主線複判模型的訓練曲線</a:t>
-            </a:r>
-          </a:p>
-        </p:txBody>
-      </p:sp>
-      <p:pic>
-        <p:nvPicPr>
-          <p:cNvPr id="3" name="Picture 2" descr="training_curves.png"/>
-          <p:cNvPicPr>
-            <a:picLocks noChangeAspect="1"/>
-          </p:cNvPicPr>
-          <p:nvPr/>
-        </p:nvPicPr>
-        <p:blipFill>
-          <a:blip r:embed="rId2"/>
-          <a:stretch>
-            <a:fillRect/>
-          </a:stretch>
-        </p:blipFill>
-        <p:spPr>
-          <a:xfrm>
-            <a:off x="563727" y="1188720"/>
-            <a:ext cx="11064240" cy="3503676"/>
-          </a:xfrm>
-          <a:prstGeom prst="rect">
-            <a:avLst/>
-          </a:prstGeom>
-        </p:spPr>
-      </p:pic>
+              <a:t>還沒做的，和為什麼沒做</a:t>
+            </a:r>
+          </a:p>
+        </p:txBody>
+      </p:sp>
+      <p:sp>
+        <p:nvSpPr>
+          <p:cNvPr id="3" name="TextBox 2"/>
+          <p:cNvSpPr txBox="1"/>
+          <p:nvPr/>
+        </p:nvSpPr>
+        <p:spPr>
+          <a:xfrm>
+            <a:off x="548640" y="1280160"/>
+            <a:ext cx="11064240" cy="5029200"/>
+          </a:xfrm>
+          <a:prstGeom prst="rect">
+            <a:avLst/>
+          </a:prstGeom>
+          <a:noFill/>
+        </p:spPr>
+        <p:txBody>
+          <a:bodyPr wrap="square">
+            <a:spAutoFit/>
+          </a:bodyPr>
+          <a:lstStyle/>
+          <a:p>
+            <a:pPr>
+              <a:lnSpc>
+                <a:spcPct val="125000"/>
+              </a:lnSpc>
+            </a:pPr>
+            <a:r>
+              <a:rPr sz="1800" b="0">
+                <a:solidFill>
+                  <a:srgbClr val="6FC7CF"/>
+                </a:solidFill>
+                <a:latin typeface="Noto Sans TC"/>
+              </a:rPr>
+              <a:t>• </a:t>
+            </a:r>
+            <a:r>
+              <a:rPr sz="1800" b="0">
+                <a:solidFill>
+                  <a:srgbClr val="E8E6E1"/>
+                </a:solidFill>
+                <a:latin typeface="Noto Sans TC"/>
+              </a:rPr>
+              <a:t>Shadow mode（模型跟著現有流程跑、只記錄不決定）：正確的下一步，但沒有產線——在這裡建等於拿種出來的資料跟自己比。拒絕，不是忘記。</a:t>
+            </a:r>
+          </a:p>
+          <a:p>
+            <a:pPr>
+              <a:lnSpc>
+                <a:spcPct val="125000"/>
+              </a:lnSpc>
+            </a:pPr>
+            <a:r>
+              <a:rPr sz="1800" b="0">
+                <a:solidFill>
+                  <a:srgbClr val="6FC7CF"/>
+                </a:solidFill>
+                <a:latin typeface="Noto Sans TC"/>
+              </a:rPr>
+              <a:t>• </a:t>
+            </a:r>
+            <a:r>
+              <a:rPr sz="1800" b="0">
+                <a:solidFill>
+                  <a:srgbClr val="E8E6E1"/>
+                </a:solidFill>
+                <a:latin typeface="Noto Sans TC"/>
+              </a:rPr>
+              <a:t>依賴參數（第一步的結果餵第二步）：知道長什麼樣，等真的有人問出那種題。</a:t>
+            </a:r>
+          </a:p>
+          <a:p>
+            <a:pPr>
+              <a:lnSpc>
+                <a:spcPct val="125000"/>
+              </a:lnSpc>
+            </a:pPr>
+            <a:r>
+              <a:rPr sz="1800" b="0">
+                <a:solidFill>
+                  <a:srgbClr val="6FC7CF"/>
+                </a:solidFill>
+                <a:latin typeface="Noto Sans TC"/>
+              </a:rPr>
+              <a:t>• </a:t>
+            </a:r>
+            <a:r>
+              <a:rPr sz="1800" b="0">
+                <a:solidFill>
+                  <a:srgbClr val="E8E6E1"/>
+                </a:solidFill>
+                <a:latin typeface="Noto Sans TC"/>
+              </a:rPr>
+              <a:t>用作業員的更正重訓：資料庫裡真的人判過的只有五筆，四筆已刪；種出來的資料重訓是自己教自己。</a:t>
+            </a:r>
+          </a:p>
+          <a:p>
+            <a:pPr>
+              <a:lnSpc>
+                <a:spcPct val="125000"/>
+              </a:lnSpc>
+            </a:pPr>
+            <a:r>
+              <a:rPr sz="1800" b="0">
+                <a:solidFill>
+                  <a:srgbClr val="6FC7CF"/>
+                </a:solidFill>
+                <a:latin typeface="Noto Sans TC"/>
+              </a:rPr>
+              <a:t>• </a:t>
+            </a:r>
+            <a:r>
+              <a:rPr sz="1800" b="0">
+                <a:solidFill>
+                  <a:srgbClr val="E8E6E1"/>
+                </a:solidFill>
+                <a:latin typeface="Noto Sans TC"/>
+              </a:rPr>
+              <a:t>電測：關掉 short 那 </a:t>
+            </a:r>
+            <a:r>
+              <a:rPr sz="1800" b="1">
+                <a:solidFill>
+                  <a:srgbClr val="6FC7CF"/>
+                </a:solidFill>
+                <a:latin typeface="Noto Sans TC"/>
+              </a:rPr>
+              <a:t>1.55%</a:t>
+            </a:r>
+            <a:r>
+              <a:rPr sz="1800" b="0">
+                <a:solidFill>
+                  <a:srgbClr val="E8E6E1"/>
+                </a:solidFill>
+                <a:latin typeface="Noto Sans TC"/>
+              </a:rPr>
+              <a:t> 漏網的唯一方法，不在這個系統裡，WI-</a:t>
+            </a:r>
+            <a:r>
+              <a:rPr sz="1800" b="1">
+                <a:solidFill>
+                  <a:srgbClr val="6FC7CF"/>
+                </a:solidFill>
+                <a:latin typeface="Noto Sans TC"/>
+              </a:rPr>
+              <a:t>201</a:t>
+            </a:r>
+            <a:r>
+              <a:rPr sz="1800" b="0">
+                <a:solidFill>
+                  <a:srgbClr val="E8E6E1"/>
+                </a:solidFill>
+                <a:latin typeface="Noto Sans TC"/>
+              </a:rPr>
+              <a:t> 本來就寫了。</a:t>
+            </a:r>
+          </a:p>
+          <a:p>
+            <a:pPr>
+              <a:lnSpc>
+                <a:spcPct val="125000"/>
+              </a:lnSpc>
+            </a:pPr>
+            <a:r>
+              <a:rPr sz="1800" b="0">
+                <a:solidFill>
+                  <a:srgbClr val="6FC7CF"/>
+                </a:solidFill>
+                <a:latin typeface="Noto Sans TC"/>
+              </a:rPr>
+              <a:t>• </a:t>
+            </a:r>
+            <a:r>
+              <a:rPr sz="1800" b="0">
+                <a:solidFill>
+                  <a:srgbClr val="E8E6E1"/>
+                </a:solidFill>
+                <a:latin typeface="Noto Sans TC"/>
+              </a:rPr>
+              <a:t>一句收尾：每個門檻引得到檔案、每個數字在 benchmarks 裡、每個錯有它產生的測試。</a:t>
+            </a:r>
+          </a:p>
+        </p:txBody>
+      </p:sp>
       <p:sp>
         <p:nvSpPr>
           <p:cNvPr id="4" name="TextBox 3"/>
-          <p:cNvSpPr txBox="1"/>
-          <p:nvPr/>
-        </p:nvSpPr>
-        <p:spPr>
-          <a:xfrm>
-            <a:off x="548640" y="4829556"/>
-            <a:ext cx="5440680" cy="976884"/>
-          </a:xfrm>
-          <a:prstGeom prst="rect">
-            <a:avLst/>
-          </a:prstGeom>
-          <a:noFill/>
-        </p:spPr>
-        <p:txBody>
-          <a:bodyPr wrap="square">
-            <a:spAutoFit/>
-          </a:bodyPr>
-          <a:lstStyle/>
-          <a:p>
-            <a:pPr>
-              <a:lnSpc>
-                <a:spcPct val="125000"/>
-              </a:lnSpc>
-            </a:pPr>
-            <a:r>
-              <a:rPr sz="1200" b="0">
-                <a:solidFill>
-                  <a:srgbClr val="6FC7CF"/>
-                </a:solidFill>
-                <a:latin typeface="Noto Sans TC"/>
-              </a:rPr>
-              <a:t>• </a:t>
-            </a:r>
-            <a:r>
-              <a:rPr sz="1200" b="0">
-                <a:solidFill>
-                  <a:srgbClr val="E8E6E1"/>
-                </a:solidFill>
-                <a:latin typeface="Noto Sans TC"/>
-              </a:rPr>
-              <a:t>ResNet-</a:t>
-            </a:r>
-            <a:r>
-              <a:rPr sz="1200" b="1">
-                <a:solidFill>
-                  <a:srgbClr val="6FC7CF"/>
-                </a:solidFill>
-                <a:latin typeface="Noto Sans TC"/>
-              </a:rPr>
-              <a:t>18</a:t>
-            </a:r>
-            <a:r>
-              <a:rPr sz="1200" b="0">
-                <a:solidFill>
-                  <a:srgbClr val="E8E6E1"/>
-                </a:solidFill>
-                <a:latin typeface="Noto Sans TC"/>
-              </a:rPr>
-              <a:t>，</a:t>
-            </a:r>
-            <a:r>
-              <a:rPr sz="1200" b="1">
-                <a:solidFill>
-                  <a:srgbClr val="6FC7CF"/>
-                </a:solidFill>
-                <a:latin typeface="Noto Sans TC"/>
-              </a:rPr>
-              <a:t>3×64×64</a:t>
-            </a:r>
-            <a:r>
-              <a:rPr sz="1200" b="0">
-                <a:solidFill>
-                  <a:srgbClr val="E8E6E1"/>
-                </a:solidFill>
-                <a:latin typeface="Noto Sans TC"/>
-              </a:rPr>
-              <a:t> 輸入，</a:t>
-            </a:r>
-            <a:r>
-              <a:rPr sz="1200" b="1">
-                <a:solidFill>
-                  <a:srgbClr val="6FC7CF"/>
-                </a:solidFill>
-                <a:latin typeface="Noto Sans TC"/>
-              </a:rPr>
-              <a:t>10</a:t>
-            </a:r>
-            <a:r>
-              <a:rPr sz="1200" b="0">
-                <a:solidFill>
-                  <a:srgbClr val="E8E6E1"/>
-                </a:solidFill>
-                <a:latin typeface="Noto Sans TC"/>
-              </a:rPr>
-              <a:t> 個 epoch，M</a:t>
-            </a:r>
-            <a:r>
-              <a:rPr sz="1200" b="1">
-                <a:solidFill>
-                  <a:srgbClr val="6FC7CF"/>
-                </a:solidFill>
-                <a:latin typeface="Noto Sans TC"/>
-              </a:rPr>
-              <a:t>5</a:t>
-            </a:r>
-            <a:r>
-              <a:rPr sz="1200" b="0">
-                <a:solidFill>
-                  <a:srgbClr val="E8E6E1"/>
-                </a:solidFill>
-                <a:latin typeface="Noto Sans TC"/>
-              </a:rPr>
-              <a:t> Air 上約 </a:t>
-            </a:r>
-            <a:r>
-              <a:rPr sz="1200" b="1">
-                <a:solidFill>
-                  <a:srgbClr val="6FC7CF"/>
-                </a:solidFill>
-                <a:latin typeface="Noto Sans TC"/>
-              </a:rPr>
-              <a:t>4</a:t>
-            </a:r>
-            <a:r>
-              <a:rPr sz="1200" b="0">
-                <a:solidFill>
-                  <a:srgbClr val="E8E6E1"/>
-                </a:solidFill>
-                <a:latin typeface="Noto Sans TC"/>
-              </a:rPr>
-              <a:t> 分鐘（每 epoch </a:t>
-            </a:r>
-            <a:r>
-              <a:rPr sz="1200" b="1">
-                <a:solidFill>
-                  <a:srgbClr val="6FC7CF"/>
-                </a:solidFill>
-                <a:latin typeface="Noto Sans TC"/>
-              </a:rPr>
-              <a:t>6</a:t>
-            </a:r>
-            <a:r>
-              <a:rPr sz="1200" b="0">
-                <a:solidFill>
-                  <a:srgbClr val="E8E6E1"/>
-                </a:solidFill>
-                <a:latin typeface="Noto Sans TC"/>
-              </a:rPr>
-              <a:t> 秒）</a:t>
-            </a:r>
-          </a:p>
-          <a:p>
-            <a:pPr>
-              <a:lnSpc>
-                <a:spcPct val="125000"/>
-              </a:lnSpc>
-            </a:pPr>
-            <a:r>
-              <a:rPr sz="1200" b="0">
-                <a:solidFill>
-                  <a:srgbClr val="6FC7CF"/>
-                </a:solidFill>
-                <a:latin typeface="Noto Sans TC"/>
-              </a:rPr>
-              <a:t>• </a:t>
-            </a:r>
-            <a:r>
-              <a:rPr sz="1200" b="0">
-                <a:solidFill>
-                  <a:srgbClr val="E8E6E1"/>
-                </a:solidFill>
-                <a:latin typeface="Noto Sans TC"/>
-              </a:rPr>
-              <a:t>val_accuracy 第 </a:t>
-            </a:r>
-            <a:r>
-              <a:rPr sz="1200" b="1">
-                <a:solidFill>
-                  <a:srgbClr val="6FC7CF"/>
-                </a:solidFill>
-                <a:latin typeface="Noto Sans TC"/>
-              </a:rPr>
-              <a:t>2</a:t>
-            </a:r>
-            <a:r>
-              <a:rPr sz="1200" b="0">
-                <a:solidFill>
-                  <a:srgbClr val="E8E6E1"/>
-                </a:solidFill>
-                <a:latin typeface="Noto Sans TC"/>
-              </a:rPr>
-              <a:t> 個 epoch 就過 </a:t>
-            </a:r>
-            <a:r>
-              <a:rPr sz="1200" b="1">
-                <a:solidFill>
-                  <a:srgbClr val="6FC7CF"/>
-                </a:solidFill>
-                <a:latin typeface="Noto Sans TC"/>
-              </a:rPr>
-              <a:t>97%</a:t>
-            </a:r>
-            <a:r>
-              <a:rPr sz="1200" b="0">
-                <a:solidFill>
-                  <a:srgbClr val="E8E6E1"/>
-                </a:solidFill>
-                <a:latin typeface="Noto Sans TC"/>
-              </a:rPr>
-              <a:t>，之後幾乎平——它不是選模型的指標</a:t>
-            </a:r>
-          </a:p>
-          <a:p>
-            <a:pPr>
-              <a:lnSpc>
-                <a:spcPct val="125000"/>
-              </a:lnSpc>
-            </a:pPr>
-            <a:r>
-              <a:rPr sz="1200" b="0">
-                <a:solidFill>
-                  <a:srgbClr val="6FC7CF"/>
-                </a:solidFill>
-                <a:latin typeface="Noto Sans TC"/>
-              </a:rPr>
-              <a:t>• </a:t>
-            </a:r>
-            <a:r>
-              <a:rPr sz="1200" b="0">
-                <a:solidFill>
-                  <a:srgbClr val="E8E6E1"/>
-                </a:solidFill>
-                <a:latin typeface="Noto Sans TC"/>
-              </a:rPr>
-              <a:t>val_review_reduction 從 </a:t>
-            </a:r>
-            <a:r>
-              <a:rPr sz="1200" b="1">
-                <a:solidFill>
-                  <a:srgbClr val="6FC7CF"/>
-                </a:solidFill>
-                <a:latin typeface="Noto Sans TC"/>
-              </a:rPr>
-              <a:t>0.40</a:t>
-            </a:r>
-            <a:r>
-              <a:rPr sz="1200" b="0">
-                <a:solidFill>
-                  <a:srgbClr val="E8E6E1"/>
-                </a:solidFill>
-                <a:latin typeface="Noto Sans TC"/>
-              </a:rPr>
-              <a:t> 爬到 </a:t>
-            </a:r>
-            <a:r>
-              <a:rPr sz="1200" b="1">
-                <a:solidFill>
-                  <a:srgbClr val="6FC7CF"/>
-                </a:solidFill>
-                <a:latin typeface="Noto Sans TC"/>
-              </a:rPr>
-              <a:t>0.45</a:t>
-            </a:r>
-            <a:r>
-              <a:rPr sz="1200" b="0">
-                <a:solidFill>
-                  <a:srgbClr val="E8E6E1"/>
-                </a:solidFill>
-                <a:latin typeface="Noto Sans TC"/>
-              </a:rPr>
-              <a:t> 上下，第 </a:t>
-            </a:r>
-            <a:r>
-              <a:rPr sz="1200" b="1">
-                <a:solidFill>
-                  <a:srgbClr val="6FC7CF"/>
-                </a:solidFill>
-                <a:latin typeface="Noto Sans TC"/>
-              </a:rPr>
-              <a:t>9</a:t>
-            </a:r>
-            <a:r>
-              <a:rPr sz="1200" b="0">
-                <a:solidFill>
-                  <a:srgbClr val="E8E6E1"/>
-                </a:solidFill>
-                <a:latin typeface="Noto Sans TC"/>
-              </a:rPr>
-              <a:t> 個 epoch 最高；選 checkpoint 看這條，因為頭條是它</a:t>
-            </a:r>
-          </a:p>
-        </p:txBody>
-      </p:sp>
-      <p:sp>
-        <p:nvSpPr>
-          <p:cNvPr id="5" name="TextBox 4"/>
-          <p:cNvSpPr txBox="1"/>
-          <p:nvPr/>
-        </p:nvSpPr>
-        <p:spPr>
-          <a:xfrm>
-            <a:off x="6172200" y="4829556"/>
-            <a:ext cx="5440680" cy="976884"/>
-          </a:xfrm>
-          <a:prstGeom prst="rect">
-            <a:avLst/>
-          </a:prstGeom>
-          <a:noFill/>
-        </p:spPr>
-        <p:txBody>
-          <a:bodyPr wrap="square">
-            <a:spAutoFit/>
-          </a:bodyPr>
-          <a:lstStyle/>
-          <a:p>
-            <a:pPr>
-              <a:lnSpc>
-                <a:spcPct val="125000"/>
-              </a:lnSpc>
-            </a:pPr>
-            <a:r>
-              <a:rPr sz="1200" b="0">
-                <a:solidFill>
-                  <a:srgbClr val="6FC7CF"/>
-                </a:solidFill>
-                <a:latin typeface="Noto Sans TC"/>
-              </a:rPr>
-              <a:t>• </a:t>
-            </a:r>
-            <a:r>
-              <a:rPr sz="1200" b="0">
-                <a:solidFill>
-                  <a:srgbClr val="E8E6E1"/>
-                </a:solidFill>
-                <a:latin typeface="Noto Sans TC"/>
-              </a:rPr>
-              <a:t>train_loss 一路降到 </a:t>
-            </a:r>
-            <a:r>
-              <a:rPr sz="1200" b="1">
-                <a:solidFill>
-                  <a:srgbClr val="6FC7CF"/>
-                </a:solidFill>
-                <a:latin typeface="Noto Sans TC"/>
-              </a:rPr>
-              <a:t>0.02</a:t>
-            </a:r>
-            <a:r>
-              <a:rPr sz="1200" b="0">
-                <a:solidFill>
-                  <a:srgbClr val="E8E6E1"/>
-                </a:solidFill>
-                <a:latin typeface="Noto Sans TC"/>
-              </a:rPr>
-              <a:t> 而驗證指標不再動：再訓是在背訓練集，不是在學</a:t>
-            </a:r>
-          </a:p>
-          <a:p>
-            <a:pPr>
-              <a:lnSpc>
-                <a:spcPct val="125000"/>
-              </a:lnSpc>
-            </a:pPr>
-            <a:r>
-              <a:rPr sz="1200" b="0">
-                <a:solidFill>
-                  <a:srgbClr val="6FC7CF"/>
-                </a:solidFill>
-                <a:latin typeface="Noto Sans TC"/>
-              </a:rPr>
-              <a:t>• </a:t>
-            </a:r>
-            <a:r>
-              <a:rPr sz="1200" b="0">
-                <a:solidFill>
-                  <a:srgbClr val="E8E6E1"/>
-                </a:solidFill>
-                <a:latin typeface="Noto Sans TC"/>
-              </a:rPr>
-              <a:t>驗證集按板子切，所以這條線是對「沒看過的板子」的估計，不是對 patch 的</a:t>
-            </a:r>
-          </a:p>
-        </p:txBody>
-      </p:sp>
-      <p:sp>
-        <p:nvSpPr>
-          <p:cNvPr id="6" name="TextBox 5"/>
-          <p:cNvSpPr txBox="1"/>
-          <p:nvPr/>
-        </p:nvSpPr>
-        <p:spPr>
-          <a:xfrm>
-            <a:off x="548640" y="5897880"/>
-            <a:ext cx="11155680" cy="365760"/>
-          </a:xfrm>
-          <a:prstGeom prst="rect">
-            <a:avLst/>
-          </a:prstGeom>
-          <a:noFill/>
-        </p:spPr>
-        <p:txBody>
-          <a:bodyPr wrap="square">
-            <a:spAutoFit/>
-          </a:bodyPr>
-          <a:lstStyle/>
-          <a:p>
-            <a:pPr>
-              <a:lnSpc>
-                <a:spcPct val="115000"/>
-              </a:lnSpc>
-            </a:pPr>
-            <a:r>
-              <a:rPr sz="950" b="0">
-                <a:solidFill>
-                  <a:srgbClr val="9AA0A6"/>
-                </a:solidFill>
-                <a:latin typeface="IBM Plex Mono"/>
-              </a:rPr>
-              <a:t>models/history.json · train_loss / val_accuracy / val_review_reduction（≤0.5% 漏網下的驗證集省掉比例）</a:t>
-            </a:r>
-          </a:p>
-        </p:txBody>
-      </p:sp>
-      <p:sp>
-        <p:nvSpPr>
-          <p:cNvPr id="7" name="TextBox 6"/>
           <p:cNvSpPr txBox="1"/>
           <p:nvPr/>
         </p:nvSpPr>
@@ -29030,14 +28766,14 @@
                 </a:solidFill>
                 <a:latin typeface="IBM Plex Mono"/>
               </a:rPr>
-              <a:t>附錄 · 備查數字</a:t>
-            </a:r>
-          </a:p>
-        </p:txBody>
-      </p:sp>
-      <p:sp>
-        <p:nvSpPr>
-          <p:cNvPr id="8" name="TextBox 7"/>
+              <a:t>收尾</a:t>
+            </a:r>
+          </a:p>
+        </p:txBody>
+      </p:sp>
+      <p:sp>
+        <p:nvSpPr>
+          <p:cNvPr id="5" name="TextBox 4"/>
           <p:cNvSpPr txBox="1"/>
           <p:nvPr/>
         </p:nvSpPr>
@@ -29069,7 +28805,7 @@
                 </a:solidFill>
                 <a:latin typeface="IBM Plex Mono"/>
               </a:rPr>
-              <a:t>30 / 37</a:t>
+              <a:t>30 / 38</a:t>
             </a:r>
           </a:p>
         </p:txBody>
@@ -29083,6 +28819,599 @@
 </file>
 
 <file path=ppt/slides/slide31.xml><?xml version="1.0" encoding="utf-8"?>
+<p:sld xmlns:a="http://schemas.openxmlformats.org/drawingml/2006/main" xmlns:p="http://schemas.openxmlformats.org/presentationml/2006/main" xmlns:r="http://schemas.openxmlformats.org/officeDocument/2006/relationships">
+  <p:cSld>
+    <p:bg>
+      <p:bgPr>
+        <a:solidFill>
+          <a:srgbClr val="15171A"/>
+        </a:solidFill>
+        <a:effectLst/>
+      </p:bgPr>
+    </p:bg>
+    <p:spTree>
+      <p:nvGrpSpPr>
+        <p:cNvPr id="1" name=""/>
+        <p:cNvGrpSpPr/>
+        <p:nvPr/>
+      </p:nvGrpSpPr>
+      <p:grpSpPr/>
+      <p:sp>
+        <p:nvSpPr>
+          <p:cNvPr id="2" name="TextBox 1"/>
+          <p:cNvSpPr txBox="1"/>
+          <p:nvPr/>
+        </p:nvSpPr>
+        <p:spPr>
+          <a:xfrm>
+            <a:off x="457200" y="274320"/>
+            <a:ext cx="11247120" cy="731520"/>
+          </a:xfrm>
+          <a:prstGeom prst="rect">
+            <a:avLst/>
+          </a:prstGeom>
+          <a:noFill/>
+        </p:spPr>
+        <p:txBody>
+          <a:bodyPr wrap="square">
+            <a:spAutoFit/>
+          </a:bodyPr>
+          <a:lstStyle/>
+          <a:p>
+            <a:pPr>
+              <a:lnSpc>
+                <a:spcPct val="115000"/>
+              </a:lnSpc>
+            </a:pPr>
+            <a:r>
+              <a:rPr sz="2800" b="1">
+                <a:solidFill>
+                  <a:srgbClr val="E8E6E1"/>
+                </a:solidFill>
+                <a:latin typeface="Noto Sans TC"/>
+              </a:rPr>
+              <a:t>附錄 A · 主線複判模型的訓練曲線</a:t>
+            </a:r>
+          </a:p>
+        </p:txBody>
+      </p:sp>
+      <p:pic>
+        <p:nvPicPr>
+          <p:cNvPr id="3" name="Picture 2" descr="training_curves.png"/>
+          <p:cNvPicPr>
+            <a:picLocks noChangeAspect="1"/>
+          </p:cNvPicPr>
+          <p:nvPr/>
+        </p:nvPicPr>
+        <p:blipFill>
+          <a:blip r:embed="rId2"/>
+          <a:stretch>
+            <a:fillRect/>
+          </a:stretch>
+        </p:blipFill>
+        <p:spPr>
+          <a:xfrm>
+            <a:off x="563727" y="1188720"/>
+            <a:ext cx="11064240" cy="3503676"/>
+          </a:xfrm>
+          <a:prstGeom prst="rect">
+            <a:avLst/>
+          </a:prstGeom>
+        </p:spPr>
+      </p:pic>
+      <p:sp>
+        <p:nvSpPr>
+          <p:cNvPr id="4" name="TextBox 3"/>
+          <p:cNvSpPr txBox="1"/>
+          <p:nvPr/>
+        </p:nvSpPr>
+        <p:spPr>
+          <a:xfrm>
+            <a:off x="548640" y="4829556"/>
+            <a:ext cx="5440680" cy="976884"/>
+          </a:xfrm>
+          <a:prstGeom prst="rect">
+            <a:avLst/>
+          </a:prstGeom>
+          <a:noFill/>
+        </p:spPr>
+        <p:txBody>
+          <a:bodyPr wrap="square">
+            <a:spAutoFit/>
+          </a:bodyPr>
+          <a:lstStyle/>
+          <a:p>
+            <a:pPr>
+              <a:lnSpc>
+                <a:spcPct val="125000"/>
+              </a:lnSpc>
+            </a:pPr>
+            <a:r>
+              <a:rPr sz="1200" b="0">
+                <a:solidFill>
+                  <a:srgbClr val="6FC7CF"/>
+                </a:solidFill>
+                <a:latin typeface="Noto Sans TC"/>
+              </a:rPr>
+              <a:t>• </a:t>
+            </a:r>
+            <a:r>
+              <a:rPr sz="1200" b="0">
+                <a:solidFill>
+                  <a:srgbClr val="E8E6E1"/>
+                </a:solidFill>
+                <a:latin typeface="Noto Sans TC"/>
+              </a:rPr>
+              <a:t>ResNet-</a:t>
+            </a:r>
+            <a:r>
+              <a:rPr sz="1200" b="1">
+                <a:solidFill>
+                  <a:srgbClr val="6FC7CF"/>
+                </a:solidFill>
+                <a:latin typeface="Noto Sans TC"/>
+              </a:rPr>
+              <a:t>18</a:t>
+            </a:r>
+            <a:r>
+              <a:rPr sz="1200" b="0">
+                <a:solidFill>
+                  <a:srgbClr val="E8E6E1"/>
+                </a:solidFill>
+                <a:latin typeface="Noto Sans TC"/>
+              </a:rPr>
+              <a:t>，</a:t>
+            </a:r>
+            <a:r>
+              <a:rPr sz="1200" b="1">
+                <a:solidFill>
+                  <a:srgbClr val="6FC7CF"/>
+                </a:solidFill>
+                <a:latin typeface="Noto Sans TC"/>
+              </a:rPr>
+              <a:t>3×64×64</a:t>
+            </a:r>
+            <a:r>
+              <a:rPr sz="1200" b="0">
+                <a:solidFill>
+                  <a:srgbClr val="E8E6E1"/>
+                </a:solidFill>
+                <a:latin typeface="Noto Sans TC"/>
+              </a:rPr>
+              <a:t> 輸入，</a:t>
+            </a:r>
+            <a:r>
+              <a:rPr sz="1200" b="1">
+                <a:solidFill>
+                  <a:srgbClr val="6FC7CF"/>
+                </a:solidFill>
+                <a:latin typeface="Noto Sans TC"/>
+              </a:rPr>
+              <a:t>10</a:t>
+            </a:r>
+            <a:r>
+              <a:rPr sz="1200" b="0">
+                <a:solidFill>
+                  <a:srgbClr val="E8E6E1"/>
+                </a:solidFill>
+                <a:latin typeface="Noto Sans TC"/>
+              </a:rPr>
+              <a:t> 個 epoch，M</a:t>
+            </a:r>
+            <a:r>
+              <a:rPr sz="1200" b="1">
+                <a:solidFill>
+                  <a:srgbClr val="6FC7CF"/>
+                </a:solidFill>
+                <a:latin typeface="Noto Sans TC"/>
+              </a:rPr>
+              <a:t>5</a:t>
+            </a:r>
+            <a:r>
+              <a:rPr sz="1200" b="0">
+                <a:solidFill>
+                  <a:srgbClr val="E8E6E1"/>
+                </a:solidFill>
+                <a:latin typeface="Noto Sans TC"/>
+              </a:rPr>
+              <a:t> Air 上約 </a:t>
+            </a:r>
+            <a:r>
+              <a:rPr sz="1200" b="1">
+                <a:solidFill>
+                  <a:srgbClr val="6FC7CF"/>
+                </a:solidFill>
+                <a:latin typeface="Noto Sans TC"/>
+              </a:rPr>
+              <a:t>4</a:t>
+            </a:r>
+            <a:r>
+              <a:rPr sz="1200" b="0">
+                <a:solidFill>
+                  <a:srgbClr val="E8E6E1"/>
+                </a:solidFill>
+                <a:latin typeface="Noto Sans TC"/>
+              </a:rPr>
+              <a:t> 分鐘（每 epoch </a:t>
+            </a:r>
+            <a:r>
+              <a:rPr sz="1200" b="1">
+                <a:solidFill>
+                  <a:srgbClr val="6FC7CF"/>
+                </a:solidFill>
+                <a:latin typeface="Noto Sans TC"/>
+              </a:rPr>
+              <a:t>6</a:t>
+            </a:r>
+            <a:r>
+              <a:rPr sz="1200" b="0">
+                <a:solidFill>
+                  <a:srgbClr val="E8E6E1"/>
+                </a:solidFill>
+                <a:latin typeface="Noto Sans TC"/>
+              </a:rPr>
+              <a:t> 秒）</a:t>
+            </a:r>
+          </a:p>
+          <a:p>
+            <a:pPr>
+              <a:lnSpc>
+                <a:spcPct val="125000"/>
+              </a:lnSpc>
+            </a:pPr>
+            <a:r>
+              <a:rPr sz="1200" b="0">
+                <a:solidFill>
+                  <a:srgbClr val="6FC7CF"/>
+                </a:solidFill>
+                <a:latin typeface="Noto Sans TC"/>
+              </a:rPr>
+              <a:t>• </a:t>
+            </a:r>
+            <a:r>
+              <a:rPr sz="1200" b="0">
+                <a:solidFill>
+                  <a:srgbClr val="E8E6E1"/>
+                </a:solidFill>
+                <a:latin typeface="Noto Sans TC"/>
+              </a:rPr>
+              <a:t>val_accuracy 第 </a:t>
+            </a:r>
+            <a:r>
+              <a:rPr sz="1200" b="1">
+                <a:solidFill>
+                  <a:srgbClr val="6FC7CF"/>
+                </a:solidFill>
+                <a:latin typeface="Noto Sans TC"/>
+              </a:rPr>
+              <a:t>2</a:t>
+            </a:r>
+            <a:r>
+              <a:rPr sz="1200" b="0">
+                <a:solidFill>
+                  <a:srgbClr val="E8E6E1"/>
+                </a:solidFill>
+                <a:latin typeface="Noto Sans TC"/>
+              </a:rPr>
+              <a:t> 個 epoch 就過 </a:t>
+            </a:r>
+            <a:r>
+              <a:rPr sz="1200" b="1">
+                <a:solidFill>
+                  <a:srgbClr val="6FC7CF"/>
+                </a:solidFill>
+                <a:latin typeface="Noto Sans TC"/>
+              </a:rPr>
+              <a:t>97%</a:t>
+            </a:r>
+            <a:r>
+              <a:rPr sz="1200" b="0">
+                <a:solidFill>
+                  <a:srgbClr val="E8E6E1"/>
+                </a:solidFill>
+                <a:latin typeface="Noto Sans TC"/>
+              </a:rPr>
+              <a:t>，之後幾乎平——它不是選模型的指標</a:t>
+            </a:r>
+          </a:p>
+          <a:p>
+            <a:pPr>
+              <a:lnSpc>
+                <a:spcPct val="125000"/>
+              </a:lnSpc>
+            </a:pPr>
+            <a:r>
+              <a:rPr sz="1200" b="0">
+                <a:solidFill>
+                  <a:srgbClr val="6FC7CF"/>
+                </a:solidFill>
+                <a:latin typeface="Noto Sans TC"/>
+              </a:rPr>
+              <a:t>• </a:t>
+            </a:r>
+            <a:r>
+              <a:rPr sz="1200" b="0">
+                <a:solidFill>
+                  <a:srgbClr val="E8E6E1"/>
+                </a:solidFill>
+                <a:latin typeface="Noto Sans TC"/>
+              </a:rPr>
+              <a:t>val_review_reduction 從 </a:t>
+            </a:r>
+            <a:r>
+              <a:rPr sz="1200" b="1">
+                <a:solidFill>
+                  <a:srgbClr val="6FC7CF"/>
+                </a:solidFill>
+                <a:latin typeface="Noto Sans TC"/>
+              </a:rPr>
+              <a:t>0.40</a:t>
+            </a:r>
+            <a:r>
+              <a:rPr sz="1200" b="0">
+                <a:solidFill>
+                  <a:srgbClr val="E8E6E1"/>
+                </a:solidFill>
+                <a:latin typeface="Noto Sans TC"/>
+              </a:rPr>
+              <a:t> 爬到 </a:t>
+            </a:r>
+            <a:r>
+              <a:rPr sz="1200" b="1">
+                <a:solidFill>
+                  <a:srgbClr val="6FC7CF"/>
+                </a:solidFill>
+                <a:latin typeface="Noto Sans TC"/>
+              </a:rPr>
+              <a:t>0.45</a:t>
+            </a:r>
+            <a:r>
+              <a:rPr sz="1200" b="0">
+                <a:solidFill>
+                  <a:srgbClr val="E8E6E1"/>
+                </a:solidFill>
+                <a:latin typeface="Noto Sans TC"/>
+              </a:rPr>
+              <a:t> 上下，第 </a:t>
+            </a:r>
+            <a:r>
+              <a:rPr sz="1200" b="1">
+                <a:solidFill>
+                  <a:srgbClr val="6FC7CF"/>
+                </a:solidFill>
+                <a:latin typeface="Noto Sans TC"/>
+              </a:rPr>
+              <a:t>9</a:t>
+            </a:r>
+            <a:r>
+              <a:rPr sz="1200" b="0">
+                <a:solidFill>
+                  <a:srgbClr val="E8E6E1"/>
+                </a:solidFill>
+                <a:latin typeface="Noto Sans TC"/>
+              </a:rPr>
+              <a:t> 個 epoch 最高；選 checkpoint 看這條，因為頭條是它</a:t>
+            </a:r>
+          </a:p>
+        </p:txBody>
+      </p:sp>
+      <p:sp>
+        <p:nvSpPr>
+          <p:cNvPr id="5" name="TextBox 4"/>
+          <p:cNvSpPr txBox="1"/>
+          <p:nvPr/>
+        </p:nvSpPr>
+        <p:spPr>
+          <a:xfrm>
+            <a:off x="6172200" y="4829556"/>
+            <a:ext cx="5440680" cy="976884"/>
+          </a:xfrm>
+          <a:prstGeom prst="rect">
+            <a:avLst/>
+          </a:prstGeom>
+          <a:noFill/>
+        </p:spPr>
+        <p:txBody>
+          <a:bodyPr wrap="square">
+            <a:spAutoFit/>
+          </a:bodyPr>
+          <a:lstStyle/>
+          <a:p>
+            <a:pPr>
+              <a:lnSpc>
+                <a:spcPct val="125000"/>
+              </a:lnSpc>
+            </a:pPr>
+            <a:r>
+              <a:rPr sz="1200" b="0">
+                <a:solidFill>
+                  <a:srgbClr val="6FC7CF"/>
+                </a:solidFill>
+                <a:latin typeface="Noto Sans TC"/>
+              </a:rPr>
+              <a:t>• </a:t>
+            </a:r>
+            <a:r>
+              <a:rPr sz="1200" b="0">
+                <a:solidFill>
+                  <a:srgbClr val="E8E6E1"/>
+                </a:solidFill>
+                <a:latin typeface="Noto Sans TC"/>
+              </a:rPr>
+              <a:t>train_loss 一路降到 </a:t>
+            </a:r>
+            <a:r>
+              <a:rPr sz="1200" b="1">
+                <a:solidFill>
+                  <a:srgbClr val="6FC7CF"/>
+                </a:solidFill>
+                <a:latin typeface="Noto Sans TC"/>
+              </a:rPr>
+              <a:t>0.02</a:t>
+            </a:r>
+            <a:r>
+              <a:rPr sz="1200" b="0">
+                <a:solidFill>
+                  <a:srgbClr val="E8E6E1"/>
+                </a:solidFill>
+                <a:latin typeface="Noto Sans TC"/>
+              </a:rPr>
+              <a:t> 而驗證指標不再動：再訓是在背訓練集，不是在學</a:t>
+            </a:r>
+          </a:p>
+          <a:p>
+            <a:pPr>
+              <a:lnSpc>
+                <a:spcPct val="125000"/>
+              </a:lnSpc>
+            </a:pPr>
+            <a:r>
+              <a:rPr sz="1200" b="0">
+                <a:solidFill>
+                  <a:srgbClr val="6FC7CF"/>
+                </a:solidFill>
+                <a:latin typeface="Noto Sans TC"/>
+              </a:rPr>
+              <a:t>• </a:t>
+            </a:r>
+            <a:r>
+              <a:rPr sz="1200" b="0">
+                <a:solidFill>
+                  <a:srgbClr val="E8E6E1"/>
+                </a:solidFill>
+                <a:latin typeface="Noto Sans TC"/>
+              </a:rPr>
+              <a:t>驗證集按板子切，所以這條線是對「沒看過的板子」的估計，不是對 patch 的</a:t>
+            </a:r>
+          </a:p>
+        </p:txBody>
+      </p:sp>
+      <p:sp>
+        <p:nvSpPr>
+          <p:cNvPr id="6" name="TextBox 5"/>
+          <p:cNvSpPr txBox="1"/>
+          <p:nvPr/>
+        </p:nvSpPr>
+        <p:spPr>
+          <a:xfrm>
+            <a:off x="548640" y="5897880"/>
+            <a:ext cx="11155680" cy="365760"/>
+          </a:xfrm>
+          <a:prstGeom prst="rect">
+            <a:avLst/>
+          </a:prstGeom>
+          <a:noFill/>
+        </p:spPr>
+        <p:txBody>
+          <a:bodyPr wrap="square">
+            <a:spAutoFit/>
+          </a:bodyPr>
+          <a:lstStyle/>
+          <a:p>
+            <a:pPr>
+              <a:lnSpc>
+                <a:spcPct val="115000"/>
+              </a:lnSpc>
+            </a:pPr>
+            <a:r>
+              <a:rPr sz="950" b="0">
+                <a:solidFill>
+                  <a:srgbClr val="9AA0A6"/>
+                </a:solidFill>
+                <a:latin typeface="IBM Plex Mono"/>
+              </a:rPr>
+              <a:t>models/history.json · train_loss / val_accuracy / val_review_reduction（≤0.5% 漏網下的驗證集省掉比例）</a:t>
+            </a:r>
+          </a:p>
+        </p:txBody>
+      </p:sp>
+      <p:sp>
+        <p:nvSpPr>
+          <p:cNvPr id="7" name="TextBox 6"/>
+          <p:cNvSpPr txBox="1"/>
+          <p:nvPr/>
+        </p:nvSpPr>
+        <p:spPr>
+          <a:xfrm>
+            <a:off x="457200" y="6400800"/>
+            <a:ext cx="5486400" cy="320040"/>
+          </a:xfrm>
+          <a:prstGeom prst="rect">
+            <a:avLst/>
+          </a:prstGeom>
+          <a:noFill/>
+        </p:spPr>
+        <p:txBody>
+          <a:bodyPr wrap="square">
+            <a:spAutoFit/>
+          </a:bodyPr>
+          <a:lstStyle/>
+          <a:p>
+            <a:pPr>
+              <a:lnSpc>
+                <a:spcPct val="115000"/>
+              </a:lnSpc>
+            </a:pPr>
+            <a:r>
+              <a:rPr sz="1000" b="0">
+                <a:solidFill>
+                  <a:srgbClr val="9AA0A6"/>
+                </a:solidFill>
+                <a:latin typeface="IBM Plex Mono"/>
+              </a:rPr>
+              <a:t>附錄 · 備查數字</a:t>
+            </a:r>
+          </a:p>
+        </p:txBody>
+      </p:sp>
+      <p:sp>
+        <p:nvSpPr>
+          <p:cNvPr id="8" name="TextBox 7"/>
+          <p:cNvSpPr txBox="1"/>
+          <p:nvPr/>
+        </p:nvSpPr>
+        <p:spPr>
+          <a:xfrm>
+            <a:off x="8046720" y="6400800"/>
+            <a:ext cx="3657600" cy="320040"/>
+          </a:xfrm>
+          <a:prstGeom prst="rect">
+            <a:avLst/>
+          </a:prstGeom>
+          <a:noFill/>
+        </p:spPr>
+        <p:txBody>
+          <a:bodyPr wrap="square">
+            <a:spAutoFit/>
+          </a:bodyPr>
+          <a:lstStyle/>
+          <a:p>
+            <a:pPr algn="r">
+              <a:lnSpc>
+                <a:spcPct val="115000"/>
+              </a:lnSpc>
+            </a:pPr>
+            <a:r>
+              <a:rPr sz="1000" b="0">
+                <a:solidFill>
+                  <a:srgbClr val="9AA0A6"/>
+                </a:solidFill>
+                <a:latin typeface="IBM Plex Mono"/>
+              </a:rPr>
+              <a:t>31 / 38</a:t>
+            </a:r>
+          </a:p>
+        </p:txBody>
+      </p:sp>
+    </p:spTree>
+  </p:cSld>
+  <p:clrMapOvr>
+    <a:masterClrMapping/>
+  </p:clrMapOvr>
+</p:sld>
+</file>
+
+<file path=ppt/slides/slide32.xml><?xml version="1.0" encoding="utf-8"?>
 <p:sld xmlns:a="http://schemas.openxmlformats.org/drawingml/2006/main" xmlns:p="http://schemas.openxmlformats.org/presentationml/2006/main" xmlns:r="http://schemas.openxmlformats.org/officeDocument/2006/relationships">
   <p:cSld>
     <p:bg>
@@ -29706,7 +30035,7 @@
                 </a:solidFill>
                 <a:latin typeface="IBM Plex Mono"/>
               </a:rPr>
-              <a:t>31 / 37</a:t>
+              <a:t>32 / 38</a:t>
             </a:r>
           </a:p>
         </p:txBody>
@@ -29719,7 +30048,7 @@
 </p:sld>
 </file>
 
-<file path=ppt/slides/slide32.xml><?xml version="1.0" encoding="utf-8"?>
+<file path=ppt/slides/slide33.xml><?xml version="1.0" encoding="utf-8"?>
 <p:sld xmlns:a="http://schemas.openxmlformats.org/drawingml/2006/main" xmlns:p="http://schemas.openxmlformats.org/presentationml/2006/main" xmlns:r="http://schemas.openxmlformats.org/officeDocument/2006/relationships">
   <p:cSld>
     <p:bg>
@@ -30861,7 +31190,7 @@
                 </a:solidFill>
                 <a:latin typeface="IBM Plex Mono"/>
               </a:rPr>
-              <a:t>32 / 37</a:t>
+              <a:t>33 / 38</a:t>
             </a:r>
           </a:p>
         </p:txBody>
@@ -30874,7 +31203,7 @@
 </p:sld>
 </file>
 
-<file path=ppt/slides/slide33.xml><?xml version="1.0" encoding="utf-8"?>
+<file path=ppt/slides/slide34.xml><?xml version="1.0" encoding="utf-8"?>
 <p:sld xmlns:a="http://schemas.openxmlformats.org/drawingml/2006/main" xmlns:p="http://schemas.openxmlformats.org/presentationml/2006/main" xmlns:r="http://schemas.openxmlformats.org/officeDocument/2006/relationships">
   <p:cSld>
     <p:bg>
@@ -31826,638 +32155,7 @@
                 </a:solidFill>
                 <a:latin typeface="IBM Plex Mono"/>
               </a:rPr>
-              <a:t>33 / 37</a:t>
-            </a:r>
-          </a:p>
-        </p:txBody>
-      </p:sp>
-    </p:spTree>
-  </p:cSld>
-  <p:clrMapOvr>
-    <a:masterClrMapping/>
-  </p:clrMapOvr>
-</p:sld>
-</file>
-
-<file path=ppt/slides/slide34.xml><?xml version="1.0" encoding="utf-8"?>
-<p:sld xmlns:a="http://schemas.openxmlformats.org/drawingml/2006/main" xmlns:p="http://schemas.openxmlformats.org/presentationml/2006/main" xmlns:r="http://schemas.openxmlformats.org/officeDocument/2006/relationships">
-  <p:cSld>
-    <p:bg>
-      <p:bgPr>
-        <a:solidFill>
-          <a:srgbClr val="15171A"/>
-        </a:solidFill>
-        <a:effectLst/>
-      </p:bgPr>
-    </p:bg>
-    <p:spTree>
-      <p:nvGrpSpPr>
-        <p:cNvPr id="1" name=""/>
-        <p:cNvGrpSpPr/>
-        <p:nvPr/>
-      </p:nvGrpSpPr>
-      <p:grpSpPr/>
-      <p:sp>
-        <p:nvSpPr>
-          <p:cNvPr id="2" name="TextBox 1"/>
-          <p:cNvSpPr txBox="1"/>
-          <p:nvPr/>
-        </p:nvSpPr>
-        <p:spPr>
-          <a:xfrm>
-            <a:off x="457200" y="274320"/>
-            <a:ext cx="11247120" cy="731520"/>
-          </a:xfrm>
-          <a:prstGeom prst="rect">
-            <a:avLst/>
-          </a:prstGeom>
-          <a:noFill/>
-        </p:spPr>
-        <p:txBody>
-          <a:bodyPr wrap="square">
-            <a:spAutoFit/>
-          </a:bodyPr>
-          <a:lstStyle/>
-          <a:p>
-            <a:pPr>
-              <a:lnSpc>
-                <a:spcPct val="115000"/>
-              </a:lnSpc>
-            </a:pPr>
-            <a:r>
-              <a:rPr sz="2800" b="1">
-                <a:solidFill>
-                  <a:srgbClr val="E8E6E1"/>
-                </a:solidFill>
-                <a:latin typeface="Noto Sans TC"/>
-              </a:rPr>
-              <a:t>附錄 E · 偵測器與無樣板複判器的訓練</a:t>
-            </a:r>
-          </a:p>
-        </p:txBody>
-      </p:sp>
-      <p:pic>
-        <p:nvPicPr>
-          <p:cNvPr id="3" name="Picture 2" descr="crop_curves.png"/>
-          <p:cNvPicPr>
-            <a:picLocks noChangeAspect="1"/>
-          </p:cNvPicPr>
-          <p:nvPr/>
-        </p:nvPicPr>
-        <p:blipFill>
-          <a:blip r:embed="rId2"/>
-          <a:stretch>
-            <a:fillRect/>
-          </a:stretch>
-        </p:blipFill>
-        <p:spPr>
-          <a:xfrm>
-            <a:off x="563727" y="1188720"/>
-            <a:ext cx="11064240" cy="3503676"/>
-          </a:xfrm>
-          <a:prstGeom prst="rect">
-            <a:avLst/>
-          </a:prstGeom>
-        </p:spPr>
-      </p:pic>
-      <p:sp>
-        <p:nvSpPr>
-          <p:cNvPr id="4" name="TextBox 3"/>
-          <p:cNvSpPr txBox="1"/>
-          <p:nvPr/>
-        </p:nvSpPr>
-        <p:spPr>
-          <a:xfrm>
-            <a:off x="548640" y="4829556"/>
-            <a:ext cx="5440680" cy="976884"/>
-          </a:xfrm>
-          <a:prstGeom prst="rect">
-            <a:avLst/>
-          </a:prstGeom>
-          <a:noFill/>
-        </p:spPr>
-        <p:txBody>
-          <a:bodyPr wrap="square">
-            <a:spAutoFit/>
-          </a:bodyPr>
-          <a:lstStyle/>
-          <a:p>
-            <a:pPr>
-              <a:lnSpc>
-                <a:spcPct val="125000"/>
-              </a:lnSpc>
-            </a:pPr>
-            <a:r>
-              <a:rPr sz="1200" b="0">
-                <a:solidFill>
-                  <a:srgbClr val="6FC7CF"/>
-                </a:solidFill>
-                <a:latin typeface="Noto Sans TC"/>
-              </a:rPr>
-              <a:t>• </a:t>
-            </a:r>
-            <a:r>
-              <a:rPr sz="1200" b="0">
-                <a:solidFill>
-                  <a:srgbClr val="E8E6E1"/>
-                </a:solidFill>
-                <a:latin typeface="Noto Sans TC"/>
-              </a:rPr>
-              <a:t>YOLO</a:t>
-            </a:r>
-            <a:r>
-              <a:rPr sz="1200" b="1">
-                <a:solidFill>
-                  <a:srgbClr val="6FC7CF"/>
-                </a:solidFill>
-                <a:latin typeface="Noto Sans TC"/>
-              </a:rPr>
-              <a:t>26</a:t>
-            </a:r>
-            <a:r>
-              <a:rPr sz="1200" b="0">
-                <a:solidFill>
-                  <a:srgbClr val="E8E6E1"/>
-                </a:solidFill>
-                <a:latin typeface="Noto Sans TC"/>
-              </a:rPr>
-              <a:t>n：PCB-AoI </a:t>
-            </a:r>
-            <a:r>
-              <a:rPr sz="1200" b="1">
-                <a:solidFill>
-                  <a:srgbClr val="6FC7CF"/>
-                </a:solidFill>
-                <a:latin typeface="Noto Sans TC"/>
-              </a:rPr>
-              <a:t>966</a:t>
-            </a:r>
-            <a:r>
-              <a:rPr sz="1200" b="0">
-                <a:solidFill>
-                  <a:srgbClr val="E8E6E1"/>
-                </a:solidFill>
-                <a:latin typeface="Noto Sans TC"/>
-              </a:rPr>
-              <a:t> 張訓練／</a:t>
-            </a:r>
-            <a:r>
-              <a:rPr sz="1200" b="1">
-                <a:solidFill>
-                  <a:srgbClr val="6FC7CF"/>
-                </a:solidFill>
-                <a:latin typeface="Noto Sans TC"/>
-              </a:rPr>
-              <a:t>245</a:t>
-            </a:r>
-            <a:r>
-              <a:rPr sz="1200" b="0">
-                <a:solidFill>
-                  <a:srgbClr val="E8E6E1"/>
-                </a:solidFill>
-                <a:latin typeface="Noto Sans TC"/>
-              </a:rPr>
-              <a:t> 張驗證（</a:t>
-            </a:r>
-            <a:r>
-              <a:rPr sz="1200" b="1">
-                <a:solidFill>
-                  <a:srgbClr val="6FC7CF"/>
-                </a:solidFill>
-                <a:latin typeface="Noto Sans TC"/>
-              </a:rPr>
-              <a:t>35</a:t>
-            </a:r>
-            <a:r>
-              <a:rPr sz="1200" b="0">
-                <a:solidFill>
-                  <a:srgbClr val="E8E6E1"/>
-                </a:solidFill>
-                <a:latin typeface="Noto Sans TC"/>
-              </a:rPr>
-              <a:t> 片板）、</a:t>
-            </a:r>
-            <a:r>
-              <a:rPr sz="1200" b="1">
-                <a:solidFill>
-                  <a:srgbClr val="6FC7CF"/>
-                </a:solidFill>
-                <a:latin typeface="Noto Sans TC"/>
-              </a:rPr>
-              <a:t>60</a:t>
-            </a:r>
-            <a:r>
-              <a:rPr sz="1200" b="0">
-                <a:solidFill>
-                  <a:srgbClr val="E8E6E1"/>
-                </a:solidFill>
-                <a:latin typeface="Noto Sans TC"/>
-              </a:rPr>
-              <a:t> epoch、imgsz </a:t>
-            </a:r>
-            <a:r>
-              <a:rPr sz="1200" b="1">
-                <a:solidFill>
-                  <a:srgbClr val="6FC7CF"/>
-                </a:solidFill>
-                <a:latin typeface="Noto Sans TC"/>
-              </a:rPr>
-              <a:t>640</a:t>
-            </a:r>
-            <a:r>
-              <a:rPr sz="1200" b="0">
-                <a:solidFill>
-                  <a:srgbClr val="E8E6E1"/>
-                </a:solidFill>
-                <a:latin typeface="Noto Sans TC"/>
-              </a:rPr>
-              <a:t>、batch </a:t>
-            </a:r>
-            <a:r>
-              <a:rPr sz="1200" b="1">
-                <a:solidFill>
-                  <a:srgbClr val="6FC7CF"/>
-                </a:solidFill>
-                <a:latin typeface="Noto Sans TC"/>
-              </a:rPr>
-              <a:t>16</a:t>
-            </a:r>
-            <a:r>
-              <a:rPr sz="1200" b="0">
-                <a:solidFill>
-                  <a:srgbClr val="E8E6E1"/>
-                </a:solidFill>
-                <a:latin typeface="Noto Sans TC"/>
-              </a:rPr>
-              <a:t>、MPS </a:t>
-            </a:r>
-            <a:r>
-              <a:rPr sz="1200" b="1">
-                <a:solidFill>
-                  <a:srgbClr val="6FC7CF"/>
-                </a:solidFill>
-                <a:latin typeface="Noto Sans TC"/>
-              </a:rPr>
-              <a:t>56</a:t>
-            </a:r>
-            <a:r>
-              <a:rPr sz="1200" b="0">
-                <a:solidFill>
-                  <a:srgbClr val="E8E6E1"/>
-                </a:solidFill>
-                <a:latin typeface="Noto Sans TC"/>
-              </a:rPr>
-              <a:t> 分鐘、seed 固定</a:t>
-            </a:r>
-          </a:p>
-          <a:p>
-            <a:pPr>
-              <a:lnSpc>
-                <a:spcPct val="125000"/>
-              </a:lnSpc>
-            </a:pPr>
-            <a:r>
-              <a:rPr sz="1200" b="0">
-                <a:solidFill>
-                  <a:srgbClr val="6FC7CF"/>
-                </a:solidFill>
-                <a:latin typeface="Noto Sans TC"/>
-              </a:rPr>
-              <a:t>• </a:t>
-            </a:r>
-            <a:r>
-              <a:rPr sz="1200" b="0">
-                <a:solidFill>
-                  <a:srgbClr val="E8E6E1"/>
-                </a:solidFill>
-                <a:latin typeface="Noto Sans TC"/>
-              </a:rPr>
-              <a:t>驗證 mAP</a:t>
-            </a:r>
-            <a:r>
-              <a:rPr sz="1200" b="1">
-                <a:solidFill>
-                  <a:srgbClr val="6FC7CF"/>
-                </a:solidFill>
-                <a:latin typeface="Noto Sans TC"/>
-              </a:rPr>
-              <a:t>50 0.658</a:t>
-            </a:r>
-            <a:r>
-              <a:rPr sz="1200" b="0">
-                <a:solidFill>
-                  <a:srgbClr val="E8E6E1"/>
-                </a:solidFill>
-                <a:latin typeface="Noto Sans TC"/>
-              </a:rPr>
-              <a:t>（目標中位數 </a:t>
-            </a:r>
-            <a:r>
-              <a:rPr sz="1200" b="1">
-                <a:solidFill>
-                  <a:srgbClr val="6FC7CF"/>
-                </a:solidFill>
-                <a:latin typeface="Noto Sans TC"/>
-              </a:rPr>
-              <a:t>17</a:t>
-            </a:r>
-            <a:r>
-              <a:rPr sz="1200" b="0">
-                <a:solidFill>
-                  <a:srgbClr val="E8E6E1"/>
-                </a:solidFill>
-                <a:latin typeface="Noto Sans TC"/>
-              </a:rPr>
-              <a:t> px）、</a:t>
-            </a:r>
-            <a:r>
-              <a:rPr sz="1200" b="1">
-                <a:solidFill>
-                  <a:srgbClr val="6FC7CF"/>
-                </a:solidFill>
-                <a:latin typeface="Noto Sans TC"/>
-              </a:rPr>
-              <a:t>91.6%</a:t>
-            </a:r>
-            <a:r>
-              <a:rPr sz="1200" b="0">
-                <a:solidFill>
-                  <a:srgbClr val="E8E6E1"/>
-                </a:solidFill>
-                <a:latin typeface="Noto Sans TC"/>
-              </a:rPr>
-              <a:t> 的瑕疵被框住；≤</a:t>
-            </a:r>
-            <a:r>
-              <a:rPr sz="1200" b="1">
-                <a:solidFill>
-                  <a:srgbClr val="6FC7CF"/>
-                </a:solidFill>
-                <a:latin typeface="Noto Sans TC"/>
-              </a:rPr>
-              <a:t>0.5%</a:t>
-            </a:r>
-            <a:r>
-              <a:rPr sz="1200" b="0">
-                <a:solidFill>
-                  <a:srgbClr val="E8E6E1"/>
-                </a:solidFill>
-                <a:latin typeface="Noto Sans TC"/>
-              </a:rPr>
-              <a:t> 漏網下 confidence 只省 </a:t>
-            </a:r>
-            <a:r>
-              <a:rPr sz="1200" b="1">
-                <a:solidFill>
-                  <a:srgbClr val="6FC7CF"/>
-                </a:solidFill>
-                <a:latin typeface="Noto Sans TC"/>
-              </a:rPr>
-              <a:t>1.2%</a:t>
-            </a:r>
-          </a:p>
-        </p:txBody>
-      </p:sp>
-      <p:sp>
-        <p:nvSpPr>
-          <p:cNvPr id="5" name="TextBox 4"/>
-          <p:cNvSpPr txBox="1"/>
-          <p:nvPr/>
-        </p:nvSpPr>
-        <p:spPr>
-          <a:xfrm>
-            <a:off x="6172200" y="4829556"/>
-            <a:ext cx="5440680" cy="976884"/>
-          </a:xfrm>
-          <a:prstGeom prst="rect">
-            <a:avLst/>
-          </a:prstGeom>
-          <a:noFill/>
-        </p:spPr>
-        <p:txBody>
-          <a:bodyPr wrap="square">
-            <a:spAutoFit/>
-          </a:bodyPr>
-          <a:lstStyle/>
-          <a:p>
-            <a:pPr>
-              <a:lnSpc>
-                <a:spcPct val="125000"/>
-              </a:lnSpc>
-            </a:pPr>
-            <a:r>
-              <a:rPr sz="1200" b="0">
-                <a:solidFill>
-                  <a:srgbClr val="6FC7CF"/>
-                </a:solidFill>
-                <a:latin typeface="Noto Sans TC"/>
-              </a:rPr>
-              <a:t>• </a:t>
-            </a:r>
-            <a:r>
-              <a:rPr sz="1200" b="0">
-                <a:solidFill>
-                  <a:srgbClr val="E8E6E1"/>
-                </a:solidFill>
-                <a:latin typeface="Noto Sans TC"/>
-              </a:rPr>
-              <a:t>crop 複判器：同一個 ResNet-</a:t>
-            </a:r>
-            <a:r>
-              <a:rPr sz="1200" b="1">
-                <a:solidFill>
-                  <a:srgbClr val="6FC7CF"/>
-                </a:solidFill>
-                <a:latin typeface="Noto Sans TC"/>
-              </a:rPr>
-              <a:t>18</a:t>
-            </a:r>
-            <a:r>
-              <a:rPr sz="1200" b="0">
-                <a:solidFill>
-                  <a:srgbClr val="E8E6E1"/>
-                </a:solidFill>
-                <a:latin typeface="Noto Sans TC"/>
-              </a:rPr>
-              <a:t>、</a:t>
-            </a:r>
-            <a:r>
-              <a:rPr sz="1200" b="1">
-                <a:solidFill>
-                  <a:srgbClr val="6FC7CF"/>
-                </a:solidFill>
-                <a:latin typeface="Noto Sans TC"/>
-              </a:rPr>
-              <a:t>64</a:t>
-            </a:r>
-            <a:r>
-              <a:rPr sz="1200" b="0">
-                <a:solidFill>
-                  <a:srgbClr val="E8E6E1"/>
-                </a:solidFill>
-                <a:latin typeface="Noto Sans TC"/>
-              </a:rPr>
-              <a:t> px RGB、按 base stem 切 split 防增強圖洩漏；val_review_reduction 十個 epoch 在 </a:t>
-            </a:r>
-            <a:r>
-              <a:rPr sz="1200" b="1">
-                <a:solidFill>
-                  <a:srgbClr val="6FC7CF"/>
-                </a:solidFill>
-                <a:latin typeface="Noto Sans TC"/>
-              </a:rPr>
-              <a:t>1–3%</a:t>
-            </a:r>
-            <a:r>
-              <a:rPr sz="1200" b="0">
-                <a:solidFill>
-                  <a:srgbClr val="E8E6E1"/>
-                </a:solidFill>
-                <a:latin typeface="Noto Sans TC"/>
-              </a:rPr>
-              <a:t> 之間</a:t>
-            </a:r>
-          </a:p>
-          <a:p>
-            <a:pPr>
-              <a:lnSpc>
-                <a:spcPct val="125000"/>
-              </a:lnSpc>
-            </a:pPr>
-            <a:r>
-              <a:rPr sz="1200" b="0">
-                <a:solidFill>
-                  <a:srgbClr val="6FC7CF"/>
-                </a:solidFill>
-                <a:latin typeface="Noto Sans TC"/>
-              </a:rPr>
-              <a:t>• </a:t>
-            </a:r>
-            <a:r>
-              <a:rPr sz="1200" b="0">
-                <a:solidFill>
-                  <a:srgbClr val="E8E6E1"/>
-                </a:solidFill>
-                <a:latin typeface="Noto Sans TC"/>
-              </a:rPr>
-              <a:t>訓練時 GPU 被翻譯工作佔著，在 CPU 上訓；一個 seed；候選來自看過訓練圖的偵測器——都寫在 benchmarks 的條目裡</a:t>
-            </a:r>
-          </a:p>
-        </p:txBody>
-      </p:sp>
-      <p:sp>
-        <p:nvSpPr>
-          <p:cNvPr id="6" name="TextBox 5"/>
-          <p:cNvSpPr txBox="1"/>
-          <p:nvPr/>
-        </p:nvSpPr>
-        <p:spPr>
-          <a:xfrm>
-            <a:off x="548640" y="5897880"/>
-            <a:ext cx="11155680" cy="365760"/>
-          </a:xfrm>
-          <a:prstGeom prst="rect">
-            <a:avLst/>
-          </a:prstGeom>
-          <a:noFill/>
-        </p:spPr>
-        <p:txBody>
-          <a:bodyPr wrap="square">
-            <a:spAutoFit/>
-          </a:bodyPr>
-          <a:lstStyle/>
-          <a:p>
-            <a:pPr>
-              <a:lnSpc>
-                <a:spcPct val="115000"/>
-              </a:lnSpc>
-            </a:pPr>
-            <a:r>
-              <a:rPr sz="950" b="0">
-                <a:solidFill>
-                  <a:srgbClr val="9AA0A6"/>
-                </a:solidFill>
-                <a:latin typeface="IBM Plex Mono"/>
-              </a:rPr>
-              <a:t>models/pcbaoi_reverifier/history.json · 無樣板 crop 複判器的 val_review_reduction 十個 epoch 停在 1–3%</a:t>
-            </a:r>
-          </a:p>
-        </p:txBody>
-      </p:sp>
-      <p:sp>
-        <p:nvSpPr>
-          <p:cNvPr id="7" name="TextBox 6"/>
-          <p:cNvSpPr txBox="1"/>
-          <p:nvPr/>
-        </p:nvSpPr>
-        <p:spPr>
-          <a:xfrm>
-            <a:off x="457200" y="6400800"/>
-            <a:ext cx="5486400" cy="320040"/>
-          </a:xfrm>
-          <a:prstGeom prst="rect">
-            <a:avLst/>
-          </a:prstGeom>
-          <a:noFill/>
-        </p:spPr>
-        <p:txBody>
-          <a:bodyPr wrap="square">
-            <a:spAutoFit/>
-          </a:bodyPr>
-          <a:lstStyle/>
-          <a:p>
-            <a:pPr>
-              <a:lnSpc>
-                <a:spcPct val="115000"/>
-              </a:lnSpc>
-            </a:pPr>
-            <a:r>
-              <a:rPr sz="1000" b="0">
-                <a:solidFill>
-                  <a:srgbClr val="9AA0A6"/>
-                </a:solidFill>
-                <a:latin typeface="IBM Plex Mono"/>
-              </a:rPr>
-              <a:t>附錄 · 備查數字</a:t>
-            </a:r>
-          </a:p>
-        </p:txBody>
-      </p:sp>
-      <p:sp>
-        <p:nvSpPr>
-          <p:cNvPr id="8" name="TextBox 7"/>
-          <p:cNvSpPr txBox="1"/>
-          <p:nvPr/>
-        </p:nvSpPr>
-        <p:spPr>
-          <a:xfrm>
-            <a:off x="8046720" y="6400800"/>
-            <a:ext cx="3657600" cy="320040"/>
-          </a:xfrm>
-          <a:prstGeom prst="rect">
-            <a:avLst/>
-          </a:prstGeom>
-          <a:noFill/>
-        </p:spPr>
-        <p:txBody>
-          <a:bodyPr wrap="square">
-            <a:spAutoFit/>
-          </a:bodyPr>
-          <a:lstStyle/>
-          <a:p>
-            <a:pPr algn="r">
-              <a:lnSpc>
-                <a:spcPct val="115000"/>
-              </a:lnSpc>
-            </a:pPr>
-            <a:r>
-              <a:rPr sz="1000" b="0">
-                <a:solidFill>
-                  <a:srgbClr val="9AA0A6"/>
-                </a:solidFill>
-                <a:latin typeface="IBM Plex Mono"/>
-              </a:rPr>
-              <a:t>34 / 37</a:t>
+              <a:t>34 / 38</a:t>
             </a:r>
           </a:p>
         </p:txBody>
@@ -32522,14 +32220,14 @@
                 </a:solidFill>
                 <a:latin typeface="Noto Sans TC"/>
               </a:rPr>
-              <a:t>附錄 F · S0 gate 的三條曲線：DeepPCB 過、HRIPCB 不過</a:t>
+              <a:t>附錄 E · 偵測器與無樣板複判器的訓練</a:t>
             </a:r>
           </a:p>
         </p:txBody>
       </p:sp>
       <p:pic>
         <p:nvPicPr>
-          <p:cNvPr id="3" name="Picture 2" descr="gate_curves.png"/>
+          <p:cNvPr id="3" name="Picture 2" descr="crop_curves.png"/>
           <p:cNvPicPr>
             <a:picLocks noChangeAspect="1"/>
           </p:cNvPicPr>
@@ -32543,8 +32241,8 @@
         </p:blipFill>
         <p:spPr>
           <a:xfrm>
-            <a:off x="1001333" y="1188720"/>
-            <a:ext cx="10189028" cy="3566160"/>
+            <a:off x="563727" y="1188720"/>
+            <a:ext cx="11064240" cy="3503676"/>
           </a:xfrm>
           <a:prstGeom prst="rect">
             <a:avLst/>
@@ -32559,8 +32257,8 @@
         </p:nvSpPr>
         <p:spPr>
           <a:xfrm>
-            <a:off x="548640" y="4892040"/>
-            <a:ext cx="5440680" cy="914400"/>
+            <a:off x="548640" y="4829556"/>
+            <a:ext cx="5440680" cy="976884"/>
           </a:xfrm>
           <a:prstGeom prst="rect">
             <a:avLst/>
@@ -32594,7 +32292,7 @@
                 </a:solidFill>
                 <a:latin typeface="Noto Sans TC"/>
               </a:rPr>
-              <a:t>DeepPCB（trainval </a:t>
+              <a:t>YOLO</a:t>
             </a:r>
             <a:r>
               <a:rPr sz="1200" b="1">
@@ -32603,7 +32301,7 @@
                 </a:solidFill>
                 <a:latin typeface="Noto Sans TC"/>
               </a:rPr>
-              <a:t>200</a:t>
+              <a:t>26</a:t>
             </a:r>
             <a:r>
               <a:rPr sz="1200" b="0">
@@ -32612,7 +32310,7 @@
                 </a:solidFill>
                 <a:latin typeface="Noto Sans TC"/>
               </a:rPr>
-              <a:t> 對）：門檻 </a:t>
+              <a:t>n：PCB-AoI </a:t>
             </a:r>
             <a:r>
               <a:rPr sz="1200" b="1">
@@ -32621,7 +32319,7 @@
                 </a:solidFill>
                 <a:latin typeface="Noto Sans TC"/>
               </a:rPr>
-              <a:t>30–100</a:t>
+              <a:t>966</a:t>
             </a:r>
             <a:r>
               <a:rPr sz="1200" b="0">
@@ -32630,7 +32328,7 @@
                 </a:solidFill>
                 <a:latin typeface="Noto Sans TC"/>
               </a:rPr>
-              <a:t> recall 都是 </a:t>
+              <a:t> 張訓練／</a:t>
             </a:r>
             <a:r>
               <a:rPr sz="1200" b="1">
@@ -32639,7 +32337,7 @@
                 </a:solidFill>
                 <a:latin typeface="Noto Sans TC"/>
               </a:rPr>
-              <a:t>95.7%</a:t>
+              <a:t>245</a:t>
             </a:r>
             <a:r>
               <a:rPr sz="1200" b="0">
@@ -32648,7 +32346,7 @@
                 </a:solidFill>
                 <a:latin typeface="Noto Sans TC"/>
               </a:rPr>
-              <a:t>、每張 </a:t>
+              <a:t> 張驗證（</a:t>
             </a:r>
             <a:r>
               <a:rPr sz="1200" b="1">
@@ -32657,7 +32355,7 @@
                 </a:solidFill>
                 <a:latin typeface="Noto Sans TC"/>
               </a:rPr>
-              <a:t>10.7</a:t>
+              <a:t>35</a:t>
             </a:r>
             <a:r>
               <a:rPr sz="1200" b="0">
@@ -32666,7 +32364,79 @@
                 </a:solidFill>
                 <a:latin typeface="Noto Sans TC"/>
               </a:rPr>
-              <a:t> 個誤報——門檻怎麼設都一樣，二值圖沒有灰階可調</a:t>
+              <a:t> 片板）、</a:t>
+            </a:r>
+            <a:r>
+              <a:rPr sz="1200" b="1">
+                <a:solidFill>
+                  <a:srgbClr val="6FC7CF"/>
+                </a:solidFill>
+                <a:latin typeface="Noto Sans TC"/>
+              </a:rPr>
+              <a:t>60</a:t>
+            </a:r>
+            <a:r>
+              <a:rPr sz="1200" b="0">
+                <a:solidFill>
+                  <a:srgbClr val="E8E6E1"/>
+                </a:solidFill>
+                <a:latin typeface="Noto Sans TC"/>
+              </a:rPr>
+              <a:t> epoch、imgsz </a:t>
+            </a:r>
+            <a:r>
+              <a:rPr sz="1200" b="1">
+                <a:solidFill>
+                  <a:srgbClr val="6FC7CF"/>
+                </a:solidFill>
+                <a:latin typeface="Noto Sans TC"/>
+              </a:rPr>
+              <a:t>640</a:t>
+            </a:r>
+            <a:r>
+              <a:rPr sz="1200" b="0">
+                <a:solidFill>
+                  <a:srgbClr val="E8E6E1"/>
+                </a:solidFill>
+                <a:latin typeface="Noto Sans TC"/>
+              </a:rPr>
+              <a:t>、batch </a:t>
+            </a:r>
+            <a:r>
+              <a:rPr sz="1200" b="1">
+                <a:solidFill>
+                  <a:srgbClr val="6FC7CF"/>
+                </a:solidFill>
+                <a:latin typeface="Noto Sans TC"/>
+              </a:rPr>
+              <a:t>16</a:t>
+            </a:r>
+            <a:r>
+              <a:rPr sz="1200" b="0">
+                <a:solidFill>
+                  <a:srgbClr val="E8E6E1"/>
+                </a:solidFill>
+                <a:latin typeface="Noto Sans TC"/>
+              </a:rPr>
+              <a:t>、MPS </a:t>
+            </a:r>
+            <a:r>
+              <a:rPr sz="1200" b="1">
+                <a:solidFill>
+                  <a:srgbClr val="6FC7CF"/>
+                </a:solidFill>
+                <a:latin typeface="Noto Sans TC"/>
+              </a:rPr>
+              <a:t>56</a:t>
+            </a:r>
+            <a:r>
+              <a:rPr sz="1200" b="0">
+                <a:solidFill>
+                  <a:srgbClr val="E8E6E1"/>
+                </a:solidFill>
+                <a:latin typeface="Noto Sans TC"/>
+              </a:rPr>
+              <a:t> 分鐘、seed 固定</a:t>
             </a:r>
           </a:p>
           <a:p>
@@ -32691,7 +32461,7 @@
                 </a:solidFill>
                 <a:latin typeface="Noto Sans TC"/>
               </a:rPr>
-              <a:t>HRIPCB 對齊：門檻 </a:t>
+              <a:t>驗證 mAP</a:t>
             </a:r>
             <a:r>
               <a:rPr sz="1200" b="1">
@@ -32700,7 +32470,7 @@
                 </a:solidFill>
                 <a:latin typeface="Noto Sans TC"/>
               </a:rPr>
-              <a:t>10</a:t>
+              <a:t>50 0.658</a:t>
             </a:r>
             <a:r>
               <a:rPr sz="1200" b="0">
@@ -32709,7 +32479,7 @@
                 </a:solidFill>
                 <a:latin typeface="Noto Sans TC"/>
               </a:rPr>
-              <a:t> 才有 </a:t>
+              <a:t>（目標中位數 </a:t>
             </a:r>
             <a:r>
               <a:rPr sz="1200" b="1">
@@ -32718,7 +32488,7 @@
                 </a:solidFill>
                 <a:latin typeface="Noto Sans TC"/>
               </a:rPr>
-              <a:t>92.3%</a:t>
+              <a:t>17</a:t>
             </a:r>
             <a:r>
               <a:rPr sz="1200" b="0">
@@ -32727,7 +32497,7 @@
                 </a:solidFill>
                 <a:latin typeface="Noto Sans TC"/>
               </a:rPr>
-              <a:t> recall（</a:t>
+              <a:t> px）、</a:t>
             </a:r>
             <a:r>
               <a:rPr sz="1200" b="1">
@@ -32736,7 +32506,7 @@
                 </a:solidFill>
                 <a:latin typeface="Noto Sans TC"/>
               </a:rPr>
-              <a:t>1.8</a:t>
+              <a:t>91.6%</a:t>
             </a:r>
             <a:r>
               <a:rPr sz="1200" b="0">
@@ -32745,7 +32515,7 @@
                 </a:solidFill>
                 <a:latin typeface="Noto Sans TC"/>
               </a:rPr>
-              <a:t> 個誤報）；門檻 </a:t>
+              <a:t> 的瑕疵被框住；≤</a:t>
             </a:r>
             <a:r>
               <a:rPr sz="1200" b="1">
@@ -32754,7 +32524,7 @@
                 </a:solidFill>
                 <a:latin typeface="Noto Sans TC"/>
               </a:rPr>
-              <a:t>60</a:t>
+              <a:t>0.5%</a:t>
             </a:r>
             <a:r>
               <a:rPr sz="1200" b="0">
@@ -32763,7 +32533,7 @@
                 </a:solidFill>
                 <a:latin typeface="Noto Sans TC"/>
               </a:rPr>
-              <a:t> 只剩 </a:t>
+              <a:t> 漏網下 confidence 只省 </a:t>
             </a:r>
             <a:r>
               <a:rPr sz="1200" b="1">
@@ -32772,7 +32542,7 @@
                 </a:solidFill>
                 <a:latin typeface="Noto Sans TC"/>
               </a:rPr>
-              <a:t>14.3%</a:t>
+              <a:t>1.2%</a:t>
             </a:r>
           </a:p>
         </p:txBody>
@@ -32785,8 +32555,8 @@
         </p:nvSpPr>
         <p:spPr>
           <a:xfrm>
-            <a:off x="6172200" y="4892040"/>
-            <a:ext cx="5440680" cy="914400"/>
+            <a:off x="6172200" y="4829556"/>
+            <a:ext cx="5440680" cy="976884"/>
           </a:xfrm>
           <a:prstGeom prst="rect">
             <a:avLst/>
@@ -32820,7 +32590,7 @@
                 </a:solidFill>
                 <a:latin typeface="Noto Sans TC"/>
               </a:rPr>
-              <a:t>HRIPCB 對齊＋擾動：門檻 </a:t>
+              <a:t>crop 複判器：同一個 ResNet-</a:t>
             </a:r>
             <a:r>
               <a:rPr sz="1200" b="1">
@@ -32829,7 +32599,7 @@
                 </a:solidFill>
                 <a:latin typeface="Noto Sans TC"/>
               </a:rPr>
-              <a:t>10</a:t>
+              <a:t>18</a:t>
             </a:r>
             <a:r>
               <a:rPr sz="1200" b="0">
@@ -32838,7 +32608,7 @@
                 </a:solidFill>
                 <a:latin typeface="Noto Sans TC"/>
               </a:rPr>
-              <a:t> recall </a:t>
+              <a:t>、</a:t>
             </a:r>
             <a:r>
               <a:rPr sz="1200" b="1">
@@ -32847,7 +32617,7 @@
                 </a:solidFill>
                 <a:latin typeface="Noto Sans TC"/>
               </a:rPr>
-              <a:t>90.5%</a:t>
+              <a:t>64</a:t>
             </a:r>
             <a:r>
               <a:rPr sz="1200" b="0">
@@ -32856,7 +32626,7 @@
                 </a:solidFill>
                 <a:latin typeface="Noto Sans TC"/>
               </a:rPr>
-              <a:t> 但每張 </a:t>
+              <a:t> px RGB、按 base stem 切 split 防增強圖洩漏；val_review_reduction 十個 epoch 在 </a:t>
             </a:r>
             <a:r>
               <a:rPr sz="1200" b="1">
@@ -32865,7 +32635,7 @@
                 </a:solidFill>
                 <a:latin typeface="Noto Sans TC"/>
               </a:rPr>
-              <a:t>860</a:t>
+              <a:t>1–3%</a:t>
             </a:r>
             <a:r>
               <a:rPr sz="1200" b="0">
@@ -32874,34 +32644,23 @@
                 </a:solidFill>
                 <a:latin typeface="Noto Sans TC"/>
               </a:rPr>
-              <a:t> 個誤報；門檻 </a:t>
-            </a:r>
-            <a:r>
-              <a:rPr sz="1200" b="1">
-                <a:solidFill>
-                  <a:srgbClr val="6FC7CF"/>
-                </a:solidFill>
-                <a:latin typeface="Noto Sans TC"/>
-              </a:rPr>
-              <a:t>60</a:t>
-            </a:r>
+              <a:t> 之間</a:t>
+            </a:r>
+          </a:p>
+          <a:p>
+            <a:pPr>
+              <a:lnSpc>
+                <a:spcPct val="125000"/>
+              </a:lnSpc>
+            </a:pPr>
             <a:r>
               <a:rPr sz="1200" b="0">
                 <a:solidFill>
-                  <a:srgbClr val="E8E6E1"/>
-                </a:solidFill>
-                <a:latin typeface="Noto Sans TC"/>
-              </a:rPr>
-              <a:t> 誤報 </a:t>
-            </a:r>
-            <a:r>
-              <a:rPr sz="1200" b="1">
-                <a:solidFill>
-                  <a:srgbClr val="6FC7CF"/>
-                </a:solidFill>
-                <a:latin typeface="Noto Sans TC"/>
-              </a:rPr>
-              <a:t>24.7</a:t>
+                  <a:srgbClr val="6FC7CF"/>
+                </a:solidFill>
+                <a:latin typeface="Noto Sans TC"/>
+              </a:rPr>
+              <a:t>• </a:t>
             </a:r>
             <a:r>
               <a:rPr sz="1200" b="0">
@@ -32910,104 +32669,7 @@
                 </a:solidFill>
                 <a:latin typeface="Noto Sans TC"/>
               </a:rPr>
-              <a:t> 個但 recall </a:t>
-            </a:r>
-            <a:r>
-              <a:rPr sz="1200" b="1">
-                <a:solidFill>
-                  <a:srgbClr val="6FC7CF"/>
-                </a:solidFill>
-                <a:latin typeface="Noto Sans TC"/>
-              </a:rPr>
-              <a:t>14.2%</a:t>
-            </a:r>
-            <a:r>
-              <a:rPr sz="1200" b="0">
-                <a:solidFill>
-                  <a:srgbClr val="E8E6E1"/>
-                </a:solidFill>
-                <a:latin typeface="Noto Sans TC"/>
-              </a:rPr>
-              <a:t>——沒有一點同時過兩關</a:t>
-            </a:r>
-          </a:p>
-          <a:p>
-            <a:pPr>
-              <a:lnSpc>
-                <a:spcPct val="125000"/>
-              </a:lnSpc>
-            </a:pPr>
-            <a:r>
-              <a:rPr sz="1200" b="0">
-                <a:solidFill>
-                  <a:srgbClr val="6FC7CF"/>
-                </a:solidFill>
-                <a:latin typeface="Noto Sans TC"/>
-              </a:rPr>
-              <a:t>• </a:t>
-            </a:r>
-            <a:r>
-              <a:rPr sz="1200" b="0">
-                <a:solidFill>
-                  <a:srgbClr val="E8E6E1"/>
-                </a:solidFill>
-                <a:latin typeface="Noto Sans TC"/>
-              </a:rPr>
-              <a:t>HRIPCB 旋轉：對位拒絕 </a:t>
-            </a:r>
-            <a:r>
-              <a:rPr sz="1200" b="1">
-                <a:solidFill>
-                  <a:srgbClr val="6FC7CF"/>
-                </a:solidFill>
-                <a:latin typeface="Noto Sans TC"/>
-              </a:rPr>
-              <a:t>563/693</a:t>
-            </a:r>
-            <a:r>
-              <a:rPr sz="1200" b="0">
-                <a:solidFill>
-                  <a:srgbClr val="E8E6E1"/>
-                </a:solidFill>
-                <a:latin typeface="Noto Sans TC"/>
-              </a:rPr>
-              <a:t> 對，最好 recall </a:t>
-            </a:r>
-            <a:r>
-              <a:rPr sz="1200" b="1">
-                <a:solidFill>
-                  <a:srgbClr val="6FC7CF"/>
-                </a:solidFill>
-                <a:latin typeface="Noto Sans TC"/>
-              </a:rPr>
-              <a:t>49.4%</a:t>
-            </a:r>
-            <a:r>
-              <a:rPr sz="1200" b="0">
-                <a:solidFill>
-                  <a:srgbClr val="E8E6E1"/>
-                </a:solidFill>
-                <a:latin typeface="Noto Sans TC"/>
-              </a:rPr>
-              <a:t>、每張 </a:t>
-            </a:r>
-            <a:r>
-              <a:rPr sz="1200" b="1">
-                <a:solidFill>
-                  <a:srgbClr val="6FC7CF"/>
-                </a:solidFill>
-                <a:latin typeface="Noto Sans TC"/>
-              </a:rPr>
-              <a:t>282</a:t>
-            </a:r>
-            <a:r>
-              <a:rPr sz="1200" b="0">
-                <a:solidFill>
-                  <a:srgbClr val="E8E6E1"/>
-                </a:solidFill>
-                <a:latin typeface="Noto Sans TC"/>
-              </a:rPr>
-              <a:t> 個誤報</a:t>
+              <a:t>訓練時 GPU 被翻譯工作佔著，在 CPU 上訓；一個 seed；候選來自看過訓練圖的偵測器——都寫在 benchmarks 的條目裡</a:t>
             </a:r>
           </a:p>
         </p:txBody>
@@ -33046,7 +32708,7 @@
                 </a:solidFill>
                 <a:latin typeface="IBM Plex Mono"/>
               </a:rPr>
-              <a:t>eval/results/gate_check*.json · 每個灰階門檻的 recall 與每張圖的平均誤報數</a:t>
+              <a:t>models/pcbaoi_reverifier/history.json · 無樣板 crop 複判器的 val_review_reduction 十個 epoch 停在 1–3%</a:t>
             </a:r>
           </a:p>
         </p:txBody>
@@ -33124,7 +32786,7 @@
                 </a:solidFill>
                 <a:latin typeface="IBM Plex Mono"/>
               </a:rPr>
-              <a:t>35 / 37</a:t>
+              <a:t>35 / 38</a:t>
             </a:r>
           </a:p>
         </p:txBody>
@@ -33138,6 +32800,673 @@
 </file>
 
 <file path=ppt/slides/slide36.xml><?xml version="1.0" encoding="utf-8"?>
+<p:sld xmlns:a="http://schemas.openxmlformats.org/drawingml/2006/main" xmlns:p="http://schemas.openxmlformats.org/presentationml/2006/main" xmlns:r="http://schemas.openxmlformats.org/officeDocument/2006/relationships">
+  <p:cSld>
+    <p:bg>
+      <p:bgPr>
+        <a:solidFill>
+          <a:srgbClr val="15171A"/>
+        </a:solidFill>
+        <a:effectLst/>
+      </p:bgPr>
+    </p:bg>
+    <p:spTree>
+      <p:nvGrpSpPr>
+        <p:cNvPr id="1" name=""/>
+        <p:cNvGrpSpPr/>
+        <p:nvPr/>
+      </p:nvGrpSpPr>
+      <p:grpSpPr/>
+      <p:sp>
+        <p:nvSpPr>
+          <p:cNvPr id="2" name="TextBox 1"/>
+          <p:cNvSpPr txBox="1"/>
+          <p:nvPr/>
+        </p:nvSpPr>
+        <p:spPr>
+          <a:xfrm>
+            <a:off x="457200" y="274320"/>
+            <a:ext cx="11247120" cy="731520"/>
+          </a:xfrm>
+          <a:prstGeom prst="rect">
+            <a:avLst/>
+          </a:prstGeom>
+          <a:noFill/>
+        </p:spPr>
+        <p:txBody>
+          <a:bodyPr wrap="square">
+            <a:spAutoFit/>
+          </a:bodyPr>
+          <a:lstStyle/>
+          <a:p>
+            <a:pPr>
+              <a:lnSpc>
+                <a:spcPct val="115000"/>
+              </a:lnSpc>
+            </a:pPr>
+            <a:r>
+              <a:rPr sz="2800" b="1">
+                <a:solidFill>
+                  <a:srgbClr val="E8E6E1"/>
+                </a:solidFill>
+                <a:latin typeface="Noto Sans TC"/>
+              </a:rPr>
+              <a:t>附錄 F · S0 gate 的三條曲線：DeepPCB 過、HRIPCB 不過</a:t>
+            </a:r>
+          </a:p>
+        </p:txBody>
+      </p:sp>
+      <p:pic>
+        <p:nvPicPr>
+          <p:cNvPr id="3" name="Picture 2" descr="gate_curves.png"/>
+          <p:cNvPicPr>
+            <a:picLocks noChangeAspect="1"/>
+          </p:cNvPicPr>
+          <p:nvPr/>
+        </p:nvPicPr>
+        <p:blipFill>
+          <a:blip r:embed="rId2"/>
+          <a:stretch>
+            <a:fillRect/>
+          </a:stretch>
+        </p:blipFill>
+        <p:spPr>
+          <a:xfrm>
+            <a:off x="1001333" y="1188720"/>
+            <a:ext cx="10189028" cy="3566160"/>
+          </a:xfrm>
+          <a:prstGeom prst="rect">
+            <a:avLst/>
+          </a:prstGeom>
+        </p:spPr>
+      </p:pic>
+      <p:sp>
+        <p:nvSpPr>
+          <p:cNvPr id="4" name="TextBox 3"/>
+          <p:cNvSpPr txBox="1"/>
+          <p:nvPr/>
+        </p:nvSpPr>
+        <p:spPr>
+          <a:xfrm>
+            <a:off x="548640" y="4892040"/>
+            <a:ext cx="5440680" cy="914400"/>
+          </a:xfrm>
+          <a:prstGeom prst="rect">
+            <a:avLst/>
+          </a:prstGeom>
+          <a:noFill/>
+        </p:spPr>
+        <p:txBody>
+          <a:bodyPr wrap="square">
+            <a:spAutoFit/>
+          </a:bodyPr>
+          <a:lstStyle/>
+          <a:p>
+            <a:pPr>
+              <a:lnSpc>
+                <a:spcPct val="125000"/>
+              </a:lnSpc>
+            </a:pPr>
+            <a:r>
+              <a:rPr sz="1200" b="0">
+                <a:solidFill>
+                  <a:srgbClr val="6FC7CF"/>
+                </a:solidFill>
+                <a:latin typeface="Noto Sans TC"/>
+              </a:rPr>
+              <a:t>• </a:t>
+            </a:r>
+            <a:r>
+              <a:rPr sz="1200" b="0">
+                <a:solidFill>
+                  <a:srgbClr val="E8E6E1"/>
+                </a:solidFill>
+                <a:latin typeface="Noto Sans TC"/>
+              </a:rPr>
+              <a:t>DeepPCB（trainval </a:t>
+            </a:r>
+            <a:r>
+              <a:rPr sz="1200" b="1">
+                <a:solidFill>
+                  <a:srgbClr val="6FC7CF"/>
+                </a:solidFill>
+                <a:latin typeface="Noto Sans TC"/>
+              </a:rPr>
+              <a:t>200</a:t>
+            </a:r>
+            <a:r>
+              <a:rPr sz="1200" b="0">
+                <a:solidFill>
+                  <a:srgbClr val="E8E6E1"/>
+                </a:solidFill>
+                <a:latin typeface="Noto Sans TC"/>
+              </a:rPr>
+              <a:t> 對）：門檻 </a:t>
+            </a:r>
+            <a:r>
+              <a:rPr sz="1200" b="1">
+                <a:solidFill>
+                  <a:srgbClr val="6FC7CF"/>
+                </a:solidFill>
+                <a:latin typeface="Noto Sans TC"/>
+              </a:rPr>
+              <a:t>30–100</a:t>
+            </a:r>
+            <a:r>
+              <a:rPr sz="1200" b="0">
+                <a:solidFill>
+                  <a:srgbClr val="E8E6E1"/>
+                </a:solidFill>
+                <a:latin typeface="Noto Sans TC"/>
+              </a:rPr>
+              <a:t> recall 都是 </a:t>
+            </a:r>
+            <a:r>
+              <a:rPr sz="1200" b="1">
+                <a:solidFill>
+                  <a:srgbClr val="6FC7CF"/>
+                </a:solidFill>
+                <a:latin typeface="Noto Sans TC"/>
+              </a:rPr>
+              <a:t>95.7%</a:t>
+            </a:r>
+            <a:r>
+              <a:rPr sz="1200" b="0">
+                <a:solidFill>
+                  <a:srgbClr val="E8E6E1"/>
+                </a:solidFill>
+                <a:latin typeface="Noto Sans TC"/>
+              </a:rPr>
+              <a:t>、每張 </a:t>
+            </a:r>
+            <a:r>
+              <a:rPr sz="1200" b="1">
+                <a:solidFill>
+                  <a:srgbClr val="6FC7CF"/>
+                </a:solidFill>
+                <a:latin typeface="Noto Sans TC"/>
+              </a:rPr>
+              <a:t>10.7</a:t>
+            </a:r>
+            <a:r>
+              <a:rPr sz="1200" b="0">
+                <a:solidFill>
+                  <a:srgbClr val="E8E6E1"/>
+                </a:solidFill>
+                <a:latin typeface="Noto Sans TC"/>
+              </a:rPr>
+              <a:t> 個誤報——門檻怎麼設都一樣，二值圖沒有灰階可調</a:t>
+            </a:r>
+          </a:p>
+          <a:p>
+            <a:pPr>
+              <a:lnSpc>
+                <a:spcPct val="125000"/>
+              </a:lnSpc>
+            </a:pPr>
+            <a:r>
+              <a:rPr sz="1200" b="0">
+                <a:solidFill>
+                  <a:srgbClr val="6FC7CF"/>
+                </a:solidFill>
+                <a:latin typeface="Noto Sans TC"/>
+              </a:rPr>
+              <a:t>• </a:t>
+            </a:r>
+            <a:r>
+              <a:rPr sz="1200" b="0">
+                <a:solidFill>
+                  <a:srgbClr val="E8E6E1"/>
+                </a:solidFill>
+                <a:latin typeface="Noto Sans TC"/>
+              </a:rPr>
+              <a:t>HRIPCB 對齊：門檻 </a:t>
+            </a:r>
+            <a:r>
+              <a:rPr sz="1200" b="1">
+                <a:solidFill>
+                  <a:srgbClr val="6FC7CF"/>
+                </a:solidFill>
+                <a:latin typeface="Noto Sans TC"/>
+              </a:rPr>
+              <a:t>10</a:t>
+            </a:r>
+            <a:r>
+              <a:rPr sz="1200" b="0">
+                <a:solidFill>
+                  <a:srgbClr val="E8E6E1"/>
+                </a:solidFill>
+                <a:latin typeface="Noto Sans TC"/>
+              </a:rPr>
+              <a:t> 才有 </a:t>
+            </a:r>
+            <a:r>
+              <a:rPr sz="1200" b="1">
+                <a:solidFill>
+                  <a:srgbClr val="6FC7CF"/>
+                </a:solidFill>
+                <a:latin typeface="Noto Sans TC"/>
+              </a:rPr>
+              <a:t>92.3%</a:t>
+            </a:r>
+            <a:r>
+              <a:rPr sz="1200" b="0">
+                <a:solidFill>
+                  <a:srgbClr val="E8E6E1"/>
+                </a:solidFill>
+                <a:latin typeface="Noto Sans TC"/>
+              </a:rPr>
+              <a:t> recall（</a:t>
+            </a:r>
+            <a:r>
+              <a:rPr sz="1200" b="1">
+                <a:solidFill>
+                  <a:srgbClr val="6FC7CF"/>
+                </a:solidFill>
+                <a:latin typeface="Noto Sans TC"/>
+              </a:rPr>
+              <a:t>1.8</a:t>
+            </a:r>
+            <a:r>
+              <a:rPr sz="1200" b="0">
+                <a:solidFill>
+                  <a:srgbClr val="E8E6E1"/>
+                </a:solidFill>
+                <a:latin typeface="Noto Sans TC"/>
+              </a:rPr>
+              <a:t> 個誤報）；門檻 </a:t>
+            </a:r>
+            <a:r>
+              <a:rPr sz="1200" b="1">
+                <a:solidFill>
+                  <a:srgbClr val="6FC7CF"/>
+                </a:solidFill>
+                <a:latin typeface="Noto Sans TC"/>
+              </a:rPr>
+              <a:t>60</a:t>
+            </a:r>
+            <a:r>
+              <a:rPr sz="1200" b="0">
+                <a:solidFill>
+                  <a:srgbClr val="E8E6E1"/>
+                </a:solidFill>
+                <a:latin typeface="Noto Sans TC"/>
+              </a:rPr>
+              <a:t> 只剩 </a:t>
+            </a:r>
+            <a:r>
+              <a:rPr sz="1200" b="1">
+                <a:solidFill>
+                  <a:srgbClr val="6FC7CF"/>
+                </a:solidFill>
+                <a:latin typeface="Noto Sans TC"/>
+              </a:rPr>
+              <a:t>14.3%</a:t>
+            </a:r>
+          </a:p>
+        </p:txBody>
+      </p:sp>
+      <p:sp>
+        <p:nvSpPr>
+          <p:cNvPr id="5" name="TextBox 4"/>
+          <p:cNvSpPr txBox="1"/>
+          <p:nvPr/>
+        </p:nvSpPr>
+        <p:spPr>
+          <a:xfrm>
+            <a:off x="6172200" y="4892040"/>
+            <a:ext cx="5440680" cy="914400"/>
+          </a:xfrm>
+          <a:prstGeom prst="rect">
+            <a:avLst/>
+          </a:prstGeom>
+          <a:noFill/>
+        </p:spPr>
+        <p:txBody>
+          <a:bodyPr wrap="square">
+            <a:spAutoFit/>
+          </a:bodyPr>
+          <a:lstStyle/>
+          <a:p>
+            <a:pPr>
+              <a:lnSpc>
+                <a:spcPct val="125000"/>
+              </a:lnSpc>
+            </a:pPr>
+            <a:r>
+              <a:rPr sz="1200" b="0">
+                <a:solidFill>
+                  <a:srgbClr val="6FC7CF"/>
+                </a:solidFill>
+                <a:latin typeface="Noto Sans TC"/>
+              </a:rPr>
+              <a:t>• </a:t>
+            </a:r>
+            <a:r>
+              <a:rPr sz="1200" b="0">
+                <a:solidFill>
+                  <a:srgbClr val="E8E6E1"/>
+                </a:solidFill>
+                <a:latin typeface="Noto Sans TC"/>
+              </a:rPr>
+              <a:t>HRIPCB 對齊＋擾動：門檻 </a:t>
+            </a:r>
+            <a:r>
+              <a:rPr sz="1200" b="1">
+                <a:solidFill>
+                  <a:srgbClr val="6FC7CF"/>
+                </a:solidFill>
+                <a:latin typeface="Noto Sans TC"/>
+              </a:rPr>
+              <a:t>10</a:t>
+            </a:r>
+            <a:r>
+              <a:rPr sz="1200" b="0">
+                <a:solidFill>
+                  <a:srgbClr val="E8E6E1"/>
+                </a:solidFill>
+                <a:latin typeface="Noto Sans TC"/>
+              </a:rPr>
+              <a:t> recall </a:t>
+            </a:r>
+            <a:r>
+              <a:rPr sz="1200" b="1">
+                <a:solidFill>
+                  <a:srgbClr val="6FC7CF"/>
+                </a:solidFill>
+                <a:latin typeface="Noto Sans TC"/>
+              </a:rPr>
+              <a:t>90.5%</a:t>
+            </a:r>
+            <a:r>
+              <a:rPr sz="1200" b="0">
+                <a:solidFill>
+                  <a:srgbClr val="E8E6E1"/>
+                </a:solidFill>
+                <a:latin typeface="Noto Sans TC"/>
+              </a:rPr>
+              <a:t> 但每張 </a:t>
+            </a:r>
+            <a:r>
+              <a:rPr sz="1200" b="1">
+                <a:solidFill>
+                  <a:srgbClr val="6FC7CF"/>
+                </a:solidFill>
+                <a:latin typeface="Noto Sans TC"/>
+              </a:rPr>
+              <a:t>860</a:t>
+            </a:r>
+            <a:r>
+              <a:rPr sz="1200" b="0">
+                <a:solidFill>
+                  <a:srgbClr val="E8E6E1"/>
+                </a:solidFill>
+                <a:latin typeface="Noto Sans TC"/>
+              </a:rPr>
+              <a:t> 個誤報；門檻 </a:t>
+            </a:r>
+            <a:r>
+              <a:rPr sz="1200" b="1">
+                <a:solidFill>
+                  <a:srgbClr val="6FC7CF"/>
+                </a:solidFill>
+                <a:latin typeface="Noto Sans TC"/>
+              </a:rPr>
+              <a:t>60</a:t>
+            </a:r>
+            <a:r>
+              <a:rPr sz="1200" b="0">
+                <a:solidFill>
+                  <a:srgbClr val="E8E6E1"/>
+                </a:solidFill>
+                <a:latin typeface="Noto Sans TC"/>
+              </a:rPr>
+              <a:t> 誤報 </a:t>
+            </a:r>
+            <a:r>
+              <a:rPr sz="1200" b="1">
+                <a:solidFill>
+                  <a:srgbClr val="6FC7CF"/>
+                </a:solidFill>
+                <a:latin typeface="Noto Sans TC"/>
+              </a:rPr>
+              <a:t>24.7</a:t>
+            </a:r>
+            <a:r>
+              <a:rPr sz="1200" b="0">
+                <a:solidFill>
+                  <a:srgbClr val="E8E6E1"/>
+                </a:solidFill>
+                <a:latin typeface="Noto Sans TC"/>
+              </a:rPr>
+              <a:t> 個但 recall </a:t>
+            </a:r>
+            <a:r>
+              <a:rPr sz="1200" b="1">
+                <a:solidFill>
+                  <a:srgbClr val="6FC7CF"/>
+                </a:solidFill>
+                <a:latin typeface="Noto Sans TC"/>
+              </a:rPr>
+              <a:t>14.2%</a:t>
+            </a:r>
+            <a:r>
+              <a:rPr sz="1200" b="0">
+                <a:solidFill>
+                  <a:srgbClr val="E8E6E1"/>
+                </a:solidFill>
+                <a:latin typeface="Noto Sans TC"/>
+              </a:rPr>
+              <a:t>——沒有一點同時過兩關</a:t>
+            </a:r>
+          </a:p>
+          <a:p>
+            <a:pPr>
+              <a:lnSpc>
+                <a:spcPct val="125000"/>
+              </a:lnSpc>
+            </a:pPr>
+            <a:r>
+              <a:rPr sz="1200" b="0">
+                <a:solidFill>
+                  <a:srgbClr val="6FC7CF"/>
+                </a:solidFill>
+                <a:latin typeface="Noto Sans TC"/>
+              </a:rPr>
+              <a:t>• </a:t>
+            </a:r>
+            <a:r>
+              <a:rPr sz="1200" b="0">
+                <a:solidFill>
+                  <a:srgbClr val="E8E6E1"/>
+                </a:solidFill>
+                <a:latin typeface="Noto Sans TC"/>
+              </a:rPr>
+              <a:t>HRIPCB 旋轉：對位拒絕 </a:t>
+            </a:r>
+            <a:r>
+              <a:rPr sz="1200" b="1">
+                <a:solidFill>
+                  <a:srgbClr val="6FC7CF"/>
+                </a:solidFill>
+                <a:latin typeface="Noto Sans TC"/>
+              </a:rPr>
+              <a:t>563/693</a:t>
+            </a:r>
+            <a:r>
+              <a:rPr sz="1200" b="0">
+                <a:solidFill>
+                  <a:srgbClr val="E8E6E1"/>
+                </a:solidFill>
+                <a:latin typeface="Noto Sans TC"/>
+              </a:rPr>
+              <a:t> 對，最好 recall </a:t>
+            </a:r>
+            <a:r>
+              <a:rPr sz="1200" b="1">
+                <a:solidFill>
+                  <a:srgbClr val="6FC7CF"/>
+                </a:solidFill>
+                <a:latin typeface="Noto Sans TC"/>
+              </a:rPr>
+              <a:t>49.4%</a:t>
+            </a:r>
+            <a:r>
+              <a:rPr sz="1200" b="0">
+                <a:solidFill>
+                  <a:srgbClr val="E8E6E1"/>
+                </a:solidFill>
+                <a:latin typeface="Noto Sans TC"/>
+              </a:rPr>
+              <a:t>、每張 </a:t>
+            </a:r>
+            <a:r>
+              <a:rPr sz="1200" b="1">
+                <a:solidFill>
+                  <a:srgbClr val="6FC7CF"/>
+                </a:solidFill>
+                <a:latin typeface="Noto Sans TC"/>
+              </a:rPr>
+              <a:t>282</a:t>
+            </a:r>
+            <a:r>
+              <a:rPr sz="1200" b="0">
+                <a:solidFill>
+                  <a:srgbClr val="E8E6E1"/>
+                </a:solidFill>
+                <a:latin typeface="Noto Sans TC"/>
+              </a:rPr>
+              <a:t> 個誤報</a:t>
+            </a:r>
+          </a:p>
+        </p:txBody>
+      </p:sp>
+      <p:sp>
+        <p:nvSpPr>
+          <p:cNvPr id="6" name="TextBox 5"/>
+          <p:cNvSpPr txBox="1"/>
+          <p:nvPr/>
+        </p:nvSpPr>
+        <p:spPr>
+          <a:xfrm>
+            <a:off x="548640" y="5897880"/>
+            <a:ext cx="11155680" cy="365760"/>
+          </a:xfrm>
+          <a:prstGeom prst="rect">
+            <a:avLst/>
+          </a:prstGeom>
+          <a:noFill/>
+        </p:spPr>
+        <p:txBody>
+          <a:bodyPr wrap="square">
+            <a:spAutoFit/>
+          </a:bodyPr>
+          <a:lstStyle/>
+          <a:p>
+            <a:pPr>
+              <a:lnSpc>
+                <a:spcPct val="115000"/>
+              </a:lnSpc>
+            </a:pPr>
+            <a:r>
+              <a:rPr sz="950" b="0">
+                <a:solidFill>
+                  <a:srgbClr val="9AA0A6"/>
+                </a:solidFill>
+                <a:latin typeface="IBM Plex Mono"/>
+              </a:rPr>
+              <a:t>eval/results/gate_check*.json · 每個灰階門檻的 recall 與每張圖的平均誤報數</a:t>
+            </a:r>
+          </a:p>
+        </p:txBody>
+      </p:sp>
+      <p:sp>
+        <p:nvSpPr>
+          <p:cNvPr id="7" name="TextBox 6"/>
+          <p:cNvSpPr txBox="1"/>
+          <p:nvPr/>
+        </p:nvSpPr>
+        <p:spPr>
+          <a:xfrm>
+            <a:off x="457200" y="6400800"/>
+            <a:ext cx="5486400" cy="320040"/>
+          </a:xfrm>
+          <a:prstGeom prst="rect">
+            <a:avLst/>
+          </a:prstGeom>
+          <a:noFill/>
+        </p:spPr>
+        <p:txBody>
+          <a:bodyPr wrap="square">
+            <a:spAutoFit/>
+          </a:bodyPr>
+          <a:lstStyle/>
+          <a:p>
+            <a:pPr>
+              <a:lnSpc>
+                <a:spcPct val="115000"/>
+              </a:lnSpc>
+            </a:pPr>
+            <a:r>
+              <a:rPr sz="1000" b="0">
+                <a:solidFill>
+                  <a:srgbClr val="9AA0A6"/>
+                </a:solidFill>
+                <a:latin typeface="IBM Plex Mono"/>
+              </a:rPr>
+              <a:t>附錄 · 備查數字</a:t>
+            </a:r>
+          </a:p>
+        </p:txBody>
+      </p:sp>
+      <p:sp>
+        <p:nvSpPr>
+          <p:cNvPr id="8" name="TextBox 7"/>
+          <p:cNvSpPr txBox="1"/>
+          <p:nvPr/>
+        </p:nvSpPr>
+        <p:spPr>
+          <a:xfrm>
+            <a:off x="8046720" y="6400800"/>
+            <a:ext cx="3657600" cy="320040"/>
+          </a:xfrm>
+          <a:prstGeom prst="rect">
+            <a:avLst/>
+          </a:prstGeom>
+          <a:noFill/>
+        </p:spPr>
+        <p:txBody>
+          <a:bodyPr wrap="square">
+            <a:spAutoFit/>
+          </a:bodyPr>
+          <a:lstStyle/>
+          <a:p>
+            <a:pPr algn="r">
+              <a:lnSpc>
+                <a:spcPct val="115000"/>
+              </a:lnSpc>
+            </a:pPr>
+            <a:r>
+              <a:rPr sz="1000" b="0">
+                <a:solidFill>
+                  <a:srgbClr val="9AA0A6"/>
+                </a:solidFill>
+                <a:latin typeface="IBM Plex Mono"/>
+              </a:rPr>
+              <a:t>36 / 38</a:t>
+            </a:r>
+          </a:p>
+        </p:txBody>
+      </p:sp>
+    </p:spTree>
+  </p:cSld>
+  <p:clrMapOvr>
+    <a:masterClrMapping/>
+  </p:clrMapOvr>
+</p:sld>
+</file>
+
+<file path=ppt/slides/slide37.xml><?xml version="1.0" encoding="utf-8"?>
 <p:sld xmlns:a="http://schemas.openxmlformats.org/drawingml/2006/main" xmlns:p="http://schemas.openxmlformats.org/presentationml/2006/main" xmlns:r="http://schemas.openxmlformats.org/officeDocument/2006/relationships">
   <p:cSld>
     <p:bg>
@@ -33773,7 +34102,7 @@
                 </a:solidFill>
                 <a:latin typeface="IBM Plex Mono"/>
               </a:rPr>
-              <a:t>36 / 37</a:t>
+              <a:t>37 / 38</a:t>
             </a:r>
           </a:p>
         </p:txBody>
@@ -33786,7 +34115,7 @@
 </p:sld>
 </file>
 
-<file path=ppt/slides/slide37.xml><?xml version="1.0" encoding="utf-8"?>
+<file path=ppt/slides/slide38.xml><?xml version="1.0" encoding="utf-8"?>
 <p:sld xmlns:a="http://schemas.openxmlformats.org/drawingml/2006/main" xmlns:p="http://schemas.openxmlformats.org/presentationml/2006/main" xmlns:r="http://schemas.openxmlformats.org/officeDocument/2006/relationships">
   <p:cSld>
     <p:bg>
@@ -34688,7 +35017,7 @@
                 </a:solidFill>
                 <a:latin typeface="IBM Plex Mono"/>
               </a:rPr>
-              <a:t>37 / 37</a:t>
+              <a:t>38 / 38</a:t>
             </a:r>
           </a:p>
         </p:txBody>
@@ -34894,7 +35223,7 @@
                 </a:solidFill>
                 <a:latin typeface="IBM Plex Mono"/>
               </a:rPr>
-              <a:t>★ 主線 3/9 · 4 / 37</a:t>
+              <a:t>★ 主線 3/9 · 4 / 38</a:t>
             </a:r>
           </a:p>
         </p:txBody>
@@ -35100,7 +35429,7 @@
                 </a:solidFill>
                 <a:latin typeface="IBM Plex Mono"/>
               </a:rPr>
-              <a:t>5 / 37</a:t>
+              <a:t>5 / 38</a:t>
             </a:r>
           </a:p>
         </p:txBody>
@@ -35306,7 +35635,7 @@
                 </a:solidFill>
                 <a:latin typeface="IBM Plex Mono"/>
               </a:rPr>
-              <a:t>6 / 37</a:t>
+              <a:t>6 / 38</a:t>
             </a:r>
           </a:p>
         </p:txBody>
@@ -36443,7 +36772,7 @@
                 </a:solidFill>
                 <a:latin typeface="IBM Plex Mono"/>
               </a:rPr>
-              <a:t>7 / 37</a:t>
+              <a:t>7 / 38</a:t>
             </a:r>
           </a:p>
         </p:txBody>
@@ -37727,7 +38056,7 @@
                 </a:solidFill>
                 <a:latin typeface="IBM Plex Mono"/>
               </a:rPr>
-              <a:t>★ 主線 5/9 · 8 / 37</a:t>
+              <a:t>★ 主線 5/9 · 8 / 38</a:t>
             </a:r>
           </a:p>
         </p:txBody>
@@ -38972,7 +39301,7 @@
                 </a:solidFill>
                 <a:latin typeface="IBM Plex Mono"/>
               </a:rPr>
-              <a:t>9 / 37</a:t>
+              <a:t>9 / 38</a:t>
             </a:r>
           </a:p>
         </p:txBody>

--- a/docs/deck/aoi-agent-journey.zh-TW.pptx
+++ b/docs/deck/aoi-agent-journey.zh-TW.pptx
@@ -766,22 +766,27 @@
           <a:p/>
           <a:p>
             <a:r>
-              <a:t>講稿 1. 這是頭條的那張曲線。橫軸漏網率、縱軸省掉的人工，門檻掃過去就是這條線。</a:t>
-            </a:r>
-          </a:p>
-          <a:p>
-            <a:r>
-              <a:t>講稿 2. 選 0.961 是因為它是漏網率不超過 0.5% 的最低門檻，這個數字來自掃描，不是手調。</a:t>
-            </a:r>
-          </a:p>
-          <a:p>
-            <a:r>
-              <a:t>講稿 3. 但平均數不能單獨報：分類別看，short 漏 1.55%，是平均的三倍，而 short 是規範裡一個都不准放的類別。</a:t>
-            </a:r>
-          </a:p>
-          <a:p>
-            <a:r>
-              <a:t>講稿 4. 這些漏掉的是模型很有信心的錯，不是猶豫的錯，所以模型自己救不了，要電測。</a:t>
+              <a:t>講稿 1. 先講這張圖在回答什麼：漏檢率在這個系統裡不是一個指標，是一個預算。代價不對稱——漏一片是那片板子出貨了，多報一次是作業員三秒——所以我從來不報準確率，準確率把這兩種錯當成一樣重。</a:t>
+            </a:r>
+          </a:p>
+          <a:p>
+            <a:r>
+              <a:t>講稿 2. 橫軸漏檢率、縱軸省掉的人工，門檻掃過去就是這條線。我選 0.961，因為它是漏檢率不超過千分之五的最低門檻，這個數字從掃描來，不是手調的。</a:t>
+            </a:r>
+          </a:p>
+          <a:p>
+            <a:r>
+              <a:t>講稿 3. 接下來三件事我自己講，不等人問。第一，0.5% 是這個測試集上的點估計：15 個漏檢除以 3,018 個缺陷，95% 區間到 0.82%，不排除超預算。</a:t>
+            </a:r>
+          </a:p>
+          <a:p>
+            <a:r>
+              <a:t>講稿 4. 第二，平均值蓋掉了一個類別：short 漏 1.55%，是預算的三倍，而規範對 short 是零容忍；而且這些是有信心的錯，模型給它們的分數只有 0.00007 到 0.00589，門檻切不開，要靠電測這個不共用同一種失敗的第二次量測。</a:t>
+            </a:r>
+          </a:p>
+          <a:p>
+            <a:r>
+              <a:t>講稿 5. 第三，漏檢率跟不良率無關，換一條線照樣成立；會變的是省人工那個數字，線越乾淨越高，0.5% 不良率時是 89.0%——所以我報 52.8% 的時候一定會把它假設的 41.2% 不良率一起講。</a:t>
             </a:r>
           </a:p>
           <a:p/>
@@ -790,6 +795,28 @@
               <a:t>面試官會問：</a:t>
             </a:r>
           </a:p>
+          <a:p>
+            <a:r>
+              <a:t>Q：漏檢率重要嗎？為什麼不報準確率？</a:t>
+            </a:r>
+          </a:p>
+          <a:p>
+            <a:r>
+              <a:t>A：它不是重要的指標之一，它是預算——其他每個數字都是在它固定之後才有意義。代價不對稱：漏一片是出貨，多報一次是三秒。準確率把這兩種錯當成一樣重，所以整條產線的取捨在那個數字上是看不見的。</a:t>
+            </a:r>
+          </a:p>
+          <a:p/>
+          <a:p>
+            <a:r>
+              <a:t>Q：換一條產線，這些數字還成立嗎？</a:t>
+            </a:r>
+          </a:p>
+          <a:p>
+            <a:r>
+              <a:t>A：漏檢率成立，省人工不成立。漏檢率除以缺陷總數，不良率重新加權會約掉；52.8% 假設的是這個 split 的 41.2% 不良率，線越乾淨越高——0.5% 不良率時是 89.0%。真正不能轉移的是驗證：一條只看到 100 個缺陷的試產線，確認不了 0.5% 的預算。</a:t>
+            </a:r>
+          </a:p>
+          <a:p/>
           <a:p>
             <a:r>
               <a:t>Q：為什麼不對 short 單獨設更嚴的門檻？</a:t>
@@ -10376,6 +10403,57 @@
                 <a:cs typeface="Noto Sans TC"/>
               </a:rPr>
               <a:t> 本來就寫了。</a:t>
+            </a:r>
+          </a:p>
+          <a:p>
+            <a:pPr>
+              <a:lnSpc>
+                <a:spcPct val="125000"/>
+              </a:lnSpc>
+            </a:pPr>
+            <a:r>
+              <a:rPr sz="1300" b="0">
+                <a:solidFill>
+                  <a:srgbClr val="6FC7CF"/>
+                </a:solidFill>
+                <a:latin typeface="Noto Sans TC"/>
+                <a:ea typeface="Noto Sans TC"/>
+                <a:cs typeface="Noto Sans TC"/>
+              </a:rPr>
+              <a:t>• </a:t>
+            </a:r>
+            <a:r>
+              <a:rPr sz="1300" b="0">
+                <a:solidFill>
+                  <a:srgbClr val="E8E6E1"/>
+                </a:solidFill>
+                <a:latin typeface="Noto Sans TC"/>
+                <a:ea typeface="Noto Sans TC"/>
+                <a:cs typeface="Noto Sans TC"/>
+              </a:rPr>
+              <a:t>漏檢還有第二個來源，在這條線之外：</a:t>
+            </a:r>
+            <a:r>
+              <a:rPr sz="1300" b="1">
+                <a:solidFill>
+                  <a:srgbClr val="6FC7CF"/>
+                </a:solidFill>
+                <a:latin typeface="Noto Sans TC"/>
+                <a:ea typeface="Noto Sans TC"/>
+                <a:cs typeface="Noto Sans TC"/>
+              </a:rPr>
+              <a:t>0.22%</a:t>
+            </a:r>
+            <a:r>
+              <a:rPr sz="1300" b="0">
+                <a:solidFill>
+                  <a:srgbClr val="E8E6E1"/>
+                </a:solidFill>
+                <a:latin typeface="Noto Sans TC"/>
+                <a:ea typeface="Noto Sans TC"/>
+                <a:cs typeface="Noto Sans TC"/>
+              </a:rPr>
+              <a:t> 的缺陷 AOI 根本沒框到，門檻碰不到（上一層那頁）</a:t>
             </a:r>
           </a:p>
         </p:txBody>

--- a/docs/deck/aoi-agent-journey.zh-TW.pptx
+++ b/docs/deck/aoi-agent-journey.zh-TW.pptx
@@ -44,6 +44,7 @@
     <p:sldId id="292" r:id="rId44"/>
     <p:sldId id="293" r:id="rId45"/>
     <p:sldId id="294" r:id="rId46"/>
+    <p:sldId id="295" r:id="rId47"/>
   </p:sldIdLst>
   <p:sldSz cx="12191695" cy="6858000" type="screen4x3"/>
   <p:notesSz cx="6858000" cy="9144000"/>
@@ -3409,55 +3410,97 @@
           <a:lstStyle/>
           <a:p>
             <a:r>
-              <a:t>白話：程式一直是對的，只有寫在最顯眼地方的那個數字是舊的——所以文件也要有測試。</a:t>
+              <a:t>白話：一個模型的分數只能回答它被訓練去回答的問題；它錯的時候是有信心地錯，所以在它自己的輸出上找不到切點，要靠第二種不共用失敗的量測。</a:t>
             </a:r>
           </a:p>
           <a:p/>
           <a:p>
             <a:r>
-              <a:t>講稿 1. 最後一個錯是關於文件的：README 第一行的 56.2%，是一份沒有 commit 的表產生的，實際是 52.8%。</a:t>
-            </a:r>
-          </a:p>
-          <a:p>
-            <a:r>
-              <a:t>講稿 2. 程式一直是對的：對位開了、重訓了、門檻重掃了，全照流程。只有文字留在原地。</a:t>
-            </a:r>
-          </a:p>
-          <a:p>
-            <a:r>
-              <a:t>講稿 3. 所以文件也有測試：四份文件裡的數字必須屬於 benchmarks 裡的某個 run，舊數字只能出現在標日期的段落裡。</a:t>
-            </a:r>
-          </a:p>
-          <a:p>
-            <a:r>
-              <a:t>講稿 4. 這一頁我想講的是：這個專案裡每個數字都能被追到它的 run，包括投影片上的這些——這份投影片本身也過那個測試。</a:t>
+              <a:t>頁面上只有圖；要點：</a:t>
+            </a:r>
+          </a:p>
+          <a:p>
+            <a:r>
+              <a:t>• 有樣板：複判器的分數就是在答「是不是誤報」，所以排掉 52.8% 的人工——這把尺量的就是那個問題</a:t>
+            </a:r>
+          </a:p>
+          <a:p>
+            <a:r>
+              <a:t>• 但它漏掉的 short 是 1.55%，預算的 3.1 倍；它放掉的瑕疵分數是 0.00007–0.00589，留下的中位數 1.000——兩堆不重疊，是有信心的錯</a:t>
+            </a:r>
+          </a:p>
+          <a:p>
+            <a:r>
+              <a:t>• 沒樣板：偵測器的分數在答「這裡有沒有東西」。直接排 1.2%、換專門判誤報的模型 2.8%、放大四倍 0.6%</a:t>
+            </a:r>
+          </a:p>
+          <a:p>
+            <a:r>
+              <a:t>• 所以不是模型不夠好是資訊不夠：補參考（CAD/Gerber、黃金板）或補第二種物理量（3D SPI 高度、電測）</a:t>
             </a:r>
           </a:p>
           <a:p/>
           <a:p>
             <a:r>
+              <a:t>講稿 1. 這張是把兩個看起來無關的發現放在一起，因為它們的答案是同一個。</a:t>
+            </a:r>
+          </a:p>
+          <a:p>
+            <a:r>
+              <a:t>講稿 2. 左邊有樣板的線：複判器的分數本來就在回答「是不是誤報」，所以拿它排序排掉了 52.8% 的人工，尺是對的。可是它漏掉的 short 是預算的三倍，而且它放掉那些瑕疵的時候分數是 0.00007 到 0.00589，留下的中位數是 1.000——兩堆完全不重疊。</a:t>
+            </a:r>
+          </a:p>
+          <a:p>
+            <a:r>
+              <a:t>講稿 3. 那代表它是有信心地錯，不是猶豫地錯，所以在它自己的輸出上永遠找不到一個切點把那些漏檢挑出來。門檻調再嚴也沒用。</a:t>
+            </a:r>
+          </a:p>
+          <a:p>
+            <a:r>
+              <a:t>講稿 4. 右邊沒樣板的線：偵測器的分數回答的是「這裡有沒有東西」，不是「是不是誤報」。三個角度都試過——直接排 1.2%、換一個專門判誤報的模型 2.8%、把照片放大四倍 0.6%，最後一個還更差。</a:t>
+            </a:r>
+          </a:p>
+          <a:p>
+            <a:r>
+              <a:t>講稿 5. 所以兩邊的結論是同一句：要關掉盲點只能加一個不共用同一種失敗的量測。有樣板的線是電測，沒樣板的線是給它參考或給它 3D SPI 的高度——都不是換更大的模型。</a:t>
+            </a:r>
+          </a:p>
+          <a:p/>
+          <a:p>
+            <a:r>
               <a:t>面試官會問：</a:t>
             </a:r>
           </a:p>
           <a:p>
             <a:r>
-              <a:t>Q：為什麼 benchmarks.md 只增不改？</a:t>
-            </a:r>
-          </a:p>
-          <a:p>
-            <a:r>
-              <a:t>A：因為改了就看不出結論什麼時候翻過。INT8 那次 08-23 說不值得、08-26 說成立，兩筆都在，讀者看得到是權重換了。</a:t>
+              <a:t>Q：為什麼不對漏掉的那一類單獨設更嚴的門檻？</a:t>
+            </a:r>
+          </a:p>
+          <a:p>
+            <a:r>
+              <a:t>A：因為那些不是模糊地帶。複判器放掉的 open，P(open) 是 0.00007 到 0.00589，它留下的中位數是 1.000——兩堆之間沒有重疊區可以切。任何在模型自己輸出上的切法都分不開，這是「有信心的錯」的定義。</a:t>
             </a:r>
           </a:p>
           <a:p/>
           <a:p>
             <a:r>
-              <a:t>Q：投影片上的數字怎麼保證是對的？</a:t>
-            </a:r>
-          </a:p>
-          <a:p>
-            <a:r>
-              <a:t>A：tests/test_deck.py：每一頁引用的數字必須出現在 benchmarks.md 或那四份被盯著的文件裡。這份投影片是從 scripts/deck_content.py 產的，內容和 pptx、網頁、講義三份一個來源。</a:t>
+              <a:t>Q：那你會怎麼提案給產線？</a:t>
+            </a:r>
+          </a:p>
+          <a:p>
+            <a:r>
+              <a:t>A：不是換模型，是補一個不共用失敗的量測。有樣板的線用電測，WI-201 本來就寫了；沒樣板的 SMT 線用 CAD/Gerber 或黃金板把樣板通道補回來，或用 3D SPI 的錫膏高度——高度是一個視覺模型看不到的物理量。</a:t>
+            </a:r>
+          </a:p>
+          <a:p/>
+          <a:p>
+            <a:r>
+              <a:t>Q：你怎麼知道是資訊不夠而不是模型不夠好？</a:t>
+            </a:r>
+          </a:p>
+          <a:p>
+            <a:r>
+              <a:t>A：因為我把偵測器的框裁下來，用跟複判器一模一樣的架構重訓一個專門判誤報的模型，唯一差別是少了樣板通道，同樣 578 個候選只有 2.8%。再把輸入解析度加倍，掉到 0.6%。三個方向都指向同一個限制。</a:t>
             </a:r>
           </a:p>
         </p:txBody>
@@ -3527,28 +3570,28 @@
           <a:lstStyle/>
           <a:p>
             <a:r>
-              <a:t>白話：四件事沒做，每一件都有一個寫下來的理由，而不是沒時間。</a:t>
+              <a:t>白話：程式一直是對的，只有寫在最顯眼地方的那個數字是舊的——所以文件也要有測試。</a:t>
             </a:r>
           </a:p>
           <a:p/>
           <a:p>
             <a:r>
-              <a:t>講稿 1. 最後講沒做的，因為面試官一定會問。</a:t>
-            </a:r>
-          </a:p>
-          <a:p>
-            <a:r>
-              <a:t>講稿 2. Shadow mode 是對的下一步，但需要一條真的產線；在這裡建，量出來的是種出來的資料，那正是偵測器專案當年被砍的形狀。</a:t>
-            </a:r>
-          </a:p>
-          <a:p>
-            <a:r>
-              <a:t>講稿 3. 依賴參數等真題；重訓等真標籤；電測不在這個系統裡。</a:t>
-            </a:r>
-          </a:p>
-          <a:p>
-            <a:r>
-              <a:t>講稿 4. 收尾一句：每個門檻引得到檔案、每個數字在 benchmarks 裡、每個錯有它產生的測試。</a:t>
+              <a:t>講稿 1. 最後一個錯是關於文件的：README 第一行的 56.2%，是一份沒有 commit 的表產生的，實際是 52.8%。</a:t>
+            </a:r>
+          </a:p>
+          <a:p>
+            <a:r>
+              <a:t>講稿 2. 程式一直是對的：對位開了、重訓了、門檻重掃了，全照流程。只有文字留在原地。</a:t>
+            </a:r>
+          </a:p>
+          <a:p>
+            <a:r>
+              <a:t>講稿 3. 所以文件也有測試：四份文件裡的數字必須屬於 benchmarks 裡的某個 run，舊數字只能出現在標日期的段落裡。</a:t>
+            </a:r>
+          </a:p>
+          <a:p>
+            <a:r>
+              <a:t>講稿 4. 這一頁我想講的是：這個專案裡每個數字都能被追到它的 run，包括投影片上的這些——這份投影片本身也過那個測試。</a:t>
             </a:r>
           </a:p>
           <a:p/>
@@ -3559,23 +3602,23 @@
           </a:p>
           <a:p>
             <a:r>
-              <a:t>Q：如果明天給你一條真的產線，第一件事做什麼？</a:t>
-            </a:r>
-          </a:p>
-          <a:p>
-            <a:r>
-              <a:t>A：Shadow mode：模型跟著現有流程跑，只記錄它會怎麼判。資料庫已經支援——決定只累加不覆蓋，模型一筆、人一筆並排。目的是重建漏網率的證據，因為一個看 100 個缺陷的試跑證明不了 0.5% 的預算。</a:t>
+              <a:t>Q：為什麼 benchmarks.md 只增不改？</a:t>
+            </a:r>
+          </a:p>
+          <a:p>
+            <a:r>
+              <a:t>A：因為改了就看不出結論什麼時候翻過。INT8 那次 08-23 說不值得、08-26 說成立，兩筆都在，讀者看得到是權重換了。</a:t>
             </a:r>
           </a:p>
           <a:p/>
           <a:p>
             <a:r>
-              <a:t>Q：這個專案最大的限制是什麼？</a:t>
-            </a:r>
-          </a:p>
-          <a:p>
-            <a:r>
-              <a:t>A：資料是二值化的 DeepPCB，相減前端的適用範圍就是這種影像；真的照片要換前端，而偵測器前端的 confidence 排不掉誤報，1.2%。這兩個結論從兩邊碰頭，都量過。</a:t>
+              <a:t>Q：投影片上的數字怎麼保證是對的？</a:t>
+            </a:r>
+          </a:p>
+          <a:p>
+            <a:r>
+              <a:t>A：tests/test_deck.py：每一頁引用的數字必須出現在 benchmarks.md 或那四份被盯著的文件裡。這份投影片是從 scripts/deck_content.py 產的，內容和 pptx、網頁、講義三份一個來源。</a:t>
             </a:r>
           </a:p>
         </p:txBody>
@@ -3645,28 +3688,28 @@
           <a:lstStyle/>
           <a:p>
             <a:r>
-              <a:t>白話：十個 epoch、四分鐘；看的不是準確率那條，是「在漏網預算下省掉多少」那條。</a:t>
+              <a:t>白話：四件事沒做，每一件都有一個寫下來的理由，而不是沒時間。</a:t>
             </a:r>
           </a:p>
           <a:p/>
           <a:p>
             <a:r>
-              <a:t>講稿 1. 面試官問「你怎麼訓練的、有沒有過擬合」，翻這一頁。</a:t>
-            </a:r>
-          </a:p>
-          <a:p>
-            <a:r>
-              <a:t>講稿 2. 三條線：訓練 loss 一直降；驗證準確率兩個 epoch 就飽和；真正選模型用的是第三條——漏網預算下省掉的比例。</a:t>
-            </a:r>
-          </a:p>
-          <a:p>
-            <a:r>
-              <a:t>講稿 3. 準確率會騙人：它把漏一個缺陷和多看一個誤報算一樣。</a:t>
-            </a:r>
-          </a:p>
-          <a:p>
-            <a:r>
-              <a:t>講稿 4. loss 還在降、驗證指標不動，就是在背訓練集，所以十個 epoch 就停。</a:t>
+              <a:t>講稿 1. 最後講沒做的，因為面試官一定會問。</a:t>
+            </a:r>
+          </a:p>
+          <a:p>
+            <a:r>
+              <a:t>講稿 2. Shadow mode 是對的下一步，但需要一條真的產線；在這裡建，量出來的是種出來的資料，那正是偵測器專案當年被砍的形狀。</a:t>
+            </a:r>
+          </a:p>
+          <a:p>
+            <a:r>
+              <a:t>講稿 3. 依賴參數等真題；重訓等真標籤；電測不在這個系統裡。</a:t>
+            </a:r>
+          </a:p>
+          <a:p>
+            <a:r>
+              <a:t>講稿 4. 收尾一句：每個門檻引得到檔案、每個數字在 benchmarks 裡、每個錯有它產生的測試。</a:t>
             </a:r>
           </a:p>
           <a:p/>
@@ -3677,23 +3720,23 @@
           </a:p>
           <a:p>
             <a:r>
-              <a:t>Q：為什麼不用 val_accuracy 選 checkpoint？</a:t>
-            </a:r>
-          </a:p>
-          <a:p>
-            <a:r>
-              <a:t>A：它第 2 個 epoch 就 97%，之後不動，而且它把漏網和誤報算一樣的錯。用的是驗證集上 ≤0.5% 漏網下省掉的比例，第 9 個 epoch 最高。</a:t>
+              <a:t>Q：如果明天給你一條真的產線，第一件事做什麼？</a:t>
+            </a:r>
+          </a:p>
+          <a:p>
+            <a:r>
+              <a:t>A：Shadow mode：模型跟著現有流程跑，只記錄它會怎麼判。資料庫已經支援——決定只累加不覆蓋，模型一筆、人一筆並排。目的是重建漏網率的證據，因為一個看 100 個缺陷的試跑證明不了 0.5% 的預算。</a:t>
             </a:r>
           </a:p>
           <a:p/>
           <a:p>
             <a:r>
-              <a:t>Q：有沒有過擬合？</a:t>
-            </a:r>
-          </a:p>
-          <a:p>
-            <a:r>
-              <a:t>A：train_loss 降到 0.02 時驗證指標已經平了三個 epoch——是背訓練集的跡象，所以停在 10 個 epoch。驗證集按板子切，這個判斷才可信。</a:t>
+              <a:t>Q：這個專案最大的限制是什麼？</a:t>
+            </a:r>
+          </a:p>
+          <a:p>
+            <a:r>
+              <a:t>A：資料是二值化的 DeepPCB，相減前端的適用範圍就是這種影像；真的照片要換前端，而偵測器前端的 confidence 排不掉誤報，1.2%。這兩個結論從兩邊碰頭，都量過。</a:t>
             </a:r>
           </a:p>
         </p:txBody>
@@ -3763,28 +3806,28 @@
           <a:lstStyle/>
           <a:p>
             <a:r>
-              <a:t>白話：同一把尺（≤0.5% 漏網下省掉多少）量四種做法，只有帶樣板通道的小 CNN 站得住。</a:t>
+              <a:t>白話：十個 epoch、四分鐘；看的不是準確率那條，是「在漏網預算下省掉多少」那條。</a:t>
             </a:r>
           </a:p>
           <a:p/>
           <a:p>
             <a:r>
-              <a:t>講稿 1. 「為什麼是 ResNet-18」的答案在這張表：同一把尺量四種做法。</a:t>
-            </a:r>
-          </a:p>
-          <a:p>
-            <a:r>
-              <a:t>講稿 2. 先看地板：不用模型、只算差異圖的統計，大約 1%。模型 52.8%，40 倍。</a:t>
-            </a:r>
-          </a:p>
-          <a:p>
-            <a:r>
-              <a:t>講稿 3. 再看兩個對照：拿掉樣板通道剩 2.8%，偵測器的信心 1.2%。所以關鍵不是網路多大，是輸入裡有沒有「本來該長怎樣」。</a:t>
-            </a:r>
-          </a:p>
-          <a:p>
-            <a:r>
-              <a:t>講稿 4. 沒試更大的模型，因為剩下的漏網是很有信心的錯，不是容量問題。</a:t>
+              <a:t>講稿 1. 面試官問「你怎麼訓練的、有沒有過擬合」，翻這一頁。</a:t>
+            </a:r>
+          </a:p>
+          <a:p>
+            <a:r>
+              <a:t>講稿 2. 三條線：訓練 loss 一直降；驗證準確率兩個 epoch 就飽和；真正選模型用的是第三條——漏網預算下省掉的比例。</a:t>
+            </a:r>
+          </a:p>
+          <a:p>
+            <a:r>
+              <a:t>講稿 3. 準確率會騙人：它把漏一個缺陷和多看一個誤報算一樣。</a:t>
+            </a:r>
+          </a:p>
+          <a:p>
+            <a:r>
+              <a:t>講稿 4. loss 還在降、驗證指標不動，就是在背訓練集，所以十個 epoch 就停。</a:t>
             </a:r>
           </a:p>
           <a:p/>
@@ -3795,23 +3838,23 @@
           </a:p>
           <a:p>
             <a:r>
-              <a:t>Q：為什麼不試 ResNet-50 或 ViT？</a:t>
-            </a:r>
-          </a:p>
-          <a:p>
-            <a:r>
-              <a:t>A：剩下的 15 個漏網是 confident errors——模型給它們的 P(open) 是 0.00007 到 0.00589，換大模型解決的是模糊地帶，不是這種。而且 CPU 2.5 ms 一個候選已經是週期的零頭。</a:t>
+              <a:t>Q：為什麼不用 val_accuracy 選 checkpoint？</a:t>
+            </a:r>
+          </a:p>
+          <a:p>
+            <a:r>
+              <a:t>A：它第 2 個 epoch 就 97%，之後不動，而且它把漏網和誤報算一樣的錯。用的是驗證集上 ≤0.5% 漏網下省掉的比例，第 9 個 epoch 最高。</a:t>
             </a:r>
           </a:p>
           <a:p/>
           <a:p>
             <a:r>
-              <a:t>Q：地板是怎麼算的？</a:t>
-            </a:r>
-          </a:p>
-          <a:p>
-            <a:r>
-              <a:t>A：差異圖上不用模型就能算的分數：平均值、最大值、前 32/64/128 個像素的和、超過某亮度的像素數，各自當 P(false call) 掃同一條曲線，最好的在 ≤0.5% 下是 1.3%。</a:t>
+              <a:t>Q：有沒有過擬合？</a:t>
+            </a:r>
+          </a:p>
+          <a:p>
+            <a:r>
+              <a:t>A：train_loss 降到 0.02 時驗證指標已經平了三個 epoch——是背訓練集的跡象，所以停在 10 個 epoch。驗證集按板子切，這個判斷才可信。</a:t>
             </a:r>
           </a:p>
         </p:txBody>
@@ -3881,28 +3924,28 @@
           <a:lstStyle/>
           <a:p>
             <a:r>
-              <a:t>白話：兩種量化在漏網預算上幾乎一樣，差別在速度和校正方式；而且這個結論換權重就要重量。</a:t>
+              <a:t>白話：同一把尺（≤0.5% 漏網下省掉多少）量四種做法，只有帶樣板通道的小 CNN 站得住。</a:t>
             </a:r>
           </a:p>
           <a:p/>
           <a:p>
             <a:r>
-              <a:t>講稿 1. INT8 動態和靜態的差別，面試官問到就翻這張。</a:t>
-            </a:r>
-          </a:p>
-          <a:p>
-            <a:r>
-              <a:t>講稿 2. 在漏網預算上：動態 52.5、靜態 53.0，對 FP32 的 52.8，都在一點以內。類別一致 99.8%，不一致十幾個。</a:t>
-            </a:r>
-          </a:p>
-          <a:p>
-            <a:r>
-              <a:t>講稿 3. 靜態快 3.87 倍，但要校正集；校正集只用訓練 split，不碰 test。</a:t>
-            </a:r>
-          </a:p>
-          <a:p>
-            <a:r>
-              <a:t>講稿 4. 理由是記憶體，389 到 81 MB。而且這個結論在舊權重上是反的，所以量化進了重訓的檢查清單。</a:t>
+              <a:t>講稿 1. 「為什麼是 ResNet-18」的答案在這張表：同一把尺量四種做法。</a:t>
+            </a:r>
+          </a:p>
+          <a:p>
+            <a:r>
+              <a:t>講稿 2. 先看地板：不用模型、只算差異圖的統計，大約 1%。模型 52.8%，40 倍。</a:t>
+            </a:r>
+          </a:p>
+          <a:p>
+            <a:r>
+              <a:t>講稿 3. 再看兩個對照：拿掉樣板通道剩 2.8%，偵測器的信心 1.2%。所以關鍵不是網路多大，是輸入裡有沒有「本來該長怎樣」。</a:t>
+            </a:r>
+          </a:p>
+          <a:p>
+            <a:r>
+              <a:t>講稿 4. 沒試更大的模型，因為剩下的漏網是很有信心的錯，不是容量問題。</a:t>
             </a:r>
           </a:p>
           <a:p/>
@@ -3913,23 +3956,23 @@
           </a:p>
           <a:p>
             <a:r>
-              <a:t>Q：動態和靜態的差別是什麼？</a:t>
-            </a:r>
-          </a:p>
-          <a:p>
-            <a:r>
-              <a:t>A：動態在推論時算 activation 的範圍，不用校正集，慢一點（1.31x）；靜態先用 512 個 trainval patch 校正好範圍，快 3.87x，但校正集選錯 split 就是作弊。兩者在 ≤0.5% 下是 52.5% 對 53.0%。</a:t>
+              <a:t>Q：為什麼不試 ResNet-50 或 ViT？</a:t>
+            </a:r>
+          </a:p>
+          <a:p>
+            <a:r>
+              <a:t>A：剩下的 15 個漏網是 confident errors——模型給它們的 P(open) 是 0.00007 到 0.00589，換大模型解決的是模糊地帶，不是這種。而且 CPU 2.5 ms 一個候選已經是週期的零頭。</a:t>
             </a:r>
           </a:p>
           <a:p/>
           <a:p>
             <a:r>
-              <a:t>Q：為什麼最後沒部署 INT8？</a:t>
-            </a:r>
-          </a:p>
-          <a:p>
-            <a:r>
-              <a:t>A：因為延遲不是問題：FP32 一個候選 2.53 ms，一片板 20 個候選 50 ms，週期 10 秒。記憶體 5 倍是真的好處，但站台目前沒有這個壓力，float32 加它掃出來的門檻更單純。</a:t>
+              <a:t>Q：地板是怎麼算的？</a:t>
+            </a:r>
+          </a:p>
+          <a:p>
+            <a:r>
+              <a:t>A：差異圖上不用模型就能算的分數：平均值、最大值、前 32/64/128 個像素的和、超過某亮度的像素數，各自當 P(false call) 掃同一條曲線，最好的在 ≤0.5% 下是 1.3%。</a:t>
             </a:r>
           </a:p>
         </p:txBody>
@@ -3999,28 +4042,28 @@
           <a:lstStyle/>
           <a:p>
             <a:r>
-              <a:t>白話：這麼小的模型，一次一個的時候 GPU 派工的成本比算還貴；批到 8 個 GPU 才贏。</a:t>
+              <a:t>白話：兩種量化在漏網預算上幾乎一樣，差別在速度和校正方式；而且這個結論換權重就要重量。</a:t>
             </a:r>
           </a:p>
           <a:p/>
           <a:p>
             <a:r>
-              <a:t>講稿 1. 「複判站要不要 GPU」的答案：不用。一個候選 CPU 2.5 毫秒。</a:t>
-            </a:r>
-          </a:p>
-          <a:p>
-            <a:r>
-              <a:t>講稿 2. 反直覺的是 GPU 一次一個反而慢 2.9 倍，因為派工比算貴；批到 8 個才翻過來。</a:t>
-            </a:r>
-          </a:p>
-          <a:p>
-            <a:r>
-              <a:t>講稿 3. CPU 有個懸崖在 batch 16，所以批 8。</a:t>
-            </a:r>
-          </a:p>
-          <a:p>
-            <a:r>
-              <a:t>講稿 4. 這一頁還有一個教訓：ollama ps 不是 GPU 檢查，第一次量的數字是在旁邊有訓練跑的時候量的，作廢。</a:t>
+              <a:t>講稿 1. INT8 動態和靜態的差別，面試官問到就翻這張。</a:t>
+            </a:r>
+          </a:p>
+          <a:p>
+            <a:r>
+              <a:t>講稿 2. 在漏網預算上：動態 52.5、靜態 53.0，對 FP32 的 52.8，都在一點以內。類別一致 99.8%，不一致十幾個。</a:t>
+            </a:r>
+          </a:p>
+          <a:p>
+            <a:r>
+              <a:t>講稿 3. 靜態快 3.87 倍，但要校正集；校正集只用訓練 split，不碰 test。</a:t>
+            </a:r>
+          </a:p>
+          <a:p>
+            <a:r>
+              <a:t>講稿 4. 理由是記憶體，389 到 81 MB。而且這個結論在舊權重上是反的，所以量化進了重訓的檢查清單。</a:t>
             </a:r>
           </a:p>
           <a:p/>
@@ -4031,23 +4074,23 @@
           </a:p>
           <a:p>
             <a:r>
-              <a:t>Q：複判站需要 GPU 嗎？</a:t>
-            </a:r>
-          </a:p>
-          <a:p>
-            <a:r>
-              <a:t>A：不需要。CPU p50 2.50 ms 一個候選，43 MB 的 checkpoint；GPU 在 batch 1 反而慢 2.9 倍，batch 8 才追過。</a:t>
+              <a:t>Q：動態和靜態的差別是什麼？</a:t>
+            </a:r>
+          </a:p>
+          <a:p>
+            <a:r>
+              <a:t>A：動態在推論時算 activation 的範圍，不用校正集，慢一點（1.31x）；靜態先用 512 個 trainval patch 校正好範圍，快 3.87x，但校正集選錯 split 就是作弊。兩者在 ≤0.5% 下是 52.5% 對 53.0%。</a:t>
             </a:r>
           </a:p>
           <a:p/>
           <a:p>
             <a:r>
-              <a:t>Q：你怎麼確定延遲數字沒被別的工作污染？</a:t>
-            </a:r>
-          </a:p>
-          <a:p>
-            <a:r>
-              <a:t>A：腳本量之前和之後都掃 ollama ps 和 process table，有 torch/ffmpeg 在跑就拒絕發布。這條規則是被一次作廢的量測換來的。</a:t>
+              <a:t>Q：為什麼最後沒部署 INT8？</a:t>
+            </a:r>
+          </a:p>
+          <a:p>
+            <a:r>
+              <a:t>A：因為延遲不是問題：FP32 一個候選 2.53 ms，一片板 20 個候選 50 ms，週期 10 秒。記憶體 5 倍是真的好處，但站台目前沒有這個壓力，float32 加它掃出來的門檻更單純。</a:t>
             </a:r>
           </a:p>
         </p:txBody>
@@ -4117,28 +4160,28 @@
           <a:lstStyle/>
           <a:p>
             <a:r>
-              <a:t>白話：偵測器訓 56 分鐘找得到瑕疵；拿它的框訓同一個 ResNet、沒有樣板通道，曲線根本爬不起來。</a:t>
+              <a:t>白話：這麼小的模型，一次一個的時候 GPU 派工的成本比算還貴；批到 8 個 GPU 才贏。</a:t>
             </a:r>
           </a:p>
           <a:p/>
           <a:p>
             <a:r>
-              <a:t>講稿 1. 偵測器那兩個實驗的訓練細節在這頁。</a:t>
-            </a:r>
-          </a:p>
-          <a:p>
-            <a:r>
-              <a:t>講稿 2. YOLO26n 六十個 epoch、56 分鐘，找得到 92% 的瑕疵。</a:t>
-            </a:r>
-          </a:p>
-          <a:p>
-            <a:r>
-              <a:t>講稿 3. 重點是下面這條曲線：拿它的框訓同一個 ResNet、沒有樣板通道，驗證集上省掉的比例十個 epoch 都在 1 到 3%，根本爬不起來。</a:t>
-            </a:r>
-          </a:p>
-          <a:p>
-            <a:r>
-              <a:t>講稿 4. 訓練條件的限制都寫了：CPU 上訓、一個 seed、偵測器看過訓練圖。</a:t>
+              <a:t>講稿 1. 「複判站要不要 GPU」的答案：不用。一個候選 CPU 2.5 毫秒。</a:t>
+            </a:r>
+          </a:p>
+          <a:p>
+            <a:r>
+              <a:t>講稿 2. 反直覺的是 GPU 一次一個反而慢 2.9 倍，因為派工比算貴；批到 8 個才翻過來。</a:t>
+            </a:r>
+          </a:p>
+          <a:p>
+            <a:r>
+              <a:t>講稿 3. CPU 有個懸崖在 batch 16，所以批 8。</a:t>
+            </a:r>
+          </a:p>
+          <a:p>
+            <a:r>
+              <a:t>講稿 4. 這一頁還有一個教訓：ollama ps 不是 GPU 檢查，第一次量的數字是在旁邊有訓練跑的時候量的，作廢。</a:t>
             </a:r>
           </a:p>
           <a:p/>
@@ -4149,23 +4192,23 @@
           </a:p>
           <a:p>
             <a:r>
-              <a:t>Q：imgsz 為什麼是 640？</a:t>
-            </a:r>
-          </a:p>
-          <a:p>
-            <a:r>
-              <a:t>A：YOLO 的預設，目標中位數 17 px 在 640 下大約 1% 的畫幅。1280 是唯一沒試、可能有用的方向，文件裡寫著沒試。</a:t>
+              <a:t>Q：複判站需要 GPU 嗎？</a:t>
+            </a:r>
+          </a:p>
+          <a:p>
+            <a:r>
+              <a:t>A：不需要。CPU p50 2.50 ms 一個候選，43 MB 的 checkpoint；GPU 在 batch 1 反而慢 2.9 倍，batch 8 才追過。</a:t>
             </a:r>
           </a:p>
           <a:p/>
           <a:p>
             <a:r>
-              <a:t>Q：crop 複判器訓不起來，會不會是訓練有問題？</a:t>
-            </a:r>
-          </a:p>
-          <a:p>
-            <a:r>
-              <a:t>A：有可能，而且條目裡寫了限制：CPU 訓、一個 seed。但 train_loss 降到 0.03、val_accuracy 83%，模型有在學；它學不到的是在 ≤0.5% 漏網下把誤報排掉，那條線在 1–3%。</a:t>
+              <a:t>Q：你怎麼確定延遲數字沒被別的工作污染？</a:t>
+            </a:r>
+          </a:p>
+          <a:p>
+            <a:r>
+              <a:t>A：腳本量之前和之後都掃 ollama ps 和 process table，有 torch/ffmpeg 在跑就拒絕發布。這條規則是被一次作廢的量測換來的。</a:t>
             </a:r>
           </a:p>
         </p:txBody>
@@ -4235,28 +4278,28 @@
           <a:lstStyle/>
           <a:p>
             <a:r>
-              <a:t>白話：同一個相減、同一組門檻掃過去：二值圖上 recall 96% 且誤報穩定；照片上要 recall 就要付 860 個誤報一張。</a:t>
+              <a:t>白話：偵測器訓 56 分鐘找得到瑕疵；拿它的框訓同一個 ResNet、沒有樣板通道，曲線根本爬不起來。</a:t>
             </a:r>
           </a:p>
           <a:p/>
           <a:p>
             <a:r>
-              <a:t>講稿 1. 第 13 頁講 HRIPCB 第一關就壞，這裡是那三條曲線。</a:t>
-            </a:r>
-          </a:p>
-          <a:p>
-            <a:r>
-              <a:t>講稿 2. DeepPCB 的線是平的：門檻從 30 到 100 recall 都 95.7%，因為二值圖沒有灰階可以調，差異不是 0 就是 255。</a:t>
-            </a:r>
-          </a:p>
-          <a:p>
-            <a:r>
-              <a:t>講稿 3. HRIPCB 對齊的線陡降：門檻 10 還有 92%，到 60 只剩 14%。加擾動之後，門檻 10 每張 860 個誤報。</a:t>
-            </a:r>
-          </a:p>
-          <a:p>
-            <a:r>
-              <a:t>講稿 4. 沒有任何一點同時 recall 夠高、誤報夠低，這就是「任何設定都過不了」的意思。</a:t>
+              <a:t>講稿 1. 偵測器那兩個實驗的訓練細節在這頁。</a:t>
+            </a:r>
+          </a:p>
+          <a:p>
+            <a:r>
+              <a:t>講稿 2. YOLO26n 六十個 epoch、56 分鐘，找得到 92% 的瑕疵。</a:t>
+            </a:r>
+          </a:p>
+          <a:p>
+            <a:r>
+              <a:t>講稿 3. 重點是下面這條曲線：拿它的框訓同一個 ResNet、沒有樣板通道，驗證集上省掉的比例十個 epoch 都在 1 到 3%，根本爬不起來。</a:t>
+            </a:r>
+          </a:p>
+          <a:p>
+            <a:r>
+              <a:t>講稿 4. 訓練條件的限制都寫了：CPU 上訓、一個 seed、偵測器看過訓練圖。</a:t>
             </a:r>
           </a:p>
           <a:p/>
@@ -4267,23 +4310,23 @@
           </a:p>
           <a:p>
             <a:r>
-              <a:t>Q：HRIPCB 的 short 類 recall 為什麼特別低？</a:t>
-            </a:r>
-          </a:p>
-          <a:p>
-            <a:r>
-              <a:t>A：對齊版門檻 10 時 short 只有 60.3%，其他類 97% 以上。short 是兩條線之間細細的一道橋，在照片上灰階差最淡，相減最先丟掉它。</a:t>
+              <a:t>Q：imgsz 為什麼是 640？</a:t>
+            </a:r>
+          </a:p>
+          <a:p>
+            <a:r>
+              <a:t>A：YOLO 的預設，目標中位數 17 px 在 640 下大約 1% 的畫幅。1280 是唯一沒試、可能有用的方向，文件裡寫著沒試。</a:t>
             </a:r>
           </a:p>
           <a:p/>
           <a:p>
             <a:r>
-              <a:t>Q：DeepPCB 的門檻 60 是怎麼選的？</a:t>
-            </a:r>
-          </a:p>
-          <a:p>
-            <a:r>
-              <a:t>A：在二值圖上門檻 30 到 100 結果一樣（recall 95.7%、10.7 個誤報），所以 60 只是中間值。這也是為什麼它在照片上會失效：那個數字從來沒被真的灰階考驗過。</a:t>
+              <a:t>Q：crop 複判器訓不起來，會不會是訓練有問題？</a:t>
+            </a:r>
+          </a:p>
+          <a:p>
+            <a:r>
+              <a:t>A：有可能，而且條目裡寫了限制：CPU 訓、一個 seed。但 train_loss 降到 0.03、val_accuracy 83%，模型有在學；它學不到的是在 ≤0.5% 漏網下把誤報排掉，那條線在 1–3%。</a:t>
             </a:r>
           </a:p>
         </p:txBody>
@@ -4353,28 +4396,28 @@
           <a:lstStyle/>
           <a:p>
             <a:r>
-              <a:t>白話：一份訓練和量測、一份只給偵測器、一份只當考卷。</a:t>
+              <a:t>白話：同一個相減、同一組門檻掃過去：二值圖上 recall 96% 且誤報穩定；照片上要 recall 就要付 860 個誤報一張。</a:t>
             </a:r>
           </a:p>
           <a:p/>
           <a:p>
             <a:r>
-              <a:t>講稿 1. 面試官問「你的資料哪來的」，這一頁。</a:t>
-            </a:r>
-          </a:p>
-          <a:p>
-            <a:r>
-              <a:t>講稿 2. 三份，各做一件事。DeepPCB 是主線。PCB-AoI 只給偵測器，因為它沒有樣板。HRIPCB 只當考卷。</a:t>
-            </a:r>
-          </a:p>
-          <a:p>
-            <a:r>
-              <a:t>講稿 3. 產線的機台、批號那些是種出來的，而且種的時候放了對照組，讓工具有機會答錯。</a:t>
-            </a:r>
-          </a:p>
-          <a:p>
-            <a:r>
-              <a:t>講稿 4. 驗收標準是自己寫的，不是 IPC，因為那有版權。</a:t>
+              <a:t>講稿 1. 第 13 頁講 HRIPCB 第一關就壞，這裡是那三條曲線。</a:t>
+            </a:r>
+          </a:p>
+          <a:p>
+            <a:r>
+              <a:t>講稿 2. DeepPCB 的線是平的：門檻從 30 到 100 recall 都 95.7%，因為二值圖沒有灰階可以調，差異不是 0 就是 255。</a:t>
+            </a:r>
+          </a:p>
+          <a:p>
+            <a:r>
+              <a:t>講稿 3. HRIPCB 對齊的線陡降：門檻 10 還有 92%，到 60 只剩 14%。加擾動之後，門檻 10 每張 860 個誤報。</a:t>
+            </a:r>
+          </a:p>
+          <a:p>
+            <a:r>
+              <a:t>講稿 4. 沒有任何一點同時 recall 夠高、誤報夠低，這就是「任何設定都過不了」的意思。</a:t>
             </a:r>
           </a:p>
           <a:p/>
@@ -4385,23 +4428,23 @@
           </a:p>
           <a:p>
             <a:r>
-              <a:t>Q：模擬的產線資料會不會讓 /ask 的評測失真？</a:t>
-            </a:r>
-          </a:p>
-          <a:p>
-            <a:r>
-              <a:t>A：種的時候故意放了控制組：M22 和 M32 有真的效果，另外三台機有事件但沒效果，M11 承接鏡像。一個工具如果對「有沒有事件」而不是「有沒有影響」打分，會在控制組上露餡。</a:t>
+              <a:t>Q：HRIPCB 的 short 類 recall 為什麼特別低？</a:t>
+            </a:r>
+          </a:p>
+          <a:p>
+            <a:r>
+              <a:t>A：對齊版門檻 10 時 short 只有 60.3%，其他類 97% 以上。short 是兩條線之間細細的一道橋，在照片上灰階差最淡，相減最先丟掉它。</a:t>
             </a:r>
           </a:p>
           <a:p/>
           <a:p>
             <a:r>
-              <a:t>Q：HRIPCB 為什麼不合併到 DeepPCB 的類別表？</a:t>
-            </a:r>
-          </a:p>
-          <a:p>
-            <a:r>
-              <a:t>A：它的 missing_hole 不是 DeepPCB 的 pin-hole，而且沒有對應的工作指示。硬合併等於替一個沒有驗收標準的類別發明標準。</a:t>
+              <a:t>Q：DeepPCB 的門檻 60 是怎麼選的？</a:t>
+            </a:r>
+          </a:p>
+          <a:p>
+            <a:r>
+              <a:t>A：在二值圖上門檻 30 到 100 結果一樣（recall 95.7%、10.7 個誤報），所以 60 只是中間值。這也是為什麼它在照片上會失效：那個數字從來沒被真的灰階考驗過。</a:t>
             </a:r>
           </a:p>
         </p:txBody>
@@ -4471,28 +4514,28 @@
           <a:lstStyle/>
           <a:p>
             <a:r>
-              <a:t>白話：每個數字都有一個打得開的檔案；測試在數字和出處分開時會紅。</a:t>
+              <a:t>白話：一份訓練和量測、一份只給偵測器、一份只當考卷。</a:t>
             </a:r>
           </a:p>
           <a:p/>
           <a:p>
             <a:r>
-              <a:t>講稿 1. 「你的門檻怎麼來的」——這一頁一次答完。</a:t>
-            </a:r>
-          </a:p>
-          <a:p>
-            <a:r>
-              <a:t>講稿 2. 兩個路由門檻是同一個數字，來自掃描，往上取整；一個是關係式。</a:t>
-            </a:r>
-          </a:p>
-          <a:p>
-            <a:r>
-              <a:t>講稿 3. 有測試盯著：數字和它的出處分開就紅，第 11 頁那個錯就是這樣被鎖住的。</a:t>
-            </a:r>
-          </a:p>
-          <a:p>
-            <a:r>
-              <a:t>講稿 4. 灰階門檻 60 在二值圖上 30 到 100 都一樣，這也是它在照片上失效的原因。</a:t>
+              <a:t>講稿 1. 面試官問「你的資料哪來的」，這一頁。</a:t>
+            </a:r>
+          </a:p>
+          <a:p>
+            <a:r>
+              <a:t>講稿 2. 三份，各做一件事。DeepPCB 是主線。PCB-AoI 只給偵測器，因為它沒有樣板。HRIPCB 只當考卷。</a:t>
+            </a:r>
+          </a:p>
+          <a:p>
+            <a:r>
+              <a:t>講稿 3. 產線的機台、批號那些是種出來的，而且種的時候放了對照組，讓工具有機會答錯。</a:t>
+            </a:r>
+          </a:p>
+          <a:p>
+            <a:r>
+              <a:t>講稿 4. 驗收標準是自己寫的，不是 IPC，因為那有版權。</a:t>
             </a:r>
           </a:p>
           <a:p/>
@@ -4503,23 +4546,23 @@
           </a:p>
           <a:p>
             <a:r>
-              <a:t>Q：如果換一批資料重訓，哪些數字要動？</a:t>
-            </a:r>
-          </a:p>
-          <a:p>
-            <a:r>
-              <a:t>A：0.961 重掃、ESCALATE_BELOW 自動跟、CONFIDENT 是關係式自動跟；EXPLAINED_BAND 要重看它買到多少說明；灰階 60 換資料集要重跑 gate。這整條寫成 skill，順序不能跳。</a:t>
+              <a:t>Q：模擬的產線資料會不會讓 /ask 的評測失真？</a:t>
+            </a:r>
+          </a:p>
+          <a:p>
+            <a:r>
+              <a:t>A：種的時候故意放了控制組：M22 和 M32 有真的效果，另外三台機有事件但沒效果，M11 承接鏡像。一個工具如果對「有沒有事件」而不是「有沒有影響」打分，會在控制組上露餡。</a:t>
             </a:r>
           </a:p>
           <a:p/>
           <a:p>
             <a:r>
-              <a:t>Q：為什麼 CONFIDENT 不影響任何處置？</a:t>
-            </a:r>
-          </a:p>
-          <a:p>
-            <a:r>
-              <a:t>A：它只決定要不要叫 LLM 寫說明，不決定處置——掃到 0.999 改變 0 個處置。所以它是成本閘門，寫成 ESCALATE_BELOW + 0.035。</a:t>
+              <a:t>Q：HRIPCB 為什麼不合併到 DeepPCB 的類別表？</a:t>
+            </a:r>
+          </a:p>
+          <a:p>
+            <a:r>
+              <a:t>A：它的 missing_hole 不是 DeepPCB 的 pin-hole，而且沒有對應的工作指示。硬合併等於替一個沒有驗收標準的類別發明標準。</a:t>
             </a:r>
           </a:p>
         </p:txBody>
@@ -4669,6 +4712,124 @@
           <a:p>
             <a:r>
               <a:t>A：時間上是 LLM：一段說明中文約 17 秒。但 82.2% 的區域根本不經過它，一個候選在複判模型上是 2.5 ms。</a:t>
+            </a:r>
+          </a:p>
+        </p:txBody>
+      </p:sp>
+      <p:sp>
+        <p:nvSpPr>
+          <p:cNvPr id="4" name="Slide Number Placeholder 3"/>
+          <p:cNvSpPr>
+            <a:spLocks noGrp="1"/>
+          </p:cNvSpPr>
+          <p:nvPr>
+            <p:ph type="sldNum" idx="5" sz="quarter"/>
+          </p:nvPr>
+        </p:nvSpPr>
+        <p:spPr/>
+      </p:sp>
+    </p:spTree>
+  </p:cSld>
+  <p:clrMapOvr>
+    <a:masterClrMapping/>
+  </p:clrMapOvr>
+</p:notes>
+</file>
+
+<file path=ppt/notesSlides/notesSlide40.xml><?xml version="1.0" encoding="utf-8"?>
+<p:notes xmlns:a="http://schemas.openxmlformats.org/drawingml/2006/main" xmlns:p="http://schemas.openxmlformats.org/presentationml/2006/main" xmlns:r="http://schemas.openxmlformats.org/officeDocument/2006/relationships">
+  <p:cSld>
+    <p:spTree>
+      <p:nvGrpSpPr>
+        <p:cNvPr id="1" name=""/>
+        <p:cNvGrpSpPr/>
+        <p:nvPr/>
+      </p:nvGrpSpPr>
+      <p:grpSpPr>
+        <a:xfrm>
+          <a:off x="0" y="0"/>
+          <a:ext cx="0" cy="0"/>
+          <a:chOff x="0" y="0"/>
+          <a:chExt cx="0" cy="0"/>
+        </a:xfrm>
+      </p:grpSpPr>
+      <p:sp>
+        <p:nvSpPr>
+          <p:cNvPr id="2" name="Slide Image Placeholder 1"/>
+          <p:cNvSpPr>
+            <a:spLocks noGrp="1"/>
+          </p:cNvSpPr>
+          <p:nvPr>
+            <p:ph type="sldImg" idx="2"/>
+          </p:nvPr>
+        </p:nvSpPr>
+        <p:spPr/>
+      </p:sp>
+      <p:sp>
+        <p:nvSpPr>
+          <p:cNvPr id="3" name="Notes Placeholder 2"/>
+          <p:cNvSpPr>
+            <a:spLocks noGrp="1"/>
+          </p:cNvSpPr>
+          <p:nvPr>
+            <p:ph type="body" idx="3" sz="quarter"/>
+          </p:nvPr>
+        </p:nvSpPr>
+        <p:spPr/>
+        <p:txBody>
+          <a:bodyPr/>
+          <a:lstStyle/>
+          <a:p>
+            <a:r>
+              <a:t>白話：每個數字都有一個打得開的檔案；測試在數字和出處分開時會紅。</a:t>
+            </a:r>
+          </a:p>
+          <a:p/>
+          <a:p>
+            <a:r>
+              <a:t>講稿 1. 「你的門檻怎麼來的」——這一頁一次答完。</a:t>
+            </a:r>
+          </a:p>
+          <a:p>
+            <a:r>
+              <a:t>講稿 2. 兩個路由門檻是同一個數字，來自掃描，往上取整；一個是關係式。</a:t>
+            </a:r>
+          </a:p>
+          <a:p>
+            <a:r>
+              <a:t>講稿 3. 有測試盯著：數字和它的出處分開就紅，第 11 頁那個錯就是這樣被鎖住的。</a:t>
+            </a:r>
+          </a:p>
+          <a:p>
+            <a:r>
+              <a:t>講稿 4. 灰階門檻 60 在二值圖上 30 到 100 都一樣，這也是它在照片上失效的原因。</a:t>
+            </a:r>
+          </a:p>
+          <a:p/>
+          <a:p>
+            <a:r>
+              <a:t>面試官會問：</a:t>
+            </a:r>
+          </a:p>
+          <a:p>
+            <a:r>
+              <a:t>Q：如果換一批資料重訓，哪些數字要動？</a:t>
+            </a:r>
+          </a:p>
+          <a:p>
+            <a:r>
+              <a:t>A：0.961 重掃、ESCALATE_BELOW 自動跟、CONFIDENT 是關係式自動跟；EXPLAINED_BAND 要重看它買到多少說明；灰階 60 換資料集要重跑 gate。這整條寫成 skill，順序不能跳。</a:t>
+            </a:r>
+          </a:p>
+          <a:p/>
+          <a:p>
+            <a:r>
+              <a:t>Q：為什麼 CONFIDENT 不影響任何處置？</a:t>
+            </a:r>
+          </a:p>
+          <a:p>
+            <a:r>
+              <a:t>A：它只決定要不要叫 LLM 寫說明，不決定處置——掃到 0.999 改變 0 個處置。所以它是成本閘門，寫成 ESCALATE_BELOW + 0.035。</a:t>
             </a:r>
           </a:p>
         </p:txBody>
@@ -8491,7 +8652,7 @@
                 <a:ea typeface="Noto Sans TC"/>
                 <a:cs typeface="Noto Sans TC"/>
               </a:rPr>
-              <a:t>1 / 39</a:t>
+              <a:t>1 / 40</a:t>
             </a:r>
           </a:p>
         </p:txBody>
@@ -9827,7 +9988,7 @@
                 <a:ea typeface="Noto Sans TC"/>
                 <a:cs typeface="Noto Sans TC"/>
               </a:rPr>
-              <a:t>10 / 39</a:t>
+              <a:t>10 / 40</a:t>
             </a:r>
           </a:p>
         </p:txBody>
@@ -10576,7 +10737,7 @@
                 <a:ea typeface="Noto Sans TC"/>
                 <a:cs typeface="Noto Sans TC"/>
               </a:rPr>
-              <a:t>★ 主線 4/9 · 11 / 39</a:t>
+              <a:t>★ 主線 4/9 · 11 / 40</a:t>
             </a:r>
           </a:p>
         </p:txBody>
@@ -12121,7 +12282,7 @@
                 <a:ea typeface="Noto Sans TC"/>
                 <a:cs typeface="Noto Sans TC"/>
               </a:rPr>
-              <a:t>12 / 39</a:t>
+              <a:t>12 / 40</a:t>
             </a:r>
           </a:p>
         </p:txBody>
@@ -13350,7 +13511,7 @@
                 <a:ea typeface="Noto Sans TC"/>
                 <a:cs typeface="Noto Sans TC"/>
               </a:rPr>
-              <a:t>13 / 39</a:t>
+              <a:t>13 / 40</a:t>
             </a:r>
           </a:p>
         </p:txBody>
@@ -14579,7 +14740,7 @@
                 <a:ea typeface="Noto Sans TC"/>
                 <a:cs typeface="Noto Sans TC"/>
               </a:rPr>
-              <a:t>14 / 39</a:t>
+              <a:t>14 / 40</a:t>
             </a:r>
           </a:p>
         </p:txBody>
@@ -15794,7 +15955,7 @@
                 <a:ea typeface="Noto Sans TC"/>
                 <a:cs typeface="Noto Sans TC"/>
               </a:rPr>
-              <a:t>15 / 39</a:t>
+              <a:t>15 / 40</a:t>
             </a:r>
           </a:p>
         </p:txBody>
@@ -17306,7 +17467,7 @@
                 <a:ea typeface="Noto Sans TC"/>
                 <a:cs typeface="Noto Sans TC"/>
               </a:rPr>
-              <a:t>★ 主線 8/9 · 16 / 39</a:t>
+              <a:t>★ 主線 8/9 · 16 / 40</a:t>
             </a:r>
           </a:p>
         </p:txBody>
@@ -18576,7 +18737,7 @@
                 <a:ea typeface="Noto Sans TC"/>
                 <a:cs typeface="Noto Sans TC"/>
               </a:rPr>
-              <a:t>★ 主線 6/9 · 17 / 39</a:t>
+              <a:t>★ 主線 6/9 · 17 / 40</a:t>
             </a:r>
           </a:p>
         </p:txBody>
@@ -19835,7 +19996,7 @@
                 <a:ea typeface="Noto Sans TC"/>
                 <a:cs typeface="Noto Sans TC"/>
               </a:rPr>
-              <a:t>★ 主線 7/9 · 18 / 39</a:t>
+              <a:t>★ 主線 7/9 · 18 / 40</a:t>
             </a:r>
           </a:p>
         </p:txBody>
@@ -21350,7 +21511,7 @@
                 <a:ea typeface="Noto Sans TC"/>
                 <a:cs typeface="Noto Sans TC"/>
               </a:rPr>
-              <a:t>19 / 39</a:t>
+              <a:t>19 / 40</a:t>
             </a:r>
           </a:p>
         </p:txBody>
@@ -22139,7 +22300,7 @@
                 <a:ea typeface="Noto Sans TC"/>
                 <a:cs typeface="Noto Sans TC"/>
               </a:rPr>
-              <a:t>★ 主線 1/9 · 2 / 39</a:t>
+              <a:t>★ 主線 1/9 · 2 / 40</a:t>
             </a:r>
           </a:p>
         </p:txBody>
@@ -22353,7 +22514,7 @@
                 <a:ea typeface="Noto Sans TC"/>
                 <a:cs typeface="Noto Sans TC"/>
               </a:rPr>
-              <a:t>20 / 39</a:t>
+              <a:t>20 / 40</a:t>
             </a:r>
           </a:p>
         </p:txBody>
@@ -22567,7 +22728,7 @@
                 <a:ea typeface="Noto Sans TC"/>
                 <a:cs typeface="Noto Sans TC"/>
               </a:rPr>
-              <a:t>21 / 39</a:t>
+              <a:t>21 / 40</a:t>
             </a:r>
           </a:p>
         </p:txBody>
@@ -22781,7 +22942,7 @@
                 <a:ea typeface="Noto Sans TC"/>
                 <a:cs typeface="Noto Sans TC"/>
               </a:rPr>
-              <a:t>22 / 39</a:t>
+              <a:t>22 / 40</a:t>
             </a:r>
           </a:p>
         </p:txBody>
@@ -23878,7 +24039,7 @@
                 <a:ea typeface="Noto Sans TC"/>
                 <a:cs typeface="Noto Sans TC"/>
               </a:rPr>
-              <a:t>23 / 39</a:t>
+              <a:t>23 / 40</a:t>
             </a:r>
           </a:p>
         </p:txBody>
@@ -24287,7 +24448,7 @@
                 <a:ea typeface="Noto Sans TC"/>
                 <a:cs typeface="Noto Sans TC"/>
               </a:rPr>
-              <a:t>24 / 39</a:t>
+              <a:t>24 / 40</a:t>
             </a:r>
           </a:p>
         </p:txBody>
@@ -24501,7 +24662,7 @@
                 <a:ea typeface="Noto Sans TC"/>
                 <a:cs typeface="Noto Sans TC"/>
               </a:rPr>
-              <a:t>25 / 39</a:t>
+              <a:t>25 / 40</a:t>
             </a:r>
           </a:p>
         </p:txBody>
@@ -25950,7 +26111,7 @@
                 <a:ea typeface="Noto Sans TC"/>
                 <a:cs typeface="Noto Sans TC"/>
               </a:rPr>
-              <a:t>26 / 39</a:t>
+              <a:t>26 / 40</a:t>
             </a:r>
           </a:p>
         </p:txBody>
@@ -27267,7 +27428,7 @@
                 <a:ea typeface="Noto Sans TC"/>
                 <a:cs typeface="Noto Sans TC"/>
               </a:rPr>
-              <a:t>27 / 39</a:t>
+              <a:t>27 / 40</a:t>
             </a:r>
           </a:p>
         </p:txBody>
@@ -28581,7 +28742,7 @@
                 <a:ea typeface="Noto Sans TC"/>
                 <a:cs typeface="Noto Sans TC"/>
               </a:rPr>
-              <a:t>28 / 39</a:t>
+              <a:t>28 / 40</a:t>
             </a:r>
           </a:p>
         </p:txBody>
@@ -28795,7 +28956,7 @@
                 <a:ea typeface="Noto Sans TC"/>
                 <a:cs typeface="Noto Sans TC"/>
               </a:rPr>
-              <a:t>29 / 39</a:t>
+              <a:t>29 / 40</a:t>
             </a:r>
           </a:p>
         </p:txBody>
@@ -29105,7 +29266,7 @@
                 <a:ea typeface="Noto Sans TC"/>
                 <a:cs typeface="Noto Sans TC"/>
               </a:rPr>
-              <a:t>★ 主線 2/9 · 3 / 39</a:t>
+              <a:t>★ 主線 2/9 · 3 / 40</a:t>
             </a:r>
           </a:p>
         </p:txBody>
@@ -29164,29 +29325,53 @@
               </a:lnSpc>
             </a:pPr>
             <a:r>
-              <a:rPr sz="2400" b="1">
-                <a:solidFill>
-                  <a:srgbClr val="E8E6E1"/>
-                </a:solidFill>
-                <a:latin typeface="Noto Sans TC"/>
-                <a:ea typeface="Noto Sans TC"/>
-                <a:cs typeface="Noto Sans TC"/>
-              </a:rPr>
-              <a:t>文件也要測：README 開頭那個數字</a:t>
-            </a:r>
-          </a:p>
-        </p:txBody>
-      </p:sp>
-      <p:sp>
-        <p:nvSpPr>
-          <p:cNvPr id="3" name="TextBox 2"/>
-          <p:cNvSpPr txBox="1"/>
-          <p:nvPr/>
-        </p:nvSpPr>
-        <p:spPr>
-          <a:xfrm>
-            <a:off x="457200" y="868680"/>
-            <a:ext cx="11247120" cy="411480"/>
+              <a:rPr sz="2800" b="1">
+                <a:solidFill>
+                  <a:srgbClr val="E8E6E1"/>
+                </a:solidFill>
+                <a:latin typeface="Noto Sans TC"/>
+                <a:ea typeface="Noto Sans TC"/>
+                <a:cs typeface="Noto Sans TC"/>
+              </a:rPr>
+              <a:t>模型救不了自己的盲點：兩條線，同一個答案</a:t>
+            </a:r>
+          </a:p>
+        </p:txBody>
+      </p:sp>
+      <p:pic>
+        <p:nvPicPr>
+          <p:cNvPr id="3" name="Picture 2" descr="model_blind_spot.png"/>
+          <p:cNvPicPr>
+            <a:picLocks noChangeAspect="1"/>
+          </p:cNvPicPr>
+          <p:nvPr/>
+        </p:nvPicPr>
+        <p:blipFill>
+          <a:blip r:embed="rId2"/>
+          <a:stretch>
+            <a:fillRect/>
+          </a:stretch>
+        </p:blipFill>
+        <p:spPr>
+          <a:xfrm>
+            <a:off x="380847" y="1200150"/>
+            <a:ext cx="11430000" cy="4457700"/>
+          </a:xfrm>
+          <a:prstGeom prst="rect">
+            <a:avLst/>
+          </a:prstGeom>
+        </p:spPr>
+      </p:pic>
+      <p:sp>
+        <p:nvSpPr>
+          <p:cNvPr id="4" name="TextBox 3"/>
+          <p:cNvSpPr txBox="1"/>
+          <p:nvPr/>
+        </p:nvSpPr>
+        <p:spPr>
+          <a:xfrm>
+            <a:off x="548640" y="5897880"/>
+            <a:ext cx="11155680" cy="365760"/>
           </a:xfrm>
           <a:prstGeom prst="rect">
             <a:avLst/>
@@ -29205,1080 +29390,22 @@
               </a:lnSpc>
             </a:pPr>
             <a:r>
-              <a:rPr sz="1500" b="0">
+              <a:rPr sz="950" b="0">
                 <a:solidFill>
                   <a:srgbClr val="9AA0A6"/>
                 </a:solidFill>
-                <a:latin typeface="Noto Sans TC"/>
-                <a:ea typeface="Noto Sans TC"/>
-                <a:cs typeface="Noto Sans TC"/>
-              </a:rPr>
-              <a:t>是一份「commit uncommitted」的表</a:t>
-            </a:r>
-          </a:p>
-        </p:txBody>
-      </p:sp>
-      <p:sp>
-        <p:nvSpPr>
-          <p:cNvPr id="4" name="Rectangle 3"/>
-          <p:cNvSpPr/>
-          <p:nvPr/>
-        </p:nvSpPr>
-        <p:spPr>
-          <a:xfrm>
-            <a:off x="457200" y="1325880"/>
-            <a:ext cx="3606698" cy="868680"/>
-          </a:xfrm>
-          <a:prstGeom prst="rect">
-            <a:avLst/>
-          </a:prstGeom>
-          <a:solidFill>
-            <a:srgbClr val="1E2125"/>
-          </a:solidFill>
-          <a:ln>
-            <a:solidFill>
-              <a:srgbClr val="33383D"/>
-            </a:solidFill>
-          </a:ln>
-          <a:effectLst/>
-        </p:spPr>
-        <p:style>
-          <a:lnRef idx="1">
-            <a:schemeClr val="accent1"/>
-          </a:lnRef>
-          <a:fillRef idx="3">
-            <a:schemeClr val="accent1"/>
-          </a:fillRef>
-          <a:effectRef idx="2">
-            <a:schemeClr val="accent1"/>
-          </a:effectRef>
-          <a:fontRef idx="minor">
-            <a:schemeClr val="lt1"/>
-          </a:fontRef>
-        </p:style>
-        <p:txBody>
-          <a:bodyPr rtlCol="0" anchor="ctr"/>
-          <a:lstStyle/>
-          <a:p>
-            <a:pPr algn="ctr"/>
+                <a:latin typeface="IBM Plex Mono"/>
+                <a:ea typeface="Noto Sans TC"/>
+                <a:cs typeface="Noto Sans TC"/>
+              </a:rPr>
+              <a:t>有樣板的線靠電測，沒樣板的線靠樣板或 3D SPI——都不是更大的模型</a:t>
+            </a:r>
           </a:p>
         </p:txBody>
       </p:sp>
       <p:sp>
         <p:nvSpPr>
           <p:cNvPr id="5" name="TextBox 4"/>
-          <p:cNvSpPr txBox="1"/>
-          <p:nvPr/>
-        </p:nvSpPr>
-        <p:spPr>
-          <a:xfrm>
-            <a:off x="640080" y="1399032"/>
-            <a:ext cx="3240938" cy="457200"/>
-          </a:xfrm>
-          <a:prstGeom prst="rect">
-            <a:avLst/>
-          </a:prstGeom>
-          <a:noFill/>
-        </p:spPr>
-        <p:txBody>
-          <a:bodyPr wrap="square">
-            <a:spAutoFit/>
-          </a:bodyPr>
-          <a:lstStyle/>
-          <a:p>
-            <a:pPr>
-              <a:lnSpc>
-                <a:spcPct val="115000"/>
-              </a:lnSpc>
-            </a:pPr>
-            <a:r>
-              <a:rPr sz="1800" b="1">
-                <a:solidFill>
-                  <a:srgbClr val="6FC7CF"/>
-                </a:solidFill>
-                <a:latin typeface="IBM Plex Mono"/>
-                <a:ea typeface="Noto Sans TC"/>
-                <a:cs typeface="Noto Sans TC"/>
-              </a:rPr>
-              <a:t>56.2% vs 52.8%</a:t>
-            </a:r>
-          </a:p>
-        </p:txBody>
-      </p:sp>
-      <p:sp>
-        <p:nvSpPr>
-          <p:cNvPr id="6" name="TextBox 5"/>
-          <p:cNvSpPr txBox="1"/>
-          <p:nvPr/>
-        </p:nvSpPr>
-        <p:spPr>
-          <a:xfrm>
-            <a:off x="640080" y="1828800"/>
-            <a:ext cx="3240938" cy="320040"/>
-          </a:xfrm>
-          <a:prstGeom prst="rect">
-            <a:avLst/>
-          </a:prstGeom>
-          <a:noFill/>
-        </p:spPr>
-        <p:txBody>
-          <a:bodyPr wrap="square">
-            <a:spAutoFit/>
-          </a:bodyPr>
-          <a:lstStyle/>
-          <a:p>
-            <a:pPr>
-              <a:lnSpc>
-                <a:spcPct val="115000"/>
-              </a:lnSpc>
-            </a:pPr>
-            <a:r>
-              <a:rPr sz="1050" b="0">
-                <a:solidFill>
-                  <a:srgbClr val="9AA0A6"/>
-                </a:solidFill>
-                <a:latin typeface="Noto Sans TC"/>
-                <a:ea typeface="Noto Sans TC"/>
-                <a:cs typeface="Noto Sans TC"/>
-              </a:rPr>
-              <a:t>README 第一行 vs 實際</a:t>
-            </a:r>
-          </a:p>
-        </p:txBody>
-      </p:sp>
-      <p:sp>
-        <p:nvSpPr>
-          <p:cNvPr id="7" name="Rectangle 6"/>
-          <p:cNvSpPr/>
-          <p:nvPr/>
-        </p:nvSpPr>
-        <p:spPr>
-          <a:xfrm>
-            <a:off x="4292498" y="1325880"/>
-            <a:ext cx="3606698" cy="868680"/>
-          </a:xfrm>
-          <a:prstGeom prst="rect">
-            <a:avLst/>
-          </a:prstGeom>
-          <a:solidFill>
-            <a:srgbClr val="1E2125"/>
-          </a:solidFill>
-          <a:ln>
-            <a:solidFill>
-              <a:srgbClr val="33383D"/>
-            </a:solidFill>
-          </a:ln>
-          <a:effectLst/>
-        </p:spPr>
-        <p:style>
-          <a:lnRef idx="1">
-            <a:schemeClr val="accent1"/>
-          </a:lnRef>
-          <a:fillRef idx="3">
-            <a:schemeClr val="accent1"/>
-          </a:fillRef>
-          <a:effectRef idx="2">
-            <a:schemeClr val="accent1"/>
-          </a:effectRef>
-          <a:fontRef idx="minor">
-            <a:schemeClr val="lt1"/>
-          </a:fontRef>
-        </p:style>
-        <p:txBody>
-          <a:bodyPr rtlCol="0" anchor="ctr"/>
-          <a:lstStyle/>
-          <a:p>
-            <a:pPr algn="ctr"/>
-          </a:p>
-        </p:txBody>
-      </p:sp>
-      <p:sp>
-        <p:nvSpPr>
-          <p:cNvPr id="8" name="TextBox 7"/>
-          <p:cNvSpPr txBox="1"/>
-          <p:nvPr/>
-        </p:nvSpPr>
-        <p:spPr>
-          <a:xfrm>
-            <a:off x="4475378" y="1399032"/>
-            <a:ext cx="3240938" cy="457200"/>
-          </a:xfrm>
-          <a:prstGeom prst="rect">
-            <a:avLst/>
-          </a:prstGeom>
-          <a:noFill/>
-        </p:spPr>
-        <p:txBody>
-          <a:bodyPr wrap="square">
-            <a:spAutoFit/>
-          </a:bodyPr>
-          <a:lstStyle/>
-          <a:p>
-            <a:pPr>
-              <a:lnSpc>
-                <a:spcPct val="115000"/>
-              </a:lnSpc>
-            </a:pPr>
-            <a:r>
-              <a:rPr sz="1500" b="1">
-                <a:solidFill>
-                  <a:srgbClr val="6FC7CF"/>
-                </a:solidFill>
-                <a:latin typeface="IBM Plex Mono"/>
-                <a:ea typeface="Noto Sans TC"/>
-                <a:cs typeface="Noto Sans TC"/>
-              </a:rPr>
-              <a:t>commit uncommitted</a:t>
-            </a:r>
-          </a:p>
-        </p:txBody>
-      </p:sp>
-      <p:sp>
-        <p:nvSpPr>
-          <p:cNvPr id="9" name="TextBox 8"/>
-          <p:cNvSpPr txBox="1"/>
-          <p:nvPr/>
-        </p:nvSpPr>
-        <p:spPr>
-          <a:xfrm>
-            <a:off x="4475378" y="1828800"/>
-            <a:ext cx="3240938" cy="320040"/>
-          </a:xfrm>
-          <a:prstGeom prst="rect">
-            <a:avLst/>
-          </a:prstGeom>
-          <a:noFill/>
-        </p:spPr>
-        <p:txBody>
-          <a:bodyPr wrap="square">
-            <a:spAutoFit/>
-          </a:bodyPr>
-          <a:lstStyle/>
-          <a:p>
-            <a:pPr>
-              <a:lnSpc>
-                <a:spcPct val="115000"/>
-              </a:lnSpc>
-            </a:pPr>
-            <a:r>
-              <a:rPr sz="1050" b="0">
-                <a:solidFill>
-                  <a:srgbClr val="9AA0A6"/>
-                </a:solidFill>
-                <a:latin typeface="Noto Sans TC"/>
-                <a:ea typeface="Noto Sans TC"/>
-                <a:cs typeface="Noto Sans TC"/>
-              </a:rPr>
-              <a:t>那張表的來源</a:t>
-            </a:r>
-          </a:p>
-        </p:txBody>
-      </p:sp>
-      <p:sp>
-        <p:nvSpPr>
-          <p:cNvPr id="10" name="Rectangle 9"/>
-          <p:cNvSpPr/>
-          <p:nvPr/>
-        </p:nvSpPr>
-        <p:spPr>
-          <a:xfrm>
-            <a:off x="8127796" y="1325880"/>
-            <a:ext cx="3606698" cy="868680"/>
-          </a:xfrm>
-          <a:prstGeom prst="rect">
-            <a:avLst/>
-          </a:prstGeom>
-          <a:solidFill>
-            <a:srgbClr val="1E2125"/>
-          </a:solidFill>
-          <a:ln>
-            <a:solidFill>
-              <a:srgbClr val="33383D"/>
-            </a:solidFill>
-          </a:ln>
-          <a:effectLst/>
-        </p:spPr>
-        <p:style>
-          <a:lnRef idx="1">
-            <a:schemeClr val="accent1"/>
-          </a:lnRef>
-          <a:fillRef idx="3">
-            <a:schemeClr val="accent1"/>
-          </a:fillRef>
-          <a:effectRef idx="2">
-            <a:schemeClr val="accent1"/>
-          </a:effectRef>
-          <a:fontRef idx="minor">
-            <a:schemeClr val="lt1"/>
-          </a:fontRef>
-        </p:style>
-        <p:txBody>
-          <a:bodyPr rtlCol="0" anchor="ctr"/>
-          <a:lstStyle/>
-          <a:p>
-            <a:pPr algn="ctr"/>
-          </a:p>
-        </p:txBody>
-      </p:sp>
-      <p:sp>
-        <p:nvSpPr>
-          <p:cNvPr id="11" name="TextBox 10"/>
-          <p:cNvSpPr txBox="1"/>
-          <p:nvPr/>
-        </p:nvSpPr>
-        <p:spPr>
-          <a:xfrm>
-            <a:off x="8310676" y="1399032"/>
-            <a:ext cx="3240938" cy="457200"/>
-          </a:xfrm>
-          <a:prstGeom prst="rect">
-            <a:avLst/>
-          </a:prstGeom>
-          <a:noFill/>
-        </p:spPr>
-        <p:txBody>
-          <a:bodyPr wrap="square">
-            <a:spAutoFit/>
-          </a:bodyPr>
-          <a:lstStyle/>
-          <a:p>
-            <a:pPr>
-              <a:lnSpc>
-                <a:spcPct val="115000"/>
-              </a:lnSpc>
-            </a:pPr>
-            <a:r>
-              <a:rPr sz="2200" b="1">
-                <a:solidFill>
-                  <a:srgbClr val="6FC7CF"/>
-                </a:solidFill>
-                <a:latin typeface="IBM Plex Mono"/>
-                <a:ea typeface="Noto Sans TC"/>
-                <a:cs typeface="Noto Sans TC"/>
-              </a:rPr>
-              <a:t>19</a:t>
-            </a:r>
-          </a:p>
-        </p:txBody>
-      </p:sp>
-      <p:sp>
-        <p:nvSpPr>
-          <p:cNvPr id="12" name="TextBox 11"/>
-          <p:cNvSpPr txBox="1"/>
-          <p:nvPr/>
-        </p:nvSpPr>
-        <p:spPr>
-          <a:xfrm>
-            <a:off x="8310676" y="1828800"/>
-            <a:ext cx="3240938" cy="320040"/>
-          </a:xfrm>
-          <a:prstGeom prst="rect">
-            <a:avLst/>
-          </a:prstGeom>
-          <a:noFill/>
-        </p:spPr>
-        <p:txBody>
-          <a:bodyPr wrap="square">
-            <a:spAutoFit/>
-          </a:bodyPr>
-          <a:lstStyle/>
-          <a:p>
-            <a:pPr>
-              <a:lnSpc>
-                <a:spcPct val="115000"/>
-              </a:lnSpc>
-            </a:pPr>
-            <a:r>
-              <a:rPr sz="1050" b="0">
-                <a:solidFill>
-                  <a:srgbClr val="9AA0A6"/>
-                </a:solidFill>
-                <a:latin typeface="Noto Sans TC"/>
-                <a:ea typeface="Noto Sans TC"/>
-                <a:cs typeface="Noto Sans TC"/>
-              </a:rPr>
-              <a:t>第 19 條 invariant</a:t>
-            </a:r>
-          </a:p>
-        </p:txBody>
-      </p:sp>
-      <p:sp>
-        <p:nvSpPr>
-          <p:cNvPr id="13" name="TextBox 12"/>
-          <p:cNvSpPr txBox="1"/>
-          <p:nvPr/>
-        </p:nvSpPr>
-        <p:spPr>
-          <a:xfrm>
-            <a:off x="457200" y="2359152"/>
-            <a:ext cx="1325880" cy="813816"/>
-          </a:xfrm>
-          <a:prstGeom prst="rect">
-            <a:avLst/>
-          </a:prstGeom>
-          <a:noFill/>
-        </p:spPr>
-        <p:txBody>
-          <a:bodyPr wrap="square">
-            <a:spAutoFit/>
-          </a:bodyPr>
-          <a:lstStyle/>
-          <a:p>
-            <a:pPr>
-              <a:lnSpc>
-                <a:spcPct val="115000"/>
-              </a:lnSpc>
-            </a:pPr>
-            <a:r>
-              <a:rPr sz="1300" b="1">
-                <a:solidFill>
-                  <a:srgbClr val="6FC7CF"/>
-                </a:solidFill>
-                <a:latin typeface="Noto Sans TC"/>
-                <a:ea typeface="Noto Sans TC"/>
-                <a:cs typeface="Noto Sans TC"/>
-              </a:rPr>
-              <a:t>為什麼做</a:t>
-            </a:r>
-          </a:p>
-        </p:txBody>
-      </p:sp>
-      <p:sp>
-        <p:nvSpPr>
-          <p:cNvPr id="14" name="TextBox 13"/>
-          <p:cNvSpPr txBox="1"/>
-          <p:nvPr/>
-        </p:nvSpPr>
-        <p:spPr>
-          <a:xfrm>
-            <a:off x="1828800" y="2359152"/>
-            <a:ext cx="9875520" cy="813816"/>
-          </a:xfrm>
-          <a:prstGeom prst="rect">
-            <a:avLst/>
-          </a:prstGeom>
-          <a:noFill/>
-        </p:spPr>
-        <p:txBody>
-          <a:bodyPr wrap="square">
-            <a:spAutoFit/>
-          </a:bodyPr>
-          <a:lstStyle/>
-          <a:p>
-            <a:pPr>
-              <a:lnSpc>
-                <a:spcPct val="112000"/>
-              </a:lnSpc>
-            </a:pPr>
-            <a:r>
-              <a:rPr sz="1300" b="0">
-                <a:solidFill>
-                  <a:srgbClr val="E8E6E1"/>
-                </a:solidFill>
-                <a:latin typeface="Noto Sans TC"/>
-                <a:ea typeface="Noto Sans TC"/>
-                <a:cs typeface="Noto Sans TC"/>
-              </a:rPr>
-              <a:t>當時要回答的問題是：benchmarks.md 只增不改、最新的在最後，那引用它的文件有沒有跟上？我把 README、CLAUDE.md、architecture.md 裡每個頭條數字對回 benchmarks 的 run；對不上就算文件錯。</a:t>
-            </a:r>
-          </a:p>
-        </p:txBody>
-      </p:sp>
-      <p:sp>
-        <p:nvSpPr>
-          <p:cNvPr id="15" name="TextBox 14"/>
-          <p:cNvSpPr txBox="1"/>
-          <p:nvPr/>
-        </p:nvSpPr>
-        <p:spPr>
-          <a:xfrm>
-            <a:off x="457200" y="3300984"/>
-            <a:ext cx="1325880" cy="566928"/>
-          </a:xfrm>
-          <a:prstGeom prst="rect">
-            <a:avLst/>
-          </a:prstGeom>
-          <a:noFill/>
-        </p:spPr>
-        <p:txBody>
-          <a:bodyPr wrap="square">
-            <a:spAutoFit/>
-          </a:bodyPr>
-          <a:lstStyle/>
-          <a:p>
-            <a:pPr>
-              <a:lnSpc>
-                <a:spcPct val="115000"/>
-              </a:lnSpc>
-            </a:pPr>
-            <a:r>
-              <a:rPr sz="1300" b="1">
-                <a:solidFill>
-                  <a:srgbClr val="6FC7CF"/>
-                </a:solidFill>
-                <a:latin typeface="Noto Sans TC"/>
-                <a:ea typeface="Noto Sans TC"/>
-                <a:cs typeface="Noto Sans TC"/>
-              </a:rPr>
-              <a:t>怎麼設計</a:t>
-            </a:r>
-          </a:p>
-        </p:txBody>
-      </p:sp>
-      <p:sp>
-        <p:nvSpPr>
-          <p:cNvPr id="16" name="TextBox 15"/>
-          <p:cNvSpPr txBox="1"/>
-          <p:nvPr/>
-        </p:nvSpPr>
-        <p:spPr>
-          <a:xfrm>
-            <a:off x="1828800" y="3300984"/>
-            <a:ext cx="9875520" cy="566928"/>
-          </a:xfrm>
-          <a:prstGeom prst="rect">
-            <a:avLst/>
-          </a:prstGeom>
-          <a:noFill/>
-        </p:spPr>
-        <p:txBody>
-          <a:bodyPr wrap="square">
-            <a:spAutoFit/>
-          </a:bodyPr>
-          <a:lstStyle/>
-          <a:p>
-            <a:pPr>
-              <a:lnSpc>
-                <a:spcPct val="112000"/>
-              </a:lnSpc>
-            </a:pPr>
-            <a:r>
-              <a:rPr sz="1300" b="0">
-                <a:solidFill>
-                  <a:srgbClr val="E8E6E1"/>
-                </a:solidFill>
-                <a:latin typeface="Noto Sans TC"/>
-                <a:ea typeface="Noto Sans TC"/>
-                <a:cs typeface="Noto Sans TC"/>
-              </a:rPr>
-              <a:t>test_published_figures.py：從 benchmarks.md 抓每次 run 的 split（候選數／缺陷數／誤報數），四份文件裡出現的數字必須屬於某個 run，而且舊的數字只能出現在標了日期的段落裡。</a:t>
-            </a:r>
-          </a:p>
-        </p:txBody>
-      </p:sp>
-      <p:sp>
-        <p:nvSpPr>
-          <p:cNvPr id="17" name="TextBox 16"/>
-          <p:cNvSpPr txBox="1"/>
-          <p:nvPr/>
-        </p:nvSpPr>
-        <p:spPr>
-          <a:xfrm>
-            <a:off x="457200" y="3995928"/>
-            <a:ext cx="1325880" cy="1060704"/>
-          </a:xfrm>
-          <a:prstGeom prst="rect">
-            <a:avLst/>
-          </a:prstGeom>
-          <a:noFill/>
-        </p:spPr>
-        <p:txBody>
-          <a:bodyPr wrap="square">
-            <a:spAutoFit/>
-          </a:bodyPr>
-          <a:lstStyle/>
-          <a:p>
-            <a:pPr>
-              <a:lnSpc>
-                <a:spcPct val="115000"/>
-              </a:lnSpc>
-            </a:pPr>
-            <a:r>
-              <a:rPr sz="1300" b="1">
-                <a:solidFill>
-                  <a:srgbClr val="6FC7CF"/>
-                </a:solidFill>
-                <a:latin typeface="Noto Sans TC"/>
-                <a:ea typeface="Noto Sans TC"/>
-                <a:cs typeface="Noto Sans TC"/>
-              </a:rPr>
-              <a:t>量到什麼</a:t>
-            </a:r>
-          </a:p>
-        </p:txBody>
-      </p:sp>
-      <p:sp>
-        <p:nvSpPr>
-          <p:cNvPr id="18" name="TextBox 17"/>
-          <p:cNvSpPr txBox="1"/>
-          <p:nvPr/>
-        </p:nvSpPr>
-        <p:spPr>
-          <a:xfrm>
-            <a:off x="1828800" y="3995928"/>
-            <a:ext cx="9875520" cy="1060704"/>
-          </a:xfrm>
-          <a:prstGeom prst="rect">
-            <a:avLst/>
-          </a:prstGeom>
-          <a:noFill/>
-        </p:spPr>
-        <p:txBody>
-          <a:bodyPr wrap="square">
-            <a:spAutoFit/>
-          </a:bodyPr>
-          <a:lstStyle/>
-          <a:p>
-            <a:pPr>
-              <a:lnSpc>
-                <a:spcPct val="112000"/>
-              </a:lnSpc>
-            </a:pPr>
-            <a:r>
-              <a:rPr sz="1300" b="0">
-                <a:solidFill>
-                  <a:srgbClr val="E8E6E1"/>
-                </a:solidFill>
-                <a:latin typeface="Noto Sans TC"/>
-                <a:ea typeface="Noto Sans TC"/>
-                <a:cs typeface="Noto Sans TC"/>
-              </a:rPr>
-              <a:t>README 開頭寫 </a:t>
-            </a:r>
-            <a:r>
-              <a:rPr sz="1300" b="1">
-                <a:solidFill>
-                  <a:srgbClr val="6FC7CF"/>
-                </a:solidFill>
-                <a:latin typeface="Noto Sans TC"/>
-                <a:ea typeface="Noto Sans TC"/>
-                <a:cs typeface="Noto Sans TC"/>
-              </a:rPr>
-              <a:t>56.2%</a:t>
-            </a:r>
-            <a:r>
-              <a:rPr sz="1300" b="0">
-                <a:solidFill>
-                  <a:srgbClr val="E8E6E1"/>
-                </a:solidFill>
-                <a:latin typeface="Noto Sans TC"/>
-                <a:ea typeface="Noto Sans TC"/>
-                <a:cs typeface="Noto Sans TC"/>
-              </a:rPr>
-              <a:t> over </a:t>
-            </a:r>
-            <a:r>
-              <a:rPr sz="1300" b="1">
-                <a:solidFill>
-                  <a:srgbClr val="6FC7CF"/>
-                </a:solidFill>
-                <a:latin typeface="Noto Sans TC"/>
-                <a:ea typeface="Noto Sans TC"/>
-                <a:cs typeface="Noto Sans TC"/>
-              </a:rPr>
-              <a:t>8,143</a:t>
-            </a:r>
-            <a:r>
-              <a:rPr sz="1300" b="0">
-                <a:solidFill>
-                  <a:srgbClr val="E8E6E1"/>
-                </a:solidFill>
-                <a:latin typeface="Noto Sans TC"/>
-                <a:ea typeface="Noto Sans TC"/>
-                <a:cs typeface="Noto Sans TC"/>
-              </a:rPr>
-              <a:t>——那張表是 </a:t>
-            </a:r>
-            <a:r>
-              <a:rPr sz="1300" b="1">
-                <a:solidFill>
-                  <a:srgbClr val="6FC7CF"/>
-                </a:solidFill>
-                <a:latin typeface="Noto Sans TC"/>
-                <a:ea typeface="Noto Sans TC"/>
-                <a:cs typeface="Noto Sans TC"/>
-              </a:rPr>
-              <a:t>08-22</a:t>
-            </a:r>
-            <a:r>
-              <a:rPr sz="1300" b="0">
-                <a:solidFill>
-                  <a:srgbClr val="E8E6E1"/>
-                </a:solidFill>
-                <a:latin typeface="Noto Sans TC"/>
-                <a:ea typeface="Noto Sans TC"/>
-                <a:cs typeface="Noto Sans TC"/>
-              </a:rPr>
-              <a:t> 一個 header 寫著 commit uncommitted 的 tree 產的，原則上不可重現；實際 checkpoint 是 </a:t>
-            </a:r>
-            <a:r>
-              <a:rPr sz="1300" b="1">
-                <a:solidFill>
-                  <a:srgbClr val="6FC7CF"/>
-                </a:solidFill>
-                <a:latin typeface="Noto Sans TC"/>
-                <a:ea typeface="Noto Sans TC"/>
-                <a:cs typeface="Noto Sans TC"/>
-              </a:rPr>
-              <a:t>52.8%</a:t>
-            </a:r>
-            <a:r>
-              <a:rPr sz="1300" b="0">
-                <a:solidFill>
-                  <a:srgbClr val="E8E6E1"/>
-                </a:solidFill>
-                <a:latin typeface="Noto Sans TC"/>
-                <a:ea typeface="Noto Sans TC"/>
-                <a:cs typeface="Noto Sans TC"/>
-              </a:rPr>
-              <a:t> over </a:t>
-            </a:r>
-            <a:r>
-              <a:rPr sz="1300" b="1">
-                <a:solidFill>
-                  <a:srgbClr val="6FC7CF"/>
-                </a:solidFill>
-                <a:latin typeface="Noto Sans TC"/>
-                <a:ea typeface="Noto Sans TC"/>
-                <a:cs typeface="Noto Sans TC"/>
-              </a:rPr>
-              <a:t>7,322</a:t>
-            </a:r>
-            <a:r>
-              <a:rPr sz="1300" b="0">
-                <a:solidFill>
-                  <a:srgbClr val="E8E6E1"/>
-                </a:solidFill>
-                <a:latin typeface="Noto Sans TC"/>
-                <a:ea typeface="Noto Sans TC"/>
-                <a:cs typeface="Noto Sans TC"/>
-              </a:rPr>
-              <a:t>。同一天發現 models/onnx/ 是重訓前的權重匯出，model-free floor 的比較是用舊權重打新 patch。</a:t>
-            </a:r>
-          </a:p>
-        </p:txBody>
-      </p:sp>
-      <p:sp>
-        <p:nvSpPr>
-          <p:cNvPr id="19" name="Rectangle 18"/>
-          <p:cNvSpPr/>
-          <p:nvPr/>
-        </p:nvSpPr>
-        <p:spPr>
-          <a:xfrm>
-            <a:off x="320040" y="5148072"/>
-            <a:ext cx="11521440" cy="393192"/>
-          </a:xfrm>
-          <a:prstGeom prst="rect">
-            <a:avLst/>
-          </a:prstGeom>
-          <a:solidFill>
-            <a:srgbClr val="2B2416"/>
-          </a:solidFill>
-          <a:ln>
-            <a:noFill/>
-          </a:ln>
-          <a:effectLst/>
-        </p:spPr>
-        <p:style>
-          <a:lnRef idx="1">
-            <a:schemeClr val="accent1"/>
-          </a:lnRef>
-          <a:fillRef idx="3">
-            <a:schemeClr val="accent1"/>
-          </a:fillRef>
-          <a:effectRef idx="2">
-            <a:schemeClr val="accent1"/>
-          </a:effectRef>
-          <a:fontRef idx="minor">
-            <a:schemeClr val="lt1"/>
-          </a:fontRef>
-        </p:style>
-        <p:txBody>
-          <a:bodyPr rtlCol="0" anchor="ctr"/>
-          <a:lstStyle/>
-          <a:p>
-            <a:pPr algn="ctr"/>
-          </a:p>
-        </p:txBody>
-      </p:sp>
-      <p:sp>
-        <p:nvSpPr>
-          <p:cNvPr id="20" name="TextBox 19"/>
-          <p:cNvSpPr txBox="1"/>
-          <p:nvPr/>
-        </p:nvSpPr>
-        <p:spPr>
-          <a:xfrm>
-            <a:off x="457200" y="5184648"/>
-            <a:ext cx="1325880" cy="320040"/>
-          </a:xfrm>
-          <a:prstGeom prst="rect">
-            <a:avLst/>
-          </a:prstGeom>
-          <a:noFill/>
-        </p:spPr>
-        <p:txBody>
-          <a:bodyPr wrap="square">
-            <a:spAutoFit/>
-          </a:bodyPr>
-          <a:lstStyle/>
-          <a:p>
-            <a:pPr>
-              <a:lnSpc>
-                <a:spcPct val="115000"/>
-              </a:lnSpc>
-            </a:pPr>
-            <a:r>
-              <a:rPr sz="1300" b="1">
-                <a:solidFill>
-                  <a:srgbClr val="E2B45F"/>
-                </a:solidFill>
-                <a:latin typeface="Noto Sans TC"/>
-                <a:ea typeface="Noto Sans TC"/>
-                <a:cs typeface="Noto Sans TC"/>
-              </a:rPr>
-              <a:t>錯在哪</a:t>
-            </a:r>
-          </a:p>
-        </p:txBody>
-      </p:sp>
-      <p:sp>
-        <p:nvSpPr>
-          <p:cNvPr id="21" name="TextBox 20"/>
-          <p:cNvSpPr txBox="1"/>
-          <p:nvPr/>
-        </p:nvSpPr>
-        <p:spPr>
-          <a:xfrm>
-            <a:off x="1828800" y="5184648"/>
-            <a:ext cx="9875520" cy="320040"/>
-          </a:xfrm>
-          <a:prstGeom prst="rect">
-            <a:avLst/>
-          </a:prstGeom>
-          <a:noFill/>
-        </p:spPr>
-        <p:txBody>
-          <a:bodyPr wrap="square">
-            <a:spAutoFit/>
-          </a:bodyPr>
-          <a:lstStyle/>
-          <a:p>
-            <a:pPr>
-              <a:lnSpc>
-                <a:spcPct val="112000"/>
-              </a:lnSpc>
-            </a:pPr>
-            <a:r>
-              <a:rPr sz="1300" b="0">
-                <a:solidFill>
-                  <a:srgbClr val="E8E6E1"/>
-                </a:solidFill>
-                <a:latin typeface="Noto Sans TC"/>
-                <a:ea typeface="Noto Sans TC"/>
-                <a:cs typeface="Noto Sans TC"/>
-              </a:rPr>
-              <a:t>程式對、流程對（對位開了、資料變了、重訓了、門檻重掃了），只有文字被留在原地——在讀者第一眼看的地方。</a:t>
-            </a:r>
-          </a:p>
-        </p:txBody>
-      </p:sp>
-      <p:sp>
-        <p:nvSpPr>
-          <p:cNvPr id="22" name="Rectangle 21"/>
-          <p:cNvSpPr/>
-          <p:nvPr/>
-        </p:nvSpPr>
-        <p:spPr>
-          <a:xfrm>
-            <a:off x="320040" y="5596128"/>
-            <a:ext cx="11521440" cy="640080"/>
-          </a:xfrm>
-          <a:prstGeom prst="rect">
-            <a:avLst/>
-          </a:prstGeom>
-          <a:solidFill>
-            <a:srgbClr val="16292B"/>
-          </a:solidFill>
-          <a:ln>
-            <a:noFill/>
-          </a:ln>
-          <a:effectLst/>
-        </p:spPr>
-        <p:style>
-          <a:lnRef idx="1">
-            <a:schemeClr val="accent1"/>
-          </a:lnRef>
-          <a:fillRef idx="3">
-            <a:schemeClr val="accent1"/>
-          </a:fillRef>
-          <a:effectRef idx="2">
-            <a:schemeClr val="accent1"/>
-          </a:effectRef>
-          <a:fontRef idx="minor">
-            <a:schemeClr val="lt1"/>
-          </a:fontRef>
-        </p:style>
-        <p:txBody>
-          <a:bodyPr rtlCol="0" anchor="ctr"/>
-          <a:lstStyle/>
-          <a:p>
-            <a:pPr algn="ctr"/>
-          </a:p>
-        </p:txBody>
-      </p:sp>
-      <p:sp>
-        <p:nvSpPr>
-          <p:cNvPr id="23" name="TextBox 22"/>
-          <p:cNvSpPr txBox="1"/>
-          <p:nvPr/>
-        </p:nvSpPr>
-        <p:spPr>
-          <a:xfrm>
-            <a:off x="457200" y="5632704"/>
-            <a:ext cx="1325880" cy="566928"/>
-          </a:xfrm>
-          <a:prstGeom prst="rect">
-            <a:avLst/>
-          </a:prstGeom>
-          <a:noFill/>
-        </p:spPr>
-        <p:txBody>
-          <a:bodyPr wrap="square">
-            <a:spAutoFit/>
-          </a:bodyPr>
-          <a:lstStyle/>
-          <a:p>
-            <a:pPr>
-              <a:lnSpc>
-                <a:spcPct val="115000"/>
-              </a:lnSpc>
-            </a:pPr>
-            <a:r>
-              <a:rPr sz="1300" b="1">
-                <a:solidFill>
-                  <a:srgbClr val="6FC7CF"/>
-                </a:solidFill>
-                <a:latin typeface="Noto Sans TC"/>
-                <a:ea typeface="Noto Sans TC"/>
-                <a:cs typeface="Noto Sans TC"/>
-              </a:rPr>
-              <a:t>產生的規則</a:t>
-            </a:r>
-          </a:p>
-        </p:txBody>
-      </p:sp>
-      <p:sp>
-        <p:nvSpPr>
-          <p:cNvPr id="24" name="TextBox 23"/>
-          <p:cNvSpPr txBox="1"/>
-          <p:nvPr/>
-        </p:nvSpPr>
-        <p:spPr>
-          <a:xfrm>
-            <a:off x="1828800" y="5632704"/>
-            <a:ext cx="9875520" cy="566928"/>
-          </a:xfrm>
-          <a:prstGeom prst="rect">
-            <a:avLst/>
-          </a:prstGeom>
-          <a:noFill/>
-        </p:spPr>
-        <p:txBody>
-          <a:bodyPr wrap="square">
-            <a:spAutoFit/>
-          </a:bodyPr>
-          <a:lstStyle/>
-          <a:p>
-            <a:pPr>
-              <a:lnSpc>
-                <a:spcPct val="112000"/>
-              </a:lnSpc>
-            </a:pPr>
-            <a:r>
-              <a:rPr sz="1300" b="0">
-                <a:solidFill>
-                  <a:srgbClr val="E8E6E1"/>
-                </a:solidFill>
-                <a:latin typeface="Noto Sans TC"/>
-                <a:ea typeface="Noto Sans TC"/>
-                <a:cs typeface="Noto Sans TC"/>
-              </a:rPr>
-              <a:t>第 </a:t>
-            </a:r>
-            <a:r>
-              <a:rPr sz="1300" b="1">
-                <a:solidFill>
-                  <a:srgbClr val="6FC7CF"/>
-                </a:solidFill>
-                <a:latin typeface="Noto Sans TC"/>
-                <a:ea typeface="Noto Sans TC"/>
-                <a:cs typeface="Noto Sans TC"/>
-              </a:rPr>
-              <a:t>19</a:t>
-            </a:r>
-            <a:r>
-              <a:rPr sz="1300" b="0">
-                <a:solidFill>
-                  <a:srgbClr val="E8E6E1"/>
-                </a:solidFill>
-                <a:latin typeface="Noto Sans TC"/>
-                <a:ea typeface="Noto Sans TC"/>
-                <a:cs typeface="Noto Sans TC"/>
-              </a:rPr>
-              <a:t> 條 invariant：發表的數字要指名它來自哪個 run；舊數字可以出現，但只能在一段標日期的文字裡（「這裡在 </a:t>
-            </a:r>
-            <a:r>
-              <a:rPr sz="1300" b="1">
-                <a:solidFill>
-                  <a:srgbClr val="6FC7CF"/>
-                </a:solidFill>
-                <a:latin typeface="Noto Sans TC"/>
-                <a:ea typeface="Noto Sans TC"/>
-                <a:cs typeface="Noto Sans TC"/>
-              </a:rPr>
-              <a:t>08-24</a:t>
-            </a:r>
-            <a:r>
-              <a:rPr sz="1300" b="0">
-                <a:solidFill>
-                  <a:srgbClr val="E8E6E1"/>
-                </a:solidFill>
-                <a:latin typeface="Noto Sans TC"/>
-                <a:ea typeface="Noto Sans TC"/>
-                <a:cs typeface="Noto Sans TC"/>
-              </a:rPr>
-              <a:t> 之前寫 </a:t>
-            </a:r>
-            <a:r>
-              <a:rPr sz="1300" b="1">
-                <a:solidFill>
-                  <a:srgbClr val="6FC7CF"/>
-                </a:solidFill>
-                <a:latin typeface="Noto Sans TC"/>
-                <a:ea typeface="Noto Sans TC"/>
-                <a:cs typeface="Noto Sans TC"/>
-              </a:rPr>
-              <a:t>56.2%</a:t>
-            </a:r>
-            <a:r>
-              <a:rPr sz="1300" b="0">
-                <a:solidFill>
-                  <a:srgbClr val="E8E6E1"/>
-                </a:solidFill>
-                <a:latin typeface="Noto Sans TC"/>
-                <a:ea typeface="Noto Sans TC"/>
-                <a:cs typeface="Noto Sans TC"/>
-              </a:rPr>
-              <a:t>」是讀者需要的那句）。重新匯出進 retrain chain。</a:t>
-            </a:r>
-          </a:p>
-        </p:txBody>
-      </p:sp>
-      <p:sp>
-        <p:nvSpPr>
-          <p:cNvPr id="25" name="TextBox 24"/>
           <p:cNvSpPr txBox="1"/>
           <p:nvPr/>
         </p:nvSpPr>
@@ -30319,7 +29446,7 @@
       </p:sp>
       <p:sp>
         <p:nvSpPr>
-          <p:cNvPr id="26" name="TextBox 25"/>
+          <p:cNvPr id="6" name="TextBox 5"/>
           <p:cNvSpPr txBox="1"/>
           <p:nvPr/>
         </p:nvSpPr>
@@ -30347,13 +29474,13 @@
             <a:r>
               <a:rPr sz="1000" b="0">
                 <a:solidFill>
-                  <a:srgbClr val="6FC7CF"/>
+                  <a:srgbClr val="9AA0A6"/>
                 </a:solidFill>
                 <a:latin typeface="IBM Plex Mono"/>
                 <a:ea typeface="Noto Sans TC"/>
                 <a:cs typeface="Noto Sans TC"/>
               </a:rPr>
-              <a:t>★ 主線 9/9 · 30 / 39</a:t>
+              <a:t>30 / 40</a:t>
             </a:r>
           </a:p>
         </p:txBody>
@@ -30412,15 +29539,15 @@
               </a:lnSpc>
             </a:pPr>
             <a:r>
-              <a:rPr sz="2800" b="1">
-                <a:solidFill>
-                  <a:srgbClr val="E8E6E1"/>
-                </a:solidFill>
-                <a:latin typeface="Noto Sans TC"/>
-                <a:ea typeface="Noto Sans TC"/>
-                <a:cs typeface="Noto Sans TC"/>
-              </a:rPr>
-              <a:t>還沒做的，和為什麼沒做</a:t>
+              <a:rPr sz="2400" b="1">
+                <a:solidFill>
+                  <a:srgbClr val="E8E6E1"/>
+                </a:solidFill>
+                <a:latin typeface="Noto Sans TC"/>
+                <a:ea typeface="Noto Sans TC"/>
+                <a:cs typeface="Noto Sans TC"/>
+              </a:rPr>
+              <a:t>文件也要測：README 開頭那個數字</a:t>
             </a:r>
           </a:p>
         </p:txBody>
@@ -30433,213 +29560,1100 @@
         </p:nvSpPr>
         <p:spPr>
           <a:xfrm>
-            <a:off x="548640" y="1280160"/>
-            <a:ext cx="11064240" cy="5029200"/>
-          </a:xfrm>
-          <a:prstGeom prst="rect">
-            <a:avLst/>
-          </a:prstGeom>
-          <a:noFill/>
-        </p:spPr>
-        <p:txBody>
-          <a:bodyPr wrap="square">
-            <a:spAutoFit/>
-          </a:bodyPr>
-          <a:lstStyle/>
-          <a:p>
-            <a:pPr>
-              <a:lnSpc>
-                <a:spcPct val="125000"/>
-              </a:lnSpc>
-            </a:pPr>
-            <a:r>
-              <a:rPr sz="1800" b="0">
-                <a:solidFill>
-                  <a:srgbClr val="6FC7CF"/>
-                </a:solidFill>
-                <a:latin typeface="Noto Sans TC"/>
-                <a:ea typeface="Noto Sans TC"/>
-                <a:cs typeface="Noto Sans TC"/>
-              </a:rPr>
-              <a:t>• </a:t>
-            </a:r>
-            <a:r>
-              <a:rPr sz="1800" b="0">
-                <a:solidFill>
-                  <a:srgbClr val="E8E6E1"/>
-                </a:solidFill>
-                <a:latin typeface="Noto Sans TC"/>
-                <a:ea typeface="Noto Sans TC"/>
-                <a:cs typeface="Noto Sans TC"/>
-              </a:rPr>
-              <a:t>Shadow mode（模型跟著現有流程跑、只記錄不決定）：正確的下一步，但沒有產線——在這裡建等於拿種出來的資料跟自己比。拒絕，不是忘記。</a:t>
-            </a:r>
-          </a:p>
-          <a:p>
-            <a:pPr>
-              <a:lnSpc>
-                <a:spcPct val="125000"/>
-              </a:lnSpc>
-            </a:pPr>
-            <a:r>
-              <a:rPr sz="1800" b="0">
-                <a:solidFill>
-                  <a:srgbClr val="6FC7CF"/>
-                </a:solidFill>
-                <a:latin typeface="Noto Sans TC"/>
-                <a:ea typeface="Noto Sans TC"/>
-                <a:cs typeface="Noto Sans TC"/>
-              </a:rPr>
-              <a:t>• </a:t>
-            </a:r>
-            <a:r>
-              <a:rPr sz="1800" b="0">
-                <a:solidFill>
-                  <a:srgbClr val="E8E6E1"/>
-                </a:solidFill>
-                <a:latin typeface="Noto Sans TC"/>
-                <a:ea typeface="Noto Sans TC"/>
-                <a:cs typeface="Noto Sans TC"/>
-              </a:rPr>
-              <a:t>依賴參數（第一步的結果餵第二步）：知道長什麼樣，等真的有人問出那種題。</a:t>
-            </a:r>
-          </a:p>
-          <a:p>
-            <a:pPr>
-              <a:lnSpc>
-                <a:spcPct val="125000"/>
-              </a:lnSpc>
-            </a:pPr>
-            <a:r>
-              <a:rPr sz="1800" b="0">
-                <a:solidFill>
-                  <a:srgbClr val="6FC7CF"/>
-                </a:solidFill>
-                <a:latin typeface="Noto Sans TC"/>
-                <a:ea typeface="Noto Sans TC"/>
-                <a:cs typeface="Noto Sans TC"/>
-              </a:rPr>
-              <a:t>• </a:t>
-            </a:r>
-            <a:r>
-              <a:rPr sz="1800" b="0">
-                <a:solidFill>
-                  <a:srgbClr val="E8E6E1"/>
-                </a:solidFill>
-                <a:latin typeface="Noto Sans TC"/>
-                <a:ea typeface="Noto Sans TC"/>
-                <a:cs typeface="Noto Sans TC"/>
-              </a:rPr>
-              <a:t>用作業員的更正重訓：資料庫裡真的人判過的只有五筆，四筆已刪；種出來的資料重訓是自己教自己。</a:t>
-            </a:r>
-          </a:p>
-          <a:p>
-            <a:pPr>
-              <a:lnSpc>
-                <a:spcPct val="125000"/>
-              </a:lnSpc>
-            </a:pPr>
-            <a:r>
-              <a:rPr sz="1800" b="0">
-                <a:solidFill>
-                  <a:srgbClr val="6FC7CF"/>
-                </a:solidFill>
-                <a:latin typeface="Noto Sans TC"/>
-                <a:ea typeface="Noto Sans TC"/>
-                <a:cs typeface="Noto Sans TC"/>
-              </a:rPr>
-              <a:t>• </a:t>
-            </a:r>
-            <a:r>
-              <a:rPr sz="1800" b="0">
-                <a:solidFill>
-                  <a:srgbClr val="E8E6E1"/>
-                </a:solidFill>
-                <a:latin typeface="Noto Sans TC"/>
-                <a:ea typeface="Noto Sans TC"/>
-                <a:cs typeface="Noto Sans TC"/>
-              </a:rPr>
-              <a:t>電測：關掉 short 那 </a:t>
-            </a:r>
+            <a:off x="457200" y="868680"/>
+            <a:ext cx="11247120" cy="411480"/>
+          </a:xfrm>
+          <a:prstGeom prst="rect">
+            <a:avLst/>
+          </a:prstGeom>
+          <a:noFill/>
+        </p:spPr>
+        <p:txBody>
+          <a:bodyPr wrap="square">
+            <a:spAutoFit/>
+          </a:bodyPr>
+          <a:lstStyle/>
+          <a:p>
+            <a:pPr>
+              <a:lnSpc>
+                <a:spcPct val="115000"/>
+              </a:lnSpc>
+            </a:pPr>
+            <a:r>
+              <a:rPr sz="1500" b="0">
+                <a:solidFill>
+                  <a:srgbClr val="9AA0A6"/>
+                </a:solidFill>
+                <a:latin typeface="Noto Sans TC"/>
+                <a:ea typeface="Noto Sans TC"/>
+                <a:cs typeface="Noto Sans TC"/>
+              </a:rPr>
+              <a:t>是一份「commit uncommitted」的表</a:t>
+            </a:r>
+          </a:p>
+        </p:txBody>
+      </p:sp>
+      <p:sp>
+        <p:nvSpPr>
+          <p:cNvPr id="4" name="Rectangle 3"/>
+          <p:cNvSpPr/>
+          <p:nvPr/>
+        </p:nvSpPr>
+        <p:spPr>
+          <a:xfrm>
+            <a:off x="457200" y="1325880"/>
+            <a:ext cx="3606698" cy="868680"/>
+          </a:xfrm>
+          <a:prstGeom prst="rect">
+            <a:avLst/>
+          </a:prstGeom>
+          <a:solidFill>
+            <a:srgbClr val="1E2125"/>
+          </a:solidFill>
+          <a:ln>
+            <a:solidFill>
+              <a:srgbClr val="33383D"/>
+            </a:solidFill>
+          </a:ln>
+          <a:effectLst/>
+        </p:spPr>
+        <p:style>
+          <a:lnRef idx="1">
+            <a:schemeClr val="accent1"/>
+          </a:lnRef>
+          <a:fillRef idx="3">
+            <a:schemeClr val="accent1"/>
+          </a:fillRef>
+          <a:effectRef idx="2">
+            <a:schemeClr val="accent1"/>
+          </a:effectRef>
+          <a:fontRef idx="minor">
+            <a:schemeClr val="lt1"/>
+          </a:fontRef>
+        </p:style>
+        <p:txBody>
+          <a:bodyPr rtlCol="0" anchor="ctr"/>
+          <a:lstStyle/>
+          <a:p>
+            <a:pPr algn="ctr"/>
+          </a:p>
+        </p:txBody>
+      </p:sp>
+      <p:sp>
+        <p:nvSpPr>
+          <p:cNvPr id="5" name="TextBox 4"/>
+          <p:cNvSpPr txBox="1"/>
+          <p:nvPr/>
+        </p:nvSpPr>
+        <p:spPr>
+          <a:xfrm>
+            <a:off x="640080" y="1399032"/>
+            <a:ext cx="3240938" cy="457200"/>
+          </a:xfrm>
+          <a:prstGeom prst="rect">
+            <a:avLst/>
+          </a:prstGeom>
+          <a:noFill/>
+        </p:spPr>
+        <p:txBody>
+          <a:bodyPr wrap="square">
+            <a:spAutoFit/>
+          </a:bodyPr>
+          <a:lstStyle/>
+          <a:p>
+            <a:pPr>
+              <a:lnSpc>
+                <a:spcPct val="115000"/>
+              </a:lnSpc>
+            </a:pPr>
             <a:r>
               <a:rPr sz="1800" b="1">
                 <a:solidFill>
                   <a:srgbClr val="6FC7CF"/>
                 </a:solidFill>
-                <a:latin typeface="Noto Sans TC"/>
-                <a:ea typeface="Noto Sans TC"/>
-                <a:cs typeface="Noto Sans TC"/>
-              </a:rPr>
-              <a:t>1.55%</a:t>
-            </a:r>
-            <a:r>
-              <a:rPr sz="1800" b="0">
-                <a:solidFill>
-                  <a:srgbClr val="E8E6E1"/>
-                </a:solidFill>
-                <a:latin typeface="Noto Sans TC"/>
-                <a:ea typeface="Noto Sans TC"/>
-                <a:cs typeface="Noto Sans TC"/>
-              </a:rPr>
-              <a:t> 漏網的唯一方法，不在這個系統裡，WI-</a:t>
-            </a:r>
-            <a:r>
-              <a:rPr sz="1800" b="1">
-                <a:solidFill>
-                  <a:srgbClr val="6FC7CF"/>
-                </a:solidFill>
-                <a:latin typeface="Noto Sans TC"/>
-                <a:ea typeface="Noto Sans TC"/>
-                <a:cs typeface="Noto Sans TC"/>
-              </a:rPr>
-              <a:t>201</a:t>
-            </a:r>
-            <a:r>
-              <a:rPr sz="1800" b="0">
-                <a:solidFill>
-                  <a:srgbClr val="E8E6E1"/>
-                </a:solidFill>
-                <a:latin typeface="Noto Sans TC"/>
-                <a:ea typeface="Noto Sans TC"/>
-                <a:cs typeface="Noto Sans TC"/>
-              </a:rPr>
-              <a:t> 本來就寫了。</a:t>
-            </a:r>
-          </a:p>
-          <a:p>
-            <a:pPr>
-              <a:lnSpc>
-                <a:spcPct val="125000"/>
-              </a:lnSpc>
-            </a:pPr>
-            <a:r>
-              <a:rPr sz="1800" b="0">
-                <a:solidFill>
-                  <a:srgbClr val="6FC7CF"/>
-                </a:solidFill>
-                <a:latin typeface="Noto Sans TC"/>
-                <a:ea typeface="Noto Sans TC"/>
-                <a:cs typeface="Noto Sans TC"/>
-              </a:rPr>
-              <a:t>• </a:t>
-            </a:r>
-            <a:r>
-              <a:rPr sz="1800" b="0">
-                <a:solidFill>
-                  <a:srgbClr val="E8E6E1"/>
-                </a:solidFill>
-                <a:latin typeface="Noto Sans TC"/>
-                <a:ea typeface="Noto Sans TC"/>
-                <a:cs typeface="Noto Sans TC"/>
-              </a:rPr>
-              <a:t>一句收尾：每個門檻引得到檔案、每個數字在 benchmarks 裡、每個錯有它產生的測試。</a:t>
-            </a:r>
-          </a:p>
-        </p:txBody>
-      </p:sp>
-      <p:sp>
-        <p:nvSpPr>
-          <p:cNvPr id="4" name="TextBox 3"/>
+                <a:latin typeface="IBM Plex Mono"/>
+                <a:ea typeface="Noto Sans TC"/>
+                <a:cs typeface="Noto Sans TC"/>
+              </a:rPr>
+              <a:t>56.2% vs 52.8%</a:t>
+            </a:r>
+          </a:p>
+        </p:txBody>
+      </p:sp>
+      <p:sp>
+        <p:nvSpPr>
+          <p:cNvPr id="6" name="TextBox 5"/>
+          <p:cNvSpPr txBox="1"/>
+          <p:nvPr/>
+        </p:nvSpPr>
+        <p:spPr>
+          <a:xfrm>
+            <a:off x="640080" y="1828800"/>
+            <a:ext cx="3240938" cy="320040"/>
+          </a:xfrm>
+          <a:prstGeom prst="rect">
+            <a:avLst/>
+          </a:prstGeom>
+          <a:noFill/>
+        </p:spPr>
+        <p:txBody>
+          <a:bodyPr wrap="square">
+            <a:spAutoFit/>
+          </a:bodyPr>
+          <a:lstStyle/>
+          <a:p>
+            <a:pPr>
+              <a:lnSpc>
+                <a:spcPct val="115000"/>
+              </a:lnSpc>
+            </a:pPr>
+            <a:r>
+              <a:rPr sz="1050" b="0">
+                <a:solidFill>
+                  <a:srgbClr val="9AA0A6"/>
+                </a:solidFill>
+                <a:latin typeface="Noto Sans TC"/>
+                <a:ea typeface="Noto Sans TC"/>
+                <a:cs typeface="Noto Sans TC"/>
+              </a:rPr>
+              <a:t>README 第一行 vs 實際</a:t>
+            </a:r>
+          </a:p>
+        </p:txBody>
+      </p:sp>
+      <p:sp>
+        <p:nvSpPr>
+          <p:cNvPr id="7" name="Rectangle 6"/>
+          <p:cNvSpPr/>
+          <p:nvPr/>
+        </p:nvSpPr>
+        <p:spPr>
+          <a:xfrm>
+            <a:off x="4292498" y="1325880"/>
+            <a:ext cx="3606698" cy="868680"/>
+          </a:xfrm>
+          <a:prstGeom prst="rect">
+            <a:avLst/>
+          </a:prstGeom>
+          <a:solidFill>
+            <a:srgbClr val="1E2125"/>
+          </a:solidFill>
+          <a:ln>
+            <a:solidFill>
+              <a:srgbClr val="33383D"/>
+            </a:solidFill>
+          </a:ln>
+          <a:effectLst/>
+        </p:spPr>
+        <p:style>
+          <a:lnRef idx="1">
+            <a:schemeClr val="accent1"/>
+          </a:lnRef>
+          <a:fillRef idx="3">
+            <a:schemeClr val="accent1"/>
+          </a:fillRef>
+          <a:effectRef idx="2">
+            <a:schemeClr val="accent1"/>
+          </a:effectRef>
+          <a:fontRef idx="minor">
+            <a:schemeClr val="lt1"/>
+          </a:fontRef>
+        </p:style>
+        <p:txBody>
+          <a:bodyPr rtlCol="0" anchor="ctr"/>
+          <a:lstStyle/>
+          <a:p>
+            <a:pPr algn="ctr"/>
+          </a:p>
+        </p:txBody>
+      </p:sp>
+      <p:sp>
+        <p:nvSpPr>
+          <p:cNvPr id="8" name="TextBox 7"/>
+          <p:cNvSpPr txBox="1"/>
+          <p:nvPr/>
+        </p:nvSpPr>
+        <p:spPr>
+          <a:xfrm>
+            <a:off x="4475378" y="1399032"/>
+            <a:ext cx="3240938" cy="457200"/>
+          </a:xfrm>
+          <a:prstGeom prst="rect">
+            <a:avLst/>
+          </a:prstGeom>
+          <a:noFill/>
+        </p:spPr>
+        <p:txBody>
+          <a:bodyPr wrap="square">
+            <a:spAutoFit/>
+          </a:bodyPr>
+          <a:lstStyle/>
+          <a:p>
+            <a:pPr>
+              <a:lnSpc>
+                <a:spcPct val="115000"/>
+              </a:lnSpc>
+            </a:pPr>
+            <a:r>
+              <a:rPr sz="1500" b="1">
+                <a:solidFill>
+                  <a:srgbClr val="6FC7CF"/>
+                </a:solidFill>
+                <a:latin typeface="IBM Plex Mono"/>
+                <a:ea typeface="Noto Sans TC"/>
+                <a:cs typeface="Noto Sans TC"/>
+              </a:rPr>
+              <a:t>commit uncommitted</a:t>
+            </a:r>
+          </a:p>
+        </p:txBody>
+      </p:sp>
+      <p:sp>
+        <p:nvSpPr>
+          <p:cNvPr id="9" name="TextBox 8"/>
+          <p:cNvSpPr txBox="1"/>
+          <p:nvPr/>
+        </p:nvSpPr>
+        <p:spPr>
+          <a:xfrm>
+            <a:off x="4475378" y="1828800"/>
+            <a:ext cx="3240938" cy="320040"/>
+          </a:xfrm>
+          <a:prstGeom prst="rect">
+            <a:avLst/>
+          </a:prstGeom>
+          <a:noFill/>
+        </p:spPr>
+        <p:txBody>
+          <a:bodyPr wrap="square">
+            <a:spAutoFit/>
+          </a:bodyPr>
+          <a:lstStyle/>
+          <a:p>
+            <a:pPr>
+              <a:lnSpc>
+                <a:spcPct val="115000"/>
+              </a:lnSpc>
+            </a:pPr>
+            <a:r>
+              <a:rPr sz="1050" b="0">
+                <a:solidFill>
+                  <a:srgbClr val="9AA0A6"/>
+                </a:solidFill>
+                <a:latin typeface="Noto Sans TC"/>
+                <a:ea typeface="Noto Sans TC"/>
+                <a:cs typeface="Noto Sans TC"/>
+              </a:rPr>
+              <a:t>那張表的來源</a:t>
+            </a:r>
+          </a:p>
+        </p:txBody>
+      </p:sp>
+      <p:sp>
+        <p:nvSpPr>
+          <p:cNvPr id="10" name="Rectangle 9"/>
+          <p:cNvSpPr/>
+          <p:nvPr/>
+        </p:nvSpPr>
+        <p:spPr>
+          <a:xfrm>
+            <a:off x="8127796" y="1325880"/>
+            <a:ext cx="3606698" cy="868680"/>
+          </a:xfrm>
+          <a:prstGeom prst="rect">
+            <a:avLst/>
+          </a:prstGeom>
+          <a:solidFill>
+            <a:srgbClr val="1E2125"/>
+          </a:solidFill>
+          <a:ln>
+            <a:solidFill>
+              <a:srgbClr val="33383D"/>
+            </a:solidFill>
+          </a:ln>
+          <a:effectLst/>
+        </p:spPr>
+        <p:style>
+          <a:lnRef idx="1">
+            <a:schemeClr val="accent1"/>
+          </a:lnRef>
+          <a:fillRef idx="3">
+            <a:schemeClr val="accent1"/>
+          </a:fillRef>
+          <a:effectRef idx="2">
+            <a:schemeClr val="accent1"/>
+          </a:effectRef>
+          <a:fontRef idx="minor">
+            <a:schemeClr val="lt1"/>
+          </a:fontRef>
+        </p:style>
+        <p:txBody>
+          <a:bodyPr rtlCol="0" anchor="ctr"/>
+          <a:lstStyle/>
+          <a:p>
+            <a:pPr algn="ctr"/>
+          </a:p>
+        </p:txBody>
+      </p:sp>
+      <p:sp>
+        <p:nvSpPr>
+          <p:cNvPr id="11" name="TextBox 10"/>
+          <p:cNvSpPr txBox="1"/>
+          <p:nvPr/>
+        </p:nvSpPr>
+        <p:spPr>
+          <a:xfrm>
+            <a:off x="8310676" y="1399032"/>
+            <a:ext cx="3240938" cy="457200"/>
+          </a:xfrm>
+          <a:prstGeom prst="rect">
+            <a:avLst/>
+          </a:prstGeom>
+          <a:noFill/>
+        </p:spPr>
+        <p:txBody>
+          <a:bodyPr wrap="square">
+            <a:spAutoFit/>
+          </a:bodyPr>
+          <a:lstStyle/>
+          <a:p>
+            <a:pPr>
+              <a:lnSpc>
+                <a:spcPct val="115000"/>
+              </a:lnSpc>
+            </a:pPr>
+            <a:r>
+              <a:rPr sz="2200" b="1">
+                <a:solidFill>
+                  <a:srgbClr val="6FC7CF"/>
+                </a:solidFill>
+                <a:latin typeface="IBM Plex Mono"/>
+                <a:ea typeface="Noto Sans TC"/>
+                <a:cs typeface="Noto Sans TC"/>
+              </a:rPr>
+              <a:t>19</a:t>
+            </a:r>
+          </a:p>
+        </p:txBody>
+      </p:sp>
+      <p:sp>
+        <p:nvSpPr>
+          <p:cNvPr id="12" name="TextBox 11"/>
+          <p:cNvSpPr txBox="1"/>
+          <p:nvPr/>
+        </p:nvSpPr>
+        <p:spPr>
+          <a:xfrm>
+            <a:off x="8310676" y="1828800"/>
+            <a:ext cx="3240938" cy="320040"/>
+          </a:xfrm>
+          <a:prstGeom prst="rect">
+            <a:avLst/>
+          </a:prstGeom>
+          <a:noFill/>
+        </p:spPr>
+        <p:txBody>
+          <a:bodyPr wrap="square">
+            <a:spAutoFit/>
+          </a:bodyPr>
+          <a:lstStyle/>
+          <a:p>
+            <a:pPr>
+              <a:lnSpc>
+                <a:spcPct val="115000"/>
+              </a:lnSpc>
+            </a:pPr>
+            <a:r>
+              <a:rPr sz="1050" b="0">
+                <a:solidFill>
+                  <a:srgbClr val="9AA0A6"/>
+                </a:solidFill>
+                <a:latin typeface="Noto Sans TC"/>
+                <a:ea typeface="Noto Sans TC"/>
+                <a:cs typeface="Noto Sans TC"/>
+              </a:rPr>
+              <a:t>第 19 條 invariant</a:t>
+            </a:r>
+          </a:p>
+        </p:txBody>
+      </p:sp>
+      <p:sp>
+        <p:nvSpPr>
+          <p:cNvPr id="13" name="TextBox 12"/>
+          <p:cNvSpPr txBox="1"/>
+          <p:nvPr/>
+        </p:nvSpPr>
+        <p:spPr>
+          <a:xfrm>
+            <a:off x="457200" y="2359152"/>
+            <a:ext cx="1325880" cy="813816"/>
+          </a:xfrm>
+          <a:prstGeom prst="rect">
+            <a:avLst/>
+          </a:prstGeom>
+          <a:noFill/>
+        </p:spPr>
+        <p:txBody>
+          <a:bodyPr wrap="square">
+            <a:spAutoFit/>
+          </a:bodyPr>
+          <a:lstStyle/>
+          <a:p>
+            <a:pPr>
+              <a:lnSpc>
+                <a:spcPct val="115000"/>
+              </a:lnSpc>
+            </a:pPr>
+            <a:r>
+              <a:rPr sz="1300" b="1">
+                <a:solidFill>
+                  <a:srgbClr val="6FC7CF"/>
+                </a:solidFill>
+                <a:latin typeface="Noto Sans TC"/>
+                <a:ea typeface="Noto Sans TC"/>
+                <a:cs typeface="Noto Sans TC"/>
+              </a:rPr>
+              <a:t>為什麼做</a:t>
+            </a:r>
+          </a:p>
+        </p:txBody>
+      </p:sp>
+      <p:sp>
+        <p:nvSpPr>
+          <p:cNvPr id="14" name="TextBox 13"/>
+          <p:cNvSpPr txBox="1"/>
+          <p:nvPr/>
+        </p:nvSpPr>
+        <p:spPr>
+          <a:xfrm>
+            <a:off x="1828800" y="2359152"/>
+            <a:ext cx="9875520" cy="813816"/>
+          </a:xfrm>
+          <a:prstGeom prst="rect">
+            <a:avLst/>
+          </a:prstGeom>
+          <a:noFill/>
+        </p:spPr>
+        <p:txBody>
+          <a:bodyPr wrap="square">
+            <a:spAutoFit/>
+          </a:bodyPr>
+          <a:lstStyle/>
+          <a:p>
+            <a:pPr>
+              <a:lnSpc>
+                <a:spcPct val="112000"/>
+              </a:lnSpc>
+            </a:pPr>
+            <a:r>
+              <a:rPr sz="1300" b="0">
+                <a:solidFill>
+                  <a:srgbClr val="E8E6E1"/>
+                </a:solidFill>
+                <a:latin typeface="Noto Sans TC"/>
+                <a:ea typeface="Noto Sans TC"/>
+                <a:cs typeface="Noto Sans TC"/>
+              </a:rPr>
+              <a:t>當時要回答的問題是：benchmarks.md 只增不改、最新的在最後，那引用它的文件有沒有跟上？我把 README、CLAUDE.md、architecture.md 裡每個頭條數字對回 benchmarks 的 run；對不上就算文件錯。</a:t>
+            </a:r>
+          </a:p>
+        </p:txBody>
+      </p:sp>
+      <p:sp>
+        <p:nvSpPr>
+          <p:cNvPr id="15" name="TextBox 14"/>
+          <p:cNvSpPr txBox="1"/>
+          <p:nvPr/>
+        </p:nvSpPr>
+        <p:spPr>
+          <a:xfrm>
+            <a:off x="457200" y="3300984"/>
+            <a:ext cx="1325880" cy="566928"/>
+          </a:xfrm>
+          <a:prstGeom prst="rect">
+            <a:avLst/>
+          </a:prstGeom>
+          <a:noFill/>
+        </p:spPr>
+        <p:txBody>
+          <a:bodyPr wrap="square">
+            <a:spAutoFit/>
+          </a:bodyPr>
+          <a:lstStyle/>
+          <a:p>
+            <a:pPr>
+              <a:lnSpc>
+                <a:spcPct val="115000"/>
+              </a:lnSpc>
+            </a:pPr>
+            <a:r>
+              <a:rPr sz="1300" b="1">
+                <a:solidFill>
+                  <a:srgbClr val="6FC7CF"/>
+                </a:solidFill>
+                <a:latin typeface="Noto Sans TC"/>
+                <a:ea typeface="Noto Sans TC"/>
+                <a:cs typeface="Noto Sans TC"/>
+              </a:rPr>
+              <a:t>怎麼設計</a:t>
+            </a:r>
+          </a:p>
+        </p:txBody>
+      </p:sp>
+      <p:sp>
+        <p:nvSpPr>
+          <p:cNvPr id="16" name="TextBox 15"/>
+          <p:cNvSpPr txBox="1"/>
+          <p:nvPr/>
+        </p:nvSpPr>
+        <p:spPr>
+          <a:xfrm>
+            <a:off x="1828800" y="3300984"/>
+            <a:ext cx="9875520" cy="566928"/>
+          </a:xfrm>
+          <a:prstGeom prst="rect">
+            <a:avLst/>
+          </a:prstGeom>
+          <a:noFill/>
+        </p:spPr>
+        <p:txBody>
+          <a:bodyPr wrap="square">
+            <a:spAutoFit/>
+          </a:bodyPr>
+          <a:lstStyle/>
+          <a:p>
+            <a:pPr>
+              <a:lnSpc>
+                <a:spcPct val="112000"/>
+              </a:lnSpc>
+            </a:pPr>
+            <a:r>
+              <a:rPr sz="1300" b="0">
+                <a:solidFill>
+                  <a:srgbClr val="E8E6E1"/>
+                </a:solidFill>
+                <a:latin typeface="Noto Sans TC"/>
+                <a:ea typeface="Noto Sans TC"/>
+                <a:cs typeface="Noto Sans TC"/>
+              </a:rPr>
+              <a:t>test_published_figures.py：從 benchmarks.md 抓每次 run 的 split（候選數／缺陷數／誤報數），四份文件裡出現的數字必須屬於某個 run，而且舊的數字只能出現在標了日期的段落裡。</a:t>
+            </a:r>
+          </a:p>
+        </p:txBody>
+      </p:sp>
+      <p:sp>
+        <p:nvSpPr>
+          <p:cNvPr id="17" name="TextBox 16"/>
+          <p:cNvSpPr txBox="1"/>
+          <p:nvPr/>
+        </p:nvSpPr>
+        <p:spPr>
+          <a:xfrm>
+            <a:off x="457200" y="3995928"/>
+            <a:ext cx="1325880" cy="1060704"/>
+          </a:xfrm>
+          <a:prstGeom prst="rect">
+            <a:avLst/>
+          </a:prstGeom>
+          <a:noFill/>
+        </p:spPr>
+        <p:txBody>
+          <a:bodyPr wrap="square">
+            <a:spAutoFit/>
+          </a:bodyPr>
+          <a:lstStyle/>
+          <a:p>
+            <a:pPr>
+              <a:lnSpc>
+                <a:spcPct val="115000"/>
+              </a:lnSpc>
+            </a:pPr>
+            <a:r>
+              <a:rPr sz="1300" b="1">
+                <a:solidFill>
+                  <a:srgbClr val="6FC7CF"/>
+                </a:solidFill>
+                <a:latin typeface="Noto Sans TC"/>
+                <a:ea typeface="Noto Sans TC"/>
+                <a:cs typeface="Noto Sans TC"/>
+              </a:rPr>
+              <a:t>量到什麼</a:t>
+            </a:r>
+          </a:p>
+        </p:txBody>
+      </p:sp>
+      <p:sp>
+        <p:nvSpPr>
+          <p:cNvPr id="18" name="TextBox 17"/>
+          <p:cNvSpPr txBox="1"/>
+          <p:nvPr/>
+        </p:nvSpPr>
+        <p:spPr>
+          <a:xfrm>
+            <a:off x="1828800" y="3995928"/>
+            <a:ext cx="9875520" cy="1060704"/>
+          </a:xfrm>
+          <a:prstGeom prst="rect">
+            <a:avLst/>
+          </a:prstGeom>
+          <a:noFill/>
+        </p:spPr>
+        <p:txBody>
+          <a:bodyPr wrap="square">
+            <a:spAutoFit/>
+          </a:bodyPr>
+          <a:lstStyle/>
+          <a:p>
+            <a:pPr>
+              <a:lnSpc>
+                <a:spcPct val="112000"/>
+              </a:lnSpc>
+            </a:pPr>
+            <a:r>
+              <a:rPr sz="1300" b="0">
+                <a:solidFill>
+                  <a:srgbClr val="E8E6E1"/>
+                </a:solidFill>
+                <a:latin typeface="Noto Sans TC"/>
+                <a:ea typeface="Noto Sans TC"/>
+                <a:cs typeface="Noto Sans TC"/>
+              </a:rPr>
+              <a:t>README 開頭寫 </a:t>
+            </a:r>
+            <a:r>
+              <a:rPr sz="1300" b="1">
+                <a:solidFill>
+                  <a:srgbClr val="6FC7CF"/>
+                </a:solidFill>
+                <a:latin typeface="Noto Sans TC"/>
+                <a:ea typeface="Noto Sans TC"/>
+                <a:cs typeface="Noto Sans TC"/>
+              </a:rPr>
+              <a:t>56.2%</a:t>
+            </a:r>
+            <a:r>
+              <a:rPr sz="1300" b="0">
+                <a:solidFill>
+                  <a:srgbClr val="E8E6E1"/>
+                </a:solidFill>
+                <a:latin typeface="Noto Sans TC"/>
+                <a:ea typeface="Noto Sans TC"/>
+                <a:cs typeface="Noto Sans TC"/>
+              </a:rPr>
+              <a:t> over </a:t>
+            </a:r>
+            <a:r>
+              <a:rPr sz="1300" b="1">
+                <a:solidFill>
+                  <a:srgbClr val="6FC7CF"/>
+                </a:solidFill>
+                <a:latin typeface="Noto Sans TC"/>
+                <a:ea typeface="Noto Sans TC"/>
+                <a:cs typeface="Noto Sans TC"/>
+              </a:rPr>
+              <a:t>8,143</a:t>
+            </a:r>
+            <a:r>
+              <a:rPr sz="1300" b="0">
+                <a:solidFill>
+                  <a:srgbClr val="E8E6E1"/>
+                </a:solidFill>
+                <a:latin typeface="Noto Sans TC"/>
+                <a:ea typeface="Noto Sans TC"/>
+                <a:cs typeface="Noto Sans TC"/>
+              </a:rPr>
+              <a:t>——那張表是 </a:t>
+            </a:r>
+            <a:r>
+              <a:rPr sz="1300" b="1">
+                <a:solidFill>
+                  <a:srgbClr val="6FC7CF"/>
+                </a:solidFill>
+                <a:latin typeface="Noto Sans TC"/>
+                <a:ea typeface="Noto Sans TC"/>
+                <a:cs typeface="Noto Sans TC"/>
+              </a:rPr>
+              <a:t>08-22</a:t>
+            </a:r>
+            <a:r>
+              <a:rPr sz="1300" b="0">
+                <a:solidFill>
+                  <a:srgbClr val="E8E6E1"/>
+                </a:solidFill>
+                <a:latin typeface="Noto Sans TC"/>
+                <a:ea typeface="Noto Sans TC"/>
+                <a:cs typeface="Noto Sans TC"/>
+              </a:rPr>
+              <a:t> 一個 header 寫著 commit uncommitted 的 tree 產的，原則上不可重現；實際 checkpoint 是 </a:t>
+            </a:r>
+            <a:r>
+              <a:rPr sz="1300" b="1">
+                <a:solidFill>
+                  <a:srgbClr val="6FC7CF"/>
+                </a:solidFill>
+                <a:latin typeface="Noto Sans TC"/>
+                <a:ea typeface="Noto Sans TC"/>
+                <a:cs typeface="Noto Sans TC"/>
+              </a:rPr>
+              <a:t>52.8%</a:t>
+            </a:r>
+            <a:r>
+              <a:rPr sz="1300" b="0">
+                <a:solidFill>
+                  <a:srgbClr val="E8E6E1"/>
+                </a:solidFill>
+                <a:latin typeface="Noto Sans TC"/>
+                <a:ea typeface="Noto Sans TC"/>
+                <a:cs typeface="Noto Sans TC"/>
+              </a:rPr>
+              <a:t> over </a:t>
+            </a:r>
+            <a:r>
+              <a:rPr sz="1300" b="1">
+                <a:solidFill>
+                  <a:srgbClr val="6FC7CF"/>
+                </a:solidFill>
+                <a:latin typeface="Noto Sans TC"/>
+                <a:ea typeface="Noto Sans TC"/>
+                <a:cs typeface="Noto Sans TC"/>
+              </a:rPr>
+              <a:t>7,322</a:t>
+            </a:r>
+            <a:r>
+              <a:rPr sz="1300" b="0">
+                <a:solidFill>
+                  <a:srgbClr val="E8E6E1"/>
+                </a:solidFill>
+                <a:latin typeface="Noto Sans TC"/>
+                <a:ea typeface="Noto Sans TC"/>
+                <a:cs typeface="Noto Sans TC"/>
+              </a:rPr>
+              <a:t>。同一天發現 models/onnx/ 是重訓前的權重匯出，model-free floor 的比較是用舊權重打新 patch。</a:t>
+            </a:r>
+          </a:p>
+        </p:txBody>
+      </p:sp>
+      <p:sp>
+        <p:nvSpPr>
+          <p:cNvPr id="19" name="Rectangle 18"/>
+          <p:cNvSpPr/>
+          <p:nvPr/>
+        </p:nvSpPr>
+        <p:spPr>
+          <a:xfrm>
+            <a:off x="320040" y="5148072"/>
+            <a:ext cx="11521440" cy="393192"/>
+          </a:xfrm>
+          <a:prstGeom prst="rect">
+            <a:avLst/>
+          </a:prstGeom>
+          <a:solidFill>
+            <a:srgbClr val="2B2416"/>
+          </a:solidFill>
+          <a:ln>
+            <a:noFill/>
+          </a:ln>
+          <a:effectLst/>
+        </p:spPr>
+        <p:style>
+          <a:lnRef idx="1">
+            <a:schemeClr val="accent1"/>
+          </a:lnRef>
+          <a:fillRef idx="3">
+            <a:schemeClr val="accent1"/>
+          </a:fillRef>
+          <a:effectRef idx="2">
+            <a:schemeClr val="accent1"/>
+          </a:effectRef>
+          <a:fontRef idx="minor">
+            <a:schemeClr val="lt1"/>
+          </a:fontRef>
+        </p:style>
+        <p:txBody>
+          <a:bodyPr rtlCol="0" anchor="ctr"/>
+          <a:lstStyle/>
+          <a:p>
+            <a:pPr algn="ctr"/>
+          </a:p>
+        </p:txBody>
+      </p:sp>
+      <p:sp>
+        <p:nvSpPr>
+          <p:cNvPr id="20" name="TextBox 19"/>
+          <p:cNvSpPr txBox="1"/>
+          <p:nvPr/>
+        </p:nvSpPr>
+        <p:spPr>
+          <a:xfrm>
+            <a:off x="457200" y="5184648"/>
+            <a:ext cx="1325880" cy="320040"/>
+          </a:xfrm>
+          <a:prstGeom prst="rect">
+            <a:avLst/>
+          </a:prstGeom>
+          <a:noFill/>
+        </p:spPr>
+        <p:txBody>
+          <a:bodyPr wrap="square">
+            <a:spAutoFit/>
+          </a:bodyPr>
+          <a:lstStyle/>
+          <a:p>
+            <a:pPr>
+              <a:lnSpc>
+                <a:spcPct val="115000"/>
+              </a:lnSpc>
+            </a:pPr>
+            <a:r>
+              <a:rPr sz="1300" b="1">
+                <a:solidFill>
+                  <a:srgbClr val="E2B45F"/>
+                </a:solidFill>
+                <a:latin typeface="Noto Sans TC"/>
+                <a:ea typeface="Noto Sans TC"/>
+                <a:cs typeface="Noto Sans TC"/>
+              </a:rPr>
+              <a:t>錯在哪</a:t>
+            </a:r>
+          </a:p>
+        </p:txBody>
+      </p:sp>
+      <p:sp>
+        <p:nvSpPr>
+          <p:cNvPr id="21" name="TextBox 20"/>
+          <p:cNvSpPr txBox="1"/>
+          <p:nvPr/>
+        </p:nvSpPr>
+        <p:spPr>
+          <a:xfrm>
+            <a:off x="1828800" y="5184648"/>
+            <a:ext cx="9875520" cy="320040"/>
+          </a:xfrm>
+          <a:prstGeom prst="rect">
+            <a:avLst/>
+          </a:prstGeom>
+          <a:noFill/>
+        </p:spPr>
+        <p:txBody>
+          <a:bodyPr wrap="square">
+            <a:spAutoFit/>
+          </a:bodyPr>
+          <a:lstStyle/>
+          <a:p>
+            <a:pPr>
+              <a:lnSpc>
+                <a:spcPct val="112000"/>
+              </a:lnSpc>
+            </a:pPr>
+            <a:r>
+              <a:rPr sz="1300" b="0">
+                <a:solidFill>
+                  <a:srgbClr val="E8E6E1"/>
+                </a:solidFill>
+                <a:latin typeface="Noto Sans TC"/>
+                <a:ea typeface="Noto Sans TC"/>
+                <a:cs typeface="Noto Sans TC"/>
+              </a:rPr>
+              <a:t>程式對、流程對（對位開了、資料變了、重訓了、門檻重掃了），只有文字被留在原地——在讀者第一眼看的地方。</a:t>
+            </a:r>
+          </a:p>
+        </p:txBody>
+      </p:sp>
+      <p:sp>
+        <p:nvSpPr>
+          <p:cNvPr id="22" name="Rectangle 21"/>
+          <p:cNvSpPr/>
+          <p:nvPr/>
+        </p:nvSpPr>
+        <p:spPr>
+          <a:xfrm>
+            <a:off x="320040" y="5596128"/>
+            <a:ext cx="11521440" cy="640080"/>
+          </a:xfrm>
+          <a:prstGeom prst="rect">
+            <a:avLst/>
+          </a:prstGeom>
+          <a:solidFill>
+            <a:srgbClr val="16292B"/>
+          </a:solidFill>
+          <a:ln>
+            <a:noFill/>
+          </a:ln>
+          <a:effectLst/>
+        </p:spPr>
+        <p:style>
+          <a:lnRef idx="1">
+            <a:schemeClr val="accent1"/>
+          </a:lnRef>
+          <a:fillRef idx="3">
+            <a:schemeClr val="accent1"/>
+          </a:fillRef>
+          <a:effectRef idx="2">
+            <a:schemeClr val="accent1"/>
+          </a:effectRef>
+          <a:fontRef idx="minor">
+            <a:schemeClr val="lt1"/>
+          </a:fontRef>
+        </p:style>
+        <p:txBody>
+          <a:bodyPr rtlCol="0" anchor="ctr"/>
+          <a:lstStyle/>
+          <a:p>
+            <a:pPr algn="ctr"/>
+          </a:p>
+        </p:txBody>
+      </p:sp>
+      <p:sp>
+        <p:nvSpPr>
+          <p:cNvPr id="23" name="TextBox 22"/>
+          <p:cNvSpPr txBox="1"/>
+          <p:nvPr/>
+        </p:nvSpPr>
+        <p:spPr>
+          <a:xfrm>
+            <a:off x="457200" y="5632704"/>
+            <a:ext cx="1325880" cy="566928"/>
+          </a:xfrm>
+          <a:prstGeom prst="rect">
+            <a:avLst/>
+          </a:prstGeom>
+          <a:noFill/>
+        </p:spPr>
+        <p:txBody>
+          <a:bodyPr wrap="square">
+            <a:spAutoFit/>
+          </a:bodyPr>
+          <a:lstStyle/>
+          <a:p>
+            <a:pPr>
+              <a:lnSpc>
+                <a:spcPct val="115000"/>
+              </a:lnSpc>
+            </a:pPr>
+            <a:r>
+              <a:rPr sz="1300" b="1">
+                <a:solidFill>
+                  <a:srgbClr val="6FC7CF"/>
+                </a:solidFill>
+                <a:latin typeface="Noto Sans TC"/>
+                <a:ea typeface="Noto Sans TC"/>
+                <a:cs typeface="Noto Sans TC"/>
+              </a:rPr>
+              <a:t>產生的規則</a:t>
+            </a:r>
+          </a:p>
+        </p:txBody>
+      </p:sp>
+      <p:sp>
+        <p:nvSpPr>
+          <p:cNvPr id="24" name="TextBox 23"/>
+          <p:cNvSpPr txBox="1"/>
+          <p:nvPr/>
+        </p:nvSpPr>
+        <p:spPr>
+          <a:xfrm>
+            <a:off x="1828800" y="5632704"/>
+            <a:ext cx="9875520" cy="566928"/>
+          </a:xfrm>
+          <a:prstGeom prst="rect">
+            <a:avLst/>
+          </a:prstGeom>
+          <a:noFill/>
+        </p:spPr>
+        <p:txBody>
+          <a:bodyPr wrap="square">
+            <a:spAutoFit/>
+          </a:bodyPr>
+          <a:lstStyle/>
+          <a:p>
+            <a:pPr>
+              <a:lnSpc>
+                <a:spcPct val="112000"/>
+              </a:lnSpc>
+            </a:pPr>
+            <a:r>
+              <a:rPr sz="1300" b="0">
+                <a:solidFill>
+                  <a:srgbClr val="E8E6E1"/>
+                </a:solidFill>
+                <a:latin typeface="Noto Sans TC"/>
+                <a:ea typeface="Noto Sans TC"/>
+                <a:cs typeface="Noto Sans TC"/>
+              </a:rPr>
+              <a:t>第 </a:t>
+            </a:r>
+            <a:r>
+              <a:rPr sz="1300" b="1">
+                <a:solidFill>
+                  <a:srgbClr val="6FC7CF"/>
+                </a:solidFill>
+                <a:latin typeface="Noto Sans TC"/>
+                <a:ea typeface="Noto Sans TC"/>
+                <a:cs typeface="Noto Sans TC"/>
+              </a:rPr>
+              <a:t>19</a:t>
+            </a:r>
+            <a:r>
+              <a:rPr sz="1300" b="0">
+                <a:solidFill>
+                  <a:srgbClr val="E8E6E1"/>
+                </a:solidFill>
+                <a:latin typeface="Noto Sans TC"/>
+                <a:ea typeface="Noto Sans TC"/>
+                <a:cs typeface="Noto Sans TC"/>
+              </a:rPr>
+              <a:t> 條 invariant：發表的數字要指名它來自哪個 run；舊數字可以出現，但只能在一段標日期的文字裡（「這裡在 </a:t>
+            </a:r>
+            <a:r>
+              <a:rPr sz="1300" b="1">
+                <a:solidFill>
+                  <a:srgbClr val="6FC7CF"/>
+                </a:solidFill>
+                <a:latin typeface="Noto Sans TC"/>
+                <a:ea typeface="Noto Sans TC"/>
+                <a:cs typeface="Noto Sans TC"/>
+              </a:rPr>
+              <a:t>08-24</a:t>
+            </a:r>
+            <a:r>
+              <a:rPr sz="1300" b="0">
+                <a:solidFill>
+                  <a:srgbClr val="E8E6E1"/>
+                </a:solidFill>
+                <a:latin typeface="Noto Sans TC"/>
+                <a:ea typeface="Noto Sans TC"/>
+                <a:cs typeface="Noto Sans TC"/>
+              </a:rPr>
+              <a:t> 之前寫 </a:t>
+            </a:r>
+            <a:r>
+              <a:rPr sz="1300" b="1">
+                <a:solidFill>
+                  <a:srgbClr val="6FC7CF"/>
+                </a:solidFill>
+                <a:latin typeface="Noto Sans TC"/>
+                <a:ea typeface="Noto Sans TC"/>
+                <a:cs typeface="Noto Sans TC"/>
+              </a:rPr>
+              <a:t>56.2%</a:t>
+            </a:r>
+            <a:r>
+              <a:rPr sz="1300" b="0">
+                <a:solidFill>
+                  <a:srgbClr val="E8E6E1"/>
+                </a:solidFill>
+                <a:latin typeface="Noto Sans TC"/>
+                <a:ea typeface="Noto Sans TC"/>
+                <a:cs typeface="Noto Sans TC"/>
+              </a:rPr>
+              <a:t>」是讀者需要的那句）。重新匯出進 retrain chain。</a:t>
+            </a:r>
+          </a:p>
+        </p:txBody>
+      </p:sp>
+      <p:sp>
+        <p:nvSpPr>
+          <p:cNvPr id="25" name="TextBox 24"/>
           <p:cNvSpPr txBox="1"/>
           <p:nvPr/>
         </p:nvSpPr>
@@ -30680,7 +30694,7 @@
       </p:sp>
       <p:sp>
         <p:nvSpPr>
-          <p:cNvPr id="5" name="TextBox 4"/>
+          <p:cNvPr id="26" name="TextBox 25"/>
           <p:cNvSpPr txBox="1"/>
           <p:nvPr/>
         </p:nvSpPr>
@@ -30708,13 +30722,13 @@
             <a:r>
               <a:rPr sz="1000" b="0">
                 <a:solidFill>
-                  <a:srgbClr val="9AA0A6"/>
+                  <a:srgbClr val="6FC7CF"/>
                 </a:solidFill>
                 <a:latin typeface="IBM Plex Mono"/>
                 <a:ea typeface="Noto Sans TC"/>
                 <a:cs typeface="Noto Sans TC"/>
               </a:rPr>
-              <a:t>31 / 39</a:t>
+              <a:t>★ 主線 9/9 · 31 / 40</a:t>
             </a:r>
           </a:p>
         </p:txBody>
@@ -30781,534 +30795,226 @@
                 <a:ea typeface="Noto Sans TC"/>
                 <a:cs typeface="Noto Sans TC"/>
               </a:rPr>
-              <a:t>附錄 A · 主線複判模型的訓練曲線</a:t>
-            </a:r>
-          </a:p>
-        </p:txBody>
-      </p:sp>
-      <p:pic>
-        <p:nvPicPr>
-          <p:cNvPr id="3" name="Picture 2" descr="training_curves.png"/>
-          <p:cNvPicPr>
-            <a:picLocks noChangeAspect="1"/>
-          </p:cNvPicPr>
-          <p:nvPr/>
-        </p:nvPicPr>
-        <p:blipFill>
-          <a:blip r:embed="rId2"/>
-          <a:stretch>
-            <a:fillRect/>
-          </a:stretch>
-        </p:blipFill>
-        <p:spPr>
-          <a:xfrm>
-            <a:off x="563727" y="1188720"/>
-            <a:ext cx="11064240" cy="3503676"/>
-          </a:xfrm>
-          <a:prstGeom prst="rect">
-            <a:avLst/>
-          </a:prstGeom>
-        </p:spPr>
-      </p:pic>
+              <a:t>還沒做的，和為什麼沒做</a:t>
+            </a:r>
+          </a:p>
+        </p:txBody>
+      </p:sp>
+      <p:sp>
+        <p:nvSpPr>
+          <p:cNvPr id="3" name="TextBox 2"/>
+          <p:cNvSpPr txBox="1"/>
+          <p:nvPr/>
+        </p:nvSpPr>
+        <p:spPr>
+          <a:xfrm>
+            <a:off x="548640" y="1280160"/>
+            <a:ext cx="11064240" cy="5029200"/>
+          </a:xfrm>
+          <a:prstGeom prst="rect">
+            <a:avLst/>
+          </a:prstGeom>
+          <a:noFill/>
+        </p:spPr>
+        <p:txBody>
+          <a:bodyPr wrap="square">
+            <a:spAutoFit/>
+          </a:bodyPr>
+          <a:lstStyle/>
+          <a:p>
+            <a:pPr>
+              <a:lnSpc>
+                <a:spcPct val="125000"/>
+              </a:lnSpc>
+            </a:pPr>
+            <a:r>
+              <a:rPr sz="1800" b="0">
+                <a:solidFill>
+                  <a:srgbClr val="6FC7CF"/>
+                </a:solidFill>
+                <a:latin typeface="Noto Sans TC"/>
+                <a:ea typeface="Noto Sans TC"/>
+                <a:cs typeface="Noto Sans TC"/>
+              </a:rPr>
+              <a:t>• </a:t>
+            </a:r>
+            <a:r>
+              <a:rPr sz="1800" b="0">
+                <a:solidFill>
+                  <a:srgbClr val="E8E6E1"/>
+                </a:solidFill>
+                <a:latin typeface="Noto Sans TC"/>
+                <a:ea typeface="Noto Sans TC"/>
+                <a:cs typeface="Noto Sans TC"/>
+              </a:rPr>
+              <a:t>Shadow mode（模型跟著現有流程跑、只記錄不決定）：正確的下一步，但沒有產線——在這裡建等於拿種出來的資料跟自己比。拒絕，不是忘記。</a:t>
+            </a:r>
+          </a:p>
+          <a:p>
+            <a:pPr>
+              <a:lnSpc>
+                <a:spcPct val="125000"/>
+              </a:lnSpc>
+            </a:pPr>
+            <a:r>
+              <a:rPr sz="1800" b="0">
+                <a:solidFill>
+                  <a:srgbClr val="6FC7CF"/>
+                </a:solidFill>
+                <a:latin typeface="Noto Sans TC"/>
+                <a:ea typeface="Noto Sans TC"/>
+                <a:cs typeface="Noto Sans TC"/>
+              </a:rPr>
+              <a:t>• </a:t>
+            </a:r>
+            <a:r>
+              <a:rPr sz="1800" b="0">
+                <a:solidFill>
+                  <a:srgbClr val="E8E6E1"/>
+                </a:solidFill>
+                <a:latin typeface="Noto Sans TC"/>
+                <a:ea typeface="Noto Sans TC"/>
+                <a:cs typeface="Noto Sans TC"/>
+              </a:rPr>
+              <a:t>依賴參數（第一步的結果餵第二步）：知道長什麼樣，等真的有人問出那種題。</a:t>
+            </a:r>
+          </a:p>
+          <a:p>
+            <a:pPr>
+              <a:lnSpc>
+                <a:spcPct val="125000"/>
+              </a:lnSpc>
+            </a:pPr>
+            <a:r>
+              <a:rPr sz="1800" b="0">
+                <a:solidFill>
+                  <a:srgbClr val="6FC7CF"/>
+                </a:solidFill>
+                <a:latin typeface="Noto Sans TC"/>
+                <a:ea typeface="Noto Sans TC"/>
+                <a:cs typeface="Noto Sans TC"/>
+              </a:rPr>
+              <a:t>• </a:t>
+            </a:r>
+            <a:r>
+              <a:rPr sz="1800" b="0">
+                <a:solidFill>
+                  <a:srgbClr val="E8E6E1"/>
+                </a:solidFill>
+                <a:latin typeface="Noto Sans TC"/>
+                <a:ea typeface="Noto Sans TC"/>
+                <a:cs typeface="Noto Sans TC"/>
+              </a:rPr>
+              <a:t>用作業員的更正重訓：資料庫裡真的人判過的只有五筆，四筆已刪；種出來的資料重訓是自己教自己。</a:t>
+            </a:r>
+          </a:p>
+          <a:p>
+            <a:pPr>
+              <a:lnSpc>
+                <a:spcPct val="125000"/>
+              </a:lnSpc>
+            </a:pPr>
+            <a:r>
+              <a:rPr sz="1800" b="0">
+                <a:solidFill>
+                  <a:srgbClr val="6FC7CF"/>
+                </a:solidFill>
+                <a:latin typeface="Noto Sans TC"/>
+                <a:ea typeface="Noto Sans TC"/>
+                <a:cs typeface="Noto Sans TC"/>
+              </a:rPr>
+              <a:t>• </a:t>
+            </a:r>
+            <a:r>
+              <a:rPr sz="1800" b="0">
+                <a:solidFill>
+                  <a:srgbClr val="E8E6E1"/>
+                </a:solidFill>
+                <a:latin typeface="Noto Sans TC"/>
+                <a:ea typeface="Noto Sans TC"/>
+                <a:cs typeface="Noto Sans TC"/>
+              </a:rPr>
+              <a:t>電測：關掉 short 那 </a:t>
+            </a:r>
+            <a:r>
+              <a:rPr sz="1800" b="1">
+                <a:solidFill>
+                  <a:srgbClr val="6FC7CF"/>
+                </a:solidFill>
+                <a:latin typeface="Noto Sans TC"/>
+                <a:ea typeface="Noto Sans TC"/>
+                <a:cs typeface="Noto Sans TC"/>
+              </a:rPr>
+              <a:t>1.55%</a:t>
+            </a:r>
+            <a:r>
+              <a:rPr sz="1800" b="0">
+                <a:solidFill>
+                  <a:srgbClr val="E8E6E1"/>
+                </a:solidFill>
+                <a:latin typeface="Noto Sans TC"/>
+                <a:ea typeface="Noto Sans TC"/>
+                <a:cs typeface="Noto Sans TC"/>
+              </a:rPr>
+              <a:t> 漏網的唯一方法，不在這個系統裡，WI-</a:t>
+            </a:r>
+            <a:r>
+              <a:rPr sz="1800" b="1">
+                <a:solidFill>
+                  <a:srgbClr val="6FC7CF"/>
+                </a:solidFill>
+                <a:latin typeface="Noto Sans TC"/>
+                <a:ea typeface="Noto Sans TC"/>
+                <a:cs typeface="Noto Sans TC"/>
+              </a:rPr>
+              <a:t>201</a:t>
+            </a:r>
+            <a:r>
+              <a:rPr sz="1800" b="0">
+                <a:solidFill>
+                  <a:srgbClr val="E8E6E1"/>
+                </a:solidFill>
+                <a:latin typeface="Noto Sans TC"/>
+                <a:ea typeface="Noto Sans TC"/>
+                <a:cs typeface="Noto Sans TC"/>
+              </a:rPr>
+              <a:t> 本來就寫了。</a:t>
+            </a:r>
+          </a:p>
+          <a:p>
+            <a:pPr>
+              <a:lnSpc>
+                <a:spcPct val="125000"/>
+              </a:lnSpc>
+            </a:pPr>
+            <a:r>
+              <a:rPr sz="1800" b="0">
+                <a:solidFill>
+                  <a:srgbClr val="6FC7CF"/>
+                </a:solidFill>
+                <a:latin typeface="Noto Sans TC"/>
+                <a:ea typeface="Noto Sans TC"/>
+                <a:cs typeface="Noto Sans TC"/>
+              </a:rPr>
+              <a:t>• </a:t>
+            </a:r>
+            <a:r>
+              <a:rPr sz="1800" b="0">
+                <a:solidFill>
+                  <a:srgbClr val="E8E6E1"/>
+                </a:solidFill>
+                <a:latin typeface="Noto Sans TC"/>
+                <a:ea typeface="Noto Sans TC"/>
+                <a:cs typeface="Noto Sans TC"/>
+              </a:rPr>
+              <a:t>一句收尾：每個門檻引得到檔案、每個數字在 benchmarks 裡、每個錯有它產生的測試。</a:t>
+            </a:r>
+          </a:p>
+        </p:txBody>
+      </p:sp>
       <p:sp>
         <p:nvSpPr>
           <p:cNvPr id="4" name="TextBox 3"/>
-          <p:cNvSpPr txBox="1"/>
-          <p:nvPr/>
-        </p:nvSpPr>
-        <p:spPr>
-          <a:xfrm>
-            <a:off x="548640" y="4829556"/>
-            <a:ext cx="5440680" cy="976884"/>
-          </a:xfrm>
-          <a:prstGeom prst="rect">
-            <a:avLst/>
-          </a:prstGeom>
-          <a:noFill/>
-        </p:spPr>
-        <p:txBody>
-          <a:bodyPr wrap="square">
-            <a:spAutoFit/>
-          </a:bodyPr>
-          <a:lstStyle/>
-          <a:p>
-            <a:pPr>
-              <a:lnSpc>
-                <a:spcPct val="125000"/>
-              </a:lnSpc>
-            </a:pPr>
-            <a:r>
-              <a:rPr sz="1200" b="0">
-                <a:solidFill>
-                  <a:srgbClr val="6FC7CF"/>
-                </a:solidFill>
-                <a:latin typeface="Noto Sans TC"/>
-                <a:ea typeface="Noto Sans TC"/>
-                <a:cs typeface="Noto Sans TC"/>
-              </a:rPr>
-              <a:t>• </a:t>
-            </a:r>
-            <a:r>
-              <a:rPr sz="1200" b="0">
-                <a:solidFill>
-                  <a:srgbClr val="E8E6E1"/>
-                </a:solidFill>
-                <a:latin typeface="Noto Sans TC"/>
-                <a:ea typeface="Noto Sans TC"/>
-                <a:cs typeface="Noto Sans TC"/>
-              </a:rPr>
-              <a:t>ResNet-</a:t>
-            </a:r>
-            <a:r>
-              <a:rPr sz="1200" b="1">
-                <a:solidFill>
-                  <a:srgbClr val="6FC7CF"/>
-                </a:solidFill>
-                <a:latin typeface="Noto Sans TC"/>
-                <a:ea typeface="Noto Sans TC"/>
-                <a:cs typeface="Noto Sans TC"/>
-              </a:rPr>
-              <a:t>18</a:t>
-            </a:r>
-            <a:r>
-              <a:rPr sz="1200" b="0">
-                <a:solidFill>
-                  <a:srgbClr val="E8E6E1"/>
-                </a:solidFill>
-                <a:latin typeface="Noto Sans TC"/>
-                <a:ea typeface="Noto Sans TC"/>
-                <a:cs typeface="Noto Sans TC"/>
-              </a:rPr>
-              <a:t>，</a:t>
-            </a:r>
-            <a:r>
-              <a:rPr sz="1200" b="1">
-                <a:solidFill>
-                  <a:srgbClr val="6FC7CF"/>
-                </a:solidFill>
-                <a:latin typeface="Noto Sans TC"/>
-                <a:ea typeface="Noto Sans TC"/>
-                <a:cs typeface="Noto Sans TC"/>
-              </a:rPr>
-              <a:t>3×64×64</a:t>
-            </a:r>
-            <a:r>
-              <a:rPr sz="1200" b="0">
-                <a:solidFill>
-                  <a:srgbClr val="E8E6E1"/>
-                </a:solidFill>
-                <a:latin typeface="Noto Sans TC"/>
-                <a:ea typeface="Noto Sans TC"/>
-                <a:cs typeface="Noto Sans TC"/>
-              </a:rPr>
-              <a:t> 輸入，</a:t>
-            </a:r>
-            <a:r>
-              <a:rPr sz="1200" b="1">
-                <a:solidFill>
-                  <a:srgbClr val="6FC7CF"/>
-                </a:solidFill>
-                <a:latin typeface="Noto Sans TC"/>
-                <a:ea typeface="Noto Sans TC"/>
-                <a:cs typeface="Noto Sans TC"/>
-              </a:rPr>
-              <a:t>10</a:t>
-            </a:r>
-            <a:r>
-              <a:rPr sz="1200" b="0">
-                <a:solidFill>
-                  <a:srgbClr val="E8E6E1"/>
-                </a:solidFill>
-                <a:latin typeface="Noto Sans TC"/>
-                <a:ea typeface="Noto Sans TC"/>
-                <a:cs typeface="Noto Sans TC"/>
-              </a:rPr>
-              <a:t> 個 epoch，M</a:t>
-            </a:r>
-            <a:r>
-              <a:rPr sz="1200" b="1">
-                <a:solidFill>
-                  <a:srgbClr val="6FC7CF"/>
-                </a:solidFill>
-                <a:latin typeface="Noto Sans TC"/>
-                <a:ea typeface="Noto Sans TC"/>
-                <a:cs typeface="Noto Sans TC"/>
-              </a:rPr>
-              <a:t>5</a:t>
-            </a:r>
-            <a:r>
-              <a:rPr sz="1200" b="0">
-                <a:solidFill>
-                  <a:srgbClr val="E8E6E1"/>
-                </a:solidFill>
-                <a:latin typeface="Noto Sans TC"/>
-                <a:ea typeface="Noto Sans TC"/>
-                <a:cs typeface="Noto Sans TC"/>
-              </a:rPr>
-              <a:t> Air 上約 </a:t>
-            </a:r>
-            <a:r>
-              <a:rPr sz="1200" b="1">
-                <a:solidFill>
-                  <a:srgbClr val="6FC7CF"/>
-                </a:solidFill>
-                <a:latin typeface="Noto Sans TC"/>
-                <a:ea typeface="Noto Sans TC"/>
-                <a:cs typeface="Noto Sans TC"/>
-              </a:rPr>
-              <a:t>4</a:t>
-            </a:r>
-            <a:r>
-              <a:rPr sz="1200" b="0">
-                <a:solidFill>
-                  <a:srgbClr val="E8E6E1"/>
-                </a:solidFill>
-                <a:latin typeface="Noto Sans TC"/>
-                <a:ea typeface="Noto Sans TC"/>
-                <a:cs typeface="Noto Sans TC"/>
-              </a:rPr>
-              <a:t> 分鐘（每 epoch </a:t>
-            </a:r>
-            <a:r>
-              <a:rPr sz="1200" b="1">
-                <a:solidFill>
-                  <a:srgbClr val="6FC7CF"/>
-                </a:solidFill>
-                <a:latin typeface="Noto Sans TC"/>
-                <a:ea typeface="Noto Sans TC"/>
-                <a:cs typeface="Noto Sans TC"/>
-              </a:rPr>
-              <a:t>6</a:t>
-            </a:r>
-            <a:r>
-              <a:rPr sz="1200" b="0">
-                <a:solidFill>
-                  <a:srgbClr val="E8E6E1"/>
-                </a:solidFill>
-                <a:latin typeface="Noto Sans TC"/>
-                <a:ea typeface="Noto Sans TC"/>
-                <a:cs typeface="Noto Sans TC"/>
-              </a:rPr>
-              <a:t> 秒）</a:t>
-            </a:r>
-          </a:p>
-          <a:p>
-            <a:pPr>
-              <a:lnSpc>
-                <a:spcPct val="125000"/>
-              </a:lnSpc>
-            </a:pPr>
-            <a:r>
-              <a:rPr sz="1200" b="0">
-                <a:solidFill>
-                  <a:srgbClr val="6FC7CF"/>
-                </a:solidFill>
-                <a:latin typeface="Noto Sans TC"/>
-                <a:ea typeface="Noto Sans TC"/>
-                <a:cs typeface="Noto Sans TC"/>
-              </a:rPr>
-              <a:t>• </a:t>
-            </a:r>
-            <a:r>
-              <a:rPr sz="1200" b="0">
-                <a:solidFill>
-                  <a:srgbClr val="E8E6E1"/>
-                </a:solidFill>
-                <a:latin typeface="Noto Sans TC"/>
-                <a:ea typeface="Noto Sans TC"/>
-                <a:cs typeface="Noto Sans TC"/>
-              </a:rPr>
-              <a:t>val_accuracy 第 </a:t>
-            </a:r>
-            <a:r>
-              <a:rPr sz="1200" b="1">
-                <a:solidFill>
-                  <a:srgbClr val="6FC7CF"/>
-                </a:solidFill>
-                <a:latin typeface="Noto Sans TC"/>
-                <a:ea typeface="Noto Sans TC"/>
-                <a:cs typeface="Noto Sans TC"/>
-              </a:rPr>
-              <a:t>2</a:t>
-            </a:r>
-            <a:r>
-              <a:rPr sz="1200" b="0">
-                <a:solidFill>
-                  <a:srgbClr val="E8E6E1"/>
-                </a:solidFill>
-                <a:latin typeface="Noto Sans TC"/>
-                <a:ea typeface="Noto Sans TC"/>
-                <a:cs typeface="Noto Sans TC"/>
-              </a:rPr>
-              <a:t> 個 epoch 就過 </a:t>
-            </a:r>
-            <a:r>
-              <a:rPr sz="1200" b="1">
-                <a:solidFill>
-                  <a:srgbClr val="6FC7CF"/>
-                </a:solidFill>
-                <a:latin typeface="Noto Sans TC"/>
-                <a:ea typeface="Noto Sans TC"/>
-                <a:cs typeface="Noto Sans TC"/>
-              </a:rPr>
-              <a:t>97%</a:t>
-            </a:r>
-            <a:r>
-              <a:rPr sz="1200" b="0">
-                <a:solidFill>
-                  <a:srgbClr val="E8E6E1"/>
-                </a:solidFill>
-                <a:latin typeface="Noto Sans TC"/>
-                <a:ea typeface="Noto Sans TC"/>
-                <a:cs typeface="Noto Sans TC"/>
-              </a:rPr>
-              <a:t>，之後幾乎平——它不是選模型的指標</a:t>
-            </a:r>
-          </a:p>
-          <a:p>
-            <a:pPr>
-              <a:lnSpc>
-                <a:spcPct val="125000"/>
-              </a:lnSpc>
-            </a:pPr>
-            <a:r>
-              <a:rPr sz="1200" b="0">
-                <a:solidFill>
-                  <a:srgbClr val="6FC7CF"/>
-                </a:solidFill>
-                <a:latin typeface="Noto Sans TC"/>
-                <a:ea typeface="Noto Sans TC"/>
-                <a:cs typeface="Noto Sans TC"/>
-              </a:rPr>
-              <a:t>• </a:t>
-            </a:r>
-            <a:r>
-              <a:rPr sz="1200" b="0">
-                <a:solidFill>
-                  <a:srgbClr val="E8E6E1"/>
-                </a:solidFill>
-                <a:latin typeface="Noto Sans TC"/>
-                <a:ea typeface="Noto Sans TC"/>
-                <a:cs typeface="Noto Sans TC"/>
-              </a:rPr>
-              <a:t>val_review_reduction 從 </a:t>
-            </a:r>
-            <a:r>
-              <a:rPr sz="1200" b="1">
-                <a:solidFill>
-                  <a:srgbClr val="6FC7CF"/>
-                </a:solidFill>
-                <a:latin typeface="Noto Sans TC"/>
-                <a:ea typeface="Noto Sans TC"/>
-                <a:cs typeface="Noto Sans TC"/>
-              </a:rPr>
-              <a:t>0.40</a:t>
-            </a:r>
-            <a:r>
-              <a:rPr sz="1200" b="0">
-                <a:solidFill>
-                  <a:srgbClr val="E8E6E1"/>
-                </a:solidFill>
-                <a:latin typeface="Noto Sans TC"/>
-                <a:ea typeface="Noto Sans TC"/>
-                <a:cs typeface="Noto Sans TC"/>
-              </a:rPr>
-              <a:t> 爬到 </a:t>
-            </a:r>
-            <a:r>
-              <a:rPr sz="1200" b="1">
-                <a:solidFill>
-                  <a:srgbClr val="6FC7CF"/>
-                </a:solidFill>
-                <a:latin typeface="Noto Sans TC"/>
-                <a:ea typeface="Noto Sans TC"/>
-                <a:cs typeface="Noto Sans TC"/>
-              </a:rPr>
-              <a:t>0.45</a:t>
-            </a:r>
-            <a:r>
-              <a:rPr sz="1200" b="0">
-                <a:solidFill>
-                  <a:srgbClr val="E8E6E1"/>
-                </a:solidFill>
-                <a:latin typeface="Noto Sans TC"/>
-                <a:ea typeface="Noto Sans TC"/>
-                <a:cs typeface="Noto Sans TC"/>
-              </a:rPr>
-              <a:t> 上下，第 </a:t>
-            </a:r>
-            <a:r>
-              <a:rPr sz="1200" b="1">
-                <a:solidFill>
-                  <a:srgbClr val="6FC7CF"/>
-                </a:solidFill>
-                <a:latin typeface="Noto Sans TC"/>
-                <a:ea typeface="Noto Sans TC"/>
-                <a:cs typeface="Noto Sans TC"/>
-              </a:rPr>
-              <a:t>9</a:t>
-            </a:r>
-            <a:r>
-              <a:rPr sz="1200" b="0">
-                <a:solidFill>
-                  <a:srgbClr val="E8E6E1"/>
-                </a:solidFill>
-                <a:latin typeface="Noto Sans TC"/>
-                <a:ea typeface="Noto Sans TC"/>
-                <a:cs typeface="Noto Sans TC"/>
-              </a:rPr>
-              <a:t> 個 epoch 最高；選 checkpoint 看這條，因為頭條是它</a:t>
-            </a:r>
-          </a:p>
-        </p:txBody>
-      </p:sp>
-      <p:sp>
-        <p:nvSpPr>
-          <p:cNvPr id="5" name="TextBox 4"/>
-          <p:cNvSpPr txBox="1"/>
-          <p:nvPr/>
-        </p:nvSpPr>
-        <p:spPr>
-          <a:xfrm>
-            <a:off x="6172200" y="4829556"/>
-            <a:ext cx="5440680" cy="976884"/>
-          </a:xfrm>
-          <a:prstGeom prst="rect">
-            <a:avLst/>
-          </a:prstGeom>
-          <a:noFill/>
-        </p:spPr>
-        <p:txBody>
-          <a:bodyPr wrap="square">
-            <a:spAutoFit/>
-          </a:bodyPr>
-          <a:lstStyle/>
-          <a:p>
-            <a:pPr>
-              <a:lnSpc>
-                <a:spcPct val="125000"/>
-              </a:lnSpc>
-            </a:pPr>
-            <a:r>
-              <a:rPr sz="1200" b="0">
-                <a:solidFill>
-                  <a:srgbClr val="6FC7CF"/>
-                </a:solidFill>
-                <a:latin typeface="Noto Sans TC"/>
-                <a:ea typeface="Noto Sans TC"/>
-                <a:cs typeface="Noto Sans TC"/>
-              </a:rPr>
-              <a:t>• </a:t>
-            </a:r>
-            <a:r>
-              <a:rPr sz="1200" b="0">
-                <a:solidFill>
-                  <a:srgbClr val="E8E6E1"/>
-                </a:solidFill>
-                <a:latin typeface="Noto Sans TC"/>
-                <a:ea typeface="Noto Sans TC"/>
-                <a:cs typeface="Noto Sans TC"/>
-              </a:rPr>
-              <a:t>train_loss 一路降到 </a:t>
-            </a:r>
-            <a:r>
-              <a:rPr sz="1200" b="1">
-                <a:solidFill>
-                  <a:srgbClr val="6FC7CF"/>
-                </a:solidFill>
-                <a:latin typeface="Noto Sans TC"/>
-                <a:ea typeface="Noto Sans TC"/>
-                <a:cs typeface="Noto Sans TC"/>
-              </a:rPr>
-              <a:t>0.02</a:t>
-            </a:r>
-            <a:r>
-              <a:rPr sz="1200" b="0">
-                <a:solidFill>
-                  <a:srgbClr val="E8E6E1"/>
-                </a:solidFill>
-                <a:latin typeface="Noto Sans TC"/>
-                <a:ea typeface="Noto Sans TC"/>
-                <a:cs typeface="Noto Sans TC"/>
-              </a:rPr>
-              <a:t> 而驗證指標不再動：再訓是在背訓練集，不是在學</a:t>
-            </a:r>
-          </a:p>
-          <a:p>
-            <a:pPr>
-              <a:lnSpc>
-                <a:spcPct val="125000"/>
-              </a:lnSpc>
-            </a:pPr>
-            <a:r>
-              <a:rPr sz="1200" b="0">
-                <a:solidFill>
-                  <a:srgbClr val="6FC7CF"/>
-                </a:solidFill>
-                <a:latin typeface="Noto Sans TC"/>
-                <a:ea typeface="Noto Sans TC"/>
-                <a:cs typeface="Noto Sans TC"/>
-              </a:rPr>
-              <a:t>• </a:t>
-            </a:r>
-            <a:r>
-              <a:rPr sz="1200" b="0">
-                <a:solidFill>
-                  <a:srgbClr val="E8E6E1"/>
-                </a:solidFill>
-                <a:latin typeface="Noto Sans TC"/>
-                <a:ea typeface="Noto Sans TC"/>
-                <a:cs typeface="Noto Sans TC"/>
-              </a:rPr>
-              <a:t>驗證集按板子切，所以這條線是對「沒看過的板子」的估計，不是對 patch 的</a:t>
-            </a:r>
-          </a:p>
-        </p:txBody>
-      </p:sp>
-      <p:sp>
-        <p:nvSpPr>
-          <p:cNvPr id="6" name="TextBox 5"/>
-          <p:cNvSpPr txBox="1"/>
-          <p:nvPr/>
-        </p:nvSpPr>
-        <p:spPr>
-          <a:xfrm>
-            <a:off x="548640" y="5897880"/>
-            <a:ext cx="11155680" cy="365760"/>
-          </a:xfrm>
-          <a:prstGeom prst="rect">
-            <a:avLst/>
-          </a:prstGeom>
-          <a:noFill/>
-        </p:spPr>
-        <p:txBody>
-          <a:bodyPr wrap="square">
-            <a:spAutoFit/>
-          </a:bodyPr>
-          <a:lstStyle/>
-          <a:p>
-            <a:pPr>
-              <a:lnSpc>
-                <a:spcPct val="115000"/>
-              </a:lnSpc>
-            </a:pPr>
-            <a:r>
-              <a:rPr sz="950" b="0">
-                <a:solidFill>
-                  <a:srgbClr val="9AA0A6"/>
-                </a:solidFill>
-                <a:latin typeface="IBM Plex Mono"/>
-                <a:ea typeface="Noto Sans TC"/>
-                <a:cs typeface="Noto Sans TC"/>
-              </a:rPr>
-              <a:t>models/history.json · train_loss / val_accuracy / val_review_reduction（≤0.5% 漏網下的驗證集省掉比例）</a:t>
-            </a:r>
-          </a:p>
-        </p:txBody>
-      </p:sp>
-      <p:sp>
-        <p:nvSpPr>
-          <p:cNvPr id="7" name="TextBox 6"/>
           <p:cNvSpPr txBox="1"/>
           <p:nvPr/>
         </p:nvSpPr>
@@ -31342,14 +31048,14 @@
                 <a:ea typeface="Noto Sans TC"/>
                 <a:cs typeface="Noto Sans TC"/>
               </a:rPr>
-              <a:t>附錄 · 備查數字</a:t>
-            </a:r>
-          </a:p>
-        </p:txBody>
-      </p:sp>
-      <p:sp>
-        <p:nvSpPr>
-          <p:cNvPr id="8" name="TextBox 7"/>
+              <a:t>收尾</a:t>
+            </a:r>
+          </a:p>
+        </p:txBody>
+      </p:sp>
+      <p:sp>
+        <p:nvSpPr>
+          <p:cNvPr id="5" name="TextBox 4"/>
           <p:cNvSpPr txBox="1"/>
           <p:nvPr/>
         </p:nvSpPr>
@@ -31383,7 +31089,7 @@
                 <a:ea typeface="Noto Sans TC"/>
                 <a:cs typeface="Noto Sans TC"/>
               </a:rPr>
-              <a:t>32 / 39</a:t>
+              <a:t>32 / 40</a:t>
             </a:r>
           </a:p>
         </p:txBody>
@@ -31397,6 +31103,675 @@
 </file>
 
 <file path=ppt/slides/slide33.xml><?xml version="1.0" encoding="utf-8"?>
+<p:sld xmlns:a="http://schemas.openxmlformats.org/drawingml/2006/main" xmlns:p="http://schemas.openxmlformats.org/presentationml/2006/main" xmlns:r="http://schemas.openxmlformats.org/officeDocument/2006/relationships">
+  <p:cSld>
+    <p:bg>
+      <p:bgPr>
+        <a:solidFill>
+          <a:srgbClr val="15171A"/>
+        </a:solidFill>
+        <a:effectLst/>
+      </p:bgPr>
+    </p:bg>
+    <p:spTree>
+      <p:nvGrpSpPr>
+        <p:cNvPr id="1" name=""/>
+        <p:cNvGrpSpPr/>
+        <p:nvPr/>
+      </p:nvGrpSpPr>
+      <p:grpSpPr/>
+      <p:sp>
+        <p:nvSpPr>
+          <p:cNvPr id="2" name="TextBox 1"/>
+          <p:cNvSpPr txBox="1"/>
+          <p:nvPr/>
+        </p:nvSpPr>
+        <p:spPr>
+          <a:xfrm>
+            <a:off x="457200" y="274320"/>
+            <a:ext cx="11247120" cy="731520"/>
+          </a:xfrm>
+          <a:prstGeom prst="rect">
+            <a:avLst/>
+          </a:prstGeom>
+          <a:noFill/>
+        </p:spPr>
+        <p:txBody>
+          <a:bodyPr wrap="square">
+            <a:spAutoFit/>
+          </a:bodyPr>
+          <a:lstStyle/>
+          <a:p>
+            <a:pPr>
+              <a:lnSpc>
+                <a:spcPct val="115000"/>
+              </a:lnSpc>
+            </a:pPr>
+            <a:r>
+              <a:rPr sz="2800" b="1">
+                <a:solidFill>
+                  <a:srgbClr val="E8E6E1"/>
+                </a:solidFill>
+                <a:latin typeface="Noto Sans TC"/>
+                <a:ea typeface="Noto Sans TC"/>
+                <a:cs typeface="Noto Sans TC"/>
+              </a:rPr>
+              <a:t>附錄 A · 主線複判模型的訓練曲線</a:t>
+            </a:r>
+          </a:p>
+        </p:txBody>
+      </p:sp>
+      <p:pic>
+        <p:nvPicPr>
+          <p:cNvPr id="3" name="Picture 2" descr="training_curves.png"/>
+          <p:cNvPicPr>
+            <a:picLocks noChangeAspect="1"/>
+          </p:cNvPicPr>
+          <p:nvPr/>
+        </p:nvPicPr>
+        <p:blipFill>
+          <a:blip r:embed="rId2"/>
+          <a:stretch>
+            <a:fillRect/>
+          </a:stretch>
+        </p:blipFill>
+        <p:spPr>
+          <a:xfrm>
+            <a:off x="563727" y="1188720"/>
+            <a:ext cx="11064240" cy="3503676"/>
+          </a:xfrm>
+          <a:prstGeom prst="rect">
+            <a:avLst/>
+          </a:prstGeom>
+        </p:spPr>
+      </p:pic>
+      <p:sp>
+        <p:nvSpPr>
+          <p:cNvPr id="4" name="TextBox 3"/>
+          <p:cNvSpPr txBox="1"/>
+          <p:nvPr/>
+        </p:nvSpPr>
+        <p:spPr>
+          <a:xfrm>
+            <a:off x="548640" y="4829556"/>
+            <a:ext cx="5440680" cy="976884"/>
+          </a:xfrm>
+          <a:prstGeom prst="rect">
+            <a:avLst/>
+          </a:prstGeom>
+          <a:noFill/>
+        </p:spPr>
+        <p:txBody>
+          <a:bodyPr wrap="square">
+            <a:spAutoFit/>
+          </a:bodyPr>
+          <a:lstStyle/>
+          <a:p>
+            <a:pPr>
+              <a:lnSpc>
+                <a:spcPct val="125000"/>
+              </a:lnSpc>
+            </a:pPr>
+            <a:r>
+              <a:rPr sz="1200" b="0">
+                <a:solidFill>
+                  <a:srgbClr val="6FC7CF"/>
+                </a:solidFill>
+                <a:latin typeface="Noto Sans TC"/>
+                <a:ea typeface="Noto Sans TC"/>
+                <a:cs typeface="Noto Sans TC"/>
+              </a:rPr>
+              <a:t>• </a:t>
+            </a:r>
+            <a:r>
+              <a:rPr sz="1200" b="0">
+                <a:solidFill>
+                  <a:srgbClr val="E8E6E1"/>
+                </a:solidFill>
+                <a:latin typeface="Noto Sans TC"/>
+                <a:ea typeface="Noto Sans TC"/>
+                <a:cs typeface="Noto Sans TC"/>
+              </a:rPr>
+              <a:t>ResNet-</a:t>
+            </a:r>
+            <a:r>
+              <a:rPr sz="1200" b="1">
+                <a:solidFill>
+                  <a:srgbClr val="6FC7CF"/>
+                </a:solidFill>
+                <a:latin typeface="Noto Sans TC"/>
+                <a:ea typeface="Noto Sans TC"/>
+                <a:cs typeface="Noto Sans TC"/>
+              </a:rPr>
+              <a:t>18</a:t>
+            </a:r>
+            <a:r>
+              <a:rPr sz="1200" b="0">
+                <a:solidFill>
+                  <a:srgbClr val="E8E6E1"/>
+                </a:solidFill>
+                <a:latin typeface="Noto Sans TC"/>
+                <a:ea typeface="Noto Sans TC"/>
+                <a:cs typeface="Noto Sans TC"/>
+              </a:rPr>
+              <a:t>，</a:t>
+            </a:r>
+            <a:r>
+              <a:rPr sz="1200" b="1">
+                <a:solidFill>
+                  <a:srgbClr val="6FC7CF"/>
+                </a:solidFill>
+                <a:latin typeface="Noto Sans TC"/>
+                <a:ea typeface="Noto Sans TC"/>
+                <a:cs typeface="Noto Sans TC"/>
+              </a:rPr>
+              <a:t>3×64×64</a:t>
+            </a:r>
+            <a:r>
+              <a:rPr sz="1200" b="0">
+                <a:solidFill>
+                  <a:srgbClr val="E8E6E1"/>
+                </a:solidFill>
+                <a:latin typeface="Noto Sans TC"/>
+                <a:ea typeface="Noto Sans TC"/>
+                <a:cs typeface="Noto Sans TC"/>
+              </a:rPr>
+              <a:t> 輸入，</a:t>
+            </a:r>
+            <a:r>
+              <a:rPr sz="1200" b="1">
+                <a:solidFill>
+                  <a:srgbClr val="6FC7CF"/>
+                </a:solidFill>
+                <a:latin typeface="Noto Sans TC"/>
+                <a:ea typeface="Noto Sans TC"/>
+                <a:cs typeface="Noto Sans TC"/>
+              </a:rPr>
+              <a:t>10</a:t>
+            </a:r>
+            <a:r>
+              <a:rPr sz="1200" b="0">
+                <a:solidFill>
+                  <a:srgbClr val="E8E6E1"/>
+                </a:solidFill>
+                <a:latin typeface="Noto Sans TC"/>
+                <a:ea typeface="Noto Sans TC"/>
+                <a:cs typeface="Noto Sans TC"/>
+              </a:rPr>
+              <a:t> 個 epoch，M</a:t>
+            </a:r>
+            <a:r>
+              <a:rPr sz="1200" b="1">
+                <a:solidFill>
+                  <a:srgbClr val="6FC7CF"/>
+                </a:solidFill>
+                <a:latin typeface="Noto Sans TC"/>
+                <a:ea typeface="Noto Sans TC"/>
+                <a:cs typeface="Noto Sans TC"/>
+              </a:rPr>
+              <a:t>5</a:t>
+            </a:r>
+            <a:r>
+              <a:rPr sz="1200" b="0">
+                <a:solidFill>
+                  <a:srgbClr val="E8E6E1"/>
+                </a:solidFill>
+                <a:latin typeface="Noto Sans TC"/>
+                <a:ea typeface="Noto Sans TC"/>
+                <a:cs typeface="Noto Sans TC"/>
+              </a:rPr>
+              <a:t> Air 上約 </a:t>
+            </a:r>
+            <a:r>
+              <a:rPr sz="1200" b="1">
+                <a:solidFill>
+                  <a:srgbClr val="6FC7CF"/>
+                </a:solidFill>
+                <a:latin typeface="Noto Sans TC"/>
+                <a:ea typeface="Noto Sans TC"/>
+                <a:cs typeface="Noto Sans TC"/>
+              </a:rPr>
+              <a:t>4</a:t>
+            </a:r>
+            <a:r>
+              <a:rPr sz="1200" b="0">
+                <a:solidFill>
+                  <a:srgbClr val="E8E6E1"/>
+                </a:solidFill>
+                <a:latin typeface="Noto Sans TC"/>
+                <a:ea typeface="Noto Sans TC"/>
+                <a:cs typeface="Noto Sans TC"/>
+              </a:rPr>
+              <a:t> 分鐘（每 epoch </a:t>
+            </a:r>
+            <a:r>
+              <a:rPr sz="1200" b="1">
+                <a:solidFill>
+                  <a:srgbClr val="6FC7CF"/>
+                </a:solidFill>
+                <a:latin typeface="Noto Sans TC"/>
+                <a:ea typeface="Noto Sans TC"/>
+                <a:cs typeface="Noto Sans TC"/>
+              </a:rPr>
+              <a:t>6</a:t>
+            </a:r>
+            <a:r>
+              <a:rPr sz="1200" b="0">
+                <a:solidFill>
+                  <a:srgbClr val="E8E6E1"/>
+                </a:solidFill>
+                <a:latin typeface="Noto Sans TC"/>
+                <a:ea typeface="Noto Sans TC"/>
+                <a:cs typeface="Noto Sans TC"/>
+              </a:rPr>
+              <a:t> 秒）</a:t>
+            </a:r>
+          </a:p>
+          <a:p>
+            <a:pPr>
+              <a:lnSpc>
+                <a:spcPct val="125000"/>
+              </a:lnSpc>
+            </a:pPr>
+            <a:r>
+              <a:rPr sz="1200" b="0">
+                <a:solidFill>
+                  <a:srgbClr val="6FC7CF"/>
+                </a:solidFill>
+                <a:latin typeface="Noto Sans TC"/>
+                <a:ea typeface="Noto Sans TC"/>
+                <a:cs typeface="Noto Sans TC"/>
+              </a:rPr>
+              <a:t>• </a:t>
+            </a:r>
+            <a:r>
+              <a:rPr sz="1200" b="0">
+                <a:solidFill>
+                  <a:srgbClr val="E8E6E1"/>
+                </a:solidFill>
+                <a:latin typeface="Noto Sans TC"/>
+                <a:ea typeface="Noto Sans TC"/>
+                <a:cs typeface="Noto Sans TC"/>
+              </a:rPr>
+              <a:t>val_accuracy 第 </a:t>
+            </a:r>
+            <a:r>
+              <a:rPr sz="1200" b="1">
+                <a:solidFill>
+                  <a:srgbClr val="6FC7CF"/>
+                </a:solidFill>
+                <a:latin typeface="Noto Sans TC"/>
+                <a:ea typeface="Noto Sans TC"/>
+                <a:cs typeface="Noto Sans TC"/>
+              </a:rPr>
+              <a:t>2</a:t>
+            </a:r>
+            <a:r>
+              <a:rPr sz="1200" b="0">
+                <a:solidFill>
+                  <a:srgbClr val="E8E6E1"/>
+                </a:solidFill>
+                <a:latin typeface="Noto Sans TC"/>
+                <a:ea typeface="Noto Sans TC"/>
+                <a:cs typeface="Noto Sans TC"/>
+              </a:rPr>
+              <a:t> 個 epoch 就過 </a:t>
+            </a:r>
+            <a:r>
+              <a:rPr sz="1200" b="1">
+                <a:solidFill>
+                  <a:srgbClr val="6FC7CF"/>
+                </a:solidFill>
+                <a:latin typeface="Noto Sans TC"/>
+                <a:ea typeface="Noto Sans TC"/>
+                <a:cs typeface="Noto Sans TC"/>
+              </a:rPr>
+              <a:t>97%</a:t>
+            </a:r>
+            <a:r>
+              <a:rPr sz="1200" b="0">
+                <a:solidFill>
+                  <a:srgbClr val="E8E6E1"/>
+                </a:solidFill>
+                <a:latin typeface="Noto Sans TC"/>
+                <a:ea typeface="Noto Sans TC"/>
+                <a:cs typeface="Noto Sans TC"/>
+              </a:rPr>
+              <a:t>，之後幾乎平——它不是選模型的指標</a:t>
+            </a:r>
+          </a:p>
+          <a:p>
+            <a:pPr>
+              <a:lnSpc>
+                <a:spcPct val="125000"/>
+              </a:lnSpc>
+            </a:pPr>
+            <a:r>
+              <a:rPr sz="1200" b="0">
+                <a:solidFill>
+                  <a:srgbClr val="6FC7CF"/>
+                </a:solidFill>
+                <a:latin typeface="Noto Sans TC"/>
+                <a:ea typeface="Noto Sans TC"/>
+                <a:cs typeface="Noto Sans TC"/>
+              </a:rPr>
+              <a:t>• </a:t>
+            </a:r>
+            <a:r>
+              <a:rPr sz="1200" b="0">
+                <a:solidFill>
+                  <a:srgbClr val="E8E6E1"/>
+                </a:solidFill>
+                <a:latin typeface="Noto Sans TC"/>
+                <a:ea typeface="Noto Sans TC"/>
+                <a:cs typeface="Noto Sans TC"/>
+              </a:rPr>
+              <a:t>val_review_reduction 從 </a:t>
+            </a:r>
+            <a:r>
+              <a:rPr sz="1200" b="1">
+                <a:solidFill>
+                  <a:srgbClr val="6FC7CF"/>
+                </a:solidFill>
+                <a:latin typeface="Noto Sans TC"/>
+                <a:ea typeface="Noto Sans TC"/>
+                <a:cs typeface="Noto Sans TC"/>
+              </a:rPr>
+              <a:t>0.40</a:t>
+            </a:r>
+            <a:r>
+              <a:rPr sz="1200" b="0">
+                <a:solidFill>
+                  <a:srgbClr val="E8E6E1"/>
+                </a:solidFill>
+                <a:latin typeface="Noto Sans TC"/>
+                <a:ea typeface="Noto Sans TC"/>
+                <a:cs typeface="Noto Sans TC"/>
+              </a:rPr>
+              <a:t> 爬到 </a:t>
+            </a:r>
+            <a:r>
+              <a:rPr sz="1200" b="1">
+                <a:solidFill>
+                  <a:srgbClr val="6FC7CF"/>
+                </a:solidFill>
+                <a:latin typeface="Noto Sans TC"/>
+                <a:ea typeface="Noto Sans TC"/>
+                <a:cs typeface="Noto Sans TC"/>
+              </a:rPr>
+              <a:t>0.45</a:t>
+            </a:r>
+            <a:r>
+              <a:rPr sz="1200" b="0">
+                <a:solidFill>
+                  <a:srgbClr val="E8E6E1"/>
+                </a:solidFill>
+                <a:latin typeface="Noto Sans TC"/>
+                <a:ea typeface="Noto Sans TC"/>
+                <a:cs typeface="Noto Sans TC"/>
+              </a:rPr>
+              <a:t> 上下，第 </a:t>
+            </a:r>
+            <a:r>
+              <a:rPr sz="1200" b="1">
+                <a:solidFill>
+                  <a:srgbClr val="6FC7CF"/>
+                </a:solidFill>
+                <a:latin typeface="Noto Sans TC"/>
+                <a:ea typeface="Noto Sans TC"/>
+                <a:cs typeface="Noto Sans TC"/>
+              </a:rPr>
+              <a:t>9</a:t>
+            </a:r>
+            <a:r>
+              <a:rPr sz="1200" b="0">
+                <a:solidFill>
+                  <a:srgbClr val="E8E6E1"/>
+                </a:solidFill>
+                <a:latin typeface="Noto Sans TC"/>
+                <a:ea typeface="Noto Sans TC"/>
+                <a:cs typeface="Noto Sans TC"/>
+              </a:rPr>
+              <a:t> 個 epoch 最高；選 checkpoint 看這條，因為頭條是它</a:t>
+            </a:r>
+          </a:p>
+        </p:txBody>
+      </p:sp>
+      <p:sp>
+        <p:nvSpPr>
+          <p:cNvPr id="5" name="TextBox 4"/>
+          <p:cNvSpPr txBox="1"/>
+          <p:nvPr/>
+        </p:nvSpPr>
+        <p:spPr>
+          <a:xfrm>
+            <a:off x="6172200" y="4829556"/>
+            <a:ext cx="5440680" cy="976884"/>
+          </a:xfrm>
+          <a:prstGeom prst="rect">
+            <a:avLst/>
+          </a:prstGeom>
+          <a:noFill/>
+        </p:spPr>
+        <p:txBody>
+          <a:bodyPr wrap="square">
+            <a:spAutoFit/>
+          </a:bodyPr>
+          <a:lstStyle/>
+          <a:p>
+            <a:pPr>
+              <a:lnSpc>
+                <a:spcPct val="125000"/>
+              </a:lnSpc>
+            </a:pPr>
+            <a:r>
+              <a:rPr sz="1200" b="0">
+                <a:solidFill>
+                  <a:srgbClr val="6FC7CF"/>
+                </a:solidFill>
+                <a:latin typeface="Noto Sans TC"/>
+                <a:ea typeface="Noto Sans TC"/>
+                <a:cs typeface="Noto Sans TC"/>
+              </a:rPr>
+              <a:t>• </a:t>
+            </a:r>
+            <a:r>
+              <a:rPr sz="1200" b="0">
+                <a:solidFill>
+                  <a:srgbClr val="E8E6E1"/>
+                </a:solidFill>
+                <a:latin typeface="Noto Sans TC"/>
+                <a:ea typeface="Noto Sans TC"/>
+                <a:cs typeface="Noto Sans TC"/>
+              </a:rPr>
+              <a:t>train_loss 一路降到 </a:t>
+            </a:r>
+            <a:r>
+              <a:rPr sz="1200" b="1">
+                <a:solidFill>
+                  <a:srgbClr val="6FC7CF"/>
+                </a:solidFill>
+                <a:latin typeface="Noto Sans TC"/>
+                <a:ea typeface="Noto Sans TC"/>
+                <a:cs typeface="Noto Sans TC"/>
+              </a:rPr>
+              <a:t>0.02</a:t>
+            </a:r>
+            <a:r>
+              <a:rPr sz="1200" b="0">
+                <a:solidFill>
+                  <a:srgbClr val="E8E6E1"/>
+                </a:solidFill>
+                <a:latin typeface="Noto Sans TC"/>
+                <a:ea typeface="Noto Sans TC"/>
+                <a:cs typeface="Noto Sans TC"/>
+              </a:rPr>
+              <a:t> 而驗證指標不再動：再訓是在背訓練集，不是在學</a:t>
+            </a:r>
+          </a:p>
+          <a:p>
+            <a:pPr>
+              <a:lnSpc>
+                <a:spcPct val="125000"/>
+              </a:lnSpc>
+            </a:pPr>
+            <a:r>
+              <a:rPr sz="1200" b="0">
+                <a:solidFill>
+                  <a:srgbClr val="6FC7CF"/>
+                </a:solidFill>
+                <a:latin typeface="Noto Sans TC"/>
+                <a:ea typeface="Noto Sans TC"/>
+                <a:cs typeface="Noto Sans TC"/>
+              </a:rPr>
+              <a:t>• </a:t>
+            </a:r>
+            <a:r>
+              <a:rPr sz="1200" b="0">
+                <a:solidFill>
+                  <a:srgbClr val="E8E6E1"/>
+                </a:solidFill>
+                <a:latin typeface="Noto Sans TC"/>
+                <a:ea typeface="Noto Sans TC"/>
+                <a:cs typeface="Noto Sans TC"/>
+              </a:rPr>
+              <a:t>驗證集按板子切，所以這條線是對「沒看過的板子」的估計，不是對 patch 的</a:t>
+            </a:r>
+          </a:p>
+        </p:txBody>
+      </p:sp>
+      <p:sp>
+        <p:nvSpPr>
+          <p:cNvPr id="6" name="TextBox 5"/>
+          <p:cNvSpPr txBox="1"/>
+          <p:nvPr/>
+        </p:nvSpPr>
+        <p:spPr>
+          <a:xfrm>
+            <a:off x="548640" y="5897880"/>
+            <a:ext cx="11155680" cy="365760"/>
+          </a:xfrm>
+          <a:prstGeom prst="rect">
+            <a:avLst/>
+          </a:prstGeom>
+          <a:noFill/>
+        </p:spPr>
+        <p:txBody>
+          <a:bodyPr wrap="square">
+            <a:spAutoFit/>
+          </a:bodyPr>
+          <a:lstStyle/>
+          <a:p>
+            <a:pPr>
+              <a:lnSpc>
+                <a:spcPct val="115000"/>
+              </a:lnSpc>
+            </a:pPr>
+            <a:r>
+              <a:rPr sz="950" b="0">
+                <a:solidFill>
+                  <a:srgbClr val="9AA0A6"/>
+                </a:solidFill>
+                <a:latin typeface="IBM Plex Mono"/>
+                <a:ea typeface="Noto Sans TC"/>
+                <a:cs typeface="Noto Sans TC"/>
+              </a:rPr>
+              <a:t>models/history.json · train_loss / val_accuracy / val_review_reduction（≤0.5% 漏網下的驗證集省掉比例）</a:t>
+            </a:r>
+          </a:p>
+        </p:txBody>
+      </p:sp>
+      <p:sp>
+        <p:nvSpPr>
+          <p:cNvPr id="7" name="TextBox 6"/>
+          <p:cNvSpPr txBox="1"/>
+          <p:nvPr/>
+        </p:nvSpPr>
+        <p:spPr>
+          <a:xfrm>
+            <a:off x="457200" y="6400800"/>
+            <a:ext cx="5486400" cy="320040"/>
+          </a:xfrm>
+          <a:prstGeom prst="rect">
+            <a:avLst/>
+          </a:prstGeom>
+          <a:noFill/>
+        </p:spPr>
+        <p:txBody>
+          <a:bodyPr wrap="square">
+            <a:spAutoFit/>
+          </a:bodyPr>
+          <a:lstStyle/>
+          <a:p>
+            <a:pPr>
+              <a:lnSpc>
+                <a:spcPct val="115000"/>
+              </a:lnSpc>
+            </a:pPr>
+            <a:r>
+              <a:rPr sz="1000" b="0">
+                <a:solidFill>
+                  <a:srgbClr val="9AA0A6"/>
+                </a:solidFill>
+                <a:latin typeface="IBM Plex Mono"/>
+                <a:ea typeface="Noto Sans TC"/>
+                <a:cs typeface="Noto Sans TC"/>
+              </a:rPr>
+              <a:t>附錄 · 備查數字</a:t>
+            </a:r>
+          </a:p>
+        </p:txBody>
+      </p:sp>
+      <p:sp>
+        <p:nvSpPr>
+          <p:cNvPr id="8" name="TextBox 7"/>
+          <p:cNvSpPr txBox="1"/>
+          <p:nvPr/>
+        </p:nvSpPr>
+        <p:spPr>
+          <a:xfrm>
+            <a:off x="8046720" y="6400800"/>
+            <a:ext cx="3657600" cy="320040"/>
+          </a:xfrm>
+          <a:prstGeom prst="rect">
+            <a:avLst/>
+          </a:prstGeom>
+          <a:noFill/>
+        </p:spPr>
+        <p:txBody>
+          <a:bodyPr wrap="square">
+            <a:spAutoFit/>
+          </a:bodyPr>
+          <a:lstStyle/>
+          <a:p>
+            <a:pPr algn="r">
+              <a:lnSpc>
+                <a:spcPct val="115000"/>
+              </a:lnSpc>
+            </a:pPr>
+            <a:r>
+              <a:rPr sz="1000" b="0">
+                <a:solidFill>
+                  <a:srgbClr val="9AA0A6"/>
+                </a:solidFill>
+                <a:latin typeface="IBM Plex Mono"/>
+                <a:ea typeface="Noto Sans TC"/>
+                <a:cs typeface="Noto Sans TC"/>
+              </a:rPr>
+              <a:t>33 / 40</a:t>
+            </a:r>
+          </a:p>
+        </p:txBody>
+      </p:sp>
+    </p:spTree>
+  </p:cSld>
+  <p:clrMapOvr>
+    <a:masterClrMapping/>
+  </p:clrMapOvr>
+</p:sld>
+</file>
+
+<file path=ppt/slides/slide34.xml><?xml version="1.0" encoding="utf-8"?>
 <p:sld xmlns:a="http://schemas.openxmlformats.org/drawingml/2006/main" xmlns:p="http://schemas.openxmlformats.org/presentationml/2006/main" xmlns:r="http://schemas.openxmlformats.org/officeDocument/2006/relationships">
   <p:cSld>
     <p:bg>
@@ -32076,7 +32451,7 @@
                 <a:ea typeface="Noto Sans TC"/>
                 <a:cs typeface="Noto Sans TC"/>
               </a:rPr>
-              <a:t>33 / 39</a:t>
+              <a:t>34 / 40</a:t>
             </a:r>
           </a:p>
         </p:txBody>
@@ -32089,7 +32464,7 @@
 </p:sld>
 </file>
 
-<file path=ppt/slides/slide34.xml><?xml version="1.0" encoding="utf-8"?>
+<file path=ppt/slides/slide35.xml><?xml version="1.0" encoding="utf-8"?>
 <p:sld xmlns:a="http://schemas.openxmlformats.org/drawingml/2006/main" xmlns:p="http://schemas.openxmlformats.org/presentationml/2006/main" xmlns:r="http://schemas.openxmlformats.org/officeDocument/2006/relationships">
   <p:cSld>
     <p:bg>
@@ -33355,7 +33730,7 @@
                 <a:ea typeface="Noto Sans TC"/>
                 <a:cs typeface="Noto Sans TC"/>
               </a:rPr>
-              <a:t>34 / 39</a:t>
+              <a:t>35 / 40</a:t>
             </a:r>
           </a:p>
         </p:txBody>
@@ -33368,7 +33743,7 @@
 </p:sld>
 </file>
 
-<file path=ppt/slides/slide35.xml><?xml version="1.0" encoding="utf-8"?>
+<file path=ppt/slides/slide36.xml><?xml version="1.0" encoding="utf-8"?>
 <p:sld xmlns:a="http://schemas.openxmlformats.org/drawingml/2006/main" xmlns:p="http://schemas.openxmlformats.org/presentationml/2006/main" xmlns:r="http://schemas.openxmlformats.org/officeDocument/2006/relationships">
   <p:cSld>
     <p:bg>
@@ -34430,724 +34805,7 @@
                 <a:ea typeface="Noto Sans TC"/>
                 <a:cs typeface="Noto Sans TC"/>
               </a:rPr>
-              <a:t>35 / 39</a:t>
-            </a:r>
-          </a:p>
-        </p:txBody>
-      </p:sp>
-    </p:spTree>
-  </p:cSld>
-  <p:clrMapOvr>
-    <a:masterClrMapping/>
-  </p:clrMapOvr>
-</p:sld>
-</file>
-
-<file path=ppt/slides/slide36.xml><?xml version="1.0" encoding="utf-8"?>
-<p:sld xmlns:a="http://schemas.openxmlformats.org/drawingml/2006/main" xmlns:p="http://schemas.openxmlformats.org/presentationml/2006/main" xmlns:r="http://schemas.openxmlformats.org/officeDocument/2006/relationships">
-  <p:cSld>
-    <p:bg>
-      <p:bgPr>
-        <a:solidFill>
-          <a:srgbClr val="15171A"/>
-        </a:solidFill>
-        <a:effectLst/>
-      </p:bgPr>
-    </p:bg>
-    <p:spTree>
-      <p:nvGrpSpPr>
-        <p:cNvPr id="1" name=""/>
-        <p:cNvGrpSpPr/>
-        <p:nvPr/>
-      </p:nvGrpSpPr>
-      <p:grpSpPr/>
-      <p:sp>
-        <p:nvSpPr>
-          <p:cNvPr id="2" name="TextBox 1"/>
-          <p:cNvSpPr txBox="1"/>
-          <p:nvPr/>
-        </p:nvSpPr>
-        <p:spPr>
-          <a:xfrm>
-            <a:off x="457200" y="274320"/>
-            <a:ext cx="11247120" cy="731520"/>
-          </a:xfrm>
-          <a:prstGeom prst="rect">
-            <a:avLst/>
-          </a:prstGeom>
-          <a:noFill/>
-        </p:spPr>
-        <p:txBody>
-          <a:bodyPr wrap="square">
-            <a:spAutoFit/>
-          </a:bodyPr>
-          <a:lstStyle/>
-          <a:p>
-            <a:pPr>
-              <a:lnSpc>
-                <a:spcPct val="115000"/>
-              </a:lnSpc>
-            </a:pPr>
-            <a:r>
-              <a:rPr sz="2800" b="1">
-                <a:solidFill>
-                  <a:srgbClr val="E8E6E1"/>
-                </a:solidFill>
-                <a:latin typeface="Noto Sans TC"/>
-                <a:ea typeface="Noto Sans TC"/>
-                <a:cs typeface="Noto Sans TC"/>
-              </a:rPr>
-              <a:t>附錄 E · 偵測器與無樣板複判器的訓練</a:t>
-            </a:r>
-          </a:p>
-        </p:txBody>
-      </p:sp>
-      <p:pic>
-        <p:nvPicPr>
-          <p:cNvPr id="3" name="Picture 2" descr="crop_curves.png"/>
-          <p:cNvPicPr>
-            <a:picLocks noChangeAspect="1"/>
-          </p:cNvPicPr>
-          <p:nvPr/>
-        </p:nvPicPr>
-        <p:blipFill>
-          <a:blip r:embed="rId2"/>
-          <a:stretch>
-            <a:fillRect/>
-          </a:stretch>
-        </p:blipFill>
-        <p:spPr>
-          <a:xfrm>
-            <a:off x="563727" y="1188720"/>
-            <a:ext cx="11064240" cy="3503676"/>
-          </a:xfrm>
-          <a:prstGeom prst="rect">
-            <a:avLst/>
-          </a:prstGeom>
-        </p:spPr>
-      </p:pic>
-      <p:sp>
-        <p:nvSpPr>
-          <p:cNvPr id="4" name="TextBox 3"/>
-          <p:cNvSpPr txBox="1"/>
-          <p:nvPr/>
-        </p:nvSpPr>
-        <p:spPr>
-          <a:xfrm>
-            <a:off x="548640" y="4829556"/>
-            <a:ext cx="5440680" cy="976884"/>
-          </a:xfrm>
-          <a:prstGeom prst="rect">
-            <a:avLst/>
-          </a:prstGeom>
-          <a:noFill/>
-        </p:spPr>
-        <p:txBody>
-          <a:bodyPr wrap="square">
-            <a:spAutoFit/>
-          </a:bodyPr>
-          <a:lstStyle/>
-          <a:p>
-            <a:pPr>
-              <a:lnSpc>
-                <a:spcPct val="125000"/>
-              </a:lnSpc>
-            </a:pPr>
-            <a:r>
-              <a:rPr sz="1200" b="0">
-                <a:solidFill>
-                  <a:srgbClr val="6FC7CF"/>
-                </a:solidFill>
-                <a:latin typeface="Noto Sans TC"/>
-                <a:ea typeface="Noto Sans TC"/>
-                <a:cs typeface="Noto Sans TC"/>
-              </a:rPr>
-              <a:t>• </a:t>
-            </a:r>
-            <a:r>
-              <a:rPr sz="1200" b="0">
-                <a:solidFill>
-                  <a:srgbClr val="E8E6E1"/>
-                </a:solidFill>
-                <a:latin typeface="Noto Sans TC"/>
-                <a:ea typeface="Noto Sans TC"/>
-                <a:cs typeface="Noto Sans TC"/>
-              </a:rPr>
-              <a:t>YOLO</a:t>
-            </a:r>
-            <a:r>
-              <a:rPr sz="1200" b="1">
-                <a:solidFill>
-                  <a:srgbClr val="6FC7CF"/>
-                </a:solidFill>
-                <a:latin typeface="Noto Sans TC"/>
-                <a:ea typeface="Noto Sans TC"/>
-                <a:cs typeface="Noto Sans TC"/>
-              </a:rPr>
-              <a:t>26</a:t>
-            </a:r>
-            <a:r>
-              <a:rPr sz="1200" b="0">
-                <a:solidFill>
-                  <a:srgbClr val="E8E6E1"/>
-                </a:solidFill>
-                <a:latin typeface="Noto Sans TC"/>
-                <a:ea typeface="Noto Sans TC"/>
-                <a:cs typeface="Noto Sans TC"/>
-              </a:rPr>
-              <a:t>n：PCB-AoI </a:t>
-            </a:r>
-            <a:r>
-              <a:rPr sz="1200" b="1">
-                <a:solidFill>
-                  <a:srgbClr val="6FC7CF"/>
-                </a:solidFill>
-                <a:latin typeface="Noto Sans TC"/>
-                <a:ea typeface="Noto Sans TC"/>
-                <a:cs typeface="Noto Sans TC"/>
-              </a:rPr>
-              <a:t>966</a:t>
-            </a:r>
-            <a:r>
-              <a:rPr sz="1200" b="0">
-                <a:solidFill>
-                  <a:srgbClr val="E8E6E1"/>
-                </a:solidFill>
-                <a:latin typeface="Noto Sans TC"/>
-                <a:ea typeface="Noto Sans TC"/>
-                <a:cs typeface="Noto Sans TC"/>
-              </a:rPr>
-              <a:t> 張訓練／</a:t>
-            </a:r>
-            <a:r>
-              <a:rPr sz="1200" b="1">
-                <a:solidFill>
-                  <a:srgbClr val="6FC7CF"/>
-                </a:solidFill>
-                <a:latin typeface="Noto Sans TC"/>
-                <a:ea typeface="Noto Sans TC"/>
-                <a:cs typeface="Noto Sans TC"/>
-              </a:rPr>
-              <a:t>245</a:t>
-            </a:r>
-            <a:r>
-              <a:rPr sz="1200" b="0">
-                <a:solidFill>
-                  <a:srgbClr val="E8E6E1"/>
-                </a:solidFill>
-                <a:latin typeface="Noto Sans TC"/>
-                <a:ea typeface="Noto Sans TC"/>
-                <a:cs typeface="Noto Sans TC"/>
-              </a:rPr>
-              <a:t> 張驗證（</a:t>
-            </a:r>
-            <a:r>
-              <a:rPr sz="1200" b="1">
-                <a:solidFill>
-                  <a:srgbClr val="6FC7CF"/>
-                </a:solidFill>
-                <a:latin typeface="Noto Sans TC"/>
-                <a:ea typeface="Noto Sans TC"/>
-                <a:cs typeface="Noto Sans TC"/>
-              </a:rPr>
-              <a:t>35</a:t>
-            </a:r>
-            <a:r>
-              <a:rPr sz="1200" b="0">
-                <a:solidFill>
-                  <a:srgbClr val="E8E6E1"/>
-                </a:solidFill>
-                <a:latin typeface="Noto Sans TC"/>
-                <a:ea typeface="Noto Sans TC"/>
-                <a:cs typeface="Noto Sans TC"/>
-              </a:rPr>
-              <a:t> 片板）、</a:t>
-            </a:r>
-            <a:r>
-              <a:rPr sz="1200" b="1">
-                <a:solidFill>
-                  <a:srgbClr val="6FC7CF"/>
-                </a:solidFill>
-                <a:latin typeface="Noto Sans TC"/>
-                <a:ea typeface="Noto Sans TC"/>
-                <a:cs typeface="Noto Sans TC"/>
-              </a:rPr>
-              <a:t>60</a:t>
-            </a:r>
-            <a:r>
-              <a:rPr sz="1200" b="0">
-                <a:solidFill>
-                  <a:srgbClr val="E8E6E1"/>
-                </a:solidFill>
-                <a:latin typeface="Noto Sans TC"/>
-                <a:ea typeface="Noto Sans TC"/>
-                <a:cs typeface="Noto Sans TC"/>
-              </a:rPr>
-              <a:t> epoch、imgsz </a:t>
-            </a:r>
-            <a:r>
-              <a:rPr sz="1200" b="1">
-                <a:solidFill>
-                  <a:srgbClr val="6FC7CF"/>
-                </a:solidFill>
-                <a:latin typeface="Noto Sans TC"/>
-                <a:ea typeface="Noto Sans TC"/>
-                <a:cs typeface="Noto Sans TC"/>
-              </a:rPr>
-              <a:t>640</a:t>
-            </a:r>
-            <a:r>
-              <a:rPr sz="1200" b="0">
-                <a:solidFill>
-                  <a:srgbClr val="E8E6E1"/>
-                </a:solidFill>
-                <a:latin typeface="Noto Sans TC"/>
-                <a:ea typeface="Noto Sans TC"/>
-                <a:cs typeface="Noto Sans TC"/>
-              </a:rPr>
-              <a:t>、batch </a:t>
-            </a:r>
-            <a:r>
-              <a:rPr sz="1200" b="1">
-                <a:solidFill>
-                  <a:srgbClr val="6FC7CF"/>
-                </a:solidFill>
-                <a:latin typeface="Noto Sans TC"/>
-                <a:ea typeface="Noto Sans TC"/>
-                <a:cs typeface="Noto Sans TC"/>
-              </a:rPr>
-              <a:t>16</a:t>
-            </a:r>
-            <a:r>
-              <a:rPr sz="1200" b="0">
-                <a:solidFill>
-                  <a:srgbClr val="E8E6E1"/>
-                </a:solidFill>
-                <a:latin typeface="Noto Sans TC"/>
-                <a:ea typeface="Noto Sans TC"/>
-                <a:cs typeface="Noto Sans TC"/>
-              </a:rPr>
-              <a:t>、MPS </a:t>
-            </a:r>
-            <a:r>
-              <a:rPr sz="1200" b="1">
-                <a:solidFill>
-                  <a:srgbClr val="6FC7CF"/>
-                </a:solidFill>
-                <a:latin typeface="Noto Sans TC"/>
-                <a:ea typeface="Noto Sans TC"/>
-                <a:cs typeface="Noto Sans TC"/>
-              </a:rPr>
-              <a:t>56</a:t>
-            </a:r>
-            <a:r>
-              <a:rPr sz="1200" b="0">
-                <a:solidFill>
-                  <a:srgbClr val="E8E6E1"/>
-                </a:solidFill>
-                <a:latin typeface="Noto Sans TC"/>
-                <a:ea typeface="Noto Sans TC"/>
-                <a:cs typeface="Noto Sans TC"/>
-              </a:rPr>
-              <a:t> 分鐘、seed 固定</a:t>
-            </a:r>
-          </a:p>
-          <a:p>
-            <a:pPr>
-              <a:lnSpc>
-                <a:spcPct val="125000"/>
-              </a:lnSpc>
-            </a:pPr>
-            <a:r>
-              <a:rPr sz="1200" b="0">
-                <a:solidFill>
-                  <a:srgbClr val="6FC7CF"/>
-                </a:solidFill>
-                <a:latin typeface="Noto Sans TC"/>
-                <a:ea typeface="Noto Sans TC"/>
-                <a:cs typeface="Noto Sans TC"/>
-              </a:rPr>
-              <a:t>• </a:t>
-            </a:r>
-            <a:r>
-              <a:rPr sz="1200" b="0">
-                <a:solidFill>
-                  <a:srgbClr val="E8E6E1"/>
-                </a:solidFill>
-                <a:latin typeface="Noto Sans TC"/>
-                <a:ea typeface="Noto Sans TC"/>
-                <a:cs typeface="Noto Sans TC"/>
-              </a:rPr>
-              <a:t>驗證 mAP</a:t>
-            </a:r>
-            <a:r>
-              <a:rPr sz="1200" b="1">
-                <a:solidFill>
-                  <a:srgbClr val="6FC7CF"/>
-                </a:solidFill>
-                <a:latin typeface="Noto Sans TC"/>
-                <a:ea typeface="Noto Sans TC"/>
-                <a:cs typeface="Noto Sans TC"/>
-              </a:rPr>
-              <a:t>50 0.658</a:t>
-            </a:r>
-            <a:r>
-              <a:rPr sz="1200" b="0">
-                <a:solidFill>
-                  <a:srgbClr val="E8E6E1"/>
-                </a:solidFill>
-                <a:latin typeface="Noto Sans TC"/>
-                <a:ea typeface="Noto Sans TC"/>
-                <a:cs typeface="Noto Sans TC"/>
-              </a:rPr>
-              <a:t>（目標中位數 </a:t>
-            </a:r>
-            <a:r>
-              <a:rPr sz="1200" b="1">
-                <a:solidFill>
-                  <a:srgbClr val="6FC7CF"/>
-                </a:solidFill>
-                <a:latin typeface="Noto Sans TC"/>
-                <a:ea typeface="Noto Sans TC"/>
-                <a:cs typeface="Noto Sans TC"/>
-              </a:rPr>
-              <a:t>17</a:t>
-            </a:r>
-            <a:r>
-              <a:rPr sz="1200" b="0">
-                <a:solidFill>
-                  <a:srgbClr val="E8E6E1"/>
-                </a:solidFill>
-                <a:latin typeface="Noto Sans TC"/>
-                <a:ea typeface="Noto Sans TC"/>
-                <a:cs typeface="Noto Sans TC"/>
-              </a:rPr>
-              <a:t> px）、</a:t>
-            </a:r>
-            <a:r>
-              <a:rPr sz="1200" b="1">
-                <a:solidFill>
-                  <a:srgbClr val="6FC7CF"/>
-                </a:solidFill>
-                <a:latin typeface="Noto Sans TC"/>
-                <a:ea typeface="Noto Sans TC"/>
-                <a:cs typeface="Noto Sans TC"/>
-              </a:rPr>
-              <a:t>91.6%</a:t>
-            </a:r>
-            <a:r>
-              <a:rPr sz="1200" b="0">
-                <a:solidFill>
-                  <a:srgbClr val="E8E6E1"/>
-                </a:solidFill>
-                <a:latin typeface="Noto Sans TC"/>
-                <a:ea typeface="Noto Sans TC"/>
-                <a:cs typeface="Noto Sans TC"/>
-              </a:rPr>
-              <a:t> 的瑕疵被框住；≤</a:t>
-            </a:r>
-            <a:r>
-              <a:rPr sz="1200" b="1">
-                <a:solidFill>
-                  <a:srgbClr val="6FC7CF"/>
-                </a:solidFill>
-                <a:latin typeface="Noto Sans TC"/>
-                <a:ea typeface="Noto Sans TC"/>
-                <a:cs typeface="Noto Sans TC"/>
-              </a:rPr>
-              <a:t>0.5%</a:t>
-            </a:r>
-            <a:r>
-              <a:rPr sz="1200" b="0">
-                <a:solidFill>
-                  <a:srgbClr val="E8E6E1"/>
-                </a:solidFill>
-                <a:latin typeface="Noto Sans TC"/>
-                <a:ea typeface="Noto Sans TC"/>
-                <a:cs typeface="Noto Sans TC"/>
-              </a:rPr>
-              <a:t> 漏網下 confidence 只省 </a:t>
-            </a:r>
-            <a:r>
-              <a:rPr sz="1200" b="1">
-                <a:solidFill>
-                  <a:srgbClr val="6FC7CF"/>
-                </a:solidFill>
-                <a:latin typeface="Noto Sans TC"/>
-                <a:ea typeface="Noto Sans TC"/>
-                <a:cs typeface="Noto Sans TC"/>
-              </a:rPr>
-              <a:t>1.2%</a:t>
-            </a:r>
-          </a:p>
-        </p:txBody>
-      </p:sp>
-      <p:sp>
-        <p:nvSpPr>
-          <p:cNvPr id="5" name="TextBox 4"/>
-          <p:cNvSpPr txBox="1"/>
-          <p:nvPr/>
-        </p:nvSpPr>
-        <p:spPr>
-          <a:xfrm>
-            <a:off x="6172200" y="4829556"/>
-            <a:ext cx="5440680" cy="976884"/>
-          </a:xfrm>
-          <a:prstGeom prst="rect">
-            <a:avLst/>
-          </a:prstGeom>
-          <a:noFill/>
-        </p:spPr>
-        <p:txBody>
-          <a:bodyPr wrap="square">
-            <a:spAutoFit/>
-          </a:bodyPr>
-          <a:lstStyle/>
-          <a:p>
-            <a:pPr>
-              <a:lnSpc>
-                <a:spcPct val="125000"/>
-              </a:lnSpc>
-            </a:pPr>
-            <a:r>
-              <a:rPr sz="1200" b="0">
-                <a:solidFill>
-                  <a:srgbClr val="6FC7CF"/>
-                </a:solidFill>
-                <a:latin typeface="Noto Sans TC"/>
-                <a:ea typeface="Noto Sans TC"/>
-                <a:cs typeface="Noto Sans TC"/>
-              </a:rPr>
-              <a:t>• </a:t>
-            </a:r>
-            <a:r>
-              <a:rPr sz="1200" b="0">
-                <a:solidFill>
-                  <a:srgbClr val="E8E6E1"/>
-                </a:solidFill>
-                <a:latin typeface="Noto Sans TC"/>
-                <a:ea typeface="Noto Sans TC"/>
-                <a:cs typeface="Noto Sans TC"/>
-              </a:rPr>
-              <a:t>crop 複判器：同一個 ResNet-</a:t>
-            </a:r>
-            <a:r>
-              <a:rPr sz="1200" b="1">
-                <a:solidFill>
-                  <a:srgbClr val="6FC7CF"/>
-                </a:solidFill>
-                <a:latin typeface="Noto Sans TC"/>
-                <a:ea typeface="Noto Sans TC"/>
-                <a:cs typeface="Noto Sans TC"/>
-              </a:rPr>
-              <a:t>18</a:t>
-            </a:r>
-            <a:r>
-              <a:rPr sz="1200" b="0">
-                <a:solidFill>
-                  <a:srgbClr val="E8E6E1"/>
-                </a:solidFill>
-                <a:latin typeface="Noto Sans TC"/>
-                <a:ea typeface="Noto Sans TC"/>
-                <a:cs typeface="Noto Sans TC"/>
-              </a:rPr>
-              <a:t>、</a:t>
-            </a:r>
-            <a:r>
-              <a:rPr sz="1200" b="1">
-                <a:solidFill>
-                  <a:srgbClr val="6FC7CF"/>
-                </a:solidFill>
-                <a:latin typeface="Noto Sans TC"/>
-                <a:ea typeface="Noto Sans TC"/>
-                <a:cs typeface="Noto Sans TC"/>
-              </a:rPr>
-              <a:t>64</a:t>
-            </a:r>
-            <a:r>
-              <a:rPr sz="1200" b="0">
-                <a:solidFill>
-                  <a:srgbClr val="E8E6E1"/>
-                </a:solidFill>
-                <a:latin typeface="Noto Sans TC"/>
-                <a:ea typeface="Noto Sans TC"/>
-                <a:cs typeface="Noto Sans TC"/>
-              </a:rPr>
-              <a:t> px RGB、按 base stem 切 split 防增強圖洩漏；val_review_reduction 十個 epoch 在 </a:t>
-            </a:r>
-            <a:r>
-              <a:rPr sz="1200" b="1">
-                <a:solidFill>
-                  <a:srgbClr val="6FC7CF"/>
-                </a:solidFill>
-                <a:latin typeface="Noto Sans TC"/>
-                <a:ea typeface="Noto Sans TC"/>
-                <a:cs typeface="Noto Sans TC"/>
-              </a:rPr>
-              <a:t>1–3%</a:t>
-            </a:r>
-            <a:r>
-              <a:rPr sz="1200" b="0">
-                <a:solidFill>
-                  <a:srgbClr val="E8E6E1"/>
-                </a:solidFill>
-                <a:latin typeface="Noto Sans TC"/>
-                <a:ea typeface="Noto Sans TC"/>
-                <a:cs typeface="Noto Sans TC"/>
-              </a:rPr>
-              <a:t> 之間</a:t>
-            </a:r>
-          </a:p>
-          <a:p>
-            <a:pPr>
-              <a:lnSpc>
-                <a:spcPct val="125000"/>
-              </a:lnSpc>
-            </a:pPr>
-            <a:r>
-              <a:rPr sz="1200" b="0">
-                <a:solidFill>
-                  <a:srgbClr val="6FC7CF"/>
-                </a:solidFill>
-                <a:latin typeface="Noto Sans TC"/>
-                <a:ea typeface="Noto Sans TC"/>
-                <a:cs typeface="Noto Sans TC"/>
-              </a:rPr>
-              <a:t>• </a:t>
-            </a:r>
-            <a:r>
-              <a:rPr sz="1200" b="0">
-                <a:solidFill>
-                  <a:srgbClr val="E8E6E1"/>
-                </a:solidFill>
-                <a:latin typeface="Noto Sans TC"/>
-                <a:ea typeface="Noto Sans TC"/>
-                <a:cs typeface="Noto Sans TC"/>
-              </a:rPr>
-              <a:t>訓練時 GPU 被翻譯工作佔著，在 CPU 上訓；一個 seed；候選來自看過訓練圖的偵測器——都寫在 benchmarks 的條目裡</a:t>
-            </a:r>
-          </a:p>
-        </p:txBody>
-      </p:sp>
-      <p:sp>
-        <p:nvSpPr>
-          <p:cNvPr id="6" name="TextBox 5"/>
-          <p:cNvSpPr txBox="1"/>
-          <p:nvPr/>
-        </p:nvSpPr>
-        <p:spPr>
-          <a:xfrm>
-            <a:off x="548640" y="5897880"/>
-            <a:ext cx="11155680" cy="365760"/>
-          </a:xfrm>
-          <a:prstGeom prst="rect">
-            <a:avLst/>
-          </a:prstGeom>
-          <a:noFill/>
-        </p:spPr>
-        <p:txBody>
-          <a:bodyPr wrap="square">
-            <a:spAutoFit/>
-          </a:bodyPr>
-          <a:lstStyle/>
-          <a:p>
-            <a:pPr>
-              <a:lnSpc>
-                <a:spcPct val="115000"/>
-              </a:lnSpc>
-            </a:pPr>
-            <a:r>
-              <a:rPr sz="950" b="0">
-                <a:solidFill>
-                  <a:srgbClr val="9AA0A6"/>
-                </a:solidFill>
-                <a:latin typeface="IBM Plex Mono"/>
-                <a:ea typeface="Noto Sans TC"/>
-                <a:cs typeface="Noto Sans TC"/>
-              </a:rPr>
-              <a:t>models/pcbaoi_reverifier/history.json · 無樣板 crop 複判器的 val_review_reduction 十個 epoch 停在 1–3%</a:t>
-            </a:r>
-          </a:p>
-        </p:txBody>
-      </p:sp>
-      <p:sp>
-        <p:nvSpPr>
-          <p:cNvPr id="7" name="TextBox 6"/>
-          <p:cNvSpPr txBox="1"/>
-          <p:nvPr/>
-        </p:nvSpPr>
-        <p:spPr>
-          <a:xfrm>
-            <a:off x="457200" y="6400800"/>
-            <a:ext cx="5486400" cy="320040"/>
-          </a:xfrm>
-          <a:prstGeom prst="rect">
-            <a:avLst/>
-          </a:prstGeom>
-          <a:noFill/>
-        </p:spPr>
-        <p:txBody>
-          <a:bodyPr wrap="square">
-            <a:spAutoFit/>
-          </a:bodyPr>
-          <a:lstStyle/>
-          <a:p>
-            <a:pPr>
-              <a:lnSpc>
-                <a:spcPct val="115000"/>
-              </a:lnSpc>
-            </a:pPr>
-            <a:r>
-              <a:rPr sz="1000" b="0">
-                <a:solidFill>
-                  <a:srgbClr val="9AA0A6"/>
-                </a:solidFill>
-                <a:latin typeface="IBM Plex Mono"/>
-                <a:ea typeface="Noto Sans TC"/>
-                <a:cs typeface="Noto Sans TC"/>
-              </a:rPr>
-              <a:t>附錄 · 備查數字</a:t>
-            </a:r>
-          </a:p>
-        </p:txBody>
-      </p:sp>
-      <p:sp>
-        <p:nvSpPr>
-          <p:cNvPr id="8" name="TextBox 7"/>
-          <p:cNvSpPr txBox="1"/>
-          <p:nvPr/>
-        </p:nvSpPr>
-        <p:spPr>
-          <a:xfrm>
-            <a:off x="8046720" y="6400800"/>
-            <a:ext cx="3657600" cy="320040"/>
-          </a:xfrm>
-          <a:prstGeom prst="rect">
-            <a:avLst/>
-          </a:prstGeom>
-          <a:noFill/>
-        </p:spPr>
-        <p:txBody>
-          <a:bodyPr wrap="square">
-            <a:spAutoFit/>
-          </a:bodyPr>
-          <a:lstStyle/>
-          <a:p>
-            <a:pPr algn="r">
-              <a:lnSpc>
-                <a:spcPct val="115000"/>
-              </a:lnSpc>
-            </a:pPr>
-            <a:r>
-              <a:rPr sz="1000" b="0">
-                <a:solidFill>
-                  <a:srgbClr val="9AA0A6"/>
-                </a:solidFill>
-                <a:latin typeface="IBM Plex Mono"/>
-                <a:ea typeface="Noto Sans TC"/>
-                <a:cs typeface="Noto Sans TC"/>
-              </a:rPr>
-              <a:t>36 / 39</a:t>
+              <a:t>36 / 40</a:t>
             </a:r>
           </a:p>
         </p:txBody>
@@ -35214,14 +34872,14 @@
                 <a:ea typeface="Noto Sans TC"/>
                 <a:cs typeface="Noto Sans TC"/>
               </a:rPr>
-              <a:t>附錄 F · S0 gate 的三條曲線：DeepPCB 過、HRIPCB 不過</a:t>
+              <a:t>附錄 E · 偵測器與無樣板複判器的訓練</a:t>
             </a:r>
           </a:p>
         </p:txBody>
       </p:sp>
       <p:pic>
         <p:nvPicPr>
-          <p:cNvPr id="3" name="Picture 2" descr="gate_curves.png"/>
+          <p:cNvPr id="3" name="Picture 2" descr="crop_curves.png"/>
           <p:cNvPicPr>
             <a:picLocks noChangeAspect="1"/>
           </p:cNvPicPr>
@@ -35235,8 +34893,8 @@
         </p:blipFill>
         <p:spPr>
           <a:xfrm>
-            <a:off x="1001333" y="1188720"/>
-            <a:ext cx="10189028" cy="3566160"/>
+            <a:off x="563727" y="1188720"/>
+            <a:ext cx="11064240" cy="3503676"/>
           </a:xfrm>
           <a:prstGeom prst="rect">
             <a:avLst/>
@@ -35251,8 +34909,8 @@
         </p:nvSpPr>
         <p:spPr>
           <a:xfrm>
-            <a:off x="548640" y="4892040"/>
-            <a:ext cx="5440680" cy="914400"/>
+            <a:off x="548640" y="4829556"/>
+            <a:ext cx="5440680" cy="976884"/>
           </a:xfrm>
           <a:prstGeom prst="rect">
             <a:avLst/>
@@ -35290,7 +34948,7 @@
                 <a:ea typeface="Noto Sans TC"/>
                 <a:cs typeface="Noto Sans TC"/>
               </a:rPr>
-              <a:t>DeepPCB（trainval </a:t>
+              <a:t>YOLO</a:t>
             </a:r>
             <a:r>
               <a:rPr sz="1200" b="1">
@@ -35301,7 +34959,7 @@
                 <a:ea typeface="Noto Sans TC"/>
                 <a:cs typeface="Noto Sans TC"/>
               </a:rPr>
-              <a:t>200</a:t>
+              <a:t>26</a:t>
             </a:r>
             <a:r>
               <a:rPr sz="1200" b="0">
@@ -35312,7 +34970,7 @@
                 <a:ea typeface="Noto Sans TC"/>
                 <a:cs typeface="Noto Sans TC"/>
               </a:rPr>
-              <a:t> 對）：門檻 </a:t>
+              <a:t>n：PCB-AoI </a:t>
             </a:r>
             <a:r>
               <a:rPr sz="1200" b="1">
@@ -35323,7 +34981,7 @@
                 <a:ea typeface="Noto Sans TC"/>
                 <a:cs typeface="Noto Sans TC"/>
               </a:rPr>
-              <a:t>30–100</a:t>
+              <a:t>966</a:t>
             </a:r>
             <a:r>
               <a:rPr sz="1200" b="0">
@@ -35334,7 +34992,7 @@
                 <a:ea typeface="Noto Sans TC"/>
                 <a:cs typeface="Noto Sans TC"/>
               </a:rPr>
-              <a:t> recall 都是 </a:t>
+              <a:t> 張訓練／</a:t>
             </a:r>
             <a:r>
               <a:rPr sz="1200" b="1">
@@ -35345,7 +35003,7 @@
                 <a:ea typeface="Noto Sans TC"/>
                 <a:cs typeface="Noto Sans TC"/>
               </a:rPr>
-              <a:t>95.7%</a:t>
+              <a:t>245</a:t>
             </a:r>
             <a:r>
               <a:rPr sz="1200" b="0">
@@ -35356,7 +35014,7 @@
                 <a:ea typeface="Noto Sans TC"/>
                 <a:cs typeface="Noto Sans TC"/>
               </a:rPr>
-              <a:t>、每張 </a:t>
+              <a:t> 張驗證（</a:t>
             </a:r>
             <a:r>
               <a:rPr sz="1200" b="1">
@@ -35367,7 +35025,7 @@
                 <a:ea typeface="Noto Sans TC"/>
                 <a:cs typeface="Noto Sans TC"/>
               </a:rPr>
-              <a:t>10.7</a:t>
+              <a:t>35</a:t>
             </a:r>
             <a:r>
               <a:rPr sz="1200" b="0">
@@ -35378,7 +35036,95 @@
                 <a:ea typeface="Noto Sans TC"/>
                 <a:cs typeface="Noto Sans TC"/>
               </a:rPr>
-              <a:t> 個誤報——門檻怎麼設都一樣，二值圖沒有灰階可調</a:t>
+              <a:t> 片板）、</a:t>
+            </a:r>
+            <a:r>
+              <a:rPr sz="1200" b="1">
+                <a:solidFill>
+                  <a:srgbClr val="6FC7CF"/>
+                </a:solidFill>
+                <a:latin typeface="Noto Sans TC"/>
+                <a:ea typeface="Noto Sans TC"/>
+                <a:cs typeface="Noto Sans TC"/>
+              </a:rPr>
+              <a:t>60</a:t>
+            </a:r>
+            <a:r>
+              <a:rPr sz="1200" b="0">
+                <a:solidFill>
+                  <a:srgbClr val="E8E6E1"/>
+                </a:solidFill>
+                <a:latin typeface="Noto Sans TC"/>
+                <a:ea typeface="Noto Sans TC"/>
+                <a:cs typeface="Noto Sans TC"/>
+              </a:rPr>
+              <a:t> epoch、imgsz </a:t>
+            </a:r>
+            <a:r>
+              <a:rPr sz="1200" b="1">
+                <a:solidFill>
+                  <a:srgbClr val="6FC7CF"/>
+                </a:solidFill>
+                <a:latin typeface="Noto Sans TC"/>
+                <a:ea typeface="Noto Sans TC"/>
+                <a:cs typeface="Noto Sans TC"/>
+              </a:rPr>
+              <a:t>640</a:t>
+            </a:r>
+            <a:r>
+              <a:rPr sz="1200" b="0">
+                <a:solidFill>
+                  <a:srgbClr val="E8E6E1"/>
+                </a:solidFill>
+                <a:latin typeface="Noto Sans TC"/>
+                <a:ea typeface="Noto Sans TC"/>
+                <a:cs typeface="Noto Sans TC"/>
+              </a:rPr>
+              <a:t>、batch </a:t>
+            </a:r>
+            <a:r>
+              <a:rPr sz="1200" b="1">
+                <a:solidFill>
+                  <a:srgbClr val="6FC7CF"/>
+                </a:solidFill>
+                <a:latin typeface="Noto Sans TC"/>
+                <a:ea typeface="Noto Sans TC"/>
+                <a:cs typeface="Noto Sans TC"/>
+              </a:rPr>
+              <a:t>16</a:t>
+            </a:r>
+            <a:r>
+              <a:rPr sz="1200" b="0">
+                <a:solidFill>
+                  <a:srgbClr val="E8E6E1"/>
+                </a:solidFill>
+                <a:latin typeface="Noto Sans TC"/>
+                <a:ea typeface="Noto Sans TC"/>
+                <a:cs typeface="Noto Sans TC"/>
+              </a:rPr>
+              <a:t>、MPS </a:t>
+            </a:r>
+            <a:r>
+              <a:rPr sz="1200" b="1">
+                <a:solidFill>
+                  <a:srgbClr val="6FC7CF"/>
+                </a:solidFill>
+                <a:latin typeface="Noto Sans TC"/>
+                <a:ea typeface="Noto Sans TC"/>
+                <a:cs typeface="Noto Sans TC"/>
+              </a:rPr>
+              <a:t>56</a:t>
+            </a:r>
+            <a:r>
+              <a:rPr sz="1200" b="0">
+                <a:solidFill>
+                  <a:srgbClr val="E8E6E1"/>
+                </a:solidFill>
+                <a:latin typeface="Noto Sans TC"/>
+                <a:ea typeface="Noto Sans TC"/>
+                <a:cs typeface="Noto Sans TC"/>
+              </a:rPr>
+              <a:t> 分鐘、seed 固定</a:t>
             </a:r>
           </a:p>
           <a:p>
@@ -35407,7 +35153,7 @@
                 <a:ea typeface="Noto Sans TC"/>
                 <a:cs typeface="Noto Sans TC"/>
               </a:rPr>
-              <a:t>HRIPCB 對齊：門檻 </a:t>
+              <a:t>驗證 mAP</a:t>
             </a:r>
             <a:r>
               <a:rPr sz="1200" b="1">
@@ -35418,7 +35164,7 @@
                 <a:ea typeface="Noto Sans TC"/>
                 <a:cs typeface="Noto Sans TC"/>
               </a:rPr>
-              <a:t>10</a:t>
+              <a:t>50 0.658</a:t>
             </a:r>
             <a:r>
               <a:rPr sz="1200" b="0">
@@ -35429,7 +35175,7 @@
                 <a:ea typeface="Noto Sans TC"/>
                 <a:cs typeface="Noto Sans TC"/>
               </a:rPr>
-              <a:t> 才有 </a:t>
+              <a:t>（目標中位數 </a:t>
             </a:r>
             <a:r>
               <a:rPr sz="1200" b="1">
@@ -35440,7 +35186,7 @@
                 <a:ea typeface="Noto Sans TC"/>
                 <a:cs typeface="Noto Sans TC"/>
               </a:rPr>
-              <a:t>92.3%</a:t>
+              <a:t>17</a:t>
             </a:r>
             <a:r>
               <a:rPr sz="1200" b="0">
@@ -35451,7 +35197,7 @@
                 <a:ea typeface="Noto Sans TC"/>
                 <a:cs typeface="Noto Sans TC"/>
               </a:rPr>
-              <a:t> recall（</a:t>
+              <a:t> px）、</a:t>
             </a:r>
             <a:r>
               <a:rPr sz="1200" b="1">
@@ -35462,7 +35208,7 @@
                 <a:ea typeface="Noto Sans TC"/>
                 <a:cs typeface="Noto Sans TC"/>
               </a:rPr>
-              <a:t>1.8</a:t>
+              <a:t>91.6%</a:t>
             </a:r>
             <a:r>
               <a:rPr sz="1200" b="0">
@@ -35473,7 +35219,7 @@
                 <a:ea typeface="Noto Sans TC"/>
                 <a:cs typeface="Noto Sans TC"/>
               </a:rPr>
-              <a:t> 個誤報）；門檻 </a:t>
+              <a:t> 的瑕疵被框住；≤</a:t>
             </a:r>
             <a:r>
               <a:rPr sz="1200" b="1">
@@ -35484,7 +35230,7 @@
                 <a:ea typeface="Noto Sans TC"/>
                 <a:cs typeface="Noto Sans TC"/>
               </a:rPr>
-              <a:t>60</a:t>
+              <a:t>0.5%</a:t>
             </a:r>
             <a:r>
               <a:rPr sz="1200" b="0">
@@ -35495,7 +35241,7 @@
                 <a:ea typeface="Noto Sans TC"/>
                 <a:cs typeface="Noto Sans TC"/>
               </a:rPr>
-              <a:t> 只剩 </a:t>
+              <a:t> 漏網下 confidence 只省 </a:t>
             </a:r>
             <a:r>
               <a:rPr sz="1200" b="1">
@@ -35506,7 +35252,7 @@
                 <a:ea typeface="Noto Sans TC"/>
                 <a:cs typeface="Noto Sans TC"/>
               </a:rPr>
-              <a:t>14.3%</a:t>
+              <a:t>1.2%</a:t>
             </a:r>
           </a:p>
         </p:txBody>
@@ -35519,8 +35265,8 @@
         </p:nvSpPr>
         <p:spPr>
           <a:xfrm>
-            <a:off x="6172200" y="4892040"/>
-            <a:ext cx="5440680" cy="914400"/>
+            <a:off x="6172200" y="4829556"/>
+            <a:ext cx="5440680" cy="976884"/>
           </a:xfrm>
           <a:prstGeom prst="rect">
             <a:avLst/>
@@ -35558,7 +35304,7 @@
                 <a:ea typeface="Noto Sans TC"/>
                 <a:cs typeface="Noto Sans TC"/>
               </a:rPr>
-              <a:t>HRIPCB 對齊＋擾動：門檻 </a:t>
+              <a:t>crop 複判器：同一個 ResNet-</a:t>
             </a:r>
             <a:r>
               <a:rPr sz="1200" b="1">
@@ -35569,7 +35315,7 @@
                 <a:ea typeface="Noto Sans TC"/>
                 <a:cs typeface="Noto Sans TC"/>
               </a:rPr>
-              <a:t>10</a:t>
+              <a:t>18</a:t>
             </a:r>
             <a:r>
               <a:rPr sz="1200" b="0">
@@ -35580,7 +35326,7 @@
                 <a:ea typeface="Noto Sans TC"/>
                 <a:cs typeface="Noto Sans TC"/>
               </a:rPr>
-              <a:t> recall </a:t>
+              <a:t>、</a:t>
             </a:r>
             <a:r>
               <a:rPr sz="1200" b="1">
@@ -35591,7 +35337,7 @@
                 <a:ea typeface="Noto Sans TC"/>
                 <a:cs typeface="Noto Sans TC"/>
               </a:rPr>
-              <a:t>90.5%</a:t>
+              <a:t>64</a:t>
             </a:r>
             <a:r>
               <a:rPr sz="1200" b="0">
@@ -35602,7 +35348,7 @@
                 <a:ea typeface="Noto Sans TC"/>
                 <a:cs typeface="Noto Sans TC"/>
               </a:rPr>
-              <a:t> 但每張 </a:t>
+              <a:t> px RGB、按 base stem 切 split 防增強圖洩漏；val_review_reduction 十個 epoch 在 </a:t>
             </a:r>
             <a:r>
               <a:rPr sz="1200" b="1">
@@ -35613,7 +35359,7 @@
                 <a:ea typeface="Noto Sans TC"/>
                 <a:cs typeface="Noto Sans TC"/>
               </a:rPr>
-              <a:t>860</a:t>
+              <a:t>1–3%</a:t>
             </a:r>
             <a:r>
               <a:rPr sz="1200" b="0">
@@ -35624,40 +35370,25 @@
                 <a:ea typeface="Noto Sans TC"/>
                 <a:cs typeface="Noto Sans TC"/>
               </a:rPr>
-              <a:t> 個誤報；門檻 </a:t>
-            </a:r>
-            <a:r>
-              <a:rPr sz="1200" b="1">
-                <a:solidFill>
-                  <a:srgbClr val="6FC7CF"/>
-                </a:solidFill>
-                <a:latin typeface="Noto Sans TC"/>
-                <a:ea typeface="Noto Sans TC"/>
-                <a:cs typeface="Noto Sans TC"/>
-              </a:rPr>
-              <a:t>60</a:t>
-            </a:r>
+              <a:t> 之間</a:t>
+            </a:r>
+          </a:p>
+          <a:p>
+            <a:pPr>
+              <a:lnSpc>
+                <a:spcPct val="125000"/>
+              </a:lnSpc>
+            </a:pPr>
             <a:r>
               <a:rPr sz="1200" b="0">
                 <a:solidFill>
-                  <a:srgbClr val="E8E6E1"/>
-                </a:solidFill>
-                <a:latin typeface="Noto Sans TC"/>
-                <a:ea typeface="Noto Sans TC"/>
-                <a:cs typeface="Noto Sans TC"/>
-              </a:rPr>
-              <a:t> 誤報 </a:t>
-            </a:r>
-            <a:r>
-              <a:rPr sz="1200" b="1">
-                <a:solidFill>
-                  <a:srgbClr val="6FC7CF"/>
-                </a:solidFill>
-                <a:latin typeface="Noto Sans TC"/>
-                <a:ea typeface="Noto Sans TC"/>
-                <a:cs typeface="Noto Sans TC"/>
-              </a:rPr>
-              <a:t>24.7</a:t>
+                  <a:srgbClr val="6FC7CF"/>
+                </a:solidFill>
+                <a:latin typeface="Noto Sans TC"/>
+                <a:ea typeface="Noto Sans TC"/>
+                <a:cs typeface="Noto Sans TC"/>
+              </a:rPr>
+              <a:t>• </a:t>
             </a:r>
             <a:r>
               <a:rPr sz="1200" b="0">
@@ -35668,124 +35399,7 @@
                 <a:ea typeface="Noto Sans TC"/>
                 <a:cs typeface="Noto Sans TC"/>
               </a:rPr>
-              <a:t> 個但 recall </a:t>
-            </a:r>
-            <a:r>
-              <a:rPr sz="1200" b="1">
-                <a:solidFill>
-                  <a:srgbClr val="6FC7CF"/>
-                </a:solidFill>
-                <a:latin typeface="Noto Sans TC"/>
-                <a:ea typeface="Noto Sans TC"/>
-                <a:cs typeface="Noto Sans TC"/>
-              </a:rPr>
-              <a:t>14.2%</a:t>
-            </a:r>
-            <a:r>
-              <a:rPr sz="1200" b="0">
-                <a:solidFill>
-                  <a:srgbClr val="E8E6E1"/>
-                </a:solidFill>
-                <a:latin typeface="Noto Sans TC"/>
-                <a:ea typeface="Noto Sans TC"/>
-                <a:cs typeface="Noto Sans TC"/>
-              </a:rPr>
-              <a:t>——沒有一點同時過兩關</a:t>
-            </a:r>
-          </a:p>
-          <a:p>
-            <a:pPr>
-              <a:lnSpc>
-                <a:spcPct val="125000"/>
-              </a:lnSpc>
-            </a:pPr>
-            <a:r>
-              <a:rPr sz="1200" b="0">
-                <a:solidFill>
-                  <a:srgbClr val="6FC7CF"/>
-                </a:solidFill>
-                <a:latin typeface="Noto Sans TC"/>
-                <a:ea typeface="Noto Sans TC"/>
-                <a:cs typeface="Noto Sans TC"/>
-              </a:rPr>
-              <a:t>• </a:t>
-            </a:r>
-            <a:r>
-              <a:rPr sz="1200" b="0">
-                <a:solidFill>
-                  <a:srgbClr val="E8E6E1"/>
-                </a:solidFill>
-                <a:latin typeface="Noto Sans TC"/>
-                <a:ea typeface="Noto Sans TC"/>
-                <a:cs typeface="Noto Sans TC"/>
-              </a:rPr>
-              <a:t>HRIPCB 旋轉：對位拒絕 </a:t>
-            </a:r>
-            <a:r>
-              <a:rPr sz="1200" b="1">
-                <a:solidFill>
-                  <a:srgbClr val="6FC7CF"/>
-                </a:solidFill>
-                <a:latin typeface="Noto Sans TC"/>
-                <a:ea typeface="Noto Sans TC"/>
-                <a:cs typeface="Noto Sans TC"/>
-              </a:rPr>
-              <a:t>563/693</a:t>
-            </a:r>
-            <a:r>
-              <a:rPr sz="1200" b="0">
-                <a:solidFill>
-                  <a:srgbClr val="E8E6E1"/>
-                </a:solidFill>
-                <a:latin typeface="Noto Sans TC"/>
-                <a:ea typeface="Noto Sans TC"/>
-                <a:cs typeface="Noto Sans TC"/>
-              </a:rPr>
-              <a:t> 對，最好 recall </a:t>
-            </a:r>
-            <a:r>
-              <a:rPr sz="1200" b="1">
-                <a:solidFill>
-                  <a:srgbClr val="6FC7CF"/>
-                </a:solidFill>
-                <a:latin typeface="Noto Sans TC"/>
-                <a:ea typeface="Noto Sans TC"/>
-                <a:cs typeface="Noto Sans TC"/>
-              </a:rPr>
-              <a:t>49.4%</a:t>
-            </a:r>
-            <a:r>
-              <a:rPr sz="1200" b="0">
-                <a:solidFill>
-                  <a:srgbClr val="E8E6E1"/>
-                </a:solidFill>
-                <a:latin typeface="Noto Sans TC"/>
-                <a:ea typeface="Noto Sans TC"/>
-                <a:cs typeface="Noto Sans TC"/>
-              </a:rPr>
-              <a:t>、每張 </a:t>
-            </a:r>
-            <a:r>
-              <a:rPr sz="1200" b="1">
-                <a:solidFill>
-                  <a:srgbClr val="6FC7CF"/>
-                </a:solidFill>
-                <a:latin typeface="Noto Sans TC"/>
-                <a:ea typeface="Noto Sans TC"/>
-                <a:cs typeface="Noto Sans TC"/>
-              </a:rPr>
-              <a:t>282</a:t>
-            </a:r>
-            <a:r>
-              <a:rPr sz="1200" b="0">
-                <a:solidFill>
-                  <a:srgbClr val="E8E6E1"/>
-                </a:solidFill>
-                <a:latin typeface="Noto Sans TC"/>
-                <a:ea typeface="Noto Sans TC"/>
-                <a:cs typeface="Noto Sans TC"/>
-              </a:rPr>
-              <a:t> 個誤報</a:t>
+              <a:t>訓練時 GPU 被翻譯工作佔著，在 CPU 上訓；一個 seed；候選來自看過訓練圖的偵測器——都寫在 benchmarks 的條目裡</a:t>
             </a:r>
           </a:p>
         </p:txBody>
@@ -35826,7 +35440,7 @@
                 <a:ea typeface="Noto Sans TC"/>
                 <a:cs typeface="Noto Sans TC"/>
               </a:rPr>
-              <a:t>eval/results/gate_check*.json · 每個灰階門檻的 recall 與每張圖的平均誤報數</a:t>
+              <a:t>models/pcbaoi_reverifier/history.json · 無樣板 crop 複判器的 val_review_reduction 十個 epoch 停在 1–3%</a:t>
             </a:r>
           </a:p>
         </p:txBody>
@@ -35908,7 +35522,7 @@
                 <a:ea typeface="Noto Sans TC"/>
                 <a:cs typeface="Noto Sans TC"/>
               </a:rPr>
-              <a:t>37 / 39</a:t>
+              <a:t>37 / 40</a:t>
             </a:r>
           </a:p>
         </p:txBody>
@@ -35922,6 +35536,767 @@
 </file>
 
 <file path=ppt/slides/slide38.xml><?xml version="1.0" encoding="utf-8"?>
+<p:sld xmlns:a="http://schemas.openxmlformats.org/drawingml/2006/main" xmlns:p="http://schemas.openxmlformats.org/presentationml/2006/main" xmlns:r="http://schemas.openxmlformats.org/officeDocument/2006/relationships">
+  <p:cSld>
+    <p:bg>
+      <p:bgPr>
+        <a:solidFill>
+          <a:srgbClr val="15171A"/>
+        </a:solidFill>
+        <a:effectLst/>
+      </p:bgPr>
+    </p:bg>
+    <p:spTree>
+      <p:nvGrpSpPr>
+        <p:cNvPr id="1" name=""/>
+        <p:cNvGrpSpPr/>
+        <p:nvPr/>
+      </p:nvGrpSpPr>
+      <p:grpSpPr/>
+      <p:sp>
+        <p:nvSpPr>
+          <p:cNvPr id="2" name="TextBox 1"/>
+          <p:cNvSpPr txBox="1"/>
+          <p:nvPr/>
+        </p:nvSpPr>
+        <p:spPr>
+          <a:xfrm>
+            <a:off x="457200" y="274320"/>
+            <a:ext cx="11247120" cy="731520"/>
+          </a:xfrm>
+          <a:prstGeom prst="rect">
+            <a:avLst/>
+          </a:prstGeom>
+          <a:noFill/>
+        </p:spPr>
+        <p:txBody>
+          <a:bodyPr wrap="square">
+            <a:spAutoFit/>
+          </a:bodyPr>
+          <a:lstStyle/>
+          <a:p>
+            <a:pPr>
+              <a:lnSpc>
+                <a:spcPct val="115000"/>
+              </a:lnSpc>
+            </a:pPr>
+            <a:r>
+              <a:rPr sz="2800" b="1">
+                <a:solidFill>
+                  <a:srgbClr val="E8E6E1"/>
+                </a:solidFill>
+                <a:latin typeface="Noto Sans TC"/>
+                <a:ea typeface="Noto Sans TC"/>
+                <a:cs typeface="Noto Sans TC"/>
+              </a:rPr>
+              <a:t>附錄 F · S0 gate 的三條曲線：DeepPCB 過、HRIPCB 不過</a:t>
+            </a:r>
+          </a:p>
+        </p:txBody>
+      </p:sp>
+      <p:pic>
+        <p:nvPicPr>
+          <p:cNvPr id="3" name="Picture 2" descr="gate_curves.png"/>
+          <p:cNvPicPr>
+            <a:picLocks noChangeAspect="1"/>
+          </p:cNvPicPr>
+          <p:nvPr/>
+        </p:nvPicPr>
+        <p:blipFill>
+          <a:blip r:embed="rId2"/>
+          <a:stretch>
+            <a:fillRect/>
+          </a:stretch>
+        </p:blipFill>
+        <p:spPr>
+          <a:xfrm>
+            <a:off x="1001333" y="1188720"/>
+            <a:ext cx="10189028" cy="3566160"/>
+          </a:xfrm>
+          <a:prstGeom prst="rect">
+            <a:avLst/>
+          </a:prstGeom>
+        </p:spPr>
+      </p:pic>
+      <p:sp>
+        <p:nvSpPr>
+          <p:cNvPr id="4" name="TextBox 3"/>
+          <p:cNvSpPr txBox="1"/>
+          <p:nvPr/>
+        </p:nvSpPr>
+        <p:spPr>
+          <a:xfrm>
+            <a:off x="548640" y="4892040"/>
+            <a:ext cx="5440680" cy="914400"/>
+          </a:xfrm>
+          <a:prstGeom prst="rect">
+            <a:avLst/>
+          </a:prstGeom>
+          <a:noFill/>
+        </p:spPr>
+        <p:txBody>
+          <a:bodyPr wrap="square">
+            <a:spAutoFit/>
+          </a:bodyPr>
+          <a:lstStyle/>
+          <a:p>
+            <a:pPr>
+              <a:lnSpc>
+                <a:spcPct val="125000"/>
+              </a:lnSpc>
+            </a:pPr>
+            <a:r>
+              <a:rPr sz="1200" b="0">
+                <a:solidFill>
+                  <a:srgbClr val="6FC7CF"/>
+                </a:solidFill>
+                <a:latin typeface="Noto Sans TC"/>
+                <a:ea typeface="Noto Sans TC"/>
+                <a:cs typeface="Noto Sans TC"/>
+              </a:rPr>
+              <a:t>• </a:t>
+            </a:r>
+            <a:r>
+              <a:rPr sz="1200" b="0">
+                <a:solidFill>
+                  <a:srgbClr val="E8E6E1"/>
+                </a:solidFill>
+                <a:latin typeface="Noto Sans TC"/>
+                <a:ea typeface="Noto Sans TC"/>
+                <a:cs typeface="Noto Sans TC"/>
+              </a:rPr>
+              <a:t>DeepPCB（trainval </a:t>
+            </a:r>
+            <a:r>
+              <a:rPr sz="1200" b="1">
+                <a:solidFill>
+                  <a:srgbClr val="6FC7CF"/>
+                </a:solidFill>
+                <a:latin typeface="Noto Sans TC"/>
+                <a:ea typeface="Noto Sans TC"/>
+                <a:cs typeface="Noto Sans TC"/>
+              </a:rPr>
+              <a:t>200</a:t>
+            </a:r>
+            <a:r>
+              <a:rPr sz="1200" b="0">
+                <a:solidFill>
+                  <a:srgbClr val="E8E6E1"/>
+                </a:solidFill>
+                <a:latin typeface="Noto Sans TC"/>
+                <a:ea typeface="Noto Sans TC"/>
+                <a:cs typeface="Noto Sans TC"/>
+              </a:rPr>
+              <a:t> 對）：門檻 </a:t>
+            </a:r>
+            <a:r>
+              <a:rPr sz="1200" b="1">
+                <a:solidFill>
+                  <a:srgbClr val="6FC7CF"/>
+                </a:solidFill>
+                <a:latin typeface="Noto Sans TC"/>
+                <a:ea typeface="Noto Sans TC"/>
+                <a:cs typeface="Noto Sans TC"/>
+              </a:rPr>
+              <a:t>30–100</a:t>
+            </a:r>
+            <a:r>
+              <a:rPr sz="1200" b="0">
+                <a:solidFill>
+                  <a:srgbClr val="E8E6E1"/>
+                </a:solidFill>
+                <a:latin typeface="Noto Sans TC"/>
+                <a:ea typeface="Noto Sans TC"/>
+                <a:cs typeface="Noto Sans TC"/>
+              </a:rPr>
+              <a:t> recall 都是 </a:t>
+            </a:r>
+            <a:r>
+              <a:rPr sz="1200" b="1">
+                <a:solidFill>
+                  <a:srgbClr val="6FC7CF"/>
+                </a:solidFill>
+                <a:latin typeface="Noto Sans TC"/>
+                <a:ea typeface="Noto Sans TC"/>
+                <a:cs typeface="Noto Sans TC"/>
+              </a:rPr>
+              <a:t>95.7%</a:t>
+            </a:r>
+            <a:r>
+              <a:rPr sz="1200" b="0">
+                <a:solidFill>
+                  <a:srgbClr val="E8E6E1"/>
+                </a:solidFill>
+                <a:latin typeface="Noto Sans TC"/>
+                <a:ea typeface="Noto Sans TC"/>
+                <a:cs typeface="Noto Sans TC"/>
+              </a:rPr>
+              <a:t>、每張 </a:t>
+            </a:r>
+            <a:r>
+              <a:rPr sz="1200" b="1">
+                <a:solidFill>
+                  <a:srgbClr val="6FC7CF"/>
+                </a:solidFill>
+                <a:latin typeface="Noto Sans TC"/>
+                <a:ea typeface="Noto Sans TC"/>
+                <a:cs typeface="Noto Sans TC"/>
+              </a:rPr>
+              <a:t>10.7</a:t>
+            </a:r>
+            <a:r>
+              <a:rPr sz="1200" b="0">
+                <a:solidFill>
+                  <a:srgbClr val="E8E6E1"/>
+                </a:solidFill>
+                <a:latin typeface="Noto Sans TC"/>
+                <a:ea typeface="Noto Sans TC"/>
+                <a:cs typeface="Noto Sans TC"/>
+              </a:rPr>
+              <a:t> 個誤報——門檻怎麼設都一樣，二值圖沒有灰階可調</a:t>
+            </a:r>
+          </a:p>
+          <a:p>
+            <a:pPr>
+              <a:lnSpc>
+                <a:spcPct val="125000"/>
+              </a:lnSpc>
+            </a:pPr>
+            <a:r>
+              <a:rPr sz="1200" b="0">
+                <a:solidFill>
+                  <a:srgbClr val="6FC7CF"/>
+                </a:solidFill>
+                <a:latin typeface="Noto Sans TC"/>
+                <a:ea typeface="Noto Sans TC"/>
+                <a:cs typeface="Noto Sans TC"/>
+              </a:rPr>
+              <a:t>• </a:t>
+            </a:r>
+            <a:r>
+              <a:rPr sz="1200" b="0">
+                <a:solidFill>
+                  <a:srgbClr val="E8E6E1"/>
+                </a:solidFill>
+                <a:latin typeface="Noto Sans TC"/>
+                <a:ea typeface="Noto Sans TC"/>
+                <a:cs typeface="Noto Sans TC"/>
+              </a:rPr>
+              <a:t>HRIPCB 對齊：門檻 </a:t>
+            </a:r>
+            <a:r>
+              <a:rPr sz="1200" b="1">
+                <a:solidFill>
+                  <a:srgbClr val="6FC7CF"/>
+                </a:solidFill>
+                <a:latin typeface="Noto Sans TC"/>
+                <a:ea typeface="Noto Sans TC"/>
+                <a:cs typeface="Noto Sans TC"/>
+              </a:rPr>
+              <a:t>10</a:t>
+            </a:r>
+            <a:r>
+              <a:rPr sz="1200" b="0">
+                <a:solidFill>
+                  <a:srgbClr val="E8E6E1"/>
+                </a:solidFill>
+                <a:latin typeface="Noto Sans TC"/>
+                <a:ea typeface="Noto Sans TC"/>
+                <a:cs typeface="Noto Sans TC"/>
+              </a:rPr>
+              <a:t> 才有 </a:t>
+            </a:r>
+            <a:r>
+              <a:rPr sz="1200" b="1">
+                <a:solidFill>
+                  <a:srgbClr val="6FC7CF"/>
+                </a:solidFill>
+                <a:latin typeface="Noto Sans TC"/>
+                <a:ea typeface="Noto Sans TC"/>
+                <a:cs typeface="Noto Sans TC"/>
+              </a:rPr>
+              <a:t>92.3%</a:t>
+            </a:r>
+            <a:r>
+              <a:rPr sz="1200" b="0">
+                <a:solidFill>
+                  <a:srgbClr val="E8E6E1"/>
+                </a:solidFill>
+                <a:latin typeface="Noto Sans TC"/>
+                <a:ea typeface="Noto Sans TC"/>
+                <a:cs typeface="Noto Sans TC"/>
+              </a:rPr>
+              <a:t> recall（</a:t>
+            </a:r>
+            <a:r>
+              <a:rPr sz="1200" b="1">
+                <a:solidFill>
+                  <a:srgbClr val="6FC7CF"/>
+                </a:solidFill>
+                <a:latin typeface="Noto Sans TC"/>
+                <a:ea typeface="Noto Sans TC"/>
+                <a:cs typeface="Noto Sans TC"/>
+              </a:rPr>
+              <a:t>1.8</a:t>
+            </a:r>
+            <a:r>
+              <a:rPr sz="1200" b="0">
+                <a:solidFill>
+                  <a:srgbClr val="E8E6E1"/>
+                </a:solidFill>
+                <a:latin typeface="Noto Sans TC"/>
+                <a:ea typeface="Noto Sans TC"/>
+                <a:cs typeface="Noto Sans TC"/>
+              </a:rPr>
+              <a:t> 個誤報）；門檻 </a:t>
+            </a:r>
+            <a:r>
+              <a:rPr sz="1200" b="1">
+                <a:solidFill>
+                  <a:srgbClr val="6FC7CF"/>
+                </a:solidFill>
+                <a:latin typeface="Noto Sans TC"/>
+                <a:ea typeface="Noto Sans TC"/>
+                <a:cs typeface="Noto Sans TC"/>
+              </a:rPr>
+              <a:t>60</a:t>
+            </a:r>
+            <a:r>
+              <a:rPr sz="1200" b="0">
+                <a:solidFill>
+                  <a:srgbClr val="E8E6E1"/>
+                </a:solidFill>
+                <a:latin typeface="Noto Sans TC"/>
+                <a:ea typeface="Noto Sans TC"/>
+                <a:cs typeface="Noto Sans TC"/>
+              </a:rPr>
+              <a:t> 只剩 </a:t>
+            </a:r>
+            <a:r>
+              <a:rPr sz="1200" b="1">
+                <a:solidFill>
+                  <a:srgbClr val="6FC7CF"/>
+                </a:solidFill>
+                <a:latin typeface="Noto Sans TC"/>
+                <a:ea typeface="Noto Sans TC"/>
+                <a:cs typeface="Noto Sans TC"/>
+              </a:rPr>
+              <a:t>14.3%</a:t>
+            </a:r>
+          </a:p>
+        </p:txBody>
+      </p:sp>
+      <p:sp>
+        <p:nvSpPr>
+          <p:cNvPr id="5" name="TextBox 4"/>
+          <p:cNvSpPr txBox="1"/>
+          <p:nvPr/>
+        </p:nvSpPr>
+        <p:spPr>
+          <a:xfrm>
+            <a:off x="6172200" y="4892040"/>
+            <a:ext cx="5440680" cy="914400"/>
+          </a:xfrm>
+          <a:prstGeom prst="rect">
+            <a:avLst/>
+          </a:prstGeom>
+          <a:noFill/>
+        </p:spPr>
+        <p:txBody>
+          <a:bodyPr wrap="square">
+            <a:spAutoFit/>
+          </a:bodyPr>
+          <a:lstStyle/>
+          <a:p>
+            <a:pPr>
+              <a:lnSpc>
+                <a:spcPct val="125000"/>
+              </a:lnSpc>
+            </a:pPr>
+            <a:r>
+              <a:rPr sz="1200" b="0">
+                <a:solidFill>
+                  <a:srgbClr val="6FC7CF"/>
+                </a:solidFill>
+                <a:latin typeface="Noto Sans TC"/>
+                <a:ea typeface="Noto Sans TC"/>
+                <a:cs typeface="Noto Sans TC"/>
+              </a:rPr>
+              <a:t>• </a:t>
+            </a:r>
+            <a:r>
+              <a:rPr sz="1200" b="0">
+                <a:solidFill>
+                  <a:srgbClr val="E8E6E1"/>
+                </a:solidFill>
+                <a:latin typeface="Noto Sans TC"/>
+                <a:ea typeface="Noto Sans TC"/>
+                <a:cs typeface="Noto Sans TC"/>
+              </a:rPr>
+              <a:t>HRIPCB 對齊＋擾動：門檻 </a:t>
+            </a:r>
+            <a:r>
+              <a:rPr sz="1200" b="1">
+                <a:solidFill>
+                  <a:srgbClr val="6FC7CF"/>
+                </a:solidFill>
+                <a:latin typeface="Noto Sans TC"/>
+                <a:ea typeface="Noto Sans TC"/>
+                <a:cs typeface="Noto Sans TC"/>
+              </a:rPr>
+              <a:t>10</a:t>
+            </a:r>
+            <a:r>
+              <a:rPr sz="1200" b="0">
+                <a:solidFill>
+                  <a:srgbClr val="E8E6E1"/>
+                </a:solidFill>
+                <a:latin typeface="Noto Sans TC"/>
+                <a:ea typeface="Noto Sans TC"/>
+                <a:cs typeface="Noto Sans TC"/>
+              </a:rPr>
+              <a:t> recall </a:t>
+            </a:r>
+            <a:r>
+              <a:rPr sz="1200" b="1">
+                <a:solidFill>
+                  <a:srgbClr val="6FC7CF"/>
+                </a:solidFill>
+                <a:latin typeface="Noto Sans TC"/>
+                <a:ea typeface="Noto Sans TC"/>
+                <a:cs typeface="Noto Sans TC"/>
+              </a:rPr>
+              <a:t>90.5%</a:t>
+            </a:r>
+            <a:r>
+              <a:rPr sz="1200" b="0">
+                <a:solidFill>
+                  <a:srgbClr val="E8E6E1"/>
+                </a:solidFill>
+                <a:latin typeface="Noto Sans TC"/>
+                <a:ea typeface="Noto Sans TC"/>
+                <a:cs typeface="Noto Sans TC"/>
+              </a:rPr>
+              <a:t> 但每張 </a:t>
+            </a:r>
+            <a:r>
+              <a:rPr sz="1200" b="1">
+                <a:solidFill>
+                  <a:srgbClr val="6FC7CF"/>
+                </a:solidFill>
+                <a:latin typeface="Noto Sans TC"/>
+                <a:ea typeface="Noto Sans TC"/>
+                <a:cs typeface="Noto Sans TC"/>
+              </a:rPr>
+              <a:t>860</a:t>
+            </a:r>
+            <a:r>
+              <a:rPr sz="1200" b="0">
+                <a:solidFill>
+                  <a:srgbClr val="E8E6E1"/>
+                </a:solidFill>
+                <a:latin typeface="Noto Sans TC"/>
+                <a:ea typeface="Noto Sans TC"/>
+                <a:cs typeface="Noto Sans TC"/>
+              </a:rPr>
+              <a:t> 個誤報；門檻 </a:t>
+            </a:r>
+            <a:r>
+              <a:rPr sz="1200" b="1">
+                <a:solidFill>
+                  <a:srgbClr val="6FC7CF"/>
+                </a:solidFill>
+                <a:latin typeface="Noto Sans TC"/>
+                <a:ea typeface="Noto Sans TC"/>
+                <a:cs typeface="Noto Sans TC"/>
+              </a:rPr>
+              <a:t>60</a:t>
+            </a:r>
+            <a:r>
+              <a:rPr sz="1200" b="0">
+                <a:solidFill>
+                  <a:srgbClr val="E8E6E1"/>
+                </a:solidFill>
+                <a:latin typeface="Noto Sans TC"/>
+                <a:ea typeface="Noto Sans TC"/>
+                <a:cs typeface="Noto Sans TC"/>
+              </a:rPr>
+              <a:t> 誤報 </a:t>
+            </a:r>
+            <a:r>
+              <a:rPr sz="1200" b="1">
+                <a:solidFill>
+                  <a:srgbClr val="6FC7CF"/>
+                </a:solidFill>
+                <a:latin typeface="Noto Sans TC"/>
+                <a:ea typeface="Noto Sans TC"/>
+                <a:cs typeface="Noto Sans TC"/>
+              </a:rPr>
+              <a:t>24.7</a:t>
+            </a:r>
+            <a:r>
+              <a:rPr sz="1200" b="0">
+                <a:solidFill>
+                  <a:srgbClr val="E8E6E1"/>
+                </a:solidFill>
+                <a:latin typeface="Noto Sans TC"/>
+                <a:ea typeface="Noto Sans TC"/>
+                <a:cs typeface="Noto Sans TC"/>
+              </a:rPr>
+              <a:t> 個但 recall </a:t>
+            </a:r>
+            <a:r>
+              <a:rPr sz="1200" b="1">
+                <a:solidFill>
+                  <a:srgbClr val="6FC7CF"/>
+                </a:solidFill>
+                <a:latin typeface="Noto Sans TC"/>
+                <a:ea typeface="Noto Sans TC"/>
+                <a:cs typeface="Noto Sans TC"/>
+              </a:rPr>
+              <a:t>14.2%</a:t>
+            </a:r>
+            <a:r>
+              <a:rPr sz="1200" b="0">
+                <a:solidFill>
+                  <a:srgbClr val="E8E6E1"/>
+                </a:solidFill>
+                <a:latin typeface="Noto Sans TC"/>
+                <a:ea typeface="Noto Sans TC"/>
+                <a:cs typeface="Noto Sans TC"/>
+              </a:rPr>
+              <a:t>——沒有一點同時過兩關</a:t>
+            </a:r>
+          </a:p>
+          <a:p>
+            <a:pPr>
+              <a:lnSpc>
+                <a:spcPct val="125000"/>
+              </a:lnSpc>
+            </a:pPr>
+            <a:r>
+              <a:rPr sz="1200" b="0">
+                <a:solidFill>
+                  <a:srgbClr val="6FC7CF"/>
+                </a:solidFill>
+                <a:latin typeface="Noto Sans TC"/>
+                <a:ea typeface="Noto Sans TC"/>
+                <a:cs typeface="Noto Sans TC"/>
+              </a:rPr>
+              <a:t>• </a:t>
+            </a:r>
+            <a:r>
+              <a:rPr sz="1200" b="0">
+                <a:solidFill>
+                  <a:srgbClr val="E8E6E1"/>
+                </a:solidFill>
+                <a:latin typeface="Noto Sans TC"/>
+                <a:ea typeface="Noto Sans TC"/>
+                <a:cs typeface="Noto Sans TC"/>
+              </a:rPr>
+              <a:t>HRIPCB 旋轉：對位拒絕 </a:t>
+            </a:r>
+            <a:r>
+              <a:rPr sz="1200" b="1">
+                <a:solidFill>
+                  <a:srgbClr val="6FC7CF"/>
+                </a:solidFill>
+                <a:latin typeface="Noto Sans TC"/>
+                <a:ea typeface="Noto Sans TC"/>
+                <a:cs typeface="Noto Sans TC"/>
+              </a:rPr>
+              <a:t>563/693</a:t>
+            </a:r>
+            <a:r>
+              <a:rPr sz="1200" b="0">
+                <a:solidFill>
+                  <a:srgbClr val="E8E6E1"/>
+                </a:solidFill>
+                <a:latin typeface="Noto Sans TC"/>
+                <a:ea typeface="Noto Sans TC"/>
+                <a:cs typeface="Noto Sans TC"/>
+              </a:rPr>
+              <a:t> 對，最好 recall </a:t>
+            </a:r>
+            <a:r>
+              <a:rPr sz="1200" b="1">
+                <a:solidFill>
+                  <a:srgbClr val="6FC7CF"/>
+                </a:solidFill>
+                <a:latin typeface="Noto Sans TC"/>
+                <a:ea typeface="Noto Sans TC"/>
+                <a:cs typeface="Noto Sans TC"/>
+              </a:rPr>
+              <a:t>49.4%</a:t>
+            </a:r>
+            <a:r>
+              <a:rPr sz="1200" b="0">
+                <a:solidFill>
+                  <a:srgbClr val="E8E6E1"/>
+                </a:solidFill>
+                <a:latin typeface="Noto Sans TC"/>
+                <a:ea typeface="Noto Sans TC"/>
+                <a:cs typeface="Noto Sans TC"/>
+              </a:rPr>
+              <a:t>、每張 </a:t>
+            </a:r>
+            <a:r>
+              <a:rPr sz="1200" b="1">
+                <a:solidFill>
+                  <a:srgbClr val="6FC7CF"/>
+                </a:solidFill>
+                <a:latin typeface="Noto Sans TC"/>
+                <a:ea typeface="Noto Sans TC"/>
+                <a:cs typeface="Noto Sans TC"/>
+              </a:rPr>
+              <a:t>282</a:t>
+            </a:r>
+            <a:r>
+              <a:rPr sz="1200" b="0">
+                <a:solidFill>
+                  <a:srgbClr val="E8E6E1"/>
+                </a:solidFill>
+                <a:latin typeface="Noto Sans TC"/>
+                <a:ea typeface="Noto Sans TC"/>
+                <a:cs typeface="Noto Sans TC"/>
+              </a:rPr>
+              <a:t> 個誤報</a:t>
+            </a:r>
+          </a:p>
+        </p:txBody>
+      </p:sp>
+      <p:sp>
+        <p:nvSpPr>
+          <p:cNvPr id="6" name="TextBox 5"/>
+          <p:cNvSpPr txBox="1"/>
+          <p:nvPr/>
+        </p:nvSpPr>
+        <p:spPr>
+          <a:xfrm>
+            <a:off x="548640" y="5897880"/>
+            <a:ext cx="11155680" cy="365760"/>
+          </a:xfrm>
+          <a:prstGeom prst="rect">
+            <a:avLst/>
+          </a:prstGeom>
+          <a:noFill/>
+        </p:spPr>
+        <p:txBody>
+          <a:bodyPr wrap="square">
+            <a:spAutoFit/>
+          </a:bodyPr>
+          <a:lstStyle/>
+          <a:p>
+            <a:pPr>
+              <a:lnSpc>
+                <a:spcPct val="115000"/>
+              </a:lnSpc>
+            </a:pPr>
+            <a:r>
+              <a:rPr sz="950" b="0">
+                <a:solidFill>
+                  <a:srgbClr val="9AA0A6"/>
+                </a:solidFill>
+                <a:latin typeface="IBM Plex Mono"/>
+                <a:ea typeface="Noto Sans TC"/>
+                <a:cs typeface="Noto Sans TC"/>
+              </a:rPr>
+              <a:t>eval/results/gate_check*.json · 每個灰階門檻的 recall 與每張圖的平均誤報數</a:t>
+            </a:r>
+          </a:p>
+        </p:txBody>
+      </p:sp>
+      <p:sp>
+        <p:nvSpPr>
+          <p:cNvPr id="7" name="TextBox 6"/>
+          <p:cNvSpPr txBox="1"/>
+          <p:nvPr/>
+        </p:nvSpPr>
+        <p:spPr>
+          <a:xfrm>
+            <a:off x="457200" y="6400800"/>
+            <a:ext cx="5486400" cy="320040"/>
+          </a:xfrm>
+          <a:prstGeom prst="rect">
+            <a:avLst/>
+          </a:prstGeom>
+          <a:noFill/>
+        </p:spPr>
+        <p:txBody>
+          <a:bodyPr wrap="square">
+            <a:spAutoFit/>
+          </a:bodyPr>
+          <a:lstStyle/>
+          <a:p>
+            <a:pPr>
+              <a:lnSpc>
+                <a:spcPct val="115000"/>
+              </a:lnSpc>
+            </a:pPr>
+            <a:r>
+              <a:rPr sz="1000" b="0">
+                <a:solidFill>
+                  <a:srgbClr val="9AA0A6"/>
+                </a:solidFill>
+                <a:latin typeface="IBM Plex Mono"/>
+                <a:ea typeface="Noto Sans TC"/>
+                <a:cs typeface="Noto Sans TC"/>
+              </a:rPr>
+              <a:t>附錄 · 備查數字</a:t>
+            </a:r>
+          </a:p>
+        </p:txBody>
+      </p:sp>
+      <p:sp>
+        <p:nvSpPr>
+          <p:cNvPr id="8" name="TextBox 7"/>
+          <p:cNvSpPr txBox="1"/>
+          <p:nvPr/>
+        </p:nvSpPr>
+        <p:spPr>
+          <a:xfrm>
+            <a:off x="8046720" y="6400800"/>
+            <a:ext cx="3657600" cy="320040"/>
+          </a:xfrm>
+          <a:prstGeom prst="rect">
+            <a:avLst/>
+          </a:prstGeom>
+          <a:noFill/>
+        </p:spPr>
+        <p:txBody>
+          <a:bodyPr wrap="square">
+            <a:spAutoFit/>
+          </a:bodyPr>
+          <a:lstStyle/>
+          <a:p>
+            <a:pPr algn="r">
+              <a:lnSpc>
+                <a:spcPct val="115000"/>
+              </a:lnSpc>
+            </a:pPr>
+            <a:r>
+              <a:rPr sz="1000" b="0">
+                <a:solidFill>
+                  <a:srgbClr val="9AA0A6"/>
+                </a:solidFill>
+                <a:latin typeface="IBM Plex Mono"/>
+                <a:ea typeface="Noto Sans TC"/>
+                <a:cs typeface="Noto Sans TC"/>
+              </a:rPr>
+              <a:t>38 / 40</a:t>
+            </a:r>
+          </a:p>
+        </p:txBody>
+      </p:sp>
+    </p:spTree>
+  </p:cSld>
+  <p:clrMapOvr>
+    <a:masterClrMapping/>
+  </p:clrMapOvr>
+</p:sld>
+</file>
+
+<file path=ppt/slides/slide39.xml><?xml version="1.0" encoding="utf-8"?>
 <p:sld xmlns:a="http://schemas.openxmlformats.org/drawingml/2006/main" xmlns:p="http://schemas.openxmlformats.org/presentationml/2006/main" xmlns:r="http://schemas.openxmlformats.org/officeDocument/2006/relationships">
   <p:cSld>
     <p:bg>
@@ -36613,7 +36988,7 @@
                 <a:ea typeface="Noto Sans TC"/>
                 <a:cs typeface="Noto Sans TC"/>
               </a:rPr>
-              <a:t>38 / 39</a:t>
+              <a:t>39 / 40</a:t>
             </a:r>
           </a:p>
         </p:txBody>
@@ -36626,7 +37001,221 @@
 </p:sld>
 </file>
 
-<file path=ppt/slides/slide39.xml><?xml version="1.0" encoding="utf-8"?>
+<file path=ppt/slides/slide4.xml><?xml version="1.0" encoding="utf-8"?>
+<p:sld xmlns:a="http://schemas.openxmlformats.org/drawingml/2006/main" xmlns:p="http://schemas.openxmlformats.org/presentationml/2006/main" xmlns:r="http://schemas.openxmlformats.org/officeDocument/2006/relationships">
+  <p:cSld>
+    <p:bg>
+      <p:bgPr>
+        <a:solidFill>
+          <a:srgbClr val="15171A"/>
+        </a:solidFill>
+        <a:effectLst/>
+      </p:bgPr>
+    </p:bg>
+    <p:spTree>
+      <p:nvGrpSpPr>
+        <p:cNvPr id="1" name=""/>
+        <p:cNvGrpSpPr/>
+        <p:nvPr/>
+      </p:nvGrpSpPr>
+      <p:grpSpPr/>
+      <p:sp>
+        <p:nvSpPr>
+          <p:cNvPr id="2" name="TextBox 1"/>
+          <p:cNvSpPr txBox="1"/>
+          <p:nvPr/>
+        </p:nvSpPr>
+        <p:spPr>
+          <a:xfrm>
+            <a:off x="457200" y="274320"/>
+            <a:ext cx="11247120" cy="731520"/>
+          </a:xfrm>
+          <a:prstGeom prst="rect">
+            <a:avLst/>
+          </a:prstGeom>
+          <a:noFill/>
+        </p:spPr>
+        <p:txBody>
+          <a:bodyPr wrap="square">
+            <a:spAutoFit/>
+          </a:bodyPr>
+          <a:lstStyle/>
+          <a:p>
+            <a:pPr>
+              <a:lnSpc>
+                <a:spcPct val="115000"/>
+              </a:lnSpc>
+            </a:pPr>
+            <a:r>
+              <a:rPr sz="2800" b="1">
+                <a:solidFill>
+                  <a:srgbClr val="E8E6E1"/>
+                </a:solidFill>
+                <a:latin typeface="Noto Sans TC"/>
+                <a:ea typeface="Noto Sans TC"/>
+                <a:cs typeface="Noto Sans TC"/>
+              </a:rPr>
+              <a:t>架構：一個紅框往哪裡走</a:t>
+            </a:r>
+          </a:p>
+        </p:txBody>
+      </p:sp>
+      <p:pic>
+        <p:nvPicPr>
+          <p:cNvPr id="3" name="Picture 2" descr="architecture.png"/>
+          <p:cNvPicPr>
+            <a:picLocks noChangeAspect="1"/>
+          </p:cNvPicPr>
+          <p:nvPr/>
+        </p:nvPicPr>
+        <p:blipFill>
+          <a:blip r:embed="rId2"/>
+          <a:stretch>
+            <a:fillRect/>
+          </a:stretch>
+        </p:blipFill>
+        <p:spPr>
+          <a:xfrm>
+            <a:off x="2544394" y="1005840"/>
+            <a:ext cx="7102907" cy="4846320"/>
+          </a:xfrm>
+          <a:prstGeom prst="rect">
+            <a:avLst/>
+          </a:prstGeom>
+        </p:spPr>
+      </p:pic>
+      <p:sp>
+        <p:nvSpPr>
+          <p:cNvPr id="4" name="TextBox 3"/>
+          <p:cNvSpPr txBox="1"/>
+          <p:nvPr/>
+        </p:nvSpPr>
+        <p:spPr>
+          <a:xfrm>
+            <a:off x="548640" y="5897880"/>
+            <a:ext cx="11155680" cy="365760"/>
+          </a:xfrm>
+          <a:prstGeom prst="rect">
+            <a:avLst/>
+          </a:prstGeom>
+          <a:noFill/>
+        </p:spPr>
+        <p:txBody>
+          <a:bodyPr wrap="square">
+            <a:spAutoFit/>
+          </a:bodyPr>
+          <a:lstStyle/>
+          <a:p>
+            <a:pPr>
+              <a:lnSpc>
+                <a:spcPct val="115000"/>
+              </a:lnSpc>
+            </a:pPr>
+            <a:r>
+              <a:rPr sz="950" b="0">
+                <a:solidFill>
+                  <a:srgbClr val="9AA0A6"/>
+                </a:solidFill>
+                <a:latin typeface="IBM Plex Mono"/>
+                <a:ea typeface="Noto Sans TC"/>
+                <a:cs typeface="Noto Sans TC"/>
+              </a:rPr>
+              <a:t>docs/architecture-diagram.html — 五層：相減前端、複判模型、門檻與路由、agent 與站台、/ask 分析</a:t>
+            </a:r>
+          </a:p>
+        </p:txBody>
+      </p:sp>
+      <p:sp>
+        <p:nvSpPr>
+          <p:cNvPr id="5" name="TextBox 4"/>
+          <p:cNvSpPr txBox="1"/>
+          <p:nvPr/>
+        </p:nvSpPr>
+        <p:spPr>
+          <a:xfrm>
+            <a:off x="457200" y="6400800"/>
+            <a:ext cx="5486400" cy="320040"/>
+          </a:xfrm>
+          <a:prstGeom prst="rect">
+            <a:avLst/>
+          </a:prstGeom>
+          <a:noFill/>
+        </p:spPr>
+        <p:txBody>
+          <a:bodyPr wrap="square">
+            <a:spAutoFit/>
+          </a:bodyPr>
+          <a:lstStyle/>
+          <a:p>
+            <a:pPr>
+              <a:lnSpc>
+                <a:spcPct val="115000"/>
+              </a:lnSpc>
+            </a:pPr>
+            <a:r>
+              <a:rPr sz="1000" b="0">
+                <a:solidFill>
+                  <a:srgbClr val="9AA0A6"/>
+                </a:solidFill>
+                <a:latin typeface="IBM Plex Mono"/>
+                <a:ea typeface="Noto Sans TC"/>
+                <a:cs typeface="Noto Sans TC"/>
+              </a:rPr>
+              <a:t>開場</a:t>
+            </a:r>
+          </a:p>
+        </p:txBody>
+      </p:sp>
+      <p:sp>
+        <p:nvSpPr>
+          <p:cNvPr id="6" name="TextBox 5"/>
+          <p:cNvSpPr txBox="1"/>
+          <p:nvPr/>
+        </p:nvSpPr>
+        <p:spPr>
+          <a:xfrm>
+            <a:off x="8046720" y="6400800"/>
+            <a:ext cx="3657600" cy="320040"/>
+          </a:xfrm>
+          <a:prstGeom prst="rect">
+            <a:avLst/>
+          </a:prstGeom>
+          <a:noFill/>
+        </p:spPr>
+        <p:txBody>
+          <a:bodyPr wrap="square">
+            <a:spAutoFit/>
+          </a:bodyPr>
+          <a:lstStyle/>
+          <a:p>
+            <a:pPr algn="r">
+              <a:lnSpc>
+                <a:spcPct val="115000"/>
+              </a:lnSpc>
+            </a:pPr>
+            <a:r>
+              <a:rPr sz="1000" b="0">
+                <a:solidFill>
+                  <a:srgbClr val="6FC7CF"/>
+                </a:solidFill>
+                <a:latin typeface="IBM Plex Mono"/>
+                <a:ea typeface="Noto Sans TC"/>
+                <a:cs typeface="Noto Sans TC"/>
+              </a:rPr>
+              <a:t>★ 主線 3/9 · 4 / 40</a:t>
+            </a:r>
+          </a:p>
+        </p:txBody>
+      </p:sp>
+    </p:spTree>
+  </p:cSld>
+  <p:clrMapOvr>
+    <a:masterClrMapping/>
+  </p:clrMapOvr>
+</p:sld>
+</file>
+
+<file path=ppt/slides/slide40.xml><?xml version="1.0" encoding="utf-8"?>
 <p:sld xmlns:a="http://schemas.openxmlformats.org/drawingml/2006/main" xmlns:p="http://schemas.openxmlformats.org/presentationml/2006/main" xmlns:r="http://schemas.openxmlformats.org/officeDocument/2006/relationships">
   <p:cSld>
     <p:bg>
@@ -37598,221 +38187,7 @@
                 <a:ea typeface="Noto Sans TC"/>
                 <a:cs typeface="Noto Sans TC"/>
               </a:rPr>
-              <a:t>39 / 39</a:t>
-            </a:r>
-          </a:p>
-        </p:txBody>
-      </p:sp>
-    </p:spTree>
-  </p:cSld>
-  <p:clrMapOvr>
-    <a:masterClrMapping/>
-  </p:clrMapOvr>
-</p:sld>
-</file>
-
-<file path=ppt/slides/slide4.xml><?xml version="1.0" encoding="utf-8"?>
-<p:sld xmlns:a="http://schemas.openxmlformats.org/drawingml/2006/main" xmlns:p="http://schemas.openxmlformats.org/presentationml/2006/main" xmlns:r="http://schemas.openxmlformats.org/officeDocument/2006/relationships">
-  <p:cSld>
-    <p:bg>
-      <p:bgPr>
-        <a:solidFill>
-          <a:srgbClr val="15171A"/>
-        </a:solidFill>
-        <a:effectLst/>
-      </p:bgPr>
-    </p:bg>
-    <p:spTree>
-      <p:nvGrpSpPr>
-        <p:cNvPr id="1" name=""/>
-        <p:cNvGrpSpPr/>
-        <p:nvPr/>
-      </p:nvGrpSpPr>
-      <p:grpSpPr/>
-      <p:sp>
-        <p:nvSpPr>
-          <p:cNvPr id="2" name="TextBox 1"/>
-          <p:cNvSpPr txBox="1"/>
-          <p:nvPr/>
-        </p:nvSpPr>
-        <p:spPr>
-          <a:xfrm>
-            <a:off x="457200" y="274320"/>
-            <a:ext cx="11247120" cy="731520"/>
-          </a:xfrm>
-          <a:prstGeom prst="rect">
-            <a:avLst/>
-          </a:prstGeom>
-          <a:noFill/>
-        </p:spPr>
-        <p:txBody>
-          <a:bodyPr wrap="square">
-            <a:spAutoFit/>
-          </a:bodyPr>
-          <a:lstStyle/>
-          <a:p>
-            <a:pPr>
-              <a:lnSpc>
-                <a:spcPct val="115000"/>
-              </a:lnSpc>
-            </a:pPr>
-            <a:r>
-              <a:rPr sz="2800" b="1">
-                <a:solidFill>
-                  <a:srgbClr val="E8E6E1"/>
-                </a:solidFill>
-                <a:latin typeface="Noto Sans TC"/>
-                <a:ea typeface="Noto Sans TC"/>
-                <a:cs typeface="Noto Sans TC"/>
-              </a:rPr>
-              <a:t>架構：一個紅框往哪裡走</a:t>
-            </a:r>
-          </a:p>
-        </p:txBody>
-      </p:sp>
-      <p:pic>
-        <p:nvPicPr>
-          <p:cNvPr id="3" name="Picture 2" descr="architecture.png"/>
-          <p:cNvPicPr>
-            <a:picLocks noChangeAspect="1"/>
-          </p:cNvPicPr>
-          <p:nvPr/>
-        </p:nvPicPr>
-        <p:blipFill>
-          <a:blip r:embed="rId2"/>
-          <a:stretch>
-            <a:fillRect/>
-          </a:stretch>
-        </p:blipFill>
-        <p:spPr>
-          <a:xfrm>
-            <a:off x="2544394" y="1005840"/>
-            <a:ext cx="7102907" cy="4846320"/>
-          </a:xfrm>
-          <a:prstGeom prst="rect">
-            <a:avLst/>
-          </a:prstGeom>
-        </p:spPr>
-      </p:pic>
-      <p:sp>
-        <p:nvSpPr>
-          <p:cNvPr id="4" name="TextBox 3"/>
-          <p:cNvSpPr txBox="1"/>
-          <p:nvPr/>
-        </p:nvSpPr>
-        <p:spPr>
-          <a:xfrm>
-            <a:off x="548640" y="5897880"/>
-            <a:ext cx="11155680" cy="365760"/>
-          </a:xfrm>
-          <a:prstGeom prst="rect">
-            <a:avLst/>
-          </a:prstGeom>
-          <a:noFill/>
-        </p:spPr>
-        <p:txBody>
-          <a:bodyPr wrap="square">
-            <a:spAutoFit/>
-          </a:bodyPr>
-          <a:lstStyle/>
-          <a:p>
-            <a:pPr>
-              <a:lnSpc>
-                <a:spcPct val="115000"/>
-              </a:lnSpc>
-            </a:pPr>
-            <a:r>
-              <a:rPr sz="950" b="0">
-                <a:solidFill>
-                  <a:srgbClr val="9AA0A6"/>
-                </a:solidFill>
-                <a:latin typeface="IBM Plex Mono"/>
-                <a:ea typeface="Noto Sans TC"/>
-                <a:cs typeface="Noto Sans TC"/>
-              </a:rPr>
-              <a:t>docs/architecture-diagram.html — 五層：相減前端、複判模型、門檻與路由、agent 與站台、/ask 分析</a:t>
-            </a:r>
-          </a:p>
-        </p:txBody>
-      </p:sp>
-      <p:sp>
-        <p:nvSpPr>
-          <p:cNvPr id="5" name="TextBox 4"/>
-          <p:cNvSpPr txBox="1"/>
-          <p:nvPr/>
-        </p:nvSpPr>
-        <p:spPr>
-          <a:xfrm>
-            <a:off x="457200" y="6400800"/>
-            <a:ext cx="5486400" cy="320040"/>
-          </a:xfrm>
-          <a:prstGeom prst="rect">
-            <a:avLst/>
-          </a:prstGeom>
-          <a:noFill/>
-        </p:spPr>
-        <p:txBody>
-          <a:bodyPr wrap="square">
-            <a:spAutoFit/>
-          </a:bodyPr>
-          <a:lstStyle/>
-          <a:p>
-            <a:pPr>
-              <a:lnSpc>
-                <a:spcPct val="115000"/>
-              </a:lnSpc>
-            </a:pPr>
-            <a:r>
-              <a:rPr sz="1000" b="0">
-                <a:solidFill>
-                  <a:srgbClr val="9AA0A6"/>
-                </a:solidFill>
-                <a:latin typeface="IBM Plex Mono"/>
-                <a:ea typeface="Noto Sans TC"/>
-                <a:cs typeface="Noto Sans TC"/>
-              </a:rPr>
-              <a:t>開場</a:t>
-            </a:r>
-          </a:p>
-        </p:txBody>
-      </p:sp>
-      <p:sp>
-        <p:nvSpPr>
-          <p:cNvPr id="6" name="TextBox 5"/>
-          <p:cNvSpPr txBox="1"/>
-          <p:nvPr/>
-        </p:nvSpPr>
-        <p:spPr>
-          <a:xfrm>
-            <a:off x="8046720" y="6400800"/>
-            <a:ext cx="3657600" cy="320040"/>
-          </a:xfrm>
-          <a:prstGeom prst="rect">
-            <a:avLst/>
-          </a:prstGeom>
-          <a:noFill/>
-        </p:spPr>
-        <p:txBody>
-          <a:bodyPr wrap="square">
-            <a:spAutoFit/>
-          </a:bodyPr>
-          <a:lstStyle/>
-          <a:p>
-            <a:pPr algn="r">
-              <a:lnSpc>
-                <a:spcPct val="115000"/>
-              </a:lnSpc>
-            </a:pPr>
-            <a:r>
-              <a:rPr sz="1000" b="0">
-                <a:solidFill>
-                  <a:srgbClr val="6FC7CF"/>
-                </a:solidFill>
-                <a:latin typeface="IBM Plex Mono"/>
-                <a:ea typeface="Noto Sans TC"/>
-                <a:cs typeface="Noto Sans TC"/>
-              </a:rPr>
-              <a:t>★ 主線 3/9 · 4 / 39</a:t>
+              <a:t>40 / 40</a:t>
             </a:r>
           </a:p>
         </p:txBody>
@@ -38026,7 +38401,7 @@
                 <a:ea typeface="Noto Sans TC"/>
                 <a:cs typeface="Noto Sans TC"/>
               </a:rPr>
-              <a:t>5 / 39</a:t>
+              <a:t>5 / 40</a:t>
             </a:r>
           </a:p>
         </p:txBody>
@@ -38240,7 +38615,7 @@
                 <a:ea typeface="Noto Sans TC"/>
                 <a:cs typeface="Noto Sans TC"/>
               </a:rPr>
-              <a:t>6 / 39</a:t>
+              <a:t>6 / 40</a:t>
             </a:r>
           </a:p>
         </p:txBody>
@@ -39447,7 +39822,7 @@
                 <a:ea typeface="Noto Sans TC"/>
                 <a:cs typeface="Noto Sans TC"/>
               </a:rPr>
-              <a:t>7 / 39</a:t>
+              <a:t>7 / 40</a:t>
             </a:r>
           </a:p>
         </p:txBody>
@@ -40827,7 +41202,7 @@
                 <a:ea typeface="Noto Sans TC"/>
                 <a:cs typeface="Noto Sans TC"/>
               </a:rPr>
-              <a:t>★ 主線 5/9 · 8 / 39</a:t>
+              <a:t>★ 主線 5/9 · 8 / 40</a:t>
             </a:r>
           </a:p>
         </p:txBody>
@@ -42166,7 +42541,7 @@
                 <a:ea typeface="Noto Sans TC"/>
                 <a:cs typeface="Noto Sans TC"/>
               </a:rPr>
-              <a:t>9 / 39</a:t>
+              <a:t>9 / 40</a:t>
             </a:r>
           </a:p>
         </p:txBody>

--- a/docs/deck/aoi-agent-journey.zh-TW.pptx
+++ b/docs/deck/aoi-agent-journey.zh-TW.pptx
@@ -773,22 +773,22 @@
           </a:p>
           <a:p>
             <a:r>
-              <a:t>講稿 2. 橫軸漏檢率、縱軸省掉的人工，門檻掃過去就是這條線。曲線上最好的那一點是 0.961，52.8% 而且剛好達標——那也是我出貨了九天的數字，而它是錯的：那個門檻是在同一份切分上掃出來的，達標是用答案買來的。</a:t>
-            </a:r>
-          </a:p>
-          <a:p>
-            <a:r>
-              <a:t>講稿 3. 誠實的選法是交叉驗證：五折、每折用沒訓練過那折的模型預測、6,569 個缺陷合起來選，而且取區間上緣不取點估計，因為預算是對還沒看過的缺陷的承諾。選出來是 0.912。</a:t>
-            </a:r>
-          </a:p>
-          <a:p>
-            <a:r>
-              <a:t>講稿 4. 在這份沒看過的切分上，0.912 省 55.6% 的人工、漏 0.66%——超過 0.5%。我把它寫在頭條旁邊，不藏。按缺陷數算是 0.35%、整線 0.51%，兩個讀法都印。</a:t>
-            </a:r>
-          </a:p>
-          <a:p>
-            <a:r>
-              <a:t>講稿 5. 最後一件事比門檻本身重要：選門檻的那份資料估 0.32%，實際量到 0.66%，每個門檻都是同一個兩倍。兩邊類別組成一樣，超出的部分集中在 open 和 short——所以這不是調參調壞的，是 trainval 的板子比較容易。</a:t>
+              <a:t>講稿 2. 橫軸漏檢率、縱軸省掉的人工，門檻掃過去就是這條線。曲線上最好的那一點是 0.961，52.8% 而且剛好達標——那是這份切分能達到的上限，作為引擎之間的比較很公平，但它是在這份切分上挑的，所以不能同時當部署數字。</a:t>
+            </a:r>
+          </a:p>
+          <a:p>
+            <a:r>
+              <a:t>講稿 3. 所以選門檻用另一份資料：五折交叉驗證，每折用沒訓練過那折的模型預測，6,569 個缺陷合起來選，取區間上緣不取點估計，因為預算是對還沒看過的缺陷的承諾。選出來是 0.912。</a:t>
+            </a:r>
+          </a:p>
+          <a:p>
+            <a:r>
+              <a:t>講稿 4. 在這份沒參與選擇的切分上，0.912 省 55.6% 的人工、漏 0.66%——超過 0.5%。按缺陷數算是 0.35%、整線 0.51%，兩個讀法都印在頭條旁邊。</a:t>
+            </a:r>
+          </a:p>
+          <a:p>
+            <a:r>
+              <a:t>講稿 5. 最後一件事比門檻本身重要：選擇集估 0.32%、test 實測 0.66%，每個門檻都是同一個兩倍，兩邊類別組成也一樣。那是一個泛化差距的量測——trainval 的板子比官方測試板容易，而差距集中在 open 和 short。</a:t>
             </a:r>
           </a:p>
           <a:p/>
@@ -810,12 +810,12 @@
           <a:p/>
           <a:p>
             <a:r>
-              <a:t>Q：你怎麼發現 52.8% 有問題的？</a:t>
-            </a:r>
-          </a:p>
-          <a:p>
-            <a:r>
-              <a:t>A：去追那個門檻是怎麼定的。0.961 是 report.py 在 test_predictions.npz 上掃出來的，而那正是我報告成績的那份切分——它看過答案。作為引擎之間的比較公平，各給一個 oracle；作為出貨數字不行。</a:t>
+              <a:t>Q：為什麼要換掉 52.8%？</a:t>
+            </a:r>
+          </a:p>
+          <a:p>
+            <a:r>
+              <a:t>A：因為那個門檻是在報成績的同一份切分上掃出來的——一份資料同時做了選超參數和報成績兩件事。作為引擎之間的比較它是公平的，四個引擎各拿自己的最佳點；作為部署數字不行，因為那個點是看著這份資料挑的。</a:t>
             </a:r>
           </a:p>
           <a:p/>
@@ -826,7 +826,7 @@
           </a:p>
           <a:p>
             <a:r>
-              <a:t>A：那就是我剛拿掉的那件事。門檻只能用 trainval 選，test 只能用來報告。所以現在有兩個測試故意斷言相反的方向——「aggregate 未達標」「出貨門檻在 test 上超標」——把門檻調到這份切分達標為止會讓測試變紅。</a:t>
+              <a:t>A：那會把剛拆開的兩件事又併回去。門檻只能用選擇集選，test 只能用來報告。所以現在有兩個測試故意斷言相反的方向——「aggregate 未達標」「出貨門檻在 test 上超標」——把門檻調到這份切分達標為止會讓測試變紅。</a:t>
             </a:r>
           </a:p>
           <a:p/>
@@ -1390,28 +1390,28 @@
           <a:lstStyle/>
           <a:p>
             <a:r>
-              <a:t>白話：52.8% @ ≤0.5% 是這個專案的招牌。去追那個門檻怎麼定的，發現它是在我報告成績的同一份資料上挑出來的——所以達標是用答案買的。</a:t>
+              <a:t>白話：門檻是一個超參數，而超參數不該用「等一下要拿來報成績」的那份資料選。把兩件事拆開之後，量到的不是一個修正，是一個泛化差距。</a:t>
             </a:r>
           </a:p>
           <a:p/>
           <a:p>
             <a:r>
-              <a:t>講稿 1. 這是我最不想講、但一定要講的一頁。52.8% @ 0.5% 是我履歷第一行，而它的達標是假的。</a:t>
-            </a:r>
-          </a:p>
-          <a:p>
-            <a:r>
-              <a:t>講稿 2. 門檻 0.961 是 report.py 在 test_predictions.npz 上掃出來的，那正是我報成績的那份切分。作為引擎之間的比較這樣公平，各給一個 oracle；作為出貨數字不行，因為它看過答案。</a:t>
-            </a:r>
-          </a:p>
-          <a:p>
-            <a:r>
-              <a:t>講稿 3. 改成交叉驗證選：五折、每折用沒看過那折的模型、6,569 個缺陷合起來選，取區間上緣。答案是 0.912，在 test 上省 55.6%、漏 0.66%，超過預算。我把它寫在頭條旁邊。</a:t>
-            </a:r>
-          </a:p>
-          <a:p>
-            <a:r>
-              <a:t>講稿 4. 但真正的發現比門檻大：選門檻那份資料估 0.32%，實際 0.66%，每個門檻都是兩倍。所以是資料本身不可互換，不是我調壞了。</a:t>
+              <a:t>講稿 1. 這一頁講的是一個方法學問題，還有它量出來的東西。門檻是一個超參數，而我原本是在 test 上掃出來的。</a:t>
+            </a:r>
+          </a:p>
+          <a:p>
+            <a:r>
+              <a:t>講稿 2. 那個設定在一件事上是對的：比較 FP32、ONNX、INT8 四個引擎時，每個引擎各拿自己的最佳點，很公平。問題是同一個數字也被當成部署數字用了——一份資料同時做了選門檻和報成績兩件事。</a:t>
+            </a:r>
+          </a:p>
+          <a:p>
+            <a:r>
+              <a:t>講稿 3. 所以我把選門檻的資料獨立出來，然後量分開之後會不會動。事先講好：如果兩份資料可互換，應該幾乎不動。結果門檻從 0.961 變 0.912，漏檢從估的 0.32% 變實測的 0.66%。</a:t>
+            </a:r>
+          </a:p>
+          <a:p>
+            <a:r>
+              <a:t>講稿 4. 而那個兩倍在每一個門檻上都成立，兩邊類別組成也一樣——所以這是一個泛化差距的量測，不是一次調參失誤。多出來的漏檢集中在 open 和 short，正好是最不能漏的兩類。</a:t>
             </a:r>
           </a:p>
           <a:p>
@@ -16109,7 +16109,7 @@
                 <a:ea typeface="Noto Sans TC"/>
                 <a:cs typeface="Noto Sans TC"/>
               </a:rPr>
-              <a:t>錯 #9：頭條數字的「達標」，是用答案買來的</a:t>
+              <a:t>錯 #9：選門檻和報成績用了同一份資料</a:t>
             </a:r>
           </a:p>
         </p:txBody>
@@ -16196,7 +16196,7 @@
                 <a:ea typeface="Noto Sans TC"/>
                 <a:cs typeface="Noto Sans TC"/>
               </a:rPr>
-              <a:t>52.8% → 55.6%</a:t>
+              <a:t>0.32% → 0.66%</a:t>
             </a:r>
           </a:p>
         </p:txBody>
@@ -16237,7 +16237,7 @@
                 <a:ea typeface="Noto Sans TC"/>
                 <a:cs typeface="Noto Sans TC"/>
               </a:rPr>
-              <a:t>頭條，換成誠實選的門檻</a:t>
+              <a:t>同一個門檻，選擇集估 vs 實測</a:t>
             </a:r>
           </a:p>
         </p:txBody>
@@ -16316,7 +16316,7 @@
               </a:lnSpc>
             </a:pPr>
             <a:r>
-              <a:rPr sz="1800" b="1">
+              <a:rPr sz="2200" b="1">
                 <a:solidFill>
                   <a:srgbClr val="6FC7CF"/>
                 </a:solidFill>
@@ -16324,7 +16324,7 @@
                 <a:ea typeface="Noto Sans TC"/>
                 <a:cs typeface="Noto Sans TC"/>
               </a:rPr>
-              <a:t>0.50% → 0.66%</a:t>
+              <a:t>2 倍</a:t>
             </a:r>
           </a:p>
         </p:txBody>
@@ -16365,7 +16365,7 @@
                 <a:ea typeface="Noto Sans TC"/>
                 <a:cs typeface="Noto Sans TC"/>
               </a:rPr>
-              <a:t>漏檢率，超過 0.5% 的預算</a:t>
+              <a:t>而且每個門檻都是——系統性的</a:t>
             </a:r>
           </a:p>
         </p:txBody>
@@ -16452,7 +16452,7 @@
                 <a:ea typeface="Noto Sans TC"/>
                 <a:cs typeface="Noto Sans TC"/>
               </a:rPr>
-              <a:t>2 倍</a:t>
+              <a:t>15 / 20</a:t>
             </a:r>
           </a:p>
         </p:txBody>
@@ -16493,7 +16493,7 @@
                 <a:ea typeface="Noto Sans TC"/>
                 <a:cs typeface="Noto Sans TC"/>
               </a:rPr>
-              <a:t>選門檻的資料低估的倍率</a:t>
+              <a:t>多出來的漏檢集中在 open 和 short</a:t>
             </a:r>
           </a:p>
         </p:txBody>
@@ -16575,7 +16575,89 @@
                 <a:ea typeface="Noto Sans TC"/>
                 <a:cs typeface="Noto Sans TC"/>
               </a:rPr>
-              <a:t>當時要回答的問題是：程式裡的 </a:t>
+              <a:t>當時要回答的問題是：門檻是一個超參數，它該用哪一份資料選？原本的設計只有兩份資料——trainval 訓練、test 報告——而門檻是在 test 上掃的。作為四個引擎之間的比較這是公平的，每個引擎各拿自己的最佳點；但同一個數字也被當成部署數字用，那就是一份資料同時做了兩件事。就算拆開之後數字沒動，這一趟也要走，因為它是頭條數字的來源。</a:t>
+            </a:r>
+          </a:p>
+        </p:txBody>
+      </p:sp>
+      <p:sp>
+        <p:nvSpPr>
+          <p:cNvPr id="14" name="TextBox 13"/>
+          <p:cNvSpPr txBox="1"/>
+          <p:nvPr/>
+        </p:nvSpPr>
+        <p:spPr>
+          <a:xfrm>
+            <a:off x="457200" y="3063240"/>
+            <a:ext cx="1325880" cy="758952"/>
+          </a:xfrm>
+          <a:prstGeom prst="rect">
+            <a:avLst/>
+          </a:prstGeom>
+          <a:noFill/>
+        </p:spPr>
+        <p:txBody>
+          <a:bodyPr wrap="square">
+            <a:spAutoFit/>
+          </a:bodyPr>
+          <a:lstStyle/>
+          <a:p>
+            <a:pPr>
+              <a:lnSpc>
+                <a:spcPct val="115000"/>
+              </a:lnSpc>
+            </a:pPr>
+            <a:r>
+              <a:rPr sz="1300" b="1">
+                <a:solidFill>
+                  <a:srgbClr val="6FC7CF"/>
+                </a:solidFill>
+                <a:latin typeface="Noto Sans TC"/>
+                <a:ea typeface="Noto Sans TC"/>
+                <a:cs typeface="Noto Sans TC"/>
+              </a:rPr>
+              <a:t>怎麼設計</a:t>
+            </a:r>
+          </a:p>
+        </p:txBody>
+      </p:sp>
+      <p:sp>
+        <p:nvSpPr>
+          <p:cNvPr id="15" name="TextBox 14"/>
+          <p:cNvSpPr txBox="1"/>
+          <p:nvPr/>
+        </p:nvSpPr>
+        <p:spPr>
+          <a:xfrm>
+            <a:off x="1828800" y="3063240"/>
+            <a:ext cx="9875520" cy="758952"/>
+          </a:xfrm>
+          <a:prstGeom prst="rect">
+            <a:avLst/>
+          </a:prstGeom>
+          <a:noFill/>
+        </p:spPr>
+        <p:txBody>
+          <a:bodyPr wrap="square">
+            <a:spAutoFit/>
+          </a:bodyPr>
+          <a:lstStyle/>
+          <a:p>
+            <a:pPr>
+              <a:lnSpc>
+                <a:spcPct val="112000"/>
+              </a:lnSpc>
+            </a:pPr>
+            <a:r>
+              <a:rPr sz="1200" b="0">
+                <a:solidFill>
+                  <a:srgbClr val="E8E6E1"/>
+                </a:solidFill>
+                <a:latin typeface="Noto Sans TC"/>
+                <a:ea typeface="Noto Sans TC"/>
+                <a:cs typeface="Noto Sans TC"/>
+              </a:rPr>
+              <a:t>把選門檻的資料獨立出來，然後量「分開之後數字會不會動」。五折依影像切 trainval，每折用沒訓練過那折的模型預測，out-of-fold 合起來 </a:t>
             </a:r>
             <a:r>
               <a:rPr sz="1200" b="1">
@@ -16586,7 +16668,7 @@
                 <a:ea typeface="Noto Sans TC"/>
                 <a:cs typeface="Noto Sans TC"/>
               </a:rPr>
-              <a:t>0.961</a:t>
+              <a:t>6,569</a:t>
             </a:r>
             <a:r>
               <a:rPr sz="1200" b="0">
@@ -16597,21 +16679,43 @@
                 <a:ea typeface="Noto Sans TC"/>
                 <a:cs typeface="Noto Sans TC"/>
               </a:rPr>
-              <a:t> 是怎麼定的？我沿著它一路追到 report.py，看它在哪一份資料上掃；如果它掃的是 test_predictions.npz，那就是我報告成績的那一份，這個門檻就不能算出貨數字。就算追完發現沒問題，這一趟也還是要走，因為它是我履歷第一行的來源。</a:t>
-            </a:r>
-          </a:p>
-        </p:txBody>
-      </p:sp>
-      <p:sp>
-        <p:nvSpPr>
-          <p:cNvPr id="14" name="TextBox 13"/>
-          <p:cNvSpPr txBox="1"/>
-          <p:nvPr/>
-        </p:nvSpPr>
-        <p:spPr>
-          <a:xfrm>
-            <a:off x="457200" y="3063240"/>
-            <a:ext cx="1325880" cy="530352"/>
+              <a:t> 個缺陷選門檻，test 完全不參與；並取 </a:t>
+            </a:r>
+            <a:r>
+              <a:rPr sz="1200" b="1">
+                <a:solidFill>
+                  <a:srgbClr val="6FC7CF"/>
+                </a:solidFill>
+                <a:latin typeface="Noto Sans TC"/>
+                <a:ea typeface="Noto Sans TC"/>
+                <a:cs typeface="Noto Sans TC"/>
+              </a:rPr>
+              <a:t>95%</a:t>
+            </a:r>
+            <a:r>
+              <a:rPr sz="1200" b="0">
+                <a:solidFill>
+                  <a:srgbClr val="E8E6E1"/>
+                </a:solidFill>
+                <a:latin typeface="Noto Sans TC"/>
+                <a:ea typeface="Noto Sans TC"/>
+                <a:cs typeface="Noto Sans TC"/>
+              </a:rPr>
+              <a:t> 區間上緣不取點估計，因為預算是對還沒看過的缺陷的承諾。事先講好的失敗條件：如果兩份資料可互換，門檻和漏檢率應該幾乎不動。</a:t>
+            </a:r>
+          </a:p>
+        </p:txBody>
+      </p:sp>
+      <p:sp>
+        <p:nvSpPr>
+          <p:cNvPr id="16" name="TextBox 15"/>
+          <p:cNvSpPr txBox="1"/>
+          <p:nvPr/>
+        </p:nvSpPr>
+        <p:spPr>
+          <a:xfrm>
+            <a:off x="457200" y="3950208"/>
+            <a:ext cx="1325880" cy="758952"/>
           </a:xfrm>
           <a:prstGeom prst="rect">
             <a:avLst/>
@@ -16638,21 +16742,21 @@
                 <a:ea typeface="Noto Sans TC"/>
                 <a:cs typeface="Noto Sans TC"/>
               </a:rPr>
-              <a:t>怎麼設計</a:t>
-            </a:r>
-          </a:p>
-        </p:txBody>
-      </p:sp>
-      <p:sp>
-        <p:nvSpPr>
-          <p:cNvPr id="15" name="TextBox 14"/>
-          <p:cNvSpPr txBox="1"/>
-          <p:nvPr/>
-        </p:nvSpPr>
-        <p:spPr>
-          <a:xfrm>
-            <a:off x="1828800" y="3063240"/>
-            <a:ext cx="9875520" cy="530352"/>
+              <a:t>量到什麼</a:t>
+            </a:r>
+          </a:p>
+        </p:txBody>
+      </p:sp>
+      <p:sp>
+        <p:nvSpPr>
+          <p:cNvPr id="17" name="TextBox 16"/>
+          <p:cNvSpPr txBox="1"/>
+          <p:nvPr/>
+        </p:nvSpPr>
+        <p:spPr>
+          <a:xfrm>
+            <a:off x="1828800" y="3950208"/>
+            <a:ext cx="9875520" cy="758952"/>
           </a:xfrm>
           <a:prstGeom prst="rect">
             <a:avLst/>
@@ -16679,7 +16783,7 @@
                 <a:ea typeface="Noto Sans TC"/>
                 <a:cs typeface="Noto Sans TC"/>
               </a:rPr>
-              <a:t>把選門檻和報成績分開：五折依影像切 trainval，每折用沒訓練過那折的模型預測，把 out-of-fold 預測合起來選門檻（</a:t>
+              <a:t>動很大。門檻 </a:t>
             </a:r>
             <a:r>
               <a:rPr sz="1200" b="1">
@@ -16690,7 +16794,7 @@
                 <a:ea typeface="Noto Sans TC"/>
                 <a:cs typeface="Noto Sans TC"/>
               </a:rPr>
-              <a:t>6,569</a:t>
+              <a:t>0.961 → 0.912</a:t>
             </a:r>
             <a:r>
               <a:rPr sz="1200" b="0">
@@ -16701,7 +16805,7 @@
                 <a:ea typeface="Noto Sans TC"/>
                 <a:cs typeface="Noto Sans TC"/>
               </a:rPr>
-              <a:t> 個缺陷），test 完全不參與。而且取 </a:t>
+              <a:t>；同一個門檻在選擇集上估 </a:t>
             </a:r>
             <a:r>
               <a:rPr sz="1200" b="1">
@@ -16712,7 +16816,7 @@
                 <a:ea typeface="Noto Sans TC"/>
                 <a:cs typeface="Noto Sans TC"/>
               </a:rPr>
-              <a:t>95%</a:t>
+              <a:t>0.32%</a:t>
             </a:r>
             <a:r>
               <a:rPr sz="1200" b="0">
@@ -16723,79 +16827,19 @@
                 <a:ea typeface="Noto Sans TC"/>
                 <a:cs typeface="Noto Sans TC"/>
               </a:rPr>
-              <a:t> 區間上緣不取點估計——預算是對還沒看過的缺陷的承諾。</a:t>
-            </a:r>
-          </a:p>
-        </p:txBody>
-      </p:sp>
-      <p:sp>
-        <p:nvSpPr>
-          <p:cNvPr id="16" name="TextBox 15"/>
-          <p:cNvSpPr txBox="1"/>
-          <p:nvPr/>
-        </p:nvSpPr>
-        <p:spPr>
-          <a:xfrm>
-            <a:off x="457200" y="3721608"/>
-            <a:ext cx="1325880" cy="530352"/>
-          </a:xfrm>
-          <a:prstGeom prst="rect">
-            <a:avLst/>
-          </a:prstGeom>
-          <a:noFill/>
-        </p:spPr>
-        <p:txBody>
-          <a:bodyPr wrap="square">
-            <a:spAutoFit/>
-          </a:bodyPr>
-          <a:lstStyle/>
-          <a:p>
-            <a:pPr>
-              <a:lnSpc>
-                <a:spcPct val="115000"/>
-              </a:lnSpc>
-            </a:pPr>
-            <a:r>
-              <a:rPr sz="1300" b="1">
-                <a:solidFill>
-                  <a:srgbClr val="6FC7CF"/>
-                </a:solidFill>
-                <a:latin typeface="Noto Sans TC"/>
-                <a:ea typeface="Noto Sans TC"/>
-                <a:cs typeface="Noto Sans TC"/>
-              </a:rPr>
-              <a:t>量到什麼</a:t>
-            </a:r>
-          </a:p>
-        </p:txBody>
-      </p:sp>
-      <p:sp>
-        <p:nvSpPr>
-          <p:cNvPr id="17" name="TextBox 16"/>
-          <p:cNvSpPr txBox="1"/>
-          <p:nvPr/>
-        </p:nvSpPr>
-        <p:spPr>
-          <a:xfrm>
-            <a:off x="1828800" y="3721608"/>
-            <a:ext cx="9875520" cy="530352"/>
-          </a:xfrm>
-          <a:prstGeom prst="rect">
-            <a:avLst/>
-          </a:prstGeom>
-          <a:noFill/>
-        </p:spPr>
-        <p:txBody>
-          <a:bodyPr wrap="square">
-            <a:spAutoFit/>
-          </a:bodyPr>
-          <a:lstStyle/>
-          <a:p>
-            <a:pPr>
-              <a:lnSpc>
-                <a:spcPct val="112000"/>
-              </a:lnSpc>
-            </a:pPr>
+              <a:t>、在 test 上實測 </a:t>
+            </a:r>
+            <a:r>
+              <a:rPr sz="1200" b="1">
+                <a:solidFill>
+                  <a:srgbClr val="6FC7CF"/>
+                </a:solidFill>
+                <a:latin typeface="Noto Sans TC"/>
+                <a:ea typeface="Noto Sans TC"/>
+                <a:cs typeface="Noto Sans TC"/>
+              </a:rPr>
+              <a:t>0.66%</a:t>
+            </a:r>
             <a:r>
               <a:rPr sz="1200" b="0">
                 <a:solidFill>
@@ -16805,7 +16849,7 @@
                 <a:ea typeface="Noto Sans TC"/>
                 <a:cs typeface="Noto Sans TC"/>
               </a:rPr>
-              <a:t>誠實選出來是 </a:t>
+              <a:t>，約兩倍。中間試過的兩個較弱規則也都量了：單一驗證集只有 </a:t>
             </a:r>
             <a:r>
               <a:rPr sz="1200" b="1">
@@ -16816,7 +16860,7 @@
                 <a:ea typeface="Noto Sans TC"/>
                 <a:cs typeface="Noto Sans TC"/>
               </a:rPr>
-              <a:t>0.912</a:t>
+              <a:t>969</a:t>
             </a:r>
             <a:r>
               <a:rPr sz="1200" b="0">
@@ -16827,7 +16871,7 @@
                 <a:ea typeface="Noto Sans TC"/>
                 <a:cs typeface="Noto Sans TC"/>
               </a:rPr>
-              <a:t> 不是 </a:t>
+              <a:t> 個缺陷，點估計選 </a:t>
             </a:r>
             <a:r>
               <a:rPr sz="1200" b="1">
@@ -16838,7 +16882,7 @@
                 <a:ea typeface="Noto Sans TC"/>
                 <a:cs typeface="Noto Sans TC"/>
               </a:rPr>
-              <a:t>0.961</a:t>
+              <a:t>0.610</a:t>
             </a:r>
             <a:r>
               <a:rPr sz="1200" b="0">
@@ -16849,7 +16893,7 @@
                 <a:ea typeface="Noto Sans TC"/>
                 <a:cs typeface="Noto Sans TC"/>
               </a:rPr>
-              <a:t>。在 test 上：</a:t>
+              <a:t>（test 漏 </a:t>
             </a:r>
             <a:r>
               <a:rPr sz="1200" b="1">
@@ -16860,7 +16904,7 @@
                 <a:ea typeface="Noto Sans TC"/>
                 <a:cs typeface="Noto Sans TC"/>
               </a:rPr>
-              <a:t>55.6%</a:t>
+              <a:t>0.93%</a:t>
             </a:r>
             <a:r>
               <a:rPr sz="1200" b="0">
@@ -16871,7 +16915,7 @@
                 <a:ea typeface="Noto Sans TC"/>
                 <a:cs typeface="Noto Sans TC"/>
               </a:rPr>
-              <a:t> 的人工、漏檢 </a:t>
+              <a:t>）、區間上緣選 </a:t>
             </a:r>
             <a:r>
               <a:rPr sz="1200" b="1">
@@ -16882,7 +16926,7 @@
                 <a:ea typeface="Noto Sans TC"/>
                 <a:cs typeface="Noto Sans TC"/>
               </a:rPr>
-              <a:t>0.66%</a:t>
+              <a:t>0.9968</a:t>
             </a:r>
             <a:r>
               <a:rPr sz="1200" b="0">
@@ -16893,7 +16937,7 @@
                 <a:ea typeface="Noto Sans TC"/>
                 <a:cs typeface="Noto Sans TC"/>
               </a:rPr>
-              <a:t>，超過 </a:t>
+              <a:t>（達標但只省 </a:t>
             </a:r>
             <a:r>
               <a:rPr sz="1200" b="1">
@@ -16904,7 +16948,7 @@
                 <a:ea typeface="Noto Sans TC"/>
                 <a:cs typeface="Noto Sans TC"/>
               </a:rPr>
-              <a:t>0.5%</a:t>
+              <a:t>32.9%</a:t>
             </a:r>
             <a:r>
               <a:rPr sz="1200" b="0">
@@ -16915,7 +16959,7 @@
                 <a:ea typeface="Noto Sans TC"/>
                 <a:cs typeface="Noto Sans TC"/>
               </a:rPr>
-              <a:t>。先試過的兩個比較弱的規則也都量了：單一驗證集點估計選 </a:t>
+              <a:t>）——樣本太小，一個缺陷就是 </a:t>
             </a:r>
             <a:r>
               <a:rPr sz="1200" b="1">
@@ -16926,73 +16970,7 @@
                 <a:ea typeface="Noto Sans TC"/>
                 <a:cs typeface="Noto Sans TC"/>
               </a:rPr>
-              <a:t>0.610</a:t>
-            </a:r>
-            <a:r>
-              <a:rPr sz="1200" b="0">
-                <a:solidFill>
-                  <a:srgbClr val="E8E6E1"/>
-                </a:solidFill>
-                <a:latin typeface="Noto Sans TC"/>
-                <a:ea typeface="Noto Sans TC"/>
-                <a:cs typeface="Noto Sans TC"/>
-              </a:rPr>
-              <a:t>，漏 </a:t>
-            </a:r>
-            <a:r>
-              <a:rPr sz="1200" b="1">
-                <a:solidFill>
-                  <a:srgbClr val="6FC7CF"/>
-                </a:solidFill>
-                <a:latin typeface="Noto Sans TC"/>
-                <a:ea typeface="Noto Sans TC"/>
-                <a:cs typeface="Noto Sans TC"/>
-              </a:rPr>
-              <a:t>0.93%</a:t>
-            </a:r>
-            <a:r>
-              <a:rPr sz="1200" b="0">
-                <a:solidFill>
-                  <a:srgbClr val="E8E6E1"/>
-                </a:solidFill>
-                <a:latin typeface="Noto Sans TC"/>
-                <a:ea typeface="Noto Sans TC"/>
-                <a:cs typeface="Noto Sans TC"/>
-              </a:rPr>
-              <a:t>；區間上緣選 </a:t>
-            </a:r>
-            <a:r>
-              <a:rPr sz="1200" b="1">
-                <a:solidFill>
-                  <a:srgbClr val="6FC7CF"/>
-                </a:solidFill>
-                <a:latin typeface="Noto Sans TC"/>
-                <a:ea typeface="Noto Sans TC"/>
-                <a:cs typeface="Noto Sans TC"/>
-              </a:rPr>
-              <a:t>0.9968</a:t>
-            </a:r>
-            <a:r>
-              <a:rPr sz="1200" b="0">
-                <a:solidFill>
-                  <a:srgbClr val="E8E6E1"/>
-                </a:solidFill>
-                <a:latin typeface="Noto Sans TC"/>
-                <a:ea typeface="Noto Sans TC"/>
-                <a:cs typeface="Noto Sans TC"/>
-              </a:rPr>
-              <a:t>，達標但只省 </a:t>
-            </a:r>
-            <a:r>
-              <a:rPr sz="1200" b="1">
-                <a:solidFill>
-                  <a:srgbClr val="6FC7CF"/>
-                </a:solidFill>
-                <a:latin typeface="Noto Sans TC"/>
-                <a:ea typeface="Noto Sans TC"/>
-                <a:cs typeface="Noto Sans TC"/>
-              </a:rPr>
-              <a:t>32.9%</a:t>
+              <a:t>0.10%</a:t>
             </a:r>
             <a:r>
               <a:rPr sz="1200" b="0">
@@ -17016,8 +16994,8 @@
         </p:nvSpPr>
         <p:spPr>
           <a:xfrm>
-            <a:off x="320040" y="4343400"/>
-            <a:ext cx="11521440" cy="832104"/>
+            <a:off x="320040" y="4800600"/>
+            <a:ext cx="11521440" cy="603504"/>
           </a:xfrm>
           <a:prstGeom prst="rect">
             <a:avLst/>
@@ -17060,8 +17038,8 @@
         </p:nvSpPr>
         <p:spPr>
           <a:xfrm>
-            <a:off x="457200" y="4379976"/>
-            <a:ext cx="1325880" cy="758952"/>
+            <a:off x="457200" y="4837176"/>
+            <a:ext cx="1325880" cy="530352"/>
           </a:xfrm>
           <a:prstGeom prst="rect">
             <a:avLst/>
@@ -17101,8 +17079,8 @@
         </p:nvSpPr>
         <p:spPr>
           <a:xfrm>
-            <a:off x="1828800" y="4379976"/>
-            <a:ext cx="9875520" cy="758952"/>
+            <a:off x="1828800" y="4837176"/>
+            <a:ext cx="9875520" cy="530352"/>
           </a:xfrm>
           <a:prstGeom prst="rect">
             <a:avLst/>
@@ -17129,7 +17107,7 @@
                 <a:ea typeface="Noto Sans TC"/>
                 <a:cs typeface="Noto Sans TC"/>
               </a:rPr>
-              <a:t>更大的一件事在後面：選門檻的那份資料估 </a:t>
+              <a:t>而那個兩倍不是雜訊，是系統性的：每一個試過的門檻都是同一個倍率。兩邊類別組成一樣，多出來的 </a:t>
             </a:r>
             <a:r>
               <a:rPr sz="1200" b="1">
@@ -17140,7 +17118,7 @@
                 <a:ea typeface="Noto Sans TC"/>
                 <a:cs typeface="Noto Sans TC"/>
               </a:rPr>
-              <a:t>0.32%</a:t>
+              <a:t>20</a:t>
             </a:r>
             <a:r>
               <a:rPr sz="1200" b="0">
@@ -17151,7 +17129,7 @@
                 <a:ea typeface="Noto Sans TC"/>
                 <a:cs typeface="Noto Sans TC"/>
               </a:rPr>
-              <a:t>，實際量到 </a:t>
+              <a:t> 個漏檢裡有 </a:t>
             </a:r>
             <a:r>
               <a:rPr sz="1200" b="1">
@@ -17162,7 +17140,7 @@
                 <a:ea typeface="Noto Sans TC"/>
                 <a:cs typeface="Noto Sans TC"/>
               </a:rPr>
-              <a:t>0.66%</a:t>
+              <a:t>15</a:t>
             </a:r>
             <a:r>
               <a:rPr sz="1200" b="0">
@@ -17173,51 +17151,7 @@
                 <a:ea typeface="Noto Sans TC"/>
                 <a:cs typeface="Noto Sans TC"/>
               </a:rPr>
-              <a:t>，每一個試過的門檻都是同一個兩倍。兩邊類別組成一樣，超出的 </a:t>
-            </a:r>
-            <a:r>
-              <a:rPr sz="1200" b="1">
-                <a:solidFill>
-                  <a:srgbClr val="6FC7CF"/>
-                </a:solidFill>
-                <a:latin typeface="Noto Sans TC"/>
-                <a:ea typeface="Noto Sans TC"/>
-                <a:cs typeface="Noto Sans TC"/>
-              </a:rPr>
-              <a:t>20</a:t>
-            </a:r>
-            <a:r>
-              <a:rPr sz="1200" b="0">
-                <a:solidFill>
-                  <a:srgbClr val="E8E6E1"/>
-                </a:solidFill>
-                <a:latin typeface="Noto Sans TC"/>
-                <a:ea typeface="Noto Sans TC"/>
-                <a:cs typeface="Noto Sans TC"/>
-              </a:rPr>
-              <a:t> 個裡有 </a:t>
-            </a:r>
-            <a:r>
-              <a:rPr sz="1200" b="1">
-                <a:solidFill>
-                  <a:srgbClr val="6FC7CF"/>
-                </a:solidFill>
-                <a:latin typeface="Noto Sans TC"/>
-                <a:ea typeface="Noto Sans TC"/>
-                <a:cs typeface="Noto Sans TC"/>
-              </a:rPr>
-              <a:t>15</a:t>
-            </a:r>
-            <a:r>
-              <a:rPr sz="1200" b="0">
-                <a:solidFill>
-                  <a:srgbClr val="E8E6E1"/>
-                </a:solidFill>
-                <a:latin typeface="Noto Sans TC"/>
-                <a:ea typeface="Noto Sans TC"/>
-                <a:cs typeface="Noto Sans TC"/>
-              </a:rPr>
-              <a:t> 個集中在 open 和 short。所以不是調參調壞的——是 trainval 的板子比官方測試板容易。</a:t>
+              <a:t> 個集中在 open 和 short。所以結論不是「門檻挑錯了」，是這兩份資料不可互換——一個泛化差距，而且它在最不能漏的兩類上最大。</a:t>
             </a:r>
           </a:p>
         </p:txBody>
@@ -17230,8 +17164,8 @@
         </p:nvSpPr>
         <p:spPr>
           <a:xfrm>
-            <a:off x="320040" y="5230368"/>
-            <a:ext cx="11521440" cy="603504"/>
+            <a:off x="320040" y="5458968"/>
+            <a:ext cx="11521440" cy="832104"/>
           </a:xfrm>
           <a:prstGeom prst="rect">
             <a:avLst/>
@@ -17274,8 +17208,8 @@
         </p:nvSpPr>
         <p:spPr>
           <a:xfrm>
-            <a:off x="457200" y="5266944"/>
-            <a:ext cx="1325880" cy="530352"/>
+            <a:off x="457200" y="5495544"/>
+            <a:ext cx="1325880" cy="758952"/>
           </a:xfrm>
           <a:prstGeom prst="rect">
             <a:avLst/>
@@ -17315,8 +17249,8 @@
         </p:nvSpPr>
         <p:spPr>
           <a:xfrm>
-            <a:off x="1828800" y="5266944"/>
-            <a:ext cx="9875520" cy="530352"/>
+            <a:off x="1828800" y="5495544"/>
+            <a:ext cx="9875520" cy="758952"/>
           </a:xfrm>
           <a:prstGeom prst="rect">
             <a:avLst/>
@@ -17365,7 +17299,7 @@
                 <a:ea typeface="Noto Sans TC"/>
                 <a:cs typeface="Noto Sans TC"/>
               </a:rPr>
-              <a:t> 條 invariant：門檻絕不在報告它的那份切分上選。而且兩個測試現在故意斷言相反的方向——「aggregate 未達標」「出貨門檻在 test 上超標」——所以「把門檻調到達標為止」這個誘惑會讓測試變紅，不會安靜通過。</a:t>
+              <a:t> 條 invariant：選門檻和報成績用不同的資料，而且門檻要用區間上緣清預算不是用點估計。兩個測試故意斷言相反的方向——「aggregate 未達標」「出貨門檻在 test 上超標」——所以「把門檻調到 test 達標為止」會讓測試變紅，不會安靜通過。</a:t>
             </a:r>
           </a:p>
         </p:txBody>

--- a/docs/deck/aoi-agent-journey.zh-TW.pptx
+++ b/docs/deck/aoi-agent-journey.zh-TW.pptx
@@ -4324,28 +4324,28 @@
           <a:lstStyle/>
           <a:p>
             <a:r>
-              <a:t>白話：同一把尺（≤0.5% 漏網下省掉多少）量四種做法，只有帶樣板通道的小 CNN 站得住。</a:t>
+              <a:t>白話：同一把尺（≤0.5% 漏網下省掉多少）量五種做法。輸入裡有沒有樣板、起點是不是預訓練的，比網路多大重要得多。</a:t>
             </a:r>
           </a:p>
           <a:p/>
           <a:p>
             <a:r>
-              <a:t>講稿 1. 「為什麼是 ResNet-18」的答案在這張表：同一把尺量四種做法。</a:t>
-            </a:r>
-          </a:p>
-          <a:p>
-            <a:r>
-              <a:t>講稿 2. 先看地板：不用模型、只算差異圖的統計，大約 1%。模型 52.8%，40 倍。</a:t>
-            </a:r>
-          </a:p>
-          <a:p>
-            <a:r>
-              <a:t>講稿 3. 再看兩個對照：拿掉樣板通道剩 2.8%，偵測器的信心 1.2%。所以關鍵不是網路多大，是輸入裡有沒有「本來該長怎樣」。</a:t>
-            </a:r>
-          </a:p>
-          <a:p>
-            <a:r>
-              <a:t>講稿 4. 沒試更大的模型，因為剩下的漏網是很有信心的錯，不是容量問題。</a:t>
+              <a:t>講稿 1. 「為什麼是這個模型」的答案在這張表：同一把尺量五種做法，沒有一種是換更大的網路。</a:t>
+            </a:r>
+          </a:p>
+          <a:p>
+            <a:r>
+              <a:t>講稿 2. 先看地板：不用模型、只算差異圖的統計，1.3%。模型 52.8%，四十倍。</a:t>
+            </a:r>
+          </a:p>
+          <a:p>
+            <a:r>
+              <a:t>講稿 3. 中間三列各拿掉一樣東西：拿掉 ImageNet 起點剩 42.3%，拿掉樣板通道剩 2.8%，整條換成偵測器的信心 1.2%。</a:t>
+            </a:r>
+          </a:p>
+          <a:p>
+            <a:r>
+              <a:t>講稿 4. 所以關鍵不是網路多大，是輸入裡有沒有「本來該長怎樣」、起點裡有沒有現成的特徵。剩下的漏網是很有信心的錯，那不是容量問題。</a:t>
             </a:r>
           </a:p>
           <a:p/>
@@ -4372,7 +4372,18 @@
           </a:p>
           <a:p>
             <a:r>
-              <a:t>A：差異圖上不用模型就能算的分數：平均值、最大值、前 32/64/128 個像素的和、超過某亮度的像素數，各自當 P(false call) 掃同一條曲線，最好的在 ≤0.5% 下是 1.3%。</a:t>
+              <a:t>A：差異圖上不用模型就能算的分數：平均值、最大值、前 32/64/128 個像素的和、超過某亮度的像素數，各自當 P(false call) 掃同一條曲線，最好的在 ≤0.5% 下是 1.3%。還放了一個沒有訊號的常數分數當對照組，省 0.0%——證明那個 1.3% 不是掃描自己變出來的。</a:t>
+            </a:r>
+          </a:p>
+          <a:p/>
+          <a:p>
+            <a:r>
+              <a:t>Q：二值化的板子差異圖跟 ImageNet 一點都不像，預訓練憑什麼有用？</a:t>
+            </a:r>
+          </a:p>
+          <a:p>
+            <a:r>
+              <a:t>A：我也這樣懷疑，所以量了。三個 seed、每個 seed 內兩邊用同一份切分，ImageNet 贏 6.71 / 18.07 / 10.46 分，全同方向；尺是「什麼都不改」的 seed 離散度 3.1 分。而且它買到的不只是分數：隨機起點那邊三個 seed 跨 8.7 分，ImageNet 那邊只跨 3.1，重訓一次會跳多少差三倍。</a:t>
             </a:r>
           </a:p>
         </p:txBody>
@@ -35734,7 +35745,7 @@
                 <a:ea typeface="Noto Sans TC"/>
                 <a:cs typeface="Noto Sans TC"/>
               </a:rPr>
-              <a:t>附錄 B · 為什麼是這個模型：四個對照</a:t>
+              <a:t>附錄 B · 為什麼是這個模型：五個對照</a:t>
             </a:r>
           </a:p>
         </p:txBody>
@@ -35749,7 +35760,7 @@
         </p:nvGraphicFramePr>
         <p:xfrm>
           <a:off x="548640" y="1280160"/>
-          <a:ext cx="11064240" cy="2286000"/>
+          <a:ext cx="11064240" cy="2743200"/>
         </p:xfrm>
         <a:graphic>
           <a:graphicData uri="http://schemas.openxmlformats.org/drawingml/2006/table">
@@ -35875,7 +35886,7 @@
                           <a:ea typeface="Noto Sans TC"/>
                           <a:cs typeface="Noto Sans TC"/>
                         </a:rPr>
-                        <a:t>約 1%</a:t>
+                        <a:t>1.3%</a:t>
                       </a:r>
                     </a:p>
                   </a:txBody>
@@ -35999,7 +36010,7 @@
                           <a:ea typeface="Noto Sans TC"/>
                           <a:cs typeface="Noto Sans TC"/>
                         </a:rPr>
-                        <a:t>同一個 ResNet-18，沒有樣板通道（偵測器 crop）</a:t>
+                        <a:t>同一個 ResNet-18，隨機初始化</a:t>
                       </a:r>
                     </a:p>
                   </a:txBody>
@@ -36023,7 +36034,7 @@
                           <a:ea typeface="Noto Sans TC"/>
                           <a:cs typeface="Noto Sans TC"/>
                         </a:rPr>
-                        <a:t>2.8%</a:t>
+                        <a:t>42.32%</a:t>
                       </a:r>
                     </a:p>
                   </a:txBody>
@@ -36047,7 +36058,7 @@
                           <a:ea typeface="Noto Sans TC"/>
                           <a:cs typeface="Noto Sans TC"/>
                         </a:rPr>
-                        <a:t>外觀本身分不開真假；樣板通道是必要不是方便</a:t>
+                        <a:t>同一份切分內配對、三個 seed 全同方向；免費的 ImageNet 起點值 10 分</a:t>
                       </a:r>
                     </a:p>
                   </a:txBody>
@@ -36073,7 +36084,7 @@
                           <a:ea typeface="Noto Sans TC"/>
                           <a:cs typeface="Noto Sans TC"/>
                         </a:rPr>
-                        <a:t>YOLO26n 的 confidence 直接排序</a:t>
+                        <a:t>同一個 ResNet-18，沒有樣板通道（偵測器 crop）</a:t>
                       </a:r>
                     </a:p>
                   </a:txBody>
@@ -36097,7 +36108,7 @@
                           <a:ea typeface="Noto Sans TC"/>
                           <a:cs typeface="Noto Sans TC"/>
                         </a:rPr>
-                        <a:t>1.2%</a:t>
+                        <a:t>2.8%</a:t>
                       </a:r>
                     </a:p>
                   </a:txBody>
@@ -36121,7 +36132,7 @@
                           <a:ea typeface="Noto Sans TC"/>
                           <a:cs typeface="Noto Sans TC"/>
                         </a:rPr>
-                        <a:t>偵測器的信心是「這裡有東西」的分數，不是 P(false call)</a:t>
+                        <a:t>外觀本身分不開真假；樣板通道是必要不是方便</a:t>
                       </a:r>
                     </a:p>
                   </a:txBody>
@@ -36132,6 +36143,80 @@
                   </a:tcPr>
                 </a:tc>
               </a:tr>
+              <a:tr h="457200">
+                <a:tc>
+                  <a:txBody>
+                    <a:bodyPr/>
+                    <a:lstStyle/>
+                    <a:p>
+                      <a:r>
+                        <a:rPr sz="1300" b="0">
+                          <a:solidFill>
+                            <a:srgbClr val="E8E6E1"/>
+                          </a:solidFill>
+                          <a:latin typeface="Noto Sans TC"/>
+                          <a:ea typeface="Noto Sans TC"/>
+                          <a:cs typeface="Noto Sans TC"/>
+                        </a:rPr>
+                        <a:t>YOLO26n 的 confidence 直接排序</a:t>
+                      </a:r>
+                    </a:p>
+                  </a:txBody>
+                  <a:tcPr marT="36576" marB="36576">
+                    <a:solidFill>
+                      <a:srgbClr val="1E2125"/>
+                    </a:solidFill>
+                  </a:tcPr>
+                </a:tc>
+                <a:tc>
+                  <a:txBody>
+                    <a:bodyPr/>
+                    <a:lstStyle/>
+                    <a:p>
+                      <a:r>
+                        <a:rPr sz="1300" b="0">
+                          <a:solidFill>
+                            <a:srgbClr val="E8E6E1"/>
+                          </a:solidFill>
+                          <a:latin typeface="Noto Sans TC"/>
+                          <a:ea typeface="Noto Sans TC"/>
+                          <a:cs typeface="Noto Sans TC"/>
+                        </a:rPr>
+                        <a:t>1.2%</a:t>
+                      </a:r>
+                    </a:p>
+                  </a:txBody>
+                  <a:tcPr marT="36576" marB="36576">
+                    <a:solidFill>
+                      <a:srgbClr val="1E2125"/>
+                    </a:solidFill>
+                  </a:tcPr>
+                </a:tc>
+                <a:tc>
+                  <a:txBody>
+                    <a:bodyPr/>
+                    <a:lstStyle/>
+                    <a:p>
+                      <a:r>
+                        <a:rPr sz="1300" b="0">
+                          <a:solidFill>
+                            <a:srgbClr val="E8E6E1"/>
+                          </a:solidFill>
+                          <a:latin typeface="Noto Sans TC"/>
+                          <a:ea typeface="Noto Sans TC"/>
+                          <a:cs typeface="Noto Sans TC"/>
+                        </a:rPr>
+                        <a:t>偵測器的信心是「這裡有東西」的分數，不是 P(false call)</a:t>
+                      </a:r>
+                    </a:p>
+                  </a:txBody>
+                  <a:tcPr marT="36576" marB="36576">
+                    <a:solidFill>
+                      <a:srgbClr val="1E2125"/>
+                    </a:solidFill>
+                  </a:tcPr>
+                </a:tc>
+              </a:tr>
             </a:tbl>
           </a:graphicData>
         </a:graphic>
@@ -36144,8 +36229,8 @@
         </p:nvSpPr>
         <p:spPr>
           <a:xfrm>
-            <a:off x="548640" y="3794760"/>
-            <a:ext cx="11064240" cy="2514600"/>
+            <a:off x="548640" y="4251960"/>
+            <a:ext cx="11064240" cy="2057400"/>
           </a:xfrm>
           <a:prstGeom prst="rect">
             <a:avLst/>
@@ -36228,6 +36313,123 @@
                 <a:cs typeface="Noto Sans TC"/>
               </a:rPr>
               <a:t> 只是一個量，不是證據</a:t>
+            </a:r>
+          </a:p>
+          <a:p>
+            <a:pPr>
+              <a:lnSpc>
+                <a:spcPct val="125000"/>
+              </a:lnSpc>
+            </a:pPr>
+            <a:r>
+              <a:rPr sz="1400" b="0">
+                <a:solidFill>
+                  <a:srgbClr val="6FC7CF"/>
+                </a:solidFill>
+                <a:latin typeface="Noto Sans TC"/>
+                <a:ea typeface="Noto Sans TC"/>
+                <a:cs typeface="Noto Sans TC"/>
+              </a:rPr>
+              <a:t>• </a:t>
+            </a:r>
+            <a:r>
+              <a:rPr sz="1400" b="0">
+                <a:solidFill>
+                  <a:srgbClr val="E8E6E1"/>
+                </a:solidFill>
+                <a:latin typeface="Noto Sans TC"/>
+                <a:ea typeface="Noto Sans TC"/>
+                <a:cs typeface="Noto Sans TC"/>
+              </a:rPr>
+              <a:t>預訓練那一列的準確率只差 </a:t>
+            </a:r>
+            <a:r>
+              <a:rPr sz="1400" b="1">
+                <a:solidFill>
+                  <a:srgbClr val="6FC7CF"/>
+                </a:solidFill>
+                <a:latin typeface="Noto Sans TC"/>
+                <a:ea typeface="Noto Sans TC"/>
+                <a:cs typeface="Noto Sans TC"/>
+              </a:rPr>
+              <a:t>1.5</a:t>
+            </a:r>
+            <a:r>
+              <a:rPr sz="1400" b="0">
+                <a:solidFill>
+                  <a:srgbClr val="E8E6E1"/>
+                </a:solidFill>
+                <a:latin typeface="Noto Sans TC"/>
+                <a:ea typeface="Noto Sans TC"/>
+                <a:cs typeface="Noto Sans TC"/>
+              </a:rPr>
+              <a:t> 分（</a:t>
+            </a:r>
+            <a:r>
+              <a:rPr sz="1400" b="1">
+                <a:solidFill>
+                  <a:srgbClr val="6FC7CF"/>
+                </a:solidFill>
+                <a:latin typeface="Noto Sans TC"/>
+                <a:ea typeface="Noto Sans TC"/>
+                <a:cs typeface="Noto Sans TC"/>
+              </a:rPr>
+              <a:t>96.4%</a:t>
+            </a:r>
+            <a:r>
+              <a:rPr sz="1400" b="0">
+                <a:solidFill>
+                  <a:srgbClr val="E8E6E1"/>
+                </a:solidFill>
+                <a:latin typeface="Noto Sans TC"/>
+                <a:ea typeface="Noto Sans TC"/>
+                <a:cs typeface="Noto Sans TC"/>
+              </a:rPr>
+              <a:t> 對 </a:t>
+            </a:r>
+            <a:r>
+              <a:rPr sz="1400" b="1">
+                <a:solidFill>
+                  <a:srgbClr val="6FC7CF"/>
+                </a:solidFill>
+                <a:latin typeface="Noto Sans TC"/>
+                <a:ea typeface="Noto Sans TC"/>
+                <a:cs typeface="Noto Sans TC"/>
+              </a:rPr>
+              <a:t>97.2–98.6%</a:t>
+            </a:r>
+            <a:r>
+              <a:rPr sz="1400" b="0">
+                <a:solidFill>
+                  <a:srgbClr val="E8E6E1"/>
+                </a:solidFill>
+                <a:latin typeface="Noto Sans TC"/>
+                <a:ea typeface="Noto Sans TC"/>
+                <a:cs typeface="Noto Sans TC"/>
+              </a:rPr>
+              <a:t>）而操作點差 </a:t>
+            </a:r>
+            <a:r>
+              <a:rPr sz="1400" b="1">
+                <a:solidFill>
+                  <a:srgbClr val="6FC7CF"/>
+                </a:solidFill>
+                <a:latin typeface="Noto Sans TC"/>
+                <a:ea typeface="Noto Sans TC"/>
+                <a:cs typeface="Noto Sans TC"/>
+              </a:rPr>
+              <a:t>10</a:t>
+            </a:r>
+            <a:r>
+              <a:rPr sz="1400" b="0">
+                <a:solidFill>
+                  <a:srgbClr val="E8E6E1"/>
+                </a:solidFill>
+                <a:latin typeface="Noto Sans TC"/>
+                <a:ea typeface="Noto Sans TC"/>
+                <a:cs typeface="Noto Sans TC"/>
+              </a:rPr>
+              <a:t> 分——只看準確率會下「沒差」的結論</a:t>
             </a:r>
           </a:p>
           <a:p>

--- a/docs/deck/aoi-agent-journey.zh-TW.pptx
+++ b/docs/deck/aoi-agent-journey.zh-TW.pptx
@@ -1459,6 +1459,17 @@
               <a:t>A：以這個 checkpoint、這份資料，按候選算是不達標的。要達標有兩條路：一條是電測那類不共用同一種失敗的第二次量測，算出來 0.43%；另一條是讓選門檻的資料能代表出貨的資料，而那需要第二份資料集或真的產線，不是再調一次參數。</a:t>
             </a:r>
           </a:p>
+          <a:p/>
+          <a:p>
+            <a:r>
+              <a:t>Q：你怎麼確定那個兩倍是資料的問題，不是你的模型的問題？</a:t>
+            </a:r>
+          </a:p>
+          <a:p>
+            <a:r>
+              <a:t>A：09-01 用完全不同的方法量到同一件事。一棵梯度提升樹、30 個手工幾何特徵，跟 ResNet 不共用任何權重、架構或訓練流程——三個 seed 在 trainval 的驗證半邊都省 28.6 到 30.2%，在 test 上只有 15.9 到 21.3%，一樣是好一半。兩種方法碰到同一堵牆，那就不是模型的性質，是切分的性質。</a:t>
+            </a:r>
+          </a:p>
         </p:txBody>
       </p:sp>
       <p:sp>
@@ -4324,28 +4335,28 @@
           <a:lstStyle/>
           <a:p>
             <a:r>
-              <a:t>白話：同一把尺（≤0.5% 漏網下省掉多少）量五種做法。輸入裡有沒有樣板、起點是不是預訓練的，比網路多大重要得多。</a:t>
+              <a:t>白話：同一把尺（≤0.5% 漏網下省掉多少）量六種做法。輸入裡有沒有樣板、起點是不是預訓練的，比網路多大重要得多。</a:t>
             </a:r>
           </a:p>
           <a:p/>
           <a:p>
             <a:r>
-              <a:t>講稿 1. 「為什麼是這個模型」的答案在這張表：同一把尺量五種做法，沒有一種是換更大的網路。</a:t>
-            </a:r>
-          </a:p>
-          <a:p>
-            <a:r>
-              <a:t>講稿 2. 先看地板：不用模型、只算差異圖的統計，1.3%。模型 52.8%，四十倍。</a:t>
-            </a:r>
-          </a:p>
-          <a:p>
-            <a:r>
-              <a:t>講稿 3. 中間三列各拿掉一樣東西：拿掉 ImageNet 起點剩 42.3%，拿掉樣板通道剩 2.8%，整條換成偵測器的信心 1.2%。</a:t>
-            </a:r>
-          </a:p>
-          <a:p>
-            <a:r>
-              <a:t>講稿 4. 所以關鍵不是網路多大，是輸入裡有沒有「本來該長怎樣」、起點裡有沒有現成的特徵。剩下的漏網是很有信心的錯，那不是容量問題。</a:t>
+              <a:t>講稿 1. 「為什麼是這個模型」的答案在這張表：同一把尺量六種做法，沒有一種是換更大的網路。</a:t>
+            </a:r>
+          </a:p>
+          <a:p>
+            <a:r>
+              <a:t>講稿 2. 地板有兩個。弱的那個只算差異圖的統計，1.3%——但那是稻草人，候選本來就是靠差異大挑出來的。強的那個看形狀：30 個幾何特徵加一棵樹，16.70%。</a:t>
+            </a:r>
+          </a:p>
+          <a:p>
+            <a:r>
+              <a:t>講稿 3. 所以正確的講法是 3.1 倍，不是 40 倍。而網路贏的那 36 分是對一個站得住的對手贏的。</a:t>
+            </a:r>
+          </a:p>
+          <a:p>
+            <a:r>
+              <a:t>講稿 4. 剩下四列各拿掉一樣東西：拿掉 ImageNet 起點剩 42.3%，拿掉樣板通道剩 2.8%，整條換成偵測器的信心 1.2%。關鍵不是網路多大。</a:t>
             </a:r>
           </a:p>
           <a:p/>
@@ -4367,12 +4378,23 @@
           <a:p/>
           <a:p>
             <a:r>
-              <a:t>Q：地板是怎麼算的？</a:t>
-            </a:r>
-          </a:p>
-          <a:p>
-            <a:r>
-              <a:t>A：差異圖上不用模型就能算的分數：平均值、最大值、前 32/64/128 個像素的和、超過某亮度的像素數，各自當 P(false call) 掃同一條曲線，最好的在 ≤0.5% 下是 1.3%。還放了一個沒有訊號的常數分數當對照組，省 0.0%——證明那個 1.3% 不是掃描自己變出來的。</a:t>
+              <a:t>Q：地板是怎麼算的？兩個地板差在哪？</a:t>
+            </a:r>
+          </a:p>
+          <a:p>
+            <a:r>
+              <a:t>A：弱的那個是差異圖上不用模型就能算的純量——平均、最大、前 32/64/128 個像素的和——最好的在 ≤0.5% 下是 1.3%，另外放一個沒訊號的常數分數當對照組，省 0.0%。但它是稻草人：候選正是 AOI 靠「差異大」挑出來的，再拿差異量排序等於問一個上游已經答過的問題。強的那個補上它丟掉的東西——形狀：30 個幾何特徵加一棵梯度提升樹，16.70%（三個 seed 15.94 到 21.28）。所以我引用的倍率是 3.1 倍。</a:t>
+            </a:r>
+          </a:p>
+          <a:p/>
+          <a:p>
+            <a:r>
+              <a:t>Q：那棵樹是靠哪些特徵贏的？</a:t>
+            </a:r>
+          </a:p>
+          <a:p>
+            <a:r>
+              <a:t>A：三個 seed 的重要度前兩名都一樣：blob_distance_to_edge 和 elongation——差異塊離樣板邊緣多近、多長多細。那正是「誤報是對位殘差留在走線邊的細條、瑕疵是塊狀」這個假設，被量出來而不是被斷言。而我本來以為會最重要的那個（待測比樣板多銅還少銅）幾乎沒進榜——明顯有意義和在這裡有鑑別力是兩件事。</a:t>
             </a:r>
           </a:p>
           <a:p/>
@@ -35745,7 +35767,7 @@
                 <a:ea typeface="Noto Sans TC"/>
                 <a:cs typeface="Noto Sans TC"/>
               </a:rPr>
-              <a:t>附錄 B · 為什麼是這個模型：五個對照</a:t>
+              <a:t>附錄 B · 為什麼是這個模型：六個對照</a:t>
             </a:r>
           </a:p>
         </p:txBody>
@@ -35760,7 +35782,7 @@
         </p:nvGraphicFramePr>
         <p:xfrm>
           <a:off x="548640" y="1280160"/>
-          <a:ext cx="11064240" cy="2743200"/>
+          <a:ext cx="11064240" cy="3200400"/>
         </p:xfrm>
         <a:graphic>
           <a:graphicData uri="http://schemas.openxmlformats.org/drawingml/2006/table">
@@ -35910,7 +35932,7 @@
                           <a:ea typeface="Noto Sans TC"/>
                           <a:cs typeface="Noto Sans TC"/>
                         </a:rPr>
-                        <a:t>不用模型的地板：候選存在時就算得出的數字</a:t>
+                        <a:t>弱地板：候選本來就是靠「差異大」挑的，再排一次沒有資訊</a:t>
                       </a:r>
                     </a:p>
                   </a:txBody>
@@ -35936,7 +35958,7 @@
                           <a:ea typeface="Noto Sans TC"/>
                           <a:cs typeface="Noto Sans TC"/>
                         </a:rPr>
-                        <a:t>ResNet-18，三通道（樣板／待測／差異）</a:t>
+                        <a:t>幾何特徵 30 個 + 梯度提升樹</a:t>
                       </a:r>
                     </a:p>
                   </a:txBody>
@@ -35960,7 +35982,7 @@
                           <a:ea typeface="Noto Sans TC"/>
                           <a:cs typeface="Noto Sans TC"/>
                         </a:rPr>
-                        <a:t>52.8%</a:t>
+                        <a:t>16.70%</a:t>
                       </a:r>
                     </a:p>
                   </a:txBody>
@@ -35984,7 +36006,7 @@
                           <a:ea typeface="Noto Sans TC"/>
                           <a:cs typeface="Noto Sans TC"/>
                         </a:rPr>
-                        <a:t>主線；42.7 MB、11.2M 參數、CPU 2.5 ms</a:t>
+                        <a:t>真地板：形狀看得見。三個 seed 15.94–21.28%</a:t>
                       </a:r>
                     </a:p>
                   </a:txBody>
@@ -36010,7 +36032,7 @@
                           <a:ea typeface="Noto Sans TC"/>
                           <a:cs typeface="Noto Sans TC"/>
                         </a:rPr>
-                        <a:t>同一個 ResNet-18，隨機初始化</a:t>
+                        <a:t>ResNet-18，三通道（樣板／待測／差異）</a:t>
                       </a:r>
                     </a:p>
                   </a:txBody>
@@ -36034,7 +36056,7 @@
                           <a:ea typeface="Noto Sans TC"/>
                           <a:cs typeface="Noto Sans TC"/>
                         </a:rPr>
-                        <a:t>42.32%</a:t>
+                        <a:t>52.79%</a:t>
                       </a:r>
                     </a:p>
                   </a:txBody>
@@ -36058,7 +36080,7 @@
                           <a:ea typeface="Noto Sans TC"/>
                           <a:cs typeface="Noto Sans TC"/>
                         </a:rPr>
-                        <a:t>同一份切分內配對、三個 seed 全同方向；免費的 ImageNet 起點值 10 分</a:t>
+                        <a:t>主線；42.7 MB、11.2M 參數、CPU 2.5 ms</a:t>
                       </a:r>
                     </a:p>
                   </a:txBody>
@@ -36084,7 +36106,7 @@
                           <a:ea typeface="Noto Sans TC"/>
                           <a:cs typeface="Noto Sans TC"/>
                         </a:rPr>
-                        <a:t>同一個 ResNet-18，沒有樣板通道（偵測器 crop）</a:t>
+                        <a:t>同一個 ResNet-18，隨機初始化</a:t>
                       </a:r>
                     </a:p>
                   </a:txBody>
@@ -36108,7 +36130,7 @@
                           <a:ea typeface="Noto Sans TC"/>
                           <a:cs typeface="Noto Sans TC"/>
                         </a:rPr>
-                        <a:t>2.8%</a:t>
+                        <a:t>42.32%</a:t>
                       </a:r>
                     </a:p>
                   </a:txBody>
@@ -36132,7 +36154,7 @@
                           <a:ea typeface="Noto Sans TC"/>
                           <a:cs typeface="Noto Sans TC"/>
                         </a:rPr>
-                        <a:t>外觀本身分不開真假；樣板通道是必要不是方便</a:t>
+                        <a:t>同一份切分內配對、三個 seed 全同方向；免費的 ImageNet 起點值 10 分</a:t>
                       </a:r>
                     </a:p>
                   </a:txBody>
@@ -36158,7 +36180,7 @@
                           <a:ea typeface="Noto Sans TC"/>
                           <a:cs typeface="Noto Sans TC"/>
                         </a:rPr>
-                        <a:t>YOLO26n 的 confidence 直接排序</a:t>
+                        <a:t>同一個 ResNet-18，沒有樣板通道（偵測器 crop）</a:t>
                       </a:r>
                     </a:p>
                   </a:txBody>
@@ -36182,7 +36204,7 @@
                           <a:ea typeface="Noto Sans TC"/>
                           <a:cs typeface="Noto Sans TC"/>
                         </a:rPr>
-                        <a:t>1.2%</a:t>
+                        <a:t>2.8%</a:t>
                       </a:r>
                     </a:p>
                   </a:txBody>
@@ -36206,7 +36228,7 @@
                           <a:ea typeface="Noto Sans TC"/>
                           <a:cs typeface="Noto Sans TC"/>
                         </a:rPr>
-                        <a:t>偵測器的信心是「這裡有東西」的分數，不是 P(false call)</a:t>
+                        <a:t>外觀本身分不開真假；樣板通道是必要不是方便</a:t>
                       </a:r>
                     </a:p>
                   </a:txBody>
@@ -36217,6 +36239,80 @@
                   </a:tcPr>
                 </a:tc>
               </a:tr>
+              <a:tr h="457200">
+                <a:tc>
+                  <a:txBody>
+                    <a:bodyPr/>
+                    <a:lstStyle/>
+                    <a:p>
+                      <a:r>
+                        <a:rPr sz="1300" b="0">
+                          <a:solidFill>
+                            <a:srgbClr val="E8E6E1"/>
+                          </a:solidFill>
+                          <a:latin typeface="Noto Sans TC"/>
+                          <a:ea typeface="Noto Sans TC"/>
+                          <a:cs typeface="Noto Sans TC"/>
+                        </a:rPr>
+                        <a:t>YOLO26n 的 confidence 直接排序</a:t>
+                      </a:r>
+                    </a:p>
+                  </a:txBody>
+                  <a:tcPr marT="36576" marB="36576">
+                    <a:solidFill>
+                      <a:srgbClr val="15171A"/>
+                    </a:solidFill>
+                  </a:tcPr>
+                </a:tc>
+                <a:tc>
+                  <a:txBody>
+                    <a:bodyPr/>
+                    <a:lstStyle/>
+                    <a:p>
+                      <a:r>
+                        <a:rPr sz="1300" b="0">
+                          <a:solidFill>
+                            <a:srgbClr val="E8E6E1"/>
+                          </a:solidFill>
+                          <a:latin typeface="Noto Sans TC"/>
+                          <a:ea typeface="Noto Sans TC"/>
+                          <a:cs typeface="Noto Sans TC"/>
+                        </a:rPr>
+                        <a:t>1.2%</a:t>
+                      </a:r>
+                    </a:p>
+                  </a:txBody>
+                  <a:tcPr marT="36576" marB="36576">
+                    <a:solidFill>
+                      <a:srgbClr val="15171A"/>
+                    </a:solidFill>
+                  </a:tcPr>
+                </a:tc>
+                <a:tc>
+                  <a:txBody>
+                    <a:bodyPr/>
+                    <a:lstStyle/>
+                    <a:p>
+                      <a:r>
+                        <a:rPr sz="1300" b="0">
+                          <a:solidFill>
+                            <a:srgbClr val="E8E6E1"/>
+                          </a:solidFill>
+                          <a:latin typeface="Noto Sans TC"/>
+                          <a:ea typeface="Noto Sans TC"/>
+                          <a:cs typeface="Noto Sans TC"/>
+                        </a:rPr>
+                        <a:t>偵測器的信心是「這裡有東西」的分數，不是 P(false call)</a:t>
+                      </a:r>
+                    </a:p>
+                  </a:txBody>
+                  <a:tcPr marT="36576" marB="36576">
+                    <a:solidFill>
+                      <a:srgbClr val="15171A"/>
+                    </a:solidFill>
+                  </a:tcPr>
+                </a:tc>
+              </a:tr>
             </a:tbl>
           </a:graphicData>
         </a:graphic>
@@ -36229,8 +36325,8 @@
         </p:nvSpPr>
         <p:spPr>
           <a:xfrm>
-            <a:off x="548640" y="4251960"/>
-            <a:ext cx="11064240" cy="2057400"/>
+            <a:off x="548640" y="4709160"/>
+            <a:ext cx="11064240" cy="1600200"/>
           </a:xfrm>
           <a:prstGeom prst="rect">
             <a:avLst/>
@@ -36260,6 +36356,17 @@
               <a:t>• </a:t>
             </a:r>
             <a:r>
+              <a:rPr sz="1400" b="1">
+                <a:solidFill>
+                  <a:srgbClr val="6FC7CF"/>
+                </a:solidFill>
+                <a:latin typeface="Noto Sans TC"/>
+                <a:ea typeface="Noto Sans TC"/>
+                <a:cs typeface="Noto Sans TC"/>
+              </a:rPr>
+              <a:t>地板換了，倍率就從 40 倍變 3.1 倍</a:t>
+            </a:r>
+            <a:r>
               <a:rPr sz="1400" b="0">
                 <a:solidFill>
                   <a:srgbClr val="E8E6E1"/>
@@ -36268,7 +36375,7 @@
                 <a:ea typeface="Noto Sans TC"/>
                 <a:cs typeface="Noto Sans TC"/>
               </a:rPr>
-              <a:t>模型比地板高約 </a:t>
+              <a:t>——</a:t>
             </a:r>
             <a:r>
               <a:rPr sz="1400" b="1">
@@ -36279,7 +36386,7 @@
                 <a:ea typeface="Noto Sans TC"/>
                 <a:cs typeface="Noto Sans TC"/>
               </a:rPr>
-              <a:t>40</a:t>
+              <a:t>1.3%</a:t>
             </a:r>
             <a:r>
               <a:rPr sz="1400" b="0">
@@ -36290,29 +36397,7 @@
                 <a:ea typeface="Noto Sans TC"/>
                 <a:cs typeface="Noto Sans TC"/>
               </a:rPr>
-              <a:t> 倍，這是「模型有學到東西」的證據；沒有地板，</a:t>
-            </a:r>
-            <a:r>
-              <a:rPr sz="1400" b="1">
-                <a:solidFill>
-                  <a:srgbClr val="6FC7CF"/>
-                </a:solidFill>
-                <a:latin typeface="Noto Sans TC"/>
-                <a:ea typeface="Noto Sans TC"/>
-                <a:cs typeface="Noto Sans TC"/>
-              </a:rPr>
-              <a:t>52.8%</a:t>
-            </a:r>
-            <a:r>
-              <a:rPr sz="1400" b="0">
-                <a:solidFill>
-                  <a:srgbClr val="E8E6E1"/>
-                </a:solidFill>
-                <a:latin typeface="Noto Sans TC"/>
-                <a:ea typeface="Noto Sans TC"/>
-                <a:cs typeface="Noto Sans TC"/>
-              </a:rPr>
-              <a:t> 只是一個量，不是證據</a:t>
+              <a:t> 是稻草人，因為它排序用的正是候選被挑出來的那個量；真正該比的是看得見形狀的那個</a:t>
             </a:r>
           </a:p>
           <a:p>

--- a/docs/deck/aoi-agent-journey.zh-TW.pptx
+++ b/docs/deck/aoi-agent-journey.zh-TW.pptx
@@ -2710,7 +2710,7 @@
           </a:p>
           <a:p>
             <a:r>
-              <a:t>• 三張圖：黃金樣板、待測 PCB、差異圖，紅框是 AOI 標的位置</a:t>
+              <a:t>• 三張圖：golden image、待測 PCB、差異圖，紅框是 AOI 標的位置</a:t>
             </a:r>
           </a:p>
           <a:p>
@@ -13476,7 +13476,7 @@
                 <a:ea typeface="Noto Sans TC"/>
                 <a:cs typeface="Noto Sans TC"/>
               </a:rPr>
-              <a:t>當時要回答的問題是：SMT 的錫膏照片沒有黃金樣板，相減不可能，偵測器是唯一可能的前端——它的 confidence 能不能當 P(false call) 用來排序？我在 PCB-AoI 上訓 YOLO</a:t>
+              <a:t>當時要回答的問題是：SMT 的錫膏照片沒有 golden image，相減不可能，偵測器是唯一可能的前端——它的 confidence 能不能當 P(false call) 用來排序？我在 PCB-AoI 上訓 YOLO</a:t>
             </a:r>
             <a:r>
               <a:rPr sz="1500" b="1">
@@ -30930,7 +30930,7 @@
                 <a:ea typeface="Noto Sans TC"/>
                 <a:cs typeface="Noto Sans TC"/>
               </a:rPr>
-              <a:t>影片：https://github.com/lin891020/aoi-agent/releases/tag/demo-2026-08-28</a:t>
+              <a:t>影片：https://github.com/lin891020/aoi-agent/releases/tag/demo-2026-09-07</a:t>
             </a:r>
           </a:p>
         </p:txBody>
@@ -46903,7 +46903,7 @@
         <p:spPr>
           <a:xfrm>
             <a:off x="457200" y="3227832"/>
-            <a:ext cx="1325880" cy="640080"/>
+            <a:ext cx="1325880" cy="923544"/>
           </a:xfrm>
           <a:prstGeom prst="rect">
             <a:avLst/>
@@ -46944,7 +46944,7 @@
         <p:spPr>
           <a:xfrm>
             <a:off x="1828800" y="3227832"/>
-            <a:ext cx="9875520" cy="640080"/>
+            <a:ext cx="9875520" cy="923544"/>
           </a:xfrm>
           <a:prstGeom prst="rect">
             <a:avLst/>
@@ -46971,7 +46971,7 @@
                 <a:ea typeface="Noto Sans TC"/>
                 <a:cs typeface="Noto Sans TC"/>
               </a:rPr>
-              <a:t>DeepPCB 每片都有黃金樣板、影像已二值化。gate_check.py 是 S</a:t>
+              <a:t>DeepPCB 每片都有 golden image、影像已二值化。gate_check.py 是 S</a:t>
             </a:r>
             <a:r>
               <a:rPr sz="1500" b="1">
@@ -47028,7 +47028,7 @@
         </p:nvSpPr>
         <p:spPr>
           <a:xfrm>
-            <a:off x="457200" y="3995928"/>
+            <a:off x="457200" y="4279392"/>
             <a:ext cx="1325880" cy="356616"/>
           </a:xfrm>
           <a:prstGeom prst="rect">
@@ -47069,7 +47069,7 @@
         </p:nvSpPr>
         <p:spPr>
           <a:xfrm>
-            <a:off x="1828800" y="3995928"/>
+            <a:off x="1828800" y="4279392"/>
             <a:ext cx="9875520" cy="356616"/>
           </a:xfrm>
           <a:prstGeom prst="rect">
@@ -47154,7 +47154,7 @@
         </p:nvSpPr>
         <p:spPr>
           <a:xfrm>
-            <a:off x="320040" y="4443984"/>
+            <a:off x="320040" y="4727448"/>
             <a:ext cx="11521440" cy="713232"/>
           </a:xfrm>
           <a:prstGeom prst="rect">
@@ -47198,7 +47198,7 @@
         </p:nvSpPr>
         <p:spPr>
           <a:xfrm>
-            <a:off x="457200" y="4480560"/>
+            <a:off x="457200" y="4764024"/>
             <a:ext cx="1325880" cy="640080"/>
           </a:xfrm>
           <a:prstGeom prst="rect">
@@ -47239,7 +47239,7 @@
         </p:nvSpPr>
         <p:spPr>
           <a:xfrm>
-            <a:off x="1828800" y="4480560"/>
+            <a:off x="1828800" y="4764024"/>
             <a:ext cx="9875520" cy="640080"/>
           </a:xfrm>
           <a:prstGeom prst="rect">
@@ -47346,7 +47346,7 @@
         </p:nvSpPr>
         <p:spPr>
           <a:xfrm>
-            <a:off x="320040" y="5212080"/>
+            <a:off x="320040" y="5495544"/>
             <a:ext cx="11521440" cy="429768"/>
           </a:xfrm>
           <a:prstGeom prst="rect">
@@ -47390,7 +47390,7 @@
         </p:nvSpPr>
         <p:spPr>
           <a:xfrm>
-            <a:off x="457200" y="5248656"/>
+            <a:off x="457200" y="5532120"/>
             <a:ext cx="1325880" cy="356616"/>
           </a:xfrm>
           <a:prstGeom prst="rect">
@@ -47431,7 +47431,7 @@
         </p:nvSpPr>
         <p:spPr>
           <a:xfrm>
-            <a:off x="1828800" y="5248656"/>
+            <a:off x="1828800" y="5532120"/>
             <a:ext cx="9875520" cy="356616"/>
           </a:xfrm>
           <a:prstGeom prst="rect">

--- a/docs/deck/aoi-agent-journey.zh-TW.pptx
+++ b/docs/deck/aoi-agent-journey.zh-TW.pptx
@@ -3979,7 +3979,7 @@
           </a:p>
           <a:p>
             <a:r>
-              <a:t>• 但它漏掉的 short 是 1.55%，預算的 3.1 倍；它放掉的瑕疵分數是 0.00007–0.00589，留下的中位數 1.000——兩堆不重疊，是有信心的錯</a:t>
+              <a:t>• 但它漏掉的 short，在出貨門檻 0.912 下是 1.77%、open 1.16%（08-31 之前讀在 0.961 那個點：short 1.55%、預算的 3.1 倍）；它放掉的瑕疵分數是 0.00007–0.00589，留下的中位數 1.000——兩堆不重疊，是有信心的錯</a:t>
             </a:r>
           </a:p>
           <a:p>
@@ -4000,7 +4000,7 @@
           </a:p>
           <a:p>
             <a:r>
-              <a:t>講稿 2. 左邊有樣板的線：複判器的分數本來就在回答「是不是誤報」，所以拿它排序排掉了 52.8% 的人工，尺是對的。可是它漏掉的 short 是預算的三倍，而且它放掉那些瑕疵的時候分數是 0.00007 到 0.00589，留下的中位數是 1.000——兩堆完全不重疊。</a:t>
+              <a:t>講稿 2. 左邊有樣板的線：複判器的分數本來就在回答「是不是誤報」，所以拿它排序排掉了 52.8% 的人工，尺是對的。可是它漏掉的 short 在 0.961 那個點是預算的三倍，出貨門檻下是 1.77%，而且它放掉那些瑕疵的時候分數是 0.00007 到 0.00589，留下的中位數是 1.000——兩堆完全不重疊。</a:t>
             </a:r>
           </a:p>
           <a:p>
@@ -38399,7 +38399,7 @@
                 <a:ea typeface="Noto Sans TC"/>
                 <a:cs typeface="Noto Sans TC"/>
               </a:rPr>
-              <a:t>電測：關掉 short 那 </a:t>
+              <a:t>電測：關掉 short、open 那 </a:t>
             </a:r>
             <a:r>
               <a:rPr sz="1800" b="1">
@@ -38410,7 +38410,7 @@
                 <a:ea typeface="Noto Sans TC"/>
                 <a:cs typeface="Noto Sans TC"/>
               </a:rPr>
-              <a:t>1.55%</a:t>
+              <a:t>1.77%</a:t>
             </a:r>
             <a:r>
               <a:rPr sz="1800" b="0">
@@ -38421,7 +38421,51 @@
                 <a:ea typeface="Noto Sans TC"/>
                 <a:cs typeface="Noto Sans TC"/>
               </a:rPr>
-              <a:t> 漏網的唯一方法，不在這個系統裡，WI-</a:t>
+              <a:t>、</a:t>
+            </a:r>
+            <a:r>
+              <a:rPr sz="1800" b="1">
+                <a:solidFill>
+                  <a:srgbClr val="6FC7CF"/>
+                </a:solidFill>
+                <a:latin typeface="Noto Sans TC"/>
+                <a:ea typeface="Noto Sans TC"/>
+                <a:cs typeface="Noto Sans TC"/>
+              </a:rPr>
+              <a:t>1.16%</a:t>
+            </a:r>
+            <a:r>
+              <a:rPr sz="1800" b="0">
+                <a:solidFill>
+                  <a:srgbClr val="E8E6E1"/>
+                </a:solidFill>
+                <a:latin typeface="Noto Sans TC"/>
+                <a:ea typeface="Noto Sans TC"/>
+                <a:cs typeface="Noto Sans TC"/>
+              </a:rPr>
+              <a:t> 漏網（出貨門檻 </a:t>
+            </a:r>
+            <a:r>
+              <a:rPr sz="1800" b="1">
+                <a:solidFill>
+                  <a:srgbClr val="6FC7CF"/>
+                </a:solidFill>
+                <a:latin typeface="Noto Sans TC"/>
+                <a:ea typeface="Noto Sans TC"/>
+                <a:cs typeface="Noto Sans TC"/>
+              </a:rPr>
+              <a:t>0.912</a:t>
+            </a:r>
+            <a:r>
+              <a:rPr sz="1800" b="0">
+                <a:solidFill>
+                  <a:srgbClr val="E8E6E1"/>
+                </a:solidFill>
+                <a:latin typeface="Noto Sans TC"/>
+                <a:ea typeface="Noto Sans TC"/>
+                <a:cs typeface="Noto Sans TC"/>
+              </a:rPr>
+              <a:t>）的唯一方法，不在這個系統裡，WI-</a:t>
             </a:r>
             <a:r>
               <a:rPr sz="1800" b="1">
